--- a/panel_control_TOP_P1/Panel_Control_TOP_P1.pptx
+++ b/panel_control_TOP_P1/Panel_Control_TOP_P1.pptx
@@ -322,7 +322,7 @@
                   <c:v>0</c:v>
                 </c:pt>
                 <c:pt idx="1">
-                  <c:v>5</c:v>
+                  <c:v>40</c:v>
                 </c:pt>
                 <c:pt idx="2">
                   <c:v>3</c:v>
@@ -412,7 +412,7 @@
                   <c:v>0</c:v>
                 </c:pt>
                 <c:pt idx="1">
-                  <c:v>36</c:v>
+                  <c:v>1</c:v>
                 </c:pt>
                 <c:pt idx="2">
                   <c:v>0</c:v>
@@ -631,96 +631,6 @@
               <c:strCache>
                 <c:ptCount val="1"/>
                 <c:pt idx="0">
-                  <c:v>Rechazada</c:v>
-                </c:pt>
-              </c:strCache>
-            </c:strRef>
-          </c:tx>
-          <c:spPr>
-            <a:solidFill>
-              <a:srgbClr val="C0392B"/>
-            </a:solidFill>
-            <a:effectLst/>
-          </c:spPr>
-          <c:invertIfNegative val="0"/>
-          <c:dLbls>
-            <c:numFmt formatCode="#,##0" sourceLinked="0"/>
-            <c:txPr>
-              <a:bodyPr/>
-              <a:lstStyle/>
-              <a:p>
-                <a:pPr>
-                  <a:defRPr b="1" i="0" strike="noStrike" sz="1000" u="none">
-                    <a:solidFill>
-                      <a:srgbClr val="FFFFFF"/>
-                    </a:solidFill>
-                    <a:latin typeface="Calibri"/>
-                  </a:defRPr>
-                </a:pPr>
-              </a:p>
-            </c:txPr>
-            <c:dLblPos val="ctr"/>
-            <c:showLegendKey val="0"/>
-            <c:showVal val="1"/>
-            <c:showCatName val="0"/>
-            <c:showSerName val="0"/>
-            <c:showPercent val="0"/>
-            <c:showBubbleSize val="0"/>
-            <c:showLeaderLines val="0"/>
-          </c:dLbls>
-          <c:cat>
-            <c:multiLvlStrRef>
-              <c:f>Sheet1!$A$2:$A$5</c:f>
-              <c:multiLvlStrCache>
-                <c:ptCount val="4"/>
-                <c:lvl>
-                  <c:pt idx="0">
-                    <c:v>2000</c:v>
-                  </c:pt>
-                  <c:pt idx="1">
-                    <c:v>3000</c:v>
-                  </c:pt>
-                  <c:pt idx="2">
-                    <c:v>4000</c:v>
-                  </c:pt>
-                  <c:pt idx="3">
-                    <c:v>8000</c:v>
-                  </c:pt>
-                </c:lvl>
-              </c:multiLvlStrCache>
-            </c:multiLvlStrRef>
-          </c:cat>
-          <c:val>
-            <c:numRef>
-              <c:f>Sheet1!$B$2:$B$5</c:f>
-              <c:numCache>
-                <c:formatCode>General</c:formatCode>
-                <c:ptCount val="4"/>
-                <c:pt idx="0">
-                  <c:v>2</c:v>
-                </c:pt>
-                <c:pt idx="1">
-                  <c:v>6</c:v>
-                </c:pt>
-                <c:pt idx="2">
-                  <c:v>0</c:v>
-                </c:pt>
-                <c:pt idx="3">
-                  <c:v>0</c:v>
-                </c:pt>
-              </c:numCache>
-            </c:numRef>
-          </c:val>
-        </c:ser>
-        <c:ser>
-          <c:idx val="1"/>
-          <c:order val="1"/>
-          <c:tx>
-            <c:strRef>
-              <c:f>Sheet1!$C$1</c:f>
-              <c:strCache>
-                <c:ptCount val="1"/>
-                <c:pt idx="0">
                   <c:v>En revisión</c:v>
                 </c:pt>
               </c:strCache>
@@ -782,18 +692,18 @@
           </c:cat>
           <c:val>
             <c:numRef>
-              <c:f>Sheet1!$C$2:$C$5</c:f>
+              <c:f>Sheet1!$B$2:$B$5</c:f>
               <c:numCache>
                 <c:formatCode>General</c:formatCode>
                 <c:ptCount val="4"/>
                 <c:pt idx="0">
-                  <c:v>15</c:v>
+                  <c:v>14</c:v>
                 </c:pt>
                 <c:pt idx="1">
-                  <c:v>1</c:v>
+                  <c:v>0</c:v>
                 </c:pt>
                 <c:pt idx="2">
-                  <c:v>1</c:v>
+                  <c:v>0</c:v>
                 </c:pt>
                 <c:pt idx="3">
                   <c:v>0</c:v>
@@ -803,11 +713,11 @@
           </c:val>
         </c:ser>
         <c:ser>
-          <c:idx val="2"/>
-          <c:order val="2"/>
+          <c:idx val="1"/>
+          <c:order val="1"/>
           <c:tx>
             <c:strRef>
-              <c:f>Sheet1!$D$1</c:f>
+              <c:f>Sheet1!$C$1</c:f>
               <c:strCache>
                 <c:ptCount val="1"/>
                 <c:pt idx="0">
@@ -872,7 +782,7 @@
           </c:cat>
           <c:val>
             <c:numRef>
-              <c:f>Sheet1!$D$2:$D$5</c:f>
+              <c:f>Sheet1!$C$2:$C$5</c:f>
               <c:numCache>
                 <c:formatCode>General</c:formatCode>
                 <c:ptCount val="4"/>
@@ -884,6 +794,96 @@
                 </c:pt>
                 <c:pt idx="2">
                   <c:v>0</c:v>
+                </c:pt>
+                <c:pt idx="3">
+                  <c:v>0</c:v>
+                </c:pt>
+              </c:numCache>
+            </c:numRef>
+          </c:val>
+        </c:ser>
+        <c:ser>
+          <c:idx val="2"/>
+          <c:order val="2"/>
+          <c:tx>
+            <c:strRef>
+              <c:f>Sheet1!$D$1</c:f>
+              <c:strCache>
+                <c:ptCount val="1"/>
+                <c:pt idx="0">
+                  <c:v>Rechazada</c:v>
+                </c:pt>
+              </c:strCache>
+            </c:strRef>
+          </c:tx>
+          <c:spPr>
+            <a:solidFill>
+              <a:srgbClr val="C0392B"/>
+            </a:solidFill>
+            <a:effectLst/>
+          </c:spPr>
+          <c:invertIfNegative val="0"/>
+          <c:dLbls>
+            <c:numFmt formatCode="#,##0" sourceLinked="0"/>
+            <c:txPr>
+              <a:bodyPr/>
+              <a:lstStyle/>
+              <a:p>
+                <a:pPr>
+                  <a:defRPr b="1" i="0" strike="noStrike" sz="1000" u="none">
+                    <a:solidFill>
+                      <a:srgbClr val="FFFFFF"/>
+                    </a:solidFill>
+                    <a:latin typeface="Calibri"/>
+                  </a:defRPr>
+                </a:pPr>
+              </a:p>
+            </c:txPr>
+            <c:dLblPos val="ctr"/>
+            <c:showLegendKey val="0"/>
+            <c:showVal val="1"/>
+            <c:showCatName val="0"/>
+            <c:showSerName val="0"/>
+            <c:showPercent val="0"/>
+            <c:showBubbleSize val="0"/>
+            <c:showLeaderLines val="0"/>
+          </c:dLbls>
+          <c:cat>
+            <c:multiLvlStrRef>
+              <c:f>Sheet1!$A$2:$A$5</c:f>
+              <c:multiLvlStrCache>
+                <c:ptCount val="4"/>
+                <c:lvl>
+                  <c:pt idx="0">
+                    <c:v>2000</c:v>
+                  </c:pt>
+                  <c:pt idx="1">
+                    <c:v>3000</c:v>
+                  </c:pt>
+                  <c:pt idx="2">
+                    <c:v>4000</c:v>
+                  </c:pt>
+                  <c:pt idx="3">
+                    <c:v>8000</c:v>
+                  </c:pt>
+                </c:lvl>
+              </c:multiLvlStrCache>
+            </c:multiLvlStrRef>
+          </c:cat>
+          <c:val>
+            <c:numRef>
+              <c:f>Sheet1!$D$2:$D$5</c:f>
+              <c:numCache>
+                <c:formatCode>General</c:formatCode>
+                <c:ptCount val="4"/>
+                <c:pt idx="0">
+                  <c:v>4</c:v>
+                </c:pt>
+                <c:pt idx="1">
+                  <c:v>7</c:v>
+                </c:pt>
+                <c:pt idx="2">
+                  <c:v>1</c:v>
                 </c:pt>
                 <c:pt idx="3">
                   <c:v>0</c:v>
@@ -967,7 +967,7 @@
                 <c:formatCode>General</c:formatCode>
                 <c:ptCount val="4"/>
                 <c:pt idx="0">
-                  <c:v>18</c:v>
+                  <c:v>17</c:v>
                 </c:pt>
                 <c:pt idx="1">
                   <c:v>68</c:v>
@@ -1270,7 +1270,7 @@
                   <c:v>128</c:v>
                 </c:pt>
                 <c:pt idx="3">
-                  <c:v>84</c:v>
+                  <c:v>88</c:v>
                 </c:pt>
                 <c:pt idx="4">
                   <c:v>17</c:v>
@@ -1372,7 +1372,7 @@
                   <c:v>53</c:v>
                 </c:pt>
                 <c:pt idx="3">
-                  <c:v>42</c:v>
+                  <c:v>38</c:v>
                 </c:pt>
                 <c:pt idx="4">
                   <c:v>19</c:v>
@@ -1740,7 +1740,7 @@
                   <c:v>Abiertos</c:v>
                 </c:pt>
                 <c:pt idx="2">
-                  <c:v>Listo p/ revisión</c:v>
+                  <c:v>En trámite</c:v>
                 </c:pt>
               </c:strCache>
             </c:strRef>
@@ -1751,13 +1751,13 @@
               <c:numCache>
                 <c:ptCount val="3"/>
                 <c:pt idx="0">
-                  <c:v>1147</c:v>
+                  <c:v>1148</c:v>
                 </c:pt>
                 <c:pt idx="1">
                   <c:v>830</c:v>
                 </c:pt>
                 <c:pt idx="2">
-                  <c:v>11</c:v>
+                  <c:v>10</c:v>
                 </c:pt>
               </c:numCache>
             </c:numRef>
@@ -3096,26 +3096,6 @@
         </p:nvSpPr>
         <p:spPr>
           <a:xfrm>
-            <a:off x="0" y="0"/>
-            <a:ext cx="12191695" cy="6858000"/>
-          </a:xfrm>
-          <a:prstGeom prst="rect">
-            <a:avLst/>
-          </a:prstGeom>
-          <a:solidFill>
-            <a:srgbClr val="12233B"/>
-          </a:solidFill>
-          <a:ln/>
-        </p:spPr>
-      </p:sp>
-      <p:sp>
-        <p:nvSpPr>
-          <p:cNvPr id="3" name="Shape 1"/>
-          <p:cNvSpPr/>
-          <p:nvPr/>
-        </p:nvSpPr>
-        <p:spPr>
-          <a:xfrm>
             <a:off x="10058400" y="-1463040"/>
             <a:ext cx="3840480" cy="3840480"/>
           </a:xfrm>
@@ -3130,7 +3110,7 @@
       </p:sp>
       <p:sp>
         <p:nvSpPr>
-          <p:cNvPr id="4" name="Shape 2"/>
+          <p:cNvPr id="3" name="Shape 1"/>
           <p:cNvSpPr/>
           <p:nvPr/>
         </p:nvSpPr>
@@ -3150,7 +3130,7 @@
       </p:sp>
       <p:sp>
         <p:nvSpPr>
-          <p:cNvPr id="5" name="Shape 3"/>
+          <p:cNvPr id="4" name="Shape 2"/>
           <p:cNvSpPr/>
           <p:nvPr/>
         </p:nvSpPr>
@@ -3170,7 +3150,7 @@
       </p:sp>
       <p:sp>
         <p:nvSpPr>
-          <p:cNvPr id="6" name="Text 4"/>
+          <p:cNvPr id="5" name="Text 3"/>
           <p:cNvSpPr/>
           <p:nvPr/>
         </p:nvSpPr>
@@ -3209,7 +3189,7 @@
       </p:sp>
       <p:sp>
         <p:nvSpPr>
-          <p:cNvPr id="7" name="Text 5"/>
+          <p:cNvPr id="6" name="Text 4"/>
           <p:cNvSpPr/>
           <p:nvPr/>
         </p:nvSpPr>
@@ -3271,7 +3251,7 @@
       </p:sp>
       <p:sp>
         <p:nvSpPr>
-          <p:cNvPr id="8" name="Text 6"/>
+          <p:cNvPr id="7" name="Text 5"/>
           <p:cNvSpPr/>
           <p:nvPr/>
         </p:nvSpPr>
@@ -3313,7 +3293,7 @@
       </p:sp>
       <p:sp>
         <p:nvSpPr>
-          <p:cNvPr id="9" name="Text 7"/>
+          <p:cNvPr id="8" name="Text 6"/>
           <p:cNvSpPr/>
           <p:nvPr/>
         </p:nvSpPr>
@@ -3332,7 +3312,7 @@
           <a:bodyPr wrap="square" lIns="0" tIns="0" rIns="0" bIns="0" rtlCol="0" anchor="ctr"/>
           <a:lstStyle/>
           <a:p>
-            <a:pPr algn="l" indent="0" marL="0">
+            <a:pPr indent="0" marL="0">
               <a:buNone/>
             </a:pPr>
             <a:r>
@@ -3352,7 +3332,7 @@
       </p:sp>
       <p:sp>
         <p:nvSpPr>
-          <p:cNvPr id="10" name="Text 8"/>
+          <p:cNvPr id="9" name="Text 7"/>
           <p:cNvSpPr/>
           <p:nvPr/>
         </p:nvSpPr>
@@ -3371,7 +3351,7 @@
           <a:bodyPr wrap="square" lIns="0" tIns="0" rIns="0" bIns="0" rtlCol="0" anchor="ctr"/>
           <a:lstStyle/>
           <a:p>
-            <a:pPr algn="l" indent="0" marL="0">
+            <a:pPr indent="0" marL="0">
               <a:buNone/>
             </a:pPr>
             <a:r>
@@ -3391,7 +3371,7 @@
       </p:sp>
       <p:sp>
         <p:nvSpPr>
-          <p:cNvPr id="11" name="Text 9"/>
+          <p:cNvPr id="10" name="Text 8"/>
           <p:cNvSpPr/>
           <p:nvPr/>
         </p:nvSpPr>
@@ -3410,7 +3390,7 @@
           <a:bodyPr wrap="square" lIns="0" tIns="0" rIns="0" bIns="0" rtlCol="0" anchor="ctr"/>
           <a:lstStyle/>
           <a:p>
-            <a:pPr algn="l" indent="0" marL="0">
+            <a:pPr indent="0" marL="0">
               <a:buNone/>
             </a:pPr>
             <a:r>
@@ -3430,7 +3410,7 @@
       </p:sp>
       <p:sp>
         <p:nvSpPr>
-          <p:cNvPr id="12" name="Text 10"/>
+          <p:cNvPr id="11" name="Text 9"/>
           <p:cNvSpPr/>
           <p:nvPr/>
         </p:nvSpPr>
@@ -3449,7 +3429,7 @@
           <a:bodyPr wrap="square" lIns="0" tIns="0" rIns="0" bIns="0" rtlCol="0" anchor="ctr"/>
           <a:lstStyle/>
           <a:p>
-            <a:pPr algn="l" indent="0" marL="0">
+            <a:pPr indent="0" marL="0">
               <a:buNone/>
             </a:pPr>
             <a:r>
@@ -3469,7 +3449,7 @@
       </p:sp>
       <p:sp>
         <p:nvSpPr>
-          <p:cNvPr id="13" name="Text 11"/>
+          <p:cNvPr id="12" name="Text 10"/>
           <p:cNvSpPr/>
           <p:nvPr/>
         </p:nvSpPr>
@@ -3488,7 +3468,7 @@
           <a:bodyPr wrap="square" lIns="0" tIns="0" rIns="0" bIns="0" rtlCol="0" anchor="ctr"/>
           <a:lstStyle/>
           <a:p>
-            <a:pPr algn="l" indent="0" marL="0">
+            <a:pPr indent="0" marL="0">
               <a:buNone/>
             </a:pPr>
             <a:r>
@@ -3500,7 +3480,7 @@
                 <a:ea typeface="Cambria" pitchFamily="34" charset="-122"/>
                 <a:cs typeface="Cambria" pitchFamily="34" charset="-120"/>
               </a:rPr>
-              <a:t>19,3%</a:t>
+              <a:t>20%</a:t>
             </a:r>
             <a:endParaRPr lang="en-US" sz="3400" dirty="0"/>
           </a:p>
@@ -3508,7 +3488,7 @@
       </p:sp>
       <p:sp>
         <p:nvSpPr>
-          <p:cNvPr id="14" name="Text 12"/>
+          <p:cNvPr id="13" name="Text 11"/>
           <p:cNvSpPr/>
           <p:nvPr/>
         </p:nvSpPr>
@@ -3527,7 +3507,7 @@
           <a:bodyPr wrap="square" lIns="0" tIns="0" rIns="0" bIns="0" rtlCol="0" anchor="ctr"/>
           <a:lstStyle/>
           <a:p>
-            <a:pPr algn="l" indent="0" marL="0">
+            <a:pPr indent="0" marL="0">
               <a:buNone/>
             </a:pPr>
             <a:r>
@@ -3547,7 +3527,7 @@
       </p:sp>
       <p:sp>
         <p:nvSpPr>
-          <p:cNvPr id="15" name="Text 13"/>
+          <p:cNvPr id="14" name="Text 12"/>
           <p:cNvSpPr/>
           <p:nvPr/>
         </p:nvSpPr>
@@ -3566,7 +3546,7 @@
           <a:bodyPr wrap="square" lIns="0" tIns="0" rIns="0" bIns="0" rtlCol="0" anchor="ctr"/>
           <a:lstStyle/>
           <a:p>
-            <a:pPr algn="l" indent="0" marL="0">
+            <a:pPr indent="0" marL="0">
               <a:buNone/>
             </a:pPr>
             <a:r>
@@ -3586,7 +3566,7 @@
       </p:sp>
       <p:sp>
         <p:nvSpPr>
-          <p:cNvPr id="16" name="Text 14"/>
+          <p:cNvPr id="15" name="Text 13"/>
           <p:cNvSpPr/>
           <p:nvPr/>
         </p:nvSpPr>
@@ -3605,7 +3585,7 @@
           <a:bodyPr wrap="square" lIns="0" tIns="0" rIns="0" bIns="0" rtlCol="0" anchor="ctr"/>
           <a:lstStyle/>
           <a:p>
-            <a:pPr algn="l" indent="0" marL="0">
+            <a:pPr indent="0" marL="0">
               <a:buNone/>
             </a:pPr>
             <a:r>
@@ -3625,14 +3605,14 @@
       </p:sp>
       <p:sp>
         <p:nvSpPr>
-          <p:cNvPr id="17" name="Text 15"/>
+          <p:cNvPr id="16" name="Text 14"/>
           <p:cNvSpPr/>
           <p:nvPr/>
         </p:nvSpPr>
         <p:spPr>
           <a:xfrm>
             <a:off x="777240" y="6172200"/>
-            <a:ext cx="5486400" cy="274320"/>
+            <a:ext cx="7315200" cy="274320"/>
           </a:xfrm>
           <a:prstGeom prst="rect">
             <a:avLst/>
@@ -3656,7 +3636,7 @@
                 <a:ea typeface="Calibri" pitchFamily="34" charset="-122"/>
                 <a:cs typeface="Calibri" pitchFamily="34" charset="-120"/>
               </a:rPr>
-              <a:t>Corte: 16 de julio de 2026</a:t>
+              <a:t>Corte: 26-07-2026   ·   Corte anterior: 16-07-2026</a:t>
             </a:r>
             <a:endParaRPr lang="en-US" sz="1100" dirty="0"/>
           </a:p>
@@ -3781,11 +3761,11 @@
         <p:spPr>
           <a:xfrm>
             <a:off x="457200" y="1463040"/>
-            <a:ext cx="2743200" cy="2148840"/>
+            <a:ext cx="2743200" cy="2395728"/>
           </a:xfrm>
           <a:prstGeom prst="roundRect">
             <a:avLst>
-              <a:gd name="adj" fmla="val 3404"/>
+              <a:gd name="adj" fmla="val 3053"/>
             </a:avLst>
           </a:prstGeom>
           <a:solidFill>
@@ -3814,7 +3794,7 @@
         </p:nvSpPr>
         <p:spPr>
           <a:xfrm>
-            <a:off x="713232" y="1737360"/>
+            <a:off x="713232" y="1719072"/>
             <a:ext cx="146304" cy="146304"/>
           </a:xfrm>
           <a:prstGeom prst="ellipse">
@@ -3834,20 +3814,20 @@
         </p:nvSpPr>
         <p:spPr>
           <a:xfrm>
-            <a:off x="713232" y="1965960"/>
-            <a:ext cx="2286000" cy="777240"/>
-          </a:xfrm>
-          <a:prstGeom prst="rect">
-            <a:avLst/>
-          </a:prstGeom>
-          <a:noFill/>
-          <a:ln/>
-        </p:spPr>
-        <p:txBody>
-          <a:bodyPr wrap="square" lIns="0" tIns="0" rIns="0" bIns="0" rtlCol="0" anchor="ctr"/>
-          <a:lstStyle/>
-          <a:p>
-            <a:pPr algn="l" indent="0" marL="0">
+            <a:off x="713232" y="1938528"/>
+            <a:ext cx="2286000" cy="749808"/>
+          </a:xfrm>
+          <a:prstGeom prst="rect">
+            <a:avLst/>
+          </a:prstGeom>
+          <a:noFill/>
+          <a:ln/>
+        </p:spPr>
+        <p:txBody>
+          <a:bodyPr wrap="square" lIns="0" tIns="0" rIns="0" bIns="0" rtlCol="0" anchor="ctr"/>
+          <a:lstStyle/>
+          <a:p>
+            <a:pPr indent="0" marL="0">
               <a:buNone/>
             </a:pPr>
             <a:r>
@@ -3873,20 +3853,20 @@
         </p:nvSpPr>
         <p:spPr>
           <a:xfrm>
-            <a:off x="731520" y="2743200"/>
-            <a:ext cx="2286000" cy="320040"/>
-          </a:xfrm>
-          <a:prstGeom prst="rect">
-            <a:avLst/>
-          </a:prstGeom>
-          <a:noFill/>
-          <a:ln/>
-        </p:spPr>
-        <p:txBody>
-          <a:bodyPr wrap="square" lIns="0" tIns="0" rIns="0" bIns="0" rtlCol="0" anchor="ctr"/>
-          <a:lstStyle/>
-          <a:p>
-            <a:pPr algn="l" indent="0" marL="0">
+            <a:off x="731520" y="2697480"/>
+            <a:ext cx="2286000" cy="292608"/>
+          </a:xfrm>
+          <a:prstGeom prst="rect">
+            <a:avLst/>
+          </a:prstGeom>
+          <a:noFill/>
+          <a:ln/>
+        </p:spPr>
+        <p:txBody>
+          <a:bodyPr wrap="square" lIns="0" tIns="0" rIns="0" bIns="0" rtlCol="0" anchor="ctr"/>
+          <a:lstStyle/>
+          <a:p>
+            <a:pPr indent="0" marL="0">
               <a:buNone/>
             </a:pPr>
             <a:r>
@@ -3912,20 +3892,20 @@
         </p:nvSpPr>
         <p:spPr>
           <a:xfrm>
-            <a:off x="731520" y="3072384"/>
-            <a:ext cx="2240280" cy="320040"/>
-          </a:xfrm>
-          <a:prstGeom prst="rect">
-            <a:avLst/>
-          </a:prstGeom>
-          <a:noFill/>
-          <a:ln/>
-        </p:spPr>
-        <p:txBody>
-          <a:bodyPr wrap="square" lIns="0" tIns="0" rIns="0" bIns="0" rtlCol="0" anchor="ctr"/>
-          <a:lstStyle/>
-          <a:p>
-            <a:pPr algn="l" indent="0" marL="0">
+            <a:off x="731520" y="2999232"/>
+            <a:ext cx="2240280" cy="292608"/>
+          </a:xfrm>
+          <a:prstGeom prst="rect">
+            <a:avLst/>
+          </a:prstGeom>
+          <a:noFill/>
+          <a:ln/>
+        </p:spPr>
+        <p:txBody>
+          <a:bodyPr wrap="square" lIns="0" tIns="0" rIns="0" bIns="0" rtlCol="0" anchor="ctr"/>
+          <a:lstStyle/>
+          <a:p>
+            <a:pPr indent="0" marL="0">
               <a:buNone/>
             </a:pPr>
             <a:r>
@@ -3951,7 +3931,7 @@
         </p:nvSpPr>
         <p:spPr>
           <a:xfrm>
-            <a:off x="731520" y="3346704"/>
+            <a:off x="731520" y="3291840"/>
             <a:ext cx="2240280" cy="256032"/>
           </a:xfrm>
           <a:prstGeom prst="rect">
@@ -3964,7 +3944,7 @@
           <a:bodyPr wrap="square" lIns="0" tIns="0" rIns="0" bIns="0" rtlCol="0" anchor="ctr"/>
           <a:lstStyle/>
           <a:p>
-            <a:pPr algn="l" indent="0" marL="0">
+            <a:pPr indent="0" marL="0">
               <a:buNone/>
             </a:pPr>
             <a:r>
@@ -3991,11 +3971,11 @@
         <p:spPr>
           <a:xfrm>
             <a:off x="3319272" y="1463040"/>
-            <a:ext cx="2743200" cy="2148840"/>
+            <a:ext cx="2743200" cy="2395728"/>
           </a:xfrm>
           <a:prstGeom prst="roundRect">
             <a:avLst>
-              <a:gd name="adj" fmla="val 3404"/>
+              <a:gd name="adj" fmla="val 3053"/>
             </a:avLst>
           </a:prstGeom>
           <a:solidFill>
@@ -4024,7 +4004,7 @@
         </p:nvSpPr>
         <p:spPr>
           <a:xfrm>
-            <a:off x="3575304" y="1737360"/>
+            <a:off x="3575304" y="1719072"/>
             <a:ext cx="146304" cy="146304"/>
           </a:xfrm>
           <a:prstGeom prst="ellipse">
@@ -4044,20 +4024,20 @@
         </p:nvSpPr>
         <p:spPr>
           <a:xfrm>
-            <a:off x="3575304" y="1965960"/>
-            <a:ext cx="2286000" cy="777240"/>
-          </a:xfrm>
-          <a:prstGeom prst="rect">
-            <a:avLst/>
-          </a:prstGeom>
-          <a:noFill/>
-          <a:ln/>
-        </p:spPr>
-        <p:txBody>
-          <a:bodyPr wrap="square" lIns="0" tIns="0" rIns="0" bIns="0" rtlCol="0" anchor="ctr"/>
-          <a:lstStyle/>
-          <a:p>
-            <a:pPr algn="l" indent="0" marL="0">
+            <a:off x="3575304" y="1938528"/>
+            <a:ext cx="2286000" cy="749808"/>
+          </a:xfrm>
+          <a:prstGeom prst="rect">
+            <a:avLst/>
+          </a:prstGeom>
+          <a:noFill/>
+          <a:ln/>
+        </p:spPr>
+        <p:txBody>
+          <a:bodyPr wrap="square" lIns="0" tIns="0" rIns="0" bIns="0" rtlCol="0" anchor="ctr"/>
+          <a:lstStyle/>
+          <a:p>
+            <a:pPr indent="0" marL="0">
               <a:buNone/>
             </a:pPr>
             <a:r>
@@ -4083,20 +4063,20 @@
         </p:nvSpPr>
         <p:spPr>
           <a:xfrm>
-            <a:off x="3593592" y="2743200"/>
-            <a:ext cx="2286000" cy="320040"/>
-          </a:xfrm>
-          <a:prstGeom prst="rect">
-            <a:avLst/>
-          </a:prstGeom>
-          <a:noFill/>
-          <a:ln/>
-        </p:spPr>
-        <p:txBody>
-          <a:bodyPr wrap="square" lIns="0" tIns="0" rIns="0" bIns="0" rtlCol="0" anchor="ctr"/>
-          <a:lstStyle/>
-          <a:p>
-            <a:pPr algn="l" indent="0" marL="0">
+            <a:off x="3593592" y="2697480"/>
+            <a:ext cx="2286000" cy="292608"/>
+          </a:xfrm>
+          <a:prstGeom prst="rect">
+            <a:avLst/>
+          </a:prstGeom>
+          <a:noFill/>
+          <a:ln/>
+        </p:spPr>
+        <p:txBody>
+          <a:bodyPr wrap="square" lIns="0" tIns="0" rIns="0" bIns="0" rtlCol="0" anchor="ctr"/>
+          <a:lstStyle/>
+          <a:p>
+            <a:pPr indent="0" marL="0">
               <a:buNone/>
             </a:pPr>
             <a:r>
@@ -4122,20 +4102,20 @@
         </p:nvSpPr>
         <p:spPr>
           <a:xfrm>
-            <a:off x="3593592" y="3072384"/>
-            <a:ext cx="2240280" cy="320040"/>
-          </a:xfrm>
-          <a:prstGeom prst="rect">
-            <a:avLst/>
-          </a:prstGeom>
-          <a:noFill/>
-          <a:ln/>
-        </p:spPr>
-        <p:txBody>
-          <a:bodyPr wrap="square" lIns="0" tIns="0" rIns="0" bIns="0" rtlCol="0" anchor="ctr"/>
-          <a:lstStyle/>
-          <a:p>
-            <a:pPr algn="l" indent="0" marL="0">
+            <a:off x="3593592" y="2999232"/>
+            <a:ext cx="2240280" cy="292608"/>
+          </a:xfrm>
+          <a:prstGeom prst="rect">
+            <a:avLst/>
+          </a:prstGeom>
+          <a:noFill/>
+          <a:ln/>
+        </p:spPr>
+        <p:txBody>
+          <a:bodyPr wrap="square" lIns="0" tIns="0" rIns="0" bIns="0" rtlCol="0" anchor="ctr"/>
+          <a:lstStyle/>
+          <a:p>
+            <a:pPr indent="0" marL="0">
               <a:buNone/>
             </a:pPr>
             <a:r>
@@ -4161,7 +4141,7 @@
         </p:nvSpPr>
         <p:spPr>
           <a:xfrm>
-            <a:off x="3593592" y="3346704"/>
+            <a:off x="3593592" y="3291840"/>
             <a:ext cx="2240280" cy="256032"/>
           </a:xfrm>
           <a:prstGeom prst="rect">
@@ -4174,7 +4154,7 @@
           <a:bodyPr wrap="square" lIns="0" tIns="0" rIns="0" bIns="0" rtlCol="0" anchor="ctr"/>
           <a:lstStyle/>
           <a:p>
-            <a:pPr algn="l" indent="0" marL="0">
+            <a:pPr indent="0" marL="0">
               <a:buNone/>
             </a:pPr>
             <a:r>
@@ -4186,7 +4166,7 @@
                 <a:ea typeface="Calibri" pitchFamily="34" charset="-122"/>
                 <a:cs typeface="Calibri" pitchFamily="34" charset="-120"/>
               </a:rPr>
-              <a:t>45 pendientes · 41 en área 3000</a:t>
+              <a:t>44 próximas · 1 por programar</a:t>
             </a:r>
             <a:endParaRPr lang="en-US" sz="950" dirty="0"/>
           </a:p>
@@ -4194,18 +4174,57 @@
       </p:sp>
       <p:sp>
         <p:nvSpPr>
-          <p:cNvPr id="16" name="Shape 14"/>
+          <p:cNvPr id="16" name="Text 14"/>
+          <p:cNvSpPr/>
+          <p:nvPr/>
+        </p:nvSpPr>
+        <p:spPr>
+          <a:xfrm>
+            <a:off x="3593592" y="3557016"/>
+            <a:ext cx="2240280" cy="237744"/>
+          </a:xfrm>
+          <a:prstGeom prst="rect">
+            <a:avLst/>
+          </a:prstGeom>
+          <a:noFill/>
+          <a:ln/>
+        </p:spPr>
+        <p:txBody>
+          <a:bodyPr wrap="square" lIns="0" tIns="0" rIns="0" bIns="0" rtlCol="0" anchor="ctr"/>
+          <a:lstStyle/>
+          <a:p>
+            <a:pPr indent="0" marL="0">
+              <a:buNone/>
+            </a:pPr>
+            <a:r>
+              <a:rPr lang="en-US" sz="900" b="1" dirty="0">
+                <a:solidFill>
+                  <a:srgbClr val="56606E"/>
+                </a:solidFill>
+                <a:latin typeface="Calibri" pitchFamily="34" charset="0"/>
+                <a:ea typeface="Calibri" pitchFamily="34" charset="-122"/>
+                <a:cs typeface="Calibri" pitchFamily="34" charset="-120"/>
+              </a:rPr>
+              <a:t>= sin cambio vs. corte anterior</a:t>
+            </a:r>
+            <a:endParaRPr lang="en-US" sz="900" dirty="0"/>
+          </a:p>
+        </p:txBody>
+      </p:sp>
+      <p:sp>
+        <p:nvSpPr>
+          <p:cNvPr id="17" name="Shape 15"/>
           <p:cNvSpPr/>
           <p:nvPr/>
         </p:nvSpPr>
         <p:spPr>
           <a:xfrm>
             <a:off x="6181344" y="1463040"/>
-            <a:ext cx="2743200" cy="2148840"/>
+            <a:ext cx="2743200" cy="2395728"/>
           </a:xfrm>
           <a:prstGeom prst="roundRect">
             <a:avLst>
-              <a:gd name="adj" fmla="val 3404"/>
+              <a:gd name="adj" fmla="val 3053"/>
             </a:avLst>
           </a:prstGeom>
           <a:solidFill>
@@ -4228,13 +4247,13 @@
       </p:sp>
       <p:sp>
         <p:nvSpPr>
-          <p:cNvPr id="17" name="Shape 15"/>
-          <p:cNvSpPr/>
-          <p:nvPr/>
-        </p:nvSpPr>
-        <p:spPr>
-          <a:xfrm>
-            <a:off x="6437376" y="1737360"/>
+          <p:cNvPr id="18" name="Shape 16"/>
+          <p:cNvSpPr/>
+          <p:nvPr/>
+        </p:nvSpPr>
+        <p:spPr>
+          <a:xfrm>
+            <a:off x="6437376" y="1719072"/>
             <a:ext cx="146304" cy="146304"/>
           </a:xfrm>
           <a:prstGeom prst="ellipse">
@@ -4248,26 +4267,26 @@
       </p:sp>
       <p:sp>
         <p:nvSpPr>
-          <p:cNvPr id="18" name="Text 16"/>
-          <p:cNvSpPr/>
-          <p:nvPr/>
-        </p:nvSpPr>
-        <p:spPr>
-          <a:xfrm>
-            <a:off x="6437376" y="1965960"/>
-            <a:ext cx="2286000" cy="777240"/>
-          </a:xfrm>
-          <a:prstGeom prst="rect">
-            <a:avLst/>
-          </a:prstGeom>
-          <a:noFill/>
-          <a:ln/>
-        </p:spPr>
-        <p:txBody>
-          <a:bodyPr wrap="square" lIns="0" tIns="0" rIns="0" bIns="0" rtlCol="0" anchor="ctr"/>
-          <a:lstStyle/>
-          <a:p>
-            <a:pPr algn="l" indent="0" marL="0">
+          <p:cNvPr id="19" name="Text 17"/>
+          <p:cNvSpPr/>
+          <p:nvPr/>
+        </p:nvSpPr>
+        <p:spPr>
+          <a:xfrm>
+            <a:off x="6437376" y="1938528"/>
+            <a:ext cx="2286000" cy="749808"/>
+          </a:xfrm>
+          <a:prstGeom prst="rect">
+            <a:avLst/>
+          </a:prstGeom>
+          <a:noFill/>
+          <a:ln/>
+        </p:spPr>
+        <p:txBody>
+          <a:bodyPr wrap="square" lIns="0" tIns="0" rIns="0" bIns="0" rtlCol="0" anchor="ctr"/>
+          <a:lstStyle/>
+          <a:p>
+            <a:pPr indent="0" marL="0">
               <a:buNone/>
             </a:pPr>
             <a:r>
@@ -4279,7 +4298,7 @@
                 <a:ea typeface="Cambria" pitchFamily="34" charset="-122"/>
                 <a:cs typeface="Cambria" pitchFamily="34" charset="-120"/>
               </a:rPr>
-              <a:t>19,3%</a:t>
+              <a:t>20%</a:t>
             </a:r>
             <a:endParaRPr lang="en-US" sz="4000" dirty="0"/>
           </a:p>
@@ -4287,26 +4306,26 @@
       </p:sp>
       <p:sp>
         <p:nvSpPr>
-          <p:cNvPr id="19" name="Text 17"/>
-          <p:cNvSpPr/>
-          <p:nvPr/>
-        </p:nvSpPr>
-        <p:spPr>
-          <a:xfrm>
-            <a:off x="6455664" y="2743200"/>
-            <a:ext cx="2286000" cy="320040"/>
-          </a:xfrm>
-          <a:prstGeom prst="rect">
-            <a:avLst/>
-          </a:prstGeom>
-          <a:noFill/>
-          <a:ln/>
-        </p:spPr>
-        <p:txBody>
-          <a:bodyPr wrap="square" lIns="0" tIns="0" rIns="0" bIns="0" rtlCol="0" anchor="ctr"/>
-          <a:lstStyle/>
-          <a:p>
-            <a:pPr algn="l" indent="0" marL="0">
+          <p:cNvPr id="20" name="Text 18"/>
+          <p:cNvSpPr/>
+          <p:nvPr/>
+        </p:nvSpPr>
+        <p:spPr>
+          <a:xfrm>
+            <a:off x="6455664" y="2697480"/>
+            <a:ext cx="2286000" cy="292608"/>
+          </a:xfrm>
+          <a:prstGeom prst="rect">
+            <a:avLst/>
+          </a:prstGeom>
+          <a:noFill/>
+          <a:ln/>
+        </p:spPr>
+        <p:txBody>
+          <a:bodyPr wrap="square" lIns="0" tIns="0" rIns="0" bIns="0" rtlCol="0" anchor="ctr"/>
+          <a:lstStyle/>
+          <a:p>
+            <a:pPr indent="0" marL="0">
               <a:buNone/>
             </a:pPr>
             <a:r>
@@ -4318,7 +4337,7 @@
                 <a:ea typeface="Calibri" pitchFamily="34" charset="-122"/>
                 <a:cs typeface="Calibri" pitchFamily="34" charset="-120"/>
               </a:rPr>
-              <a:t>26/135</a:t>
+              <a:t>27/135</a:t>
             </a:r>
             <a:endParaRPr lang="en-US" sz="1400" dirty="0"/>
           </a:p>
@@ -4326,26 +4345,26 @@
       </p:sp>
       <p:sp>
         <p:nvSpPr>
-          <p:cNvPr id="20" name="Text 18"/>
-          <p:cNvSpPr/>
-          <p:nvPr/>
-        </p:nvSpPr>
-        <p:spPr>
-          <a:xfrm>
-            <a:off x="6455664" y="3072384"/>
-            <a:ext cx="2240280" cy="320040"/>
-          </a:xfrm>
-          <a:prstGeom prst="rect">
-            <a:avLst/>
-          </a:prstGeom>
-          <a:noFill/>
-          <a:ln/>
-        </p:spPr>
-        <p:txBody>
-          <a:bodyPr wrap="square" lIns="0" tIns="0" rIns="0" bIns="0" rtlCol="0" anchor="ctr"/>
-          <a:lstStyle/>
-          <a:p>
-            <a:pPr algn="l" indent="0" marL="0">
+          <p:cNvPr id="21" name="Text 19"/>
+          <p:cNvSpPr/>
+          <p:nvPr/>
+        </p:nvSpPr>
+        <p:spPr>
+          <a:xfrm>
+            <a:off x="6455664" y="2999232"/>
+            <a:ext cx="2240280" cy="292608"/>
+          </a:xfrm>
+          <a:prstGeom prst="rect">
+            <a:avLst/>
+          </a:prstGeom>
+          <a:noFill/>
+          <a:ln/>
+        </p:spPr>
+        <p:txBody>
+          <a:bodyPr wrap="square" lIns="0" tIns="0" rIns="0" bIns="0" rtlCol="0" anchor="ctr"/>
+          <a:lstStyle/>
+          <a:p>
+            <a:pPr indent="0" marL="0">
               <a:buNone/>
             </a:pPr>
             <a:r>
@@ -4365,13 +4384,13 @@
       </p:sp>
       <p:sp>
         <p:nvSpPr>
-          <p:cNvPr id="21" name="Text 19"/>
-          <p:cNvSpPr/>
-          <p:nvPr/>
-        </p:nvSpPr>
-        <p:spPr>
-          <a:xfrm>
-            <a:off x="6455664" y="3346704"/>
+          <p:cNvPr id="22" name="Text 20"/>
+          <p:cNvSpPr/>
+          <p:nvPr/>
+        </p:nvSpPr>
+        <p:spPr>
+          <a:xfrm>
+            <a:off x="6455664" y="3291840"/>
             <a:ext cx="2240280" cy="256032"/>
           </a:xfrm>
           <a:prstGeom prst="rect">
@@ -4384,7 +4403,7 @@
           <a:bodyPr wrap="square" lIns="0" tIns="0" rIns="0" bIns="0" rtlCol="0" anchor="ctr"/>
           <a:lstStyle/>
           <a:p>
-            <a:pPr algn="l" indent="0" marL="0">
+            <a:pPr indent="0" marL="0">
               <a:buNone/>
             </a:pPr>
             <a:r>
@@ -4396,7 +4415,7 @@
                 <a:ea typeface="Calibri" pitchFamily="34" charset="-122"/>
                 <a:cs typeface="Calibri" pitchFamily="34" charset="-120"/>
               </a:rPr>
-              <a:t>0 aprobadas · 8 rechazadas · 17 en revisión</a:t>
+              <a:t>0 aprobadas · 12 rechazadas · 14 en revisión</a:t>
             </a:r>
             <a:endParaRPr lang="en-US" sz="950" dirty="0"/>
           </a:p>
@@ -4404,18 +4423,57 @@
       </p:sp>
       <p:sp>
         <p:nvSpPr>
-          <p:cNvPr id="22" name="Shape 20"/>
+          <p:cNvPr id="23" name="Text 21"/>
+          <p:cNvSpPr/>
+          <p:nvPr/>
+        </p:nvSpPr>
+        <p:spPr>
+          <a:xfrm>
+            <a:off x="6455664" y="3557016"/>
+            <a:ext cx="2240280" cy="237744"/>
+          </a:xfrm>
+          <a:prstGeom prst="rect">
+            <a:avLst/>
+          </a:prstGeom>
+          <a:noFill/>
+          <a:ln/>
+        </p:spPr>
+        <p:txBody>
+          <a:bodyPr wrap="square" lIns="0" tIns="0" rIns="0" bIns="0" rtlCol="0" anchor="ctr"/>
+          <a:lstStyle/>
+          <a:p>
+            <a:pPr indent="0" marL="0">
+              <a:buNone/>
+            </a:pPr>
+            <a:r>
+              <a:rPr lang="en-US" sz="900" b="1" dirty="0">
+                <a:solidFill>
+                  <a:srgbClr val="1F7A44"/>
+                </a:solidFill>
+                <a:latin typeface="Calibri" pitchFamily="34" charset="0"/>
+                <a:ea typeface="Calibri" pitchFamily="34" charset="-122"/>
+                <a:cs typeface="Calibri" pitchFamily="34" charset="-120"/>
+              </a:rPr>
+              <a:t>▲ +1 vs. corte anterior</a:t>
+            </a:r>
+            <a:endParaRPr lang="en-US" sz="900" dirty="0"/>
+          </a:p>
+        </p:txBody>
+      </p:sp>
+      <p:sp>
+        <p:nvSpPr>
+          <p:cNvPr id="24" name="Shape 22"/>
           <p:cNvSpPr/>
           <p:nvPr/>
         </p:nvSpPr>
         <p:spPr>
           <a:xfrm>
             <a:off x="9043416" y="1463040"/>
-            <a:ext cx="2743200" cy="2148840"/>
+            <a:ext cx="2743200" cy="2395728"/>
           </a:xfrm>
           <a:prstGeom prst="roundRect">
             <a:avLst>
-              <a:gd name="adj" fmla="val 3404"/>
+              <a:gd name="adj" fmla="val 3053"/>
             </a:avLst>
           </a:prstGeom>
           <a:solidFill>
@@ -4438,13 +4496,13 @@
       </p:sp>
       <p:sp>
         <p:nvSpPr>
-          <p:cNvPr id="23" name="Shape 21"/>
-          <p:cNvSpPr/>
-          <p:nvPr/>
-        </p:nvSpPr>
-        <p:spPr>
-          <a:xfrm>
-            <a:off x="9299448" y="1737360"/>
+          <p:cNvPr id="25" name="Shape 23"/>
+          <p:cNvSpPr/>
+          <p:nvPr/>
+        </p:nvSpPr>
+        <p:spPr>
+          <a:xfrm>
+            <a:off x="9299448" y="1719072"/>
             <a:ext cx="146304" cy="146304"/>
           </a:xfrm>
           <a:prstGeom prst="ellipse">
@@ -4458,26 +4516,26 @@
       </p:sp>
       <p:sp>
         <p:nvSpPr>
-          <p:cNvPr id="24" name="Text 22"/>
-          <p:cNvSpPr/>
-          <p:nvPr/>
-        </p:nvSpPr>
-        <p:spPr>
-          <a:xfrm>
-            <a:off x="9299448" y="1965960"/>
-            <a:ext cx="2286000" cy="777240"/>
-          </a:xfrm>
-          <a:prstGeom prst="rect">
-            <a:avLst/>
-          </a:prstGeom>
-          <a:noFill/>
-          <a:ln/>
-        </p:spPr>
-        <p:txBody>
-          <a:bodyPr wrap="square" lIns="0" tIns="0" rIns="0" bIns="0" rtlCol="0" anchor="ctr"/>
-          <a:lstStyle/>
-          <a:p>
-            <a:pPr algn="l" indent="0" marL="0">
+          <p:cNvPr id="26" name="Text 24"/>
+          <p:cNvSpPr/>
+          <p:nvPr/>
+        </p:nvSpPr>
+        <p:spPr>
+          <a:xfrm>
+            <a:off x="9299448" y="1938528"/>
+            <a:ext cx="2286000" cy="749808"/>
+          </a:xfrm>
+          <a:prstGeom prst="rect">
+            <a:avLst/>
+          </a:prstGeom>
+          <a:noFill/>
+          <a:ln/>
+        </p:spPr>
+        <p:txBody>
+          <a:bodyPr wrap="square" lIns="0" tIns="0" rIns="0" bIns="0" rtlCol="0" anchor="ctr"/>
+          <a:lstStyle/>
+          <a:p>
+            <a:pPr indent="0" marL="0">
               <a:buNone/>
             </a:pPr>
             <a:r>
@@ -4497,26 +4555,26 @@
       </p:sp>
       <p:sp>
         <p:nvSpPr>
-          <p:cNvPr id="25" name="Text 23"/>
-          <p:cNvSpPr/>
-          <p:nvPr/>
-        </p:nvSpPr>
-        <p:spPr>
-          <a:xfrm>
-            <a:off x="9317736" y="2743200"/>
-            <a:ext cx="2286000" cy="320040"/>
-          </a:xfrm>
-          <a:prstGeom prst="rect">
-            <a:avLst/>
-          </a:prstGeom>
-          <a:noFill/>
-          <a:ln/>
-        </p:spPr>
-        <p:txBody>
-          <a:bodyPr wrap="square" lIns="0" tIns="0" rIns="0" bIns="0" rtlCol="0" anchor="ctr"/>
-          <a:lstStyle/>
-          <a:p>
-            <a:pPr algn="l" indent="0" marL="0">
+          <p:cNvPr id="27" name="Text 25"/>
+          <p:cNvSpPr/>
+          <p:nvPr/>
+        </p:nvSpPr>
+        <p:spPr>
+          <a:xfrm>
+            <a:off x="9317736" y="2697480"/>
+            <a:ext cx="2286000" cy="292608"/>
+          </a:xfrm>
+          <a:prstGeom prst="rect">
+            <a:avLst/>
+          </a:prstGeom>
+          <a:noFill/>
+          <a:ln/>
+        </p:spPr>
+        <p:txBody>
+          <a:bodyPr wrap="square" lIns="0" tIns="0" rIns="0" bIns="0" rtlCol="0" anchor="ctr"/>
+          <a:lstStyle/>
+          <a:p>
+            <a:pPr indent="0" marL="0">
               <a:buNone/>
             </a:pPr>
             <a:r>
@@ -4528,7 +4586,7 @@
                 <a:ea typeface="Calibri" pitchFamily="34" charset="-122"/>
                 <a:cs typeface="Calibri" pitchFamily="34" charset="-120"/>
               </a:rPr>
-              <a:t>1.147/1.988</a:t>
+              <a:t>1.148/1.988</a:t>
             </a:r>
             <a:endParaRPr lang="en-US" sz="1400" dirty="0"/>
           </a:p>
@@ -4536,26 +4594,26 @@
       </p:sp>
       <p:sp>
         <p:nvSpPr>
-          <p:cNvPr id="26" name="Text 24"/>
-          <p:cNvSpPr/>
-          <p:nvPr/>
-        </p:nvSpPr>
-        <p:spPr>
-          <a:xfrm>
-            <a:off x="9317736" y="3072384"/>
-            <a:ext cx="2240280" cy="320040"/>
-          </a:xfrm>
-          <a:prstGeom prst="rect">
-            <a:avLst/>
-          </a:prstGeom>
-          <a:noFill/>
-          <a:ln/>
-        </p:spPr>
-        <p:txBody>
-          <a:bodyPr wrap="square" lIns="0" tIns="0" rIns="0" bIns="0" rtlCol="0" anchor="ctr"/>
-          <a:lstStyle/>
-          <a:p>
-            <a:pPr algn="l" indent="0" marL="0">
+          <p:cNvPr id="28" name="Text 26"/>
+          <p:cNvSpPr/>
+          <p:nvPr/>
+        </p:nvSpPr>
+        <p:spPr>
+          <a:xfrm>
+            <a:off x="9317736" y="2999232"/>
+            <a:ext cx="2240280" cy="292608"/>
+          </a:xfrm>
+          <a:prstGeom prst="rect">
+            <a:avLst/>
+          </a:prstGeom>
+          <a:noFill/>
+          <a:ln/>
+        </p:spPr>
+        <p:txBody>
+          <a:bodyPr wrap="square" lIns="0" tIns="0" rIns="0" bIns="0" rtlCol="0" anchor="ctr"/>
+          <a:lstStyle/>
+          <a:p>
+            <a:pPr indent="0" marL="0">
               <a:buNone/>
             </a:pPr>
             <a:r>
@@ -4575,13 +4633,13 @@
       </p:sp>
       <p:sp>
         <p:nvSpPr>
-          <p:cNvPr id="27" name="Text 25"/>
-          <p:cNvSpPr/>
-          <p:nvPr/>
-        </p:nvSpPr>
-        <p:spPr>
-          <a:xfrm>
-            <a:off x="9317736" y="3346704"/>
+          <p:cNvPr id="29" name="Text 27"/>
+          <p:cNvSpPr/>
+          <p:nvPr/>
+        </p:nvSpPr>
+        <p:spPr>
+          <a:xfrm>
+            <a:off x="9317736" y="3291840"/>
             <a:ext cx="2240280" cy="256032"/>
           </a:xfrm>
           <a:prstGeom prst="rect">
@@ -4594,7 +4652,7 @@
           <a:bodyPr wrap="square" lIns="0" tIns="0" rIns="0" bIns="0" rtlCol="0" anchor="ctr"/>
           <a:lstStyle/>
           <a:p>
-            <a:pPr algn="l" indent="0" marL="0">
+            <a:pPr indent="0" marL="0">
               <a:buNone/>
             </a:pPr>
             <a:r>
@@ -4606,7 +4664,7 @@
                 <a:ea typeface="Calibri" pitchFamily="34" charset="-122"/>
                 <a:cs typeface="Calibri" pitchFamily="34" charset="-120"/>
               </a:rPr>
-              <a:t>830 abiertos · 401 vencidos al corte</a:t>
+              <a:t>830 abiertos · 405 vencidos</a:t>
             </a:r>
             <a:endParaRPr lang="en-US" sz="950" dirty="0"/>
           </a:p>
@@ -4614,18 +4672,57 @@
       </p:sp>
       <p:sp>
         <p:nvSpPr>
-          <p:cNvPr id="28" name="Shape 26"/>
-          <p:cNvSpPr/>
-          <p:nvPr/>
-        </p:nvSpPr>
-        <p:spPr>
-          <a:xfrm>
-            <a:off x="457200" y="3886200"/>
-            <a:ext cx="11274552" cy="2240280"/>
+          <p:cNvPr id="30" name="Text 28"/>
+          <p:cNvSpPr/>
+          <p:nvPr/>
+        </p:nvSpPr>
+        <p:spPr>
+          <a:xfrm>
+            <a:off x="9317736" y="3557016"/>
+            <a:ext cx="2240280" cy="237744"/>
+          </a:xfrm>
+          <a:prstGeom prst="rect">
+            <a:avLst/>
+          </a:prstGeom>
+          <a:noFill/>
+          <a:ln/>
+        </p:spPr>
+        <p:txBody>
+          <a:bodyPr wrap="square" lIns="0" tIns="0" rIns="0" bIns="0" rtlCol="0" anchor="ctr"/>
+          <a:lstStyle/>
+          <a:p>
+            <a:pPr indent="0" marL="0">
+              <a:buNone/>
+            </a:pPr>
+            <a:r>
+              <a:rPr lang="en-US" sz="900" b="1" dirty="0">
+                <a:solidFill>
+                  <a:srgbClr val="1F7A44"/>
+                </a:solidFill>
+                <a:latin typeface="Calibri" pitchFamily="34" charset="0"/>
+                <a:ea typeface="Calibri" pitchFamily="34" charset="-122"/>
+                <a:cs typeface="Calibri" pitchFamily="34" charset="-120"/>
+              </a:rPr>
+              <a:t>▲ +1 vs. corte anterior</a:t>
+            </a:r>
+            <a:endParaRPr lang="en-US" sz="900" dirty="0"/>
+          </a:p>
+        </p:txBody>
+      </p:sp>
+      <p:sp>
+        <p:nvSpPr>
+          <p:cNvPr id="31" name="Shape 29"/>
+          <p:cNvSpPr/>
+          <p:nvPr/>
+        </p:nvSpPr>
+        <p:spPr>
+          <a:xfrm>
+            <a:off x="457200" y="4041648"/>
+            <a:ext cx="11274552" cy="2103120"/>
           </a:xfrm>
           <a:prstGeom prst="roundRect">
             <a:avLst>
-              <a:gd name="adj" fmla="val 2449"/>
+              <a:gd name="adj" fmla="val 2609"/>
             </a:avLst>
           </a:prstGeom>
           <a:solidFill>
@@ -4636,13 +4733,13 @@
       </p:sp>
       <p:sp>
         <p:nvSpPr>
-          <p:cNvPr id="29" name="Text 27"/>
-          <p:cNvSpPr/>
-          <p:nvPr/>
-        </p:nvSpPr>
-        <p:spPr>
-          <a:xfrm>
-            <a:off x="777240" y="4114800"/>
+          <p:cNvPr id="32" name="Text 30"/>
+          <p:cNvSpPr/>
+          <p:nvPr/>
+        </p:nvSpPr>
+        <p:spPr>
+          <a:xfrm>
+            <a:off x="777240" y="4206240"/>
             <a:ext cx="5486400" cy="274320"/>
           </a:xfrm>
           <a:prstGeom prst="rect">
@@ -4667,7 +4764,7 @@
                 <a:ea typeface="Calibri" pitchFamily="34" charset="-122"/>
                 <a:cs typeface="Calibri" pitchFamily="34" charset="-120"/>
               </a:rPr>
-              <a:t>LECTURA EJECUTIVA</a:t>
+              <a:t>LECTURA DEL PERÍODO</a:t>
             </a:r>
             <a:endParaRPr lang="en-US" sz="1100" dirty="0"/>
           </a:p>
@@ -4675,13 +4772,13 @@
       </p:sp>
       <p:sp>
         <p:nvSpPr>
-          <p:cNvPr id="30" name="Shape 28"/>
-          <p:cNvSpPr/>
-          <p:nvPr/>
-        </p:nvSpPr>
-        <p:spPr>
-          <a:xfrm>
-            <a:off x="822960" y="4489704"/>
+          <p:cNvPr id="33" name="Shape 31"/>
+          <p:cNvSpPr/>
+          <p:nvPr/>
+        </p:nvSpPr>
+        <p:spPr>
+          <a:xfrm>
+            <a:off x="822960" y="4590288"/>
             <a:ext cx="109728" cy="109728"/>
           </a:xfrm>
           <a:prstGeom prst="ellipse">
@@ -4695,13 +4792,13 @@
       </p:sp>
       <p:sp>
         <p:nvSpPr>
-          <p:cNvPr id="31" name="Text 29"/>
-          <p:cNvSpPr/>
-          <p:nvPr/>
-        </p:nvSpPr>
-        <p:spPr>
-          <a:xfrm>
-            <a:off x="1051560" y="4389120"/>
+          <p:cNvPr id="34" name="Text 32"/>
+          <p:cNvSpPr/>
+          <p:nvPr/>
+        </p:nvSpPr>
+        <p:spPr>
+          <a:xfrm>
+            <a:off x="1051560" y="4489704"/>
             <a:ext cx="10424160" cy="502920"/>
           </a:xfrm>
           <a:prstGeom prst="rect">
@@ -4716,12 +4813,12 @@
           <a:p>
             <a:pPr indent="0" marL="0">
               <a:lnSpc>
-                <a:spcPts val="1700"/>
+                <a:spcPts val="1600"/>
               </a:lnSpc>
               <a:buNone/>
             </a:pPr>
             <a:r>
-              <a:rPr lang="en-US" sz="1300" b="1" dirty="0">
+              <a:rPr lang="en-US" sz="1250" b="1" dirty="0">
                 <a:solidFill>
                   <a:srgbClr val="FFFFFF"/>
                 </a:solidFill>
@@ -4729,16 +4826,16 @@
                 <a:ea typeface="Calibri" pitchFamily="34" charset="-122"/>
                 <a:cs typeface="Calibri" pitchFamily="34" charset="-120"/>
               </a:rPr>
-              <a:t>Caminatas 80% cerradas; el 100% avanza a dos velocidades.  </a:t>
+              <a:t>Se destrabó la programación de caminatas, pero no la ejecución.  </a:t>
             </a:r>
             <a:pPr indent="0" marL="0">
               <a:lnSpc>
-                <a:spcPts val="1700"/>
+                <a:spcPts val="1600"/>
               </a:lnSpc>
               <a:buNone/>
             </a:pPr>
             <a:r>
-              <a:rPr lang="en-US" sz="1300" dirty="0">
+              <a:rPr lang="en-US" sz="1250" dirty="0">
                 <a:solidFill>
                   <a:srgbClr val="DCE6F0"/>
                 </a:solidFill>
@@ -4746,21 +4843,21 @@
                 <a:ea typeface="Calibri" pitchFamily="34" charset="-122"/>
                 <a:cs typeface="Calibri" pitchFamily="34" charset="-120"/>
               </a:rPr>
-              <a:t>Área 3000 explica 41 de los 45 subsistemas pendientes de caminata al 100%.</a:t>
-            </a:r>
-            <a:endParaRPr lang="en-US" sz="1300" dirty="0"/>
-          </a:p>
-        </p:txBody>
-      </p:sp>
-      <p:sp>
-        <p:nvSpPr>
-          <p:cNvPr id="32" name="Shape 30"/>
-          <p:cNvSpPr/>
-          <p:nvPr/>
-        </p:nvSpPr>
-        <p:spPr>
-          <a:xfrm>
-            <a:off x="822960" y="5038344"/>
+              <a:t>Los subsistemas «por programar» bajaron de 36 a 1, mientras las realizadas al 100% se mantienen en 90 (66,7%).</a:t>
+            </a:r>
+            <a:endParaRPr lang="en-US" sz="1250" dirty="0"/>
+          </a:p>
+        </p:txBody>
+      </p:sp>
+      <p:sp>
+        <p:nvSpPr>
+          <p:cNvPr id="35" name="Shape 33"/>
+          <p:cNvSpPr/>
+          <p:nvPr/>
+        </p:nvSpPr>
+        <p:spPr>
+          <a:xfrm>
+            <a:off x="822960" y="5102352"/>
             <a:ext cx="109728" cy="109728"/>
           </a:xfrm>
           <a:prstGeom prst="ellipse">
@@ -4774,13 +4871,13 @@
       </p:sp>
       <p:sp>
         <p:nvSpPr>
-          <p:cNvPr id="33" name="Text 31"/>
-          <p:cNvSpPr/>
-          <p:nvPr/>
-        </p:nvSpPr>
-        <p:spPr>
-          <a:xfrm>
-            <a:off x="1051560" y="4937760"/>
+          <p:cNvPr id="36" name="Text 34"/>
+          <p:cNvSpPr/>
+          <p:nvPr/>
+        </p:nvSpPr>
+        <p:spPr>
+          <a:xfrm>
+            <a:off x="1051560" y="5001768"/>
             <a:ext cx="10424160" cy="502920"/>
           </a:xfrm>
           <a:prstGeom prst="rect">
@@ -4795,12 +4892,12 @@
           <a:p>
             <a:pPr indent="0" marL="0">
               <a:lnSpc>
-                <a:spcPts val="1700"/>
+                <a:spcPts val="1600"/>
               </a:lnSpc>
               <a:buNone/>
             </a:pPr>
             <a:r>
-              <a:rPr lang="en-US" sz="1300" b="1" dirty="0">
+              <a:rPr lang="en-US" sz="1250" b="1" dirty="0">
                 <a:solidFill>
                   <a:srgbClr val="FFFFFF"/>
                 </a:solidFill>
@@ -4808,16 +4905,16 @@
                 <a:ea typeface="Calibri" pitchFamily="34" charset="-122"/>
                 <a:cs typeface="Calibri" pitchFamily="34" charset="-120"/>
               </a:rPr>
-              <a:t>La entrega de carpetas TOP es el frente más rezagado.  </a:t>
+              <a:t>Las carpetas TOP siguen sin aprobaciones y suben los rechazos.  </a:t>
             </a:r>
             <a:pPr indent="0" marL="0">
               <a:lnSpc>
-                <a:spcPts val="1700"/>
+                <a:spcPts val="1600"/>
               </a:lnSpc>
               <a:buNone/>
             </a:pPr>
             <a:r>
-              <a:rPr lang="en-US" sz="1300" dirty="0">
+              <a:rPr lang="en-US" sz="1250" dirty="0">
                 <a:solidFill>
                   <a:srgbClr val="DCE6F0"/>
                 </a:solidFill>
@@ -4825,21 +4922,21 @@
                 <a:ea typeface="Calibri" pitchFamily="34" charset="-122"/>
                 <a:cs typeface="Calibri" pitchFamily="34" charset="-120"/>
               </a:rPr>
-              <a:t>Solo 19,3% entregadas y ninguna aprobada aún; 8 rechazadas concentradas en áreas 2000 y 3000.</a:t>
-            </a:r>
-            <a:endParaRPr lang="en-US" sz="1300" dirty="0"/>
-          </a:p>
-        </p:txBody>
-      </p:sp>
-      <p:sp>
-        <p:nvSpPr>
-          <p:cNvPr id="34" name="Shape 32"/>
-          <p:cNvSpPr/>
-          <p:nvPr/>
-        </p:nvSpPr>
-        <p:spPr>
-          <a:xfrm>
-            <a:off x="822960" y="5586984"/>
+              <a:t>27 entregadas de 135 (20%) y 0 aprobadas; las rechazadas pasaron de 8 a 12.</a:t>
+            </a:r>
+            <a:endParaRPr lang="en-US" sz="1250" dirty="0"/>
+          </a:p>
+        </p:txBody>
+      </p:sp>
+      <p:sp>
+        <p:nvSpPr>
+          <p:cNvPr id="37" name="Shape 35"/>
+          <p:cNvSpPr/>
+          <p:nvPr/>
+        </p:nvSpPr>
+        <p:spPr>
+          <a:xfrm>
+            <a:off x="822960" y="5614416"/>
             <a:ext cx="109728" cy="109728"/>
           </a:xfrm>
           <a:prstGeom prst="ellipse">
@@ -4853,13 +4950,13 @@
       </p:sp>
       <p:sp>
         <p:nvSpPr>
-          <p:cNvPr id="35" name="Text 33"/>
-          <p:cNvSpPr/>
-          <p:nvPr/>
-        </p:nvSpPr>
-        <p:spPr>
-          <a:xfrm>
-            <a:off x="1051560" y="5486400"/>
+          <p:cNvPr id="38" name="Text 36"/>
+          <p:cNvSpPr/>
+          <p:nvPr/>
+        </p:nvSpPr>
+        <p:spPr>
+          <a:xfrm>
+            <a:off x="1051560" y="5513832"/>
             <a:ext cx="10424160" cy="502920"/>
           </a:xfrm>
           <a:prstGeom prst="rect">
@@ -4874,12 +4971,12 @@
           <a:p>
             <a:pPr indent="0" marL="0">
               <a:lnSpc>
-                <a:spcPts val="1700"/>
+                <a:spcPts val="1600"/>
               </a:lnSpc>
               <a:buNone/>
             </a:pPr>
             <a:r>
-              <a:rPr lang="en-US" sz="1300" b="1" dirty="0">
+              <a:rPr lang="en-US" sz="1250" b="1" dirty="0">
                 <a:solidFill>
                   <a:srgbClr val="FFFFFF"/>
                 </a:solidFill>
@@ -4887,16 +4984,16 @@
                 <a:ea typeface="Calibri" pitchFamily="34" charset="-122"/>
                 <a:cs typeface="Calibri" pitchFamily="34" charset="-120"/>
               </a:rPr>
-              <a:t>El cierre de detalles P1 está a mitad de camino, con deuda vencida.  </a:t>
+              <a:t>El cierre de detalles P1 está prácticamente detenido y crece la deuda vencida.  </a:t>
             </a:r>
             <a:pPr indent="0" marL="0">
               <a:lnSpc>
-                <a:spcPts val="1700"/>
+                <a:spcPts val="1600"/>
               </a:lnSpc>
               <a:buNone/>
             </a:pPr>
             <a:r>
-              <a:rPr lang="en-US" sz="1300" dirty="0">
+              <a:rPr lang="en-US" sz="1250" dirty="0">
                 <a:solidFill>
                   <a:srgbClr val="DCE6F0"/>
                 </a:solidFill>
@@ -4904,22 +5001,22 @@
                 <a:ea typeface="Calibri" pitchFamily="34" charset="-122"/>
                 <a:cs typeface="Calibri" pitchFamily="34" charset="-120"/>
               </a:rPr>
-              <a:t>401 de 830 P1 abiertos ya superaron su fecha de vencimiento; el 88% del atraso está en el área 3000.</a:t>
-            </a:r>
-            <a:endParaRPr lang="en-US" sz="1300" dirty="0"/>
-          </a:p>
-        </p:txBody>
-      </p:sp>
-      <p:sp>
-        <p:nvSpPr>
-          <p:cNvPr id="36" name="Text 34"/>
+              <a:t>+1 P1 cerrado desde el corte anterior; 830 abiertos, de los cuales 405 superaron su fecha de vencimiento (+4 en el período). El área 3000 concentra 707 (85,2%).</a:t>
+            </a:r>
+            <a:endParaRPr lang="en-US" sz="1250" dirty="0"/>
+          </a:p>
+        </p:txBody>
+      </p:sp>
+      <p:sp>
+        <p:nvSpPr>
+          <p:cNvPr id="39" name="Text 37"/>
           <p:cNvSpPr/>
           <p:nvPr/>
         </p:nvSpPr>
         <p:spPr>
           <a:xfrm>
             <a:off x="457200" y="6473952"/>
-            <a:ext cx="8961120" cy="274320"/>
+            <a:ext cx="9692640" cy="274320"/>
           </a:xfrm>
           <a:prstGeom prst="rect">
             <a:avLst/>
@@ -4943,7 +5040,7 @@
                 <a:ea typeface="Calibri" pitchFamily="34" charset="-122"/>
                 <a:cs typeface="Calibri" pitchFamily="34" charset="-120"/>
               </a:rPr>
-              <a:t>Fuente: Estatus.xlsx · Corte 16-jul-2026 · Áreas 2000/3000/4000/8000</a:t>
+              <a:t>Fuente: Estatus_Resumen_General_QAQC.xlsx · Corte 26-07-2026 · Áreas 2000/3000/4000/8000</a:t>
             </a:r>
             <a:endParaRPr lang="en-US" sz="850" dirty="0"/>
           </a:p>
@@ -4951,7 +5048,7 @@
       </p:sp>
       <p:sp>
         <p:nvSpPr>
-          <p:cNvPr id="37" name="Text 35"/>
+          <p:cNvPr id="40" name="Text 38"/>
           <p:cNvSpPr/>
           <p:nvPr/>
         </p:nvSpPr>
@@ -5415,7 +5512,7 @@
           <a:bodyPr wrap="square" lIns="0" tIns="0" rIns="0" bIns="0" rtlCol="0" anchor="ctr"/>
           <a:lstStyle/>
           <a:p>
-            <a:pPr algn="l" indent="0" marL="0">
+            <a:pPr indent="0" marL="0">
               <a:buNone/>
             </a:pPr>
             <a:r>
@@ -5454,7 +5551,7 @@
           <a:bodyPr wrap="square" lIns="0" tIns="0" rIns="0" bIns="0" rtlCol="0" anchor="ctr"/>
           <a:lstStyle/>
           <a:p>
-            <a:pPr algn="l" indent="0" marL="0">
+            <a:pPr indent="0" marL="0">
               <a:buNone/>
             </a:pPr>
             <a:r>
@@ -5544,7 +5641,7 @@
                 <a:ea typeface="Calibri" pitchFamily="34" charset="-122"/>
                 <a:cs typeface="Calibri" pitchFamily="34" charset="-120"/>
               </a:rPr>
-              <a:t>100%</a:t>
+              <a:t>35/35 · 100%</a:t>
             </a:r>
             <a:endParaRPr lang="en-US" sz="1300" dirty="0"/>
           </a:p>
@@ -5583,7 +5680,7 @@
                 <a:ea typeface="Calibri" pitchFamily="34" charset="-122"/>
                 <a:cs typeface="Calibri" pitchFamily="34" charset="-120"/>
               </a:rPr>
-              <a:t>17/35 · 48,6%</a:t>
+              <a:t>18/35 · 51,4%</a:t>
             </a:r>
             <a:endParaRPr lang="en-US" sz="1300" dirty="0"/>
           </a:p>
@@ -5622,7 +5719,7 @@
                 <a:ea typeface="Calibri" pitchFamily="34" charset="-122"/>
                 <a:cs typeface="Calibri" pitchFamily="34" charset="-120"/>
               </a:rPr>
-              <a:t>91,8%</a:t>
+              <a:t>91,9%</a:t>
             </a:r>
             <a:endParaRPr lang="en-US" sz="1300" dirty="0"/>
           </a:p>
@@ -5661,7 +5758,7 @@
                 <a:ea typeface="Calibri" pitchFamily="34" charset="-122"/>
                 <a:cs typeface="Calibri" pitchFamily="34" charset="-120"/>
               </a:rPr>
-              <a:t>38 (15)</a:t>
+              <a:t>38 (19)</a:t>
             </a:r>
             <a:endParaRPr lang="en-US" sz="1300" dirty="0"/>
           </a:p>
@@ -5792,7 +5889,7 @@
           <a:bodyPr wrap="square" lIns="0" tIns="0" rIns="0" bIns="0" rtlCol="0" anchor="ctr"/>
           <a:lstStyle/>
           <a:p>
-            <a:pPr algn="l" indent="0" marL="0">
+            <a:pPr indent="0" marL="0">
               <a:buNone/>
             </a:pPr>
             <a:r>
@@ -5831,7 +5928,7 @@
           <a:bodyPr wrap="square" lIns="0" tIns="0" rIns="0" bIns="0" rtlCol="0" anchor="ctr"/>
           <a:lstStyle/>
           <a:p>
-            <a:pPr algn="l" indent="0" marL="0">
+            <a:pPr indent="0" marL="0">
               <a:buNone/>
             </a:pPr>
             <a:r>
@@ -5921,7 +6018,7 @@
                 <a:ea typeface="Calibri" pitchFamily="34" charset="-122"/>
                 <a:cs typeface="Calibri" pitchFamily="34" charset="-120"/>
               </a:rPr>
-              <a:t>46,1%</a:t>
+              <a:t>35/76 · 46,1%</a:t>
             </a:r>
             <a:endParaRPr lang="en-US" sz="1300" dirty="0"/>
           </a:p>
@@ -6149,7 +6246,7 @@
           <a:bodyPr wrap="square" lIns="0" tIns="0" rIns="0" bIns="0" rtlCol="0" anchor="ctr"/>
           <a:lstStyle/>
           <a:p>
-            <a:pPr algn="l" indent="0" marL="0">
+            <a:pPr indent="0" marL="0">
               <a:buNone/>
             </a:pPr>
             <a:r>
@@ -6188,7 +6285,7 @@
           <a:bodyPr wrap="square" lIns="0" tIns="0" rIns="0" bIns="0" rtlCol="0" anchor="ctr"/>
           <a:lstStyle/>
           <a:p>
-            <a:pPr algn="l" indent="0" marL="0">
+            <a:pPr indent="0" marL="0">
               <a:buNone/>
             </a:pPr>
             <a:r>
@@ -6278,7 +6375,7 @@
                 <a:ea typeface="Calibri" pitchFamily="34" charset="-122"/>
                 <a:cs typeface="Calibri" pitchFamily="34" charset="-120"/>
               </a:rPr>
-              <a:t>86,4%</a:t>
+              <a:t>19/22 · 86,4%</a:t>
             </a:r>
             <a:endParaRPr lang="en-US" sz="1300" dirty="0"/>
           </a:p>
@@ -6526,7 +6623,7 @@
           <a:bodyPr wrap="square" lIns="0" tIns="0" rIns="0" bIns="0" rtlCol="0" anchor="ctr"/>
           <a:lstStyle/>
           <a:p>
-            <a:pPr algn="l" indent="0" marL="0">
+            <a:pPr indent="0" marL="0">
               <a:buNone/>
             </a:pPr>
             <a:r>
@@ -6565,7 +6662,7 @@
           <a:bodyPr wrap="square" lIns="0" tIns="0" rIns="0" bIns="0" rtlCol="0" anchor="ctr"/>
           <a:lstStyle/>
           <a:p>
-            <a:pPr algn="l" indent="0" marL="0">
+            <a:pPr indent="0" marL="0">
               <a:buNone/>
             </a:pPr>
             <a:r>
@@ -6655,7 +6752,7 @@
                 <a:ea typeface="Calibri" pitchFamily="34" charset="-122"/>
                 <a:cs typeface="Calibri" pitchFamily="34" charset="-120"/>
               </a:rPr>
-              <a:t>50%</a:t>
+              <a:t>1/2 · 50%</a:t>
             </a:r>
             <a:endParaRPr lang="en-US" sz="1300" dirty="0"/>
           </a:p>
@@ -6795,7 +6892,7 @@
             </a:avLst>
           </a:prstGeom>
           <a:solidFill>
-            <a:srgbClr val="E0A32E"/>
+            <a:srgbClr val="C0392B"/>
           </a:solidFill>
           <a:ln/>
         </p:spPr>
@@ -6833,7 +6930,7 @@
                 <a:ea typeface="Calibri" pitchFamily="34" charset="-122"/>
                 <a:cs typeface="Calibri" pitchFamily="34" charset="-120"/>
               </a:rPr>
-              <a:t>Atención</a:t>
+              <a:t>Crítico</a:t>
             </a:r>
             <a:endParaRPr lang="en-US" sz="1050" dirty="0"/>
           </a:p>
@@ -6895,7 +6992,7 @@
                 <a:ea typeface="Calibri" pitchFamily="34" charset="-122"/>
                 <a:cs typeface="Calibri" pitchFamily="34" charset="-120"/>
               </a:rPr>
-              <a:t>Criterio · Crítico: caminata 100% &lt; 60% o cierre P1 &lt; 50%   ·   Atención: algún frente 60–90% o carpetas TOP sin entregar   ·   Al día: caminatas completas y P1 ≥ 90%</a:t>
+              <a:t>Criterio · Crítico: caminata 100% &lt; 60% o cierre P1 &lt; 50%   ·   Atención: algún frente entre 60–90% o carpetas TOP por entregar   ·   Al día: caminatas ≥ 90% y P1 ≥ 90%</a:t>
             </a:r>
             <a:endParaRPr lang="en-US" sz="950" dirty="0"/>
           </a:p>
@@ -6910,7 +7007,7 @@
         <p:spPr>
           <a:xfrm>
             <a:off x="457200" y="6473952"/>
-            <a:ext cx="8961120" cy="274320"/>
+            <a:ext cx="9692640" cy="274320"/>
           </a:xfrm>
           <a:prstGeom prst="rect">
             <a:avLst/>
@@ -6934,7 +7031,7 @@
                 <a:ea typeface="Calibri" pitchFamily="34" charset="-122"/>
                 <a:cs typeface="Calibri" pitchFamily="34" charset="-120"/>
               </a:rPr>
-              <a:t>Fuente: Estatus.xlsx · Corte 16-jul-2026 · Áreas 2000/3000/4000/8000</a:t>
+              <a:t>Fuente: Estatus_Resumen_General_QAQC.xlsx · Corte 26-07-2026 · Áreas 2000/3000/4000/8000</a:t>
             </a:r>
             <a:endParaRPr lang="en-US" sz="850" dirty="0"/>
           </a:p>
@@ -7122,7 +7219,7 @@
                 <a:ea typeface="Calibri" pitchFamily="34" charset="-122"/>
                 <a:cs typeface="Calibri" pitchFamily="34" charset="-120"/>
               </a:rPr>
-              <a:t>Las caminatas al 80% están cerradas en todas las áreas (135/135). El detalle está en el hito 100%, donde el área 3000 arrastra el atraso.</a:t>
+              <a:t>Las caminatas al 80% están cerradas en todas las áreas (135/135). El hito 100% avanza a 66,7%, y el área 3000 concentra 41 de los 45 subsistemas pendientes.</a:t>
             </a:r>
             <a:endParaRPr lang="en-US" sz="1350" dirty="0"/>
           </a:p>
@@ -7214,7 +7311,7 @@
         <p:spPr>
           <a:xfrm>
             <a:off x="7909560" y="2331720"/>
-            <a:ext cx="1828800" cy="685800"/>
+            <a:ext cx="2377440" cy="685800"/>
           </a:xfrm>
           <a:prstGeom prst="rect">
             <a:avLst/>
@@ -7354,7 +7451,7 @@
         <p:spPr>
           <a:xfrm>
             <a:off x="7909560" y="3904488"/>
-            <a:ext cx="2194560" cy="685800"/>
+            <a:ext cx="2377440" cy="685800"/>
           </a:xfrm>
           <a:prstGeom prst="rect">
             <a:avLst/>
@@ -7432,7 +7529,7 @@
         <p:spPr>
           <a:xfrm>
             <a:off x="7909560" y="5074920"/>
-            <a:ext cx="3611880" cy="777240"/>
+            <a:ext cx="3611880" cy="822960"/>
           </a:xfrm>
           <a:prstGeom prst="rect">
             <a:avLst/>
@@ -7476,7 +7573,7 @@
                 <a:ea typeface="Calibri" pitchFamily="34" charset="-122"/>
                 <a:cs typeface="Calibri" pitchFamily="34" charset="-120"/>
               </a:rPr>
-              <a:t>9 subsistemas próximos a realizar y 36 por programar — 41 de ellos en el área 3000 (molienda–flotación).</a:t>
+              <a:t>44 próximas a realizar y 1 por programar. Las «por programar» bajaron 35 en el período.</a:t>
             </a:r>
             <a:endParaRPr lang="en-US" sz="1150" dirty="0"/>
           </a:p>
@@ -7491,7 +7588,7 @@
         <p:spPr>
           <a:xfrm>
             <a:off x="457200" y="6473952"/>
-            <a:ext cx="8961120" cy="274320"/>
+            <a:ext cx="9692640" cy="274320"/>
           </a:xfrm>
           <a:prstGeom prst="rect">
             <a:avLst/>
@@ -7515,7 +7612,7 @@
                 <a:ea typeface="Calibri" pitchFamily="34" charset="-122"/>
                 <a:cs typeface="Calibri" pitchFamily="34" charset="-120"/>
               </a:rPr>
-              <a:t>Fuente: Estatus.xlsx · Corte 16-jul-2026 · Áreas 2000/3000/4000/8000</a:t>
+              <a:t>Fuente: Estatus_Resumen_General_QAQC.xlsx · Corte 26-07-2026 · Áreas 2000/3000/4000/8000</a:t>
             </a:r>
             <a:endParaRPr lang="en-US" sz="850" dirty="0"/>
           </a:p>
@@ -7703,7 +7800,7 @@
                 <a:ea typeface="Calibri" pitchFamily="34" charset="-122"/>
                 <a:cs typeface="Calibri" pitchFamily="34" charset="-120"/>
               </a:rPr>
-              <a:t>26 carpetas entregadas de 135 (19,3%). Ninguna aprobada aún: el flujo se acumula en revisión y hay 8 rechazos que requieren rearmado.</a:t>
+              <a:t>27 carpetas entregadas de 135 (20%). Ninguna aprobada aún: el flujo se acumula en revisión y hay 12 rechazos que requieren rearmado.</a:t>
             </a:r>
             <a:endParaRPr lang="en-US" sz="1350" dirty="0"/>
           </a:p>
@@ -7842,23 +7939,23 @@
         <p:spPr>
           <a:xfrm>
             <a:off x="8302752" y="2450592"/>
-            <a:ext cx="2103120" cy="566928"/>
-          </a:xfrm>
-          <a:prstGeom prst="rect">
-            <a:avLst/>
-          </a:prstGeom>
-          <a:noFill/>
-          <a:ln/>
-        </p:spPr>
-        <p:txBody>
-          <a:bodyPr wrap="square" lIns="0" tIns="0" rIns="0" bIns="0" rtlCol="0" anchor="ctr"/>
-          <a:lstStyle/>
-          <a:p>
-            <a:pPr algn="l" indent="0" marL="0">
-              <a:buNone/>
-            </a:pPr>
-            <a:r>
-              <a:rPr lang="en-US" sz="1300" dirty="0">
+            <a:ext cx="1600200" cy="566928"/>
+          </a:xfrm>
+          <a:prstGeom prst="rect">
+            <a:avLst/>
+          </a:prstGeom>
+          <a:noFill/>
+          <a:ln/>
+        </p:spPr>
+        <p:txBody>
+          <a:bodyPr wrap="square" lIns="0" tIns="0" rIns="0" bIns="0" rtlCol="0" anchor="ctr"/>
+          <a:lstStyle/>
+          <a:p>
+            <a:pPr indent="0" marL="0">
+              <a:buNone/>
+            </a:pPr>
+            <a:r>
+              <a:rPr lang="en-US" sz="1250" dirty="0">
                 <a:solidFill>
                   <a:srgbClr val="1A2433"/>
                 </a:solidFill>
@@ -7868,7 +7965,7 @@
               </a:rPr>
               <a:t>Entregadas</a:t>
             </a:r>
-            <a:endParaRPr lang="en-US" sz="1300" dirty="0"/>
+            <a:endParaRPr lang="en-US" sz="1250" dirty="0"/>
           </a:p>
         </p:txBody>
       </p:sp>
@@ -7880,8 +7977,47 @@
         </p:nvSpPr>
         <p:spPr>
           <a:xfrm>
-            <a:off x="10058400" y="2450592"/>
-            <a:ext cx="1280160" cy="566928"/>
+            <a:off x="9509760" y="2450592"/>
+            <a:ext cx="914400" cy="566928"/>
+          </a:xfrm>
+          <a:prstGeom prst="rect">
+            <a:avLst/>
+          </a:prstGeom>
+          <a:noFill/>
+          <a:ln/>
+        </p:spPr>
+        <p:txBody>
+          <a:bodyPr wrap="square" lIns="0" tIns="0" rIns="0" bIns="0" rtlCol="0" anchor="ctr"/>
+          <a:lstStyle/>
+          <a:p>
+            <a:pPr algn="r" indent="0" marL="0">
+              <a:buNone/>
+            </a:pPr>
+            <a:r>
+              <a:rPr lang="en-US" sz="950" b="1" dirty="0">
+                <a:solidFill>
+                  <a:srgbClr val="1F7A44"/>
+                </a:solidFill>
+                <a:latin typeface="Calibri" pitchFamily="34" charset="0"/>
+                <a:ea typeface="Calibri" pitchFamily="34" charset="-122"/>
+                <a:cs typeface="Calibri" pitchFamily="34" charset="-120"/>
+              </a:rPr>
+              <a:t>▲ +1</a:t>
+            </a:r>
+            <a:endParaRPr lang="en-US" sz="950" dirty="0"/>
+          </a:p>
+        </p:txBody>
+      </p:sp>
+      <p:sp>
+        <p:nvSpPr>
+          <p:cNvPr id="12" name="Text 9"/>
+          <p:cNvSpPr/>
+          <p:nvPr/>
+        </p:nvSpPr>
+        <p:spPr>
+          <a:xfrm>
+            <a:off x="10469880" y="2450592"/>
+            <a:ext cx="868680" cy="566928"/>
           </a:xfrm>
           <a:prstGeom prst="rect">
             <a:avLst/>
@@ -7905,7 +8041,7 @@
                 <a:ea typeface="Cambria" pitchFamily="34" charset="-122"/>
                 <a:cs typeface="Cambria" pitchFamily="34" charset="-120"/>
               </a:rPr>
-              <a:t>26</a:t>
+              <a:t>27</a:t>
             </a:r>
             <a:endParaRPr lang="en-US" sz="2200" dirty="0"/>
           </a:p>
@@ -7913,13 +8049,13 @@
       </p:sp>
       <p:sp>
         <p:nvSpPr>
-          <p:cNvPr id="12" name="Shape 9"/>
-          <p:cNvSpPr/>
-          <p:nvPr/>
-        </p:nvSpPr>
-        <p:spPr>
-          <a:xfrm>
-            <a:off x="7863840" y="3108960"/>
+          <p:cNvPr id="13" name="Shape 10"/>
+          <p:cNvSpPr/>
+          <p:nvPr/>
+        </p:nvSpPr>
+        <p:spPr>
+          <a:xfrm>
+            <a:off x="7863840" y="3072384"/>
             <a:ext cx="3639312" cy="566928"/>
           </a:xfrm>
           <a:prstGeom prst="roundRect">
@@ -7935,13 +8071,13 @@
       </p:sp>
       <p:sp>
         <p:nvSpPr>
-          <p:cNvPr id="13" name="Shape 10"/>
-          <p:cNvSpPr/>
-          <p:nvPr/>
-        </p:nvSpPr>
-        <p:spPr>
-          <a:xfrm>
-            <a:off x="7973568" y="3282696"/>
+          <p:cNvPr id="14" name="Shape 11"/>
+          <p:cNvSpPr/>
+          <p:nvPr/>
+        </p:nvSpPr>
+        <p:spPr>
+          <a:xfrm>
+            <a:off x="7973568" y="3246120"/>
             <a:ext cx="219456" cy="219456"/>
           </a:xfrm>
           <a:prstGeom prst="ellipse">
@@ -7955,30 +8091,30 @@
       </p:sp>
       <p:sp>
         <p:nvSpPr>
-          <p:cNvPr id="14" name="Text 11"/>
-          <p:cNvSpPr/>
-          <p:nvPr/>
-        </p:nvSpPr>
-        <p:spPr>
-          <a:xfrm>
-            <a:off x="8302752" y="3108960"/>
-            <a:ext cx="2103120" cy="566928"/>
-          </a:xfrm>
-          <a:prstGeom prst="rect">
-            <a:avLst/>
-          </a:prstGeom>
-          <a:noFill/>
-          <a:ln/>
-        </p:spPr>
-        <p:txBody>
-          <a:bodyPr wrap="square" lIns="0" tIns="0" rIns="0" bIns="0" rtlCol="0" anchor="ctr"/>
-          <a:lstStyle/>
-          <a:p>
-            <a:pPr algn="l" indent="0" marL="0">
-              <a:buNone/>
-            </a:pPr>
-            <a:r>
-              <a:rPr lang="en-US" sz="1300" dirty="0">
+          <p:cNvPr id="15" name="Text 12"/>
+          <p:cNvSpPr/>
+          <p:nvPr/>
+        </p:nvSpPr>
+        <p:spPr>
+          <a:xfrm>
+            <a:off x="8302752" y="3072384"/>
+            <a:ext cx="1600200" cy="566928"/>
+          </a:xfrm>
+          <a:prstGeom prst="rect">
+            <a:avLst/>
+          </a:prstGeom>
+          <a:noFill/>
+          <a:ln/>
+        </p:spPr>
+        <p:txBody>
+          <a:bodyPr wrap="square" lIns="0" tIns="0" rIns="0" bIns="0" rtlCol="0" anchor="ctr"/>
+          <a:lstStyle/>
+          <a:p>
+            <a:pPr indent="0" marL="0">
+              <a:buNone/>
+            </a:pPr>
+            <a:r>
+              <a:rPr lang="en-US" sz="1250" dirty="0">
                 <a:solidFill>
                   <a:srgbClr val="1A2433"/>
                 </a:solidFill>
@@ -7988,20 +8124,59 @@
               </a:rPr>
               <a:t>En revisión</a:t>
             </a:r>
-            <a:endParaRPr lang="en-US" sz="1300" dirty="0"/>
-          </a:p>
-        </p:txBody>
-      </p:sp>
-      <p:sp>
-        <p:nvSpPr>
-          <p:cNvPr id="15" name="Text 12"/>
-          <p:cNvSpPr/>
-          <p:nvPr/>
-        </p:nvSpPr>
-        <p:spPr>
-          <a:xfrm>
-            <a:off x="10058400" y="3108960"/>
-            <a:ext cx="1280160" cy="566928"/>
+            <a:endParaRPr lang="en-US" sz="1250" dirty="0"/>
+          </a:p>
+        </p:txBody>
+      </p:sp>
+      <p:sp>
+        <p:nvSpPr>
+          <p:cNvPr id="16" name="Text 13"/>
+          <p:cNvSpPr/>
+          <p:nvPr/>
+        </p:nvSpPr>
+        <p:spPr>
+          <a:xfrm>
+            <a:off x="9509760" y="3072384"/>
+            <a:ext cx="914400" cy="566928"/>
+          </a:xfrm>
+          <a:prstGeom prst="rect">
+            <a:avLst/>
+          </a:prstGeom>
+          <a:noFill/>
+          <a:ln/>
+        </p:spPr>
+        <p:txBody>
+          <a:bodyPr wrap="square" lIns="0" tIns="0" rIns="0" bIns="0" rtlCol="0" anchor="ctr"/>
+          <a:lstStyle/>
+          <a:p>
+            <a:pPr algn="r" indent="0" marL="0">
+              <a:buNone/>
+            </a:pPr>
+            <a:r>
+              <a:rPr lang="en-US" sz="950" b="1" dirty="0">
+                <a:solidFill>
+                  <a:srgbClr val="C0392B"/>
+                </a:solidFill>
+                <a:latin typeface="Calibri" pitchFamily="34" charset="0"/>
+                <a:ea typeface="Calibri" pitchFamily="34" charset="-122"/>
+                <a:cs typeface="Calibri" pitchFamily="34" charset="-120"/>
+              </a:rPr>
+              <a:t>▼ -3</a:t>
+            </a:r>
+            <a:endParaRPr lang="en-US" sz="950" dirty="0"/>
+          </a:p>
+        </p:txBody>
+      </p:sp>
+      <p:sp>
+        <p:nvSpPr>
+          <p:cNvPr id="17" name="Text 14"/>
+          <p:cNvSpPr/>
+          <p:nvPr/>
+        </p:nvSpPr>
+        <p:spPr>
+          <a:xfrm>
+            <a:off x="10469880" y="3072384"/>
+            <a:ext cx="868680" cy="566928"/>
           </a:xfrm>
           <a:prstGeom prst="rect">
             <a:avLst/>
@@ -8025,7 +8200,7 @@
                 <a:ea typeface="Cambria" pitchFamily="34" charset="-122"/>
                 <a:cs typeface="Cambria" pitchFamily="34" charset="-120"/>
               </a:rPr>
-              <a:t>17</a:t>
+              <a:t>14</a:t>
             </a:r>
             <a:endParaRPr lang="en-US" sz="2200" dirty="0"/>
           </a:p>
@@ -8033,13 +8208,13 @@
       </p:sp>
       <p:sp>
         <p:nvSpPr>
-          <p:cNvPr id="16" name="Shape 13"/>
-          <p:cNvSpPr/>
-          <p:nvPr/>
-        </p:nvSpPr>
-        <p:spPr>
-          <a:xfrm>
-            <a:off x="7863840" y="3767328"/>
+          <p:cNvPr id="18" name="Shape 15"/>
+          <p:cNvSpPr/>
+          <p:nvPr/>
+        </p:nvSpPr>
+        <p:spPr>
+          <a:xfrm>
+            <a:off x="7863840" y="3694176"/>
             <a:ext cx="3639312" cy="566928"/>
           </a:xfrm>
           <a:prstGeom prst="roundRect">
@@ -8055,13 +8230,13 @@
       </p:sp>
       <p:sp>
         <p:nvSpPr>
-          <p:cNvPr id="17" name="Shape 14"/>
-          <p:cNvSpPr/>
-          <p:nvPr/>
-        </p:nvSpPr>
-        <p:spPr>
-          <a:xfrm>
-            <a:off x="7973568" y="3941064"/>
+          <p:cNvPr id="19" name="Shape 16"/>
+          <p:cNvSpPr/>
+          <p:nvPr/>
+        </p:nvSpPr>
+        <p:spPr>
+          <a:xfrm>
+            <a:off x="7973568" y="3867912"/>
             <a:ext cx="219456" cy="219456"/>
           </a:xfrm>
           <a:prstGeom prst="ellipse">
@@ -8075,30 +8250,30 @@
       </p:sp>
       <p:sp>
         <p:nvSpPr>
-          <p:cNvPr id="18" name="Text 15"/>
-          <p:cNvSpPr/>
-          <p:nvPr/>
-        </p:nvSpPr>
-        <p:spPr>
-          <a:xfrm>
-            <a:off x="8302752" y="3767328"/>
-            <a:ext cx="2103120" cy="566928"/>
-          </a:xfrm>
-          <a:prstGeom prst="rect">
-            <a:avLst/>
-          </a:prstGeom>
-          <a:noFill/>
-          <a:ln/>
-        </p:spPr>
-        <p:txBody>
-          <a:bodyPr wrap="square" lIns="0" tIns="0" rIns="0" bIns="0" rtlCol="0" anchor="ctr"/>
-          <a:lstStyle/>
-          <a:p>
-            <a:pPr algn="l" indent="0" marL="0">
-              <a:buNone/>
-            </a:pPr>
-            <a:r>
-              <a:rPr lang="en-US" sz="1300" dirty="0">
+          <p:cNvPr id="20" name="Text 17"/>
+          <p:cNvSpPr/>
+          <p:nvPr/>
+        </p:nvSpPr>
+        <p:spPr>
+          <a:xfrm>
+            <a:off x="8302752" y="3694176"/>
+            <a:ext cx="1600200" cy="566928"/>
+          </a:xfrm>
+          <a:prstGeom prst="rect">
+            <a:avLst/>
+          </a:prstGeom>
+          <a:noFill/>
+          <a:ln/>
+        </p:spPr>
+        <p:txBody>
+          <a:bodyPr wrap="square" lIns="0" tIns="0" rIns="0" bIns="0" rtlCol="0" anchor="ctr"/>
+          <a:lstStyle/>
+          <a:p>
+            <a:pPr indent="0" marL="0">
+              <a:buNone/>
+            </a:pPr>
+            <a:r>
+              <a:rPr lang="en-US" sz="1250" dirty="0">
                 <a:solidFill>
                   <a:srgbClr val="1A2433"/>
                 </a:solidFill>
@@ -8108,20 +8283,20 @@
               </a:rPr>
               <a:t>Observadas</a:t>
             </a:r>
-            <a:endParaRPr lang="en-US" sz="1300" dirty="0"/>
-          </a:p>
-        </p:txBody>
-      </p:sp>
-      <p:sp>
-        <p:nvSpPr>
-          <p:cNvPr id="19" name="Text 16"/>
-          <p:cNvSpPr/>
-          <p:nvPr/>
-        </p:nvSpPr>
-        <p:spPr>
-          <a:xfrm>
-            <a:off x="10058400" y="3767328"/>
-            <a:ext cx="1280160" cy="566928"/>
+            <a:endParaRPr lang="en-US" sz="1250" dirty="0"/>
+          </a:p>
+        </p:txBody>
+      </p:sp>
+      <p:sp>
+        <p:nvSpPr>
+          <p:cNvPr id="21" name="Text 18"/>
+          <p:cNvSpPr/>
+          <p:nvPr/>
+        </p:nvSpPr>
+        <p:spPr>
+          <a:xfrm>
+            <a:off x="10469880" y="3694176"/>
+            <a:ext cx="868680" cy="566928"/>
           </a:xfrm>
           <a:prstGeom prst="rect">
             <a:avLst/>
@@ -8153,13 +8328,13 @@
       </p:sp>
       <p:sp>
         <p:nvSpPr>
-          <p:cNvPr id="20" name="Shape 17"/>
-          <p:cNvSpPr/>
-          <p:nvPr/>
-        </p:nvSpPr>
-        <p:spPr>
-          <a:xfrm>
-            <a:off x="7863840" y="4425696"/>
+          <p:cNvPr id="22" name="Shape 19"/>
+          <p:cNvSpPr/>
+          <p:nvPr/>
+        </p:nvSpPr>
+        <p:spPr>
+          <a:xfrm>
+            <a:off x="7863840" y="4315968"/>
             <a:ext cx="3639312" cy="566928"/>
           </a:xfrm>
           <a:prstGeom prst="roundRect">
@@ -8175,13 +8350,13 @@
       </p:sp>
       <p:sp>
         <p:nvSpPr>
-          <p:cNvPr id="21" name="Shape 18"/>
-          <p:cNvSpPr/>
-          <p:nvPr/>
-        </p:nvSpPr>
-        <p:spPr>
-          <a:xfrm>
-            <a:off x="7973568" y="4599432"/>
+          <p:cNvPr id="23" name="Shape 20"/>
+          <p:cNvSpPr/>
+          <p:nvPr/>
+        </p:nvSpPr>
+        <p:spPr>
+          <a:xfrm>
+            <a:off x="7973568" y="4489704"/>
             <a:ext cx="219456" cy="219456"/>
           </a:xfrm>
           <a:prstGeom prst="ellipse">
@@ -8195,30 +8370,30 @@
       </p:sp>
       <p:sp>
         <p:nvSpPr>
-          <p:cNvPr id="22" name="Text 19"/>
-          <p:cNvSpPr/>
-          <p:nvPr/>
-        </p:nvSpPr>
-        <p:spPr>
-          <a:xfrm>
-            <a:off x="8302752" y="4425696"/>
-            <a:ext cx="2103120" cy="566928"/>
-          </a:xfrm>
-          <a:prstGeom prst="rect">
-            <a:avLst/>
-          </a:prstGeom>
-          <a:noFill/>
-          <a:ln/>
-        </p:spPr>
-        <p:txBody>
-          <a:bodyPr wrap="square" lIns="0" tIns="0" rIns="0" bIns="0" rtlCol="0" anchor="ctr"/>
-          <a:lstStyle/>
-          <a:p>
-            <a:pPr algn="l" indent="0" marL="0">
-              <a:buNone/>
-            </a:pPr>
-            <a:r>
-              <a:rPr lang="en-US" sz="1300" dirty="0">
+          <p:cNvPr id="24" name="Text 21"/>
+          <p:cNvSpPr/>
+          <p:nvPr/>
+        </p:nvSpPr>
+        <p:spPr>
+          <a:xfrm>
+            <a:off x="8302752" y="4315968"/>
+            <a:ext cx="1600200" cy="566928"/>
+          </a:xfrm>
+          <a:prstGeom prst="rect">
+            <a:avLst/>
+          </a:prstGeom>
+          <a:noFill/>
+          <a:ln/>
+        </p:spPr>
+        <p:txBody>
+          <a:bodyPr wrap="square" lIns="0" tIns="0" rIns="0" bIns="0" rtlCol="0" anchor="ctr"/>
+          <a:lstStyle/>
+          <a:p>
+            <a:pPr indent="0" marL="0">
+              <a:buNone/>
+            </a:pPr>
+            <a:r>
+              <a:rPr lang="en-US" sz="1250" dirty="0">
                 <a:solidFill>
                   <a:srgbClr val="1A2433"/>
                 </a:solidFill>
@@ -8228,20 +8403,59 @@
               </a:rPr>
               <a:t>Rechazadas</a:t>
             </a:r>
-            <a:endParaRPr lang="en-US" sz="1300" dirty="0"/>
-          </a:p>
-        </p:txBody>
-      </p:sp>
-      <p:sp>
-        <p:nvSpPr>
-          <p:cNvPr id="23" name="Text 20"/>
-          <p:cNvSpPr/>
-          <p:nvPr/>
-        </p:nvSpPr>
-        <p:spPr>
-          <a:xfrm>
-            <a:off x="10058400" y="4425696"/>
-            <a:ext cx="1280160" cy="566928"/>
+            <a:endParaRPr lang="en-US" sz="1250" dirty="0"/>
+          </a:p>
+        </p:txBody>
+      </p:sp>
+      <p:sp>
+        <p:nvSpPr>
+          <p:cNvPr id="25" name="Text 22"/>
+          <p:cNvSpPr/>
+          <p:nvPr/>
+        </p:nvSpPr>
+        <p:spPr>
+          <a:xfrm>
+            <a:off x="9509760" y="4315968"/>
+            <a:ext cx="914400" cy="566928"/>
+          </a:xfrm>
+          <a:prstGeom prst="rect">
+            <a:avLst/>
+          </a:prstGeom>
+          <a:noFill/>
+          <a:ln/>
+        </p:spPr>
+        <p:txBody>
+          <a:bodyPr wrap="square" lIns="0" tIns="0" rIns="0" bIns="0" rtlCol="0" anchor="ctr"/>
+          <a:lstStyle/>
+          <a:p>
+            <a:pPr algn="r" indent="0" marL="0">
+              <a:buNone/>
+            </a:pPr>
+            <a:r>
+              <a:rPr lang="en-US" sz="950" b="1" dirty="0">
+                <a:solidFill>
+                  <a:srgbClr val="C0392B"/>
+                </a:solidFill>
+                <a:latin typeface="Calibri" pitchFamily="34" charset="0"/>
+                <a:ea typeface="Calibri" pitchFamily="34" charset="-122"/>
+                <a:cs typeface="Calibri" pitchFamily="34" charset="-120"/>
+              </a:rPr>
+              <a:t>▲ +4</a:t>
+            </a:r>
+            <a:endParaRPr lang="en-US" sz="950" dirty="0"/>
+          </a:p>
+        </p:txBody>
+      </p:sp>
+      <p:sp>
+        <p:nvSpPr>
+          <p:cNvPr id="26" name="Text 23"/>
+          <p:cNvSpPr/>
+          <p:nvPr/>
+        </p:nvSpPr>
+        <p:spPr>
+          <a:xfrm>
+            <a:off x="10469880" y="4315968"/>
+            <a:ext cx="868680" cy="566928"/>
           </a:xfrm>
           <a:prstGeom prst="rect">
             <a:avLst/>
@@ -8265,7 +8479,7 @@
                 <a:ea typeface="Cambria" pitchFamily="34" charset="-122"/>
                 <a:cs typeface="Cambria" pitchFamily="34" charset="-120"/>
               </a:rPr>
-              <a:t>8</a:t>
+              <a:t>12</a:t>
             </a:r>
             <a:endParaRPr lang="en-US" sz="2200" dirty="0"/>
           </a:p>
@@ -8273,13 +8487,13 @@
       </p:sp>
       <p:sp>
         <p:nvSpPr>
-          <p:cNvPr id="24" name="Shape 21"/>
-          <p:cNvSpPr/>
-          <p:nvPr/>
-        </p:nvSpPr>
-        <p:spPr>
-          <a:xfrm>
-            <a:off x="7863840" y="5084064"/>
+          <p:cNvPr id="27" name="Shape 24"/>
+          <p:cNvSpPr/>
+          <p:nvPr/>
+        </p:nvSpPr>
+        <p:spPr>
+          <a:xfrm>
+            <a:off x="7863840" y="4937760"/>
             <a:ext cx="3639312" cy="566928"/>
           </a:xfrm>
           <a:prstGeom prst="roundRect">
@@ -8295,13 +8509,13 @@
       </p:sp>
       <p:sp>
         <p:nvSpPr>
-          <p:cNvPr id="25" name="Shape 22"/>
-          <p:cNvSpPr/>
-          <p:nvPr/>
-        </p:nvSpPr>
-        <p:spPr>
-          <a:xfrm>
-            <a:off x="7973568" y="5257800"/>
+          <p:cNvPr id="28" name="Shape 25"/>
+          <p:cNvSpPr/>
+          <p:nvPr/>
+        </p:nvSpPr>
+        <p:spPr>
+          <a:xfrm>
+            <a:off x="7973568" y="5111496"/>
             <a:ext cx="219456" cy="219456"/>
           </a:xfrm>
           <a:prstGeom prst="ellipse">
@@ -8315,30 +8529,30 @@
       </p:sp>
       <p:sp>
         <p:nvSpPr>
-          <p:cNvPr id="26" name="Text 23"/>
-          <p:cNvSpPr/>
-          <p:nvPr/>
-        </p:nvSpPr>
-        <p:spPr>
-          <a:xfrm>
-            <a:off x="8302752" y="5084064"/>
-            <a:ext cx="2103120" cy="566928"/>
-          </a:xfrm>
-          <a:prstGeom prst="rect">
-            <a:avLst/>
-          </a:prstGeom>
-          <a:noFill/>
-          <a:ln/>
-        </p:spPr>
-        <p:txBody>
-          <a:bodyPr wrap="square" lIns="0" tIns="0" rIns="0" bIns="0" rtlCol="0" anchor="ctr"/>
-          <a:lstStyle/>
-          <a:p>
-            <a:pPr algn="l" indent="0" marL="0">
-              <a:buNone/>
-            </a:pPr>
-            <a:r>
-              <a:rPr lang="en-US" sz="1300" dirty="0">
+          <p:cNvPr id="29" name="Text 26"/>
+          <p:cNvSpPr/>
+          <p:nvPr/>
+        </p:nvSpPr>
+        <p:spPr>
+          <a:xfrm>
+            <a:off x="8302752" y="4937760"/>
+            <a:ext cx="1600200" cy="566928"/>
+          </a:xfrm>
+          <a:prstGeom prst="rect">
+            <a:avLst/>
+          </a:prstGeom>
+          <a:noFill/>
+          <a:ln/>
+        </p:spPr>
+        <p:txBody>
+          <a:bodyPr wrap="square" lIns="0" tIns="0" rIns="0" bIns="0" rtlCol="0" anchor="ctr"/>
+          <a:lstStyle/>
+          <a:p>
+            <a:pPr indent="0" marL="0">
+              <a:buNone/>
+            </a:pPr>
+            <a:r>
+              <a:rPr lang="en-US" sz="1250" dirty="0">
                 <a:solidFill>
                   <a:srgbClr val="1A2433"/>
                 </a:solidFill>
@@ -8348,20 +8562,20 @@
               </a:rPr>
               <a:t>Aprobadas</a:t>
             </a:r>
-            <a:endParaRPr lang="en-US" sz="1300" dirty="0"/>
-          </a:p>
-        </p:txBody>
-      </p:sp>
-      <p:sp>
-        <p:nvSpPr>
-          <p:cNvPr id="27" name="Text 24"/>
-          <p:cNvSpPr/>
-          <p:nvPr/>
-        </p:nvSpPr>
-        <p:spPr>
-          <a:xfrm>
-            <a:off x="10058400" y="5084064"/>
-            <a:ext cx="1280160" cy="566928"/>
+            <a:endParaRPr lang="en-US" sz="1250" dirty="0"/>
+          </a:p>
+        </p:txBody>
+      </p:sp>
+      <p:sp>
+        <p:nvSpPr>
+          <p:cNvPr id="30" name="Text 27"/>
+          <p:cNvSpPr/>
+          <p:nvPr/>
+        </p:nvSpPr>
+        <p:spPr>
+          <a:xfrm>
+            <a:off x="10469880" y="4937760"/>
+            <a:ext cx="868680" cy="566928"/>
           </a:xfrm>
           <a:prstGeom prst="rect">
             <a:avLst/>
@@ -8393,14 +8607,14 @@
       </p:sp>
       <p:sp>
         <p:nvSpPr>
-          <p:cNvPr id="28" name="Text 25"/>
-          <p:cNvSpPr/>
-          <p:nvPr/>
-        </p:nvSpPr>
-        <p:spPr>
-          <a:xfrm>
-            <a:off x="7863840" y="5779008"/>
-            <a:ext cx="3657600" cy="457200"/>
+          <p:cNvPr id="31" name="Text 28"/>
+          <p:cNvSpPr/>
+          <p:nvPr/>
+        </p:nvSpPr>
+        <p:spPr>
+          <a:xfrm>
+            <a:off x="7863840" y="5559552"/>
+            <a:ext cx="3657600" cy="402336"/>
           </a:xfrm>
           <a:prstGeom prst="rect">
             <a:avLst/>
@@ -8416,7 +8630,7 @@
               <a:buNone/>
             </a:pPr>
             <a:r>
-              <a:rPr lang="en-US" sz="1050" i="1" dirty="0">
+              <a:rPr lang="en-US" sz="1000" i="1" dirty="0">
                 <a:solidFill>
                   <a:srgbClr val="56606E"/>
                 </a:solidFill>
@@ -8424,22 +8638,22 @@
                 <a:ea typeface="Calibri" pitchFamily="34" charset="-122"/>
                 <a:cs typeface="Calibri" pitchFamily="34" charset="-120"/>
               </a:rPr>
-              <a:t>Cuello de botella: revisión del cliente y rechazos por rearmar. La aprobación efectiva es el próximo hito a destrabar.</a:t>
-            </a:r>
-            <a:endParaRPr lang="en-US" sz="1050" dirty="0"/>
-          </a:p>
-        </p:txBody>
-      </p:sp>
-      <p:sp>
-        <p:nvSpPr>
-          <p:cNvPr id="29" name="Text 26"/>
+              <a:t>Cuello de botella: la revisión del cliente devuelve más carpetas de las que aprueba. Convertir entregas en aprobaciones es el próximo hito.</a:t>
+            </a:r>
+            <a:endParaRPr lang="en-US" sz="1000" dirty="0"/>
+          </a:p>
+        </p:txBody>
+      </p:sp>
+      <p:sp>
+        <p:nvSpPr>
+          <p:cNvPr id="32" name="Text 29"/>
           <p:cNvSpPr/>
           <p:nvPr/>
         </p:nvSpPr>
         <p:spPr>
           <a:xfrm>
             <a:off x="457200" y="6473952"/>
-            <a:ext cx="8961120" cy="274320"/>
+            <a:ext cx="9692640" cy="274320"/>
           </a:xfrm>
           <a:prstGeom prst="rect">
             <a:avLst/>
@@ -8463,7 +8677,7 @@
                 <a:ea typeface="Calibri" pitchFamily="34" charset="-122"/>
                 <a:cs typeface="Calibri" pitchFamily="34" charset="-120"/>
               </a:rPr>
-              <a:t>Fuente: Estatus.xlsx · Corte 16-jul-2026 · Áreas 2000/3000/4000/8000</a:t>
+              <a:t>Fuente: Estatus_Resumen_General_QAQC.xlsx · Corte 26-07-2026 · Áreas 2000/3000/4000/8000</a:t>
             </a:r>
             <a:endParaRPr lang="en-US" sz="850" dirty="0"/>
           </a:p>
@@ -8471,7 +8685,7 @@
       </p:sp>
       <p:sp>
         <p:nvSpPr>
-          <p:cNvPr id="30" name="Text 27"/>
+          <p:cNvPr id="33" name="Text 30"/>
           <p:cNvSpPr/>
           <p:nvPr/>
         </p:nvSpPr>
@@ -8651,7 +8865,7 @@
                 <a:ea typeface="Calibri" pitchFamily="34" charset="-122"/>
                 <a:cs typeface="Calibri" pitchFamily="34" charset="-120"/>
               </a:rPr>
-              <a:t>1.988 P1 levantados; 57,7% cerrados. El pendiente se concentra en Piping, Eléctrica e Instrumentación, y físicamente en el área 3000.</a:t>
+              <a:t>1.988 P1 levantados; 57,7% cerrados. El pendiente se concentra en Piping, Eléctrica, Instrumentación y Control, y físicamente en el área 3000.</a:t>
             </a:r>
             <a:endParaRPr lang="en-US" sz="1350" dirty="0"/>
           </a:p>
@@ -8835,19 +9049,19 @@
         <p:spPr>
           <a:xfrm>
             <a:off x="10241280" y="2423160"/>
-            <a:ext cx="1188720" cy="320040"/>
-          </a:xfrm>
-          <a:prstGeom prst="rect">
-            <a:avLst/>
-          </a:prstGeom>
-          <a:noFill/>
-          <a:ln/>
-        </p:spPr>
-        <p:txBody>
-          <a:bodyPr wrap="square" lIns="0" tIns="0" rIns="0" bIns="0" rtlCol="0" anchor="ctr"/>
-          <a:lstStyle/>
-          <a:p>
-            <a:pPr algn="l" indent="0" marL="0">
+            <a:ext cx="1280160" cy="320040"/>
+          </a:xfrm>
+          <a:prstGeom prst="rect">
+            <a:avLst/>
+          </a:prstGeom>
+          <a:noFill/>
+          <a:ln/>
+        </p:spPr>
+        <p:txBody>
+          <a:bodyPr wrap="square" lIns="0" tIns="0" rIns="0" bIns="0" rtlCol="0" anchor="ctr"/>
+          <a:lstStyle/>
+          <a:p>
+            <a:pPr indent="0" marL="0">
               <a:buNone/>
             </a:pPr>
             <a:r>
@@ -8874,19 +9088,19 @@
         <p:spPr>
           <a:xfrm>
             <a:off x="10241280" y="2651760"/>
-            <a:ext cx="1188720" cy="274320"/>
-          </a:xfrm>
-          <a:prstGeom prst="rect">
-            <a:avLst/>
-          </a:prstGeom>
-          <a:noFill/>
-          <a:ln/>
-        </p:spPr>
-        <p:txBody>
-          <a:bodyPr wrap="square" lIns="0" tIns="0" rIns="0" bIns="0" rtlCol="0" anchor="ctr"/>
-          <a:lstStyle/>
-          <a:p>
-            <a:pPr algn="l" indent="0" marL="0">
+            <a:ext cx="1280160" cy="274320"/>
+          </a:xfrm>
+          <a:prstGeom prst="rect">
+            <a:avLst/>
+          </a:prstGeom>
+          <a:noFill/>
+          <a:ln/>
+        </p:spPr>
+        <p:txBody>
+          <a:bodyPr wrap="square" lIns="0" tIns="0" rIns="0" bIns="0" rtlCol="0" anchor="ctr"/>
+          <a:lstStyle/>
+          <a:p>
+            <a:pPr indent="0" marL="0">
               <a:buNone/>
             </a:pPr>
             <a:r>
@@ -8898,7 +9112,7 @@
                 <a:ea typeface="Calibri" pitchFamily="34" charset="-122"/>
                 <a:cs typeface="Calibri" pitchFamily="34" charset="-120"/>
               </a:rPr>
-              <a:t>1.147</a:t>
+              <a:t>1.148</a:t>
             </a:r>
             <a:endParaRPr lang="en-US" sz="1100" dirty="0"/>
           </a:p>
@@ -8933,19 +9147,19 @@
         <p:spPr>
           <a:xfrm>
             <a:off x="10241280" y="2990088"/>
-            <a:ext cx="1188720" cy="320040"/>
-          </a:xfrm>
-          <a:prstGeom prst="rect">
-            <a:avLst/>
-          </a:prstGeom>
-          <a:noFill/>
-          <a:ln/>
-        </p:spPr>
-        <p:txBody>
-          <a:bodyPr wrap="square" lIns="0" tIns="0" rIns="0" bIns="0" rtlCol="0" anchor="ctr"/>
-          <a:lstStyle/>
-          <a:p>
-            <a:pPr algn="l" indent="0" marL="0">
+            <a:ext cx="1280160" cy="320040"/>
+          </a:xfrm>
+          <a:prstGeom prst="rect">
+            <a:avLst/>
+          </a:prstGeom>
+          <a:noFill/>
+          <a:ln/>
+        </p:spPr>
+        <p:txBody>
+          <a:bodyPr wrap="square" lIns="0" tIns="0" rIns="0" bIns="0" rtlCol="0" anchor="ctr"/>
+          <a:lstStyle/>
+          <a:p>
+            <a:pPr indent="0" marL="0">
               <a:buNone/>
             </a:pPr>
             <a:r>
@@ -8972,19 +9186,19 @@
         <p:spPr>
           <a:xfrm>
             <a:off x="10241280" y="3218688"/>
-            <a:ext cx="1188720" cy="274320"/>
-          </a:xfrm>
-          <a:prstGeom prst="rect">
-            <a:avLst/>
-          </a:prstGeom>
-          <a:noFill/>
-          <a:ln/>
-        </p:spPr>
-        <p:txBody>
-          <a:bodyPr wrap="square" lIns="0" tIns="0" rIns="0" bIns="0" rtlCol="0" anchor="ctr"/>
-          <a:lstStyle/>
-          <a:p>
-            <a:pPr algn="l" indent="0" marL="0">
+            <a:ext cx="1280160" cy="274320"/>
+          </a:xfrm>
+          <a:prstGeom prst="rect">
+            <a:avLst/>
+          </a:prstGeom>
+          <a:noFill/>
+          <a:ln/>
+        </p:spPr>
+        <p:txBody>
+          <a:bodyPr wrap="square" lIns="0" tIns="0" rIns="0" bIns="0" rtlCol="0" anchor="ctr"/>
+          <a:lstStyle/>
+          <a:p>
+            <a:pPr indent="0" marL="0">
               <a:buNone/>
             </a:pPr>
             <a:r>
@@ -9031,19 +9245,19 @@
         <p:spPr>
           <a:xfrm>
             <a:off x="10241280" y="3557016"/>
-            <a:ext cx="1188720" cy="320040"/>
-          </a:xfrm>
-          <a:prstGeom prst="rect">
-            <a:avLst/>
-          </a:prstGeom>
-          <a:noFill/>
-          <a:ln/>
-        </p:spPr>
-        <p:txBody>
-          <a:bodyPr wrap="square" lIns="0" tIns="0" rIns="0" bIns="0" rtlCol="0" anchor="ctr"/>
-          <a:lstStyle/>
-          <a:p>
-            <a:pPr algn="l" indent="0" marL="0">
+            <a:ext cx="1280160" cy="320040"/>
+          </a:xfrm>
+          <a:prstGeom prst="rect">
+            <a:avLst/>
+          </a:prstGeom>
+          <a:noFill/>
+          <a:ln/>
+        </p:spPr>
+        <p:txBody>
+          <a:bodyPr wrap="square" lIns="0" tIns="0" rIns="0" bIns="0" rtlCol="0" anchor="ctr"/>
+          <a:lstStyle/>
+          <a:p>
+            <a:pPr indent="0" marL="0">
               <a:buNone/>
             </a:pPr>
             <a:r>
@@ -9055,7 +9269,7 @@
                 <a:ea typeface="Calibri" pitchFamily="34" charset="-122"/>
                 <a:cs typeface="Calibri" pitchFamily="34" charset="-120"/>
               </a:rPr>
-              <a:t>Listo p/ revisión</a:t>
+              <a:t>En trámite</a:t>
             </a:r>
             <a:endParaRPr lang="en-US" sz="1100" dirty="0"/>
           </a:p>
@@ -9070,19 +9284,19 @@
         <p:spPr>
           <a:xfrm>
             <a:off x="10241280" y="3785616"/>
-            <a:ext cx="1188720" cy="274320"/>
-          </a:xfrm>
-          <a:prstGeom prst="rect">
-            <a:avLst/>
-          </a:prstGeom>
-          <a:noFill/>
-          <a:ln/>
-        </p:spPr>
-        <p:txBody>
-          <a:bodyPr wrap="square" lIns="0" tIns="0" rIns="0" bIns="0" rtlCol="0" anchor="ctr"/>
-          <a:lstStyle/>
-          <a:p>
-            <a:pPr algn="l" indent="0" marL="0">
+            <a:ext cx="1280160" cy="274320"/>
+          </a:xfrm>
+          <a:prstGeom prst="rect">
+            <a:avLst/>
+          </a:prstGeom>
+          <a:noFill/>
+          <a:ln/>
+        </p:spPr>
+        <p:txBody>
+          <a:bodyPr wrap="square" lIns="0" tIns="0" rIns="0" bIns="0" rtlCol="0" anchor="ctr"/>
+          <a:lstStyle/>
+          <a:p>
+            <a:pPr indent="0" marL="0">
               <a:buNone/>
             </a:pPr>
             <a:r>
@@ -9094,7 +9308,7 @@
                 <a:ea typeface="Calibri" pitchFamily="34" charset="-122"/>
                 <a:cs typeface="Calibri" pitchFamily="34" charset="-120"/>
               </a:rPr>
-              <a:t>11</a:t>
+              <a:t>10</a:t>
             </a:r>
             <a:endParaRPr lang="en-US" sz="1100" dirty="0"/>
           </a:p>
@@ -9177,7 +9391,7 @@
                 <a:ea typeface="Calibri" pitchFamily="34" charset="-122"/>
                 <a:cs typeface="Calibri" pitchFamily="34" charset="-120"/>
               </a:rPr>
-              <a:t>707 de 830 P1 abiertos (85%) están en el área 3000. Áreas 2000 (91,8%) y 8000 (91,7%) ya casi cerradas.</a:t>
+              <a:t>707 de 830 P1 abiertos (85,2%) están en el área 3000. Áreas 2000 y 8000 sobre 90% de cierre.</a:t>
             </a:r>
             <a:endParaRPr lang="en-US" sz="1150" dirty="0"/>
           </a:p>
@@ -9192,7 +9406,7 @@
         <p:spPr>
           <a:xfrm>
             <a:off x="457200" y="6473952"/>
-            <a:ext cx="8961120" cy="274320"/>
+            <a:ext cx="9692640" cy="274320"/>
           </a:xfrm>
           <a:prstGeom prst="rect">
             <a:avLst/>
@@ -9216,7 +9430,7 @@
                 <a:ea typeface="Calibri" pitchFamily="34" charset="-122"/>
                 <a:cs typeface="Calibri" pitchFamily="34" charset="-120"/>
               </a:rPr>
-              <a:t>Fuente: Estatus.xlsx · Corte 16-jul-2026 · Áreas 2000/3000/4000/8000</a:t>
+              <a:t>Fuente: Estatus_Resumen_General_QAQC.xlsx · Corte 26-07-2026 · Áreas 2000/3000/4000/8000</a:t>
             </a:r>
             <a:endParaRPr lang="en-US" sz="850" dirty="0"/>
           </a:p>
@@ -9385,7 +9599,7 @@
                 <a:ea typeface="Cambria" pitchFamily="34" charset="-122"/>
                 <a:cs typeface="Cambria" pitchFamily="34" charset="-120"/>
               </a:rPr>
-              <a:t>Dónde poner el esfuerzo al 31-jul</a:t>
+              <a:t>Dónde poner el esfuerzo esta semana</a:t>
             </a:r>
             <a:endParaRPr lang="en-US" sz="3000" dirty="0"/>
           </a:p>
@@ -9434,7 +9648,7 @@
           <a:bodyPr wrap="square" lIns="0" tIns="0" rIns="0" bIns="0" rtlCol="0" anchor="ctr"/>
           <a:lstStyle/>
           <a:p>
-            <a:pPr algn="l" indent="0" marL="0">
+            <a:pPr indent="0" marL="0">
               <a:buNone/>
             </a:pPr>
             <a:r>
@@ -9460,24 +9674,24 @@
         </p:nvSpPr>
         <p:spPr>
           <a:xfrm>
-            <a:off x="1691640" y="1856232"/>
-            <a:ext cx="4023360" cy="502920"/>
-          </a:xfrm>
-          <a:prstGeom prst="rect">
-            <a:avLst/>
-          </a:prstGeom>
-          <a:noFill/>
-          <a:ln/>
-        </p:spPr>
-        <p:txBody>
-          <a:bodyPr wrap="square" lIns="0" tIns="0" rIns="0" bIns="0" rtlCol="0" anchor="ctr"/>
-          <a:lstStyle/>
-          <a:p>
-            <a:pPr algn="l" indent="0" marL="0">
-              <a:buNone/>
-            </a:pPr>
-            <a:r>
-              <a:rPr lang="en-US" sz="1700" b="1" dirty="0">
+            <a:off x="1691640" y="1819656"/>
+            <a:ext cx="4023360" cy="548640"/>
+          </a:xfrm>
+          <a:prstGeom prst="rect">
+            <a:avLst/>
+          </a:prstGeom>
+          <a:noFill/>
+          <a:ln/>
+        </p:spPr>
+        <p:txBody>
+          <a:bodyPr wrap="square" lIns="0" tIns="0" rIns="0" bIns="0" rtlCol="0" anchor="ctr"/>
+          <a:lstStyle/>
+          <a:p>
+            <a:pPr indent="0" marL="0">
+              <a:buNone/>
+            </a:pPr>
+            <a:r>
+              <a:rPr lang="en-US" sz="1500" b="1" dirty="0">
                 <a:solidFill>
                   <a:srgbClr val="FFFFFF"/>
                 </a:solidFill>
@@ -9485,9 +9699,9 @@
                 <a:ea typeface="Calibri" pitchFamily="34" charset="-122"/>
                 <a:cs typeface="Calibri" pitchFamily="34" charset="-120"/>
               </a:rPr>
-              <a:t>Destrabar carpetas TOP</a:t>
-            </a:r>
-            <a:endParaRPr lang="en-US" sz="1700" dirty="0"/>
+              <a:t>Destrabar aprobaciones de carpetas TOP</a:t>
+            </a:r>
+            <a:endParaRPr lang="en-US" sz="1500" dirty="0"/>
           </a:p>
         </p:txBody>
       </p:sp>
@@ -9499,7 +9713,7 @@
         </p:nvSpPr>
         <p:spPr>
           <a:xfrm>
-            <a:off x="1691640" y="2377440"/>
+            <a:off x="1691640" y="2404872"/>
             <a:ext cx="3977640" cy="1005840"/>
           </a:xfrm>
           <a:prstGeom prst="rect">
@@ -9512,14 +9726,14 @@
           <a:bodyPr wrap="square" lIns="0" tIns="0" rIns="0" bIns="0" rtlCol="0" anchor="t"/>
           <a:lstStyle/>
           <a:p>
-            <a:pPr algn="l" indent="0" marL="0">
+            <a:pPr indent="0" marL="0">
               <a:lnSpc>
-                <a:spcPts val="1600"/>
+                <a:spcPts val="1500"/>
               </a:lnSpc>
               <a:buNone/>
             </a:pPr>
             <a:r>
-              <a:rPr lang="en-US" sz="1200" dirty="0">
+              <a:rPr lang="en-US" sz="1150" dirty="0">
                 <a:solidFill>
                   <a:srgbClr val="DCE6F0"/>
                 </a:solidFill>
@@ -9527,9 +9741,9 @@
                 <a:ea typeface="Calibri" pitchFamily="34" charset="-122"/>
                 <a:cs typeface="Calibri" pitchFamily="34" charset="-120"/>
               </a:rPr>
-              <a:t>0 aprobadas de 135. Priorizar cierre de las 17 en revisión y rearmado de las 8 rechazadas (áreas 2000 y 3000) para convertir entregas en aprobaciones.</a:t>
-            </a:r>
-            <a:endParaRPr lang="en-US" sz="1200" dirty="0"/>
+              <a:t>0 aprobadas de 135. Priorizar el cierre de las 14 en revisión y el rearmado de las 12 rechazadas para convertir entregas en aprobaciones.</a:t>
+            </a:r>
+            <a:endParaRPr lang="en-US" sz="1150" dirty="0"/>
           </a:p>
         </p:txBody>
       </p:sp>
@@ -9576,7 +9790,7 @@
           <a:bodyPr wrap="square" lIns="0" tIns="0" rIns="0" bIns="0" rtlCol="0" anchor="ctr"/>
           <a:lstStyle/>
           <a:p>
-            <a:pPr algn="l" indent="0" marL="0">
+            <a:pPr indent="0" marL="0">
               <a:buNone/>
             </a:pPr>
             <a:r>
@@ -9602,24 +9816,24 @@
         </p:nvSpPr>
         <p:spPr>
           <a:xfrm>
-            <a:off x="7479792" y="1856232"/>
-            <a:ext cx="4023360" cy="502920"/>
-          </a:xfrm>
-          <a:prstGeom prst="rect">
-            <a:avLst/>
-          </a:prstGeom>
-          <a:noFill/>
-          <a:ln/>
-        </p:spPr>
-        <p:txBody>
-          <a:bodyPr wrap="square" lIns="0" tIns="0" rIns="0" bIns="0" rtlCol="0" anchor="ctr"/>
-          <a:lstStyle/>
-          <a:p>
-            <a:pPr algn="l" indent="0" marL="0">
-              <a:buNone/>
-            </a:pPr>
-            <a:r>
-              <a:rPr lang="en-US" sz="1700" b="1" dirty="0">
+            <a:off x="7479792" y="1819656"/>
+            <a:ext cx="4023360" cy="548640"/>
+          </a:xfrm>
+          <a:prstGeom prst="rect">
+            <a:avLst/>
+          </a:prstGeom>
+          <a:noFill/>
+          <a:ln/>
+        </p:spPr>
+        <p:txBody>
+          <a:bodyPr wrap="square" lIns="0" tIns="0" rIns="0" bIns="0" rtlCol="0" anchor="ctr"/>
+          <a:lstStyle/>
+          <a:p>
+            <a:pPr indent="0" marL="0">
+              <a:buNone/>
+            </a:pPr>
+            <a:r>
+              <a:rPr lang="en-US" sz="1500" b="1" dirty="0">
                 <a:solidFill>
                   <a:srgbClr val="FFFFFF"/>
                 </a:solidFill>
@@ -9629,7 +9843,7 @@
               </a:rPr>
               <a:t>Atacar el atraso del área 3000</a:t>
             </a:r>
-            <a:endParaRPr lang="en-US" sz="1700" dirty="0"/>
+            <a:endParaRPr lang="en-US" sz="1500" dirty="0"/>
           </a:p>
         </p:txBody>
       </p:sp>
@@ -9641,7 +9855,7 @@
         </p:nvSpPr>
         <p:spPr>
           <a:xfrm>
-            <a:off x="7479792" y="2377440"/>
+            <a:off x="7479792" y="2404872"/>
             <a:ext cx="3977640" cy="1005840"/>
           </a:xfrm>
           <a:prstGeom prst="rect">
@@ -9654,14 +9868,14 @@
           <a:bodyPr wrap="square" lIns="0" tIns="0" rIns="0" bIns="0" rtlCol="0" anchor="t"/>
           <a:lstStyle/>
           <a:p>
-            <a:pPr algn="l" indent="0" marL="0">
+            <a:pPr indent="0" marL="0">
               <a:lnSpc>
-                <a:spcPts val="1600"/>
+                <a:spcPts val="1500"/>
               </a:lnSpc>
               <a:buNone/>
             </a:pPr>
             <a:r>
-              <a:rPr lang="en-US" sz="1200" dirty="0">
+              <a:rPr lang="en-US" sz="1150" dirty="0">
                 <a:solidFill>
                   <a:srgbClr val="DCE6F0"/>
                 </a:solidFill>
@@ -9669,9 +9883,9 @@
                 <a:ea typeface="Calibri" pitchFamily="34" charset="-122"/>
                 <a:cs typeface="Calibri" pitchFamily="34" charset="-120"/>
               </a:rPr>
-              <a:t>707 P1 abiertos (85% del total) y 41 caminatas 100% pendientes. Es la ruta crítica: sin 3000 no mejora ningún indicador global.</a:t>
-            </a:r>
-            <a:endParaRPr lang="en-US" sz="1200" dirty="0"/>
+              <a:t>707 P1 abiertos (85,2% del total) y 41 caminatas 100% pendientes. Es la ruta crítica: sin esta área no mejora ningún indicador global.</a:t>
+            </a:r>
+            <a:endParaRPr lang="en-US" sz="1150" dirty="0"/>
           </a:p>
         </p:txBody>
       </p:sp>
@@ -9718,7 +9932,7 @@
           <a:bodyPr wrap="square" lIns="0" tIns="0" rIns="0" bIns="0" rtlCol="0" anchor="ctr"/>
           <a:lstStyle/>
           <a:p>
-            <a:pPr algn="l" indent="0" marL="0">
+            <a:pPr indent="0" marL="0">
               <a:buNone/>
             </a:pPr>
             <a:r>
@@ -9744,24 +9958,24 @@
         </p:nvSpPr>
         <p:spPr>
           <a:xfrm>
-            <a:off x="1691640" y="4005072"/>
-            <a:ext cx="4023360" cy="502920"/>
-          </a:xfrm>
-          <a:prstGeom prst="rect">
-            <a:avLst/>
-          </a:prstGeom>
-          <a:noFill/>
-          <a:ln/>
-        </p:spPr>
-        <p:txBody>
-          <a:bodyPr wrap="square" lIns="0" tIns="0" rIns="0" bIns="0" rtlCol="0" anchor="ctr"/>
-          <a:lstStyle/>
-          <a:p>
-            <a:pPr algn="l" indent="0" marL="0">
-              <a:buNone/>
-            </a:pPr>
-            <a:r>
-              <a:rPr lang="en-US" sz="1700" b="1" dirty="0">
+            <a:off x="1691640" y="3968496"/>
+            <a:ext cx="4023360" cy="548640"/>
+          </a:xfrm>
+          <a:prstGeom prst="rect">
+            <a:avLst/>
+          </a:prstGeom>
+          <a:noFill/>
+          <a:ln/>
+        </p:spPr>
+        <p:txBody>
+          <a:bodyPr wrap="square" lIns="0" tIns="0" rIns="0" bIns="0" rtlCol="0" anchor="ctr"/>
+          <a:lstStyle/>
+          <a:p>
+            <a:pPr indent="0" marL="0">
+              <a:buNone/>
+            </a:pPr>
+            <a:r>
+              <a:rPr lang="en-US" sz="1500" b="1" dirty="0">
                 <a:solidFill>
                   <a:srgbClr val="FFFFFF"/>
                 </a:solidFill>
@@ -9769,9 +9983,9 @@
                 <a:ea typeface="Calibri" pitchFamily="34" charset="-122"/>
                 <a:cs typeface="Calibri" pitchFamily="34" charset="-120"/>
               </a:rPr>
-              <a:t>Recuperar los 401 P1 vencidos</a:t>
-            </a:r>
-            <a:endParaRPr lang="en-US" sz="1700" dirty="0"/>
+              <a:t>Recuperar los 405 P1 vencidos</a:t>
+            </a:r>
+            <a:endParaRPr lang="en-US" sz="1500" dirty="0"/>
           </a:p>
         </p:txBody>
       </p:sp>
@@ -9783,7 +9997,7 @@
         </p:nvSpPr>
         <p:spPr>
           <a:xfrm>
-            <a:off x="1691640" y="4526280"/>
+            <a:off x="1691640" y="4553712"/>
             <a:ext cx="3977640" cy="1005840"/>
           </a:xfrm>
           <a:prstGeom prst="rect">
@@ -9796,14 +10010,14 @@
           <a:bodyPr wrap="square" lIns="0" tIns="0" rIns="0" bIns="0" rtlCol="0" anchor="t"/>
           <a:lstStyle/>
           <a:p>
-            <a:pPr algn="l" indent="0" marL="0">
+            <a:pPr indent="0" marL="0">
               <a:lnSpc>
-                <a:spcPts val="1600"/>
+                <a:spcPts val="1500"/>
               </a:lnSpc>
               <a:buNone/>
             </a:pPr>
             <a:r>
-              <a:rPr lang="en-US" sz="1200" dirty="0">
+              <a:rPr lang="en-US" sz="1150" dirty="0">
                 <a:solidFill>
                   <a:srgbClr val="DCE6F0"/>
                 </a:solidFill>
@@ -9811,9 +10025,9 @@
                 <a:ea typeface="Calibri" pitchFamily="34" charset="-122"/>
                 <a:cs typeface="Calibri" pitchFamily="34" charset="-120"/>
               </a:rPr>
-              <a:t>Casi la mitad de los P1 abiertos superó su fecha de vencimiento. Foco en Instrumentación (128), Eléctrica (98) y Mecánica (84).</a:t>
-            </a:r>
-            <a:endParaRPr lang="en-US" sz="1200" dirty="0"/>
+              <a:t>48,8% de los P1 abiertos superó su fecha de vencimiento. Foco en Instrumentación y Control (128), Eléctrica (98), Mecánica (88).</a:t>
+            </a:r>
+            <a:endParaRPr lang="en-US" sz="1150" dirty="0"/>
           </a:p>
         </p:txBody>
       </p:sp>
@@ -9860,7 +10074,7 @@
           <a:bodyPr wrap="square" lIns="0" tIns="0" rIns="0" bIns="0" rtlCol="0" anchor="ctr"/>
           <a:lstStyle/>
           <a:p>
-            <a:pPr algn="l" indent="0" marL="0">
+            <a:pPr indent="0" marL="0">
               <a:buNone/>
             </a:pPr>
             <a:r>
@@ -9886,8 +10100,89 @@
         </p:nvSpPr>
         <p:spPr>
           <a:xfrm>
-            <a:off x="7479792" y="4005072"/>
-            <a:ext cx="4023360" cy="502920"/>
+            <a:off x="7479792" y="3968496"/>
+            <a:ext cx="4023360" cy="548640"/>
+          </a:xfrm>
+          <a:prstGeom prst="rect">
+            <a:avLst/>
+          </a:prstGeom>
+          <a:noFill/>
+          <a:ln/>
+        </p:spPr>
+        <p:txBody>
+          <a:bodyPr wrap="square" lIns="0" tIns="0" rIns="0" bIns="0" rtlCol="0" anchor="ctr"/>
+          <a:lstStyle/>
+          <a:p>
+            <a:pPr indent="0" marL="0">
+              <a:buNone/>
+            </a:pPr>
+            <a:r>
+              <a:rPr lang="en-US" sz="1500" b="1" dirty="0">
+                <a:solidFill>
+                  <a:srgbClr val="FFFFFF"/>
+                </a:solidFill>
+                <a:latin typeface="Calibri" pitchFamily="34" charset="0"/>
+                <a:ea typeface="Calibri" pitchFamily="34" charset="-122"/>
+                <a:cs typeface="Calibri" pitchFamily="34" charset="-120"/>
+              </a:rPr>
+              <a:t>Ejecutar las caminatas ya programadas</a:t>
+            </a:r>
+            <a:endParaRPr lang="en-US" sz="1500" dirty="0"/>
+          </a:p>
+        </p:txBody>
+      </p:sp>
+      <p:sp>
+        <p:nvSpPr>
+          <p:cNvPr id="20" name="Text 18"/>
+          <p:cNvSpPr/>
+          <p:nvPr/>
+        </p:nvSpPr>
+        <p:spPr>
+          <a:xfrm>
+            <a:off x="7479792" y="4553712"/>
+            <a:ext cx="3977640" cy="1005840"/>
+          </a:xfrm>
+          <a:prstGeom prst="rect">
+            <a:avLst/>
+          </a:prstGeom>
+          <a:noFill/>
+          <a:ln/>
+        </p:spPr>
+        <p:txBody>
+          <a:bodyPr wrap="square" lIns="0" tIns="0" rIns="0" bIns="0" rtlCol="0" anchor="t"/>
+          <a:lstStyle/>
+          <a:p>
+            <a:pPr indent="0" marL="0">
+              <a:lnSpc>
+                <a:spcPts val="1500"/>
+              </a:lnSpc>
+              <a:buNone/>
+            </a:pPr>
+            <a:r>
+              <a:rPr lang="en-US" sz="1150" dirty="0">
+                <a:solidFill>
+                  <a:srgbClr val="DCE6F0"/>
+                </a:solidFill>
+                <a:latin typeface="Calibri" pitchFamily="34" charset="0"/>
+                <a:ea typeface="Calibri" pitchFamily="34" charset="-122"/>
+                <a:cs typeface="Calibri" pitchFamily="34" charset="-120"/>
+              </a:rPr>
+              <a:t>45 subsistemas pendientes: 44 próximos a realizar y 1 por programar. La programación ya está hecha; falta ejecutarla para habilitar la entrega de carpetas.</a:t>
+            </a:r>
+            <a:endParaRPr lang="en-US" sz="1150" dirty="0"/>
+          </a:p>
+        </p:txBody>
+      </p:sp>
+      <p:sp>
+        <p:nvSpPr>
+          <p:cNvPr id="21" name="Text 19"/>
+          <p:cNvSpPr/>
+          <p:nvPr/>
+        </p:nvSpPr>
+        <p:spPr>
+          <a:xfrm>
+            <a:off x="457200" y="6473952"/>
+            <a:ext cx="9692640" cy="274320"/>
           </a:xfrm>
           <a:prstGeom prst="rect">
             <a:avLst/>
@@ -9903,87 +10198,6 @@
               <a:buNone/>
             </a:pPr>
             <a:r>
-              <a:rPr lang="en-US" sz="1700" b="1" dirty="0">
-                <a:solidFill>
-                  <a:srgbClr val="FFFFFF"/>
-                </a:solidFill>
-                <a:latin typeface="Calibri" pitchFamily="34" charset="0"/>
-                <a:ea typeface="Calibri" pitchFamily="34" charset="-122"/>
-                <a:cs typeface="Calibri" pitchFamily="34" charset="-120"/>
-              </a:rPr>
-              <a:t>Cerrar caminatas 100% restantes</a:t>
-            </a:r>
-            <a:endParaRPr lang="en-US" sz="1700" dirty="0"/>
-          </a:p>
-        </p:txBody>
-      </p:sp>
-      <p:sp>
-        <p:nvSpPr>
-          <p:cNvPr id="20" name="Text 18"/>
-          <p:cNvSpPr/>
-          <p:nvPr/>
-        </p:nvSpPr>
-        <p:spPr>
-          <a:xfrm>
-            <a:off x="7479792" y="4526280"/>
-            <a:ext cx="3977640" cy="1005840"/>
-          </a:xfrm>
-          <a:prstGeom prst="rect">
-            <a:avLst/>
-          </a:prstGeom>
-          <a:noFill/>
-          <a:ln/>
-        </p:spPr>
-        <p:txBody>
-          <a:bodyPr wrap="square" lIns="0" tIns="0" rIns="0" bIns="0" rtlCol="0" anchor="t"/>
-          <a:lstStyle/>
-          <a:p>
-            <a:pPr algn="l" indent="0" marL="0">
-              <a:lnSpc>
-                <a:spcPts val="1600"/>
-              </a:lnSpc>
-              <a:buNone/>
-            </a:pPr>
-            <a:r>
-              <a:rPr lang="en-US" sz="1200" dirty="0">
-                <a:solidFill>
-                  <a:srgbClr val="DCE6F0"/>
-                </a:solidFill>
-                <a:latin typeface="Calibri" pitchFamily="34" charset="0"/>
-                <a:ea typeface="Calibri" pitchFamily="34" charset="-122"/>
-                <a:cs typeface="Calibri" pitchFamily="34" charset="-120"/>
-              </a:rPr>
-              <a:t>45 subsistemas pendientes (9 próximos, 36 por programar). Programarlas habilita el levantamiento final de detalles y la entrega de carpetas.</a:t>
-            </a:r>
-            <a:endParaRPr lang="en-US" sz="1200" dirty="0"/>
-          </a:p>
-        </p:txBody>
-      </p:sp>
-      <p:sp>
-        <p:nvSpPr>
-          <p:cNvPr id="21" name="Text 19"/>
-          <p:cNvSpPr/>
-          <p:nvPr/>
-        </p:nvSpPr>
-        <p:spPr>
-          <a:xfrm>
-            <a:off x="457200" y="6473952"/>
-            <a:ext cx="8961120" cy="274320"/>
-          </a:xfrm>
-          <a:prstGeom prst="rect">
-            <a:avLst/>
-          </a:prstGeom>
-          <a:noFill/>
-          <a:ln/>
-        </p:spPr>
-        <p:txBody>
-          <a:bodyPr wrap="square" lIns="0" tIns="0" rIns="0" bIns="0" rtlCol="0" anchor="ctr"/>
-          <a:lstStyle/>
-          <a:p>
-            <a:pPr algn="l" indent="0" marL="0">
-              <a:buNone/>
-            </a:pPr>
-            <a:r>
               <a:rPr lang="en-US" sz="850" dirty="0">
                 <a:solidFill>
                   <a:srgbClr val="6E8CA8"/>
@@ -9992,7 +10206,7 @@
                 <a:ea typeface="Calibri" pitchFamily="34" charset="-122"/>
                 <a:cs typeface="Calibri" pitchFamily="34" charset="-120"/>
               </a:rPr>
-              <a:t>Fuente: Estatus.xlsx · Corte 16-jul-2026 · Áreas 2000/3000/4000/8000</a:t>
+              <a:t>Fuente: Estatus_Resumen_General_QAQC.xlsx · Corte 26-07-2026 · Áreas 2000/3000/4000/8000</a:t>
             </a:r>
             <a:endParaRPr lang="en-US" sz="850" dirty="0"/>
           </a:p>

--- a/panel_control_TOP_P1/Panel_Control_TOP_P1.pptx
+++ b/panel_control_TOP_P1/Panel_Control_TOP_P1.pptx
@@ -12,9 +12,14 @@
     <p:sldId id="260" r:id="rId6"/>
     <p:sldId id="261" r:id="rId7"/>
     <p:sldId id="262" r:id="rId8"/>
+    <p:sldId id="263" r:id="rId9"/>
+    <p:sldId id="264" r:id="rId10"/>
+    <p:sldId id="265" r:id="rId11"/>
+    <p:sldId id="266" r:id="rId12"/>
+    <p:sldId id="267" r:id="rId13"/>
   </p:sldIdLst>
   <p:notesMasterIdLst>
-    <p:notesMasterId r:id="rId9"/>
+    <p:notesMasterId r:id="rId14"/>
   </p:notesMasterIdLst>
   <p:sldSz cx="12191695" cy="6858000"/>
   <p:notesSz cx="6858000" cy="12191695"/>
@@ -1792,6 +1797,1013 @@
 </c:chartSpace>
 </file>
 
+<file path=ppt/charts/chart5.xml><?xml version="1.0" encoding="utf-8"?>
+<c:chartSpace xmlns:c="http://schemas.openxmlformats.org/drawingml/2006/chart" xmlns:a="http://schemas.openxmlformats.org/drawingml/2006/main" xmlns:r="http://schemas.openxmlformats.org/officeDocument/2006/relationships">
+  <c:date1904 val="0"/>
+  <c:roundedCorners val="1"/>
+  <c:chart>
+    <c:title>
+      <c:tx>
+        <c:rich>
+          <a:bodyPr/>
+          <a:lstStyle/>
+          <a:p>
+            <a:pPr>
+              <a:defRPr sz="1300" b="0" i="0" u="none" strike="noStrike">
+                <a:solidFill>
+                  <a:srgbClr val="1A2433"/>
+                </a:solidFill>
+                <a:latin typeface="Calibri"/>
+              </a:defRPr>
+            </a:pPr>
+            <a:r>
+              <a:rPr sz="1300" b="0" i="0" u="none" strike="noStrike">
+                <a:solidFill>
+                  <a:srgbClr val="1A2433"/>
+                </a:solidFill>
+                <a:latin typeface="Calibri"/>
+              </a:rPr>
+              <a:t>Subsistemas por estado de su caminata</a:t>
+            </a:r>
+          </a:p>
+        </c:rich>
+      </c:tx>
+      <c:layout/>
+      <c:overlay val="0"/>
+    </c:title>
+    <c:autoTitleDeleted val="0"/>
+    <c:plotArea>
+      <c:layout/>
+      <c:barChart>
+        <c:barDir val="bar"/>
+        <c:grouping val="stacked"/>
+        <c:varyColors val="0"/>
+        <c:ser>
+          <c:idx val="0"/>
+          <c:order val="0"/>
+          <c:tx>
+            <c:strRef>
+              <c:f>Sheet1!$B$1</c:f>
+              <c:strCache>
+                <c:ptCount val="1"/>
+                <c:pt idx="0">
+                  <c:v>Realizada</c:v>
+                </c:pt>
+              </c:strCache>
+            </c:strRef>
+          </c:tx>
+          <c:spPr>
+            <a:solidFill>
+              <a:srgbClr val="1F7A44"/>
+            </a:solidFill>
+            <a:effectLst/>
+          </c:spPr>
+          <c:invertIfNegative val="0"/>
+          <c:dLbls>
+            <c:numFmt formatCode="#,##0" sourceLinked="0"/>
+            <c:txPr>
+              <a:bodyPr/>
+              <a:lstStyle/>
+              <a:p>
+                <a:pPr>
+                  <a:defRPr b="1" i="0" strike="noStrike" sz="1100" u="none">
+                    <a:solidFill>
+                      <a:srgbClr val="1A2433"/>
+                    </a:solidFill>
+                    <a:latin typeface="Calibri"/>
+                  </a:defRPr>
+                </a:pPr>
+              </a:p>
+            </c:txPr>
+            <c:dLblPos val="ctr"/>
+            <c:showLegendKey val="0"/>
+            <c:showVal val="1"/>
+            <c:showCatName val="0"/>
+            <c:showSerName val="0"/>
+            <c:showPercent val="0"/>
+            <c:showBubbleSize val="0"/>
+            <c:showLeaderLines val="0"/>
+          </c:dLbls>
+          <c:cat>
+            <c:multiLvlStrRef>
+              <c:f>Sheet1!$A$2:$A$4</c:f>
+              <c:multiLvlStrCache>
+                <c:ptCount val="3"/>
+                <c:lvl>
+                  <c:pt idx="0">
+                    <c:v>Operable (C2)</c:v>
+                  </c:pt>
+                  <c:pt idx="1">
+                    <c:v>Componente (C2)</c:v>
+                  </c:pt>
+                  <c:pt idx="2">
+                    <c:v>Facility (C1)</c:v>
+                  </c:pt>
+                </c:lvl>
+              </c:multiLvlStrCache>
+            </c:multiLvlStrRef>
+          </c:cat>
+          <c:val>
+            <c:numRef>
+              <c:f>Sheet1!$B$2:$B$4</c:f>
+              <c:numCache>
+                <c:formatCode>General</c:formatCode>
+                <c:ptCount val="3"/>
+                <c:pt idx="0">
+                  <c:v>41</c:v>
+                </c:pt>
+                <c:pt idx="1">
+                  <c:v>2</c:v>
+                </c:pt>
+                <c:pt idx="2">
+                  <c:v>10</c:v>
+                </c:pt>
+              </c:numCache>
+            </c:numRef>
+          </c:val>
+        </c:ser>
+        <c:ser>
+          <c:idx val="1"/>
+          <c:order val="1"/>
+          <c:tx>
+            <c:strRef>
+              <c:f>Sheet1!$C$1</c:f>
+              <c:strCache>
+                <c:ptCount val="1"/>
+                <c:pt idx="0">
+                  <c:v>Pendiente</c:v>
+                </c:pt>
+              </c:strCache>
+            </c:strRef>
+          </c:tx>
+          <c:spPr>
+            <a:solidFill>
+              <a:srgbClr val="D9DFE6"/>
+            </a:solidFill>
+            <a:effectLst/>
+          </c:spPr>
+          <c:invertIfNegative val="0"/>
+          <c:dLbls>
+            <c:numFmt formatCode="#,##0" sourceLinked="0"/>
+            <c:txPr>
+              <a:bodyPr/>
+              <a:lstStyle/>
+              <a:p>
+                <a:pPr>
+                  <a:defRPr b="1" i="0" strike="noStrike" sz="1100" u="none">
+                    <a:solidFill>
+                      <a:srgbClr val="1A2433"/>
+                    </a:solidFill>
+                    <a:latin typeface="Calibri"/>
+                  </a:defRPr>
+                </a:pPr>
+              </a:p>
+            </c:txPr>
+            <c:dLblPos val="ctr"/>
+            <c:showLegendKey val="0"/>
+            <c:showVal val="1"/>
+            <c:showCatName val="0"/>
+            <c:showSerName val="0"/>
+            <c:showPercent val="0"/>
+            <c:showBubbleSize val="0"/>
+            <c:showLeaderLines val="0"/>
+          </c:dLbls>
+          <c:cat>
+            <c:multiLvlStrRef>
+              <c:f>Sheet1!$A$2:$A$4</c:f>
+              <c:multiLvlStrCache>
+                <c:ptCount val="3"/>
+                <c:lvl>
+                  <c:pt idx="0">
+                    <c:v>Operable (C2)</c:v>
+                  </c:pt>
+                  <c:pt idx="1">
+                    <c:v>Componente (C2)</c:v>
+                  </c:pt>
+                  <c:pt idx="2">
+                    <c:v>Facility (C1)</c:v>
+                  </c:pt>
+                </c:lvl>
+              </c:multiLvlStrCache>
+            </c:multiLvlStrRef>
+          </c:cat>
+          <c:val>
+            <c:numRef>
+              <c:f>Sheet1!$C$2:$C$4</c:f>
+              <c:numCache>
+                <c:formatCode>General</c:formatCode>
+                <c:ptCount val="3"/>
+                <c:pt idx="0">
+                  <c:v>39</c:v>
+                </c:pt>
+                <c:pt idx="1">
+                  <c:v>0</c:v>
+                </c:pt>
+                <c:pt idx="2">
+                  <c:v>5</c:v>
+                </c:pt>
+              </c:numCache>
+            </c:numRef>
+          </c:val>
+        </c:ser>
+        <c:dLbls>
+          <c:numFmt formatCode="#,##0" sourceLinked="0"/>
+          <c:txPr>
+            <a:bodyPr/>
+            <a:lstStyle/>
+            <a:p>
+              <a:pPr>
+                <a:defRPr b="1" i="0" strike="noStrike" sz="1100" u="none">
+                  <a:solidFill>
+                    <a:srgbClr val="1A2433"/>
+                  </a:solidFill>
+                  <a:latin typeface="Calibri"/>
+                </a:defRPr>
+              </a:pPr>
+            </a:p>
+          </c:txPr>
+          <c:dLblPos val="ctr"/>
+          <c:showLegendKey val="0"/>
+          <c:showVal val="1"/>
+          <c:showCatName val="0"/>
+          <c:showSerName val="0"/>
+          <c:showPercent val="0"/>
+          <c:showBubbleSize val="0"/>
+          <c:showLeaderLines val="0"/>
+        </c:dLbls>
+        <c:gapWidth val="55"/>
+        <c:overlap val="100"/>
+        <c:axId val="2094734554"/>
+        <c:axId val="2094734552"/>
+        <c:axId val="2094734556"/>
+      </c:barChart>
+      <c:catAx>
+        <c:axId val="2094734554"/>
+        <c:scaling>
+          <c:orientation val="minMax"/>
+        </c:scaling>
+        <c:delete val="0"/>
+        <c:axPos val="l"/>
+        <c:numFmt formatCode="General" sourceLinked="1"/>
+        <c:majorTickMark val="out"/>
+        <c:minorTickMark val="none"/>
+        <c:tickLblPos val="nextTo"/>
+        <c:spPr>
+          <a:ln w="12700" cap="flat">
+            <a:solidFill>
+              <a:srgbClr val="888888"/>
+            </a:solidFill>
+            <a:prstDash val="solid"/>
+            <a:round/>
+          </a:ln>
+        </c:spPr>
+        <c:txPr>
+          <a:bodyPr/>
+          <a:lstStyle/>
+          <a:p>
+            <a:pPr>
+              <a:defRPr sz="1200" b="1" i="0" u="none" strike="noStrike">
+                <a:solidFill>
+                  <a:srgbClr val="1A2433"/>
+                </a:solidFill>
+                <a:latin typeface="Calibri"/>
+              </a:defRPr>
+            </a:pPr>
+            <a:endParaRPr lang="en-US"/>
+          </a:p>
+        </c:txPr>
+        <c:crossAx val="2094734552"/>
+        <c:crosses val="autoZero"/>
+        <c:auto val="1"/>
+        <c:lblAlgn val="ctr"/>
+        <c:noMultiLvlLbl val="1"/>
+      </c:catAx>
+      <c:valAx>
+        <c:axId val="2094734552"/>
+        <c:scaling>
+          <c:orientation val="minMax"/>
+        </c:scaling>
+        <c:delete val="1"/>
+        <c:axPos val="b"/>
+        <c:numFmt formatCode="General" sourceLinked="0"/>
+        <c:majorTickMark val="out"/>
+        <c:minorTickMark val="none"/>
+        <c:tickLblPos val="low"/>
+        <c:spPr>
+          <a:ln w="12700" cap="flat">
+            <a:solidFill>
+              <a:srgbClr val="888888"/>
+            </a:solidFill>
+            <a:prstDash val="solid"/>
+            <a:round/>
+          </a:ln>
+        </c:spPr>
+        <c:txPr>
+          <a:bodyPr/>
+          <a:lstStyle/>
+          <a:p>
+            <a:pPr>
+              <a:defRPr sz="1200" b="0" i="0" u="none" strike="noStrike">
+                <a:solidFill>
+                  <a:srgbClr val="000000"/>
+                </a:solidFill>
+                <a:latin typeface="Arial"/>
+              </a:defRPr>
+            </a:pPr>
+            <a:endParaRPr lang="en-US"/>
+          </a:p>
+        </c:txPr>
+        <c:crossAx val="2094734554"/>
+        <c:crosses val="autoZero"/>
+        <c:crossBetween val="between"/>
+      </c:valAx>
+      <c:spPr>
+        <a:noFill/>
+        <a:ln>
+          <a:noFill/>
+        </a:ln>
+        <a:effectLst/>
+      </c:spPr>
+    </c:plotArea>
+    <c:legend>
+      <c:legendPos val="b"/>
+      <c:overlay val="0"/>
+      <c:txPr>
+        <a:bodyPr/>
+        <a:lstStyle/>
+        <a:p>
+          <a:pPr>
+            <a:defRPr sz="1100">
+              <a:solidFill>
+                <a:srgbClr val="56606E"/>
+              </a:solidFill>
+              <a:latin typeface="Calibri"/>
+              <a:cs typeface="Calibri"/>
+            </a:defRPr>
+          </a:pPr>
+          <a:endParaRPr lang="en-US"/>
+        </a:p>
+      </c:txPr>
+    </c:legend>
+    <c:plotVisOnly val="1"/>
+    <c:dispBlanksAs val="span"/>
+  </c:chart>
+  <c:spPr>
+    <a:solidFill>
+      <a:srgbClr val="FFFFFF"/>
+    </a:solidFill>
+    <a:ln>
+      <a:noFill/>
+    </a:ln>
+    <a:effectLst/>
+  </c:spPr>
+  <c:externalData r:id="rId1">
+    <c:autoUpdate val="0"/>
+  </c:externalData>
+</c:chartSpace>
+</file>
+
+<file path=ppt/charts/chart6.xml><?xml version="1.0" encoding="utf-8"?>
+<c:chartSpace xmlns:c="http://schemas.openxmlformats.org/drawingml/2006/chart" xmlns:a="http://schemas.openxmlformats.org/drawingml/2006/main" xmlns:r="http://schemas.openxmlformats.org/officeDocument/2006/relationships">
+  <c:date1904 val="0"/>
+  <c:roundedCorners val="1"/>
+  <c:chart>
+    <c:title>
+      <c:tx>
+        <c:rich>
+          <a:bodyPr/>
+          <a:lstStyle/>
+          <a:p>
+            <a:pPr>
+              <a:defRPr sz="1300" b="0" i="0" u="none" strike="noStrike">
+                <a:solidFill>
+                  <a:srgbClr val="1A2433"/>
+                </a:solidFill>
+                <a:latin typeface="Calibri"/>
+              </a:defRPr>
+            </a:pPr>
+            <a:r>
+              <a:rPr sz="1300" b="0" i="0" u="none" strike="noStrike">
+                <a:solidFill>
+                  <a:srgbClr val="1A2433"/>
+                </a:solidFill>
+                <a:latin typeface="Calibri"/>
+              </a:rPr>
+              <a:t>P1 abiertos por disciplina</a:t>
+            </a:r>
+          </a:p>
+        </c:rich>
+      </c:tx>
+      <c:layout/>
+      <c:overlay val="0"/>
+    </c:title>
+    <c:autoTitleDeleted val="0"/>
+    <c:plotArea>
+      <c:layout/>
+      <c:barChart>
+        <c:barDir val="bar"/>
+        <c:grouping val="stacked"/>
+        <c:varyColors val="0"/>
+        <c:ser>
+          <c:idx val="0"/>
+          <c:order val="0"/>
+          <c:tx>
+            <c:strRef>
+              <c:f>Sheet1!$B$1</c:f>
+              <c:strCache>
+                <c:ptCount val="1"/>
+                <c:pt idx="0">
+                  <c:v>Atrasados</c:v>
+                </c:pt>
+              </c:strCache>
+            </c:strRef>
+          </c:tx>
+          <c:spPr>
+            <a:solidFill>
+              <a:srgbClr val="C0392B"/>
+            </a:solidFill>
+            <a:effectLst/>
+          </c:spPr>
+          <c:invertIfNegative val="0"/>
+          <c:dLbls>
+            <c:numFmt formatCode="#,##0" sourceLinked="0"/>
+            <c:txPr>
+              <a:bodyPr/>
+              <a:lstStyle/>
+              <a:p>
+                <a:pPr>
+                  <a:defRPr b="1" i="0" strike="noStrike" sz="1000" u="none">
+                    <a:solidFill>
+                      <a:srgbClr val="FFFFFF"/>
+                    </a:solidFill>
+                    <a:latin typeface="Calibri"/>
+                  </a:defRPr>
+                </a:pPr>
+              </a:p>
+            </c:txPr>
+            <c:dLblPos val="ctr"/>
+            <c:showLegendKey val="0"/>
+            <c:showVal val="1"/>
+            <c:showCatName val="0"/>
+            <c:showSerName val="0"/>
+            <c:showPercent val="0"/>
+            <c:showBubbleSize val="0"/>
+            <c:showLeaderLines val="0"/>
+          </c:dLbls>
+          <c:cat>
+            <c:multiLvlStrRef>
+              <c:f>Sheet1!$A$2:$A$6</c:f>
+              <c:multiLvlStrCache>
+                <c:ptCount val="5"/>
+                <c:lvl>
+                  <c:pt idx="0">
+                    <c:v>Piping</c:v>
+                  </c:pt>
+                  <c:pt idx="1">
+                    <c:v>Eléctrica</c:v>
+                  </c:pt>
+                  <c:pt idx="2">
+                    <c:v>Obras Civiles</c:v>
+                  </c:pt>
+                  <c:pt idx="3">
+                    <c:v>Mecánica</c:v>
+                  </c:pt>
+                  <c:pt idx="4">
+                    <c:v>Estructura</c:v>
+                  </c:pt>
+                </c:lvl>
+              </c:multiLvlStrCache>
+            </c:multiLvlStrRef>
+          </c:cat>
+          <c:val>
+            <c:numRef>
+              <c:f>Sheet1!$B$2:$B$6</c:f>
+              <c:numCache>
+                <c:formatCode>General</c:formatCode>
+                <c:ptCount val="5"/>
+                <c:pt idx="0">
+                  <c:v>72</c:v>
+                </c:pt>
+                <c:pt idx="1">
+                  <c:v>58</c:v>
+                </c:pt>
+                <c:pt idx="2">
+                  <c:v>29</c:v>
+                </c:pt>
+                <c:pt idx="3">
+                  <c:v>13</c:v>
+                </c:pt>
+                <c:pt idx="4">
+                  <c:v>6</c:v>
+                </c:pt>
+              </c:numCache>
+            </c:numRef>
+          </c:val>
+        </c:ser>
+        <c:ser>
+          <c:idx val="1"/>
+          <c:order val="1"/>
+          <c:tx>
+            <c:strRef>
+              <c:f>Sheet1!$C$1</c:f>
+              <c:strCache>
+                <c:ptCount val="1"/>
+                <c:pt idx="0">
+                  <c:v>En plazo o sin fecha</c:v>
+                </c:pt>
+              </c:strCache>
+            </c:strRef>
+          </c:tx>
+          <c:spPr>
+            <a:solidFill>
+              <a:srgbClr val="2E6FB5"/>
+            </a:solidFill>
+            <a:effectLst/>
+          </c:spPr>
+          <c:invertIfNegative val="0"/>
+          <c:dLbls>
+            <c:numFmt formatCode="#,##0" sourceLinked="0"/>
+            <c:txPr>
+              <a:bodyPr/>
+              <a:lstStyle/>
+              <a:p>
+                <a:pPr>
+                  <a:defRPr b="1" i="0" strike="noStrike" sz="1000" u="none">
+                    <a:solidFill>
+                      <a:srgbClr val="FFFFFF"/>
+                    </a:solidFill>
+                    <a:latin typeface="Calibri"/>
+                  </a:defRPr>
+                </a:pPr>
+              </a:p>
+            </c:txPr>
+            <c:dLblPos val="ctr"/>
+            <c:showLegendKey val="0"/>
+            <c:showVal val="1"/>
+            <c:showCatName val="0"/>
+            <c:showSerName val="0"/>
+            <c:showPercent val="0"/>
+            <c:showBubbleSize val="0"/>
+            <c:showLeaderLines val="0"/>
+          </c:dLbls>
+          <c:cat>
+            <c:multiLvlStrRef>
+              <c:f>Sheet1!$A$2:$A$6</c:f>
+              <c:multiLvlStrCache>
+                <c:ptCount val="5"/>
+                <c:lvl>
+                  <c:pt idx="0">
+                    <c:v>Piping</c:v>
+                  </c:pt>
+                  <c:pt idx="1">
+                    <c:v>Eléctrica</c:v>
+                  </c:pt>
+                  <c:pt idx="2">
+                    <c:v>Obras Civiles</c:v>
+                  </c:pt>
+                  <c:pt idx="3">
+                    <c:v>Mecánica</c:v>
+                  </c:pt>
+                  <c:pt idx="4">
+                    <c:v>Estructura</c:v>
+                  </c:pt>
+                </c:lvl>
+              </c:multiLvlStrCache>
+            </c:multiLvlStrRef>
+          </c:cat>
+          <c:val>
+            <c:numRef>
+              <c:f>Sheet1!$C$2:$C$6</c:f>
+              <c:numCache>
+                <c:formatCode>General</c:formatCode>
+                <c:ptCount val="5"/>
+                <c:pt idx="0">
+                  <c:v>25</c:v>
+                </c:pt>
+                <c:pt idx="1">
+                  <c:v>23</c:v>
+                </c:pt>
+                <c:pt idx="2">
+                  <c:v>5</c:v>
+                </c:pt>
+                <c:pt idx="3">
+                  <c:v>3</c:v>
+                </c:pt>
+                <c:pt idx="4">
+                  <c:v>3</c:v>
+                </c:pt>
+              </c:numCache>
+            </c:numRef>
+          </c:val>
+        </c:ser>
+        <c:dLbls>
+          <c:numFmt formatCode="#,##0" sourceLinked="0"/>
+          <c:txPr>
+            <a:bodyPr/>
+            <a:lstStyle/>
+            <a:p>
+              <a:pPr>
+                <a:defRPr b="1" i="0" strike="noStrike" sz="1000" u="none">
+                  <a:solidFill>
+                    <a:srgbClr val="FFFFFF"/>
+                  </a:solidFill>
+                  <a:latin typeface="Calibri"/>
+                </a:defRPr>
+              </a:pPr>
+            </a:p>
+          </c:txPr>
+          <c:dLblPos val="ctr"/>
+          <c:showLegendKey val="0"/>
+          <c:showVal val="1"/>
+          <c:showCatName val="0"/>
+          <c:showSerName val="0"/>
+          <c:showPercent val="0"/>
+          <c:showBubbleSize val="0"/>
+          <c:showLeaderLines val="0"/>
+        </c:dLbls>
+        <c:gapWidth val="45"/>
+        <c:overlap val="100"/>
+        <c:axId val="2094734554"/>
+        <c:axId val="2094734552"/>
+        <c:axId val="2094734556"/>
+      </c:barChart>
+      <c:catAx>
+        <c:axId val="2094734554"/>
+        <c:scaling>
+          <c:orientation val="minMax"/>
+        </c:scaling>
+        <c:delete val="0"/>
+        <c:axPos val="l"/>
+        <c:numFmt formatCode="General" sourceLinked="1"/>
+        <c:majorTickMark val="out"/>
+        <c:minorTickMark val="none"/>
+        <c:tickLblPos val="nextTo"/>
+        <c:spPr>
+          <a:ln w="12700" cap="flat">
+            <a:solidFill>
+              <a:srgbClr val="888888"/>
+            </a:solidFill>
+            <a:prstDash val="solid"/>
+            <a:round/>
+          </a:ln>
+        </c:spPr>
+        <c:txPr>
+          <a:bodyPr/>
+          <a:lstStyle/>
+          <a:p>
+            <a:pPr>
+              <a:defRPr sz="1150" b="1" i="0" u="none" strike="noStrike">
+                <a:solidFill>
+                  <a:srgbClr val="1A2433"/>
+                </a:solidFill>
+                <a:latin typeface="Calibri"/>
+              </a:defRPr>
+            </a:pPr>
+            <a:endParaRPr lang="en-US"/>
+          </a:p>
+        </c:txPr>
+        <c:crossAx val="2094734552"/>
+        <c:crosses val="autoZero"/>
+        <c:auto val="1"/>
+        <c:lblAlgn val="ctr"/>
+        <c:noMultiLvlLbl val="1"/>
+      </c:catAx>
+      <c:valAx>
+        <c:axId val="2094734552"/>
+        <c:scaling>
+          <c:orientation val="minMax"/>
+        </c:scaling>
+        <c:delete val="1"/>
+        <c:axPos val="b"/>
+        <c:numFmt formatCode="General" sourceLinked="0"/>
+        <c:majorTickMark val="out"/>
+        <c:minorTickMark val="none"/>
+        <c:tickLblPos val="low"/>
+        <c:spPr>
+          <a:ln w="12700" cap="flat">
+            <a:solidFill>
+              <a:srgbClr val="888888"/>
+            </a:solidFill>
+            <a:prstDash val="solid"/>
+            <a:round/>
+          </a:ln>
+        </c:spPr>
+        <c:txPr>
+          <a:bodyPr/>
+          <a:lstStyle/>
+          <a:p>
+            <a:pPr>
+              <a:defRPr sz="1200" b="0" i="0" u="none" strike="noStrike">
+                <a:solidFill>
+                  <a:srgbClr val="000000"/>
+                </a:solidFill>
+                <a:latin typeface="Arial"/>
+              </a:defRPr>
+            </a:pPr>
+            <a:endParaRPr lang="en-US"/>
+          </a:p>
+        </c:txPr>
+        <c:crossAx val="2094734554"/>
+        <c:crosses val="autoZero"/>
+        <c:crossBetween val="between"/>
+      </c:valAx>
+      <c:spPr>
+        <a:noFill/>
+        <a:ln>
+          <a:noFill/>
+        </a:ln>
+        <a:effectLst/>
+      </c:spPr>
+    </c:plotArea>
+    <c:legend>
+      <c:legendPos val="b"/>
+      <c:overlay val="0"/>
+      <c:txPr>
+        <a:bodyPr/>
+        <a:lstStyle/>
+        <a:p>
+          <a:pPr>
+            <a:defRPr sz="1100">
+              <a:solidFill>
+                <a:srgbClr val="56606E"/>
+              </a:solidFill>
+              <a:latin typeface="Calibri"/>
+              <a:cs typeface="Calibri"/>
+            </a:defRPr>
+          </a:pPr>
+          <a:endParaRPr lang="en-US"/>
+        </a:p>
+      </c:txPr>
+    </c:legend>
+    <c:plotVisOnly val="1"/>
+    <c:dispBlanksAs val="span"/>
+  </c:chart>
+  <c:spPr>
+    <a:solidFill>
+      <a:srgbClr val="FFFFFF"/>
+    </a:solidFill>
+    <a:ln>
+      <a:noFill/>
+    </a:ln>
+    <a:effectLst/>
+  </c:spPr>
+  <c:externalData r:id="rId1">
+    <c:autoUpdate val="0"/>
+  </c:externalData>
+</c:chartSpace>
+</file>
+
+<file path=ppt/charts/chart7.xml><?xml version="1.0" encoding="utf-8"?>
+<c:chartSpace xmlns:c="http://schemas.openxmlformats.org/drawingml/2006/chart" xmlns:a="http://schemas.openxmlformats.org/drawingml/2006/main" xmlns:r="http://schemas.openxmlformats.org/officeDocument/2006/relationships">
+  <c:date1904 val="0"/>
+  <c:roundedCorners val="1"/>
+  <c:chart>
+    <c:autoTitleDeleted val="1"/>
+    <c:plotArea>
+      <c:layout/>
+      <c:doughnutChart>
+        <c:varyColors val="1"/>
+        <c:ser>
+          <c:idx val="0"/>
+          <c:order val="0"/>
+          <c:tx>
+            <c:strRef>
+              <c:f>Sheet1!$B$1</c:f>
+              <c:strCache>
+                <c:ptCount val="1"/>
+                <c:pt idx="0">
+                  <c:v>P1</c:v>
+                </c:pt>
+              </c:strCache>
+            </c:strRef>
+          </c:tx>
+          <c:spPr>
+            <a:solidFill>
+              <a:schemeClr val="accent1"/>
+            </a:solidFill>
+            <a:ln w="9525" cap="flat">
+              <a:solidFill>
+                <a:srgbClr val="F9F9F9"/>
+              </a:solidFill>
+              <a:prstDash val="solid"/>
+              <a:round/>
+            </a:ln>
+            <a:effectLst/>
+          </c:spPr>
+          <c:dPt>
+            <c:idx val="0"/>
+            <c:bubble3D val="0"/>
+            <c:spPr>
+              <a:solidFill>
+                <a:srgbClr val="2E9E5B"/>
+              </a:solidFill>
+              <a:ln w="9525" cap="flat">
+                <a:solidFill>
+                  <a:srgbClr val="12233B"/>
+                </a:solidFill>
+                <a:prstDash val="solid"/>
+                <a:round/>
+              </a:ln>
+              <a:effectLst/>
+            </c:spPr>
+          </c:dPt>
+          <c:dPt>
+            <c:idx val="1"/>
+            <c:bubble3D val="0"/>
+            <c:spPr>
+              <a:solidFill>
+                <a:srgbClr val="C0392B"/>
+              </a:solidFill>
+              <a:ln w="9525" cap="flat">
+                <a:solidFill>
+                  <a:srgbClr val="12233B"/>
+                </a:solidFill>
+                <a:prstDash val="solid"/>
+                <a:round/>
+              </a:ln>
+              <a:effectLst/>
+            </c:spPr>
+          </c:dPt>
+          <c:dPt>
+            <c:idx val="2"/>
+            <c:bubble3D val="0"/>
+            <c:spPr>
+              <a:solidFill>
+                <a:srgbClr val="E3A55B"/>
+              </a:solidFill>
+              <a:ln w="9525" cap="flat">
+                <a:solidFill>
+                  <a:srgbClr val="12233B"/>
+                </a:solidFill>
+                <a:prstDash val="solid"/>
+                <a:round/>
+              </a:ln>
+              <a:effectLst/>
+            </c:spPr>
+          </c:dPt>
+          <c:dLbls>
+            <c:dLbl>
+              <c:idx val="0"/>
+              <c:numFmt formatCode="General" sourceLinked="0"/>
+              <c:spPr/>
+              <c:txPr>
+                <a:bodyPr/>
+                <a:lstStyle/>
+                <a:p>
+                  <a:pPr>
+                    <a:defRPr sz="1200" b="0" i="0" u="none" strike="noStrike">
+                      <a:solidFill>
+                        <a:srgbClr val="000000"/>
+                      </a:solidFill>
+                      <a:latin typeface="Arial"/>
+                    </a:defRPr>
+                  </a:pPr>
+                </a:p>
+              </c:txPr>
+              <c:showLegendKey val="0"/>
+              <c:showVal val="0"/>
+              <c:showCatName val="0"/>
+              <c:showSerName val="0"/>
+              <c:showPercent val="0"/>
+              <c:showBubbleSize val="0"/>
+            </c:dLbl>
+            <c:dLbl>
+              <c:idx val="1"/>
+              <c:numFmt formatCode="General" sourceLinked="0"/>
+              <c:spPr/>
+              <c:txPr>
+                <a:bodyPr/>
+                <a:lstStyle/>
+                <a:p>
+                  <a:pPr>
+                    <a:defRPr sz="1200" b="0" i="0" u="none" strike="noStrike">
+                      <a:solidFill>
+                        <a:srgbClr val="000000"/>
+                      </a:solidFill>
+                      <a:latin typeface="Arial"/>
+                    </a:defRPr>
+                  </a:pPr>
+                </a:p>
+              </c:txPr>
+              <c:showLegendKey val="0"/>
+              <c:showVal val="0"/>
+              <c:showCatName val="0"/>
+              <c:showSerName val="0"/>
+              <c:showPercent val="0"/>
+              <c:showBubbleSize val="0"/>
+            </c:dLbl>
+            <c:dLbl>
+              <c:idx val="2"/>
+              <c:numFmt formatCode="General" sourceLinked="0"/>
+              <c:spPr/>
+              <c:txPr>
+                <a:bodyPr/>
+                <a:lstStyle/>
+                <a:p>
+                  <a:pPr>
+                    <a:defRPr sz="1200" b="0" i="0" u="none" strike="noStrike">
+                      <a:solidFill>
+                        <a:srgbClr val="000000"/>
+                      </a:solidFill>
+                      <a:latin typeface="Arial"/>
+                    </a:defRPr>
+                  </a:pPr>
+                </a:p>
+              </c:txPr>
+              <c:showLegendKey val="0"/>
+              <c:showVal val="0"/>
+              <c:showCatName val="0"/>
+              <c:showSerName val="0"/>
+              <c:showPercent val="0"/>
+              <c:showBubbleSize val="0"/>
+            </c:dLbl>
+            <c:numFmt formatCode="General" sourceLinked="0"/>
+            <c:txPr>
+              <a:bodyPr/>
+              <a:lstStyle/>
+              <a:p>
+                <a:pPr>
+                  <a:defRPr sz="1800" b="0" i="0" u="none" strike="noStrike">
+                    <a:solidFill>
+                      <a:srgbClr val="000000"/>
+                    </a:solidFill>
+                    <a:latin typeface="Arial"/>
+                  </a:defRPr>
+                </a:pPr>
+              </a:p>
+            </c:txPr>
+            <c:showLegendKey val="0"/>
+            <c:showVal val="0"/>
+            <c:showCatName val="1"/>
+            <c:showSerName val="0"/>
+            <c:showPercent val="1"/>
+            <c:showBubbleSize val="0"/>
+            <c:showLeaderLines val="0"/>
+          </c:dLbls>
+          <c:cat>
+            <c:strRef>
+              <c:f>Sheet1!$A$2:$A$4</c:f>
+              <c:strCache>
+                <c:ptCount val="3"/>
+                <c:pt idx="0">
+                  <c:v>Cerrados</c:v>
+                </c:pt>
+                <c:pt idx="1">
+                  <c:v>Atrasados</c:v>
+                </c:pt>
+                <c:pt idx="2">
+                  <c:v>Abiertos en plazo</c:v>
+                </c:pt>
+              </c:strCache>
+            </c:strRef>
+          </c:cat>
+          <c:val>
+            <c:numRef>
+              <c:f>Sheet1!$B$2:$B$4</c:f>
+              <c:numCache>
+                <c:ptCount val="3"/>
+                <c:pt idx="0">
+                  <c:v>592</c:v>
+                </c:pt>
+                <c:pt idx="1">
+                  <c:v>178</c:v>
+                </c:pt>
+                <c:pt idx="2">
+                  <c:v>59</c:v>
+                </c:pt>
+              </c:numCache>
+            </c:numRef>
+          </c:val>
+        </c:ser>
+        <c:firstSliceAng val="0"/>
+        <c:holeSize val="62"/>
+      </c:doughnutChart>
+      <c:spPr>
+        <a:noFill/>
+        <a:ln>
+          <a:noFill/>
+        </a:ln>
+        <a:effectLst/>
+      </c:spPr>
+    </c:plotArea>
+    <c:plotVisOnly val="1"/>
+    <c:dispBlanksAs val="span"/>
+  </c:chart>
+  <c:spPr>
+    <a:solidFill>
+      <a:srgbClr val="12233B"/>
+    </a:solidFill>
+    <a:ln>
+      <a:noFill/>
+    </a:ln>
+    <a:effectLst/>
+  </c:spPr>
+  <c:externalData r:id="rId1">
+    <c:autoUpdate val="0"/>
+  </c:externalData>
+</c:chartSpace>
+</file>
+
 <file path=ppt/notesMasters/notesMaster1.xml><?xml version="1.0" encoding="utf-8"?>
 <p:notesMaster xmlns:a="http://schemas.openxmlformats.org/drawingml/2006/main" xmlns:r="http://schemas.openxmlformats.org/officeDocument/2006/relationships" xmlns:p="http://schemas.openxmlformats.org/presentationml/2006/main">
   <p:cSld>
@@ -2229,6 +3241,270 @@
 </p:notes>
 </file>
 
+<file path=ppt/notesSlides/notesSlide10.xml><?xml version="1.0" encoding="utf-8"?>
+<p:notes xmlns:a="http://schemas.openxmlformats.org/drawingml/2006/main" xmlns:r="http://schemas.openxmlformats.org/officeDocument/2006/relationships" xmlns:p="http://schemas.openxmlformats.org/presentationml/2006/main">
+  <p:cSld>
+    <p:spTree>
+      <p:nvGrpSpPr>
+        <p:cNvPr id="1" name=""/>
+        <p:cNvGrpSpPr/>
+        <p:nvPr/>
+      </p:nvGrpSpPr>
+      <p:grpSpPr>
+        <a:xfrm>
+          <a:off x="0" y="0"/>
+          <a:ext cx="0" cy="0"/>
+          <a:chOff x="0" y="0"/>
+          <a:chExt cx="0" cy="0"/>
+        </a:xfrm>
+      </p:grpSpPr>
+      <p:sp>
+        <p:nvSpPr>
+          <p:cNvPr id="2" name="Slide Image Placeholder 1"/>
+          <p:cNvSpPr>
+            <a:spLocks noGrp="1" noRot="1" noChangeAspect="1"/>
+          </p:cNvSpPr>
+          <p:nvPr>
+            <p:ph type="sldImg"/>
+          </p:nvPr>
+        </p:nvSpPr>
+        <p:spPr/>
+      </p:sp>
+      <p:sp>
+        <p:nvSpPr>
+          <p:cNvPr id="3" name="Notes Placeholder 2"/>
+          <p:cNvSpPr>
+            <a:spLocks noGrp="1"/>
+          </p:cNvSpPr>
+          <p:nvPr>
+            <p:ph type="body" idx="1"/>
+          </p:nvPr>
+        </p:nvSpPr>
+        <p:spPr/>
+        <p:txBody>
+          <a:bodyPr/>
+          <a:lstStyle/>
+          <a:p>
+            <a:r>
+              <a:rPr lang="en-US" dirty="0"/>
+              <a:t/>
+            </a:r>
+            <a:endParaRPr lang="en-US" dirty="0"/>
+          </a:p>
+        </p:txBody>
+      </p:sp>
+      <p:sp>
+        <p:nvSpPr>
+          <p:cNvPr id="4" name="Slide Number Placeholder 3"/>
+          <p:cNvSpPr>
+            <a:spLocks noGrp="1"/>
+          </p:cNvSpPr>
+          <p:nvPr>
+            <p:ph type="sldNum" sz="quarter" idx="10"/>
+          </p:nvPr>
+        </p:nvSpPr>
+        <p:spPr/>
+        <p:txBody>
+          <a:bodyPr/>
+          <a:lstStyle/>
+          <a:p>
+            <a:fld id="{F7021451-1387-4CA6-816F-3879F97B5CBC}" type="slidenum">
+              <a:rPr lang="en-US"/>
+              <a:t>10</a:t>
+            </a:fld>
+            <a:endParaRPr lang="en-US"/>
+          </a:p>
+        </p:txBody>
+      </p:sp>
+    </p:spTree>
+    <p:extLst>
+      <p:ext uri="{BB962C8B-B14F-4D97-AF65-F5344CB8AC3E}">
+        <p14:creationId xmlns:p14="http://schemas.microsoft.com/office/powerpoint/2010/main" val="1024086991"/>
+      </p:ext>
+    </p:extLst>
+  </p:cSld>
+  <p:clrMapOvr>
+    <a:masterClrMapping/>
+  </p:clrMapOvr>
+</p:notes>
+</file>
+
+<file path=ppt/notesSlides/notesSlide11.xml><?xml version="1.0" encoding="utf-8"?>
+<p:notes xmlns:a="http://schemas.openxmlformats.org/drawingml/2006/main" xmlns:r="http://schemas.openxmlformats.org/officeDocument/2006/relationships" xmlns:p="http://schemas.openxmlformats.org/presentationml/2006/main">
+  <p:cSld>
+    <p:spTree>
+      <p:nvGrpSpPr>
+        <p:cNvPr id="1" name=""/>
+        <p:cNvGrpSpPr/>
+        <p:nvPr/>
+      </p:nvGrpSpPr>
+      <p:grpSpPr>
+        <a:xfrm>
+          <a:off x="0" y="0"/>
+          <a:ext cx="0" cy="0"/>
+          <a:chOff x="0" y="0"/>
+          <a:chExt cx="0" cy="0"/>
+        </a:xfrm>
+      </p:grpSpPr>
+      <p:sp>
+        <p:nvSpPr>
+          <p:cNvPr id="2" name="Slide Image Placeholder 1"/>
+          <p:cNvSpPr>
+            <a:spLocks noGrp="1" noRot="1" noChangeAspect="1"/>
+          </p:cNvSpPr>
+          <p:nvPr>
+            <p:ph type="sldImg"/>
+          </p:nvPr>
+        </p:nvSpPr>
+        <p:spPr/>
+      </p:sp>
+      <p:sp>
+        <p:nvSpPr>
+          <p:cNvPr id="3" name="Notes Placeholder 2"/>
+          <p:cNvSpPr>
+            <a:spLocks noGrp="1"/>
+          </p:cNvSpPr>
+          <p:nvPr>
+            <p:ph type="body" idx="1"/>
+          </p:nvPr>
+        </p:nvSpPr>
+        <p:spPr/>
+        <p:txBody>
+          <a:bodyPr/>
+          <a:lstStyle/>
+          <a:p>
+            <a:r>
+              <a:rPr lang="en-US" dirty="0"/>
+              <a:t/>
+            </a:r>
+            <a:endParaRPr lang="en-US" dirty="0"/>
+          </a:p>
+        </p:txBody>
+      </p:sp>
+      <p:sp>
+        <p:nvSpPr>
+          <p:cNvPr id="4" name="Slide Number Placeholder 3"/>
+          <p:cNvSpPr>
+            <a:spLocks noGrp="1"/>
+          </p:cNvSpPr>
+          <p:nvPr>
+            <p:ph type="sldNum" sz="quarter" idx="10"/>
+          </p:nvPr>
+        </p:nvSpPr>
+        <p:spPr/>
+        <p:txBody>
+          <a:bodyPr/>
+          <a:lstStyle/>
+          <a:p>
+            <a:fld id="{F7021451-1387-4CA6-816F-3879F97B5CBC}" type="slidenum">
+              <a:rPr lang="en-US"/>
+              <a:t>11</a:t>
+            </a:fld>
+            <a:endParaRPr lang="en-US"/>
+          </a:p>
+        </p:txBody>
+      </p:sp>
+    </p:spTree>
+    <p:extLst>
+      <p:ext uri="{BB962C8B-B14F-4D97-AF65-F5344CB8AC3E}">
+        <p14:creationId xmlns:p14="http://schemas.microsoft.com/office/powerpoint/2010/main" val="1024086991"/>
+      </p:ext>
+    </p:extLst>
+  </p:cSld>
+  <p:clrMapOvr>
+    <a:masterClrMapping/>
+  </p:clrMapOvr>
+</p:notes>
+</file>
+
+<file path=ppt/notesSlides/notesSlide12.xml><?xml version="1.0" encoding="utf-8"?>
+<p:notes xmlns:a="http://schemas.openxmlformats.org/drawingml/2006/main" xmlns:r="http://schemas.openxmlformats.org/officeDocument/2006/relationships" xmlns:p="http://schemas.openxmlformats.org/presentationml/2006/main">
+  <p:cSld>
+    <p:spTree>
+      <p:nvGrpSpPr>
+        <p:cNvPr id="1" name=""/>
+        <p:cNvGrpSpPr/>
+        <p:nvPr/>
+      </p:nvGrpSpPr>
+      <p:grpSpPr>
+        <a:xfrm>
+          <a:off x="0" y="0"/>
+          <a:ext cx="0" cy="0"/>
+          <a:chOff x="0" y="0"/>
+          <a:chExt cx="0" cy="0"/>
+        </a:xfrm>
+      </p:grpSpPr>
+      <p:sp>
+        <p:nvSpPr>
+          <p:cNvPr id="2" name="Slide Image Placeholder 1"/>
+          <p:cNvSpPr>
+            <a:spLocks noGrp="1" noRot="1" noChangeAspect="1"/>
+          </p:cNvSpPr>
+          <p:nvPr>
+            <p:ph type="sldImg"/>
+          </p:nvPr>
+        </p:nvSpPr>
+        <p:spPr/>
+      </p:sp>
+      <p:sp>
+        <p:nvSpPr>
+          <p:cNvPr id="3" name="Notes Placeholder 2"/>
+          <p:cNvSpPr>
+            <a:spLocks noGrp="1"/>
+          </p:cNvSpPr>
+          <p:nvPr>
+            <p:ph type="body" idx="1"/>
+          </p:nvPr>
+        </p:nvSpPr>
+        <p:spPr/>
+        <p:txBody>
+          <a:bodyPr/>
+          <a:lstStyle/>
+          <a:p>
+            <a:r>
+              <a:rPr lang="en-US" dirty="0"/>
+              <a:t/>
+            </a:r>
+            <a:endParaRPr lang="en-US" dirty="0"/>
+          </a:p>
+        </p:txBody>
+      </p:sp>
+      <p:sp>
+        <p:nvSpPr>
+          <p:cNvPr id="4" name="Slide Number Placeholder 3"/>
+          <p:cNvSpPr>
+            <a:spLocks noGrp="1"/>
+          </p:cNvSpPr>
+          <p:nvPr>
+            <p:ph type="sldNum" sz="quarter" idx="10"/>
+          </p:nvPr>
+        </p:nvSpPr>
+        <p:spPr/>
+        <p:txBody>
+          <a:bodyPr/>
+          <a:lstStyle/>
+          <a:p>
+            <a:fld id="{F7021451-1387-4CA6-816F-3879F97B5CBC}" type="slidenum">
+              <a:rPr lang="en-US"/>
+              <a:t>12</a:t>
+            </a:fld>
+            <a:endParaRPr lang="en-US"/>
+          </a:p>
+        </p:txBody>
+      </p:sp>
+    </p:spTree>
+    <p:extLst>
+      <p:ext uri="{BB962C8B-B14F-4D97-AF65-F5344CB8AC3E}">
+        <p14:creationId xmlns:p14="http://schemas.microsoft.com/office/powerpoint/2010/main" val="1024086991"/>
+      </p:ext>
+    </p:extLst>
+  </p:cSld>
+  <p:clrMapOvr>
+    <a:masterClrMapping/>
+  </p:clrMapOvr>
+</p:notes>
+</file>
+
 <file path=ppt/notesSlides/notesSlide2.xml><?xml version="1.0" encoding="utf-8"?>
 <p:notes xmlns:a="http://schemas.openxmlformats.org/drawingml/2006/main" xmlns:r="http://schemas.openxmlformats.org/officeDocument/2006/relationships" xmlns:p="http://schemas.openxmlformats.org/presentationml/2006/main">
   <p:cSld>
@@ -2739,6 +4015,182 @@
             <a:fld id="{F7021451-1387-4CA6-816F-3879F97B5CBC}" type="slidenum">
               <a:rPr lang="en-US"/>
               <a:t>7</a:t>
+            </a:fld>
+            <a:endParaRPr lang="en-US"/>
+          </a:p>
+        </p:txBody>
+      </p:sp>
+    </p:spTree>
+    <p:extLst>
+      <p:ext uri="{BB962C8B-B14F-4D97-AF65-F5344CB8AC3E}">
+        <p14:creationId xmlns:p14="http://schemas.microsoft.com/office/powerpoint/2010/main" val="1024086991"/>
+      </p:ext>
+    </p:extLst>
+  </p:cSld>
+  <p:clrMapOvr>
+    <a:masterClrMapping/>
+  </p:clrMapOvr>
+</p:notes>
+</file>
+
+<file path=ppt/notesSlides/notesSlide8.xml><?xml version="1.0" encoding="utf-8"?>
+<p:notes xmlns:a="http://schemas.openxmlformats.org/drawingml/2006/main" xmlns:r="http://schemas.openxmlformats.org/officeDocument/2006/relationships" xmlns:p="http://schemas.openxmlformats.org/presentationml/2006/main">
+  <p:cSld>
+    <p:spTree>
+      <p:nvGrpSpPr>
+        <p:cNvPr id="1" name=""/>
+        <p:cNvGrpSpPr/>
+        <p:nvPr/>
+      </p:nvGrpSpPr>
+      <p:grpSpPr>
+        <a:xfrm>
+          <a:off x="0" y="0"/>
+          <a:ext cx="0" cy="0"/>
+          <a:chOff x="0" y="0"/>
+          <a:chExt cx="0" cy="0"/>
+        </a:xfrm>
+      </p:grpSpPr>
+      <p:sp>
+        <p:nvSpPr>
+          <p:cNvPr id="2" name="Slide Image Placeholder 1"/>
+          <p:cNvSpPr>
+            <a:spLocks noGrp="1" noRot="1" noChangeAspect="1"/>
+          </p:cNvSpPr>
+          <p:nvPr>
+            <p:ph type="sldImg"/>
+          </p:nvPr>
+        </p:nvSpPr>
+        <p:spPr/>
+      </p:sp>
+      <p:sp>
+        <p:nvSpPr>
+          <p:cNvPr id="3" name="Notes Placeholder 2"/>
+          <p:cNvSpPr>
+            <a:spLocks noGrp="1"/>
+          </p:cNvSpPr>
+          <p:nvPr>
+            <p:ph type="body" idx="1"/>
+          </p:nvPr>
+        </p:nvSpPr>
+        <p:spPr/>
+        <p:txBody>
+          <a:bodyPr/>
+          <a:lstStyle/>
+          <a:p>
+            <a:r>
+              <a:rPr lang="en-US" dirty="0"/>
+              <a:t/>
+            </a:r>
+            <a:endParaRPr lang="en-US" dirty="0"/>
+          </a:p>
+        </p:txBody>
+      </p:sp>
+      <p:sp>
+        <p:nvSpPr>
+          <p:cNvPr id="4" name="Slide Number Placeholder 3"/>
+          <p:cNvSpPr>
+            <a:spLocks noGrp="1"/>
+          </p:cNvSpPr>
+          <p:nvPr>
+            <p:ph type="sldNum" sz="quarter" idx="10"/>
+          </p:nvPr>
+        </p:nvSpPr>
+        <p:spPr/>
+        <p:txBody>
+          <a:bodyPr/>
+          <a:lstStyle/>
+          <a:p>
+            <a:fld id="{F7021451-1387-4CA6-816F-3879F97B5CBC}" type="slidenum">
+              <a:rPr lang="en-US"/>
+              <a:t>8</a:t>
+            </a:fld>
+            <a:endParaRPr lang="en-US"/>
+          </a:p>
+        </p:txBody>
+      </p:sp>
+    </p:spTree>
+    <p:extLst>
+      <p:ext uri="{BB962C8B-B14F-4D97-AF65-F5344CB8AC3E}">
+        <p14:creationId xmlns:p14="http://schemas.microsoft.com/office/powerpoint/2010/main" val="1024086991"/>
+      </p:ext>
+    </p:extLst>
+  </p:cSld>
+  <p:clrMapOvr>
+    <a:masterClrMapping/>
+  </p:clrMapOvr>
+</p:notes>
+</file>
+
+<file path=ppt/notesSlides/notesSlide9.xml><?xml version="1.0" encoding="utf-8"?>
+<p:notes xmlns:a="http://schemas.openxmlformats.org/drawingml/2006/main" xmlns:r="http://schemas.openxmlformats.org/officeDocument/2006/relationships" xmlns:p="http://schemas.openxmlformats.org/presentationml/2006/main">
+  <p:cSld>
+    <p:spTree>
+      <p:nvGrpSpPr>
+        <p:cNvPr id="1" name=""/>
+        <p:cNvGrpSpPr/>
+        <p:nvPr/>
+      </p:nvGrpSpPr>
+      <p:grpSpPr>
+        <a:xfrm>
+          <a:off x="0" y="0"/>
+          <a:ext cx="0" cy="0"/>
+          <a:chOff x="0" y="0"/>
+          <a:chExt cx="0" cy="0"/>
+        </a:xfrm>
+      </p:grpSpPr>
+      <p:sp>
+        <p:nvSpPr>
+          <p:cNvPr id="2" name="Slide Image Placeholder 1"/>
+          <p:cNvSpPr>
+            <a:spLocks noGrp="1" noRot="1" noChangeAspect="1"/>
+          </p:cNvSpPr>
+          <p:nvPr>
+            <p:ph type="sldImg"/>
+          </p:nvPr>
+        </p:nvSpPr>
+        <p:spPr/>
+      </p:sp>
+      <p:sp>
+        <p:nvSpPr>
+          <p:cNvPr id="3" name="Notes Placeholder 2"/>
+          <p:cNvSpPr>
+            <a:spLocks noGrp="1"/>
+          </p:cNvSpPr>
+          <p:nvPr>
+            <p:ph type="body" idx="1"/>
+          </p:nvPr>
+        </p:nvSpPr>
+        <p:spPr/>
+        <p:txBody>
+          <a:bodyPr/>
+          <a:lstStyle/>
+          <a:p>
+            <a:r>
+              <a:rPr lang="en-US" dirty="0"/>
+              <a:t/>
+            </a:r>
+            <a:endParaRPr lang="en-US" dirty="0"/>
+          </a:p>
+        </p:txBody>
+      </p:sp>
+      <p:sp>
+        <p:nvSpPr>
+          <p:cNvPr id="4" name="Slide Number Placeholder 3"/>
+          <p:cNvSpPr>
+            <a:spLocks noGrp="1"/>
+          </p:cNvSpPr>
+          <p:nvPr>
+            <p:ph type="sldNum" sz="quarter" idx="10"/>
+          </p:nvPr>
+        </p:nvSpPr>
+        <p:spPr/>
+        <p:txBody>
+          <a:bodyPr/>
+          <a:lstStyle/>
+          <a:p>
+            <a:fld id="{F7021451-1387-4CA6-816F-3879F97B5CBC}" type="slidenum">
+              <a:rPr lang="en-US"/>
+              <a:t>9</a:t>
             </a:fld>
             <a:endParaRPr lang="en-US"/>
           </a:p>
@@ -3650,6 +5102,2681 @@
 </p:sld>
 </file>
 
+<file path=ppt/slides/slide10.xml><?xml version="1.0" encoding="utf-8"?>
+<p:sld xmlns:a="http://schemas.openxmlformats.org/drawingml/2006/main" xmlns:r="http://schemas.openxmlformats.org/officeDocument/2006/relationships" xmlns:p="http://schemas.openxmlformats.org/presentationml/2006/main">
+  <p:cSld name="Slide 10">
+    <p:bg>
+      <p:bgPr>
+        <a:solidFill>
+          <a:srgbClr val="F4F6F9"/>
+        </a:solidFill>
+      </p:bgPr>
+    </p:bg>
+    <p:spTree>
+      <p:nvGrpSpPr>
+        <p:cNvPr id="1" name=""/>
+        <p:cNvGrpSpPr/>
+        <p:nvPr/>
+      </p:nvGrpSpPr>
+      <p:grpSpPr>
+        <a:xfrm>
+          <a:off x="0" y="0"/>
+          <a:ext cx="0" cy="0"/>
+          <a:chOff x="0" y="0"/>
+          <a:chExt cx="0" cy="0"/>
+        </a:xfrm>
+      </p:grpSpPr>
+      <p:sp>
+        <p:nvSpPr>
+          <p:cNvPr id="2" name="Text 0"/>
+          <p:cNvSpPr/>
+          <p:nvPr/>
+        </p:nvSpPr>
+        <p:spPr>
+          <a:xfrm>
+            <a:off x="457200" y="411480"/>
+            <a:ext cx="7315200" cy="256032"/>
+          </a:xfrm>
+          <a:prstGeom prst="rect">
+            <a:avLst/>
+          </a:prstGeom>
+          <a:noFill/>
+          <a:ln/>
+        </p:spPr>
+        <p:txBody>
+          <a:bodyPr wrap="square" lIns="0" tIns="0" rIns="0" bIns="0" rtlCol="0" anchor="ctr"/>
+          <a:lstStyle/>
+          <a:p>
+            <a:pPr algn="l" indent="0" marL="0">
+              <a:buNone/>
+            </a:pPr>
+            <a:r>
+              <a:rPr lang="en-US" sz="1100" b="1" spc="200" kern="0" dirty="0">
+                <a:solidFill>
+                  <a:srgbClr val="C87A32"/>
+                </a:solidFill>
+                <a:latin typeface="Calibri" pitchFamily="34" charset="0"/>
+                <a:ea typeface="Calibri" pitchFamily="34" charset="-122"/>
+                <a:cs typeface="Calibri" pitchFamily="34" charset="-120"/>
+              </a:rPr>
+              <a:t>DESALADORA · FRENTES 1 Y 2</a:t>
+            </a:r>
+            <a:endParaRPr lang="en-US" sz="1100" dirty="0"/>
+          </a:p>
+        </p:txBody>
+      </p:sp>
+      <p:sp>
+        <p:nvSpPr>
+          <p:cNvPr id="3" name="Text 1"/>
+          <p:cNvSpPr/>
+          <p:nvPr/>
+        </p:nvSpPr>
+        <p:spPr>
+          <a:xfrm>
+            <a:off x="457200" y="658368"/>
+            <a:ext cx="11247120" cy="548640"/>
+          </a:xfrm>
+          <a:prstGeom prst="rect">
+            <a:avLst/>
+          </a:prstGeom>
+          <a:noFill/>
+          <a:ln/>
+        </p:spPr>
+        <p:txBody>
+          <a:bodyPr wrap="square" lIns="0" tIns="0" rIns="0" bIns="0" rtlCol="0" anchor="ctr"/>
+          <a:lstStyle/>
+          <a:p>
+            <a:pPr indent="0" marL="0">
+              <a:buNone/>
+            </a:pPr>
+            <a:r>
+              <a:rPr lang="en-US" sz="3000" b="1" dirty="0">
+                <a:solidFill>
+                  <a:srgbClr val="1A2433"/>
+                </a:solidFill>
+                <a:latin typeface="Cambria" pitchFamily="34" charset="0"/>
+                <a:ea typeface="Cambria" pitchFamily="34" charset="-122"/>
+                <a:cs typeface="Cambria" pitchFamily="34" charset="-120"/>
+              </a:rPr>
+              <a:t>Caminatas y certificados de entrega</a:t>
+            </a:r>
+            <a:endParaRPr lang="en-US" sz="3000" dirty="0"/>
+          </a:p>
+        </p:txBody>
+      </p:sp>
+      <p:sp>
+        <p:nvSpPr>
+          <p:cNvPr id="4" name="Text 2"/>
+          <p:cNvSpPr/>
+          <p:nvPr/>
+        </p:nvSpPr>
+        <p:spPr>
+          <a:xfrm>
+            <a:off x="457200" y="1234440"/>
+            <a:ext cx="11247120" cy="457200"/>
+          </a:xfrm>
+          <a:prstGeom prst="rect">
+            <a:avLst/>
+          </a:prstGeom>
+          <a:noFill/>
+          <a:ln/>
+        </p:spPr>
+        <p:txBody>
+          <a:bodyPr wrap="square" lIns="0" tIns="0" rIns="0" bIns="0" rtlCol="0" anchor="ctr"/>
+          <a:lstStyle/>
+          <a:p>
+            <a:pPr indent="0" marL="0">
+              <a:buNone/>
+            </a:pPr>
+            <a:r>
+              <a:rPr lang="en-US" sz="1350" dirty="0">
+                <a:solidFill>
+                  <a:srgbClr val="56606E"/>
+                </a:solidFill>
+                <a:latin typeface="Calibri" pitchFamily="34" charset="0"/>
+                <a:ea typeface="Calibri" pitchFamily="34" charset="-122"/>
+                <a:cs typeface="Calibri" pitchFamily="34" charset="-120"/>
+              </a:rPr>
+              <a:t>Cada tipo de subsistema se mide con su propia caminata: los Operables por la Caminata 2 y los Facility por la Caminata 1, tal como lo declara el propio reporte gerencial.</a:t>
+            </a:r>
+            <a:endParaRPr lang="en-US" sz="1350" dirty="0"/>
+          </a:p>
+        </p:txBody>
+      </p:sp>
+      <p:graphicFrame>
+        <p:nvGraphicFramePr>
+          <p:cNvPr id="5" name="Chart 0" descr=""/>
+          <p:cNvGraphicFramePr/>
+          <p:nvPr/>
+        </p:nvGraphicFramePr>
+        <p:xfrm>
+          <a:off x="457200" y="1874520"/>
+          <a:ext cx="5577840" cy="4114800"/>
+        </p:xfrm>
+        <a:graphic xmlns:a="http://schemas.openxmlformats.org/drawingml/2006/main">
+          <a:graphicData uri="http://schemas.openxmlformats.org/drawingml/2006/chart">
+            <c:chart xmlns:c="http://schemas.openxmlformats.org/drawingml/2006/chart" r:id="rId1"/>
+          </a:graphicData>
+        </a:graphic>
+      </p:graphicFrame>
+      <p:sp>
+        <p:nvSpPr>
+          <p:cNvPr id="6" name="Shape 3"/>
+          <p:cNvSpPr/>
+          <p:nvPr/>
+        </p:nvSpPr>
+        <p:spPr>
+          <a:xfrm>
+            <a:off x="6263640" y="1874520"/>
+            <a:ext cx="5468112" cy="4114800"/>
+          </a:xfrm>
+          <a:prstGeom prst="roundRect">
+            <a:avLst>
+              <a:gd name="adj" fmla="val 1333"/>
+            </a:avLst>
+          </a:prstGeom>
+          <a:solidFill>
+            <a:srgbClr val="FFFFFF"/>
+          </a:solidFill>
+          <a:ln w="12700">
+            <a:solidFill>
+              <a:srgbClr val="E4E9EF"/>
+            </a:solidFill>
+            <a:prstDash val="solid"/>
+          </a:ln>
+        </p:spPr>
+      </p:sp>
+      <p:sp>
+        <p:nvSpPr>
+          <p:cNvPr id="7" name="Text 4"/>
+          <p:cNvSpPr/>
+          <p:nvPr/>
+        </p:nvSpPr>
+        <p:spPr>
+          <a:xfrm>
+            <a:off x="6492240" y="2084832"/>
+            <a:ext cx="5029200" cy="274320"/>
+          </a:xfrm>
+          <a:prstGeom prst="rect">
+            <a:avLst/>
+          </a:prstGeom>
+          <a:noFill/>
+          <a:ln/>
+        </p:spPr>
+        <p:txBody>
+          <a:bodyPr wrap="square" lIns="0" tIns="0" rIns="0" bIns="0" rtlCol="0" anchor="ctr"/>
+          <a:lstStyle/>
+          <a:p>
+            <a:pPr indent="0" marL="0">
+              <a:buNone/>
+            </a:pPr>
+            <a:r>
+              <a:rPr lang="en-US" sz="1100" b="1" spc="100" kern="0" dirty="0">
+                <a:solidFill>
+                  <a:srgbClr val="C87A32"/>
+                </a:solidFill>
+                <a:latin typeface="Calibri" pitchFamily="34" charset="0"/>
+                <a:ea typeface="Calibri" pitchFamily="34" charset="-122"/>
+                <a:cs typeface="Calibri" pitchFamily="34" charset="-120"/>
+              </a:rPr>
+              <a:t>CERTIFICADO DE ENTREGA (97 SUBSISTEMAS)</a:t>
+            </a:r>
+            <a:endParaRPr lang="en-US" sz="1100" dirty="0"/>
+          </a:p>
+        </p:txBody>
+      </p:sp>
+      <p:sp>
+        <p:nvSpPr>
+          <p:cNvPr id="8" name="Shape 5"/>
+          <p:cNvSpPr/>
+          <p:nvPr/>
+        </p:nvSpPr>
+        <p:spPr>
+          <a:xfrm>
+            <a:off x="6492240" y="2468880"/>
+            <a:ext cx="5010912" cy="566928"/>
+          </a:xfrm>
+          <a:prstGeom prst="roundRect">
+            <a:avLst>
+              <a:gd name="adj" fmla="val 8065"/>
+            </a:avLst>
+          </a:prstGeom>
+          <a:solidFill>
+            <a:srgbClr val="F4F6F9"/>
+          </a:solidFill>
+          <a:ln/>
+        </p:spPr>
+      </p:sp>
+      <p:sp>
+        <p:nvSpPr>
+          <p:cNvPr id="9" name="Shape 6"/>
+          <p:cNvSpPr/>
+          <p:nvPr/>
+        </p:nvSpPr>
+        <p:spPr>
+          <a:xfrm>
+            <a:off x="6601968" y="2642616"/>
+            <a:ext cx="219456" cy="219456"/>
+          </a:xfrm>
+          <a:prstGeom prst="ellipse">
+            <a:avLst/>
+          </a:prstGeom>
+          <a:solidFill>
+            <a:srgbClr val="2E9E5B"/>
+          </a:solidFill>
+          <a:ln/>
+        </p:spPr>
+      </p:sp>
+      <p:sp>
+        <p:nvSpPr>
+          <p:cNvPr id="10" name="Text 7"/>
+          <p:cNvSpPr/>
+          <p:nvPr/>
+        </p:nvSpPr>
+        <p:spPr>
+          <a:xfrm>
+            <a:off x="6931152" y="2468880"/>
+            <a:ext cx="2651760" cy="566928"/>
+          </a:xfrm>
+          <a:prstGeom prst="rect">
+            <a:avLst/>
+          </a:prstGeom>
+          <a:noFill/>
+          <a:ln/>
+        </p:spPr>
+        <p:txBody>
+          <a:bodyPr wrap="square" lIns="0" tIns="0" rIns="0" bIns="0" rtlCol="0" anchor="ctr"/>
+          <a:lstStyle/>
+          <a:p>
+            <a:pPr indent="0" marL="0">
+              <a:buNone/>
+            </a:pPr>
+            <a:r>
+              <a:rPr lang="en-US" sz="1250" dirty="0">
+                <a:solidFill>
+                  <a:srgbClr val="1A2433"/>
+                </a:solidFill>
+                <a:latin typeface="Calibri" pitchFamily="34" charset="0"/>
+                <a:ea typeface="Calibri" pitchFamily="34" charset="-122"/>
+                <a:cs typeface="Calibri" pitchFamily="34" charset="-120"/>
+              </a:rPr>
+              <a:t>Aprobada</a:t>
+            </a:r>
+            <a:endParaRPr lang="en-US" sz="1250" dirty="0"/>
+          </a:p>
+        </p:txBody>
+      </p:sp>
+      <p:sp>
+        <p:nvSpPr>
+          <p:cNvPr id="11" name="Text 8"/>
+          <p:cNvSpPr/>
+          <p:nvPr/>
+        </p:nvSpPr>
+        <p:spPr>
+          <a:xfrm>
+            <a:off x="9509760" y="2468880"/>
+            <a:ext cx="1005840" cy="566928"/>
+          </a:xfrm>
+          <a:prstGeom prst="rect">
+            <a:avLst/>
+          </a:prstGeom>
+          <a:noFill/>
+          <a:ln/>
+        </p:spPr>
+        <p:txBody>
+          <a:bodyPr wrap="square" lIns="0" tIns="0" rIns="0" bIns="0" rtlCol="0" anchor="ctr"/>
+          <a:lstStyle/>
+          <a:p>
+            <a:pPr algn="r" indent="0" marL="0">
+              <a:buNone/>
+            </a:pPr>
+            <a:r>
+              <a:rPr lang="en-US" sz="1100" dirty="0">
+                <a:solidFill>
+                  <a:srgbClr val="56606E"/>
+                </a:solidFill>
+                <a:latin typeface="Calibri" pitchFamily="34" charset="0"/>
+                <a:ea typeface="Calibri" pitchFamily="34" charset="-122"/>
+                <a:cs typeface="Calibri" pitchFamily="34" charset="-120"/>
+              </a:rPr>
+              <a:t>22,7%</a:t>
+            </a:r>
+            <a:endParaRPr lang="en-US" sz="1100" dirty="0"/>
+          </a:p>
+        </p:txBody>
+      </p:sp>
+      <p:sp>
+        <p:nvSpPr>
+          <p:cNvPr id="12" name="Text 9"/>
+          <p:cNvSpPr/>
+          <p:nvPr/>
+        </p:nvSpPr>
+        <p:spPr>
+          <a:xfrm>
+            <a:off x="10561320" y="2468880"/>
+            <a:ext cx="822960" cy="566928"/>
+          </a:xfrm>
+          <a:prstGeom prst="rect">
+            <a:avLst/>
+          </a:prstGeom>
+          <a:noFill/>
+          <a:ln/>
+        </p:spPr>
+        <p:txBody>
+          <a:bodyPr wrap="square" lIns="0" tIns="0" rIns="0" bIns="0" rtlCol="0" anchor="ctr"/>
+          <a:lstStyle/>
+          <a:p>
+            <a:pPr algn="r" indent="0" marL="0">
+              <a:buNone/>
+            </a:pPr>
+            <a:r>
+              <a:rPr lang="en-US" sz="2200" b="1" dirty="0">
+                <a:solidFill>
+                  <a:srgbClr val="2E9E5B"/>
+                </a:solidFill>
+                <a:latin typeface="Cambria" pitchFamily="34" charset="0"/>
+                <a:ea typeface="Cambria" pitchFamily="34" charset="-122"/>
+                <a:cs typeface="Cambria" pitchFamily="34" charset="-120"/>
+              </a:rPr>
+              <a:t>22</a:t>
+            </a:r>
+            <a:endParaRPr lang="en-US" sz="2200" dirty="0"/>
+          </a:p>
+        </p:txBody>
+      </p:sp>
+      <p:sp>
+        <p:nvSpPr>
+          <p:cNvPr id="13" name="Shape 10"/>
+          <p:cNvSpPr/>
+          <p:nvPr/>
+        </p:nvSpPr>
+        <p:spPr>
+          <a:xfrm>
+            <a:off x="6492240" y="3090672"/>
+            <a:ext cx="5010912" cy="566928"/>
+          </a:xfrm>
+          <a:prstGeom prst="roundRect">
+            <a:avLst>
+              <a:gd name="adj" fmla="val 8065"/>
+            </a:avLst>
+          </a:prstGeom>
+          <a:solidFill>
+            <a:srgbClr val="F4F6F9"/>
+          </a:solidFill>
+          <a:ln/>
+        </p:spPr>
+      </p:sp>
+      <p:sp>
+        <p:nvSpPr>
+          <p:cNvPr id="14" name="Shape 11"/>
+          <p:cNvSpPr/>
+          <p:nvPr/>
+        </p:nvSpPr>
+        <p:spPr>
+          <a:xfrm>
+            <a:off x="6601968" y="3264408"/>
+            <a:ext cx="219456" cy="219456"/>
+          </a:xfrm>
+          <a:prstGeom prst="ellipse">
+            <a:avLst/>
+          </a:prstGeom>
+          <a:solidFill>
+            <a:srgbClr val="2E6FB5"/>
+          </a:solidFill>
+          <a:ln/>
+        </p:spPr>
+      </p:sp>
+      <p:sp>
+        <p:nvSpPr>
+          <p:cNvPr id="15" name="Text 12"/>
+          <p:cNvSpPr/>
+          <p:nvPr/>
+        </p:nvSpPr>
+        <p:spPr>
+          <a:xfrm>
+            <a:off x="6931152" y="3090672"/>
+            <a:ext cx="2651760" cy="566928"/>
+          </a:xfrm>
+          <a:prstGeom prst="rect">
+            <a:avLst/>
+          </a:prstGeom>
+          <a:noFill/>
+          <a:ln/>
+        </p:spPr>
+        <p:txBody>
+          <a:bodyPr wrap="square" lIns="0" tIns="0" rIns="0" bIns="0" rtlCol="0" anchor="ctr"/>
+          <a:lstStyle/>
+          <a:p>
+            <a:pPr indent="0" marL="0">
+              <a:buNone/>
+            </a:pPr>
+            <a:r>
+              <a:rPr lang="en-US" sz="1250" dirty="0">
+                <a:solidFill>
+                  <a:srgbClr val="1A2433"/>
+                </a:solidFill>
+                <a:latin typeface="Calibri" pitchFamily="34" charset="0"/>
+                <a:ea typeface="Calibri" pitchFamily="34" charset="-122"/>
+                <a:cs typeface="Calibri" pitchFamily="34" charset="-120"/>
+              </a:rPr>
+              <a:t>En revisión del cliente</a:t>
+            </a:r>
+            <a:endParaRPr lang="en-US" sz="1250" dirty="0"/>
+          </a:p>
+        </p:txBody>
+      </p:sp>
+      <p:sp>
+        <p:nvSpPr>
+          <p:cNvPr id="16" name="Text 13"/>
+          <p:cNvSpPr/>
+          <p:nvPr/>
+        </p:nvSpPr>
+        <p:spPr>
+          <a:xfrm>
+            <a:off x="9509760" y="3090672"/>
+            <a:ext cx="1005840" cy="566928"/>
+          </a:xfrm>
+          <a:prstGeom prst="rect">
+            <a:avLst/>
+          </a:prstGeom>
+          <a:noFill/>
+          <a:ln/>
+        </p:spPr>
+        <p:txBody>
+          <a:bodyPr wrap="square" lIns="0" tIns="0" rIns="0" bIns="0" rtlCol="0" anchor="ctr"/>
+          <a:lstStyle/>
+          <a:p>
+            <a:pPr algn="r" indent="0" marL="0">
+              <a:buNone/>
+            </a:pPr>
+            <a:r>
+              <a:rPr lang="en-US" sz="1100" dirty="0">
+                <a:solidFill>
+                  <a:srgbClr val="56606E"/>
+                </a:solidFill>
+                <a:latin typeface="Calibri" pitchFamily="34" charset="0"/>
+                <a:ea typeface="Calibri" pitchFamily="34" charset="-122"/>
+                <a:cs typeface="Calibri" pitchFamily="34" charset="-120"/>
+              </a:rPr>
+              <a:t>8,2%</a:t>
+            </a:r>
+            <a:endParaRPr lang="en-US" sz="1100" dirty="0"/>
+          </a:p>
+        </p:txBody>
+      </p:sp>
+      <p:sp>
+        <p:nvSpPr>
+          <p:cNvPr id="17" name="Text 14"/>
+          <p:cNvSpPr/>
+          <p:nvPr/>
+        </p:nvSpPr>
+        <p:spPr>
+          <a:xfrm>
+            <a:off x="10561320" y="3090672"/>
+            <a:ext cx="822960" cy="566928"/>
+          </a:xfrm>
+          <a:prstGeom prst="rect">
+            <a:avLst/>
+          </a:prstGeom>
+          <a:noFill/>
+          <a:ln/>
+        </p:spPr>
+        <p:txBody>
+          <a:bodyPr wrap="square" lIns="0" tIns="0" rIns="0" bIns="0" rtlCol="0" anchor="ctr"/>
+          <a:lstStyle/>
+          <a:p>
+            <a:pPr algn="r" indent="0" marL="0">
+              <a:buNone/>
+            </a:pPr>
+            <a:r>
+              <a:rPr lang="en-US" sz="2200" b="1" dirty="0">
+                <a:solidFill>
+                  <a:srgbClr val="2E6FB5"/>
+                </a:solidFill>
+                <a:latin typeface="Cambria" pitchFamily="34" charset="0"/>
+                <a:ea typeface="Cambria" pitchFamily="34" charset="-122"/>
+                <a:cs typeface="Cambria" pitchFamily="34" charset="-120"/>
+              </a:rPr>
+              <a:t>8</a:t>
+            </a:r>
+            <a:endParaRPr lang="en-US" sz="2200" dirty="0"/>
+          </a:p>
+        </p:txBody>
+      </p:sp>
+      <p:sp>
+        <p:nvSpPr>
+          <p:cNvPr id="18" name="Shape 15"/>
+          <p:cNvSpPr/>
+          <p:nvPr/>
+        </p:nvSpPr>
+        <p:spPr>
+          <a:xfrm>
+            <a:off x="6492240" y="3712464"/>
+            <a:ext cx="5010912" cy="566928"/>
+          </a:xfrm>
+          <a:prstGeom prst="roundRect">
+            <a:avLst>
+              <a:gd name="adj" fmla="val 8065"/>
+            </a:avLst>
+          </a:prstGeom>
+          <a:solidFill>
+            <a:srgbClr val="F4F6F9"/>
+          </a:solidFill>
+          <a:ln/>
+        </p:spPr>
+      </p:sp>
+      <p:sp>
+        <p:nvSpPr>
+          <p:cNvPr id="19" name="Shape 16"/>
+          <p:cNvSpPr/>
+          <p:nvPr/>
+        </p:nvSpPr>
+        <p:spPr>
+          <a:xfrm>
+            <a:off x="6601968" y="3886200"/>
+            <a:ext cx="219456" cy="219456"/>
+          </a:xfrm>
+          <a:prstGeom prst="ellipse">
+            <a:avLst/>
+          </a:prstGeom>
+          <a:solidFill>
+            <a:srgbClr val="C0392B"/>
+          </a:solidFill>
+          <a:ln/>
+        </p:spPr>
+      </p:sp>
+      <p:sp>
+        <p:nvSpPr>
+          <p:cNvPr id="20" name="Text 17"/>
+          <p:cNvSpPr/>
+          <p:nvPr/>
+        </p:nvSpPr>
+        <p:spPr>
+          <a:xfrm>
+            <a:off x="6931152" y="3712464"/>
+            <a:ext cx="2651760" cy="566928"/>
+          </a:xfrm>
+          <a:prstGeom prst="rect">
+            <a:avLst/>
+          </a:prstGeom>
+          <a:noFill/>
+          <a:ln/>
+        </p:spPr>
+        <p:txBody>
+          <a:bodyPr wrap="square" lIns="0" tIns="0" rIns="0" bIns="0" rtlCol="0" anchor="ctr"/>
+          <a:lstStyle/>
+          <a:p>
+            <a:pPr indent="0" marL="0">
+              <a:buNone/>
+            </a:pPr>
+            <a:r>
+              <a:rPr lang="en-US" sz="1250" dirty="0">
+                <a:solidFill>
+                  <a:srgbClr val="1A2433"/>
+                </a:solidFill>
+                <a:latin typeface="Calibri" pitchFamily="34" charset="0"/>
+                <a:ea typeface="Calibri" pitchFamily="34" charset="-122"/>
+                <a:cs typeface="Calibri" pitchFamily="34" charset="-120"/>
+              </a:rPr>
+              <a:t>Rechazada</a:t>
+            </a:r>
+            <a:endParaRPr lang="en-US" sz="1250" dirty="0"/>
+          </a:p>
+        </p:txBody>
+      </p:sp>
+      <p:sp>
+        <p:nvSpPr>
+          <p:cNvPr id="21" name="Text 18"/>
+          <p:cNvSpPr/>
+          <p:nvPr/>
+        </p:nvSpPr>
+        <p:spPr>
+          <a:xfrm>
+            <a:off x="9509760" y="3712464"/>
+            <a:ext cx="1005840" cy="566928"/>
+          </a:xfrm>
+          <a:prstGeom prst="rect">
+            <a:avLst/>
+          </a:prstGeom>
+          <a:noFill/>
+          <a:ln/>
+        </p:spPr>
+        <p:txBody>
+          <a:bodyPr wrap="square" lIns="0" tIns="0" rIns="0" bIns="0" rtlCol="0" anchor="ctr"/>
+          <a:lstStyle/>
+          <a:p>
+            <a:pPr algn="r" indent="0" marL="0">
+              <a:buNone/>
+            </a:pPr>
+            <a:r>
+              <a:rPr lang="en-US" sz="1100" dirty="0">
+                <a:solidFill>
+                  <a:srgbClr val="56606E"/>
+                </a:solidFill>
+                <a:latin typeface="Calibri" pitchFamily="34" charset="0"/>
+                <a:ea typeface="Calibri" pitchFamily="34" charset="-122"/>
+                <a:cs typeface="Calibri" pitchFamily="34" charset="-120"/>
+              </a:rPr>
+              <a:t>9,3%</a:t>
+            </a:r>
+            <a:endParaRPr lang="en-US" sz="1100" dirty="0"/>
+          </a:p>
+        </p:txBody>
+      </p:sp>
+      <p:sp>
+        <p:nvSpPr>
+          <p:cNvPr id="22" name="Text 19"/>
+          <p:cNvSpPr/>
+          <p:nvPr/>
+        </p:nvSpPr>
+        <p:spPr>
+          <a:xfrm>
+            <a:off x="10561320" y="3712464"/>
+            <a:ext cx="822960" cy="566928"/>
+          </a:xfrm>
+          <a:prstGeom prst="rect">
+            <a:avLst/>
+          </a:prstGeom>
+          <a:noFill/>
+          <a:ln/>
+        </p:spPr>
+        <p:txBody>
+          <a:bodyPr wrap="square" lIns="0" tIns="0" rIns="0" bIns="0" rtlCol="0" anchor="ctr"/>
+          <a:lstStyle/>
+          <a:p>
+            <a:pPr algn="r" indent="0" marL="0">
+              <a:buNone/>
+            </a:pPr>
+            <a:r>
+              <a:rPr lang="en-US" sz="2200" b="1" dirty="0">
+                <a:solidFill>
+                  <a:srgbClr val="C0392B"/>
+                </a:solidFill>
+                <a:latin typeface="Cambria" pitchFamily="34" charset="0"/>
+                <a:ea typeface="Cambria" pitchFamily="34" charset="-122"/>
+                <a:cs typeface="Cambria" pitchFamily="34" charset="-120"/>
+              </a:rPr>
+              <a:t>9</a:t>
+            </a:r>
+            <a:endParaRPr lang="en-US" sz="2200" dirty="0"/>
+          </a:p>
+        </p:txBody>
+      </p:sp>
+      <p:sp>
+        <p:nvSpPr>
+          <p:cNvPr id="23" name="Shape 20"/>
+          <p:cNvSpPr/>
+          <p:nvPr/>
+        </p:nvSpPr>
+        <p:spPr>
+          <a:xfrm>
+            <a:off x="6492240" y="4334256"/>
+            <a:ext cx="5010912" cy="566928"/>
+          </a:xfrm>
+          <a:prstGeom prst="roundRect">
+            <a:avLst>
+              <a:gd name="adj" fmla="val 8065"/>
+            </a:avLst>
+          </a:prstGeom>
+          <a:solidFill>
+            <a:srgbClr val="F4F6F9"/>
+          </a:solidFill>
+          <a:ln/>
+        </p:spPr>
+      </p:sp>
+      <p:sp>
+        <p:nvSpPr>
+          <p:cNvPr id="24" name="Shape 21"/>
+          <p:cNvSpPr/>
+          <p:nvPr/>
+        </p:nvSpPr>
+        <p:spPr>
+          <a:xfrm>
+            <a:off x="6601968" y="4507992"/>
+            <a:ext cx="219456" cy="219456"/>
+          </a:xfrm>
+          <a:prstGeom prst="ellipse">
+            <a:avLst/>
+          </a:prstGeom>
+          <a:solidFill>
+            <a:srgbClr val="E0A32E"/>
+          </a:solidFill>
+          <a:ln/>
+        </p:spPr>
+      </p:sp>
+      <p:sp>
+        <p:nvSpPr>
+          <p:cNvPr id="25" name="Text 22"/>
+          <p:cNvSpPr/>
+          <p:nvPr/>
+        </p:nvSpPr>
+        <p:spPr>
+          <a:xfrm>
+            <a:off x="6931152" y="4334256"/>
+            <a:ext cx="2651760" cy="566928"/>
+          </a:xfrm>
+          <a:prstGeom prst="rect">
+            <a:avLst/>
+          </a:prstGeom>
+          <a:noFill/>
+          <a:ln/>
+        </p:spPr>
+        <p:txBody>
+          <a:bodyPr wrap="square" lIns="0" tIns="0" rIns="0" bIns="0" rtlCol="0" anchor="ctr"/>
+          <a:lstStyle/>
+          <a:p>
+            <a:pPr indent="0" marL="0">
+              <a:buNone/>
+            </a:pPr>
+            <a:r>
+              <a:rPr lang="en-US" sz="1250" dirty="0">
+                <a:solidFill>
+                  <a:srgbClr val="1A2433"/>
+                </a:solidFill>
+                <a:latin typeface="Calibri" pitchFamily="34" charset="0"/>
+                <a:ea typeface="Calibri" pitchFamily="34" charset="-122"/>
+                <a:cs typeface="Calibri" pitchFamily="34" charset="-120"/>
+              </a:rPr>
+              <a:t>En preparación (interna)</a:t>
+            </a:r>
+            <a:endParaRPr lang="en-US" sz="1250" dirty="0"/>
+          </a:p>
+        </p:txBody>
+      </p:sp>
+      <p:sp>
+        <p:nvSpPr>
+          <p:cNvPr id="26" name="Text 23"/>
+          <p:cNvSpPr/>
+          <p:nvPr/>
+        </p:nvSpPr>
+        <p:spPr>
+          <a:xfrm>
+            <a:off x="9509760" y="4334256"/>
+            <a:ext cx="1005840" cy="566928"/>
+          </a:xfrm>
+          <a:prstGeom prst="rect">
+            <a:avLst/>
+          </a:prstGeom>
+          <a:noFill/>
+          <a:ln/>
+        </p:spPr>
+        <p:txBody>
+          <a:bodyPr wrap="square" lIns="0" tIns="0" rIns="0" bIns="0" rtlCol="0" anchor="ctr"/>
+          <a:lstStyle/>
+          <a:p>
+            <a:pPr algn="r" indent="0" marL="0">
+              <a:buNone/>
+            </a:pPr>
+            <a:r>
+              <a:rPr lang="en-US" sz="1100" dirty="0">
+                <a:solidFill>
+                  <a:srgbClr val="56606E"/>
+                </a:solidFill>
+                <a:latin typeface="Calibri" pitchFamily="34" charset="0"/>
+                <a:ea typeface="Calibri" pitchFamily="34" charset="-122"/>
+                <a:cs typeface="Calibri" pitchFamily="34" charset="-120"/>
+              </a:rPr>
+              <a:t>14,4%</a:t>
+            </a:r>
+            <a:endParaRPr lang="en-US" sz="1100" dirty="0"/>
+          </a:p>
+        </p:txBody>
+      </p:sp>
+      <p:sp>
+        <p:nvSpPr>
+          <p:cNvPr id="27" name="Text 24"/>
+          <p:cNvSpPr/>
+          <p:nvPr/>
+        </p:nvSpPr>
+        <p:spPr>
+          <a:xfrm>
+            <a:off x="10561320" y="4334256"/>
+            <a:ext cx="822960" cy="566928"/>
+          </a:xfrm>
+          <a:prstGeom prst="rect">
+            <a:avLst/>
+          </a:prstGeom>
+          <a:noFill/>
+          <a:ln/>
+        </p:spPr>
+        <p:txBody>
+          <a:bodyPr wrap="square" lIns="0" tIns="0" rIns="0" bIns="0" rtlCol="0" anchor="ctr"/>
+          <a:lstStyle/>
+          <a:p>
+            <a:pPr algn="r" indent="0" marL="0">
+              <a:buNone/>
+            </a:pPr>
+            <a:r>
+              <a:rPr lang="en-US" sz="2200" b="1" dirty="0">
+                <a:solidFill>
+                  <a:srgbClr val="E0A32E"/>
+                </a:solidFill>
+                <a:latin typeface="Cambria" pitchFamily="34" charset="0"/>
+                <a:ea typeface="Cambria" pitchFamily="34" charset="-122"/>
+                <a:cs typeface="Cambria" pitchFamily="34" charset="-120"/>
+              </a:rPr>
+              <a:t>14</a:t>
+            </a:r>
+            <a:endParaRPr lang="en-US" sz="2200" dirty="0"/>
+          </a:p>
+        </p:txBody>
+      </p:sp>
+      <p:sp>
+        <p:nvSpPr>
+          <p:cNvPr id="28" name="Shape 25"/>
+          <p:cNvSpPr/>
+          <p:nvPr/>
+        </p:nvSpPr>
+        <p:spPr>
+          <a:xfrm>
+            <a:off x="6492240" y="4956048"/>
+            <a:ext cx="5010912" cy="566928"/>
+          </a:xfrm>
+          <a:prstGeom prst="roundRect">
+            <a:avLst>
+              <a:gd name="adj" fmla="val 8065"/>
+            </a:avLst>
+          </a:prstGeom>
+          <a:solidFill>
+            <a:srgbClr val="F4F6F9"/>
+          </a:solidFill>
+          <a:ln/>
+        </p:spPr>
+      </p:sp>
+      <p:sp>
+        <p:nvSpPr>
+          <p:cNvPr id="29" name="Shape 26"/>
+          <p:cNvSpPr/>
+          <p:nvPr/>
+        </p:nvSpPr>
+        <p:spPr>
+          <a:xfrm>
+            <a:off x="6601968" y="5129784"/>
+            <a:ext cx="219456" cy="219456"/>
+          </a:xfrm>
+          <a:prstGeom prst="ellipse">
+            <a:avLst/>
+          </a:prstGeom>
+          <a:solidFill>
+            <a:srgbClr val="6E8CA8"/>
+          </a:solidFill>
+          <a:ln/>
+        </p:spPr>
+      </p:sp>
+      <p:sp>
+        <p:nvSpPr>
+          <p:cNvPr id="30" name="Text 27"/>
+          <p:cNvSpPr/>
+          <p:nvPr/>
+        </p:nvSpPr>
+        <p:spPr>
+          <a:xfrm>
+            <a:off x="6931152" y="4956048"/>
+            <a:ext cx="2651760" cy="566928"/>
+          </a:xfrm>
+          <a:prstGeom prst="rect">
+            <a:avLst/>
+          </a:prstGeom>
+          <a:noFill/>
+          <a:ln/>
+        </p:spPr>
+        <p:txBody>
+          <a:bodyPr wrap="square" lIns="0" tIns="0" rIns="0" bIns="0" rtlCol="0" anchor="ctr"/>
+          <a:lstStyle/>
+          <a:p>
+            <a:pPr indent="0" marL="0">
+              <a:buNone/>
+            </a:pPr>
+            <a:r>
+              <a:rPr lang="en-US" sz="1250" dirty="0">
+                <a:solidFill>
+                  <a:srgbClr val="1A2433"/>
+                </a:solidFill>
+                <a:latin typeface="Calibri" pitchFamily="34" charset="0"/>
+                <a:ea typeface="Calibri" pitchFamily="34" charset="-122"/>
+                <a:cs typeface="Calibri" pitchFamily="34" charset="-120"/>
+              </a:rPr>
+              <a:t>Sin entregar</a:t>
+            </a:r>
+            <a:endParaRPr lang="en-US" sz="1250" dirty="0"/>
+          </a:p>
+        </p:txBody>
+      </p:sp>
+      <p:sp>
+        <p:nvSpPr>
+          <p:cNvPr id="31" name="Text 28"/>
+          <p:cNvSpPr/>
+          <p:nvPr/>
+        </p:nvSpPr>
+        <p:spPr>
+          <a:xfrm>
+            <a:off x="9509760" y="4956048"/>
+            <a:ext cx="1005840" cy="566928"/>
+          </a:xfrm>
+          <a:prstGeom prst="rect">
+            <a:avLst/>
+          </a:prstGeom>
+          <a:noFill/>
+          <a:ln/>
+        </p:spPr>
+        <p:txBody>
+          <a:bodyPr wrap="square" lIns="0" tIns="0" rIns="0" bIns="0" rtlCol="0" anchor="ctr"/>
+          <a:lstStyle/>
+          <a:p>
+            <a:pPr algn="r" indent="0" marL="0">
+              <a:buNone/>
+            </a:pPr>
+            <a:r>
+              <a:rPr lang="en-US" sz="1100" dirty="0">
+                <a:solidFill>
+                  <a:srgbClr val="56606E"/>
+                </a:solidFill>
+                <a:latin typeface="Calibri" pitchFamily="34" charset="0"/>
+                <a:ea typeface="Calibri" pitchFamily="34" charset="-122"/>
+                <a:cs typeface="Calibri" pitchFamily="34" charset="-120"/>
+              </a:rPr>
+              <a:t>45,4%</a:t>
+            </a:r>
+            <a:endParaRPr lang="en-US" sz="1100" dirty="0"/>
+          </a:p>
+        </p:txBody>
+      </p:sp>
+      <p:sp>
+        <p:nvSpPr>
+          <p:cNvPr id="32" name="Text 29"/>
+          <p:cNvSpPr/>
+          <p:nvPr/>
+        </p:nvSpPr>
+        <p:spPr>
+          <a:xfrm>
+            <a:off x="10561320" y="4956048"/>
+            <a:ext cx="822960" cy="566928"/>
+          </a:xfrm>
+          <a:prstGeom prst="rect">
+            <a:avLst/>
+          </a:prstGeom>
+          <a:noFill/>
+          <a:ln/>
+        </p:spPr>
+        <p:txBody>
+          <a:bodyPr wrap="square" lIns="0" tIns="0" rIns="0" bIns="0" rtlCol="0" anchor="ctr"/>
+          <a:lstStyle/>
+          <a:p>
+            <a:pPr algn="r" indent="0" marL="0">
+              <a:buNone/>
+            </a:pPr>
+            <a:r>
+              <a:rPr lang="en-US" sz="2200" b="1" dirty="0">
+                <a:solidFill>
+                  <a:srgbClr val="6E8CA8"/>
+                </a:solidFill>
+                <a:latin typeface="Cambria" pitchFamily="34" charset="0"/>
+                <a:ea typeface="Cambria" pitchFamily="34" charset="-122"/>
+                <a:cs typeface="Cambria" pitchFamily="34" charset="-120"/>
+              </a:rPr>
+              <a:t>44</a:t>
+            </a:r>
+            <a:endParaRPr lang="en-US" sz="2200" dirty="0"/>
+          </a:p>
+        </p:txBody>
+      </p:sp>
+      <p:sp>
+        <p:nvSpPr>
+          <p:cNvPr id="33" name="Text 30"/>
+          <p:cNvSpPr/>
+          <p:nvPr/>
+        </p:nvSpPr>
+        <p:spPr>
+          <a:xfrm>
+            <a:off x="6492240" y="5596128"/>
+            <a:ext cx="5029200" cy="365760"/>
+          </a:xfrm>
+          <a:prstGeom prst="rect">
+            <a:avLst/>
+          </a:prstGeom>
+          <a:noFill/>
+          <a:ln/>
+        </p:spPr>
+        <p:txBody>
+          <a:bodyPr wrap="square" lIns="0" tIns="0" rIns="0" bIns="0" rtlCol="0" anchor="ctr"/>
+          <a:lstStyle/>
+          <a:p>
+            <a:pPr indent="0" marL="0">
+              <a:lnSpc>
+                <a:spcPts val="1200"/>
+              </a:lnSpc>
+              <a:buNone/>
+            </a:pPr>
+            <a:r>
+              <a:rPr lang="en-US" sz="1000" i="1" dirty="0">
+                <a:solidFill>
+                  <a:srgbClr val="56606E"/>
+                </a:solidFill>
+                <a:latin typeface="Calibri" pitchFamily="34" charset="0"/>
+                <a:ea typeface="Calibri" pitchFamily="34" charset="-122"/>
+                <a:cs typeface="Calibri" pitchFamily="34" charset="-120"/>
+              </a:rPr>
+              <a:t>39 carpetas ya están en manos del cliente (40,2%) y 27 subsistemas tienen tarjeta verde. El grueso del pendiente todavía no sale de Besalco.</a:t>
+            </a:r>
+            <a:endParaRPr lang="en-US" sz="1000" dirty="0"/>
+          </a:p>
+        </p:txBody>
+      </p:sp>
+      <p:sp>
+        <p:nvSpPr>
+          <p:cNvPr id="34" name="Text 31"/>
+          <p:cNvSpPr/>
+          <p:nvPr/>
+        </p:nvSpPr>
+        <p:spPr>
+          <a:xfrm>
+            <a:off x="457200" y="6473952"/>
+            <a:ext cx="9692640" cy="274320"/>
+          </a:xfrm>
+          <a:prstGeom prst="rect">
+            <a:avLst/>
+          </a:prstGeom>
+          <a:noFill/>
+          <a:ln/>
+        </p:spPr>
+        <p:txBody>
+          <a:bodyPr wrap="square" lIns="0" tIns="0" rIns="0" bIns="0" rtlCol="0" anchor="ctr"/>
+          <a:lstStyle/>
+          <a:p>
+            <a:pPr algn="l" indent="0" marL="0">
+              <a:buNone/>
+            </a:pPr>
+            <a:r>
+              <a:rPr lang="en-US" sz="850" dirty="0">
+                <a:solidFill>
+                  <a:srgbClr val="56606E"/>
+                </a:solidFill>
+                <a:latin typeface="Calibri" pitchFamily="34" charset="0"/>
+                <a:ea typeface="Calibri" pitchFamily="34" charset="-122"/>
+                <a:cs typeface="Calibri" pitchFamily="34" charset="-120"/>
+              </a:rPr>
+              <a:t>Fuente: REPORTE_GERENCIAL + Listado de Puntos Punch Consolidado · Corte 27-07-2026 · Atrasos al 27-07-2026</a:t>
+            </a:r>
+            <a:endParaRPr lang="en-US" sz="850" dirty="0"/>
+          </a:p>
+        </p:txBody>
+      </p:sp>
+      <p:sp>
+        <p:nvSpPr>
+          <p:cNvPr id="35" name="Text 32"/>
+          <p:cNvSpPr/>
+          <p:nvPr/>
+        </p:nvSpPr>
+        <p:spPr>
+          <a:xfrm>
+            <a:off x="11430000" y="6473952"/>
+            <a:ext cx="365760" cy="274320"/>
+          </a:xfrm>
+          <a:prstGeom prst="rect">
+            <a:avLst/>
+          </a:prstGeom>
+          <a:noFill/>
+          <a:ln/>
+        </p:spPr>
+        <p:txBody>
+          <a:bodyPr wrap="square" lIns="0" tIns="0" rIns="0" bIns="0" rtlCol="0" anchor="ctr"/>
+          <a:lstStyle/>
+          <a:p>
+            <a:pPr algn="r" indent="0" marL="0">
+              <a:buNone/>
+            </a:pPr>
+            <a:r>
+              <a:rPr lang="en-US" sz="900" dirty="0">
+                <a:solidFill>
+                  <a:srgbClr val="56606E"/>
+                </a:solidFill>
+                <a:latin typeface="Calibri" pitchFamily="34" charset="0"/>
+                <a:ea typeface="Calibri" pitchFamily="34" charset="-122"/>
+                <a:cs typeface="Calibri" pitchFamily="34" charset="-120"/>
+              </a:rPr>
+              <a:t>10</a:t>
+            </a:r>
+            <a:endParaRPr lang="en-US" sz="900" dirty="0"/>
+          </a:p>
+        </p:txBody>
+      </p:sp>
+    </p:spTree>
+  </p:cSld>
+  <p:clrMapOvr>
+    <a:masterClrMapping/>
+  </p:clrMapOvr>
+</p:sld>
+</file>
+
+<file path=ppt/slides/slide11.xml><?xml version="1.0" encoding="utf-8"?>
+<p:sld xmlns:a="http://schemas.openxmlformats.org/drawingml/2006/main" xmlns:r="http://schemas.openxmlformats.org/officeDocument/2006/relationships" xmlns:p="http://schemas.openxmlformats.org/presentationml/2006/main">
+  <p:cSld name="Slide 11">
+    <p:bg>
+      <p:bgPr>
+        <a:solidFill>
+          <a:srgbClr val="F4F6F9"/>
+        </a:solidFill>
+      </p:bgPr>
+    </p:bg>
+    <p:spTree>
+      <p:nvGrpSpPr>
+        <p:cNvPr id="1" name=""/>
+        <p:cNvGrpSpPr/>
+        <p:nvPr/>
+      </p:nvGrpSpPr>
+      <p:grpSpPr>
+        <a:xfrm>
+          <a:off x="0" y="0"/>
+          <a:ext cx="0" cy="0"/>
+          <a:chOff x="0" y="0"/>
+          <a:chExt cx="0" cy="0"/>
+        </a:xfrm>
+      </p:grpSpPr>
+      <p:sp>
+        <p:nvSpPr>
+          <p:cNvPr id="2" name="Text 0"/>
+          <p:cNvSpPr/>
+          <p:nvPr/>
+        </p:nvSpPr>
+        <p:spPr>
+          <a:xfrm>
+            <a:off x="457200" y="411480"/>
+            <a:ext cx="7315200" cy="256032"/>
+          </a:xfrm>
+          <a:prstGeom prst="rect">
+            <a:avLst/>
+          </a:prstGeom>
+          <a:noFill/>
+          <a:ln/>
+        </p:spPr>
+        <p:txBody>
+          <a:bodyPr wrap="square" lIns="0" tIns="0" rIns="0" bIns="0" rtlCol="0" anchor="ctr"/>
+          <a:lstStyle/>
+          <a:p>
+            <a:pPr algn="l" indent="0" marL="0">
+              <a:buNone/>
+            </a:pPr>
+            <a:r>
+              <a:rPr lang="en-US" sz="1100" b="1" spc="200" kern="0" dirty="0">
+                <a:solidFill>
+                  <a:srgbClr val="C87A32"/>
+                </a:solidFill>
+                <a:latin typeface="Calibri" pitchFamily="34" charset="0"/>
+                <a:ea typeface="Calibri" pitchFamily="34" charset="-122"/>
+                <a:cs typeface="Calibri" pitchFamily="34" charset="-120"/>
+              </a:rPr>
+              <a:t>DESALADORA · FRENTE 3</a:t>
+            </a:r>
+            <a:endParaRPr lang="en-US" sz="1100" dirty="0"/>
+          </a:p>
+        </p:txBody>
+      </p:sp>
+      <p:sp>
+        <p:nvSpPr>
+          <p:cNvPr id="3" name="Text 1"/>
+          <p:cNvSpPr/>
+          <p:nvPr/>
+        </p:nvSpPr>
+        <p:spPr>
+          <a:xfrm>
+            <a:off x="457200" y="658368"/>
+            <a:ext cx="11247120" cy="548640"/>
+          </a:xfrm>
+          <a:prstGeom prst="rect">
+            <a:avLst/>
+          </a:prstGeom>
+          <a:noFill/>
+          <a:ln/>
+        </p:spPr>
+        <p:txBody>
+          <a:bodyPr wrap="square" lIns="0" tIns="0" rIns="0" bIns="0" rtlCol="0" anchor="ctr"/>
+          <a:lstStyle/>
+          <a:p>
+            <a:pPr indent="0" marL="0">
+              <a:buNone/>
+            </a:pPr>
+            <a:r>
+              <a:rPr lang="en-US" sz="3000" b="1" dirty="0">
+                <a:solidFill>
+                  <a:srgbClr val="1A2433"/>
+                </a:solidFill>
+                <a:latin typeface="Cambria" pitchFamily="34" charset="0"/>
+                <a:ea typeface="Cambria" pitchFamily="34" charset="-122"/>
+                <a:cs typeface="Cambria" pitchFamily="34" charset="-120"/>
+              </a:rPr>
+              <a:t>Punch list en condición P1</a:t>
+            </a:r>
+            <a:endParaRPr lang="en-US" sz="3000" dirty="0"/>
+          </a:p>
+        </p:txBody>
+      </p:sp>
+      <p:sp>
+        <p:nvSpPr>
+          <p:cNvPr id="4" name="Text 2"/>
+          <p:cNvSpPr/>
+          <p:nvPr/>
+        </p:nvSpPr>
+        <p:spPr>
+          <a:xfrm>
+            <a:off x="457200" y="1234440"/>
+            <a:ext cx="11247120" cy="457200"/>
+          </a:xfrm>
+          <a:prstGeom prst="rect">
+            <a:avLst/>
+          </a:prstGeom>
+          <a:noFill/>
+          <a:ln/>
+        </p:spPr>
+        <p:txBody>
+          <a:bodyPr wrap="square" lIns="0" tIns="0" rIns="0" bIns="0" rtlCol="0" anchor="ctr"/>
+          <a:lstStyle/>
+          <a:p>
+            <a:pPr indent="0" marL="0">
+              <a:buNone/>
+            </a:pPr>
+            <a:r>
+              <a:rPr lang="en-US" sz="1350" dirty="0">
+                <a:solidFill>
+                  <a:srgbClr val="56606E"/>
+                </a:solidFill>
+                <a:latin typeface="Calibri" pitchFamily="34" charset="0"/>
+                <a:ea typeface="Calibri" pitchFamily="34" charset="-122"/>
+                <a:cs typeface="Calibri" pitchFamily="34" charset="-120"/>
+              </a:rPr>
+              <a:t>829 P1 levantados; 71,4% cerrados. Atrasado = ítem abierto cuya fecha requerida de cierre ya venció al 27-07-2026.</a:t>
+            </a:r>
+            <a:endParaRPr lang="en-US" sz="1350" dirty="0"/>
+          </a:p>
+        </p:txBody>
+      </p:sp>
+      <p:graphicFrame>
+        <p:nvGraphicFramePr>
+          <p:cNvPr id="5" name="Chart 0" descr=""/>
+          <p:cNvGraphicFramePr/>
+          <p:nvPr/>
+        </p:nvGraphicFramePr>
+        <p:xfrm>
+          <a:off x="457200" y="1874520"/>
+          <a:ext cx="7040880" cy="4114800"/>
+        </p:xfrm>
+        <a:graphic xmlns:a="http://schemas.openxmlformats.org/drawingml/2006/main">
+          <a:graphicData uri="http://schemas.openxmlformats.org/drawingml/2006/chart">
+            <c:chart xmlns:c="http://schemas.openxmlformats.org/drawingml/2006/chart" r:id="rId1"/>
+          </a:graphicData>
+        </a:graphic>
+      </p:graphicFrame>
+      <p:sp>
+        <p:nvSpPr>
+          <p:cNvPr id="6" name="Shape 3"/>
+          <p:cNvSpPr/>
+          <p:nvPr/>
+        </p:nvSpPr>
+        <p:spPr>
+          <a:xfrm>
+            <a:off x="7680960" y="1874520"/>
+            <a:ext cx="4050792" cy="4114800"/>
+          </a:xfrm>
+          <a:prstGeom prst="roundRect">
+            <a:avLst>
+              <a:gd name="adj" fmla="val 1354"/>
+            </a:avLst>
+          </a:prstGeom>
+          <a:solidFill>
+            <a:srgbClr val="12233B"/>
+          </a:solidFill>
+          <a:ln/>
+        </p:spPr>
+      </p:sp>
+      <p:sp>
+        <p:nvSpPr>
+          <p:cNvPr id="7" name="Text 4"/>
+          <p:cNvSpPr/>
+          <p:nvPr/>
+        </p:nvSpPr>
+        <p:spPr>
+          <a:xfrm>
+            <a:off x="7936992" y="2084832"/>
+            <a:ext cx="3657600" cy="274320"/>
+          </a:xfrm>
+          <a:prstGeom prst="rect">
+            <a:avLst/>
+          </a:prstGeom>
+          <a:noFill/>
+          <a:ln/>
+        </p:spPr>
+        <p:txBody>
+          <a:bodyPr wrap="square" lIns="0" tIns="0" rIns="0" bIns="0" rtlCol="0" anchor="ctr"/>
+          <a:lstStyle/>
+          <a:p>
+            <a:pPr indent="0" marL="0">
+              <a:buNone/>
+            </a:pPr>
+            <a:r>
+              <a:rPr lang="en-US" sz="1100" b="1" spc="120" kern="0" dirty="0">
+                <a:solidFill>
+                  <a:srgbClr val="E3A55B"/>
+                </a:solidFill>
+                <a:latin typeface="Calibri" pitchFamily="34" charset="0"/>
+                <a:ea typeface="Calibri" pitchFamily="34" charset="-122"/>
+                <a:cs typeface="Calibri" pitchFamily="34" charset="-120"/>
+              </a:rPr>
+              <a:t>ESTADO GLOBAL P1</a:t>
+            </a:r>
+            <a:endParaRPr lang="en-US" sz="1100" dirty="0"/>
+          </a:p>
+        </p:txBody>
+      </p:sp>
+      <p:graphicFrame>
+        <p:nvGraphicFramePr>
+          <p:cNvPr id="8" name="Chart 1" descr=""/>
+          <p:cNvGraphicFramePr/>
+          <p:nvPr/>
+        </p:nvGraphicFramePr>
+        <p:xfrm>
+          <a:off x="7772400" y="2331720"/>
+          <a:ext cx="2011680" cy="2011680"/>
+        </p:xfrm>
+        <a:graphic xmlns:a="http://schemas.openxmlformats.org/drawingml/2006/main">
+          <a:graphicData uri="http://schemas.openxmlformats.org/drawingml/2006/chart">
+            <c:chart xmlns:c="http://schemas.openxmlformats.org/drawingml/2006/chart" r:id="rId2"/>
+          </a:graphicData>
+        </a:graphic>
+      </p:graphicFrame>
+      <p:sp>
+        <p:nvSpPr>
+          <p:cNvPr id="9" name="Text 5"/>
+          <p:cNvSpPr/>
+          <p:nvPr/>
+        </p:nvSpPr>
+        <p:spPr>
+          <a:xfrm>
+            <a:off x="7772400" y="2999232"/>
+            <a:ext cx="2011680" cy="685800"/>
+          </a:xfrm>
+          <a:prstGeom prst="rect">
+            <a:avLst/>
+          </a:prstGeom>
+          <a:noFill/>
+          <a:ln/>
+        </p:spPr>
+        <p:txBody>
+          <a:bodyPr wrap="square" lIns="0" tIns="0" rIns="0" bIns="0" rtlCol="0" anchor="ctr"/>
+          <a:lstStyle/>
+          <a:p>
+            <a:pPr algn="ctr" indent="0" marL="0">
+              <a:buNone/>
+            </a:pPr>
+            <a:r>
+              <a:rPr lang="en-US" sz="1900" b="1" dirty="0">
+                <a:solidFill>
+                  <a:srgbClr val="FFFFFF"/>
+                </a:solidFill>
+                <a:latin typeface="Cambria" pitchFamily="34" charset="0"/>
+                <a:ea typeface="Cambria" pitchFamily="34" charset="-122"/>
+                <a:cs typeface="Cambria" pitchFamily="34" charset="-120"/>
+              </a:rPr>
+              <a:t>71,4%</a:t>
+            </a:r>
+            <a:endParaRPr lang="en-US" sz="1900" dirty="0"/>
+          </a:p>
+          <a:p>
+            <a:pPr algn="ctr" indent="0" marL="0">
+              <a:buNone/>
+            </a:pPr>
+            <a:r>
+              <a:rPr lang="en-US" sz="1000" dirty="0">
+                <a:solidFill>
+                  <a:srgbClr val="DCE6F0"/>
+                </a:solidFill>
+                <a:latin typeface="Cambria" pitchFamily="34" charset="0"/>
+                <a:ea typeface="Cambria" pitchFamily="34" charset="-122"/>
+                <a:cs typeface="Cambria" pitchFamily="34" charset="-120"/>
+              </a:rPr>
+              <a:t>cerrado</a:t>
+            </a:r>
+            <a:endParaRPr lang="en-US" sz="1900" dirty="0"/>
+          </a:p>
+        </p:txBody>
+      </p:sp>
+      <p:sp>
+        <p:nvSpPr>
+          <p:cNvPr id="10" name="Shape 6"/>
+          <p:cNvSpPr/>
+          <p:nvPr/>
+        </p:nvSpPr>
+        <p:spPr>
+          <a:xfrm>
+            <a:off x="10012680" y="2505456"/>
+            <a:ext cx="182880" cy="182880"/>
+          </a:xfrm>
+          <a:prstGeom prst="ellipse">
+            <a:avLst/>
+          </a:prstGeom>
+          <a:solidFill>
+            <a:srgbClr val="2E9E5B"/>
+          </a:solidFill>
+          <a:ln/>
+        </p:spPr>
+      </p:sp>
+      <p:sp>
+        <p:nvSpPr>
+          <p:cNvPr id="11" name="Text 7"/>
+          <p:cNvSpPr/>
+          <p:nvPr/>
+        </p:nvSpPr>
+        <p:spPr>
+          <a:xfrm>
+            <a:off x="10241280" y="2423160"/>
+            <a:ext cx="1417320" cy="320040"/>
+          </a:xfrm>
+          <a:prstGeom prst="rect">
+            <a:avLst/>
+          </a:prstGeom>
+          <a:noFill/>
+          <a:ln/>
+        </p:spPr>
+        <p:txBody>
+          <a:bodyPr wrap="square" lIns="0" tIns="0" rIns="0" bIns="0" rtlCol="0" anchor="ctr"/>
+          <a:lstStyle/>
+          <a:p>
+            <a:pPr indent="0" marL="0">
+              <a:buNone/>
+            </a:pPr>
+            <a:r>
+              <a:rPr lang="en-US" sz="1050" dirty="0">
+                <a:solidFill>
+                  <a:srgbClr val="DCE6F0"/>
+                </a:solidFill>
+                <a:latin typeface="Calibri" pitchFamily="34" charset="0"/>
+                <a:ea typeface="Calibri" pitchFamily="34" charset="-122"/>
+                <a:cs typeface="Calibri" pitchFamily="34" charset="-120"/>
+              </a:rPr>
+              <a:t>Cerrados</a:t>
+            </a:r>
+            <a:endParaRPr lang="en-US" sz="1050" dirty="0"/>
+          </a:p>
+        </p:txBody>
+      </p:sp>
+      <p:sp>
+        <p:nvSpPr>
+          <p:cNvPr id="12" name="Text 8"/>
+          <p:cNvSpPr/>
+          <p:nvPr/>
+        </p:nvSpPr>
+        <p:spPr>
+          <a:xfrm>
+            <a:off x="10241280" y="2670048"/>
+            <a:ext cx="1371600" cy="274320"/>
+          </a:xfrm>
+          <a:prstGeom prst="rect">
+            <a:avLst/>
+          </a:prstGeom>
+          <a:noFill/>
+          <a:ln/>
+        </p:spPr>
+        <p:txBody>
+          <a:bodyPr wrap="square" lIns="0" tIns="0" rIns="0" bIns="0" rtlCol="0" anchor="ctr"/>
+          <a:lstStyle/>
+          <a:p>
+            <a:pPr indent="0" marL="0">
+              <a:buNone/>
+            </a:pPr>
+            <a:r>
+              <a:rPr lang="en-US" sz="1100" b="1" dirty="0">
+                <a:solidFill>
+                  <a:srgbClr val="FFFFFF"/>
+                </a:solidFill>
+                <a:latin typeface="Calibri" pitchFamily="34" charset="0"/>
+                <a:ea typeface="Calibri" pitchFamily="34" charset="-122"/>
+                <a:cs typeface="Calibri" pitchFamily="34" charset="-120"/>
+              </a:rPr>
+              <a:t>592</a:t>
+            </a:r>
+            <a:endParaRPr lang="en-US" sz="1100" dirty="0"/>
+          </a:p>
+        </p:txBody>
+      </p:sp>
+      <p:sp>
+        <p:nvSpPr>
+          <p:cNvPr id="13" name="Shape 9"/>
+          <p:cNvSpPr/>
+          <p:nvPr/>
+        </p:nvSpPr>
+        <p:spPr>
+          <a:xfrm>
+            <a:off x="10012680" y="3072384"/>
+            <a:ext cx="182880" cy="182880"/>
+          </a:xfrm>
+          <a:prstGeom prst="ellipse">
+            <a:avLst/>
+          </a:prstGeom>
+          <a:solidFill>
+            <a:srgbClr val="C0392B"/>
+          </a:solidFill>
+          <a:ln/>
+        </p:spPr>
+      </p:sp>
+      <p:sp>
+        <p:nvSpPr>
+          <p:cNvPr id="14" name="Text 10"/>
+          <p:cNvSpPr/>
+          <p:nvPr/>
+        </p:nvSpPr>
+        <p:spPr>
+          <a:xfrm>
+            <a:off x="10241280" y="2990088"/>
+            <a:ext cx="1417320" cy="320040"/>
+          </a:xfrm>
+          <a:prstGeom prst="rect">
+            <a:avLst/>
+          </a:prstGeom>
+          <a:noFill/>
+          <a:ln/>
+        </p:spPr>
+        <p:txBody>
+          <a:bodyPr wrap="square" lIns="0" tIns="0" rIns="0" bIns="0" rtlCol="0" anchor="ctr"/>
+          <a:lstStyle/>
+          <a:p>
+            <a:pPr indent="0" marL="0">
+              <a:buNone/>
+            </a:pPr>
+            <a:r>
+              <a:rPr lang="en-US" sz="1050" dirty="0">
+                <a:solidFill>
+                  <a:srgbClr val="DCE6F0"/>
+                </a:solidFill>
+                <a:latin typeface="Calibri" pitchFamily="34" charset="0"/>
+                <a:ea typeface="Calibri" pitchFamily="34" charset="-122"/>
+                <a:cs typeface="Calibri" pitchFamily="34" charset="-120"/>
+              </a:rPr>
+              <a:t>Atrasados</a:t>
+            </a:r>
+            <a:endParaRPr lang="en-US" sz="1050" dirty="0"/>
+          </a:p>
+        </p:txBody>
+      </p:sp>
+      <p:sp>
+        <p:nvSpPr>
+          <p:cNvPr id="15" name="Text 11"/>
+          <p:cNvSpPr/>
+          <p:nvPr/>
+        </p:nvSpPr>
+        <p:spPr>
+          <a:xfrm>
+            <a:off x="10241280" y="3236976"/>
+            <a:ext cx="1371600" cy="274320"/>
+          </a:xfrm>
+          <a:prstGeom prst="rect">
+            <a:avLst/>
+          </a:prstGeom>
+          <a:noFill/>
+          <a:ln/>
+        </p:spPr>
+        <p:txBody>
+          <a:bodyPr wrap="square" lIns="0" tIns="0" rIns="0" bIns="0" rtlCol="0" anchor="ctr"/>
+          <a:lstStyle/>
+          <a:p>
+            <a:pPr indent="0" marL="0">
+              <a:buNone/>
+            </a:pPr>
+            <a:r>
+              <a:rPr lang="en-US" sz="1100" b="1" dirty="0">
+                <a:solidFill>
+                  <a:srgbClr val="FFFFFF"/>
+                </a:solidFill>
+                <a:latin typeface="Calibri" pitchFamily="34" charset="0"/>
+                <a:ea typeface="Calibri" pitchFamily="34" charset="-122"/>
+                <a:cs typeface="Calibri" pitchFamily="34" charset="-120"/>
+              </a:rPr>
+              <a:t>178</a:t>
+            </a:r>
+            <a:endParaRPr lang="en-US" sz="1100" dirty="0"/>
+          </a:p>
+        </p:txBody>
+      </p:sp>
+      <p:sp>
+        <p:nvSpPr>
+          <p:cNvPr id="16" name="Shape 12"/>
+          <p:cNvSpPr/>
+          <p:nvPr/>
+        </p:nvSpPr>
+        <p:spPr>
+          <a:xfrm>
+            <a:off x="10012680" y="3639312"/>
+            <a:ext cx="182880" cy="182880"/>
+          </a:xfrm>
+          <a:prstGeom prst="ellipse">
+            <a:avLst/>
+          </a:prstGeom>
+          <a:solidFill>
+            <a:srgbClr val="E3A55B"/>
+          </a:solidFill>
+          <a:ln/>
+        </p:spPr>
+      </p:sp>
+      <p:sp>
+        <p:nvSpPr>
+          <p:cNvPr id="17" name="Text 13"/>
+          <p:cNvSpPr/>
+          <p:nvPr/>
+        </p:nvSpPr>
+        <p:spPr>
+          <a:xfrm>
+            <a:off x="10241280" y="3557016"/>
+            <a:ext cx="1417320" cy="320040"/>
+          </a:xfrm>
+          <a:prstGeom prst="rect">
+            <a:avLst/>
+          </a:prstGeom>
+          <a:noFill/>
+          <a:ln/>
+        </p:spPr>
+        <p:txBody>
+          <a:bodyPr wrap="square" lIns="0" tIns="0" rIns="0" bIns="0" rtlCol="0" anchor="ctr"/>
+          <a:lstStyle/>
+          <a:p>
+            <a:pPr indent="0" marL="0">
+              <a:buNone/>
+            </a:pPr>
+            <a:r>
+              <a:rPr lang="en-US" sz="1050" dirty="0">
+                <a:solidFill>
+                  <a:srgbClr val="DCE6F0"/>
+                </a:solidFill>
+                <a:latin typeface="Calibri" pitchFamily="34" charset="0"/>
+                <a:ea typeface="Calibri" pitchFamily="34" charset="-122"/>
+                <a:cs typeface="Calibri" pitchFamily="34" charset="-120"/>
+              </a:rPr>
+              <a:t>Abiertos en plazo</a:t>
+            </a:r>
+            <a:endParaRPr lang="en-US" sz="1050" dirty="0"/>
+          </a:p>
+        </p:txBody>
+      </p:sp>
+      <p:sp>
+        <p:nvSpPr>
+          <p:cNvPr id="18" name="Text 14"/>
+          <p:cNvSpPr/>
+          <p:nvPr/>
+        </p:nvSpPr>
+        <p:spPr>
+          <a:xfrm>
+            <a:off x="10241280" y="3803904"/>
+            <a:ext cx="1371600" cy="274320"/>
+          </a:xfrm>
+          <a:prstGeom prst="rect">
+            <a:avLst/>
+          </a:prstGeom>
+          <a:noFill/>
+          <a:ln/>
+        </p:spPr>
+        <p:txBody>
+          <a:bodyPr wrap="square" lIns="0" tIns="0" rIns="0" bIns="0" rtlCol="0" anchor="ctr"/>
+          <a:lstStyle/>
+          <a:p>
+            <a:pPr indent="0" marL="0">
+              <a:buNone/>
+            </a:pPr>
+            <a:r>
+              <a:rPr lang="en-US" sz="1100" b="1" dirty="0">
+                <a:solidFill>
+                  <a:srgbClr val="FFFFFF"/>
+                </a:solidFill>
+                <a:latin typeface="Calibri" pitchFamily="34" charset="0"/>
+                <a:ea typeface="Calibri" pitchFamily="34" charset="-122"/>
+                <a:cs typeface="Calibri" pitchFamily="34" charset="-120"/>
+              </a:rPr>
+              <a:t>59</a:t>
+            </a:r>
+            <a:endParaRPr lang="en-US" sz="1100" dirty="0"/>
+          </a:p>
+        </p:txBody>
+      </p:sp>
+      <p:sp>
+        <p:nvSpPr>
+          <p:cNvPr id="19" name="Shape 15"/>
+          <p:cNvSpPr/>
+          <p:nvPr/>
+        </p:nvSpPr>
+        <p:spPr>
+          <a:xfrm>
+            <a:off x="7936992" y="4526280"/>
+            <a:ext cx="3566160" cy="0"/>
+          </a:xfrm>
+          <a:prstGeom prst="line">
+            <a:avLst/>
+          </a:prstGeom>
+          <a:noFill/>
+          <a:ln w="12700">
+            <a:solidFill>
+              <a:srgbClr val="1B3252"/>
+            </a:solidFill>
+            <a:prstDash val="solid"/>
+          </a:ln>
+        </p:spPr>
+      </p:sp>
+      <p:sp>
+        <p:nvSpPr>
+          <p:cNvPr id="20" name="Text 16"/>
+          <p:cNvSpPr/>
+          <p:nvPr/>
+        </p:nvSpPr>
+        <p:spPr>
+          <a:xfrm>
+            <a:off x="7936992" y="4663440"/>
+            <a:ext cx="3611880" cy="1188720"/>
+          </a:xfrm>
+          <a:prstGeom prst="rect">
+            <a:avLst/>
+          </a:prstGeom>
+          <a:noFill/>
+          <a:ln/>
+        </p:spPr>
+        <p:txBody>
+          <a:bodyPr wrap="square" lIns="0" tIns="0" rIns="0" bIns="0" rtlCol="0" anchor="t"/>
+          <a:lstStyle/>
+          <a:p>
+            <a:pPr indent="0" marL="0">
+              <a:lnSpc>
+                <a:spcPts val="1500"/>
+              </a:lnSpc>
+              <a:buNone/>
+            </a:pPr>
+            <a:r>
+              <a:rPr lang="en-US" sz="1150" b="1" dirty="0">
+                <a:solidFill>
+                  <a:srgbClr val="E3A55B"/>
+                </a:solidFill>
+                <a:latin typeface="Calibri" pitchFamily="34" charset="0"/>
+                <a:ea typeface="Calibri" pitchFamily="34" charset="-122"/>
+                <a:cs typeface="Calibri" pitchFamily="34" charset="-120"/>
+              </a:rPr>
+              <a:t>Antigüedad del atraso
+</a:t>
+            </a:r>
+            <a:pPr indent="0" marL="0">
+              <a:lnSpc>
+                <a:spcPts val="1500"/>
+              </a:lnSpc>
+              <a:buNone/>
+            </a:pPr>
+            <a:r>
+              <a:rPr lang="en-US" sz="1150" dirty="0">
+                <a:solidFill>
+                  <a:srgbClr val="DCE6F0"/>
+                </a:solidFill>
+                <a:latin typeface="Calibri" pitchFamily="34" charset="0"/>
+                <a:ea typeface="Calibri" pitchFamily="34" charset="-122"/>
+                <a:cs typeface="Calibri" pitchFamily="34" charset="-120"/>
+              </a:rPr>
+              <a:t>Mediana de 22 días vencidos; el más antiguo lleva 78. 281 entre 1-30 días, 51 entre 31-90 días.</a:t>
+            </a:r>
+            <a:endParaRPr lang="en-US" sz="1150" dirty="0"/>
+          </a:p>
+        </p:txBody>
+      </p:sp>
+      <p:sp>
+        <p:nvSpPr>
+          <p:cNvPr id="21" name="Text 17"/>
+          <p:cNvSpPr/>
+          <p:nvPr/>
+        </p:nvSpPr>
+        <p:spPr>
+          <a:xfrm>
+            <a:off x="457200" y="6473952"/>
+            <a:ext cx="9692640" cy="274320"/>
+          </a:xfrm>
+          <a:prstGeom prst="rect">
+            <a:avLst/>
+          </a:prstGeom>
+          <a:noFill/>
+          <a:ln/>
+        </p:spPr>
+        <p:txBody>
+          <a:bodyPr wrap="square" lIns="0" tIns="0" rIns="0" bIns="0" rtlCol="0" anchor="ctr"/>
+          <a:lstStyle/>
+          <a:p>
+            <a:pPr algn="l" indent="0" marL="0">
+              <a:buNone/>
+            </a:pPr>
+            <a:r>
+              <a:rPr lang="en-US" sz="850" dirty="0">
+                <a:solidFill>
+                  <a:srgbClr val="6E8CA8"/>
+                </a:solidFill>
+                <a:latin typeface="Calibri" pitchFamily="34" charset="0"/>
+                <a:ea typeface="Calibri" pitchFamily="34" charset="-122"/>
+                <a:cs typeface="Calibri" pitchFamily="34" charset="-120"/>
+              </a:rPr>
+              <a:t>Fuente: REPORTE_GERENCIAL + Listado de Puntos Punch Consolidado · Corte 27-07-2026 · Atrasos al 27-07-2026</a:t>
+            </a:r>
+            <a:endParaRPr lang="en-US" sz="850" dirty="0"/>
+          </a:p>
+        </p:txBody>
+      </p:sp>
+      <p:sp>
+        <p:nvSpPr>
+          <p:cNvPr id="22" name="Text 18"/>
+          <p:cNvSpPr/>
+          <p:nvPr/>
+        </p:nvSpPr>
+        <p:spPr>
+          <a:xfrm>
+            <a:off x="11430000" y="6473952"/>
+            <a:ext cx="365760" cy="274320"/>
+          </a:xfrm>
+          <a:prstGeom prst="rect">
+            <a:avLst/>
+          </a:prstGeom>
+          <a:noFill/>
+          <a:ln/>
+        </p:spPr>
+        <p:txBody>
+          <a:bodyPr wrap="square" lIns="0" tIns="0" rIns="0" bIns="0" rtlCol="0" anchor="ctr"/>
+          <a:lstStyle/>
+          <a:p>
+            <a:pPr algn="r" indent="0" marL="0">
+              <a:buNone/>
+            </a:pPr>
+            <a:r>
+              <a:rPr lang="en-US" sz="900" dirty="0">
+                <a:solidFill>
+                  <a:srgbClr val="6E8CA8"/>
+                </a:solidFill>
+                <a:latin typeface="Calibri" pitchFamily="34" charset="0"/>
+                <a:ea typeface="Calibri" pitchFamily="34" charset="-122"/>
+                <a:cs typeface="Calibri" pitchFamily="34" charset="-120"/>
+              </a:rPr>
+              <a:t>11</a:t>
+            </a:r>
+            <a:endParaRPr lang="en-US" sz="900" dirty="0"/>
+          </a:p>
+        </p:txBody>
+      </p:sp>
+    </p:spTree>
+  </p:cSld>
+  <p:clrMapOvr>
+    <a:masterClrMapping/>
+  </p:clrMapOvr>
+</p:sld>
+</file>
+
+<file path=ppt/slides/slide12.xml><?xml version="1.0" encoding="utf-8"?>
+<p:sld xmlns:a="http://schemas.openxmlformats.org/drawingml/2006/main" xmlns:r="http://schemas.openxmlformats.org/officeDocument/2006/relationships" xmlns:p="http://schemas.openxmlformats.org/presentationml/2006/main">
+  <p:cSld name="Slide 12">
+    <p:bg>
+      <p:bgPr>
+        <a:solidFill>
+          <a:srgbClr val="12233B"/>
+        </a:solidFill>
+      </p:bgPr>
+    </p:bg>
+    <p:spTree>
+      <p:nvGrpSpPr>
+        <p:cNvPr id="1" name=""/>
+        <p:cNvGrpSpPr/>
+        <p:nvPr/>
+      </p:nvGrpSpPr>
+      <p:grpSpPr>
+        <a:xfrm>
+          <a:off x="0" y="0"/>
+          <a:ext cx="0" cy="0"/>
+          <a:chOff x="0" y="0"/>
+          <a:chExt cx="0" cy="0"/>
+        </a:xfrm>
+      </p:grpSpPr>
+      <p:sp>
+        <p:nvSpPr>
+          <p:cNvPr id="2" name="Shape 0"/>
+          <p:cNvSpPr/>
+          <p:nvPr/>
+        </p:nvSpPr>
+        <p:spPr>
+          <a:xfrm>
+            <a:off x="9875520" y="-1645920"/>
+            <a:ext cx="4206240" cy="4206240"/>
+          </a:xfrm>
+          <a:prstGeom prst="ellipse">
+            <a:avLst/>
+          </a:prstGeom>
+          <a:solidFill>
+            <a:srgbClr val="1B3252"/>
+          </a:solidFill>
+          <a:ln/>
+        </p:spPr>
+      </p:sp>
+      <p:sp>
+        <p:nvSpPr>
+          <p:cNvPr id="3" name="Text 1"/>
+          <p:cNvSpPr/>
+          <p:nvPr/>
+        </p:nvSpPr>
+        <p:spPr>
+          <a:xfrm>
+            <a:off x="457200" y="457200"/>
+            <a:ext cx="7315200" cy="256032"/>
+          </a:xfrm>
+          <a:prstGeom prst="rect">
+            <a:avLst/>
+          </a:prstGeom>
+          <a:noFill/>
+          <a:ln/>
+        </p:spPr>
+        <p:txBody>
+          <a:bodyPr wrap="square" lIns="0" tIns="0" rIns="0" bIns="0" rtlCol="0" anchor="ctr"/>
+          <a:lstStyle/>
+          <a:p>
+            <a:pPr algn="l" indent="0" marL="0">
+              <a:buNone/>
+            </a:pPr>
+            <a:r>
+              <a:rPr lang="en-US" sz="1100" b="1" spc="200" kern="0" dirty="0">
+                <a:solidFill>
+                  <a:srgbClr val="E3A55B"/>
+                </a:solidFill>
+                <a:latin typeface="Calibri" pitchFamily="34" charset="0"/>
+                <a:ea typeface="Calibri" pitchFamily="34" charset="-122"/>
+                <a:cs typeface="Calibri" pitchFamily="34" charset="-120"/>
+              </a:rPr>
+              <a:t>DESALADORA · FOCO DE GESTIÓN</a:t>
+            </a:r>
+            <a:endParaRPr lang="en-US" sz="1100" dirty="0"/>
+          </a:p>
+        </p:txBody>
+      </p:sp>
+      <p:sp>
+        <p:nvSpPr>
+          <p:cNvPr id="4" name="Text 2"/>
+          <p:cNvSpPr/>
+          <p:nvPr/>
+        </p:nvSpPr>
+        <p:spPr>
+          <a:xfrm>
+            <a:off x="457200" y="713232"/>
+            <a:ext cx="10972800" cy="548640"/>
+          </a:xfrm>
+          <a:prstGeom prst="rect">
+            <a:avLst/>
+          </a:prstGeom>
+          <a:noFill/>
+          <a:ln/>
+        </p:spPr>
+        <p:txBody>
+          <a:bodyPr wrap="square" lIns="0" tIns="0" rIns="0" bIns="0" rtlCol="0" anchor="ctr"/>
+          <a:lstStyle/>
+          <a:p>
+            <a:pPr indent="0" marL="0">
+              <a:buNone/>
+            </a:pPr>
+            <a:r>
+              <a:rPr lang="en-US" sz="3000" b="1" dirty="0">
+                <a:solidFill>
+                  <a:srgbClr val="FFFFFF"/>
+                </a:solidFill>
+                <a:latin typeface="Cambria" pitchFamily="34" charset="0"/>
+                <a:ea typeface="Cambria" pitchFamily="34" charset="-122"/>
+                <a:cs typeface="Cambria" pitchFamily="34" charset="-120"/>
+              </a:rPr>
+              <a:t>Dónde poner el esfuerzo esta semana</a:t>
+            </a:r>
+            <a:endParaRPr lang="en-US" sz="3000" dirty="0"/>
+          </a:p>
+        </p:txBody>
+      </p:sp>
+      <p:sp>
+        <p:nvSpPr>
+          <p:cNvPr id="5" name="Shape 3"/>
+          <p:cNvSpPr/>
+          <p:nvPr/>
+        </p:nvSpPr>
+        <p:spPr>
+          <a:xfrm>
+            <a:off x="457200" y="1600200"/>
+            <a:ext cx="5486400" cy="1920240"/>
+          </a:xfrm>
+          <a:prstGeom prst="roundRect">
+            <a:avLst>
+              <a:gd name="adj" fmla="val 3333"/>
+            </a:avLst>
+          </a:prstGeom>
+          <a:solidFill>
+            <a:srgbClr val="1B3252"/>
+          </a:solidFill>
+          <a:ln/>
+        </p:spPr>
+      </p:sp>
+      <p:sp>
+        <p:nvSpPr>
+          <p:cNvPr id="6" name="Text 4"/>
+          <p:cNvSpPr/>
+          <p:nvPr/>
+        </p:nvSpPr>
+        <p:spPr>
+          <a:xfrm>
+            <a:off x="731520" y="1801368"/>
+            <a:ext cx="1005840" cy="640080"/>
+          </a:xfrm>
+          <a:prstGeom prst="rect">
+            <a:avLst/>
+          </a:prstGeom>
+          <a:noFill/>
+          <a:ln/>
+        </p:spPr>
+        <p:txBody>
+          <a:bodyPr wrap="square" lIns="0" tIns="0" rIns="0" bIns="0" rtlCol="0" anchor="ctr"/>
+          <a:lstStyle/>
+          <a:p>
+            <a:pPr indent="0" marL="0">
+              <a:buNone/>
+            </a:pPr>
+            <a:r>
+              <a:rPr lang="en-US" sz="3400" b="1" dirty="0">
+                <a:solidFill>
+                  <a:srgbClr val="C0392B"/>
+                </a:solidFill>
+                <a:latin typeface="Cambria" pitchFamily="34" charset="0"/>
+                <a:ea typeface="Cambria" pitchFamily="34" charset="-122"/>
+                <a:cs typeface="Cambria" pitchFamily="34" charset="-120"/>
+              </a:rPr>
+              <a:t>01</a:t>
+            </a:r>
+            <a:endParaRPr lang="en-US" sz="3400" dirty="0"/>
+          </a:p>
+        </p:txBody>
+      </p:sp>
+      <p:sp>
+        <p:nvSpPr>
+          <p:cNvPr id="7" name="Text 5"/>
+          <p:cNvSpPr/>
+          <p:nvPr/>
+        </p:nvSpPr>
+        <p:spPr>
+          <a:xfrm>
+            <a:off x="1691640" y="1783080"/>
+            <a:ext cx="4023360" cy="603504"/>
+          </a:xfrm>
+          <a:prstGeom prst="rect">
+            <a:avLst/>
+          </a:prstGeom>
+          <a:noFill/>
+          <a:ln/>
+        </p:spPr>
+        <p:txBody>
+          <a:bodyPr wrap="square" lIns="0" tIns="0" rIns="0" bIns="0" rtlCol="0" anchor="ctr"/>
+          <a:lstStyle/>
+          <a:p>
+            <a:pPr indent="0" marL="0">
+              <a:buNone/>
+            </a:pPr>
+            <a:r>
+              <a:rPr lang="en-US" sz="1400" b="1" dirty="0">
+                <a:solidFill>
+                  <a:srgbClr val="FFFFFF"/>
+                </a:solidFill>
+                <a:latin typeface="Calibri" pitchFamily="34" charset="0"/>
+                <a:ea typeface="Calibri" pitchFamily="34" charset="-122"/>
+                <a:cs typeface="Calibri" pitchFamily="34" charset="-120"/>
+              </a:rPr>
+              <a:t>Recuperar los 332 ítems atrasados</a:t>
+            </a:r>
+            <a:endParaRPr lang="en-US" sz="1400" dirty="0"/>
+          </a:p>
+        </p:txBody>
+      </p:sp>
+      <p:sp>
+        <p:nvSpPr>
+          <p:cNvPr id="8" name="Text 6"/>
+          <p:cNvSpPr/>
+          <p:nvPr/>
+        </p:nvSpPr>
+        <p:spPr>
+          <a:xfrm>
+            <a:off x="1691640" y="2404872"/>
+            <a:ext cx="3977640" cy="1005840"/>
+          </a:xfrm>
+          <a:prstGeom prst="rect">
+            <a:avLst/>
+          </a:prstGeom>
+          <a:noFill/>
+          <a:ln/>
+        </p:spPr>
+        <p:txBody>
+          <a:bodyPr wrap="square" lIns="0" tIns="0" rIns="0" bIns="0" rtlCol="0" anchor="t"/>
+          <a:lstStyle/>
+          <a:p>
+            <a:pPr indent="0" marL="0">
+              <a:lnSpc>
+                <a:spcPts val="1400"/>
+              </a:lnSpc>
+              <a:buNone/>
+            </a:pPr>
+            <a:r>
+              <a:rPr lang="en-US" sz="1100" dirty="0">
+                <a:solidFill>
+                  <a:srgbClr val="DCE6F0"/>
+                </a:solidFill>
+                <a:latin typeface="Calibri" pitchFamily="34" charset="0"/>
+                <a:ea typeface="Calibri" pitchFamily="34" charset="-122"/>
+                <a:cs typeface="Calibri" pitchFamily="34" charset="-120"/>
+              </a:rPr>
+              <a:t>77,9% de los 426 abiertos ya venció su fecha requerida. Foco en Piping (72), Eléctrica (58), Obras Civiles (29).</a:t>
+            </a:r>
+            <a:endParaRPr lang="en-US" sz="1100" dirty="0"/>
+          </a:p>
+        </p:txBody>
+      </p:sp>
+      <p:sp>
+        <p:nvSpPr>
+          <p:cNvPr id="9" name="Shape 7"/>
+          <p:cNvSpPr/>
+          <p:nvPr/>
+        </p:nvSpPr>
+        <p:spPr>
+          <a:xfrm>
+            <a:off x="6245352" y="1600200"/>
+            <a:ext cx="5486400" cy="1920240"/>
+          </a:xfrm>
+          <a:prstGeom prst="roundRect">
+            <a:avLst>
+              <a:gd name="adj" fmla="val 3333"/>
+            </a:avLst>
+          </a:prstGeom>
+          <a:solidFill>
+            <a:srgbClr val="1B3252"/>
+          </a:solidFill>
+          <a:ln/>
+        </p:spPr>
+      </p:sp>
+      <p:sp>
+        <p:nvSpPr>
+          <p:cNvPr id="10" name="Text 8"/>
+          <p:cNvSpPr/>
+          <p:nvPr/>
+        </p:nvSpPr>
+        <p:spPr>
+          <a:xfrm>
+            <a:off x="6519672" y="1801368"/>
+            <a:ext cx="1005840" cy="640080"/>
+          </a:xfrm>
+          <a:prstGeom prst="rect">
+            <a:avLst/>
+          </a:prstGeom>
+          <a:noFill/>
+          <a:ln/>
+        </p:spPr>
+        <p:txBody>
+          <a:bodyPr wrap="square" lIns="0" tIns="0" rIns="0" bIns="0" rtlCol="0" anchor="ctr"/>
+          <a:lstStyle/>
+          <a:p>
+            <a:pPr indent="0" marL="0">
+              <a:buNone/>
+            </a:pPr>
+            <a:r>
+              <a:rPr lang="en-US" sz="3400" b="1" dirty="0">
+                <a:solidFill>
+                  <a:srgbClr val="C87A32"/>
+                </a:solidFill>
+                <a:latin typeface="Cambria" pitchFamily="34" charset="0"/>
+                <a:ea typeface="Cambria" pitchFamily="34" charset="-122"/>
+                <a:cs typeface="Cambria" pitchFamily="34" charset="-120"/>
+              </a:rPr>
+              <a:t>02</a:t>
+            </a:r>
+            <a:endParaRPr lang="en-US" sz="3400" dirty="0"/>
+          </a:p>
+        </p:txBody>
+      </p:sp>
+      <p:sp>
+        <p:nvSpPr>
+          <p:cNvPr id="11" name="Text 9"/>
+          <p:cNvSpPr/>
+          <p:nvPr/>
+        </p:nvSpPr>
+        <p:spPr>
+          <a:xfrm>
+            <a:off x="7479792" y="1783080"/>
+            <a:ext cx="4023360" cy="603504"/>
+          </a:xfrm>
+          <a:prstGeom prst="rect">
+            <a:avLst/>
+          </a:prstGeom>
+          <a:noFill/>
+          <a:ln/>
+        </p:spPr>
+        <p:txBody>
+          <a:bodyPr wrap="square" lIns="0" tIns="0" rIns="0" bIns="0" rtlCol="0" anchor="ctr"/>
+          <a:lstStyle/>
+          <a:p>
+            <a:pPr indent="0" marL="0">
+              <a:buNone/>
+            </a:pPr>
+            <a:r>
+              <a:rPr lang="en-US" sz="1400" b="1" dirty="0">
+                <a:solidFill>
+                  <a:srgbClr val="FFFFFF"/>
+                </a:solidFill>
+                <a:latin typeface="Calibri" pitchFamily="34" charset="0"/>
+                <a:ea typeface="Calibri" pitchFamily="34" charset="-122"/>
+                <a:cs typeface="Calibri" pitchFamily="34" charset="-120"/>
+              </a:rPr>
+              <a:t>Ejecutar las 39 caminatas de Operables pendientes</a:t>
+            </a:r>
+            <a:endParaRPr lang="en-US" sz="1400" dirty="0"/>
+          </a:p>
+        </p:txBody>
+      </p:sp>
+      <p:sp>
+        <p:nvSpPr>
+          <p:cNvPr id="12" name="Text 10"/>
+          <p:cNvSpPr/>
+          <p:nvPr/>
+        </p:nvSpPr>
+        <p:spPr>
+          <a:xfrm>
+            <a:off x="7479792" y="2404872"/>
+            <a:ext cx="3977640" cy="1005840"/>
+          </a:xfrm>
+          <a:prstGeom prst="rect">
+            <a:avLst/>
+          </a:prstGeom>
+          <a:noFill/>
+          <a:ln/>
+        </p:spPr>
+        <p:txBody>
+          <a:bodyPr wrap="square" lIns="0" tIns="0" rIns="0" bIns="0" rtlCol="0" anchor="t"/>
+          <a:lstStyle/>
+          <a:p>
+            <a:pPr indent="0" marL="0">
+              <a:lnSpc>
+                <a:spcPts val="1400"/>
+              </a:lnSpc>
+              <a:buNone/>
+            </a:pPr>
+            <a:r>
+              <a:rPr lang="en-US" sz="1100" dirty="0">
+                <a:solidFill>
+                  <a:srgbClr val="DCE6F0"/>
+                </a:solidFill>
+                <a:latin typeface="Calibri" pitchFamily="34" charset="0"/>
+                <a:ea typeface="Calibri" pitchFamily="34" charset="-122"/>
+                <a:cs typeface="Calibri" pitchFamily="34" charset="-120"/>
+              </a:rPr>
+              <a:t>La Caminata 2 va en 51,3% (41/80). Sin caminata no se levanta el punch final ni se habilita la entrega de la carpeta.</a:t>
+            </a:r>
+            <a:endParaRPr lang="en-US" sz="1100" dirty="0"/>
+          </a:p>
+        </p:txBody>
+      </p:sp>
+      <p:sp>
+        <p:nvSpPr>
+          <p:cNvPr id="13" name="Shape 11"/>
+          <p:cNvSpPr/>
+          <p:nvPr/>
+        </p:nvSpPr>
+        <p:spPr>
+          <a:xfrm>
+            <a:off x="457200" y="3749040"/>
+            <a:ext cx="5486400" cy="1920240"/>
+          </a:xfrm>
+          <a:prstGeom prst="roundRect">
+            <a:avLst>
+              <a:gd name="adj" fmla="val 3333"/>
+            </a:avLst>
+          </a:prstGeom>
+          <a:solidFill>
+            <a:srgbClr val="1B3252"/>
+          </a:solidFill>
+          <a:ln/>
+        </p:spPr>
+      </p:sp>
+      <p:sp>
+        <p:nvSpPr>
+          <p:cNvPr id="14" name="Text 12"/>
+          <p:cNvSpPr/>
+          <p:nvPr/>
+        </p:nvSpPr>
+        <p:spPr>
+          <a:xfrm>
+            <a:off x="731520" y="3950208"/>
+            <a:ext cx="1005840" cy="640080"/>
+          </a:xfrm>
+          <a:prstGeom prst="rect">
+            <a:avLst/>
+          </a:prstGeom>
+          <a:noFill/>
+          <a:ln/>
+        </p:spPr>
+        <p:txBody>
+          <a:bodyPr wrap="square" lIns="0" tIns="0" rIns="0" bIns="0" rtlCol="0" anchor="ctr"/>
+          <a:lstStyle/>
+          <a:p>
+            <a:pPr indent="0" marL="0">
+              <a:buNone/>
+            </a:pPr>
+            <a:r>
+              <a:rPr lang="en-US" sz="3400" b="1" dirty="0">
+                <a:solidFill>
+                  <a:srgbClr val="E0A32E"/>
+                </a:solidFill>
+                <a:latin typeface="Cambria" pitchFamily="34" charset="0"/>
+                <a:ea typeface="Cambria" pitchFamily="34" charset="-122"/>
+                <a:cs typeface="Cambria" pitchFamily="34" charset="-120"/>
+              </a:rPr>
+              <a:t>03</a:t>
+            </a:r>
+            <a:endParaRPr lang="en-US" sz="3400" dirty="0"/>
+          </a:p>
+        </p:txBody>
+      </p:sp>
+      <p:sp>
+        <p:nvSpPr>
+          <p:cNvPr id="15" name="Text 13"/>
+          <p:cNvSpPr/>
+          <p:nvPr/>
+        </p:nvSpPr>
+        <p:spPr>
+          <a:xfrm>
+            <a:off x="1691640" y="3931920"/>
+            <a:ext cx="4023360" cy="603504"/>
+          </a:xfrm>
+          <a:prstGeom prst="rect">
+            <a:avLst/>
+          </a:prstGeom>
+          <a:noFill/>
+          <a:ln/>
+        </p:spPr>
+        <p:txBody>
+          <a:bodyPr wrap="square" lIns="0" tIns="0" rIns="0" bIns="0" rtlCol="0" anchor="ctr"/>
+          <a:lstStyle/>
+          <a:p>
+            <a:pPr indent="0" marL="0">
+              <a:buNone/>
+            </a:pPr>
+            <a:r>
+              <a:rPr lang="en-US" sz="1400" b="1" dirty="0">
+                <a:solidFill>
+                  <a:srgbClr val="FFFFFF"/>
+                </a:solidFill>
+                <a:latin typeface="Calibri" pitchFamily="34" charset="0"/>
+                <a:ea typeface="Calibri" pitchFamily="34" charset="-122"/>
+                <a:cs typeface="Calibri" pitchFamily="34" charset="-120"/>
+              </a:rPr>
+              <a:t>Sacar del armado interno las 58 carpetas retenidas</a:t>
+            </a:r>
+            <a:endParaRPr lang="en-US" sz="1400" dirty="0"/>
+          </a:p>
+        </p:txBody>
+      </p:sp>
+      <p:sp>
+        <p:nvSpPr>
+          <p:cNvPr id="16" name="Text 14"/>
+          <p:cNvSpPr/>
+          <p:nvPr/>
+        </p:nvSpPr>
+        <p:spPr>
+          <a:xfrm>
+            <a:off x="1691640" y="4553712"/>
+            <a:ext cx="3977640" cy="1005840"/>
+          </a:xfrm>
+          <a:prstGeom prst="rect">
+            <a:avLst/>
+          </a:prstGeom>
+          <a:noFill/>
+          <a:ln/>
+        </p:spPr>
+        <p:txBody>
+          <a:bodyPr wrap="square" lIns="0" tIns="0" rIns="0" bIns="0" rtlCol="0" anchor="t"/>
+          <a:lstStyle/>
+          <a:p>
+            <a:pPr indent="0" marL="0">
+              <a:lnSpc>
+                <a:spcPts val="1400"/>
+              </a:lnSpc>
+              <a:buNone/>
+            </a:pPr>
+            <a:r>
+              <a:rPr lang="en-US" sz="1100" dirty="0">
+                <a:solidFill>
+                  <a:srgbClr val="DCE6F0"/>
+                </a:solidFill>
+                <a:latin typeface="Calibri" pitchFamily="34" charset="0"/>
+                <a:ea typeface="Calibri" pitchFamily="34" charset="-122"/>
+                <a:cs typeface="Calibri" pitchFamily="34" charset="-120"/>
+              </a:rPr>
+              <a:t>14 están en preparación y 44 sin iniciar. Solo 39 de 97 (40,2%) llegaron al cliente; 9 volvieron rechazadas y hay que rearmarlas.</a:t>
+            </a:r>
+            <a:endParaRPr lang="en-US" sz="1100" dirty="0"/>
+          </a:p>
+        </p:txBody>
+      </p:sp>
+      <p:sp>
+        <p:nvSpPr>
+          <p:cNvPr id="17" name="Shape 15"/>
+          <p:cNvSpPr/>
+          <p:nvPr/>
+        </p:nvSpPr>
+        <p:spPr>
+          <a:xfrm>
+            <a:off x="6245352" y="3749040"/>
+            <a:ext cx="5486400" cy="1920240"/>
+          </a:xfrm>
+          <a:prstGeom prst="roundRect">
+            <a:avLst>
+              <a:gd name="adj" fmla="val 3333"/>
+            </a:avLst>
+          </a:prstGeom>
+          <a:solidFill>
+            <a:srgbClr val="1B3252"/>
+          </a:solidFill>
+          <a:ln/>
+        </p:spPr>
+      </p:sp>
+      <p:sp>
+        <p:nvSpPr>
+          <p:cNvPr id="18" name="Text 16"/>
+          <p:cNvSpPr/>
+          <p:nvPr/>
+        </p:nvSpPr>
+        <p:spPr>
+          <a:xfrm>
+            <a:off x="6519672" y="3950208"/>
+            <a:ext cx="1005840" cy="640080"/>
+          </a:xfrm>
+          <a:prstGeom prst="rect">
+            <a:avLst/>
+          </a:prstGeom>
+          <a:noFill/>
+          <a:ln/>
+        </p:spPr>
+        <p:txBody>
+          <a:bodyPr wrap="square" lIns="0" tIns="0" rIns="0" bIns="0" rtlCol="0" anchor="ctr"/>
+          <a:lstStyle/>
+          <a:p>
+            <a:pPr indent="0" marL="0">
+              <a:buNone/>
+            </a:pPr>
+            <a:r>
+              <a:rPr lang="en-US" sz="3400" b="1" dirty="0">
+                <a:solidFill>
+                  <a:srgbClr val="2E9E5B"/>
+                </a:solidFill>
+                <a:latin typeface="Cambria" pitchFamily="34" charset="0"/>
+                <a:ea typeface="Cambria" pitchFamily="34" charset="-122"/>
+                <a:cs typeface="Cambria" pitchFamily="34" charset="-120"/>
+              </a:rPr>
+              <a:t>04</a:t>
+            </a:r>
+            <a:endParaRPr lang="en-US" sz="3400" dirty="0"/>
+          </a:p>
+        </p:txBody>
+      </p:sp>
+      <p:sp>
+        <p:nvSpPr>
+          <p:cNvPr id="19" name="Text 17"/>
+          <p:cNvSpPr/>
+          <p:nvPr/>
+        </p:nvSpPr>
+        <p:spPr>
+          <a:xfrm>
+            <a:off x="7479792" y="3931920"/>
+            <a:ext cx="4023360" cy="603504"/>
+          </a:xfrm>
+          <a:prstGeom prst="rect">
+            <a:avLst/>
+          </a:prstGeom>
+          <a:noFill/>
+          <a:ln/>
+        </p:spPr>
+        <p:txBody>
+          <a:bodyPr wrap="square" lIns="0" tIns="0" rIns="0" bIns="0" rtlCol="0" anchor="ctr"/>
+          <a:lstStyle/>
+          <a:p>
+            <a:pPr indent="0" marL="0">
+              <a:buNone/>
+            </a:pPr>
+            <a:r>
+              <a:rPr lang="en-US" sz="1400" b="1" dirty="0">
+                <a:solidFill>
+                  <a:srgbClr val="FFFFFF"/>
+                </a:solidFill>
+                <a:latin typeface="Calibri" pitchFamily="34" charset="0"/>
+                <a:ea typeface="Calibri" pitchFamily="34" charset="-122"/>
+                <a:cs typeface="Calibri" pitchFamily="34" charset="-120"/>
+              </a:rPr>
+              <a:t>Atender la zona Desaladora</a:t>
+            </a:r>
+            <a:endParaRPr lang="en-US" sz="1400" dirty="0"/>
+          </a:p>
+        </p:txBody>
+      </p:sp>
+      <p:sp>
+        <p:nvSpPr>
+          <p:cNvPr id="20" name="Text 18"/>
+          <p:cNvSpPr/>
+          <p:nvPr/>
+        </p:nvSpPr>
+        <p:spPr>
+          <a:xfrm>
+            <a:off x="7479792" y="4553712"/>
+            <a:ext cx="3977640" cy="1005840"/>
+          </a:xfrm>
+          <a:prstGeom prst="rect">
+            <a:avLst/>
+          </a:prstGeom>
+          <a:noFill/>
+          <a:ln/>
+        </p:spPr>
+        <p:txBody>
+          <a:bodyPr wrap="square" lIns="0" tIns="0" rIns="0" bIns="0" rtlCol="0" anchor="t"/>
+          <a:lstStyle/>
+          <a:p>
+            <a:pPr indent="0" marL="0">
+              <a:lnSpc>
+                <a:spcPts val="1400"/>
+              </a:lnSpc>
+              <a:buNone/>
+            </a:pPr>
+            <a:r>
+              <a:rPr lang="en-US" sz="1100" dirty="0">
+                <a:solidFill>
+                  <a:srgbClr val="DCE6F0"/>
+                </a:solidFill>
+                <a:latin typeface="Calibri" pitchFamily="34" charset="0"/>
+                <a:ea typeface="Calibri" pitchFamily="34" charset="-122"/>
+                <a:cs typeface="Calibri" pitchFamily="34" charset="-120"/>
+              </a:rPr>
+              <a:t>Concentra 181 P1 abiertos y 144 atrasados sobre 75 subsistemas. Es la ruta crítica del proyecto.</a:t>
+            </a:r>
+            <a:endParaRPr lang="en-US" sz="1100" dirty="0"/>
+          </a:p>
+        </p:txBody>
+      </p:sp>
+      <p:sp>
+        <p:nvSpPr>
+          <p:cNvPr id="21" name="Text 19"/>
+          <p:cNvSpPr/>
+          <p:nvPr/>
+        </p:nvSpPr>
+        <p:spPr>
+          <a:xfrm>
+            <a:off x="457200" y="6473952"/>
+            <a:ext cx="9692640" cy="274320"/>
+          </a:xfrm>
+          <a:prstGeom prst="rect">
+            <a:avLst/>
+          </a:prstGeom>
+          <a:noFill/>
+          <a:ln/>
+        </p:spPr>
+        <p:txBody>
+          <a:bodyPr wrap="square" lIns="0" tIns="0" rIns="0" bIns="0" rtlCol="0" anchor="ctr"/>
+          <a:lstStyle/>
+          <a:p>
+            <a:pPr algn="l" indent="0" marL="0">
+              <a:buNone/>
+            </a:pPr>
+            <a:r>
+              <a:rPr lang="en-US" sz="850" dirty="0">
+                <a:solidFill>
+                  <a:srgbClr val="6E8CA8"/>
+                </a:solidFill>
+                <a:latin typeface="Calibri" pitchFamily="34" charset="0"/>
+                <a:ea typeface="Calibri" pitchFamily="34" charset="-122"/>
+                <a:cs typeface="Calibri" pitchFamily="34" charset="-120"/>
+              </a:rPr>
+              <a:t>Fuente: REPORTE_GERENCIAL + Listado de Puntos Punch Consolidado · Corte 27-07-2026 · Atrasos al 27-07-2026</a:t>
+            </a:r>
+            <a:endParaRPr lang="en-US" sz="850" dirty="0"/>
+          </a:p>
+        </p:txBody>
+      </p:sp>
+      <p:sp>
+        <p:nvSpPr>
+          <p:cNvPr id="22" name="Text 20"/>
+          <p:cNvSpPr/>
+          <p:nvPr/>
+        </p:nvSpPr>
+        <p:spPr>
+          <a:xfrm>
+            <a:off x="11430000" y="6473952"/>
+            <a:ext cx="365760" cy="274320"/>
+          </a:xfrm>
+          <a:prstGeom prst="rect">
+            <a:avLst/>
+          </a:prstGeom>
+          <a:noFill/>
+          <a:ln/>
+        </p:spPr>
+        <p:txBody>
+          <a:bodyPr wrap="square" lIns="0" tIns="0" rIns="0" bIns="0" rtlCol="0" anchor="ctr"/>
+          <a:lstStyle/>
+          <a:p>
+            <a:pPr algn="r" indent="0" marL="0">
+              <a:buNone/>
+            </a:pPr>
+            <a:r>
+              <a:rPr lang="en-US" sz="900" dirty="0">
+                <a:solidFill>
+                  <a:srgbClr val="6E8CA8"/>
+                </a:solidFill>
+                <a:latin typeface="Calibri" pitchFamily="34" charset="0"/>
+                <a:ea typeface="Calibri" pitchFamily="34" charset="-122"/>
+                <a:cs typeface="Calibri" pitchFamily="34" charset="-120"/>
+              </a:rPr>
+              <a:t>12</a:t>
+            </a:r>
+            <a:endParaRPr lang="en-US" sz="900" dirty="0"/>
+          </a:p>
+        </p:txBody>
+      </p:sp>
+    </p:spTree>
+  </p:cSld>
+  <p:clrMapOvr>
+    <a:masterClrMapping/>
+  </p:clrMapOvr>
+</p:sld>
+</file>
+
 <file path=ppt/slides/slide2.xml><?xml version="1.0" encoding="utf-8"?>
 <p:sld xmlns:a="http://schemas.openxmlformats.org/drawingml/2006/main" xmlns:r="http://schemas.openxmlformats.org/officeDocument/2006/relationships" xmlns:p="http://schemas.openxmlformats.org/presentationml/2006/main">
   <p:cSld name="Slide 2">
@@ -10246,6 +14373,2103 @@
                 <a:cs typeface="Calibri" pitchFamily="34" charset="-120"/>
               </a:rPr>
               <a:t>7</a:t>
+            </a:r>
+            <a:endParaRPr lang="en-US" sz="900" dirty="0"/>
+          </a:p>
+        </p:txBody>
+      </p:sp>
+    </p:spTree>
+  </p:cSld>
+  <p:clrMapOvr>
+    <a:masterClrMapping/>
+  </p:clrMapOvr>
+</p:sld>
+</file>
+
+<file path=ppt/slides/slide8.xml><?xml version="1.0" encoding="utf-8"?>
+<p:sld xmlns:a="http://schemas.openxmlformats.org/drawingml/2006/main" xmlns:r="http://schemas.openxmlformats.org/officeDocument/2006/relationships" xmlns:p="http://schemas.openxmlformats.org/presentationml/2006/main">
+  <p:cSld name="Slide 8">
+    <p:bg>
+      <p:bgPr>
+        <a:solidFill>
+          <a:srgbClr val="12233B"/>
+        </a:solidFill>
+      </p:bgPr>
+    </p:bg>
+    <p:spTree>
+      <p:nvGrpSpPr>
+        <p:cNvPr id="1" name=""/>
+        <p:cNvGrpSpPr/>
+        <p:nvPr/>
+      </p:nvGrpSpPr>
+      <p:grpSpPr>
+        <a:xfrm>
+          <a:off x="0" y="0"/>
+          <a:ext cx="0" cy="0"/>
+          <a:chOff x="0" y="0"/>
+          <a:chExt cx="0" cy="0"/>
+        </a:xfrm>
+      </p:grpSpPr>
+      <p:sp>
+        <p:nvSpPr>
+          <p:cNvPr id="2" name="Shape 0"/>
+          <p:cNvSpPr/>
+          <p:nvPr/>
+        </p:nvSpPr>
+        <p:spPr>
+          <a:xfrm>
+            <a:off x="10058400" y="-1463040"/>
+            <a:ext cx="3840480" cy="3840480"/>
+          </a:xfrm>
+          <a:prstGeom prst="ellipse">
+            <a:avLst/>
+          </a:prstGeom>
+          <a:solidFill>
+            <a:srgbClr val="1B3252"/>
+          </a:solidFill>
+          <a:ln/>
+        </p:spPr>
+      </p:sp>
+      <p:sp>
+        <p:nvSpPr>
+          <p:cNvPr id="3" name="Shape 1"/>
+          <p:cNvSpPr/>
+          <p:nvPr/>
+        </p:nvSpPr>
+        <p:spPr>
+          <a:xfrm>
+            <a:off x="11064240" y="4572000"/>
+            <a:ext cx="2743200" cy="2743200"/>
+          </a:xfrm>
+          <a:prstGeom prst="ellipse">
+            <a:avLst/>
+          </a:prstGeom>
+          <a:solidFill>
+            <a:srgbClr val="1B3252"/>
+          </a:solidFill>
+          <a:ln/>
+        </p:spPr>
+      </p:sp>
+      <p:sp>
+        <p:nvSpPr>
+          <p:cNvPr id="4" name="Shape 2"/>
+          <p:cNvSpPr/>
+          <p:nvPr/>
+        </p:nvSpPr>
+        <p:spPr>
+          <a:xfrm>
+            <a:off x="502920" y="1234440"/>
+            <a:ext cx="201168" cy="201168"/>
+          </a:xfrm>
+          <a:prstGeom prst="ellipse">
+            <a:avLst/>
+          </a:prstGeom>
+          <a:solidFill>
+            <a:srgbClr val="C87A32"/>
+          </a:solidFill>
+          <a:ln/>
+        </p:spPr>
+      </p:sp>
+      <p:sp>
+        <p:nvSpPr>
+          <p:cNvPr id="5" name="Text 3"/>
+          <p:cNvSpPr/>
+          <p:nvPr/>
+        </p:nvSpPr>
+        <p:spPr>
+          <a:xfrm>
+            <a:off x="777240" y="1097280"/>
+            <a:ext cx="9144000" cy="365760"/>
+          </a:xfrm>
+          <a:prstGeom prst="rect">
+            <a:avLst/>
+          </a:prstGeom>
+          <a:noFill/>
+          <a:ln/>
+        </p:spPr>
+        <p:txBody>
+          <a:bodyPr wrap="square" lIns="0" tIns="0" rIns="0" bIns="0" rtlCol="0" anchor="ctr"/>
+          <a:lstStyle/>
+          <a:p>
+            <a:pPr indent="0" marL="0">
+              <a:buNone/>
+            </a:pPr>
+            <a:r>
+              <a:rPr lang="en-US" sz="1300" b="1" spc="300" kern="0" dirty="0">
+                <a:solidFill>
+                  <a:srgbClr val="E3A55B"/>
+                </a:solidFill>
+                <a:latin typeface="Calibri" pitchFamily="34" charset="0"/>
+                <a:ea typeface="Calibri" pitchFamily="34" charset="-122"/>
+                <a:cs typeface="Calibri" pitchFamily="34" charset="-120"/>
+              </a:rPr>
+              <a:t>PROYECTO 02</a:t>
+            </a:r>
+            <a:endParaRPr lang="en-US" sz="1300" dirty="0"/>
+          </a:p>
+        </p:txBody>
+      </p:sp>
+      <p:sp>
+        <p:nvSpPr>
+          <p:cNvPr id="6" name="Text 4"/>
+          <p:cNvSpPr/>
+          <p:nvPr/>
+        </p:nvSpPr>
+        <p:spPr>
+          <a:xfrm>
+            <a:off x="749808" y="1572768"/>
+            <a:ext cx="10607040" cy="1005840"/>
+          </a:xfrm>
+          <a:prstGeom prst="rect">
+            <a:avLst/>
+          </a:prstGeom>
+          <a:noFill/>
+          <a:ln/>
+        </p:spPr>
+        <p:txBody>
+          <a:bodyPr wrap="square" lIns="0" tIns="0" rIns="0" bIns="0" rtlCol="0" anchor="ctr"/>
+          <a:lstStyle/>
+          <a:p>
+            <a:pPr indent="0" marL="0">
+              <a:buNone/>
+            </a:pPr>
+            <a:r>
+              <a:rPr lang="en-US" sz="4600" b="1" dirty="0">
+                <a:solidFill>
+                  <a:srgbClr val="FFFFFF"/>
+                </a:solidFill>
+                <a:latin typeface="Cambria" pitchFamily="34" charset="0"/>
+                <a:ea typeface="Cambria" pitchFamily="34" charset="-122"/>
+                <a:cs typeface="Cambria" pitchFamily="34" charset="-120"/>
+              </a:rPr>
+              <a:t>Desaladora</a:t>
+            </a:r>
+            <a:endParaRPr lang="en-US" sz="4600" dirty="0"/>
+          </a:p>
+        </p:txBody>
+      </p:sp>
+      <p:sp>
+        <p:nvSpPr>
+          <p:cNvPr id="7" name="Text 5"/>
+          <p:cNvSpPr/>
+          <p:nvPr/>
+        </p:nvSpPr>
+        <p:spPr>
+          <a:xfrm>
+            <a:off x="777240" y="2651760"/>
+            <a:ext cx="9601200" cy="457200"/>
+          </a:xfrm>
+          <a:prstGeom prst="rect">
+            <a:avLst/>
+          </a:prstGeom>
+          <a:noFill/>
+          <a:ln/>
+        </p:spPr>
+        <p:txBody>
+          <a:bodyPr wrap="square" lIns="0" tIns="0" rIns="0" bIns="0" rtlCol="0" anchor="ctr"/>
+          <a:lstStyle/>
+          <a:p>
+            <a:pPr indent="0" marL="0">
+              <a:buNone/>
+            </a:pPr>
+            <a:r>
+              <a:rPr lang="en-US" sz="1600" dirty="0">
+                <a:solidFill>
+                  <a:srgbClr val="DCE6F0"/>
+                </a:solidFill>
+                <a:latin typeface="Calibri" pitchFamily="34" charset="0"/>
+                <a:ea typeface="Calibri" pitchFamily="34" charset="-122"/>
+                <a:cs typeface="Calibri" pitchFamily="34" charset="-120"/>
+              </a:rPr>
+              <a:t>PV3 Montaje Electromecánico — Ampliación Desaladora · Minera Los Pelambres (AMSA)</a:t>
+            </a:r>
+            <a:endParaRPr lang="en-US" sz="1600" dirty="0"/>
+          </a:p>
+        </p:txBody>
+      </p:sp>
+      <p:sp>
+        <p:nvSpPr>
+          <p:cNvPr id="8" name="Text 6"/>
+          <p:cNvSpPr/>
+          <p:nvPr/>
+        </p:nvSpPr>
+        <p:spPr>
+          <a:xfrm>
+            <a:off x="777240" y="3154680"/>
+            <a:ext cx="8778240" cy="822960"/>
+          </a:xfrm>
+          <a:prstGeom prst="rect">
+            <a:avLst/>
+          </a:prstGeom>
+          <a:noFill/>
+          <a:ln/>
+        </p:spPr>
+        <p:txBody>
+          <a:bodyPr wrap="square" lIns="0" tIns="0" rIns="0" bIns="0" rtlCol="0" anchor="ctr"/>
+          <a:lstStyle/>
+          <a:p>
+            <a:pPr indent="0" marL="0">
+              <a:lnSpc>
+                <a:spcPts val="2000"/>
+              </a:lnSpc>
+              <a:buNone/>
+            </a:pPr>
+            <a:r>
+              <a:rPr lang="en-US" sz="1350" dirty="0">
+                <a:solidFill>
+                  <a:srgbClr val="6E8CA8"/>
+                </a:solidFill>
+                <a:latin typeface="Calibri" pitchFamily="34" charset="0"/>
+                <a:ea typeface="Calibri" pitchFamily="34" charset="-122"/>
+                <a:cs typeface="Calibri" pitchFamily="34" charset="-120"/>
+              </a:rPr>
+              <a:t>Contrato VPP-1001-03-CC-088 · 97 subsistemas (80 Operable · 2 Componente · 15 Facility) en Desaladora y EB-2.</a:t>
+            </a:r>
+            <a:endParaRPr lang="en-US" sz="1350" dirty="0"/>
+          </a:p>
+        </p:txBody>
+      </p:sp>
+      <p:sp>
+        <p:nvSpPr>
+          <p:cNvPr id="9" name="Text 7"/>
+          <p:cNvSpPr/>
+          <p:nvPr/>
+        </p:nvSpPr>
+        <p:spPr>
+          <a:xfrm>
+            <a:off x="777240" y="4846320"/>
+            <a:ext cx="2651760" cy="640080"/>
+          </a:xfrm>
+          <a:prstGeom prst="rect">
+            <a:avLst/>
+          </a:prstGeom>
+          <a:noFill/>
+          <a:ln/>
+        </p:spPr>
+        <p:txBody>
+          <a:bodyPr wrap="square" lIns="0" tIns="0" rIns="0" bIns="0" rtlCol="0" anchor="ctr"/>
+          <a:lstStyle/>
+          <a:p>
+            <a:pPr indent="0" marL="0">
+              <a:buNone/>
+            </a:pPr>
+            <a:r>
+              <a:rPr lang="en-US" sz="3400" b="1" dirty="0">
+                <a:solidFill>
+                  <a:srgbClr val="E3A55B"/>
+                </a:solidFill>
+                <a:latin typeface="Cambria" pitchFamily="34" charset="0"/>
+                <a:ea typeface="Cambria" pitchFamily="34" charset="-122"/>
+                <a:cs typeface="Cambria" pitchFamily="34" charset="-120"/>
+              </a:rPr>
+              <a:t>51,3%</a:t>
+            </a:r>
+            <a:endParaRPr lang="en-US" sz="3400" dirty="0"/>
+          </a:p>
+        </p:txBody>
+      </p:sp>
+      <p:sp>
+        <p:nvSpPr>
+          <p:cNvPr id="10" name="Text 8"/>
+          <p:cNvSpPr/>
+          <p:nvPr/>
+        </p:nvSpPr>
+        <p:spPr>
+          <a:xfrm>
+            <a:off x="777240" y="5486400"/>
+            <a:ext cx="2651760" cy="502920"/>
+          </a:xfrm>
+          <a:prstGeom prst="rect">
+            <a:avLst/>
+          </a:prstGeom>
+          <a:noFill/>
+          <a:ln/>
+        </p:spPr>
+        <p:txBody>
+          <a:bodyPr wrap="square" lIns="0" tIns="0" rIns="0" bIns="0" rtlCol="0" anchor="ctr"/>
+          <a:lstStyle/>
+          <a:p>
+            <a:pPr indent="0" marL="0">
+              <a:buNone/>
+            </a:pPr>
+            <a:r>
+              <a:rPr lang="en-US" sz="1150" dirty="0">
+                <a:solidFill>
+                  <a:srgbClr val="DCE6F0"/>
+                </a:solidFill>
+                <a:latin typeface="Calibri" pitchFamily="34" charset="0"/>
+                <a:ea typeface="Calibri" pitchFamily="34" charset="-122"/>
+                <a:cs typeface="Calibri" pitchFamily="34" charset="-120"/>
+              </a:rPr>
+              <a:t>Caminata 2 · Operables</a:t>
+            </a:r>
+            <a:endParaRPr lang="en-US" sz="1150" dirty="0"/>
+          </a:p>
+        </p:txBody>
+      </p:sp>
+      <p:sp>
+        <p:nvSpPr>
+          <p:cNvPr id="11" name="Text 9"/>
+          <p:cNvSpPr/>
+          <p:nvPr/>
+        </p:nvSpPr>
+        <p:spPr>
+          <a:xfrm>
+            <a:off x="3520440" y="4846320"/>
+            <a:ext cx="2651760" cy="640080"/>
+          </a:xfrm>
+          <a:prstGeom prst="rect">
+            <a:avLst/>
+          </a:prstGeom>
+          <a:noFill/>
+          <a:ln/>
+        </p:spPr>
+        <p:txBody>
+          <a:bodyPr wrap="square" lIns="0" tIns="0" rIns="0" bIns="0" rtlCol="0" anchor="ctr"/>
+          <a:lstStyle/>
+          <a:p>
+            <a:pPr indent="0" marL="0">
+              <a:buNone/>
+            </a:pPr>
+            <a:r>
+              <a:rPr lang="en-US" sz="3400" b="1" dirty="0">
+                <a:solidFill>
+                  <a:srgbClr val="E3A55B"/>
+                </a:solidFill>
+                <a:latin typeface="Cambria" pitchFamily="34" charset="0"/>
+                <a:ea typeface="Cambria" pitchFamily="34" charset="-122"/>
+                <a:cs typeface="Cambria" pitchFamily="34" charset="-120"/>
+              </a:rPr>
+              <a:t>66,7%</a:t>
+            </a:r>
+            <a:endParaRPr lang="en-US" sz="3400" dirty="0"/>
+          </a:p>
+        </p:txBody>
+      </p:sp>
+      <p:sp>
+        <p:nvSpPr>
+          <p:cNvPr id="12" name="Text 10"/>
+          <p:cNvSpPr/>
+          <p:nvPr/>
+        </p:nvSpPr>
+        <p:spPr>
+          <a:xfrm>
+            <a:off x="3520440" y="5486400"/>
+            <a:ext cx="2651760" cy="502920"/>
+          </a:xfrm>
+          <a:prstGeom prst="rect">
+            <a:avLst/>
+          </a:prstGeom>
+          <a:noFill/>
+          <a:ln/>
+        </p:spPr>
+        <p:txBody>
+          <a:bodyPr wrap="square" lIns="0" tIns="0" rIns="0" bIns="0" rtlCol="0" anchor="ctr"/>
+          <a:lstStyle/>
+          <a:p>
+            <a:pPr indent="0" marL="0">
+              <a:buNone/>
+            </a:pPr>
+            <a:r>
+              <a:rPr lang="en-US" sz="1150" dirty="0">
+                <a:solidFill>
+                  <a:srgbClr val="DCE6F0"/>
+                </a:solidFill>
+                <a:latin typeface="Calibri" pitchFamily="34" charset="0"/>
+                <a:ea typeface="Calibri" pitchFamily="34" charset="-122"/>
+                <a:cs typeface="Calibri" pitchFamily="34" charset="-120"/>
+              </a:rPr>
+              <a:t>Caminata 1 · Facility</a:t>
+            </a:r>
+            <a:endParaRPr lang="en-US" sz="1150" dirty="0"/>
+          </a:p>
+        </p:txBody>
+      </p:sp>
+      <p:sp>
+        <p:nvSpPr>
+          <p:cNvPr id="13" name="Text 11"/>
+          <p:cNvSpPr/>
+          <p:nvPr/>
+        </p:nvSpPr>
+        <p:spPr>
+          <a:xfrm>
+            <a:off x="6263640" y="4846320"/>
+            <a:ext cx="2651760" cy="640080"/>
+          </a:xfrm>
+          <a:prstGeom prst="rect">
+            <a:avLst/>
+          </a:prstGeom>
+          <a:noFill/>
+          <a:ln/>
+        </p:spPr>
+        <p:txBody>
+          <a:bodyPr wrap="square" lIns="0" tIns="0" rIns="0" bIns="0" rtlCol="0" anchor="ctr"/>
+          <a:lstStyle/>
+          <a:p>
+            <a:pPr indent="0" marL="0">
+              <a:buNone/>
+            </a:pPr>
+            <a:r>
+              <a:rPr lang="en-US" sz="3400" b="1" dirty="0">
+                <a:solidFill>
+                  <a:srgbClr val="E3A55B"/>
+                </a:solidFill>
+                <a:latin typeface="Cambria" pitchFamily="34" charset="0"/>
+                <a:ea typeface="Cambria" pitchFamily="34" charset="-122"/>
+                <a:cs typeface="Cambria" pitchFamily="34" charset="-120"/>
+              </a:rPr>
+              <a:t>40,2%</a:t>
+            </a:r>
+            <a:endParaRPr lang="en-US" sz="3400" dirty="0"/>
+          </a:p>
+        </p:txBody>
+      </p:sp>
+      <p:sp>
+        <p:nvSpPr>
+          <p:cNvPr id="14" name="Text 12"/>
+          <p:cNvSpPr/>
+          <p:nvPr/>
+        </p:nvSpPr>
+        <p:spPr>
+          <a:xfrm>
+            <a:off x="6263640" y="5486400"/>
+            <a:ext cx="2651760" cy="502920"/>
+          </a:xfrm>
+          <a:prstGeom prst="rect">
+            <a:avLst/>
+          </a:prstGeom>
+          <a:noFill/>
+          <a:ln/>
+        </p:spPr>
+        <p:txBody>
+          <a:bodyPr wrap="square" lIns="0" tIns="0" rIns="0" bIns="0" rtlCol="0" anchor="ctr"/>
+          <a:lstStyle/>
+          <a:p>
+            <a:pPr indent="0" marL="0">
+              <a:buNone/>
+            </a:pPr>
+            <a:r>
+              <a:rPr lang="en-US" sz="1150" dirty="0">
+                <a:solidFill>
+                  <a:srgbClr val="DCE6F0"/>
+                </a:solidFill>
+                <a:latin typeface="Calibri" pitchFamily="34" charset="0"/>
+                <a:ea typeface="Calibri" pitchFamily="34" charset="-122"/>
+                <a:cs typeface="Calibri" pitchFamily="34" charset="-120"/>
+              </a:rPr>
+              <a:t>Carpetas entregadas</a:t>
+            </a:r>
+            <a:endParaRPr lang="en-US" sz="1150" dirty="0"/>
+          </a:p>
+        </p:txBody>
+      </p:sp>
+      <p:sp>
+        <p:nvSpPr>
+          <p:cNvPr id="15" name="Text 13"/>
+          <p:cNvSpPr/>
+          <p:nvPr/>
+        </p:nvSpPr>
+        <p:spPr>
+          <a:xfrm>
+            <a:off x="9006840" y="4846320"/>
+            <a:ext cx="2651760" cy="640080"/>
+          </a:xfrm>
+          <a:prstGeom prst="rect">
+            <a:avLst/>
+          </a:prstGeom>
+          <a:noFill/>
+          <a:ln/>
+        </p:spPr>
+        <p:txBody>
+          <a:bodyPr wrap="square" lIns="0" tIns="0" rIns="0" bIns="0" rtlCol="0" anchor="ctr"/>
+          <a:lstStyle/>
+          <a:p>
+            <a:pPr indent="0" marL="0">
+              <a:buNone/>
+            </a:pPr>
+            <a:r>
+              <a:rPr lang="en-US" sz="3400" b="1" dirty="0">
+                <a:solidFill>
+                  <a:srgbClr val="E3A55B"/>
+                </a:solidFill>
+                <a:latin typeface="Cambria" pitchFamily="34" charset="0"/>
+                <a:ea typeface="Cambria" pitchFamily="34" charset="-122"/>
+                <a:cs typeface="Cambria" pitchFamily="34" charset="-120"/>
+              </a:rPr>
+              <a:t>71,4%</a:t>
+            </a:r>
+            <a:endParaRPr lang="en-US" sz="3400" dirty="0"/>
+          </a:p>
+        </p:txBody>
+      </p:sp>
+      <p:sp>
+        <p:nvSpPr>
+          <p:cNvPr id="16" name="Text 14"/>
+          <p:cNvSpPr/>
+          <p:nvPr/>
+        </p:nvSpPr>
+        <p:spPr>
+          <a:xfrm>
+            <a:off x="9006840" y="5486400"/>
+            <a:ext cx="2651760" cy="502920"/>
+          </a:xfrm>
+          <a:prstGeom prst="rect">
+            <a:avLst/>
+          </a:prstGeom>
+          <a:noFill/>
+          <a:ln/>
+        </p:spPr>
+        <p:txBody>
+          <a:bodyPr wrap="square" lIns="0" tIns="0" rIns="0" bIns="0" rtlCol="0" anchor="ctr"/>
+          <a:lstStyle/>
+          <a:p>
+            <a:pPr indent="0" marL="0">
+              <a:buNone/>
+            </a:pPr>
+            <a:r>
+              <a:rPr lang="en-US" sz="1150" dirty="0">
+                <a:solidFill>
+                  <a:srgbClr val="DCE6F0"/>
+                </a:solidFill>
+                <a:latin typeface="Calibri" pitchFamily="34" charset="0"/>
+                <a:ea typeface="Calibri" pitchFamily="34" charset="-122"/>
+                <a:cs typeface="Calibri" pitchFamily="34" charset="-120"/>
+              </a:rPr>
+              <a:t>Cierre de punch P1</a:t>
+            </a:r>
+            <a:endParaRPr lang="en-US" sz="1150" dirty="0"/>
+          </a:p>
+        </p:txBody>
+      </p:sp>
+      <p:sp>
+        <p:nvSpPr>
+          <p:cNvPr id="17" name="Text 15"/>
+          <p:cNvSpPr/>
+          <p:nvPr/>
+        </p:nvSpPr>
+        <p:spPr>
+          <a:xfrm>
+            <a:off x="777240" y="6172200"/>
+            <a:ext cx="7315200" cy="274320"/>
+          </a:xfrm>
+          <a:prstGeom prst="rect">
+            <a:avLst/>
+          </a:prstGeom>
+          <a:noFill/>
+          <a:ln/>
+        </p:spPr>
+        <p:txBody>
+          <a:bodyPr wrap="square" lIns="0" tIns="0" rIns="0" bIns="0" rtlCol="0" anchor="ctr"/>
+          <a:lstStyle/>
+          <a:p>
+            <a:pPr indent="0" marL="0">
+              <a:buNone/>
+            </a:pPr>
+            <a:r>
+              <a:rPr lang="en-US" sz="1100" i="1" dirty="0">
+                <a:solidFill>
+                  <a:srgbClr val="6E8CA8"/>
+                </a:solidFill>
+                <a:latin typeface="Calibri" pitchFamily="34" charset="0"/>
+                <a:ea typeface="Calibri" pitchFamily="34" charset="-122"/>
+                <a:cs typeface="Calibri" pitchFamily="34" charset="-120"/>
+              </a:rPr>
+              <a:t>Corte: 27-07-2026</a:t>
+            </a:r>
+            <a:endParaRPr lang="en-US" sz="1100" dirty="0"/>
+          </a:p>
+        </p:txBody>
+      </p:sp>
+      <p:sp>
+        <p:nvSpPr>
+          <p:cNvPr id="18" name="Text 16"/>
+          <p:cNvSpPr/>
+          <p:nvPr/>
+        </p:nvSpPr>
+        <p:spPr>
+          <a:xfrm>
+            <a:off x="457200" y="6473952"/>
+            <a:ext cx="9692640" cy="274320"/>
+          </a:xfrm>
+          <a:prstGeom prst="rect">
+            <a:avLst/>
+          </a:prstGeom>
+          <a:noFill/>
+          <a:ln/>
+        </p:spPr>
+        <p:txBody>
+          <a:bodyPr wrap="square" lIns="0" tIns="0" rIns="0" bIns="0" rtlCol="0" anchor="ctr"/>
+          <a:lstStyle/>
+          <a:p>
+            <a:pPr algn="l" indent="0" marL="0">
+              <a:buNone/>
+            </a:pPr>
+            <a:r>
+              <a:rPr lang="en-US" sz="850" dirty="0">
+                <a:solidFill>
+                  <a:srgbClr val="6E8CA8"/>
+                </a:solidFill>
+                <a:latin typeface="Calibri" pitchFamily="34" charset="0"/>
+                <a:ea typeface="Calibri" pitchFamily="34" charset="-122"/>
+                <a:cs typeface="Calibri" pitchFamily="34" charset="-120"/>
+              </a:rPr>
+              <a:t>Fuente: REPORTE_GERENCIAL + Listado de Puntos Punch Consolidado · Corte 27-07-2026 · Atrasos al 27-07-2026</a:t>
+            </a:r>
+            <a:endParaRPr lang="en-US" sz="850" dirty="0"/>
+          </a:p>
+        </p:txBody>
+      </p:sp>
+      <p:sp>
+        <p:nvSpPr>
+          <p:cNvPr id="19" name="Text 17"/>
+          <p:cNvSpPr/>
+          <p:nvPr/>
+        </p:nvSpPr>
+        <p:spPr>
+          <a:xfrm>
+            <a:off x="11430000" y="6473952"/>
+            <a:ext cx="365760" cy="274320"/>
+          </a:xfrm>
+          <a:prstGeom prst="rect">
+            <a:avLst/>
+          </a:prstGeom>
+          <a:noFill/>
+          <a:ln/>
+        </p:spPr>
+        <p:txBody>
+          <a:bodyPr wrap="square" lIns="0" tIns="0" rIns="0" bIns="0" rtlCol="0" anchor="ctr"/>
+          <a:lstStyle/>
+          <a:p>
+            <a:pPr algn="r" indent="0" marL="0">
+              <a:buNone/>
+            </a:pPr>
+            <a:r>
+              <a:rPr lang="en-US" sz="900" dirty="0">
+                <a:solidFill>
+                  <a:srgbClr val="6E8CA8"/>
+                </a:solidFill>
+                <a:latin typeface="Calibri" pitchFamily="34" charset="0"/>
+                <a:ea typeface="Calibri" pitchFamily="34" charset="-122"/>
+                <a:cs typeface="Calibri" pitchFamily="34" charset="-120"/>
+              </a:rPr>
+              <a:t>8</a:t>
+            </a:r>
+            <a:endParaRPr lang="en-US" sz="900" dirty="0"/>
+          </a:p>
+        </p:txBody>
+      </p:sp>
+    </p:spTree>
+  </p:cSld>
+  <p:clrMapOvr>
+    <a:masterClrMapping/>
+  </p:clrMapOvr>
+</p:sld>
+</file>
+
+<file path=ppt/slides/slide9.xml><?xml version="1.0" encoding="utf-8"?>
+<p:sld xmlns:a="http://schemas.openxmlformats.org/drawingml/2006/main" xmlns:r="http://schemas.openxmlformats.org/officeDocument/2006/relationships" xmlns:p="http://schemas.openxmlformats.org/presentationml/2006/main">
+  <p:cSld name="Slide 9">
+    <p:bg>
+      <p:bgPr>
+        <a:solidFill>
+          <a:srgbClr val="F4F6F9"/>
+        </a:solidFill>
+      </p:bgPr>
+    </p:bg>
+    <p:spTree>
+      <p:nvGrpSpPr>
+        <p:cNvPr id="1" name=""/>
+        <p:cNvGrpSpPr/>
+        <p:nvPr/>
+      </p:nvGrpSpPr>
+      <p:grpSpPr>
+        <a:xfrm>
+          <a:off x="0" y="0"/>
+          <a:ext cx="0" cy="0"/>
+          <a:chOff x="0" y="0"/>
+          <a:chExt cx="0" cy="0"/>
+        </a:xfrm>
+      </p:grpSpPr>
+      <p:sp>
+        <p:nvSpPr>
+          <p:cNvPr id="2" name="Text 0"/>
+          <p:cNvSpPr/>
+          <p:nvPr/>
+        </p:nvSpPr>
+        <p:spPr>
+          <a:xfrm>
+            <a:off x="457200" y="411480"/>
+            <a:ext cx="7315200" cy="256032"/>
+          </a:xfrm>
+          <a:prstGeom prst="rect">
+            <a:avLst/>
+          </a:prstGeom>
+          <a:noFill/>
+          <a:ln/>
+        </p:spPr>
+        <p:txBody>
+          <a:bodyPr wrap="square" lIns="0" tIns="0" rIns="0" bIns="0" rtlCol="0" anchor="ctr"/>
+          <a:lstStyle/>
+          <a:p>
+            <a:pPr algn="l" indent="0" marL="0">
+              <a:buNone/>
+            </a:pPr>
+            <a:r>
+              <a:rPr lang="en-US" sz="1100" b="1" spc="200" kern="0" dirty="0">
+                <a:solidFill>
+                  <a:srgbClr val="C87A32"/>
+                </a:solidFill>
+                <a:latin typeface="Calibri" pitchFamily="34" charset="0"/>
+                <a:ea typeface="Calibri" pitchFamily="34" charset="-122"/>
+                <a:cs typeface="Calibri" pitchFamily="34" charset="-120"/>
+              </a:rPr>
+              <a:t>DESALADORA · RESUMEN EJECUTIVO</a:t>
+            </a:r>
+            <a:endParaRPr lang="en-US" sz="1100" dirty="0"/>
+          </a:p>
+        </p:txBody>
+      </p:sp>
+      <p:sp>
+        <p:nvSpPr>
+          <p:cNvPr id="3" name="Text 1"/>
+          <p:cNvSpPr/>
+          <p:nvPr/>
+        </p:nvSpPr>
+        <p:spPr>
+          <a:xfrm>
+            <a:off x="457200" y="658368"/>
+            <a:ext cx="10972800" cy="548640"/>
+          </a:xfrm>
+          <a:prstGeom prst="rect">
+            <a:avLst/>
+          </a:prstGeom>
+          <a:noFill/>
+          <a:ln/>
+        </p:spPr>
+        <p:txBody>
+          <a:bodyPr wrap="square" lIns="0" tIns="0" rIns="0" bIns="0" rtlCol="0" anchor="ctr"/>
+          <a:lstStyle/>
+          <a:p>
+            <a:pPr indent="0" marL="0">
+              <a:buNone/>
+            </a:pPr>
+            <a:r>
+              <a:rPr lang="en-US" sz="3000" b="1" dirty="0">
+                <a:solidFill>
+                  <a:srgbClr val="1A2433"/>
+                </a:solidFill>
+                <a:latin typeface="Cambria" pitchFamily="34" charset="0"/>
+                <a:ea typeface="Cambria" pitchFamily="34" charset="-122"/>
+                <a:cs typeface="Cambria" pitchFamily="34" charset="-120"/>
+              </a:rPr>
+              <a:t>Estado global de los tres frentes</a:t>
+            </a:r>
+            <a:endParaRPr lang="en-US" sz="3000" dirty="0"/>
+          </a:p>
+        </p:txBody>
+      </p:sp>
+      <p:sp>
+        <p:nvSpPr>
+          <p:cNvPr id="4" name="Shape 2"/>
+          <p:cNvSpPr/>
+          <p:nvPr/>
+        </p:nvSpPr>
+        <p:spPr>
+          <a:xfrm>
+            <a:off x="457200" y="1463040"/>
+            <a:ext cx="2743200" cy="2286000"/>
+          </a:xfrm>
+          <a:prstGeom prst="roundRect">
+            <a:avLst>
+              <a:gd name="adj" fmla="val 3200"/>
+            </a:avLst>
+          </a:prstGeom>
+          <a:solidFill>
+            <a:srgbClr val="FFFFFF"/>
+          </a:solidFill>
+          <a:ln w="12700">
+            <a:solidFill>
+              <a:srgbClr val="E4E9EF"/>
+            </a:solidFill>
+            <a:prstDash val="solid"/>
+          </a:ln>
+          <a:effectLst>
+            <a:outerShdw sx="100000" sy="100000" kx="0" ky="0" algn="bl" rotWithShape="0" blurRad="88900" dist="25400" dir="5400000">
+              <a:srgbClr val="9AA7B5">
+                <a:alpha val="28000"/>
+              </a:srgbClr>
+            </a:outerShdw>
+          </a:effectLst>
+        </p:spPr>
+      </p:sp>
+      <p:sp>
+        <p:nvSpPr>
+          <p:cNvPr id="5" name="Shape 3"/>
+          <p:cNvSpPr/>
+          <p:nvPr/>
+        </p:nvSpPr>
+        <p:spPr>
+          <a:xfrm>
+            <a:off x="713232" y="1719072"/>
+            <a:ext cx="146304" cy="146304"/>
+          </a:xfrm>
+          <a:prstGeom prst="ellipse">
+            <a:avLst/>
+          </a:prstGeom>
+          <a:solidFill>
+            <a:srgbClr val="2E6FB5"/>
+          </a:solidFill>
+          <a:ln/>
+        </p:spPr>
+      </p:sp>
+      <p:sp>
+        <p:nvSpPr>
+          <p:cNvPr id="6" name="Text 4"/>
+          <p:cNvSpPr/>
+          <p:nvPr/>
+        </p:nvSpPr>
+        <p:spPr>
+          <a:xfrm>
+            <a:off x="713232" y="1938528"/>
+            <a:ext cx="2286000" cy="749808"/>
+          </a:xfrm>
+          <a:prstGeom prst="rect">
+            <a:avLst/>
+          </a:prstGeom>
+          <a:noFill/>
+          <a:ln/>
+        </p:spPr>
+        <p:txBody>
+          <a:bodyPr wrap="square" lIns="0" tIns="0" rIns="0" bIns="0" rtlCol="0" anchor="ctr"/>
+          <a:lstStyle/>
+          <a:p>
+            <a:pPr indent="0" marL="0">
+              <a:buNone/>
+            </a:pPr>
+            <a:r>
+              <a:rPr lang="en-US" sz="3800" b="1" dirty="0">
+                <a:solidFill>
+                  <a:srgbClr val="2E6FB5"/>
+                </a:solidFill>
+                <a:latin typeface="Cambria" pitchFamily="34" charset="0"/>
+                <a:ea typeface="Cambria" pitchFamily="34" charset="-122"/>
+                <a:cs typeface="Cambria" pitchFamily="34" charset="-120"/>
+              </a:rPr>
+              <a:t>51,3%</a:t>
+            </a:r>
+            <a:endParaRPr lang="en-US" sz="3800" dirty="0"/>
+          </a:p>
+        </p:txBody>
+      </p:sp>
+      <p:sp>
+        <p:nvSpPr>
+          <p:cNvPr id="7" name="Text 5"/>
+          <p:cNvSpPr/>
+          <p:nvPr/>
+        </p:nvSpPr>
+        <p:spPr>
+          <a:xfrm>
+            <a:off x="731520" y="2697480"/>
+            <a:ext cx="2286000" cy="292608"/>
+          </a:xfrm>
+          <a:prstGeom prst="rect">
+            <a:avLst/>
+          </a:prstGeom>
+          <a:noFill/>
+          <a:ln/>
+        </p:spPr>
+        <p:txBody>
+          <a:bodyPr wrap="square" lIns="0" tIns="0" rIns="0" bIns="0" rtlCol="0" anchor="ctr"/>
+          <a:lstStyle/>
+          <a:p>
+            <a:pPr indent="0" marL="0">
+              <a:buNone/>
+            </a:pPr>
+            <a:r>
+              <a:rPr lang="en-US" sz="1400" b="1" dirty="0">
+                <a:solidFill>
+                  <a:srgbClr val="1A2433"/>
+                </a:solidFill>
+                <a:latin typeface="Calibri" pitchFamily="34" charset="0"/>
+                <a:ea typeface="Calibri" pitchFamily="34" charset="-122"/>
+                <a:cs typeface="Calibri" pitchFamily="34" charset="-120"/>
+              </a:rPr>
+              <a:t>41/80</a:t>
+            </a:r>
+            <a:endParaRPr lang="en-US" sz="1400" dirty="0"/>
+          </a:p>
+        </p:txBody>
+      </p:sp>
+      <p:sp>
+        <p:nvSpPr>
+          <p:cNvPr id="8" name="Text 6"/>
+          <p:cNvSpPr/>
+          <p:nvPr/>
+        </p:nvSpPr>
+        <p:spPr>
+          <a:xfrm>
+            <a:off x="731520" y="2990088"/>
+            <a:ext cx="2240280" cy="292608"/>
+          </a:xfrm>
+          <a:prstGeom prst="rect">
+            <a:avLst/>
+          </a:prstGeom>
+          <a:noFill/>
+          <a:ln/>
+        </p:spPr>
+        <p:txBody>
+          <a:bodyPr wrap="square" lIns="0" tIns="0" rIns="0" bIns="0" rtlCol="0" anchor="ctr"/>
+          <a:lstStyle/>
+          <a:p>
+            <a:pPr indent="0" marL="0">
+              <a:buNone/>
+            </a:pPr>
+            <a:r>
+              <a:rPr lang="en-US" sz="1200" dirty="0">
+                <a:solidFill>
+                  <a:srgbClr val="56606E"/>
+                </a:solidFill>
+                <a:latin typeface="Calibri" pitchFamily="34" charset="0"/>
+                <a:ea typeface="Calibri" pitchFamily="34" charset="-122"/>
+                <a:cs typeface="Calibri" pitchFamily="34" charset="-120"/>
+              </a:rPr>
+              <a:t>Caminata 2 · Operables</a:t>
+            </a:r>
+            <a:endParaRPr lang="en-US" sz="1200" dirty="0"/>
+          </a:p>
+        </p:txBody>
+      </p:sp>
+      <p:sp>
+        <p:nvSpPr>
+          <p:cNvPr id="9" name="Text 7"/>
+          <p:cNvSpPr/>
+          <p:nvPr/>
+        </p:nvSpPr>
+        <p:spPr>
+          <a:xfrm>
+            <a:off x="731520" y="3273552"/>
+            <a:ext cx="2240280" cy="420624"/>
+          </a:xfrm>
+          <a:prstGeom prst="rect">
+            <a:avLst/>
+          </a:prstGeom>
+          <a:noFill/>
+          <a:ln/>
+        </p:spPr>
+        <p:txBody>
+          <a:bodyPr wrap="square" lIns="0" tIns="0" rIns="0" bIns="0" rtlCol="0" anchor="ctr"/>
+          <a:lstStyle/>
+          <a:p>
+            <a:pPr indent="0" marL="0">
+              <a:lnSpc>
+                <a:spcPts val="1200"/>
+              </a:lnSpc>
+              <a:buNone/>
+            </a:pPr>
+            <a:r>
+              <a:rPr lang="en-US" sz="950" dirty="0">
+                <a:solidFill>
+                  <a:srgbClr val="56606E"/>
+                </a:solidFill>
+                <a:latin typeface="Calibri" pitchFamily="34" charset="0"/>
+                <a:ea typeface="Calibri" pitchFamily="34" charset="-122"/>
+                <a:cs typeface="Calibri" pitchFamily="34" charset="-120"/>
+              </a:rPr>
+              <a:t>39 subsistemas por caminar</a:t>
+            </a:r>
+            <a:endParaRPr lang="en-US" sz="950" dirty="0"/>
+          </a:p>
+        </p:txBody>
+      </p:sp>
+      <p:sp>
+        <p:nvSpPr>
+          <p:cNvPr id="10" name="Shape 8"/>
+          <p:cNvSpPr/>
+          <p:nvPr/>
+        </p:nvSpPr>
+        <p:spPr>
+          <a:xfrm>
+            <a:off x="3319272" y="1463040"/>
+            <a:ext cx="2743200" cy="2286000"/>
+          </a:xfrm>
+          <a:prstGeom prst="roundRect">
+            <a:avLst>
+              <a:gd name="adj" fmla="val 3200"/>
+            </a:avLst>
+          </a:prstGeom>
+          <a:solidFill>
+            <a:srgbClr val="FFFFFF"/>
+          </a:solidFill>
+          <a:ln w="12700">
+            <a:solidFill>
+              <a:srgbClr val="E4E9EF"/>
+            </a:solidFill>
+            <a:prstDash val="solid"/>
+          </a:ln>
+          <a:effectLst>
+            <a:outerShdw sx="100000" sy="100000" kx="0" ky="0" algn="bl" rotWithShape="0" blurRad="88900" dist="25400" dir="5400000">
+              <a:srgbClr val="9AA7B5">
+                <a:alpha val="28000"/>
+              </a:srgbClr>
+            </a:outerShdw>
+          </a:effectLst>
+        </p:spPr>
+      </p:sp>
+      <p:sp>
+        <p:nvSpPr>
+          <p:cNvPr id="11" name="Shape 9"/>
+          <p:cNvSpPr/>
+          <p:nvPr/>
+        </p:nvSpPr>
+        <p:spPr>
+          <a:xfrm>
+            <a:off x="3575304" y="1719072"/>
+            <a:ext cx="146304" cy="146304"/>
+          </a:xfrm>
+          <a:prstGeom prst="ellipse">
+            <a:avLst/>
+          </a:prstGeom>
+          <a:solidFill>
+            <a:srgbClr val="2E6FB5"/>
+          </a:solidFill>
+          <a:ln/>
+        </p:spPr>
+      </p:sp>
+      <p:sp>
+        <p:nvSpPr>
+          <p:cNvPr id="12" name="Text 10"/>
+          <p:cNvSpPr/>
+          <p:nvPr/>
+        </p:nvSpPr>
+        <p:spPr>
+          <a:xfrm>
+            <a:off x="3575304" y="1938528"/>
+            <a:ext cx="2286000" cy="749808"/>
+          </a:xfrm>
+          <a:prstGeom prst="rect">
+            <a:avLst/>
+          </a:prstGeom>
+          <a:noFill/>
+          <a:ln/>
+        </p:spPr>
+        <p:txBody>
+          <a:bodyPr wrap="square" lIns="0" tIns="0" rIns="0" bIns="0" rtlCol="0" anchor="ctr"/>
+          <a:lstStyle/>
+          <a:p>
+            <a:pPr indent="0" marL="0">
+              <a:buNone/>
+            </a:pPr>
+            <a:r>
+              <a:rPr lang="en-US" sz="3800" b="1" dirty="0">
+                <a:solidFill>
+                  <a:srgbClr val="2E6FB5"/>
+                </a:solidFill>
+                <a:latin typeface="Cambria" pitchFamily="34" charset="0"/>
+                <a:ea typeface="Cambria" pitchFamily="34" charset="-122"/>
+                <a:cs typeface="Cambria" pitchFamily="34" charset="-120"/>
+              </a:rPr>
+              <a:t>66,7%</a:t>
+            </a:r>
+            <a:endParaRPr lang="en-US" sz="3800" dirty="0"/>
+          </a:p>
+        </p:txBody>
+      </p:sp>
+      <p:sp>
+        <p:nvSpPr>
+          <p:cNvPr id="13" name="Text 11"/>
+          <p:cNvSpPr/>
+          <p:nvPr/>
+        </p:nvSpPr>
+        <p:spPr>
+          <a:xfrm>
+            <a:off x="3593592" y="2697480"/>
+            <a:ext cx="2286000" cy="292608"/>
+          </a:xfrm>
+          <a:prstGeom prst="rect">
+            <a:avLst/>
+          </a:prstGeom>
+          <a:noFill/>
+          <a:ln/>
+        </p:spPr>
+        <p:txBody>
+          <a:bodyPr wrap="square" lIns="0" tIns="0" rIns="0" bIns="0" rtlCol="0" anchor="ctr"/>
+          <a:lstStyle/>
+          <a:p>
+            <a:pPr indent="0" marL="0">
+              <a:buNone/>
+            </a:pPr>
+            <a:r>
+              <a:rPr lang="en-US" sz="1400" b="1" dirty="0">
+                <a:solidFill>
+                  <a:srgbClr val="1A2433"/>
+                </a:solidFill>
+                <a:latin typeface="Calibri" pitchFamily="34" charset="0"/>
+                <a:ea typeface="Calibri" pitchFamily="34" charset="-122"/>
+                <a:cs typeface="Calibri" pitchFamily="34" charset="-120"/>
+              </a:rPr>
+              <a:t>10/15</a:t>
+            </a:r>
+            <a:endParaRPr lang="en-US" sz="1400" dirty="0"/>
+          </a:p>
+        </p:txBody>
+      </p:sp>
+      <p:sp>
+        <p:nvSpPr>
+          <p:cNvPr id="14" name="Text 12"/>
+          <p:cNvSpPr/>
+          <p:nvPr/>
+        </p:nvSpPr>
+        <p:spPr>
+          <a:xfrm>
+            <a:off x="3593592" y="2990088"/>
+            <a:ext cx="2240280" cy="292608"/>
+          </a:xfrm>
+          <a:prstGeom prst="rect">
+            <a:avLst/>
+          </a:prstGeom>
+          <a:noFill/>
+          <a:ln/>
+        </p:spPr>
+        <p:txBody>
+          <a:bodyPr wrap="square" lIns="0" tIns="0" rIns="0" bIns="0" rtlCol="0" anchor="ctr"/>
+          <a:lstStyle/>
+          <a:p>
+            <a:pPr indent="0" marL="0">
+              <a:buNone/>
+            </a:pPr>
+            <a:r>
+              <a:rPr lang="en-US" sz="1200" dirty="0">
+                <a:solidFill>
+                  <a:srgbClr val="56606E"/>
+                </a:solidFill>
+                <a:latin typeface="Calibri" pitchFamily="34" charset="0"/>
+                <a:ea typeface="Calibri" pitchFamily="34" charset="-122"/>
+                <a:cs typeface="Calibri" pitchFamily="34" charset="-120"/>
+              </a:rPr>
+              <a:t>Caminata 1 · Facility</a:t>
+            </a:r>
+            <a:endParaRPr lang="en-US" sz="1200" dirty="0"/>
+          </a:p>
+        </p:txBody>
+      </p:sp>
+      <p:sp>
+        <p:nvSpPr>
+          <p:cNvPr id="15" name="Text 13"/>
+          <p:cNvSpPr/>
+          <p:nvPr/>
+        </p:nvSpPr>
+        <p:spPr>
+          <a:xfrm>
+            <a:off x="3593592" y="3273552"/>
+            <a:ext cx="2240280" cy="420624"/>
+          </a:xfrm>
+          <a:prstGeom prst="rect">
+            <a:avLst/>
+          </a:prstGeom>
+          <a:noFill/>
+          <a:ln/>
+        </p:spPr>
+        <p:txBody>
+          <a:bodyPr wrap="square" lIns="0" tIns="0" rIns="0" bIns="0" rtlCol="0" anchor="ctr"/>
+          <a:lstStyle/>
+          <a:p>
+            <a:pPr indent="0" marL="0">
+              <a:lnSpc>
+                <a:spcPts val="1200"/>
+              </a:lnSpc>
+              <a:buNone/>
+            </a:pPr>
+            <a:r>
+              <a:rPr lang="en-US" sz="950" dirty="0">
+                <a:solidFill>
+                  <a:srgbClr val="56606E"/>
+                </a:solidFill>
+                <a:latin typeface="Calibri" pitchFamily="34" charset="0"/>
+                <a:ea typeface="Calibri" pitchFamily="34" charset="-122"/>
+                <a:cs typeface="Calibri" pitchFamily="34" charset="-120"/>
+              </a:rPr>
+              <a:t>5 facilities por caminar</a:t>
+            </a:r>
+            <a:endParaRPr lang="en-US" sz="950" dirty="0"/>
+          </a:p>
+        </p:txBody>
+      </p:sp>
+      <p:sp>
+        <p:nvSpPr>
+          <p:cNvPr id="16" name="Shape 14"/>
+          <p:cNvSpPr/>
+          <p:nvPr/>
+        </p:nvSpPr>
+        <p:spPr>
+          <a:xfrm>
+            <a:off x="6181344" y="1463040"/>
+            <a:ext cx="2743200" cy="2286000"/>
+          </a:xfrm>
+          <a:prstGeom prst="roundRect">
+            <a:avLst>
+              <a:gd name="adj" fmla="val 3200"/>
+            </a:avLst>
+          </a:prstGeom>
+          <a:solidFill>
+            <a:srgbClr val="FFFFFF"/>
+          </a:solidFill>
+          <a:ln w="12700">
+            <a:solidFill>
+              <a:srgbClr val="E4E9EF"/>
+            </a:solidFill>
+            <a:prstDash val="solid"/>
+          </a:ln>
+          <a:effectLst>
+            <a:outerShdw sx="100000" sy="100000" kx="0" ky="0" algn="bl" rotWithShape="0" blurRad="88900" dist="25400" dir="5400000">
+              <a:srgbClr val="9AA7B5">
+                <a:alpha val="28000"/>
+              </a:srgbClr>
+            </a:outerShdw>
+          </a:effectLst>
+        </p:spPr>
+      </p:sp>
+      <p:sp>
+        <p:nvSpPr>
+          <p:cNvPr id="17" name="Shape 15"/>
+          <p:cNvSpPr/>
+          <p:nvPr/>
+        </p:nvSpPr>
+        <p:spPr>
+          <a:xfrm>
+            <a:off x="6437376" y="1719072"/>
+            <a:ext cx="146304" cy="146304"/>
+          </a:xfrm>
+          <a:prstGeom prst="ellipse">
+            <a:avLst/>
+          </a:prstGeom>
+          <a:solidFill>
+            <a:srgbClr val="C87A32"/>
+          </a:solidFill>
+          <a:ln/>
+        </p:spPr>
+      </p:sp>
+      <p:sp>
+        <p:nvSpPr>
+          <p:cNvPr id="18" name="Text 16"/>
+          <p:cNvSpPr/>
+          <p:nvPr/>
+        </p:nvSpPr>
+        <p:spPr>
+          <a:xfrm>
+            <a:off x="6437376" y="1938528"/>
+            <a:ext cx="2286000" cy="749808"/>
+          </a:xfrm>
+          <a:prstGeom prst="rect">
+            <a:avLst/>
+          </a:prstGeom>
+          <a:noFill/>
+          <a:ln/>
+        </p:spPr>
+        <p:txBody>
+          <a:bodyPr wrap="square" lIns="0" tIns="0" rIns="0" bIns="0" rtlCol="0" anchor="ctr"/>
+          <a:lstStyle/>
+          <a:p>
+            <a:pPr indent="0" marL="0">
+              <a:buNone/>
+            </a:pPr>
+            <a:r>
+              <a:rPr lang="en-US" sz="3800" b="1" dirty="0">
+                <a:solidFill>
+                  <a:srgbClr val="C87A32"/>
+                </a:solidFill>
+                <a:latin typeface="Cambria" pitchFamily="34" charset="0"/>
+                <a:ea typeface="Cambria" pitchFamily="34" charset="-122"/>
+                <a:cs typeface="Cambria" pitchFamily="34" charset="-120"/>
+              </a:rPr>
+              <a:t>40,2%</a:t>
+            </a:r>
+            <a:endParaRPr lang="en-US" sz="3800" dirty="0"/>
+          </a:p>
+        </p:txBody>
+      </p:sp>
+      <p:sp>
+        <p:nvSpPr>
+          <p:cNvPr id="19" name="Text 17"/>
+          <p:cNvSpPr/>
+          <p:nvPr/>
+        </p:nvSpPr>
+        <p:spPr>
+          <a:xfrm>
+            <a:off x="6455664" y="2697480"/>
+            <a:ext cx="2286000" cy="292608"/>
+          </a:xfrm>
+          <a:prstGeom prst="rect">
+            <a:avLst/>
+          </a:prstGeom>
+          <a:noFill/>
+          <a:ln/>
+        </p:spPr>
+        <p:txBody>
+          <a:bodyPr wrap="square" lIns="0" tIns="0" rIns="0" bIns="0" rtlCol="0" anchor="ctr"/>
+          <a:lstStyle/>
+          <a:p>
+            <a:pPr indent="0" marL="0">
+              <a:buNone/>
+            </a:pPr>
+            <a:r>
+              <a:rPr lang="en-US" sz="1400" b="1" dirty="0">
+                <a:solidFill>
+                  <a:srgbClr val="1A2433"/>
+                </a:solidFill>
+                <a:latin typeface="Calibri" pitchFamily="34" charset="0"/>
+                <a:ea typeface="Calibri" pitchFamily="34" charset="-122"/>
+                <a:cs typeface="Calibri" pitchFamily="34" charset="-120"/>
+              </a:rPr>
+              <a:t>39/97</a:t>
+            </a:r>
+            <a:endParaRPr lang="en-US" sz="1400" dirty="0"/>
+          </a:p>
+        </p:txBody>
+      </p:sp>
+      <p:sp>
+        <p:nvSpPr>
+          <p:cNvPr id="20" name="Text 18"/>
+          <p:cNvSpPr/>
+          <p:nvPr/>
+        </p:nvSpPr>
+        <p:spPr>
+          <a:xfrm>
+            <a:off x="6455664" y="2990088"/>
+            <a:ext cx="2240280" cy="292608"/>
+          </a:xfrm>
+          <a:prstGeom prst="rect">
+            <a:avLst/>
+          </a:prstGeom>
+          <a:noFill/>
+          <a:ln/>
+        </p:spPr>
+        <p:txBody>
+          <a:bodyPr wrap="square" lIns="0" tIns="0" rIns="0" bIns="0" rtlCol="0" anchor="ctr"/>
+          <a:lstStyle/>
+          <a:p>
+            <a:pPr indent="0" marL="0">
+              <a:buNone/>
+            </a:pPr>
+            <a:r>
+              <a:rPr lang="en-US" sz="1200" dirty="0">
+                <a:solidFill>
+                  <a:srgbClr val="56606E"/>
+                </a:solidFill>
+                <a:latin typeface="Calibri" pitchFamily="34" charset="0"/>
+                <a:ea typeface="Calibri" pitchFamily="34" charset="-122"/>
+                <a:cs typeface="Calibri" pitchFamily="34" charset="-120"/>
+              </a:rPr>
+              <a:t>Carpetas entregadas</a:t>
+            </a:r>
+            <a:endParaRPr lang="en-US" sz="1200" dirty="0"/>
+          </a:p>
+        </p:txBody>
+      </p:sp>
+      <p:sp>
+        <p:nvSpPr>
+          <p:cNvPr id="21" name="Text 19"/>
+          <p:cNvSpPr/>
+          <p:nvPr/>
+        </p:nvSpPr>
+        <p:spPr>
+          <a:xfrm>
+            <a:off x="6455664" y="3273552"/>
+            <a:ext cx="2240280" cy="420624"/>
+          </a:xfrm>
+          <a:prstGeom prst="rect">
+            <a:avLst/>
+          </a:prstGeom>
+          <a:noFill/>
+          <a:ln/>
+        </p:spPr>
+        <p:txBody>
+          <a:bodyPr wrap="square" lIns="0" tIns="0" rIns="0" bIns="0" rtlCol="0" anchor="ctr"/>
+          <a:lstStyle/>
+          <a:p>
+            <a:pPr indent="0" marL="0">
+              <a:lnSpc>
+                <a:spcPts val="1200"/>
+              </a:lnSpc>
+              <a:buNone/>
+            </a:pPr>
+            <a:r>
+              <a:rPr lang="en-US" sz="950" dirty="0">
+                <a:solidFill>
+                  <a:srgbClr val="56606E"/>
+                </a:solidFill>
+                <a:latin typeface="Calibri" pitchFamily="34" charset="0"/>
+                <a:ea typeface="Calibri" pitchFamily="34" charset="-122"/>
+                <a:cs typeface="Calibri" pitchFamily="34" charset="-120"/>
+              </a:rPr>
+              <a:t>22 aprobadas · 9 rechazadas · 14 en preparación</a:t>
+            </a:r>
+            <a:endParaRPr lang="en-US" sz="950" dirty="0"/>
+          </a:p>
+        </p:txBody>
+      </p:sp>
+      <p:sp>
+        <p:nvSpPr>
+          <p:cNvPr id="22" name="Shape 20"/>
+          <p:cNvSpPr/>
+          <p:nvPr/>
+        </p:nvSpPr>
+        <p:spPr>
+          <a:xfrm>
+            <a:off x="9043416" y="1463040"/>
+            <a:ext cx="2743200" cy="2286000"/>
+          </a:xfrm>
+          <a:prstGeom prst="roundRect">
+            <a:avLst>
+              <a:gd name="adj" fmla="val 3200"/>
+            </a:avLst>
+          </a:prstGeom>
+          <a:solidFill>
+            <a:srgbClr val="FFFFFF"/>
+          </a:solidFill>
+          <a:ln w="12700">
+            <a:solidFill>
+              <a:srgbClr val="E4E9EF"/>
+            </a:solidFill>
+            <a:prstDash val="solid"/>
+          </a:ln>
+          <a:effectLst>
+            <a:outerShdw sx="100000" sy="100000" kx="0" ky="0" algn="bl" rotWithShape="0" blurRad="88900" dist="25400" dir="5400000">
+              <a:srgbClr val="9AA7B5">
+                <a:alpha val="28000"/>
+              </a:srgbClr>
+            </a:outerShdw>
+          </a:effectLst>
+        </p:spPr>
+      </p:sp>
+      <p:sp>
+        <p:nvSpPr>
+          <p:cNvPr id="23" name="Shape 21"/>
+          <p:cNvSpPr/>
+          <p:nvPr/>
+        </p:nvSpPr>
+        <p:spPr>
+          <a:xfrm>
+            <a:off x="9299448" y="1719072"/>
+            <a:ext cx="146304" cy="146304"/>
+          </a:xfrm>
+          <a:prstGeom prst="ellipse">
+            <a:avLst/>
+          </a:prstGeom>
+          <a:solidFill>
+            <a:srgbClr val="C0392B"/>
+          </a:solidFill>
+          <a:ln/>
+        </p:spPr>
+      </p:sp>
+      <p:sp>
+        <p:nvSpPr>
+          <p:cNvPr id="24" name="Text 22"/>
+          <p:cNvSpPr/>
+          <p:nvPr/>
+        </p:nvSpPr>
+        <p:spPr>
+          <a:xfrm>
+            <a:off x="9299448" y="1938528"/>
+            <a:ext cx="2286000" cy="749808"/>
+          </a:xfrm>
+          <a:prstGeom prst="rect">
+            <a:avLst/>
+          </a:prstGeom>
+          <a:noFill/>
+          <a:ln/>
+        </p:spPr>
+        <p:txBody>
+          <a:bodyPr wrap="square" lIns="0" tIns="0" rIns="0" bIns="0" rtlCol="0" anchor="ctr"/>
+          <a:lstStyle/>
+          <a:p>
+            <a:pPr indent="0" marL="0">
+              <a:buNone/>
+            </a:pPr>
+            <a:r>
+              <a:rPr lang="en-US" sz="3800" b="1" dirty="0">
+                <a:solidFill>
+                  <a:srgbClr val="C0392B"/>
+                </a:solidFill>
+                <a:latin typeface="Cambria" pitchFamily="34" charset="0"/>
+                <a:ea typeface="Cambria" pitchFamily="34" charset="-122"/>
+                <a:cs typeface="Cambria" pitchFamily="34" charset="-120"/>
+              </a:rPr>
+              <a:t>71,4%</a:t>
+            </a:r>
+            <a:endParaRPr lang="en-US" sz="3800" dirty="0"/>
+          </a:p>
+        </p:txBody>
+      </p:sp>
+      <p:sp>
+        <p:nvSpPr>
+          <p:cNvPr id="25" name="Text 23"/>
+          <p:cNvSpPr/>
+          <p:nvPr/>
+        </p:nvSpPr>
+        <p:spPr>
+          <a:xfrm>
+            <a:off x="9317736" y="2697480"/>
+            <a:ext cx="2286000" cy="292608"/>
+          </a:xfrm>
+          <a:prstGeom prst="rect">
+            <a:avLst/>
+          </a:prstGeom>
+          <a:noFill/>
+          <a:ln/>
+        </p:spPr>
+        <p:txBody>
+          <a:bodyPr wrap="square" lIns="0" tIns="0" rIns="0" bIns="0" rtlCol="0" anchor="ctr"/>
+          <a:lstStyle/>
+          <a:p>
+            <a:pPr indent="0" marL="0">
+              <a:buNone/>
+            </a:pPr>
+            <a:r>
+              <a:rPr lang="en-US" sz="1400" b="1" dirty="0">
+                <a:solidFill>
+                  <a:srgbClr val="1A2433"/>
+                </a:solidFill>
+                <a:latin typeface="Calibri" pitchFamily="34" charset="0"/>
+                <a:ea typeface="Calibri" pitchFamily="34" charset="-122"/>
+                <a:cs typeface="Calibri" pitchFamily="34" charset="-120"/>
+              </a:rPr>
+              <a:t>592/829</a:t>
+            </a:r>
+            <a:endParaRPr lang="en-US" sz="1400" dirty="0"/>
+          </a:p>
+        </p:txBody>
+      </p:sp>
+      <p:sp>
+        <p:nvSpPr>
+          <p:cNvPr id="26" name="Text 24"/>
+          <p:cNvSpPr/>
+          <p:nvPr/>
+        </p:nvSpPr>
+        <p:spPr>
+          <a:xfrm>
+            <a:off x="9317736" y="2990088"/>
+            <a:ext cx="2240280" cy="292608"/>
+          </a:xfrm>
+          <a:prstGeom prst="rect">
+            <a:avLst/>
+          </a:prstGeom>
+          <a:noFill/>
+          <a:ln/>
+        </p:spPr>
+        <p:txBody>
+          <a:bodyPr wrap="square" lIns="0" tIns="0" rIns="0" bIns="0" rtlCol="0" anchor="ctr"/>
+          <a:lstStyle/>
+          <a:p>
+            <a:pPr indent="0" marL="0">
+              <a:buNone/>
+            </a:pPr>
+            <a:r>
+              <a:rPr lang="en-US" sz="1200" dirty="0">
+                <a:solidFill>
+                  <a:srgbClr val="56606E"/>
+                </a:solidFill>
+                <a:latin typeface="Calibri" pitchFamily="34" charset="0"/>
+                <a:ea typeface="Calibri" pitchFamily="34" charset="-122"/>
+                <a:cs typeface="Calibri" pitchFamily="34" charset="-120"/>
+              </a:rPr>
+              <a:t>Cierre de punch P1</a:t>
+            </a:r>
+            <a:endParaRPr lang="en-US" sz="1200" dirty="0"/>
+          </a:p>
+        </p:txBody>
+      </p:sp>
+      <p:sp>
+        <p:nvSpPr>
+          <p:cNvPr id="27" name="Text 25"/>
+          <p:cNvSpPr/>
+          <p:nvPr/>
+        </p:nvSpPr>
+        <p:spPr>
+          <a:xfrm>
+            <a:off x="9317736" y="3273552"/>
+            <a:ext cx="2240280" cy="420624"/>
+          </a:xfrm>
+          <a:prstGeom prst="rect">
+            <a:avLst/>
+          </a:prstGeom>
+          <a:noFill/>
+          <a:ln/>
+        </p:spPr>
+        <p:txBody>
+          <a:bodyPr wrap="square" lIns="0" tIns="0" rIns="0" bIns="0" rtlCol="0" anchor="ctr"/>
+          <a:lstStyle/>
+          <a:p>
+            <a:pPr indent="0" marL="0">
+              <a:lnSpc>
+                <a:spcPts val="1200"/>
+              </a:lnSpc>
+              <a:buNone/>
+            </a:pPr>
+            <a:r>
+              <a:rPr lang="en-US" sz="950" dirty="0">
+                <a:solidFill>
+                  <a:srgbClr val="56606E"/>
+                </a:solidFill>
+                <a:latin typeface="Calibri" pitchFamily="34" charset="0"/>
+                <a:ea typeface="Calibri" pitchFamily="34" charset="-122"/>
+                <a:cs typeface="Calibri" pitchFamily="34" charset="-120"/>
+              </a:rPr>
+              <a:t>237 abiertos · 178 atrasados</a:t>
+            </a:r>
+            <a:endParaRPr lang="en-US" sz="950" dirty="0"/>
+          </a:p>
+        </p:txBody>
+      </p:sp>
+      <p:sp>
+        <p:nvSpPr>
+          <p:cNvPr id="28" name="Shape 26"/>
+          <p:cNvSpPr/>
+          <p:nvPr/>
+        </p:nvSpPr>
+        <p:spPr>
+          <a:xfrm>
+            <a:off x="457200" y="3950208"/>
+            <a:ext cx="11274552" cy="2212848"/>
+          </a:xfrm>
+          <a:prstGeom prst="roundRect">
+            <a:avLst>
+              <a:gd name="adj" fmla="val 2479"/>
+            </a:avLst>
+          </a:prstGeom>
+          <a:solidFill>
+            <a:srgbClr val="12233B"/>
+          </a:solidFill>
+          <a:ln/>
+        </p:spPr>
+      </p:sp>
+      <p:sp>
+        <p:nvSpPr>
+          <p:cNvPr id="29" name="Text 27"/>
+          <p:cNvSpPr/>
+          <p:nvPr/>
+        </p:nvSpPr>
+        <p:spPr>
+          <a:xfrm>
+            <a:off x="777240" y="4114800"/>
+            <a:ext cx="5486400" cy="274320"/>
+          </a:xfrm>
+          <a:prstGeom prst="rect">
+            <a:avLst/>
+          </a:prstGeom>
+          <a:noFill/>
+          <a:ln/>
+        </p:spPr>
+        <p:txBody>
+          <a:bodyPr wrap="square" lIns="0" tIns="0" rIns="0" bIns="0" rtlCol="0" anchor="ctr"/>
+          <a:lstStyle/>
+          <a:p>
+            <a:pPr indent="0" marL="0">
+              <a:buNone/>
+            </a:pPr>
+            <a:r>
+              <a:rPr lang="en-US" sz="1100" b="1" spc="200" kern="0" dirty="0">
+                <a:solidFill>
+                  <a:srgbClr val="E3A55B"/>
+                </a:solidFill>
+                <a:latin typeface="Calibri" pitchFamily="34" charset="0"/>
+                <a:ea typeface="Calibri" pitchFamily="34" charset="-122"/>
+                <a:cs typeface="Calibri" pitchFamily="34" charset="-120"/>
+              </a:rPr>
+              <a:t>LECTURA DEL PERÍODO</a:t>
+            </a:r>
+            <a:endParaRPr lang="en-US" sz="1100" dirty="0"/>
+          </a:p>
+        </p:txBody>
+      </p:sp>
+      <p:sp>
+        <p:nvSpPr>
+          <p:cNvPr id="30" name="Shape 28"/>
+          <p:cNvSpPr/>
+          <p:nvPr/>
+        </p:nvSpPr>
+        <p:spPr>
+          <a:xfrm>
+            <a:off x="822960" y="4498848"/>
+            <a:ext cx="109728" cy="109728"/>
+          </a:xfrm>
+          <a:prstGeom prst="ellipse">
+            <a:avLst/>
+          </a:prstGeom>
+          <a:solidFill>
+            <a:srgbClr val="C87A32"/>
+          </a:solidFill>
+          <a:ln/>
+        </p:spPr>
+      </p:sp>
+      <p:sp>
+        <p:nvSpPr>
+          <p:cNvPr id="31" name="Text 29"/>
+          <p:cNvSpPr/>
+          <p:nvPr/>
+        </p:nvSpPr>
+        <p:spPr>
+          <a:xfrm>
+            <a:off x="1051560" y="4398264"/>
+            <a:ext cx="10424160" cy="457200"/>
+          </a:xfrm>
+          <a:prstGeom prst="rect">
+            <a:avLst/>
+          </a:prstGeom>
+          <a:noFill/>
+          <a:ln/>
+        </p:spPr>
+        <p:txBody>
+          <a:bodyPr wrap="square" lIns="0" tIns="0" rIns="0" bIns="0" rtlCol="0" anchor="t"/>
+          <a:lstStyle/>
+          <a:p>
+            <a:pPr indent="0" marL="0">
+              <a:lnSpc>
+                <a:spcPts val="1500"/>
+              </a:lnSpc>
+              <a:buNone/>
+            </a:pPr>
+            <a:r>
+              <a:rPr lang="en-US" sz="1150" b="1" dirty="0">
+                <a:solidFill>
+                  <a:srgbClr val="FFFFFF"/>
+                </a:solidFill>
+                <a:latin typeface="Calibri" pitchFamily="34" charset="0"/>
+                <a:ea typeface="Calibri" pitchFamily="34" charset="-122"/>
+                <a:cs typeface="Calibri" pitchFamily="34" charset="-120"/>
+              </a:rPr>
+              <a:t>El punch cierra a buen ritmo, pero la deuda vencida es la mitad de lo abierto.  </a:t>
+            </a:r>
+            <a:pPr indent="0" marL="0">
+              <a:lnSpc>
+                <a:spcPts val="1500"/>
+              </a:lnSpc>
+              <a:buNone/>
+            </a:pPr>
+            <a:r>
+              <a:rPr lang="en-US" sz="1150" dirty="0">
+                <a:solidFill>
+                  <a:srgbClr val="DCE6F0"/>
+                </a:solidFill>
+                <a:latin typeface="Calibri" pitchFamily="34" charset="0"/>
+                <a:ea typeface="Calibri" pitchFamily="34" charset="-122"/>
+                <a:cs typeface="Calibri" pitchFamily="34" charset="-120"/>
+              </a:rPr>
+              <a:t>960 de 1.386 ítems cerrados (69,3%); de los 426 abiertos, 332 ya pasaron su fecha requerida de cierre (77,9%).</a:t>
+            </a:r>
+            <a:endParaRPr lang="en-US" sz="1150" dirty="0"/>
+          </a:p>
+        </p:txBody>
+      </p:sp>
+      <p:sp>
+        <p:nvSpPr>
+          <p:cNvPr id="32" name="Shape 30"/>
+          <p:cNvSpPr/>
+          <p:nvPr/>
+        </p:nvSpPr>
+        <p:spPr>
+          <a:xfrm>
+            <a:off x="822960" y="4919472"/>
+            <a:ext cx="109728" cy="109728"/>
+          </a:xfrm>
+          <a:prstGeom prst="ellipse">
+            <a:avLst/>
+          </a:prstGeom>
+          <a:solidFill>
+            <a:srgbClr val="C87A32"/>
+          </a:solidFill>
+          <a:ln/>
+        </p:spPr>
+      </p:sp>
+      <p:sp>
+        <p:nvSpPr>
+          <p:cNvPr id="33" name="Text 31"/>
+          <p:cNvSpPr/>
+          <p:nvPr/>
+        </p:nvSpPr>
+        <p:spPr>
+          <a:xfrm>
+            <a:off x="1051560" y="4818888"/>
+            <a:ext cx="10424160" cy="457200"/>
+          </a:xfrm>
+          <a:prstGeom prst="rect">
+            <a:avLst/>
+          </a:prstGeom>
+          <a:noFill/>
+          <a:ln/>
+        </p:spPr>
+        <p:txBody>
+          <a:bodyPr wrap="square" lIns="0" tIns="0" rIns="0" bIns="0" rtlCol="0" anchor="t"/>
+          <a:lstStyle/>
+          <a:p>
+            <a:pPr indent="0" marL="0">
+              <a:lnSpc>
+                <a:spcPts val="1500"/>
+              </a:lnSpc>
+              <a:buNone/>
+            </a:pPr>
+            <a:r>
+              <a:rPr lang="en-US" sz="1150" b="1" dirty="0">
+                <a:solidFill>
+                  <a:srgbClr val="FFFFFF"/>
+                </a:solidFill>
+                <a:latin typeface="Calibri" pitchFamily="34" charset="0"/>
+                <a:ea typeface="Calibri" pitchFamily="34" charset="-122"/>
+                <a:cs typeface="Calibri" pitchFamily="34" charset="-120"/>
+              </a:rPr>
+              <a:t>Las caminatas avanzan a distinta velocidad según el tipo de subsistema.  </a:t>
+            </a:r>
+            <a:pPr indent="0" marL="0">
+              <a:lnSpc>
+                <a:spcPts val="1500"/>
+              </a:lnSpc>
+              <a:buNone/>
+            </a:pPr>
+            <a:r>
+              <a:rPr lang="en-US" sz="1150" dirty="0">
+                <a:solidFill>
+                  <a:srgbClr val="DCE6F0"/>
+                </a:solidFill>
+                <a:latin typeface="Calibri" pitchFamily="34" charset="0"/>
+                <a:ea typeface="Calibri" pitchFamily="34" charset="-122"/>
+                <a:cs typeface="Calibri" pitchFamily="34" charset="-120"/>
+              </a:rPr>
+              <a:t>Operables 41/80 por Caminata 2 (51,3%); Facility 10/15 por Caminata 1 (66,7%).</a:t>
+            </a:r>
+            <a:endParaRPr lang="en-US" sz="1150" dirty="0"/>
+          </a:p>
+        </p:txBody>
+      </p:sp>
+      <p:sp>
+        <p:nvSpPr>
+          <p:cNvPr id="34" name="Shape 32"/>
+          <p:cNvSpPr/>
+          <p:nvPr/>
+        </p:nvSpPr>
+        <p:spPr>
+          <a:xfrm>
+            <a:off x="822960" y="5340096"/>
+            <a:ext cx="109728" cy="109728"/>
+          </a:xfrm>
+          <a:prstGeom prst="ellipse">
+            <a:avLst/>
+          </a:prstGeom>
+          <a:solidFill>
+            <a:srgbClr val="C87A32"/>
+          </a:solidFill>
+          <a:ln/>
+        </p:spPr>
+      </p:sp>
+      <p:sp>
+        <p:nvSpPr>
+          <p:cNvPr id="35" name="Text 33"/>
+          <p:cNvSpPr/>
+          <p:nvPr/>
+        </p:nvSpPr>
+        <p:spPr>
+          <a:xfrm>
+            <a:off x="1051560" y="5239512"/>
+            <a:ext cx="10424160" cy="457200"/>
+          </a:xfrm>
+          <a:prstGeom prst="rect">
+            <a:avLst/>
+          </a:prstGeom>
+          <a:noFill/>
+          <a:ln/>
+        </p:spPr>
+        <p:txBody>
+          <a:bodyPr wrap="square" lIns="0" tIns="0" rIns="0" bIns="0" rtlCol="0" anchor="t"/>
+          <a:lstStyle/>
+          <a:p>
+            <a:pPr indent="0" marL="0">
+              <a:lnSpc>
+                <a:spcPts val="1500"/>
+              </a:lnSpc>
+              <a:buNone/>
+            </a:pPr>
+            <a:r>
+              <a:rPr lang="en-US" sz="1150" b="1" dirty="0">
+                <a:solidFill>
+                  <a:srgbClr val="FFFFFF"/>
+                </a:solidFill>
+                <a:latin typeface="Calibri" pitchFamily="34" charset="0"/>
+                <a:ea typeface="Calibri" pitchFamily="34" charset="-122"/>
+                <a:cs typeface="Calibri" pitchFamily="34" charset="-120"/>
+              </a:rPr>
+              <a:t>Las carpetas están a 40,2% de entrega y el cuello está en el armado interno.  </a:t>
+            </a:r>
+            <a:pPr indent="0" marL="0">
+              <a:lnSpc>
+                <a:spcPts val="1500"/>
+              </a:lnSpc>
+              <a:buNone/>
+            </a:pPr>
+            <a:r>
+              <a:rPr lang="en-US" sz="1150" dirty="0">
+                <a:solidFill>
+                  <a:srgbClr val="DCE6F0"/>
+                </a:solidFill>
+                <a:latin typeface="Calibri" pitchFamily="34" charset="0"/>
+                <a:ea typeface="Calibri" pitchFamily="34" charset="-122"/>
+                <a:cs typeface="Calibri" pitchFamily="34" charset="-120"/>
+              </a:rPr>
+              <a:t>39 entregadas de 97: 22 aprobadas, 8 en revisión y 9 rechazadas. Quedan 14 en preparación y 44 sin iniciar.</a:t>
+            </a:r>
+            <a:endParaRPr lang="en-US" sz="1150" dirty="0"/>
+          </a:p>
+        </p:txBody>
+      </p:sp>
+      <p:sp>
+        <p:nvSpPr>
+          <p:cNvPr id="36" name="Shape 34"/>
+          <p:cNvSpPr/>
+          <p:nvPr/>
+        </p:nvSpPr>
+        <p:spPr>
+          <a:xfrm>
+            <a:off x="822960" y="5760720"/>
+            <a:ext cx="109728" cy="109728"/>
+          </a:xfrm>
+          <a:prstGeom prst="ellipse">
+            <a:avLst/>
+          </a:prstGeom>
+          <a:solidFill>
+            <a:srgbClr val="C87A32"/>
+          </a:solidFill>
+          <a:ln/>
+        </p:spPr>
+      </p:sp>
+      <p:sp>
+        <p:nvSpPr>
+          <p:cNvPr id="37" name="Text 35"/>
+          <p:cNvSpPr/>
+          <p:nvPr/>
+        </p:nvSpPr>
+        <p:spPr>
+          <a:xfrm>
+            <a:off x="1051560" y="5660136"/>
+            <a:ext cx="10424160" cy="457200"/>
+          </a:xfrm>
+          <a:prstGeom prst="rect">
+            <a:avLst/>
+          </a:prstGeom>
+          <a:noFill/>
+          <a:ln/>
+        </p:spPr>
+        <p:txBody>
+          <a:bodyPr wrap="square" lIns="0" tIns="0" rIns="0" bIns="0" rtlCol="0" anchor="t"/>
+          <a:lstStyle/>
+          <a:p>
+            <a:pPr indent="0" marL="0">
+              <a:lnSpc>
+                <a:spcPts val="1500"/>
+              </a:lnSpc>
+              <a:buNone/>
+            </a:pPr>
+            <a:r>
+              <a:rPr lang="en-US" sz="1150" b="1" dirty="0">
+                <a:solidFill>
+                  <a:srgbClr val="FFFFFF"/>
+                </a:solidFill>
+                <a:latin typeface="Calibri" pitchFamily="34" charset="0"/>
+                <a:ea typeface="Calibri" pitchFamily="34" charset="-122"/>
+                <a:cs typeface="Calibri" pitchFamily="34" charset="-120"/>
+              </a:rPr>
+              <a:t>Piping concentra el pendiente de P1.  </a:t>
+            </a:r>
+            <a:pPr indent="0" marL="0">
+              <a:lnSpc>
+                <a:spcPts val="1500"/>
+              </a:lnSpc>
+              <a:buNone/>
+            </a:pPr>
+            <a:r>
+              <a:rPr lang="en-US" sz="1150" dirty="0">
+                <a:solidFill>
+                  <a:srgbClr val="DCE6F0"/>
+                </a:solidFill>
+                <a:latin typeface="Calibri" pitchFamily="34" charset="0"/>
+                <a:ea typeface="Calibri" pitchFamily="34" charset="-122"/>
+                <a:cs typeface="Calibri" pitchFamily="34" charset="-120"/>
+              </a:rPr>
+              <a:t>97 de los 237 P1 abiertos (40,9%), con 72 atrasados.</a:t>
+            </a:r>
+            <a:endParaRPr lang="en-US" sz="1150" dirty="0"/>
+          </a:p>
+        </p:txBody>
+      </p:sp>
+      <p:sp>
+        <p:nvSpPr>
+          <p:cNvPr id="38" name="Text 36"/>
+          <p:cNvSpPr/>
+          <p:nvPr/>
+        </p:nvSpPr>
+        <p:spPr>
+          <a:xfrm>
+            <a:off x="457200" y="6473952"/>
+            <a:ext cx="9692640" cy="274320"/>
+          </a:xfrm>
+          <a:prstGeom prst="rect">
+            <a:avLst/>
+          </a:prstGeom>
+          <a:noFill/>
+          <a:ln/>
+        </p:spPr>
+        <p:txBody>
+          <a:bodyPr wrap="square" lIns="0" tIns="0" rIns="0" bIns="0" rtlCol="0" anchor="ctr"/>
+          <a:lstStyle/>
+          <a:p>
+            <a:pPr algn="l" indent="0" marL="0">
+              <a:buNone/>
+            </a:pPr>
+            <a:r>
+              <a:rPr lang="en-US" sz="850" dirty="0">
+                <a:solidFill>
+                  <a:srgbClr val="56606E"/>
+                </a:solidFill>
+                <a:latin typeface="Calibri" pitchFamily="34" charset="0"/>
+                <a:ea typeface="Calibri" pitchFamily="34" charset="-122"/>
+                <a:cs typeface="Calibri" pitchFamily="34" charset="-120"/>
+              </a:rPr>
+              <a:t>Fuente: REPORTE_GERENCIAL + Listado de Puntos Punch Consolidado · Corte 27-07-2026 · Atrasos al 27-07-2026</a:t>
+            </a:r>
+            <a:endParaRPr lang="en-US" sz="850" dirty="0"/>
+          </a:p>
+        </p:txBody>
+      </p:sp>
+      <p:sp>
+        <p:nvSpPr>
+          <p:cNvPr id="39" name="Text 37"/>
+          <p:cNvSpPr/>
+          <p:nvPr/>
+        </p:nvSpPr>
+        <p:spPr>
+          <a:xfrm>
+            <a:off x="11430000" y="6473952"/>
+            <a:ext cx="365760" cy="274320"/>
+          </a:xfrm>
+          <a:prstGeom prst="rect">
+            <a:avLst/>
+          </a:prstGeom>
+          <a:noFill/>
+          <a:ln/>
+        </p:spPr>
+        <p:txBody>
+          <a:bodyPr wrap="square" lIns="0" tIns="0" rIns="0" bIns="0" rtlCol="0" anchor="ctr"/>
+          <a:lstStyle/>
+          <a:p>
+            <a:pPr algn="r" indent="0" marL="0">
+              <a:buNone/>
+            </a:pPr>
+            <a:r>
+              <a:rPr lang="en-US" sz="900" dirty="0">
+                <a:solidFill>
+                  <a:srgbClr val="56606E"/>
+                </a:solidFill>
+                <a:latin typeface="Calibri" pitchFamily="34" charset="0"/>
+                <a:ea typeface="Calibri" pitchFamily="34" charset="-122"/>
+                <a:cs typeface="Calibri" pitchFamily="34" charset="-120"/>
+              </a:rPr>
+              <a:t>9</a:t>
             </a:r>
             <a:endParaRPr lang="en-US" sz="900" dirty="0"/>
           </a:p>

--- a/panel_control_TOP_P1/Panel_Control_TOP_P1.pptx
+++ b/panel_control_TOP_P1/Panel_Control_TOP_P1.pptx
@@ -17,9 +17,14 @@
     <p:sldId id="265" r:id="rId11"/>
     <p:sldId id="266" r:id="rId12"/>
     <p:sldId id="267" r:id="rId13"/>
+    <p:sldId id="268" r:id="rId14"/>
+    <p:sldId id="269" r:id="rId15"/>
+    <p:sldId id="270" r:id="rId16"/>
+    <p:sldId id="271" r:id="rId17"/>
+    <p:sldId id="272" r:id="rId18"/>
   </p:sldIdLst>
   <p:notesMasterIdLst>
-    <p:notesMasterId r:id="rId14"/>
+    <p:notesMasterId r:id="rId19"/>
   </p:notesMasterIdLst>
   <p:sldSz cx="12191695" cy="6858000"/>
   <p:notesSz cx="6858000" cy="12191695"/>
@@ -486,6 +491,396 @@
           <a:p>
             <a:pPr>
               <a:defRPr sz="1300" b="1" i="0" u="none" strike="noStrike">
+                <a:solidFill>
+                  <a:srgbClr val="1A2433"/>
+                </a:solidFill>
+                <a:latin typeface="Calibri"/>
+              </a:defRPr>
+            </a:pPr>
+            <a:endParaRPr lang="en-US"/>
+          </a:p>
+        </c:txPr>
+        <c:crossAx val="2094734552"/>
+        <c:crosses val="autoZero"/>
+        <c:auto val="1"/>
+        <c:lblAlgn val="ctr"/>
+        <c:noMultiLvlLbl val="1"/>
+      </c:catAx>
+      <c:valAx>
+        <c:axId val="2094734552"/>
+        <c:scaling>
+          <c:orientation val="minMax"/>
+        </c:scaling>
+        <c:delete val="1"/>
+        <c:axPos val="b"/>
+        <c:numFmt formatCode="General" sourceLinked="0"/>
+        <c:majorTickMark val="out"/>
+        <c:minorTickMark val="none"/>
+        <c:tickLblPos val="low"/>
+        <c:spPr>
+          <a:ln w="12700" cap="flat">
+            <a:solidFill>
+              <a:srgbClr val="888888"/>
+            </a:solidFill>
+            <a:prstDash val="solid"/>
+            <a:round/>
+          </a:ln>
+        </c:spPr>
+        <c:txPr>
+          <a:bodyPr/>
+          <a:lstStyle/>
+          <a:p>
+            <a:pPr>
+              <a:defRPr sz="1200" b="0" i="0" u="none" strike="noStrike">
+                <a:solidFill>
+                  <a:srgbClr val="000000"/>
+                </a:solidFill>
+                <a:latin typeface="Arial"/>
+              </a:defRPr>
+            </a:pPr>
+            <a:endParaRPr lang="en-US"/>
+          </a:p>
+        </c:txPr>
+        <c:crossAx val="2094734554"/>
+        <c:crosses val="autoZero"/>
+        <c:crossBetween val="between"/>
+      </c:valAx>
+      <c:spPr>
+        <a:noFill/>
+        <a:ln>
+          <a:noFill/>
+        </a:ln>
+        <a:effectLst/>
+      </c:spPr>
+    </c:plotArea>
+    <c:legend>
+      <c:legendPos val="b"/>
+      <c:overlay val="0"/>
+      <c:txPr>
+        <a:bodyPr/>
+        <a:lstStyle/>
+        <a:p>
+          <a:pPr>
+            <a:defRPr sz="1100">
+              <a:solidFill>
+                <a:srgbClr val="56606E"/>
+              </a:solidFill>
+              <a:latin typeface="Calibri"/>
+              <a:cs typeface="Calibri"/>
+            </a:defRPr>
+          </a:pPr>
+          <a:endParaRPr lang="en-US"/>
+        </a:p>
+      </c:txPr>
+    </c:legend>
+    <c:plotVisOnly val="1"/>
+    <c:dispBlanksAs val="span"/>
+  </c:chart>
+  <c:spPr>
+    <a:solidFill>
+      <a:srgbClr val="FFFFFF"/>
+    </a:solidFill>
+    <a:ln>
+      <a:noFill/>
+    </a:ln>
+    <a:effectLst/>
+  </c:spPr>
+  <c:externalData r:id="rId1">
+    <c:autoUpdate val="0"/>
+  </c:externalData>
+</c:chartSpace>
+</file>
+
+<file path=ppt/charts/chart10.xml><?xml version="1.0" encoding="utf-8"?>
+<c:chartSpace xmlns:c="http://schemas.openxmlformats.org/drawingml/2006/chart" xmlns:a="http://schemas.openxmlformats.org/drawingml/2006/main" xmlns:r="http://schemas.openxmlformats.org/officeDocument/2006/relationships">
+  <c:date1904 val="0"/>
+  <c:roundedCorners val="1"/>
+  <c:chart>
+    <c:title>
+      <c:tx>
+        <c:rich>
+          <a:bodyPr/>
+          <a:lstStyle/>
+          <a:p>
+            <a:pPr>
+              <a:defRPr sz="1300" b="0" i="0" u="none" strike="noStrike">
+                <a:solidFill>
+                  <a:srgbClr val="1A2433"/>
+                </a:solidFill>
+                <a:latin typeface="Calibri"/>
+              </a:defRPr>
+            </a:pPr>
+            <a:r>
+              <a:rPr sz="1300" b="0" i="0" u="none" strike="noStrike">
+                <a:solidFill>
+                  <a:srgbClr val="1A2433"/>
+                </a:solidFill>
+                <a:latin typeface="Calibri"/>
+              </a:rPr>
+              <a:t>DT abiertos por disciplina</a:t>
+            </a:r>
+          </a:p>
+        </c:rich>
+      </c:tx>
+      <c:layout/>
+      <c:overlay val="0"/>
+    </c:title>
+    <c:autoTitleDeleted val="0"/>
+    <c:plotArea>
+      <c:layout/>
+      <c:barChart>
+        <c:barDir val="bar"/>
+        <c:grouping val="stacked"/>
+        <c:varyColors val="0"/>
+        <c:ser>
+          <c:idx val="0"/>
+          <c:order val="0"/>
+          <c:tx>
+            <c:strRef>
+              <c:f>Sheet1!$B$1</c:f>
+              <c:strCache>
+                <c:ptCount val="1"/>
+                <c:pt idx="0">
+                  <c:v>Atrasados</c:v>
+                </c:pt>
+              </c:strCache>
+            </c:strRef>
+          </c:tx>
+          <c:spPr>
+            <a:solidFill>
+              <a:srgbClr val="C0392B"/>
+            </a:solidFill>
+            <a:effectLst/>
+          </c:spPr>
+          <c:invertIfNegative val="0"/>
+          <c:dLbls>
+            <c:numFmt formatCode="#,##0" sourceLinked="0"/>
+            <c:txPr>
+              <a:bodyPr/>
+              <a:lstStyle/>
+              <a:p>
+                <a:pPr>
+                  <a:defRPr b="1" i="0" strike="noStrike" sz="1000" u="none">
+                    <a:solidFill>
+                      <a:srgbClr val="FFFFFF"/>
+                    </a:solidFill>
+                    <a:latin typeface="Calibri"/>
+                  </a:defRPr>
+                </a:pPr>
+              </a:p>
+            </c:txPr>
+            <c:dLblPos val="ctr"/>
+            <c:showLegendKey val="0"/>
+            <c:showVal val="1"/>
+            <c:showCatName val="0"/>
+            <c:showSerName val="0"/>
+            <c:showPercent val="0"/>
+            <c:showBubbleSize val="0"/>
+            <c:showLeaderLines val="0"/>
+          </c:dLbls>
+          <c:cat>
+            <c:multiLvlStrRef>
+              <c:f>Sheet1!$A$2:$A$6</c:f>
+              <c:multiLvlStrCache>
+                <c:ptCount val="5"/>
+                <c:lvl>
+                  <c:pt idx="0">
+                    <c:v>Obras Civiles</c:v>
+                  </c:pt>
+                  <c:pt idx="1">
+                    <c:v>Piping</c:v>
+                  </c:pt>
+                  <c:pt idx="2">
+                    <c:v>Eléctrica</c:v>
+                  </c:pt>
+                  <c:pt idx="3">
+                    <c:v>Estructura</c:v>
+                  </c:pt>
+                  <c:pt idx="4">
+                    <c:v>Instr. y Control</c:v>
+                  </c:pt>
+                </c:lvl>
+              </c:multiLvlStrCache>
+            </c:multiLvlStrRef>
+          </c:cat>
+          <c:val>
+            <c:numRef>
+              <c:f>Sheet1!$B$2:$B$6</c:f>
+              <c:numCache>
+                <c:formatCode>General</c:formatCode>
+                <c:ptCount val="5"/>
+                <c:pt idx="0">
+                  <c:v>85</c:v>
+                </c:pt>
+                <c:pt idx="1">
+                  <c:v>63</c:v>
+                </c:pt>
+                <c:pt idx="2">
+                  <c:v>34</c:v>
+                </c:pt>
+                <c:pt idx="3">
+                  <c:v>6</c:v>
+                </c:pt>
+                <c:pt idx="4">
+                  <c:v>18</c:v>
+                </c:pt>
+              </c:numCache>
+            </c:numRef>
+          </c:val>
+        </c:ser>
+        <c:ser>
+          <c:idx val="1"/>
+          <c:order val="1"/>
+          <c:tx>
+            <c:strRef>
+              <c:f>Sheet1!$C$1</c:f>
+              <c:strCache>
+                <c:ptCount val="1"/>
+                <c:pt idx="0">
+                  <c:v>En plazo o sin compromiso</c:v>
+                </c:pt>
+              </c:strCache>
+            </c:strRef>
+          </c:tx>
+          <c:spPr>
+            <a:solidFill>
+              <a:srgbClr val="2E6FB5"/>
+            </a:solidFill>
+            <a:effectLst/>
+          </c:spPr>
+          <c:invertIfNegative val="0"/>
+          <c:dLbls>
+            <c:numFmt formatCode="#,##0" sourceLinked="0"/>
+            <c:txPr>
+              <a:bodyPr/>
+              <a:lstStyle/>
+              <a:p>
+                <a:pPr>
+                  <a:defRPr b="1" i="0" strike="noStrike" sz="1000" u="none">
+                    <a:solidFill>
+                      <a:srgbClr val="FFFFFF"/>
+                    </a:solidFill>
+                    <a:latin typeface="Calibri"/>
+                  </a:defRPr>
+                </a:pPr>
+              </a:p>
+            </c:txPr>
+            <c:dLblPos val="ctr"/>
+            <c:showLegendKey val="0"/>
+            <c:showVal val="1"/>
+            <c:showCatName val="0"/>
+            <c:showSerName val="0"/>
+            <c:showPercent val="0"/>
+            <c:showBubbleSize val="0"/>
+            <c:showLeaderLines val="0"/>
+          </c:dLbls>
+          <c:cat>
+            <c:multiLvlStrRef>
+              <c:f>Sheet1!$A$2:$A$6</c:f>
+              <c:multiLvlStrCache>
+                <c:ptCount val="5"/>
+                <c:lvl>
+                  <c:pt idx="0">
+                    <c:v>Obras Civiles</c:v>
+                  </c:pt>
+                  <c:pt idx="1">
+                    <c:v>Piping</c:v>
+                  </c:pt>
+                  <c:pt idx="2">
+                    <c:v>Eléctrica</c:v>
+                  </c:pt>
+                  <c:pt idx="3">
+                    <c:v>Estructura</c:v>
+                  </c:pt>
+                  <c:pt idx="4">
+                    <c:v>Instr. y Control</c:v>
+                  </c:pt>
+                </c:lvl>
+              </c:multiLvlStrCache>
+            </c:multiLvlStrRef>
+          </c:cat>
+          <c:val>
+            <c:numRef>
+              <c:f>Sheet1!$C$2:$C$6</c:f>
+              <c:numCache>
+                <c:formatCode>General</c:formatCode>
+                <c:ptCount val="5"/>
+                <c:pt idx="0">
+                  <c:v>119</c:v>
+                </c:pt>
+                <c:pt idx="1">
+                  <c:v>141</c:v>
+                </c:pt>
+                <c:pt idx="2">
+                  <c:v>5</c:v>
+                </c:pt>
+                <c:pt idx="3">
+                  <c:v>31</c:v>
+                </c:pt>
+                <c:pt idx="4">
+                  <c:v>3</c:v>
+                </c:pt>
+              </c:numCache>
+            </c:numRef>
+          </c:val>
+        </c:ser>
+        <c:dLbls>
+          <c:numFmt formatCode="#,##0" sourceLinked="0"/>
+          <c:txPr>
+            <a:bodyPr/>
+            <a:lstStyle/>
+            <a:p>
+              <a:pPr>
+                <a:defRPr b="1" i="0" strike="noStrike" sz="1000" u="none">
+                  <a:solidFill>
+                    <a:srgbClr val="FFFFFF"/>
+                  </a:solidFill>
+                  <a:latin typeface="Calibri"/>
+                </a:defRPr>
+              </a:pPr>
+            </a:p>
+          </c:txPr>
+          <c:dLblPos val="ctr"/>
+          <c:showLegendKey val="0"/>
+          <c:showVal val="1"/>
+          <c:showCatName val="0"/>
+          <c:showSerName val="0"/>
+          <c:showPercent val="0"/>
+          <c:showBubbleSize val="0"/>
+          <c:showLeaderLines val="0"/>
+        </c:dLbls>
+        <c:gapWidth val="45"/>
+        <c:overlap val="100"/>
+        <c:axId val="2094734554"/>
+        <c:axId val="2094734552"/>
+        <c:axId val="2094734556"/>
+      </c:barChart>
+      <c:catAx>
+        <c:axId val="2094734554"/>
+        <c:scaling>
+          <c:orientation val="minMax"/>
+        </c:scaling>
+        <c:delete val="0"/>
+        <c:axPos val="l"/>
+        <c:numFmt formatCode="General" sourceLinked="1"/>
+        <c:majorTickMark val="out"/>
+        <c:minorTickMark val="none"/>
+        <c:tickLblPos val="nextTo"/>
+        <c:spPr>
+          <a:ln w="12700" cap="flat">
+            <a:solidFill>
+              <a:srgbClr val="888888"/>
+            </a:solidFill>
+            <a:prstDash val="solid"/>
+            <a:round/>
+          </a:ln>
+        </c:spPr>
+        <c:txPr>
+          <a:bodyPr/>
+          <a:lstStyle/>
+          <a:p>
+            <a:pPr>
+              <a:defRPr sz="1150" b="1" i="0" u="none" strike="noStrike">
                 <a:solidFill>
                   <a:srgbClr val="1A2433"/>
                 </a:solidFill>
@@ -2804,6 +3199,1122 @@
 </c:chartSpace>
 </file>
 
+<file path=ppt/charts/chart8.xml><?xml version="1.0" encoding="utf-8"?>
+<c:chartSpace xmlns:c="http://schemas.openxmlformats.org/drawingml/2006/chart" xmlns:a="http://schemas.openxmlformats.org/drawingml/2006/main" xmlns:r="http://schemas.openxmlformats.org/officeDocument/2006/relationships">
+  <c:date1904 val="0"/>
+  <c:roundedCorners val="1"/>
+  <c:chart>
+    <c:title>
+      <c:tx>
+        <c:rich>
+          <a:bodyPr/>
+          <a:lstStyle/>
+          <a:p>
+            <a:pPr>
+              <a:defRPr sz="1300" b="0" i="0" u="none" strike="noStrike">
+                <a:solidFill>
+                  <a:srgbClr val="1A2433"/>
+                </a:solidFill>
+                <a:latin typeface="Calibri"/>
+              </a:defRPr>
+            </a:pPr>
+            <a:r>
+              <a:rPr sz="1300" b="0" i="0" u="none" strike="noStrike">
+                <a:solidFill>
+                  <a:srgbClr val="1A2433"/>
+                </a:solidFill>
+                <a:latin typeface="Calibri"/>
+              </a:rPr>
+              <a:t>Caminata 2 por área</a:t>
+            </a:r>
+          </a:p>
+        </c:rich>
+      </c:tx>
+      <c:layout/>
+      <c:overlay val="0"/>
+    </c:title>
+    <c:autoTitleDeleted val="0"/>
+    <c:plotArea>
+      <c:layout/>
+      <c:barChart>
+        <c:barDir val="bar"/>
+        <c:grouping val="stacked"/>
+        <c:varyColors val="0"/>
+        <c:ser>
+          <c:idx val="0"/>
+          <c:order val="0"/>
+          <c:tx>
+            <c:strRef>
+              <c:f>Sheet1!$B$1</c:f>
+              <c:strCache>
+                <c:ptCount val="1"/>
+                <c:pt idx="0">
+                  <c:v>Realizada</c:v>
+                </c:pt>
+              </c:strCache>
+            </c:strRef>
+          </c:tx>
+          <c:spPr>
+            <a:solidFill>
+              <a:srgbClr val="1F7A44"/>
+            </a:solidFill>
+            <a:effectLst/>
+          </c:spPr>
+          <c:invertIfNegative val="0"/>
+          <c:dLbls>
+            <c:numFmt formatCode="#,##0" sourceLinked="0"/>
+            <c:txPr>
+              <a:bodyPr/>
+              <a:lstStyle/>
+              <a:p>
+                <a:pPr>
+                  <a:defRPr b="1" i="0" strike="noStrike" sz="950" u="none">
+                    <a:solidFill>
+                      <a:srgbClr val="FFFFFF"/>
+                    </a:solidFill>
+                    <a:latin typeface="Calibri"/>
+                  </a:defRPr>
+                </a:pPr>
+              </a:p>
+            </c:txPr>
+            <c:dLblPos val="ctr"/>
+            <c:showLegendKey val="0"/>
+            <c:showVal val="1"/>
+            <c:showCatName val="0"/>
+            <c:showSerName val="0"/>
+            <c:showPercent val="0"/>
+            <c:showBubbleSize val="0"/>
+            <c:showLeaderLines val="0"/>
+          </c:dLbls>
+          <c:cat>
+            <c:multiLvlStrRef>
+              <c:f>Sheet1!$A$2:$A$10</c:f>
+              <c:multiLvlStrCache>
+                <c:ptCount val="9"/>
+                <c:lvl>
+                  <c:pt idx="0">
+                    <c:v>CERRO VERDE/PS2</c:v>
+                  </c:pt>
+                  <c:pt idx="1">
+                    <c:v>EBMP</c:v>
+                  </c:pt>
+                  <c:pt idx="2">
+                    <c:v>EBMS</c:v>
+                  </c:pt>
+                  <c:pt idx="3">
+                    <c:v>IMPULSIÓN ADUCCIÓN</c:v>
+                  </c:pt>
+                  <c:pt idx="4">
+                    <c:v>LÍNEAS IMPULSIÓN</c:v>
+                  </c:pt>
+                  <c:pt idx="5">
+                    <c:v>PISCINAS Y SEDIMENTADOR</c:v>
+                  </c:pt>
+                  <c:pt idx="6">
+                    <c:v>POZOS</c:v>
+                  </c:pt>
+                  <c:pt idx="7">
+                    <c:v>PQS</c:v>
+                  </c:pt>
+                  <c:pt idx="8">
+                    <c:v>SALA GAR</c:v>
+                  </c:pt>
+                </c:lvl>
+              </c:multiLvlStrCache>
+            </c:multiLvlStrRef>
+          </c:cat>
+          <c:val>
+            <c:numRef>
+              <c:f>Sheet1!$B$2:$B$10</c:f>
+              <c:numCache>
+                <c:formatCode>General</c:formatCode>
+                <c:ptCount val="9"/>
+                <c:pt idx="0">
+                  <c:v>0</c:v>
+                </c:pt>
+                <c:pt idx="1">
+                  <c:v>18</c:v>
+                </c:pt>
+                <c:pt idx="2">
+                  <c:v>22</c:v>
+                </c:pt>
+                <c:pt idx="3">
+                  <c:v>3</c:v>
+                </c:pt>
+                <c:pt idx="4">
+                  <c:v>14</c:v>
+                </c:pt>
+                <c:pt idx="5">
+                  <c:v>5</c:v>
+                </c:pt>
+                <c:pt idx="6">
+                  <c:v>88</c:v>
+                </c:pt>
+                <c:pt idx="7">
+                  <c:v>12</c:v>
+                </c:pt>
+                <c:pt idx="8">
+                  <c:v>8</c:v>
+                </c:pt>
+              </c:numCache>
+            </c:numRef>
+          </c:val>
+        </c:ser>
+        <c:ser>
+          <c:idx val="1"/>
+          <c:order val="1"/>
+          <c:tx>
+            <c:strRef>
+              <c:f>Sheet1!$C$1</c:f>
+              <c:strCache>
+                <c:ptCount val="1"/>
+                <c:pt idx="0">
+                  <c:v>Agendada</c:v>
+                </c:pt>
+              </c:strCache>
+            </c:strRef>
+          </c:tx>
+          <c:spPr>
+            <a:solidFill>
+              <a:srgbClr val="2E6FB5"/>
+            </a:solidFill>
+            <a:effectLst/>
+          </c:spPr>
+          <c:invertIfNegative val="0"/>
+          <c:dLbls>
+            <c:numFmt formatCode="#,##0" sourceLinked="0"/>
+            <c:txPr>
+              <a:bodyPr/>
+              <a:lstStyle/>
+              <a:p>
+                <a:pPr>
+                  <a:defRPr b="1" i="0" strike="noStrike" sz="950" u="none">
+                    <a:solidFill>
+                      <a:srgbClr val="FFFFFF"/>
+                    </a:solidFill>
+                    <a:latin typeface="Calibri"/>
+                  </a:defRPr>
+                </a:pPr>
+              </a:p>
+            </c:txPr>
+            <c:dLblPos val="ctr"/>
+            <c:showLegendKey val="0"/>
+            <c:showVal val="1"/>
+            <c:showCatName val="0"/>
+            <c:showSerName val="0"/>
+            <c:showPercent val="0"/>
+            <c:showBubbleSize val="0"/>
+            <c:showLeaderLines val="0"/>
+          </c:dLbls>
+          <c:cat>
+            <c:multiLvlStrRef>
+              <c:f>Sheet1!$A$2:$A$10</c:f>
+              <c:multiLvlStrCache>
+                <c:ptCount val="9"/>
+                <c:lvl>
+                  <c:pt idx="0">
+                    <c:v>CERRO VERDE/PS2</c:v>
+                  </c:pt>
+                  <c:pt idx="1">
+                    <c:v>EBMP</c:v>
+                  </c:pt>
+                  <c:pt idx="2">
+                    <c:v>EBMS</c:v>
+                  </c:pt>
+                  <c:pt idx="3">
+                    <c:v>IMPULSIÓN ADUCCIÓN</c:v>
+                  </c:pt>
+                  <c:pt idx="4">
+                    <c:v>LÍNEAS IMPULSIÓN</c:v>
+                  </c:pt>
+                  <c:pt idx="5">
+                    <c:v>PISCINAS Y SEDIMENTADOR</c:v>
+                  </c:pt>
+                  <c:pt idx="6">
+                    <c:v>POZOS</c:v>
+                  </c:pt>
+                  <c:pt idx="7">
+                    <c:v>PQS</c:v>
+                  </c:pt>
+                  <c:pt idx="8">
+                    <c:v>SALA GAR</c:v>
+                  </c:pt>
+                </c:lvl>
+              </c:multiLvlStrCache>
+            </c:multiLvlStrRef>
+          </c:cat>
+          <c:val>
+            <c:numRef>
+              <c:f>Sheet1!$C$2:$C$10</c:f>
+              <c:numCache>
+                <c:formatCode>General</c:formatCode>
+                <c:ptCount val="9"/>
+                <c:pt idx="0">
+                  <c:v>2</c:v>
+                </c:pt>
+                <c:pt idx="1">
+                  <c:v>0</c:v>
+                </c:pt>
+                <c:pt idx="2">
+                  <c:v>0</c:v>
+                </c:pt>
+                <c:pt idx="3">
+                  <c:v>0</c:v>
+                </c:pt>
+                <c:pt idx="4">
+                  <c:v>0</c:v>
+                </c:pt>
+                <c:pt idx="5">
+                  <c:v>16</c:v>
+                </c:pt>
+                <c:pt idx="6">
+                  <c:v>22</c:v>
+                </c:pt>
+                <c:pt idx="7">
+                  <c:v>0</c:v>
+                </c:pt>
+                <c:pt idx="8">
+                  <c:v>0</c:v>
+                </c:pt>
+              </c:numCache>
+            </c:numRef>
+          </c:val>
+        </c:ser>
+        <c:ser>
+          <c:idx val="2"/>
+          <c:order val="2"/>
+          <c:tx>
+            <c:strRef>
+              <c:f>Sheet1!$D$1</c:f>
+              <c:strCache>
+                <c:ptCount val="1"/>
+                <c:pt idx="0">
+                  <c:v>Sin programar</c:v>
+                </c:pt>
+              </c:strCache>
+            </c:strRef>
+          </c:tx>
+          <c:spPr>
+            <a:solidFill>
+              <a:srgbClr val="D9DFE6"/>
+            </a:solidFill>
+            <a:effectLst/>
+          </c:spPr>
+          <c:invertIfNegative val="0"/>
+          <c:dLbls>
+            <c:numFmt formatCode="#,##0" sourceLinked="0"/>
+            <c:txPr>
+              <a:bodyPr/>
+              <a:lstStyle/>
+              <a:p>
+                <a:pPr>
+                  <a:defRPr b="1" i="0" strike="noStrike" sz="950" u="none">
+                    <a:solidFill>
+                      <a:srgbClr val="FFFFFF"/>
+                    </a:solidFill>
+                    <a:latin typeface="Calibri"/>
+                  </a:defRPr>
+                </a:pPr>
+              </a:p>
+            </c:txPr>
+            <c:dLblPos val="ctr"/>
+            <c:showLegendKey val="0"/>
+            <c:showVal val="1"/>
+            <c:showCatName val="0"/>
+            <c:showSerName val="0"/>
+            <c:showPercent val="0"/>
+            <c:showBubbleSize val="0"/>
+            <c:showLeaderLines val="0"/>
+          </c:dLbls>
+          <c:cat>
+            <c:multiLvlStrRef>
+              <c:f>Sheet1!$A$2:$A$10</c:f>
+              <c:multiLvlStrCache>
+                <c:ptCount val="9"/>
+                <c:lvl>
+                  <c:pt idx="0">
+                    <c:v>CERRO VERDE/PS2</c:v>
+                  </c:pt>
+                  <c:pt idx="1">
+                    <c:v>EBMP</c:v>
+                  </c:pt>
+                  <c:pt idx="2">
+                    <c:v>EBMS</c:v>
+                  </c:pt>
+                  <c:pt idx="3">
+                    <c:v>IMPULSIÓN ADUCCIÓN</c:v>
+                  </c:pt>
+                  <c:pt idx="4">
+                    <c:v>LÍNEAS IMPULSIÓN</c:v>
+                  </c:pt>
+                  <c:pt idx="5">
+                    <c:v>PISCINAS Y SEDIMENTADOR</c:v>
+                  </c:pt>
+                  <c:pt idx="6">
+                    <c:v>POZOS</c:v>
+                  </c:pt>
+                  <c:pt idx="7">
+                    <c:v>PQS</c:v>
+                  </c:pt>
+                  <c:pt idx="8">
+                    <c:v>SALA GAR</c:v>
+                  </c:pt>
+                </c:lvl>
+              </c:multiLvlStrCache>
+            </c:multiLvlStrRef>
+          </c:cat>
+          <c:val>
+            <c:numRef>
+              <c:f>Sheet1!$D$2:$D$10</c:f>
+              <c:numCache>
+                <c:formatCode>General</c:formatCode>
+                <c:ptCount val="9"/>
+                <c:pt idx="0">
+                  <c:v>1</c:v>
+                </c:pt>
+                <c:pt idx="1">
+                  <c:v>2</c:v>
+                </c:pt>
+                <c:pt idx="2">
+                  <c:v>4</c:v>
+                </c:pt>
+                <c:pt idx="3">
+                  <c:v>0</c:v>
+                </c:pt>
+                <c:pt idx="4">
+                  <c:v>0</c:v>
+                </c:pt>
+                <c:pt idx="5">
+                  <c:v>1</c:v>
+                </c:pt>
+                <c:pt idx="6">
+                  <c:v>0</c:v>
+                </c:pt>
+                <c:pt idx="7">
+                  <c:v>1</c:v>
+                </c:pt>
+                <c:pt idx="8">
+                  <c:v>0</c:v>
+                </c:pt>
+              </c:numCache>
+            </c:numRef>
+          </c:val>
+        </c:ser>
+        <c:dLbls>
+          <c:numFmt formatCode="#,##0" sourceLinked="0"/>
+          <c:txPr>
+            <a:bodyPr/>
+            <a:lstStyle/>
+            <a:p>
+              <a:pPr>
+                <a:defRPr b="1" i="0" strike="noStrike" sz="950" u="none">
+                  <a:solidFill>
+                    <a:srgbClr val="FFFFFF"/>
+                  </a:solidFill>
+                  <a:latin typeface="Calibri"/>
+                </a:defRPr>
+              </a:pPr>
+            </a:p>
+          </c:txPr>
+          <c:dLblPos val="ctr"/>
+          <c:showLegendKey val="0"/>
+          <c:showVal val="1"/>
+          <c:showCatName val="0"/>
+          <c:showSerName val="0"/>
+          <c:showPercent val="0"/>
+          <c:showBubbleSize val="0"/>
+          <c:showLeaderLines val="0"/>
+        </c:dLbls>
+        <c:gapWidth val="40"/>
+        <c:overlap val="100"/>
+        <c:axId val="2094734554"/>
+        <c:axId val="2094734552"/>
+        <c:axId val="2094734556"/>
+      </c:barChart>
+      <c:catAx>
+        <c:axId val="2094734554"/>
+        <c:scaling>
+          <c:orientation val="minMax"/>
+        </c:scaling>
+        <c:delete val="0"/>
+        <c:axPos val="l"/>
+        <c:numFmt formatCode="General" sourceLinked="1"/>
+        <c:majorTickMark val="out"/>
+        <c:minorTickMark val="none"/>
+        <c:tickLblPos val="nextTo"/>
+        <c:spPr>
+          <a:ln w="12700" cap="flat">
+            <a:solidFill>
+              <a:srgbClr val="888888"/>
+            </a:solidFill>
+            <a:prstDash val="solid"/>
+            <a:round/>
+          </a:ln>
+        </c:spPr>
+        <c:txPr>
+          <a:bodyPr/>
+          <a:lstStyle/>
+          <a:p>
+            <a:pPr>
+              <a:defRPr sz="950" b="1" i="0" u="none" strike="noStrike">
+                <a:solidFill>
+                  <a:srgbClr val="1A2433"/>
+                </a:solidFill>
+                <a:latin typeface="Calibri"/>
+              </a:defRPr>
+            </a:pPr>
+            <a:endParaRPr lang="en-US"/>
+          </a:p>
+        </c:txPr>
+        <c:crossAx val="2094734552"/>
+        <c:crosses val="autoZero"/>
+        <c:auto val="1"/>
+        <c:lblAlgn val="ctr"/>
+        <c:noMultiLvlLbl val="1"/>
+      </c:catAx>
+      <c:valAx>
+        <c:axId val="2094734552"/>
+        <c:scaling>
+          <c:orientation val="minMax"/>
+        </c:scaling>
+        <c:delete val="1"/>
+        <c:axPos val="b"/>
+        <c:numFmt formatCode="General" sourceLinked="0"/>
+        <c:majorTickMark val="out"/>
+        <c:minorTickMark val="none"/>
+        <c:tickLblPos val="low"/>
+        <c:spPr>
+          <a:ln w="12700" cap="flat">
+            <a:solidFill>
+              <a:srgbClr val="888888"/>
+            </a:solidFill>
+            <a:prstDash val="solid"/>
+            <a:round/>
+          </a:ln>
+        </c:spPr>
+        <c:txPr>
+          <a:bodyPr/>
+          <a:lstStyle/>
+          <a:p>
+            <a:pPr>
+              <a:defRPr sz="1200" b="0" i="0" u="none" strike="noStrike">
+                <a:solidFill>
+                  <a:srgbClr val="000000"/>
+                </a:solidFill>
+                <a:latin typeface="Arial"/>
+              </a:defRPr>
+            </a:pPr>
+            <a:endParaRPr lang="en-US"/>
+          </a:p>
+        </c:txPr>
+        <c:crossAx val="2094734554"/>
+        <c:crosses val="autoZero"/>
+        <c:crossBetween val="between"/>
+      </c:valAx>
+      <c:spPr>
+        <a:noFill/>
+        <a:ln>
+          <a:noFill/>
+        </a:ln>
+        <a:effectLst/>
+      </c:spPr>
+    </c:plotArea>
+    <c:legend>
+      <c:legendPos val="b"/>
+      <c:overlay val="0"/>
+      <c:txPr>
+        <a:bodyPr/>
+        <a:lstStyle/>
+        <a:p>
+          <a:pPr>
+            <a:defRPr sz="1050">
+              <a:solidFill>
+                <a:srgbClr val="56606E"/>
+              </a:solidFill>
+              <a:latin typeface="Calibri"/>
+              <a:cs typeface="Calibri"/>
+            </a:defRPr>
+          </a:pPr>
+          <a:endParaRPr lang="en-US"/>
+        </a:p>
+      </c:txPr>
+    </c:legend>
+    <c:plotVisOnly val="1"/>
+    <c:dispBlanksAs val="span"/>
+  </c:chart>
+  <c:spPr>
+    <a:solidFill>
+      <a:srgbClr val="FFFFFF"/>
+    </a:solidFill>
+    <a:ln>
+      <a:noFill/>
+    </a:ln>
+    <a:effectLst/>
+  </c:spPr>
+  <c:externalData r:id="rId1">
+    <c:autoUpdate val="0"/>
+  </c:externalData>
+</c:chartSpace>
+</file>
+
+<file path=ppt/charts/chart9.xml><?xml version="1.0" encoding="utf-8"?>
+<c:chartSpace xmlns:c="http://schemas.openxmlformats.org/drawingml/2006/chart" xmlns:a="http://schemas.openxmlformats.org/drawingml/2006/main" xmlns:r="http://schemas.openxmlformats.org/officeDocument/2006/relationships">
+  <c:date1904 val="0"/>
+  <c:roundedCorners val="1"/>
+  <c:chart>
+    <c:title>
+      <c:tx>
+        <c:rich>
+          <a:bodyPr/>
+          <a:lstStyle/>
+          <a:p>
+            <a:pPr>
+              <a:defRPr sz="1300" b="0" i="0" u="none" strike="noStrike">
+                <a:solidFill>
+                  <a:srgbClr val="1A2433"/>
+                </a:solidFill>
+                <a:latin typeface="Calibri"/>
+              </a:defRPr>
+            </a:pPr>
+            <a:r>
+              <a:rPr sz="1300" b="0" i="0" u="none" strike="noStrike">
+                <a:solidFill>
+                  <a:srgbClr val="1A2433"/>
+                </a:solidFill>
+                <a:latin typeface="Calibri"/>
+              </a:rPr>
+              <a:t>Avance PEC de carpetas por área</a:t>
+            </a:r>
+          </a:p>
+        </c:rich>
+      </c:tx>
+      <c:layout/>
+      <c:overlay val="0"/>
+    </c:title>
+    <c:autoTitleDeleted val="0"/>
+    <c:plotArea>
+      <c:layout/>
+      <c:barChart>
+        <c:barDir val="bar"/>
+        <c:grouping val="stacked"/>
+        <c:varyColors val="0"/>
+        <c:ser>
+          <c:idx val="0"/>
+          <c:order val="0"/>
+          <c:tx>
+            <c:strRef>
+              <c:f>Sheet1!$B$1</c:f>
+              <c:strCache>
+                <c:ptCount val="1"/>
+                <c:pt idx="0">
+                  <c:v>95% o más</c:v>
+                </c:pt>
+              </c:strCache>
+            </c:strRef>
+          </c:tx>
+          <c:spPr>
+            <a:solidFill>
+              <a:srgbClr val="2E9E5B"/>
+            </a:solidFill>
+            <a:effectLst/>
+          </c:spPr>
+          <c:invertIfNegative val="0"/>
+          <c:dLbls>
+            <c:numFmt formatCode="#,##0" sourceLinked="0"/>
+            <c:txPr>
+              <a:bodyPr/>
+              <a:lstStyle/>
+              <a:p>
+                <a:pPr>
+                  <a:defRPr b="1" i="0" strike="noStrike" sz="950" u="none">
+                    <a:solidFill>
+                      <a:srgbClr val="FFFFFF"/>
+                    </a:solidFill>
+                    <a:latin typeface="Calibri"/>
+                  </a:defRPr>
+                </a:pPr>
+              </a:p>
+            </c:txPr>
+            <c:dLblPos val="ctr"/>
+            <c:showLegendKey val="0"/>
+            <c:showVal val="1"/>
+            <c:showCatName val="0"/>
+            <c:showSerName val="0"/>
+            <c:showPercent val="0"/>
+            <c:showBubbleSize val="0"/>
+            <c:showLeaderLines val="0"/>
+          </c:dLbls>
+          <c:cat>
+            <c:multiLvlStrRef>
+              <c:f>Sheet1!$A$2:$A$10</c:f>
+              <c:multiLvlStrCache>
+                <c:ptCount val="9"/>
+                <c:lvl>
+                  <c:pt idx="0">
+                    <c:v>CERRO VERDE/PS2</c:v>
+                  </c:pt>
+                  <c:pt idx="1">
+                    <c:v>EBMP</c:v>
+                  </c:pt>
+                  <c:pt idx="2">
+                    <c:v>EBMS</c:v>
+                  </c:pt>
+                  <c:pt idx="3">
+                    <c:v>IMPULSIÓN ADUCCIÓN</c:v>
+                  </c:pt>
+                  <c:pt idx="4">
+                    <c:v>LÍNEAS IMPULSIÓN</c:v>
+                  </c:pt>
+                  <c:pt idx="5">
+                    <c:v>PISCINAS Y SEDIMENTADOR</c:v>
+                  </c:pt>
+                  <c:pt idx="6">
+                    <c:v>POZOS</c:v>
+                  </c:pt>
+                  <c:pt idx="7">
+                    <c:v>PQS</c:v>
+                  </c:pt>
+                  <c:pt idx="8">
+                    <c:v>SALA GAR</c:v>
+                  </c:pt>
+                </c:lvl>
+              </c:multiLvlStrCache>
+            </c:multiLvlStrRef>
+          </c:cat>
+          <c:val>
+            <c:numRef>
+              <c:f>Sheet1!$B$2:$B$10</c:f>
+              <c:numCache>
+                <c:formatCode>General</c:formatCode>
+                <c:ptCount val="9"/>
+                <c:pt idx="0">
+                  <c:v>2</c:v>
+                </c:pt>
+                <c:pt idx="1">
+                  <c:v>18</c:v>
+                </c:pt>
+                <c:pt idx="2">
+                  <c:v>16</c:v>
+                </c:pt>
+                <c:pt idx="3">
+                  <c:v>3</c:v>
+                </c:pt>
+                <c:pt idx="4">
+                  <c:v>10</c:v>
+                </c:pt>
+                <c:pt idx="5">
+                  <c:v>6</c:v>
+                </c:pt>
+                <c:pt idx="6">
+                  <c:v>88</c:v>
+                </c:pt>
+                <c:pt idx="7">
+                  <c:v>8</c:v>
+                </c:pt>
+                <c:pt idx="8">
+                  <c:v>8</c:v>
+                </c:pt>
+              </c:numCache>
+            </c:numRef>
+          </c:val>
+        </c:ser>
+        <c:ser>
+          <c:idx val="1"/>
+          <c:order val="1"/>
+          <c:tx>
+            <c:strRef>
+              <c:f>Sheet1!$C$1</c:f>
+              <c:strCache>
+                <c:ptCount val="1"/>
+                <c:pt idx="0">
+                  <c:v>80% a 95%</c:v>
+                </c:pt>
+              </c:strCache>
+            </c:strRef>
+          </c:tx>
+          <c:spPr>
+            <a:solidFill>
+              <a:srgbClr val="2E6FB5"/>
+            </a:solidFill>
+            <a:effectLst/>
+          </c:spPr>
+          <c:invertIfNegative val="0"/>
+          <c:dLbls>
+            <c:numFmt formatCode="#,##0" sourceLinked="0"/>
+            <c:txPr>
+              <a:bodyPr/>
+              <a:lstStyle/>
+              <a:p>
+                <a:pPr>
+                  <a:defRPr b="1" i="0" strike="noStrike" sz="950" u="none">
+                    <a:solidFill>
+                      <a:srgbClr val="FFFFFF"/>
+                    </a:solidFill>
+                    <a:latin typeface="Calibri"/>
+                  </a:defRPr>
+                </a:pPr>
+              </a:p>
+            </c:txPr>
+            <c:dLblPos val="ctr"/>
+            <c:showLegendKey val="0"/>
+            <c:showVal val="1"/>
+            <c:showCatName val="0"/>
+            <c:showSerName val="0"/>
+            <c:showPercent val="0"/>
+            <c:showBubbleSize val="0"/>
+            <c:showLeaderLines val="0"/>
+          </c:dLbls>
+          <c:cat>
+            <c:multiLvlStrRef>
+              <c:f>Sheet1!$A$2:$A$10</c:f>
+              <c:multiLvlStrCache>
+                <c:ptCount val="9"/>
+                <c:lvl>
+                  <c:pt idx="0">
+                    <c:v>CERRO VERDE/PS2</c:v>
+                  </c:pt>
+                  <c:pt idx="1">
+                    <c:v>EBMP</c:v>
+                  </c:pt>
+                  <c:pt idx="2">
+                    <c:v>EBMS</c:v>
+                  </c:pt>
+                  <c:pt idx="3">
+                    <c:v>IMPULSIÓN ADUCCIÓN</c:v>
+                  </c:pt>
+                  <c:pt idx="4">
+                    <c:v>LÍNEAS IMPULSIÓN</c:v>
+                  </c:pt>
+                  <c:pt idx="5">
+                    <c:v>PISCINAS Y SEDIMENTADOR</c:v>
+                  </c:pt>
+                  <c:pt idx="6">
+                    <c:v>POZOS</c:v>
+                  </c:pt>
+                  <c:pt idx="7">
+                    <c:v>PQS</c:v>
+                  </c:pt>
+                  <c:pt idx="8">
+                    <c:v>SALA GAR</c:v>
+                  </c:pt>
+                </c:lvl>
+              </c:multiLvlStrCache>
+            </c:multiLvlStrRef>
+          </c:cat>
+          <c:val>
+            <c:numRef>
+              <c:f>Sheet1!$C$2:$C$10</c:f>
+              <c:numCache>
+                <c:formatCode>General</c:formatCode>
+                <c:ptCount val="9"/>
+                <c:pt idx="0">
+                  <c:v>0</c:v>
+                </c:pt>
+                <c:pt idx="1">
+                  <c:v>1</c:v>
+                </c:pt>
+                <c:pt idx="2">
+                  <c:v>7</c:v>
+                </c:pt>
+                <c:pt idx="3">
+                  <c:v>0</c:v>
+                </c:pt>
+                <c:pt idx="4">
+                  <c:v>3</c:v>
+                </c:pt>
+                <c:pt idx="5">
+                  <c:v>13</c:v>
+                </c:pt>
+                <c:pt idx="6">
+                  <c:v>22</c:v>
+                </c:pt>
+                <c:pt idx="7">
+                  <c:v>4</c:v>
+                </c:pt>
+                <c:pt idx="8">
+                  <c:v>0</c:v>
+                </c:pt>
+              </c:numCache>
+            </c:numRef>
+          </c:val>
+        </c:ser>
+        <c:ser>
+          <c:idx val="2"/>
+          <c:order val="2"/>
+          <c:tx>
+            <c:strRef>
+              <c:f>Sheet1!$D$1</c:f>
+              <c:strCache>
+                <c:ptCount val="1"/>
+                <c:pt idx="0">
+                  <c:v>Bajo 80%</c:v>
+                </c:pt>
+              </c:strCache>
+            </c:strRef>
+          </c:tx>
+          <c:spPr>
+            <a:solidFill>
+              <a:srgbClr val="C0392B"/>
+            </a:solidFill>
+            <a:effectLst/>
+          </c:spPr>
+          <c:invertIfNegative val="0"/>
+          <c:dLbls>
+            <c:numFmt formatCode="#,##0" sourceLinked="0"/>
+            <c:txPr>
+              <a:bodyPr/>
+              <a:lstStyle/>
+              <a:p>
+                <a:pPr>
+                  <a:defRPr b="1" i="0" strike="noStrike" sz="950" u="none">
+                    <a:solidFill>
+                      <a:srgbClr val="FFFFFF"/>
+                    </a:solidFill>
+                    <a:latin typeface="Calibri"/>
+                  </a:defRPr>
+                </a:pPr>
+              </a:p>
+            </c:txPr>
+            <c:dLblPos val="ctr"/>
+            <c:showLegendKey val="0"/>
+            <c:showVal val="1"/>
+            <c:showCatName val="0"/>
+            <c:showSerName val="0"/>
+            <c:showPercent val="0"/>
+            <c:showBubbleSize val="0"/>
+            <c:showLeaderLines val="0"/>
+          </c:dLbls>
+          <c:cat>
+            <c:multiLvlStrRef>
+              <c:f>Sheet1!$A$2:$A$10</c:f>
+              <c:multiLvlStrCache>
+                <c:ptCount val="9"/>
+                <c:lvl>
+                  <c:pt idx="0">
+                    <c:v>CERRO VERDE/PS2</c:v>
+                  </c:pt>
+                  <c:pt idx="1">
+                    <c:v>EBMP</c:v>
+                  </c:pt>
+                  <c:pt idx="2">
+                    <c:v>EBMS</c:v>
+                  </c:pt>
+                  <c:pt idx="3">
+                    <c:v>IMPULSIÓN ADUCCIÓN</c:v>
+                  </c:pt>
+                  <c:pt idx="4">
+                    <c:v>LÍNEAS IMPULSIÓN</c:v>
+                  </c:pt>
+                  <c:pt idx="5">
+                    <c:v>PISCINAS Y SEDIMENTADOR</c:v>
+                  </c:pt>
+                  <c:pt idx="6">
+                    <c:v>POZOS</c:v>
+                  </c:pt>
+                  <c:pt idx="7">
+                    <c:v>PQS</c:v>
+                  </c:pt>
+                  <c:pt idx="8">
+                    <c:v>SALA GAR</c:v>
+                  </c:pt>
+                </c:lvl>
+              </c:multiLvlStrCache>
+            </c:multiLvlStrRef>
+          </c:cat>
+          <c:val>
+            <c:numRef>
+              <c:f>Sheet1!$D$2:$D$10</c:f>
+              <c:numCache>
+                <c:formatCode>General</c:formatCode>
+                <c:ptCount val="9"/>
+                <c:pt idx="0">
+                  <c:v>1</c:v>
+                </c:pt>
+                <c:pt idx="1">
+                  <c:v>1</c:v>
+                </c:pt>
+                <c:pt idx="2">
+                  <c:v>3</c:v>
+                </c:pt>
+                <c:pt idx="3">
+                  <c:v>0</c:v>
+                </c:pt>
+                <c:pt idx="4">
+                  <c:v>1</c:v>
+                </c:pt>
+                <c:pt idx="5">
+                  <c:v>3</c:v>
+                </c:pt>
+                <c:pt idx="6">
+                  <c:v>0</c:v>
+                </c:pt>
+                <c:pt idx="7">
+                  <c:v>1</c:v>
+                </c:pt>
+                <c:pt idx="8">
+                  <c:v>0</c:v>
+                </c:pt>
+              </c:numCache>
+            </c:numRef>
+          </c:val>
+        </c:ser>
+        <c:dLbls>
+          <c:numFmt formatCode="#,##0" sourceLinked="0"/>
+          <c:txPr>
+            <a:bodyPr/>
+            <a:lstStyle/>
+            <a:p>
+              <a:pPr>
+                <a:defRPr b="1" i="0" strike="noStrike" sz="950" u="none">
+                  <a:solidFill>
+                    <a:srgbClr val="FFFFFF"/>
+                  </a:solidFill>
+                  <a:latin typeface="Calibri"/>
+                </a:defRPr>
+              </a:pPr>
+            </a:p>
+          </c:txPr>
+          <c:dLblPos val="ctr"/>
+          <c:showLegendKey val="0"/>
+          <c:showVal val="1"/>
+          <c:showCatName val="0"/>
+          <c:showSerName val="0"/>
+          <c:showPercent val="0"/>
+          <c:showBubbleSize val="0"/>
+          <c:showLeaderLines val="0"/>
+        </c:dLbls>
+        <c:gapWidth val="40"/>
+        <c:overlap val="100"/>
+        <c:axId val="2094734554"/>
+        <c:axId val="2094734552"/>
+        <c:axId val="2094734556"/>
+      </c:barChart>
+      <c:catAx>
+        <c:axId val="2094734554"/>
+        <c:scaling>
+          <c:orientation val="minMax"/>
+        </c:scaling>
+        <c:delete val="0"/>
+        <c:axPos val="l"/>
+        <c:numFmt formatCode="General" sourceLinked="1"/>
+        <c:majorTickMark val="out"/>
+        <c:minorTickMark val="none"/>
+        <c:tickLblPos val="nextTo"/>
+        <c:spPr>
+          <a:ln w="12700" cap="flat">
+            <a:solidFill>
+              <a:srgbClr val="888888"/>
+            </a:solidFill>
+            <a:prstDash val="solid"/>
+            <a:round/>
+          </a:ln>
+        </c:spPr>
+        <c:txPr>
+          <a:bodyPr/>
+          <a:lstStyle/>
+          <a:p>
+            <a:pPr>
+              <a:defRPr sz="950" b="1" i="0" u="none" strike="noStrike">
+                <a:solidFill>
+                  <a:srgbClr val="1A2433"/>
+                </a:solidFill>
+                <a:latin typeface="Calibri"/>
+              </a:defRPr>
+            </a:pPr>
+            <a:endParaRPr lang="en-US"/>
+          </a:p>
+        </c:txPr>
+        <c:crossAx val="2094734552"/>
+        <c:crosses val="autoZero"/>
+        <c:auto val="1"/>
+        <c:lblAlgn val="ctr"/>
+        <c:noMultiLvlLbl val="1"/>
+      </c:catAx>
+      <c:valAx>
+        <c:axId val="2094734552"/>
+        <c:scaling>
+          <c:orientation val="minMax"/>
+        </c:scaling>
+        <c:delete val="1"/>
+        <c:axPos val="b"/>
+        <c:numFmt formatCode="General" sourceLinked="0"/>
+        <c:majorTickMark val="out"/>
+        <c:minorTickMark val="none"/>
+        <c:tickLblPos val="low"/>
+        <c:spPr>
+          <a:ln w="12700" cap="flat">
+            <a:solidFill>
+              <a:srgbClr val="888888"/>
+            </a:solidFill>
+            <a:prstDash val="solid"/>
+            <a:round/>
+          </a:ln>
+        </c:spPr>
+        <c:txPr>
+          <a:bodyPr/>
+          <a:lstStyle/>
+          <a:p>
+            <a:pPr>
+              <a:defRPr sz="1200" b="0" i="0" u="none" strike="noStrike">
+                <a:solidFill>
+                  <a:srgbClr val="000000"/>
+                </a:solidFill>
+                <a:latin typeface="Arial"/>
+              </a:defRPr>
+            </a:pPr>
+            <a:endParaRPr lang="en-US"/>
+          </a:p>
+        </c:txPr>
+        <c:crossAx val="2094734554"/>
+        <c:crosses val="autoZero"/>
+        <c:crossBetween val="between"/>
+      </c:valAx>
+      <c:spPr>
+        <a:noFill/>
+        <a:ln>
+          <a:noFill/>
+        </a:ln>
+        <a:effectLst/>
+      </c:spPr>
+    </c:plotArea>
+    <c:legend>
+      <c:legendPos val="b"/>
+      <c:overlay val="0"/>
+      <c:txPr>
+        <a:bodyPr/>
+        <a:lstStyle/>
+        <a:p>
+          <a:pPr>
+            <a:defRPr sz="1050">
+              <a:solidFill>
+                <a:srgbClr val="56606E"/>
+              </a:solidFill>
+              <a:latin typeface="Calibri"/>
+              <a:cs typeface="Calibri"/>
+            </a:defRPr>
+          </a:pPr>
+          <a:endParaRPr lang="en-US"/>
+        </a:p>
+      </c:txPr>
+    </c:legend>
+    <c:plotVisOnly val="1"/>
+    <c:dispBlanksAs val="span"/>
+  </c:chart>
+  <c:spPr>
+    <a:solidFill>
+      <a:srgbClr val="FFFFFF"/>
+    </a:solidFill>
+    <a:ln>
+      <a:noFill/>
+    </a:ln>
+    <a:effectLst/>
+  </c:spPr>
+  <c:externalData r:id="rId1">
+    <c:autoUpdate val="0"/>
+  </c:externalData>
+</c:chartSpace>
+</file>
+
 <file path=ppt/notesMasters/notesMaster1.xml><?xml version="1.0" encoding="utf-8"?>
 <p:notesMaster xmlns:a="http://schemas.openxmlformats.org/drawingml/2006/main" xmlns:r="http://schemas.openxmlformats.org/officeDocument/2006/relationships" xmlns:p="http://schemas.openxmlformats.org/presentationml/2006/main">
   <p:cSld>
@@ -3487,6 +4998,446 @@
             <a:fld id="{F7021451-1387-4CA6-816F-3879F97B5CBC}" type="slidenum">
               <a:rPr lang="en-US"/>
               <a:t>12</a:t>
+            </a:fld>
+            <a:endParaRPr lang="en-US"/>
+          </a:p>
+        </p:txBody>
+      </p:sp>
+    </p:spTree>
+    <p:extLst>
+      <p:ext uri="{BB962C8B-B14F-4D97-AF65-F5344CB8AC3E}">
+        <p14:creationId xmlns:p14="http://schemas.microsoft.com/office/powerpoint/2010/main" val="1024086991"/>
+      </p:ext>
+    </p:extLst>
+  </p:cSld>
+  <p:clrMapOvr>
+    <a:masterClrMapping/>
+  </p:clrMapOvr>
+</p:notes>
+</file>
+
+<file path=ppt/notesSlides/notesSlide13.xml><?xml version="1.0" encoding="utf-8"?>
+<p:notes xmlns:a="http://schemas.openxmlformats.org/drawingml/2006/main" xmlns:r="http://schemas.openxmlformats.org/officeDocument/2006/relationships" xmlns:p="http://schemas.openxmlformats.org/presentationml/2006/main">
+  <p:cSld>
+    <p:spTree>
+      <p:nvGrpSpPr>
+        <p:cNvPr id="1" name=""/>
+        <p:cNvGrpSpPr/>
+        <p:nvPr/>
+      </p:nvGrpSpPr>
+      <p:grpSpPr>
+        <a:xfrm>
+          <a:off x="0" y="0"/>
+          <a:ext cx="0" cy="0"/>
+          <a:chOff x="0" y="0"/>
+          <a:chExt cx="0" cy="0"/>
+        </a:xfrm>
+      </p:grpSpPr>
+      <p:sp>
+        <p:nvSpPr>
+          <p:cNvPr id="2" name="Slide Image Placeholder 1"/>
+          <p:cNvSpPr>
+            <a:spLocks noGrp="1" noRot="1" noChangeAspect="1"/>
+          </p:cNvSpPr>
+          <p:nvPr>
+            <p:ph type="sldImg"/>
+          </p:nvPr>
+        </p:nvSpPr>
+        <p:spPr/>
+      </p:sp>
+      <p:sp>
+        <p:nvSpPr>
+          <p:cNvPr id="3" name="Notes Placeholder 2"/>
+          <p:cNvSpPr>
+            <a:spLocks noGrp="1"/>
+          </p:cNvSpPr>
+          <p:nvPr>
+            <p:ph type="body" idx="1"/>
+          </p:nvPr>
+        </p:nvSpPr>
+        <p:spPr/>
+        <p:txBody>
+          <a:bodyPr/>
+          <a:lstStyle/>
+          <a:p>
+            <a:r>
+              <a:rPr lang="en-US" dirty="0"/>
+              <a:t/>
+            </a:r>
+            <a:endParaRPr lang="en-US" dirty="0"/>
+          </a:p>
+        </p:txBody>
+      </p:sp>
+      <p:sp>
+        <p:nvSpPr>
+          <p:cNvPr id="4" name="Slide Number Placeholder 3"/>
+          <p:cNvSpPr>
+            <a:spLocks noGrp="1"/>
+          </p:cNvSpPr>
+          <p:nvPr>
+            <p:ph type="sldNum" sz="quarter" idx="10"/>
+          </p:nvPr>
+        </p:nvSpPr>
+        <p:spPr/>
+        <p:txBody>
+          <a:bodyPr/>
+          <a:lstStyle/>
+          <a:p>
+            <a:fld id="{F7021451-1387-4CA6-816F-3879F97B5CBC}" type="slidenum">
+              <a:rPr lang="en-US"/>
+              <a:t>13</a:t>
+            </a:fld>
+            <a:endParaRPr lang="en-US"/>
+          </a:p>
+        </p:txBody>
+      </p:sp>
+    </p:spTree>
+    <p:extLst>
+      <p:ext uri="{BB962C8B-B14F-4D97-AF65-F5344CB8AC3E}">
+        <p14:creationId xmlns:p14="http://schemas.microsoft.com/office/powerpoint/2010/main" val="1024086991"/>
+      </p:ext>
+    </p:extLst>
+  </p:cSld>
+  <p:clrMapOvr>
+    <a:masterClrMapping/>
+  </p:clrMapOvr>
+</p:notes>
+</file>
+
+<file path=ppt/notesSlides/notesSlide14.xml><?xml version="1.0" encoding="utf-8"?>
+<p:notes xmlns:a="http://schemas.openxmlformats.org/drawingml/2006/main" xmlns:r="http://schemas.openxmlformats.org/officeDocument/2006/relationships" xmlns:p="http://schemas.openxmlformats.org/presentationml/2006/main">
+  <p:cSld>
+    <p:spTree>
+      <p:nvGrpSpPr>
+        <p:cNvPr id="1" name=""/>
+        <p:cNvGrpSpPr/>
+        <p:nvPr/>
+      </p:nvGrpSpPr>
+      <p:grpSpPr>
+        <a:xfrm>
+          <a:off x="0" y="0"/>
+          <a:ext cx="0" cy="0"/>
+          <a:chOff x="0" y="0"/>
+          <a:chExt cx="0" cy="0"/>
+        </a:xfrm>
+      </p:grpSpPr>
+      <p:sp>
+        <p:nvSpPr>
+          <p:cNvPr id="2" name="Slide Image Placeholder 1"/>
+          <p:cNvSpPr>
+            <a:spLocks noGrp="1" noRot="1" noChangeAspect="1"/>
+          </p:cNvSpPr>
+          <p:nvPr>
+            <p:ph type="sldImg"/>
+          </p:nvPr>
+        </p:nvSpPr>
+        <p:spPr/>
+      </p:sp>
+      <p:sp>
+        <p:nvSpPr>
+          <p:cNvPr id="3" name="Notes Placeholder 2"/>
+          <p:cNvSpPr>
+            <a:spLocks noGrp="1"/>
+          </p:cNvSpPr>
+          <p:nvPr>
+            <p:ph type="body" idx="1"/>
+          </p:nvPr>
+        </p:nvSpPr>
+        <p:spPr/>
+        <p:txBody>
+          <a:bodyPr/>
+          <a:lstStyle/>
+          <a:p>
+            <a:r>
+              <a:rPr lang="en-US" dirty="0"/>
+              <a:t/>
+            </a:r>
+            <a:endParaRPr lang="en-US" dirty="0"/>
+          </a:p>
+        </p:txBody>
+      </p:sp>
+      <p:sp>
+        <p:nvSpPr>
+          <p:cNvPr id="4" name="Slide Number Placeholder 3"/>
+          <p:cNvSpPr>
+            <a:spLocks noGrp="1"/>
+          </p:cNvSpPr>
+          <p:nvPr>
+            <p:ph type="sldNum" sz="quarter" idx="10"/>
+          </p:nvPr>
+        </p:nvSpPr>
+        <p:spPr/>
+        <p:txBody>
+          <a:bodyPr/>
+          <a:lstStyle/>
+          <a:p>
+            <a:fld id="{F7021451-1387-4CA6-816F-3879F97B5CBC}" type="slidenum">
+              <a:rPr lang="en-US"/>
+              <a:t>14</a:t>
+            </a:fld>
+            <a:endParaRPr lang="en-US"/>
+          </a:p>
+        </p:txBody>
+      </p:sp>
+    </p:spTree>
+    <p:extLst>
+      <p:ext uri="{BB962C8B-B14F-4D97-AF65-F5344CB8AC3E}">
+        <p14:creationId xmlns:p14="http://schemas.microsoft.com/office/powerpoint/2010/main" val="1024086991"/>
+      </p:ext>
+    </p:extLst>
+  </p:cSld>
+  <p:clrMapOvr>
+    <a:masterClrMapping/>
+  </p:clrMapOvr>
+</p:notes>
+</file>
+
+<file path=ppt/notesSlides/notesSlide15.xml><?xml version="1.0" encoding="utf-8"?>
+<p:notes xmlns:a="http://schemas.openxmlformats.org/drawingml/2006/main" xmlns:r="http://schemas.openxmlformats.org/officeDocument/2006/relationships" xmlns:p="http://schemas.openxmlformats.org/presentationml/2006/main">
+  <p:cSld>
+    <p:spTree>
+      <p:nvGrpSpPr>
+        <p:cNvPr id="1" name=""/>
+        <p:cNvGrpSpPr/>
+        <p:nvPr/>
+      </p:nvGrpSpPr>
+      <p:grpSpPr>
+        <a:xfrm>
+          <a:off x="0" y="0"/>
+          <a:ext cx="0" cy="0"/>
+          <a:chOff x="0" y="0"/>
+          <a:chExt cx="0" cy="0"/>
+        </a:xfrm>
+      </p:grpSpPr>
+      <p:sp>
+        <p:nvSpPr>
+          <p:cNvPr id="2" name="Slide Image Placeholder 1"/>
+          <p:cNvSpPr>
+            <a:spLocks noGrp="1" noRot="1" noChangeAspect="1"/>
+          </p:cNvSpPr>
+          <p:nvPr>
+            <p:ph type="sldImg"/>
+          </p:nvPr>
+        </p:nvSpPr>
+        <p:spPr/>
+      </p:sp>
+      <p:sp>
+        <p:nvSpPr>
+          <p:cNvPr id="3" name="Notes Placeholder 2"/>
+          <p:cNvSpPr>
+            <a:spLocks noGrp="1"/>
+          </p:cNvSpPr>
+          <p:nvPr>
+            <p:ph type="body" idx="1"/>
+          </p:nvPr>
+        </p:nvSpPr>
+        <p:spPr/>
+        <p:txBody>
+          <a:bodyPr/>
+          <a:lstStyle/>
+          <a:p>
+            <a:r>
+              <a:rPr lang="en-US" dirty="0"/>
+              <a:t/>
+            </a:r>
+            <a:endParaRPr lang="en-US" dirty="0"/>
+          </a:p>
+        </p:txBody>
+      </p:sp>
+      <p:sp>
+        <p:nvSpPr>
+          <p:cNvPr id="4" name="Slide Number Placeholder 3"/>
+          <p:cNvSpPr>
+            <a:spLocks noGrp="1"/>
+          </p:cNvSpPr>
+          <p:nvPr>
+            <p:ph type="sldNum" sz="quarter" idx="10"/>
+          </p:nvPr>
+        </p:nvSpPr>
+        <p:spPr/>
+        <p:txBody>
+          <a:bodyPr/>
+          <a:lstStyle/>
+          <a:p>
+            <a:fld id="{F7021451-1387-4CA6-816F-3879F97B5CBC}" type="slidenum">
+              <a:rPr lang="en-US"/>
+              <a:t>15</a:t>
+            </a:fld>
+            <a:endParaRPr lang="en-US"/>
+          </a:p>
+        </p:txBody>
+      </p:sp>
+    </p:spTree>
+    <p:extLst>
+      <p:ext uri="{BB962C8B-B14F-4D97-AF65-F5344CB8AC3E}">
+        <p14:creationId xmlns:p14="http://schemas.microsoft.com/office/powerpoint/2010/main" val="1024086991"/>
+      </p:ext>
+    </p:extLst>
+  </p:cSld>
+  <p:clrMapOvr>
+    <a:masterClrMapping/>
+  </p:clrMapOvr>
+</p:notes>
+</file>
+
+<file path=ppt/notesSlides/notesSlide16.xml><?xml version="1.0" encoding="utf-8"?>
+<p:notes xmlns:a="http://schemas.openxmlformats.org/drawingml/2006/main" xmlns:r="http://schemas.openxmlformats.org/officeDocument/2006/relationships" xmlns:p="http://schemas.openxmlformats.org/presentationml/2006/main">
+  <p:cSld>
+    <p:spTree>
+      <p:nvGrpSpPr>
+        <p:cNvPr id="1" name=""/>
+        <p:cNvGrpSpPr/>
+        <p:nvPr/>
+      </p:nvGrpSpPr>
+      <p:grpSpPr>
+        <a:xfrm>
+          <a:off x="0" y="0"/>
+          <a:ext cx="0" cy="0"/>
+          <a:chOff x="0" y="0"/>
+          <a:chExt cx="0" cy="0"/>
+        </a:xfrm>
+      </p:grpSpPr>
+      <p:sp>
+        <p:nvSpPr>
+          <p:cNvPr id="2" name="Slide Image Placeholder 1"/>
+          <p:cNvSpPr>
+            <a:spLocks noGrp="1" noRot="1" noChangeAspect="1"/>
+          </p:cNvSpPr>
+          <p:nvPr>
+            <p:ph type="sldImg"/>
+          </p:nvPr>
+        </p:nvSpPr>
+        <p:spPr/>
+      </p:sp>
+      <p:sp>
+        <p:nvSpPr>
+          <p:cNvPr id="3" name="Notes Placeholder 2"/>
+          <p:cNvSpPr>
+            <a:spLocks noGrp="1"/>
+          </p:cNvSpPr>
+          <p:nvPr>
+            <p:ph type="body" idx="1"/>
+          </p:nvPr>
+        </p:nvSpPr>
+        <p:spPr/>
+        <p:txBody>
+          <a:bodyPr/>
+          <a:lstStyle/>
+          <a:p>
+            <a:r>
+              <a:rPr lang="en-US" dirty="0"/>
+              <a:t/>
+            </a:r>
+            <a:endParaRPr lang="en-US" dirty="0"/>
+          </a:p>
+        </p:txBody>
+      </p:sp>
+      <p:sp>
+        <p:nvSpPr>
+          <p:cNvPr id="4" name="Slide Number Placeholder 3"/>
+          <p:cNvSpPr>
+            <a:spLocks noGrp="1"/>
+          </p:cNvSpPr>
+          <p:nvPr>
+            <p:ph type="sldNum" sz="quarter" idx="10"/>
+          </p:nvPr>
+        </p:nvSpPr>
+        <p:spPr/>
+        <p:txBody>
+          <a:bodyPr/>
+          <a:lstStyle/>
+          <a:p>
+            <a:fld id="{F7021451-1387-4CA6-816F-3879F97B5CBC}" type="slidenum">
+              <a:rPr lang="en-US"/>
+              <a:t>16</a:t>
+            </a:fld>
+            <a:endParaRPr lang="en-US"/>
+          </a:p>
+        </p:txBody>
+      </p:sp>
+    </p:spTree>
+    <p:extLst>
+      <p:ext uri="{BB962C8B-B14F-4D97-AF65-F5344CB8AC3E}">
+        <p14:creationId xmlns:p14="http://schemas.microsoft.com/office/powerpoint/2010/main" val="1024086991"/>
+      </p:ext>
+    </p:extLst>
+  </p:cSld>
+  <p:clrMapOvr>
+    <a:masterClrMapping/>
+  </p:clrMapOvr>
+</p:notes>
+</file>
+
+<file path=ppt/notesSlides/notesSlide17.xml><?xml version="1.0" encoding="utf-8"?>
+<p:notes xmlns:a="http://schemas.openxmlformats.org/drawingml/2006/main" xmlns:r="http://schemas.openxmlformats.org/officeDocument/2006/relationships" xmlns:p="http://schemas.openxmlformats.org/presentationml/2006/main">
+  <p:cSld>
+    <p:spTree>
+      <p:nvGrpSpPr>
+        <p:cNvPr id="1" name=""/>
+        <p:cNvGrpSpPr/>
+        <p:nvPr/>
+      </p:nvGrpSpPr>
+      <p:grpSpPr>
+        <a:xfrm>
+          <a:off x="0" y="0"/>
+          <a:ext cx="0" cy="0"/>
+          <a:chOff x="0" y="0"/>
+          <a:chExt cx="0" cy="0"/>
+        </a:xfrm>
+      </p:grpSpPr>
+      <p:sp>
+        <p:nvSpPr>
+          <p:cNvPr id="2" name="Slide Image Placeholder 1"/>
+          <p:cNvSpPr>
+            <a:spLocks noGrp="1" noRot="1" noChangeAspect="1"/>
+          </p:cNvSpPr>
+          <p:nvPr>
+            <p:ph type="sldImg"/>
+          </p:nvPr>
+        </p:nvSpPr>
+        <p:spPr/>
+      </p:sp>
+      <p:sp>
+        <p:nvSpPr>
+          <p:cNvPr id="3" name="Notes Placeholder 2"/>
+          <p:cNvSpPr>
+            <a:spLocks noGrp="1"/>
+          </p:cNvSpPr>
+          <p:nvPr>
+            <p:ph type="body" idx="1"/>
+          </p:nvPr>
+        </p:nvSpPr>
+        <p:spPr/>
+        <p:txBody>
+          <a:bodyPr/>
+          <a:lstStyle/>
+          <a:p>
+            <a:r>
+              <a:rPr lang="en-US" dirty="0"/>
+              <a:t/>
+            </a:r>
+            <a:endParaRPr lang="en-US" dirty="0"/>
+          </a:p>
+        </p:txBody>
+      </p:sp>
+      <p:sp>
+        <p:nvSpPr>
+          <p:cNvPr id="4" name="Slide Number Placeholder 3"/>
+          <p:cNvSpPr>
+            <a:spLocks noGrp="1"/>
+          </p:cNvSpPr>
+          <p:nvPr>
+            <p:ph type="sldNum" sz="quarter" idx="10"/>
+          </p:nvPr>
+        </p:nvSpPr>
+        <p:spPr/>
+        <p:txBody>
+          <a:bodyPr/>
+          <a:lstStyle/>
+          <a:p>
+            <a:fld id="{F7021451-1387-4CA6-816F-3879F97B5CBC}" type="slidenum">
+              <a:rPr lang="en-US"/>
+              <a:t>17</a:t>
             </a:fld>
             <a:endParaRPr lang="en-US"/>
           </a:p>
@@ -7777,6 +9728,4290 @@
 </p:sld>
 </file>
 
+<file path=ppt/slides/slide13.xml><?xml version="1.0" encoding="utf-8"?>
+<p:sld xmlns:a="http://schemas.openxmlformats.org/drawingml/2006/main" xmlns:r="http://schemas.openxmlformats.org/officeDocument/2006/relationships" xmlns:p="http://schemas.openxmlformats.org/presentationml/2006/main">
+  <p:cSld name="Slide 13">
+    <p:bg>
+      <p:bgPr>
+        <a:solidFill>
+          <a:srgbClr val="12233B"/>
+        </a:solidFill>
+      </p:bgPr>
+    </p:bg>
+    <p:spTree>
+      <p:nvGrpSpPr>
+        <p:cNvPr id="1" name=""/>
+        <p:cNvGrpSpPr/>
+        <p:nvPr/>
+      </p:nvGrpSpPr>
+      <p:grpSpPr>
+        <a:xfrm>
+          <a:off x="0" y="0"/>
+          <a:ext cx="0" cy="0"/>
+          <a:chOff x="0" y="0"/>
+          <a:chExt cx="0" cy="0"/>
+        </a:xfrm>
+      </p:grpSpPr>
+      <p:sp>
+        <p:nvSpPr>
+          <p:cNvPr id="2" name="Shape 0"/>
+          <p:cNvSpPr/>
+          <p:nvPr/>
+        </p:nvSpPr>
+        <p:spPr>
+          <a:xfrm>
+            <a:off x="10058400" y="-1463040"/>
+            <a:ext cx="3840480" cy="3840480"/>
+          </a:xfrm>
+          <a:prstGeom prst="ellipse">
+            <a:avLst/>
+          </a:prstGeom>
+          <a:solidFill>
+            <a:srgbClr val="1B3252"/>
+          </a:solidFill>
+          <a:ln/>
+        </p:spPr>
+      </p:sp>
+      <p:sp>
+        <p:nvSpPr>
+          <p:cNvPr id="3" name="Shape 1"/>
+          <p:cNvSpPr/>
+          <p:nvPr/>
+        </p:nvSpPr>
+        <p:spPr>
+          <a:xfrm>
+            <a:off x="11064240" y="4572000"/>
+            <a:ext cx="2743200" cy="2743200"/>
+          </a:xfrm>
+          <a:prstGeom prst="ellipse">
+            <a:avLst/>
+          </a:prstGeom>
+          <a:solidFill>
+            <a:srgbClr val="1B3252"/>
+          </a:solidFill>
+          <a:ln/>
+        </p:spPr>
+      </p:sp>
+      <p:sp>
+        <p:nvSpPr>
+          <p:cNvPr id="4" name="Shape 2"/>
+          <p:cNvSpPr/>
+          <p:nvPr/>
+        </p:nvSpPr>
+        <p:spPr>
+          <a:xfrm>
+            <a:off x="502920" y="1234440"/>
+            <a:ext cx="201168" cy="201168"/>
+          </a:xfrm>
+          <a:prstGeom prst="ellipse">
+            <a:avLst/>
+          </a:prstGeom>
+          <a:solidFill>
+            <a:srgbClr val="C87A32"/>
+          </a:solidFill>
+          <a:ln/>
+        </p:spPr>
+      </p:sp>
+      <p:sp>
+        <p:nvSpPr>
+          <p:cNvPr id="5" name="Text 3"/>
+          <p:cNvSpPr/>
+          <p:nvPr/>
+        </p:nvSpPr>
+        <p:spPr>
+          <a:xfrm>
+            <a:off x="777240" y="1097280"/>
+            <a:ext cx="9144000" cy="365760"/>
+          </a:xfrm>
+          <a:prstGeom prst="rect">
+            <a:avLst/>
+          </a:prstGeom>
+          <a:noFill/>
+          <a:ln/>
+        </p:spPr>
+        <p:txBody>
+          <a:bodyPr wrap="square" lIns="0" tIns="0" rIns="0" bIns="0" rtlCol="0" anchor="ctr"/>
+          <a:lstStyle/>
+          <a:p>
+            <a:pPr indent="0" marL="0">
+              <a:buNone/>
+            </a:pPr>
+            <a:r>
+              <a:rPr lang="en-US" sz="1300" b="1" spc="300" kern="0" dirty="0">
+                <a:solidFill>
+                  <a:srgbClr val="E3A55B"/>
+                </a:solidFill>
+                <a:latin typeface="Calibri" pitchFamily="34" charset="0"/>
+                <a:ea typeface="Calibri" pitchFamily="34" charset="-122"/>
+                <a:cs typeface="Calibri" pitchFamily="34" charset="-120"/>
+              </a:rPr>
+              <a:t>PROYECTO 03</a:t>
+            </a:r>
+            <a:endParaRPr lang="en-US" sz="1300" dirty="0"/>
+          </a:p>
+        </p:txBody>
+      </p:sp>
+      <p:sp>
+        <p:nvSpPr>
+          <p:cNvPr id="6" name="Text 4"/>
+          <p:cNvSpPr/>
+          <p:nvPr/>
+        </p:nvSpPr>
+        <p:spPr>
+          <a:xfrm>
+            <a:off x="749808" y="1572768"/>
+            <a:ext cx="10607040" cy="1005840"/>
+          </a:xfrm>
+          <a:prstGeom prst="rect">
+            <a:avLst/>
+          </a:prstGeom>
+          <a:noFill/>
+          <a:ln/>
+        </p:spPr>
+        <p:txBody>
+          <a:bodyPr wrap="square" lIns="0" tIns="0" rIns="0" bIns="0" rtlCol="0" anchor="ctr"/>
+          <a:lstStyle/>
+          <a:p>
+            <a:pPr indent="0" marL="0">
+              <a:buNone/>
+            </a:pPr>
+            <a:r>
+              <a:rPr lang="en-US" sz="4600" b="1" dirty="0">
+                <a:solidFill>
+                  <a:srgbClr val="FFFFFF"/>
+                </a:solidFill>
+                <a:latin typeface="Cambria" pitchFamily="34" charset="0"/>
+                <a:ea typeface="Cambria" pitchFamily="34" charset="-122"/>
+                <a:cs typeface="Cambria" pitchFamily="34" charset="-120"/>
+              </a:rPr>
+              <a:t>Talabre</a:t>
+            </a:r>
+            <a:endParaRPr lang="en-US" sz="4600" dirty="0"/>
+          </a:p>
+        </p:txBody>
+      </p:sp>
+      <p:sp>
+        <p:nvSpPr>
+          <p:cNvPr id="7" name="Text 5"/>
+          <p:cNvSpPr/>
+          <p:nvPr/>
+        </p:nvSpPr>
+        <p:spPr>
+          <a:xfrm>
+            <a:off x="777240" y="2651760"/>
+            <a:ext cx="9601200" cy="457200"/>
+          </a:xfrm>
+          <a:prstGeom prst="rect">
+            <a:avLst/>
+          </a:prstGeom>
+          <a:noFill/>
+          <a:ln/>
+        </p:spPr>
+        <p:txBody>
+          <a:bodyPr wrap="square" lIns="0" tIns="0" rIns="0" bIns="0" rtlCol="0" anchor="ctr"/>
+          <a:lstStyle/>
+          <a:p>
+            <a:pPr indent="0" marL="0">
+              <a:buNone/>
+            </a:pPr>
+            <a:r>
+              <a:rPr lang="en-US" sz="1600" dirty="0">
+                <a:solidFill>
+                  <a:srgbClr val="DCE6F0"/>
+                </a:solidFill>
+                <a:latin typeface="Calibri" pitchFamily="34" charset="0"/>
+                <a:ea typeface="Calibri" pitchFamily="34" charset="-122"/>
+                <a:cs typeface="Calibri" pitchFamily="34" charset="-120"/>
+              </a:rPr>
+              <a:t>Captación de agua, pozos y estaciones de bombeo · Codelco</a:t>
+            </a:r>
+            <a:endParaRPr lang="en-US" sz="1600" dirty="0"/>
+          </a:p>
+        </p:txBody>
+      </p:sp>
+      <p:sp>
+        <p:nvSpPr>
+          <p:cNvPr id="8" name="Text 6"/>
+          <p:cNvSpPr/>
+          <p:nvPr/>
+        </p:nvSpPr>
+        <p:spPr>
+          <a:xfrm>
+            <a:off x="777240" y="3154680"/>
+            <a:ext cx="8778240" cy="822960"/>
+          </a:xfrm>
+          <a:prstGeom prst="rect">
+            <a:avLst/>
+          </a:prstGeom>
+          <a:noFill/>
+          <a:ln/>
+        </p:spPr>
+        <p:txBody>
+          <a:bodyPr wrap="square" lIns="0" tIns="0" rIns="0" bIns="0" rtlCol="0" anchor="ctr"/>
+          <a:lstStyle/>
+          <a:p>
+            <a:pPr indent="0" marL="0">
+              <a:lnSpc>
+                <a:spcPts val="2000"/>
+              </a:lnSpc>
+              <a:buNone/>
+            </a:pPr>
+            <a:r>
+              <a:rPr lang="en-US" sz="1350" dirty="0">
+                <a:solidFill>
+                  <a:srgbClr val="6E8CA8"/>
+                </a:solidFill>
+                <a:latin typeface="Calibri" pitchFamily="34" charset="0"/>
+                <a:ea typeface="Calibri" pitchFamily="34" charset="-122"/>
+                <a:cs typeface="Calibri" pitchFamily="34" charset="-120"/>
+              </a:rPr>
+              <a:t>Contrato 4600029355 · 219 subsistemas en 9 áreas · 1.951 detalles de terminación levantados.</a:t>
+            </a:r>
+            <a:endParaRPr lang="en-US" sz="1350" dirty="0"/>
+          </a:p>
+        </p:txBody>
+      </p:sp>
+      <p:sp>
+        <p:nvSpPr>
+          <p:cNvPr id="9" name="Text 7"/>
+          <p:cNvSpPr/>
+          <p:nvPr/>
+        </p:nvSpPr>
+        <p:spPr>
+          <a:xfrm>
+            <a:off x="777240" y="4846320"/>
+            <a:ext cx="2651760" cy="640080"/>
+          </a:xfrm>
+          <a:prstGeom prst="rect">
+            <a:avLst/>
+          </a:prstGeom>
+          <a:noFill/>
+          <a:ln/>
+        </p:spPr>
+        <p:txBody>
+          <a:bodyPr wrap="square" lIns="0" tIns="0" rIns="0" bIns="0" rtlCol="0" anchor="ctr"/>
+          <a:lstStyle/>
+          <a:p>
+            <a:pPr indent="0" marL="0">
+              <a:buNone/>
+            </a:pPr>
+            <a:r>
+              <a:rPr lang="en-US" sz="3400" b="1" dirty="0">
+                <a:solidFill>
+                  <a:srgbClr val="E3A55B"/>
+                </a:solidFill>
+                <a:latin typeface="Cambria" pitchFamily="34" charset="0"/>
+                <a:ea typeface="Cambria" pitchFamily="34" charset="-122"/>
+                <a:cs typeface="Cambria" pitchFamily="34" charset="-120"/>
+              </a:rPr>
+              <a:t>90,9%</a:t>
+            </a:r>
+            <a:endParaRPr lang="en-US" sz="3400" dirty="0"/>
+          </a:p>
+        </p:txBody>
+      </p:sp>
+      <p:sp>
+        <p:nvSpPr>
+          <p:cNvPr id="10" name="Text 8"/>
+          <p:cNvSpPr/>
+          <p:nvPr/>
+        </p:nvSpPr>
+        <p:spPr>
+          <a:xfrm>
+            <a:off x="777240" y="5486400"/>
+            <a:ext cx="2651760" cy="502920"/>
+          </a:xfrm>
+          <a:prstGeom prst="rect">
+            <a:avLst/>
+          </a:prstGeom>
+          <a:noFill/>
+          <a:ln/>
+        </p:spPr>
+        <p:txBody>
+          <a:bodyPr wrap="square" lIns="0" tIns="0" rIns="0" bIns="0" rtlCol="0" anchor="ctr"/>
+          <a:lstStyle/>
+          <a:p>
+            <a:pPr indent="0" marL="0">
+              <a:buNone/>
+            </a:pPr>
+            <a:r>
+              <a:rPr lang="en-US" sz="1150" dirty="0">
+                <a:solidFill>
+                  <a:srgbClr val="DCE6F0"/>
+                </a:solidFill>
+                <a:latin typeface="Calibri" pitchFamily="34" charset="0"/>
+                <a:ea typeface="Calibri" pitchFamily="34" charset="-122"/>
+                <a:cs typeface="Calibri" pitchFamily="34" charset="-120"/>
+              </a:rPr>
+              <a:t>Caminata 1 realizada</a:t>
+            </a:r>
+            <a:endParaRPr lang="en-US" sz="1150" dirty="0"/>
+          </a:p>
+        </p:txBody>
+      </p:sp>
+      <p:sp>
+        <p:nvSpPr>
+          <p:cNvPr id="11" name="Text 9"/>
+          <p:cNvSpPr/>
+          <p:nvPr/>
+        </p:nvSpPr>
+        <p:spPr>
+          <a:xfrm>
+            <a:off x="3520440" y="4846320"/>
+            <a:ext cx="2651760" cy="640080"/>
+          </a:xfrm>
+          <a:prstGeom prst="rect">
+            <a:avLst/>
+          </a:prstGeom>
+          <a:noFill/>
+          <a:ln/>
+        </p:spPr>
+        <p:txBody>
+          <a:bodyPr wrap="square" lIns="0" tIns="0" rIns="0" bIns="0" rtlCol="0" anchor="ctr"/>
+          <a:lstStyle/>
+          <a:p>
+            <a:pPr indent="0" marL="0">
+              <a:buNone/>
+            </a:pPr>
+            <a:r>
+              <a:rPr lang="en-US" sz="3400" b="1" dirty="0">
+                <a:solidFill>
+                  <a:srgbClr val="E3A55B"/>
+                </a:solidFill>
+                <a:latin typeface="Cambria" pitchFamily="34" charset="0"/>
+                <a:ea typeface="Cambria" pitchFamily="34" charset="-122"/>
+                <a:cs typeface="Cambria" pitchFamily="34" charset="-120"/>
+              </a:rPr>
+              <a:t>77,6%</a:t>
+            </a:r>
+            <a:endParaRPr lang="en-US" sz="3400" dirty="0"/>
+          </a:p>
+        </p:txBody>
+      </p:sp>
+      <p:sp>
+        <p:nvSpPr>
+          <p:cNvPr id="12" name="Text 10"/>
+          <p:cNvSpPr/>
+          <p:nvPr/>
+        </p:nvSpPr>
+        <p:spPr>
+          <a:xfrm>
+            <a:off x="3520440" y="5486400"/>
+            <a:ext cx="2651760" cy="502920"/>
+          </a:xfrm>
+          <a:prstGeom prst="rect">
+            <a:avLst/>
+          </a:prstGeom>
+          <a:noFill/>
+          <a:ln/>
+        </p:spPr>
+        <p:txBody>
+          <a:bodyPr wrap="square" lIns="0" tIns="0" rIns="0" bIns="0" rtlCol="0" anchor="ctr"/>
+          <a:lstStyle/>
+          <a:p>
+            <a:pPr indent="0" marL="0">
+              <a:buNone/>
+            </a:pPr>
+            <a:r>
+              <a:rPr lang="en-US" sz="1150" dirty="0">
+                <a:solidFill>
+                  <a:srgbClr val="DCE6F0"/>
+                </a:solidFill>
+                <a:latin typeface="Calibri" pitchFamily="34" charset="0"/>
+                <a:ea typeface="Calibri" pitchFamily="34" charset="-122"/>
+                <a:cs typeface="Calibri" pitchFamily="34" charset="-120"/>
+              </a:rPr>
+              <a:t>Caminata 2 realizada</a:t>
+            </a:r>
+            <a:endParaRPr lang="en-US" sz="1150" dirty="0"/>
+          </a:p>
+        </p:txBody>
+      </p:sp>
+      <p:sp>
+        <p:nvSpPr>
+          <p:cNvPr id="13" name="Text 11"/>
+          <p:cNvSpPr/>
+          <p:nvPr/>
+        </p:nvSpPr>
+        <p:spPr>
+          <a:xfrm>
+            <a:off x="6263640" y="4846320"/>
+            <a:ext cx="2651760" cy="640080"/>
+          </a:xfrm>
+          <a:prstGeom prst="rect">
+            <a:avLst/>
+          </a:prstGeom>
+          <a:noFill/>
+          <a:ln/>
+        </p:spPr>
+        <p:txBody>
+          <a:bodyPr wrap="square" lIns="0" tIns="0" rIns="0" bIns="0" rtlCol="0" anchor="ctr"/>
+          <a:lstStyle/>
+          <a:p>
+            <a:pPr indent="0" marL="0">
+              <a:buNone/>
+            </a:pPr>
+            <a:r>
+              <a:rPr lang="en-US" sz="3400" b="1" dirty="0">
+                <a:solidFill>
+                  <a:srgbClr val="E3A55B"/>
+                </a:solidFill>
+                <a:latin typeface="Cambria" pitchFamily="34" charset="0"/>
+                <a:ea typeface="Cambria" pitchFamily="34" charset="-122"/>
+                <a:cs typeface="Cambria" pitchFamily="34" charset="-120"/>
+              </a:rPr>
+              <a:t>91,1%</a:t>
+            </a:r>
+            <a:endParaRPr lang="en-US" sz="3400" dirty="0"/>
+          </a:p>
+        </p:txBody>
+      </p:sp>
+      <p:sp>
+        <p:nvSpPr>
+          <p:cNvPr id="14" name="Text 12"/>
+          <p:cNvSpPr/>
+          <p:nvPr/>
+        </p:nvSpPr>
+        <p:spPr>
+          <a:xfrm>
+            <a:off x="6263640" y="5486400"/>
+            <a:ext cx="2651760" cy="502920"/>
+          </a:xfrm>
+          <a:prstGeom prst="rect">
+            <a:avLst/>
+          </a:prstGeom>
+          <a:noFill/>
+          <a:ln/>
+        </p:spPr>
+        <p:txBody>
+          <a:bodyPr wrap="square" lIns="0" tIns="0" rIns="0" bIns="0" rtlCol="0" anchor="ctr"/>
+          <a:lstStyle/>
+          <a:p>
+            <a:pPr indent="0" marL="0">
+              <a:buNone/>
+            </a:pPr>
+            <a:r>
+              <a:rPr lang="en-US" sz="1150" dirty="0">
+                <a:solidFill>
+                  <a:srgbClr val="DCE6F0"/>
+                </a:solidFill>
+                <a:latin typeface="Calibri" pitchFamily="34" charset="0"/>
+                <a:ea typeface="Calibri" pitchFamily="34" charset="-122"/>
+                <a:cs typeface="Calibri" pitchFamily="34" charset="-120"/>
+              </a:rPr>
+              <a:t>Avance PEC promedio</a:t>
+            </a:r>
+            <a:endParaRPr lang="en-US" sz="1150" dirty="0"/>
+          </a:p>
+        </p:txBody>
+      </p:sp>
+      <p:sp>
+        <p:nvSpPr>
+          <p:cNvPr id="15" name="Text 13"/>
+          <p:cNvSpPr/>
+          <p:nvPr/>
+        </p:nvSpPr>
+        <p:spPr>
+          <a:xfrm>
+            <a:off x="9006840" y="4846320"/>
+            <a:ext cx="2651760" cy="640080"/>
+          </a:xfrm>
+          <a:prstGeom prst="rect">
+            <a:avLst/>
+          </a:prstGeom>
+          <a:noFill/>
+          <a:ln/>
+        </p:spPr>
+        <p:txBody>
+          <a:bodyPr wrap="square" lIns="0" tIns="0" rIns="0" bIns="0" rtlCol="0" anchor="ctr"/>
+          <a:lstStyle/>
+          <a:p>
+            <a:pPr indent="0" marL="0">
+              <a:buNone/>
+            </a:pPr>
+            <a:r>
+              <a:rPr lang="en-US" sz="3400" b="1" dirty="0">
+                <a:solidFill>
+                  <a:srgbClr val="E3A55B"/>
+                </a:solidFill>
+                <a:latin typeface="Cambria" pitchFamily="34" charset="0"/>
+                <a:ea typeface="Cambria" pitchFamily="34" charset="-122"/>
+                <a:cs typeface="Cambria" pitchFamily="34" charset="-120"/>
+              </a:rPr>
+              <a:t>74,1%</a:t>
+            </a:r>
+            <a:endParaRPr lang="en-US" sz="3400" dirty="0"/>
+          </a:p>
+        </p:txBody>
+      </p:sp>
+      <p:sp>
+        <p:nvSpPr>
+          <p:cNvPr id="16" name="Text 14"/>
+          <p:cNvSpPr/>
+          <p:nvPr/>
+        </p:nvSpPr>
+        <p:spPr>
+          <a:xfrm>
+            <a:off x="9006840" y="5486400"/>
+            <a:ext cx="2651760" cy="502920"/>
+          </a:xfrm>
+          <a:prstGeom prst="rect">
+            <a:avLst/>
+          </a:prstGeom>
+          <a:noFill/>
+          <a:ln/>
+        </p:spPr>
+        <p:txBody>
+          <a:bodyPr wrap="square" lIns="0" tIns="0" rIns="0" bIns="0" rtlCol="0" anchor="ctr"/>
+          <a:lstStyle/>
+          <a:p>
+            <a:pPr indent="0" marL="0">
+              <a:buNone/>
+            </a:pPr>
+            <a:r>
+              <a:rPr lang="en-US" sz="1150" dirty="0">
+                <a:solidFill>
+                  <a:srgbClr val="DCE6F0"/>
+                </a:solidFill>
+                <a:latin typeface="Calibri" pitchFamily="34" charset="0"/>
+                <a:ea typeface="Calibri" pitchFamily="34" charset="-122"/>
+                <a:cs typeface="Calibri" pitchFamily="34" charset="-120"/>
+              </a:rPr>
+              <a:t>Cierre de DT</a:t>
+            </a:r>
+            <a:endParaRPr lang="en-US" sz="1150" dirty="0"/>
+          </a:p>
+        </p:txBody>
+      </p:sp>
+      <p:sp>
+        <p:nvSpPr>
+          <p:cNvPr id="17" name="Text 15"/>
+          <p:cNvSpPr/>
+          <p:nvPr/>
+        </p:nvSpPr>
+        <p:spPr>
+          <a:xfrm>
+            <a:off x="777240" y="6172200"/>
+            <a:ext cx="7315200" cy="274320"/>
+          </a:xfrm>
+          <a:prstGeom prst="rect">
+            <a:avLst/>
+          </a:prstGeom>
+          <a:noFill/>
+          <a:ln/>
+        </p:spPr>
+        <p:txBody>
+          <a:bodyPr wrap="square" lIns="0" tIns="0" rIns="0" bIns="0" rtlCol="0" anchor="ctr"/>
+          <a:lstStyle/>
+          <a:p>
+            <a:pPr indent="0" marL="0">
+              <a:buNone/>
+            </a:pPr>
+            <a:r>
+              <a:rPr lang="en-US" sz="1100" i="1" dirty="0">
+                <a:solidFill>
+                  <a:srgbClr val="6E8CA8"/>
+                </a:solidFill>
+                <a:latin typeface="Calibri" pitchFamily="34" charset="0"/>
+                <a:ea typeface="Calibri" pitchFamily="34" charset="-122"/>
+                <a:cs typeface="Calibri" pitchFamily="34" charset="-120"/>
+              </a:rPr>
+              <a:t>Atrasos calculados al 27-07-2026</a:t>
+            </a:r>
+            <a:endParaRPr lang="en-US" sz="1100" dirty="0"/>
+          </a:p>
+        </p:txBody>
+      </p:sp>
+      <p:sp>
+        <p:nvSpPr>
+          <p:cNvPr id="18" name="Text 16"/>
+          <p:cNvSpPr/>
+          <p:nvPr/>
+        </p:nvSpPr>
+        <p:spPr>
+          <a:xfrm>
+            <a:off x="457200" y="6473952"/>
+            <a:ext cx="9692640" cy="274320"/>
+          </a:xfrm>
+          <a:prstGeom prst="rect">
+            <a:avLst/>
+          </a:prstGeom>
+          <a:noFill/>
+          <a:ln/>
+        </p:spPr>
+        <p:txBody>
+          <a:bodyPr wrap="square" lIns="0" tIns="0" rIns="0" bIns="0" rtlCol="0" anchor="ctr"/>
+          <a:lstStyle/>
+          <a:p>
+            <a:pPr algn="l" indent="0" marL="0">
+              <a:buNone/>
+            </a:pPr>
+            <a:r>
+              <a:rPr lang="en-US" sz="850" dirty="0">
+                <a:solidFill>
+                  <a:srgbClr val="6E8CA8"/>
+                </a:solidFill>
+                <a:latin typeface="Calibri" pitchFamily="34" charset="0"/>
+                <a:ea typeface="Calibri" pitchFamily="34" charset="-122"/>
+                <a:cs typeface="Calibri" pitchFamily="34" charset="-120"/>
+              </a:rPr>
+              <a:t>Fuente: TalabreSTATUS_PEC + TalabreCuadro_DT · 219 subsistemas · 1.951 DT · Atrasos al 27-07-2026</a:t>
+            </a:r>
+            <a:endParaRPr lang="en-US" sz="850" dirty="0"/>
+          </a:p>
+        </p:txBody>
+      </p:sp>
+      <p:sp>
+        <p:nvSpPr>
+          <p:cNvPr id="19" name="Text 17"/>
+          <p:cNvSpPr/>
+          <p:nvPr/>
+        </p:nvSpPr>
+        <p:spPr>
+          <a:xfrm>
+            <a:off x="11430000" y="6473952"/>
+            <a:ext cx="365760" cy="274320"/>
+          </a:xfrm>
+          <a:prstGeom prst="rect">
+            <a:avLst/>
+          </a:prstGeom>
+          <a:noFill/>
+          <a:ln/>
+        </p:spPr>
+        <p:txBody>
+          <a:bodyPr wrap="square" lIns="0" tIns="0" rIns="0" bIns="0" rtlCol="0" anchor="ctr"/>
+          <a:lstStyle/>
+          <a:p>
+            <a:pPr algn="r" indent="0" marL="0">
+              <a:buNone/>
+            </a:pPr>
+            <a:r>
+              <a:rPr lang="en-US" sz="900" dirty="0">
+                <a:solidFill>
+                  <a:srgbClr val="6E8CA8"/>
+                </a:solidFill>
+                <a:latin typeface="Calibri" pitchFamily="34" charset="0"/>
+                <a:ea typeface="Calibri" pitchFamily="34" charset="-122"/>
+                <a:cs typeface="Calibri" pitchFamily="34" charset="-120"/>
+              </a:rPr>
+              <a:t>13</a:t>
+            </a:r>
+            <a:endParaRPr lang="en-US" sz="900" dirty="0"/>
+          </a:p>
+        </p:txBody>
+      </p:sp>
+    </p:spTree>
+  </p:cSld>
+  <p:clrMapOvr>
+    <a:masterClrMapping/>
+  </p:clrMapOvr>
+</p:sld>
+</file>
+
+<file path=ppt/slides/slide14.xml><?xml version="1.0" encoding="utf-8"?>
+<p:sld xmlns:a="http://schemas.openxmlformats.org/drawingml/2006/main" xmlns:r="http://schemas.openxmlformats.org/officeDocument/2006/relationships" xmlns:p="http://schemas.openxmlformats.org/presentationml/2006/main">
+  <p:cSld name="Slide 14">
+    <p:bg>
+      <p:bgPr>
+        <a:solidFill>
+          <a:srgbClr val="F4F6F9"/>
+        </a:solidFill>
+      </p:bgPr>
+    </p:bg>
+    <p:spTree>
+      <p:nvGrpSpPr>
+        <p:cNvPr id="1" name=""/>
+        <p:cNvGrpSpPr/>
+        <p:nvPr/>
+      </p:nvGrpSpPr>
+      <p:grpSpPr>
+        <a:xfrm>
+          <a:off x="0" y="0"/>
+          <a:ext cx="0" cy="0"/>
+          <a:chOff x="0" y="0"/>
+          <a:chExt cx="0" cy="0"/>
+        </a:xfrm>
+      </p:grpSpPr>
+      <p:sp>
+        <p:nvSpPr>
+          <p:cNvPr id="2" name="Text 0"/>
+          <p:cNvSpPr/>
+          <p:nvPr/>
+        </p:nvSpPr>
+        <p:spPr>
+          <a:xfrm>
+            <a:off x="457200" y="411480"/>
+            <a:ext cx="7315200" cy="256032"/>
+          </a:xfrm>
+          <a:prstGeom prst="rect">
+            <a:avLst/>
+          </a:prstGeom>
+          <a:noFill/>
+          <a:ln/>
+        </p:spPr>
+        <p:txBody>
+          <a:bodyPr wrap="square" lIns="0" tIns="0" rIns="0" bIns="0" rtlCol="0" anchor="ctr"/>
+          <a:lstStyle/>
+          <a:p>
+            <a:pPr algn="l" indent="0" marL="0">
+              <a:buNone/>
+            </a:pPr>
+            <a:r>
+              <a:rPr lang="en-US" sz="1100" b="1" spc="200" kern="0" dirty="0">
+                <a:solidFill>
+                  <a:srgbClr val="C87A32"/>
+                </a:solidFill>
+                <a:latin typeface="Calibri" pitchFamily="34" charset="0"/>
+                <a:ea typeface="Calibri" pitchFamily="34" charset="-122"/>
+                <a:cs typeface="Calibri" pitchFamily="34" charset="-120"/>
+              </a:rPr>
+              <a:t>TALABRE · RESUMEN EJECUTIVO</a:t>
+            </a:r>
+            <a:endParaRPr lang="en-US" sz="1100" dirty="0"/>
+          </a:p>
+        </p:txBody>
+      </p:sp>
+      <p:sp>
+        <p:nvSpPr>
+          <p:cNvPr id="3" name="Text 1"/>
+          <p:cNvSpPr/>
+          <p:nvPr/>
+        </p:nvSpPr>
+        <p:spPr>
+          <a:xfrm>
+            <a:off x="457200" y="658368"/>
+            <a:ext cx="10972800" cy="548640"/>
+          </a:xfrm>
+          <a:prstGeom prst="rect">
+            <a:avLst/>
+          </a:prstGeom>
+          <a:noFill/>
+          <a:ln/>
+        </p:spPr>
+        <p:txBody>
+          <a:bodyPr wrap="square" lIns="0" tIns="0" rIns="0" bIns="0" rtlCol="0" anchor="ctr"/>
+          <a:lstStyle/>
+          <a:p>
+            <a:pPr indent="0" marL="0">
+              <a:buNone/>
+            </a:pPr>
+            <a:r>
+              <a:rPr lang="en-US" sz="3000" b="1" dirty="0">
+                <a:solidFill>
+                  <a:srgbClr val="1A2433"/>
+                </a:solidFill>
+                <a:latin typeface="Cambria" pitchFamily="34" charset="0"/>
+                <a:ea typeface="Cambria" pitchFamily="34" charset="-122"/>
+                <a:cs typeface="Cambria" pitchFamily="34" charset="-120"/>
+              </a:rPr>
+              <a:t>Estado global de los tres frentes</a:t>
+            </a:r>
+            <a:endParaRPr lang="en-US" sz="3000" dirty="0"/>
+          </a:p>
+        </p:txBody>
+      </p:sp>
+      <p:sp>
+        <p:nvSpPr>
+          <p:cNvPr id="4" name="Shape 2"/>
+          <p:cNvSpPr/>
+          <p:nvPr/>
+        </p:nvSpPr>
+        <p:spPr>
+          <a:xfrm>
+            <a:off x="457200" y="1463040"/>
+            <a:ext cx="2743200" cy="2286000"/>
+          </a:xfrm>
+          <a:prstGeom prst="roundRect">
+            <a:avLst>
+              <a:gd name="adj" fmla="val 3200"/>
+            </a:avLst>
+          </a:prstGeom>
+          <a:solidFill>
+            <a:srgbClr val="FFFFFF"/>
+          </a:solidFill>
+          <a:ln w="12700">
+            <a:solidFill>
+              <a:srgbClr val="E4E9EF"/>
+            </a:solidFill>
+            <a:prstDash val="solid"/>
+          </a:ln>
+          <a:effectLst>
+            <a:outerShdw sx="100000" sy="100000" kx="0" ky="0" algn="bl" rotWithShape="0" blurRad="88900" dist="25400" dir="5400000">
+              <a:srgbClr val="9AA7B5">
+                <a:alpha val="28000"/>
+              </a:srgbClr>
+            </a:outerShdw>
+          </a:effectLst>
+        </p:spPr>
+      </p:sp>
+      <p:sp>
+        <p:nvSpPr>
+          <p:cNvPr id="5" name="Shape 3"/>
+          <p:cNvSpPr/>
+          <p:nvPr/>
+        </p:nvSpPr>
+        <p:spPr>
+          <a:xfrm>
+            <a:off x="713232" y="1719072"/>
+            <a:ext cx="146304" cy="146304"/>
+          </a:xfrm>
+          <a:prstGeom prst="ellipse">
+            <a:avLst/>
+          </a:prstGeom>
+          <a:solidFill>
+            <a:srgbClr val="2E6FB5"/>
+          </a:solidFill>
+          <a:ln/>
+        </p:spPr>
+      </p:sp>
+      <p:sp>
+        <p:nvSpPr>
+          <p:cNvPr id="6" name="Text 4"/>
+          <p:cNvSpPr/>
+          <p:nvPr/>
+        </p:nvSpPr>
+        <p:spPr>
+          <a:xfrm>
+            <a:off x="713232" y="1938528"/>
+            <a:ext cx="2286000" cy="749808"/>
+          </a:xfrm>
+          <a:prstGeom prst="rect">
+            <a:avLst/>
+          </a:prstGeom>
+          <a:noFill/>
+          <a:ln/>
+        </p:spPr>
+        <p:txBody>
+          <a:bodyPr wrap="square" lIns="0" tIns="0" rIns="0" bIns="0" rtlCol="0" anchor="ctr"/>
+          <a:lstStyle/>
+          <a:p>
+            <a:pPr indent="0" marL="0">
+              <a:buNone/>
+            </a:pPr>
+            <a:r>
+              <a:rPr lang="en-US" sz="3800" b="1" dirty="0">
+                <a:solidFill>
+                  <a:srgbClr val="2E6FB5"/>
+                </a:solidFill>
+                <a:latin typeface="Cambria" pitchFamily="34" charset="0"/>
+                <a:ea typeface="Cambria" pitchFamily="34" charset="-122"/>
+                <a:cs typeface="Cambria" pitchFamily="34" charset="-120"/>
+              </a:rPr>
+              <a:t>90,9%</a:t>
+            </a:r>
+            <a:endParaRPr lang="en-US" sz="3800" dirty="0"/>
+          </a:p>
+        </p:txBody>
+      </p:sp>
+      <p:sp>
+        <p:nvSpPr>
+          <p:cNvPr id="7" name="Text 5"/>
+          <p:cNvSpPr/>
+          <p:nvPr/>
+        </p:nvSpPr>
+        <p:spPr>
+          <a:xfrm>
+            <a:off x="731520" y="2697480"/>
+            <a:ext cx="2286000" cy="292608"/>
+          </a:xfrm>
+          <a:prstGeom prst="rect">
+            <a:avLst/>
+          </a:prstGeom>
+          <a:noFill/>
+          <a:ln/>
+        </p:spPr>
+        <p:txBody>
+          <a:bodyPr wrap="square" lIns="0" tIns="0" rIns="0" bIns="0" rtlCol="0" anchor="ctr"/>
+          <a:lstStyle/>
+          <a:p>
+            <a:pPr indent="0" marL="0">
+              <a:buNone/>
+            </a:pPr>
+            <a:r>
+              <a:rPr lang="en-US" sz="1300" b="1" dirty="0">
+                <a:solidFill>
+                  <a:srgbClr val="1A2433"/>
+                </a:solidFill>
+                <a:latin typeface="Calibri" pitchFamily="34" charset="0"/>
+                <a:ea typeface="Calibri" pitchFamily="34" charset="-122"/>
+                <a:cs typeface="Calibri" pitchFamily="34" charset="-120"/>
+              </a:rPr>
+              <a:t>199/219</a:t>
+            </a:r>
+            <a:endParaRPr lang="en-US" sz="1300" dirty="0"/>
+          </a:p>
+        </p:txBody>
+      </p:sp>
+      <p:sp>
+        <p:nvSpPr>
+          <p:cNvPr id="8" name="Text 6"/>
+          <p:cNvSpPr/>
+          <p:nvPr/>
+        </p:nvSpPr>
+        <p:spPr>
+          <a:xfrm>
+            <a:off x="731520" y="2990088"/>
+            <a:ext cx="2240280" cy="292608"/>
+          </a:xfrm>
+          <a:prstGeom prst="rect">
+            <a:avLst/>
+          </a:prstGeom>
+          <a:noFill/>
+          <a:ln/>
+        </p:spPr>
+        <p:txBody>
+          <a:bodyPr wrap="square" lIns="0" tIns="0" rIns="0" bIns="0" rtlCol="0" anchor="ctr"/>
+          <a:lstStyle/>
+          <a:p>
+            <a:pPr indent="0" marL="0">
+              <a:buNone/>
+            </a:pPr>
+            <a:r>
+              <a:rPr lang="en-US" sz="1200" dirty="0">
+                <a:solidFill>
+                  <a:srgbClr val="56606E"/>
+                </a:solidFill>
+                <a:latin typeface="Calibri" pitchFamily="34" charset="0"/>
+                <a:ea typeface="Calibri" pitchFamily="34" charset="-122"/>
+                <a:cs typeface="Calibri" pitchFamily="34" charset="-120"/>
+              </a:rPr>
+              <a:t>Caminata 1 realizada</a:t>
+            </a:r>
+            <a:endParaRPr lang="en-US" sz="1200" dirty="0"/>
+          </a:p>
+        </p:txBody>
+      </p:sp>
+      <p:sp>
+        <p:nvSpPr>
+          <p:cNvPr id="9" name="Text 7"/>
+          <p:cNvSpPr/>
+          <p:nvPr/>
+        </p:nvSpPr>
+        <p:spPr>
+          <a:xfrm>
+            <a:off x="731520" y="3273552"/>
+            <a:ext cx="2240280" cy="420624"/>
+          </a:xfrm>
+          <a:prstGeom prst="rect">
+            <a:avLst/>
+          </a:prstGeom>
+          <a:noFill/>
+          <a:ln/>
+        </p:spPr>
+        <p:txBody>
+          <a:bodyPr wrap="square" lIns="0" tIns="0" rIns="0" bIns="0" rtlCol="0" anchor="ctr"/>
+          <a:lstStyle/>
+          <a:p>
+            <a:pPr indent="0" marL="0">
+              <a:lnSpc>
+                <a:spcPts val="1200"/>
+              </a:lnSpc>
+              <a:buNone/>
+            </a:pPr>
+            <a:r>
+              <a:rPr lang="en-US" sz="950" dirty="0">
+                <a:solidFill>
+                  <a:srgbClr val="56606E"/>
+                </a:solidFill>
+                <a:latin typeface="Calibri" pitchFamily="34" charset="0"/>
+                <a:ea typeface="Calibri" pitchFamily="34" charset="-122"/>
+                <a:cs typeface="Calibri" pitchFamily="34" charset="-120"/>
+              </a:rPr>
+              <a:t>13 agendadas · 7 sin programar</a:t>
+            </a:r>
+            <a:endParaRPr lang="en-US" sz="950" dirty="0"/>
+          </a:p>
+        </p:txBody>
+      </p:sp>
+      <p:sp>
+        <p:nvSpPr>
+          <p:cNvPr id="10" name="Shape 8"/>
+          <p:cNvSpPr/>
+          <p:nvPr/>
+        </p:nvSpPr>
+        <p:spPr>
+          <a:xfrm>
+            <a:off x="3319272" y="1463040"/>
+            <a:ext cx="2743200" cy="2286000"/>
+          </a:xfrm>
+          <a:prstGeom prst="roundRect">
+            <a:avLst>
+              <a:gd name="adj" fmla="val 3200"/>
+            </a:avLst>
+          </a:prstGeom>
+          <a:solidFill>
+            <a:srgbClr val="FFFFFF"/>
+          </a:solidFill>
+          <a:ln w="12700">
+            <a:solidFill>
+              <a:srgbClr val="E4E9EF"/>
+            </a:solidFill>
+            <a:prstDash val="solid"/>
+          </a:ln>
+          <a:effectLst>
+            <a:outerShdw sx="100000" sy="100000" kx="0" ky="0" algn="bl" rotWithShape="0" blurRad="88900" dist="25400" dir="5400000">
+              <a:srgbClr val="9AA7B5">
+                <a:alpha val="28000"/>
+              </a:srgbClr>
+            </a:outerShdw>
+          </a:effectLst>
+        </p:spPr>
+      </p:sp>
+      <p:sp>
+        <p:nvSpPr>
+          <p:cNvPr id="11" name="Shape 9"/>
+          <p:cNvSpPr/>
+          <p:nvPr/>
+        </p:nvSpPr>
+        <p:spPr>
+          <a:xfrm>
+            <a:off x="3575304" y="1719072"/>
+            <a:ext cx="146304" cy="146304"/>
+          </a:xfrm>
+          <a:prstGeom prst="ellipse">
+            <a:avLst/>
+          </a:prstGeom>
+          <a:solidFill>
+            <a:srgbClr val="2E6FB5"/>
+          </a:solidFill>
+          <a:ln/>
+        </p:spPr>
+      </p:sp>
+      <p:sp>
+        <p:nvSpPr>
+          <p:cNvPr id="12" name="Text 10"/>
+          <p:cNvSpPr/>
+          <p:nvPr/>
+        </p:nvSpPr>
+        <p:spPr>
+          <a:xfrm>
+            <a:off x="3575304" y="1938528"/>
+            <a:ext cx="2286000" cy="749808"/>
+          </a:xfrm>
+          <a:prstGeom prst="rect">
+            <a:avLst/>
+          </a:prstGeom>
+          <a:noFill/>
+          <a:ln/>
+        </p:spPr>
+        <p:txBody>
+          <a:bodyPr wrap="square" lIns="0" tIns="0" rIns="0" bIns="0" rtlCol="0" anchor="ctr"/>
+          <a:lstStyle/>
+          <a:p>
+            <a:pPr indent="0" marL="0">
+              <a:buNone/>
+            </a:pPr>
+            <a:r>
+              <a:rPr lang="en-US" sz="3800" b="1" dirty="0">
+                <a:solidFill>
+                  <a:srgbClr val="2E6FB5"/>
+                </a:solidFill>
+                <a:latin typeface="Cambria" pitchFamily="34" charset="0"/>
+                <a:ea typeface="Cambria" pitchFamily="34" charset="-122"/>
+                <a:cs typeface="Cambria" pitchFamily="34" charset="-120"/>
+              </a:rPr>
+              <a:t>77,6%</a:t>
+            </a:r>
+            <a:endParaRPr lang="en-US" sz="3800" dirty="0"/>
+          </a:p>
+        </p:txBody>
+      </p:sp>
+      <p:sp>
+        <p:nvSpPr>
+          <p:cNvPr id="13" name="Text 11"/>
+          <p:cNvSpPr/>
+          <p:nvPr/>
+        </p:nvSpPr>
+        <p:spPr>
+          <a:xfrm>
+            <a:off x="3593592" y="2697480"/>
+            <a:ext cx="2286000" cy="292608"/>
+          </a:xfrm>
+          <a:prstGeom prst="rect">
+            <a:avLst/>
+          </a:prstGeom>
+          <a:noFill/>
+          <a:ln/>
+        </p:spPr>
+        <p:txBody>
+          <a:bodyPr wrap="square" lIns="0" tIns="0" rIns="0" bIns="0" rtlCol="0" anchor="ctr"/>
+          <a:lstStyle/>
+          <a:p>
+            <a:pPr indent="0" marL="0">
+              <a:buNone/>
+            </a:pPr>
+            <a:r>
+              <a:rPr lang="en-US" sz="1300" b="1" dirty="0">
+                <a:solidFill>
+                  <a:srgbClr val="1A2433"/>
+                </a:solidFill>
+                <a:latin typeface="Calibri" pitchFamily="34" charset="0"/>
+                <a:ea typeface="Calibri" pitchFamily="34" charset="-122"/>
+                <a:cs typeface="Calibri" pitchFamily="34" charset="-120"/>
+              </a:rPr>
+              <a:t>170/219</a:t>
+            </a:r>
+            <a:endParaRPr lang="en-US" sz="1300" dirty="0"/>
+          </a:p>
+        </p:txBody>
+      </p:sp>
+      <p:sp>
+        <p:nvSpPr>
+          <p:cNvPr id="14" name="Text 12"/>
+          <p:cNvSpPr/>
+          <p:nvPr/>
+        </p:nvSpPr>
+        <p:spPr>
+          <a:xfrm>
+            <a:off x="3593592" y="2990088"/>
+            <a:ext cx="2240280" cy="292608"/>
+          </a:xfrm>
+          <a:prstGeom prst="rect">
+            <a:avLst/>
+          </a:prstGeom>
+          <a:noFill/>
+          <a:ln/>
+        </p:spPr>
+        <p:txBody>
+          <a:bodyPr wrap="square" lIns="0" tIns="0" rIns="0" bIns="0" rtlCol="0" anchor="ctr"/>
+          <a:lstStyle/>
+          <a:p>
+            <a:pPr indent="0" marL="0">
+              <a:buNone/>
+            </a:pPr>
+            <a:r>
+              <a:rPr lang="en-US" sz="1200" dirty="0">
+                <a:solidFill>
+                  <a:srgbClr val="56606E"/>
+                </a:solidFill>
+                <a:latin typeface="Calibri" pitchFamily="34" charset="0"/>
+                <a:ea typeface="Calibri" pitchFamily="34" charset="-122"/>
+                <a:cs typeface="Calibri" pitchFamily="34" charset="-120"/>
+              </a:rPr>
+              <a:t>Caminata 2 realizada</a:t>
+            </a:r>
+            <a:endParaRPr lang="en-US" sz="1200" dirty="0"/>
+          </a:p>
+        </p:txBody>
+      </p:sp>
+      <p:sp>
+        <p:nvSpPr>
+          <p:cNvPr id="15" name="Text 13"/>
+          <p:cNvSpPr/>
+          <p:nvPr/>
+        </p:nvSpPr>
+        <p:spPr>
+          <a:xfrm>
+            <a:off x="3593592" y="3273552"/>
+            <a:ext cx="2240280" cy="420624"/>
+          </a:xfrm>
+          <a:prstGeom prst="rect">
+            <a:avLst/>
+          </a:prstGeom>
+          <a:noFill/>
+          <a:ln/>
+        </p:spPr>
+        <p:txBody>
+          <a:bodyPr wrap="square" lIns="0" tIns="0" rIns="0" bIns="0" rtlCol="0" anchor="ctr"/>
+          <a:lstStyle/>
+          <a:p>
+            <a:pPr indent="0" marL="0">
+              <a:lnSpc>
+                <a:spcPts val="1200"/>
+              </a:lnSpc>
+              <a:buNone/>
+            </a:pPr>
+            <a:r>
+              <a:rPr lang="en-US" sz="950" dirty="0">
+                <a:solidFill>
+                  <a:srgbClr val="56606E"/>
+                </a:solidFill>
+                <a:latin typeface="Calibri" pitchFamily="34" charset="0"/>
+                <a:ea typeface="Calibri" pitchFamily="34" charset="-122"/>
+                <a:cs typeface="Calibri" pitchFamily="34" charset="-120"/>
+              </a:rPr>
+              <a:t>40 agendadas · 9 sin programar</a:t>
+            </a:r>
+            <a:endParaRPr lang="en-US" sz="950" dirty="0"/>
+          </a:p>
+        </p:txBody>
+      </p:sp>
+      <p:sp>
+        <p:nvSpPr>
+          <p:cNvPr id="16" name="Shape 14"/>
+          <p:cNvSpPr/>
+          <p:nvPr/>
+        </p:nvSpPr>
+        <p:spPr>
+          <a:xfrm>
+            <a:off x="6181344" y="1463040"/>
+            <a:ext cx="2743200" cy="2286000"/>
+          </a:xfrm>
+          <a:prstGeom prst="roundRect">
+            <a:avLst>
+              <a:gd name="adj" fmla="val 3200"/>
+            </a:avLst>
+          </a:prstGeom>
+          <a:solidFill>
+            <a:srgbClr val="FFFFFF"/>
+          </a:solidFill>
+          <a:ln w="12700">
+            <a:solidFill>
+              <a:srgbClr val="E4E9EF"/>
+            </a:solidFill>
+            <a:prstDash val="solid"/>
+          </a:ln>
+          <a:effectLst>
+            <a:outerShdw sx="100000" sy="100000" kx="0" ky="0" algn="bl" rotWithShape="0" blurRad="88900" dist="25400" dir="5400000">
+              <a:srgbClr val="9AA7B5">
+                <a:alpha val="28000"/>
+              </a:srgbClr>
+            </a:outerShdw>
+          </a:effectLst>
+        </p:spPr>
+      </p:sp>
+      <p:sp>
+        <p:nvSpPr>
+          <p:cNvPr id="17" name="Shape 15"/>
+          <p:cNvSpPr/>
+          <p:nvPr/>
+        </p:nvSpPr>
+        <p:spPr>
+          <a:xfrm>
+            <a:off x="6437376" y="1719072"/>
+            <a:ext cx="146304" cy="146304"/>
+          </a:xfrm>
+          <a:prstGeom prst="ellipse">
+            <a:avLst/>
+          </a:prstGeom>
+          <a:solidFill>
+            <a:srgbClr val="C87A32"/>
+          </a:solidFill>
+          <a:ln/>
+        </p:spPr>
+      </p:sp>
+      <p:sp>
+        <p:nvSpPr>
+          <p:cNvPr id="18" name="Text 16"/>
+          <p:cNvSpPr/>
+          <p:nvPr/>
+        </p:nvSpPr>
+        <p:spPr>
+          <a:xfrm>
+            <a:off x="6437376" y="1938528"/>
+            <a:ext cx="2286000" cy="749808"/>
+          </a:xfrm>
+          <a:prstGeom prst="rect">
+            <a:avLst/>
+          </a:prstGeom>
+          <a:noFill/>
+          <a:ln/>
+        </p:spPr>
+        <p:txBody>
+          <a:bodyPr wrap="square" lIns="0" tIns="0" rIns="0" bIns="0" rtlCol="0" anchor="ctr"/>
+          <a:lstStyle/>
+          <a:p>
+            <a:pPr indent="0" marL="0">
+              <a:buNone/>
+            </a:pPr>
+            <a:r>
+              <a:rPr lang="en-US" sz="3800" b="1" dirty="0">
+                <a:solidFill>
+                  <a:srgbClr val="C87A32"/>
+                </a:solidFill>
+                <a:latin typeface="Cambria" pitchFamily="34" charset="0"/>
+                <a:ea typeface="Cambria" pitchFamily="34" charset="-122"/>
+                <a:cs typeface="Cambria" pitchFamily="34" charset="-120"/>
+              </a:rPr>
+              <a:t>91,1%</a:t>
+            </a:r>
+            <a:endParaRPr lang="en-US" sz="3800" dirty="0"/>
+          </a:p>
+        </p:txBody>
+      </p:sp>
+      <p:sp>
+        <p:nvSpPr>
+          <p:cNvPr id="19" name="Text 17"/>
+          <p:cNvSpPr/>
+          <p:nvPr/>
+        </p:nvSpPr>
+        <p:spPr>
+          <a:xfrm>
+            <a:off x="6455664" y="2697480"/>
+            <a:ext cx="2286000" cy="292608"/>
+          </a:xfrm>
+          <a:prstGeom prst="rect">
+            <a:avLst/>
+          </a:prstGeom>
+          <a:noFill/>
+          <a:ln/>
+        </p:spPr>
+        <p:txBody>
+          <a:bodyPr wrap="square" lIns="0" tIns="0" rIns="0" bIns="0" rtlCol="0" anchor="ctr"/>
+          <a:lstStyle/>
+          <a:p>
+            <a:pPr indent="0" marL="0">
+              <a:buNone/>
+            </a:pPr>
+            <a:r>
+              <a:rPr lang="en-US" sz="1300" b="1" dirty="0">
+                <a:solidFill>
+                  <a:srgbClr val="1A2433"/>
+                </a:solidFill>
+                <a:latin typeface="Calibri" pitchFamily="34" charset="0"/>
+                <a:ea typeface="Calibri" pitchFamily="34" charset="-122"/>
+                <a:cs typeface="Calibri" pitchFamily="34" charset="-120"/>
+              </a:rPr>
+              <a:t>159/219 sobre 95%</a:t>
+            </a:r>
+            <a:endParaRPr lang="en-US" sz="1300" dirty="0"/>
+          </a:p>
+        </p:txBody>
+      </p:sp>
+      <p:sp>
+        <p:nvSpPr>
+          <p:cNvPr id="20" name="Text 18"/>
+          <p:cNvSpPr/>
+          <p:nvPr/>
+        </p:nvSpPr>
+        <p:spPr>
+          <a:xfrm>
+            <a:off x="6455664" y="2990088"/>
+            <a:ext cx="2240280" cy="292608"/>
+          </a:xfrm>
+          <a:prstGeom prst="rect">
+            <a:avLst/>
+          </a:prstGeom>
+          <a:noFill/>
+          <a:ln/>
+        </p:spPr>
+        <p:txBody>
+          <a:bodyPr wrap="square" lIns="0" tIns="0" rIns="0" bIns="0" rtlCol="0" anchor="ctr"/>
+          <a:lstStyle/>
+          <a:p>
+            <a:pPr indent="0" marL="0">
+              <a:buNone/>
+            </a:pPr>
+            <a:r>
+              <a:rPr lang="en-US" sz="1200" dirty="0">
+                <a:solidFill>
+                  <a:srgbClr val="56606E"/>
+                </a:solidFill>
+                <a:latin typeface="Calibri" pitchFamily="34" charset="0"/>
+                <a:ea typeface="Calibri" pitchFamily="34" charset="-122"/>
+                <a:cs typeface="Calibri" pitchFamily="34" charset="-120"/>
+              </a:rPr>
+              <a:t>Avance PEC de carpetas</a:t>
+            </a:r>
+            <a:endParaRPr lang="en-US" sz="1200" dirty="0"/>
+          </a:p>
+        </p:txBody>
+      </p:sp>
+      <p:sp>
+        <p:nvSpPr>
+          <p:cNvPr id="21" name="Text 19"/>
+          <p:cNvSpPr/>
+          <p:nvPr/>
+        </p:nvSpPr>
+        <p:spPr>
+          <a:xfrm>
+            <a:off x="6455664" y="3273552"/>
+            <a:ext cx="2240280" cy="420624"/>
+          </a:xfrm>
+          <a:prstGeom prst="rect">
+            <a:avLst/>
+          </a:prstGeom>
+          <a:noFill/>
+          <a:ln/>
+        </p:spPr>
+        <p:txBody>
+          <a:bodyPr wrap="square" lIns="0" tIns="0" rIns="0" bIns="0" rtlCol="0" anchor="ctr"/>
+          <a:lstStyle/>
+          <a:p>
+            <a:pPr indent="0" marL="0">
+              <a:lnSpc>
+                <a:spcPts val="1200"/>
+              </a:lnSpc>
+              <a:buNone/>
+            </a:pPr>
+            <a:r>
+              <a:rPr lang="en-US" sz="950" dirty="0">
+                <a:solidFill>
+                  <a:srgbClr val="56606E"/>
+                </a:solidFill>
+                <a:latin typeface="Calibri" pitchFamily="34" charset="0"/>
+                <a:ea typeface="Calibri" pitchFamily="34" charset="-122"/>
+                <a:cs typeface="Calibri" pitchFamily="34" charset="-120"/>
+              </a:rPr>
+              <a:t>10 subsistemas bajo 80% de avance</a:t>
+            </a:r>
+            <a:endParaRPr lang="en-US" sz="950" dirty="0"/>
+          </a:p>
+        </p:txBody>
+      </p:sp>
+      <p:sp>
+        <p:nvSpPr>
+          <p:cNvPr id="22" name="Shape 20"/>
+          <p:cNvSpPr/>
+          <p:nvPr/>
+        </p:nvSpPr>
+        <p:spPr>
+          <a:xfrm>
+            <a:off x="9043416" y="1463040"/>
+            <a:ext cx="2743200" cy="2286000"/>
+          </a:xfrm>
+          <a:prstGeom prst="roundRect">
+            <a:avLst>
+              <a:gd name="adj" fmla="val 3200"/>
+            </a:avLst>
+          </a:prstGeom>
+          <a:solidFill>
+            <a:srgbClr val="FFFFFF"/>
+          </a:solidFill>
+          <a:ln w="12700">
+            <a:solidFill>
+              <a:srgbClr val="E4E9EF"/>
+            </a:solidFill>
+            <a:prstDash val="solid"/>
+          </a:ln>
+          <a:effectLst>
+            <a:outerShdw sx="100000" sy="100000" kx="0" ky="0" algn="bl" rotWithShape="0" blurRad="88900" dist="25400" dir="5400000">
+              <a:srgbClr val="9AA7B5">
+                <a:alpha val="28000"/>
+              </a:srgbClr>
+            </a:outerShdw>
+          </a:effectLst>
+        </p:spPr>
+      </p:sp>
+      <p:sp>
+        <p:nvSpPr>
+          <p:cNvPr id="23" name="Shape 21"/>
+          <p:cNvSpPr/>
+          <p:nvPr/>
+        </p:nvSpPr>
+        <p:spPr>
+          <a:xfrm>
+            <a:off x="9299448" y="1719072"/>
+            <a:ext cx="146304" cy="146304"/>
+          </a:xfrm>
+          <a:prstGeom prst="ellipse">
+            <a:avLst/>
+          </a:prstGeom>
+          <a:solidFill>
+            <a:srgbClr val="C0392B"/>
+          </a:solidFill>
+          <a:ln/>
+        </p:spPr>
+      </p:sp>
+      <p:sp>
+        <p:nvSpPr>
+          <p:cNvPr id="24" name="Text 22"/>
+          <p:cNvSpPr/>
+          <p:nvPr/>
+        </p:nvSpPr>
+        <p:spPr>
+          <a:xfrm>
+            <a:off x="9299448" y="1938528"/>
+            <a:ext cx="2286000" cy="749808"/>
+          </a:xfrm>
+          <a:prstGeom prst="rect">
+            <a:avLst/>
+          </a:prstGeom>
+          <a:noFill/>
+          <a:ln/>
+        </p:spPr>
+        <p:txBody>
+          <a:bodyPr wrap="square" lIns="0" tIns="0" rIns="0" bIns="0" rtlCol="0" anchor="ctr"/>
+          <a:lstStyle/>
+          <a:p>
+            <a:pPr indent="0" marL="0">
+              <a:buNone/>
+            </a:pPr>
+            <a:r>
+              <a:rPr lang="en-US" sz="3800" b="1" dirty="0">
+                <a:solidFill>
+                  <a:srgbClr val="C0392B"/>
+                </a:solidFill>
+                <a:latin typeface="Cambria" pitchFamily="34" charset="0"/>
+                <a:ea typeface="Cambria" pitchFamily="34" charset="-122"/>
+                <a:cs typeface="Cambria" pitchFamily="34" charset="-120"/>
+              </a:rPr>
+              <a:t>93,4%</a:t>
+            </a:r>
+            <a:endParaRPr lang="en-US" sz="3800" dirty="0"/>
+          </a:p>
+        </p:txBody>
+      </p:sp>
+      <p:sp>
+        <p:nvSpPr>
+          <p:cNvPr id="25" name="Text 23"/>
+          <p:cNvSpPr/>
+          <p:nvPr/>
+        </p:nvSpPr>
+        <p:spPr>
+          <a:xfrm>
+            <a:off x="9317736" y="2697480"/>
+            <a:ext cx="2286000" cy="292608"/>
+          </a:xfrm>
+          <a:prstGeom prst="rect">
+            <a:avLst/>
+          </a:prstGeom>
+          <a:noFill/>
+          <a:ln/>
+        </p:spPr>
+        <p:txBody>
+          <a:bodyPr wrap="square" lIns="0" tIns="0" rIns="0" bIns="0" rtlCol="0" anchor="ctr"/>
+          <a:lstStyle/>
+          <a:p>
+            <a:pPr indent="0" marL="0">
+              <a:buNone/>
+            </a:pPr>
+            <a:r>
+              <a:rPr lang="en-US" sz="1300" b="1" dirty="0">
+                <a:solidFill>
+                  <a:srgbClr val="1A2433"/>
+                </a:solidFill>
+                <a:latin typeface="Calibri" pitchFamily="34" charset="0"/>
+                <a:ea typeface="Calibri" pitchFamily="34" charset="-122"/>
+                <a:cs typeface="Calibri" pitchFamily="34" charset="-120"/>
+              </a:rPr>
+              <a:t>313/335</a:t>
+            </a:r>
+            <a:endParaRPr lang="en-US" sz="1300" dirty="0"/>
+          </a:p>
+        </p:txBody>
+      </p:sp>
+      <p:sp>
+        <p:nvSpPr>
+          <p:cNvPr id="26" name="Text 24"/>
+          <p:cNvSpPr/>
+          <p:nvPr/>
+        </p:nvSpPr>
+        <p:spPr>
+          <a:xfrm>
+            <a:off x="9317736" y="2990088"/>
+            <a:ext cx="2240280" cy="292608"/>
+          </a:xfrm>
+          <a:prstGeom prst="rect">
+            <a:avLst/>
+          </a:prstGeom>
+          <a:noFill/>
+          <a:ln/>
+        </p:spPr>
+        <p:txBody>
+          <a:bodyPr wrap="square" lIns="0" tIns="0" rIns="0" bIns="0" rtlCol="0" anchor="ctr"/>
+          <a:lstStyle/>
+          <a:p>
+            <a:pPr indent="0" marL="0">
+              <a:buNone/>
+            </a:pPr>
+            <a:r>
+              <a:rPr lang="en-US" sz="1200" dirty="0">
+                <a:solidFill>
+                  <a:srgbClr val="56606E"/>
+                </a:solidFill>
+                <a:latin typeface="Calibri" pitchFamily="34" charset="0"/>
+                <a:ea typeface="Calibri" pitchFamily="34" charset="-122"/>
+                <a:cs typeface="Calibri" pitchFamily="34" charset="-120"/>
+              </a:rPr>
+              <a:t>Cierre de DT P1</a:t>
+            </a:r>
+            <a:endParaRPr lang="en-US" sz="1200" dirty="0"/>
+          </a:p>
+        </p:txBody>
+      </p:sp>
+      <p:sp>
+        <p:nvSpPr>
+          <p:cNvPr id="27" name="Text 25"/>
+          <p:cNvSpPr/>
+          <p:nvPr/>
+        </p:nvSpPr>
+        <p:spPr>
+          <a:xfrm>
+            <a:off x="9317736" y="3273552"/>
+            <a:ext cx="2240280" cy="420624"/>
+          </a:xfrm>
+          <a:prstGeom prst="rect">
+            <a:avLst/>
+          </a:prstGeom>
+          <a:noFill/>
+          <a:ln/>
+        </p:spPr>
+        <p:txBody>
+          <a:bodyPr wrap="square" lIns="0" tIns="0" rIns="0" bIns="0" rtlCol="0" anchor="ctr"/>
+          <a:lstStyle/>
+          <a:p>
+            <a:pPr indent="0" marL="0">
+              <a:lnSpc>
+                <a:spcPts val="1200"/>
+              </a:lnSpc>
+              <a:buNone/>
+            </a:pPr>
+            <a:r>
+              <a:rPr lang="en-US" sz="950" dirty="0">
+                <a:solidFill>
+                  <a:srgbClr val="56606E"/>
+                </a:solidFill>
+                <a:latin typeface="Calibri" pitchFamily="34" charset="0"/>
+                <a:ea typeface="Calibri" pitchFamily="34" charset="-122"/>
+                <a:cs typeface="Calibri" pitchFamily="34" charset="-120"/>
+              </a:rPr>
+              <a:t>22 abiertos · 13 atrasados</a:t>
+            </a:r>
+            <a:endParaRPr lang="en-US" sz="950" dirty="0"/>
+          </a:p>
+        </p:txBody>
+      </p:sp>
+      <p:sp>
+        <p:nvSpPr>
+          <p:cNvPr id="28" name="Shape 26"/>
+          <p:cNvSpPr/>
+          <p:nvPr/>
+        </p:nvSpPr>
+        <p:spPr>
+          <a:xfrm>
+            <a:off x="457200" y="3950208"/>
+            <a:ext cx="11274552" cy="2212848"/>
+          </a:xfrm>
+          <a:prstGeom prst="roundRect">
+            <a:avLst>
+              <a:gd name="adj" fmla="val 2479"/>
+            </a:avLst>
+          </a:prstGeom>
+          <a:solidFill>
+            <a:srgbClr val="12233B"/>
+          </a:solidFill>
+          <a:ln/>
+        </p:spPr>
+      </p:sp>
+      <p:sp>
+        <p:nvSpPr>
+          <p:cNvPr id="29" name="Text 27"/>
+          <p:cNvSpPr/>
+          <p:nvPr/>
+        </p:nvSpPr>
+        <p:spPr>
+          <a:xfrm>
+            <a:off x="777240" y="4114800"/>
+            <a:ext cx="5486400" cy="274320"/>
+          </a:xfrm>
+          <a:prstGeom prst="rect">
+            <a:avLst/>
+          </a:prstGeom>
+          <a:noFill/>
+          <a:ln/>
+        </p:spPr>
+        <p:txBody>
+          <a:bodyPr wrap="square" lIns="0" tIns="0" rIns="0" bIns="0" rtlCol="0" anchor="ctr"/>
+          <a:lstStyle/>
+          <a:p>
+            <a:pPr indent="0" marL="0">
+              <a:buNone/>
+            </a:pPr>
+            <a:r>
+              <a:rPr lang="en-US" sz="1100" b="1" spc="200" kern="0" dirty="0">
+                <a:solidFill>
+                  <a:srgbClr val="E3A55B"/>
+                </a:solidFill>
+                <a:latin typeface="Calibri" pitchFamily="34" charset="0"/>
+                <a:ea typeface="Calibri" pitchFamily="34" charset="-122"/>
+                <a:cs typeface="Calibri" pitchFamily="34" charset="-120"/>
+              </a:rPr>
+              <a:t>LECTURA DEL PERÍODO</a:t>
+            </a:r>
+            <a:endParaRPr lang="en-US" sz="1100" dirty="0"/>
+          </a:p>
+        </p:txBody>
+      </p:sp>
+      <p:sp>
+        <p:nvSpPr>
+          <p:cNvPr id="30" name="Shape 28"/>
+          <p:cNvSpPr/>
+          <p:nvPr/>
+        </p:nvSpPr>
+        <p:spPr>
+          <a:xfrm>
+            <a:off x="822960" y="4498848"/>
+            <a:ext cx="109728" cy="109728"/>
+          </a:xfrm>
+          <a:prstGeom prst="ellipse">
+            <a:avLst/>
+          </a:prstGeom>
+          <a:solidFill>
+            <a:srgbClr val="C87A32"/>
+          </a:solidFill>
+          <a:ln/>
+        </p:spPr>
+      </p:sp>
+      <p:sp>
+        <p:nvSpPr>
+          <p:cNvPr id="31" name="Text 29"/>
+          <p:cNvSpPr/>
+          <p:nvPr/>
+        </p:nvSpPr>
+        <p:spPr>
+          <a:xfrm>
+            <a:off x="1051560" y="4398264"/>
+            <a:ext cx="10424160" cy="457200"/>
+          </a:xfrm>
+          <a:prstGeom prst="rect">
+            <a:avLst/>
+          </a:prstGeom>
+          <a:noFill/>
+          <a:ln/>
+        </p:spPr>
+        <p:txBody>
+          <a:bodyPr wrap="square" lIns="0" tIns="0" rIns="0" bIns="0" rtlCol="0" anchor="t"/>
+          <a:lstStyle/>
+          <a:p>
+            <a:pPr indent="0" marL="0">
+              <a:lnSpc>
+                <a:spcPts val="1500"/>
+              </a:lnSpc>
+              <a:buNone/>
+            </a:pPr>
+            <a:r>
+              <a:rPr lang="en-US" sz="1150" b="1" dirty="0">
+                <a:solidFill>
+                  <a:srgbClr val="FFFFFF"/>
+                </a:solidFill>
+                <a:latin typeface="Calibri" pitchFamily="34" charset="0"/>
+                <a:ea typeface="Calibri" pitchFamily="34" charset="-122"/>
+                <a:cs typeface="Calibri" pitchFamily="34" charset="-120"/>
+              </a:rPr>
+              <a:t>P1 está prácticamente cerrado; el volumen pendiente está en las prioridades menores.  </a:t>
+            </a:r>
+            <a:pPr indent="0" marL="0">
+              <a:lnSpc>
+                <a:spcPts val="1500"/>
+              </a:lnSpc>
+              <a:buNone/>
+            </a:pPr>
+            <a:r>
+              <a:rPr lang="en-US" sz="1150" dirty="0">
+                <a:solidFill>
+                  <a:srgbClr val="DCE6F0"/>
+                </a:solidFill>
+                <a:latin typeface="Calibri" pitchFamily="34" charset="0"/>
+                <a:ea typeface="Calibri" pitchFamily="34" charset="-122"/>
+                <a:cs typeface="Calibri" pitchFamily="34" charset="-120"/>
+              </a:rPr>
+              <a:t>93,4% de cierre en P1 (22 abiertos), pero 483 DT abiertos entre P2, P3 y P4 sobre un total de 505.</a:t>
+            </a:r>
+            <a:endParaRPr lang="en-US" sz="1150" dirty="0"/>
+          </a:p>
+        </p:txBody>
+      </p:sp>
+      <p:sp>
+        <p:nvSpPr>
+          <p:cNvPr id="32" name="Shape 30"/>
+          <p:cNvSpPr/>
+          <p:nvPr/>
+        </p:nvSpPr>
+        <p:spPr>
+          <a:xfrm>
+            <a:off x="822960" y="4919472"/>
+            <a:ext cx="109728" cy="109728"/>
+          </a:xfrm>
+          <a:prstGeom prst="ellipse">
+            <a:avLst/>
+          </a:prstGeom>
+          <a:solidFill>
+            <a:srgbClr val="C87A32"/>
+          </a:solidFill>
+          <a:ln/>
+        </p:spPr>
+      </p:sp>
+      <p:sp>
+        <p:nvSpPr>
+          <p:cNvPr id="33" name="Text 31"/>
+          <p:cNvSpPr/>
+          <p:nvPr/>
+        </p:nvSpPr>
+        <p:spPr>
+          <a:xfrm>
+            <a:off x="1051560" y="4818888"/>
+            <a:ext cx="10424160" cy="457200"/>
+          </a:xfrm>
+          <a:prstGeom prst="rect">
+            <a:avLst/>
+          </a:prstGeom>
+          <a:noFill/>
+          <a:ln/>
+        </p:spPr>
+        <p:txBody>
+          <a:bodyPr wrap="square" lIns="0" tIns="0" rIns="0" bIns="0" rtlCol="0" anchor="t"/>
+          <a:lstStyle/>
+          <a:p>
+            <a:pPr indent="0" marL="0">
+              <a:lnSpc>
+                <a:spcPts val="1500"/>
+              </a:lnSpc>
+              <a:buNone/>
+            </a:pPr>
+            <a:r>
+              <a:rPr lang="en-US" sz="1150" b="1" dirty="0">
+                <a:solidFill>
+                  <a:srgbClr val="FFFFFF"/>
+                </a:solidFill>
+                <a:latin typeface="Calibri" pitchFamily="34" charset="0"/>
+                <a:ea typeface="Calibri" pitchFamily="34" charset="-122"/>
+                <a:cs typeface="Calibri" pitchFamily="34" charset="-120"/>
+              </a:rPr>
+              <a:t>El atraso es más antiguo que el de los otros proyectos.  </a:t>
+            </a:r>
+            <a:pPr indent="0" marL="0">
+              <a:lnSpc>
+                <a:spcPts val="1500"/>
+              </a:lnSpc>
+              <a:buNone/>
+            </a:pPr>
+            <a:r>
+              <a:rPr lang="en-US" sz="1150" dirty="0">
+                <a:solidFill>
+                  <a:srgbClr val="DCE6F0"/>
+                </a:solidFill>
+                <a:latin typeface="Calibri" pitchFamily="34" charset="0"/>
+                <a:ea typeface="Calibri" pitchFamily="34" charset="-122"/>
+                <a:cs typeface="Calibri" pitchFamily="34" charset="-120"/>
+              </a:rPr>
+              <a:t>206 DT con la fecha de compromiso vencida; mediana de 36 días y el más antiguo lleva 189. Los 215 abiertos sin fecha de compromiso no se cuentan como atrasados.</a:t>
+            </a:r>
+            <a:endParaRPr lang="en-US" sz="1150" dirty="0"/>
+          </a:p>
+        </p:txBody>
+      </p:sp>
+      <p:sp>
+        <p:nvSpPr>
+          <p:cNvPr id="34" name="Shape 32"/>
+          <p:cNvSpPr/>
+          <p:nvPr/>
+        </p:nvSpPr>
+        <p:spPr>
+          <a:xfrm>
+            <a:off x="822960" y="5340096"/>
+            <a:ext cx="109728" cy="109728"/>
+          </a:xfrm>
+          <a:prstGeom prst="ellipse">
+            <a:avLst/>
+          </a:prstGeom>
+          <a:solidFill>
+            <a:srgbClr val="C87A32"/>
+          </a:solidFill>
+          <a:ln/>
+        </p:spPr>
+      </p:sp>
+      <p:sp>
+        <p:nvSpPr>
+          <p:cNvPr id="35" name="Text 33"/>
+          <p:cNvSpPr/>
+          <p:nvPr/>
+        </p:nvSpPr>
+        <p:spPr>
+          <a:xfrm>
+            <a:off x="1051560" y="5239512"/>
+            <a:ext cx="10424160" cy="457200"/>
+          </a:xfrm>
+          <a:prstGeom prst="rect">
+            <a:avLst/>
+          </a:prstGeom>
+          <a:noFill/>
+          <a:ln/>
+        </p:spPr>
+        <p:txBody>
+          <a:bodyPr wrap="square" lIns="0" tIns="0" rIns="0" bIns="0" rtlCol="0" anchor="t"/>
+          <a:lstStyle/>
+          <a:p>
+            <a:pPr indent="0" marL="0">
+              <a:lnSpc>
+                <a:spcPts val="1500"/>
+              </a:lnSpc>
+              <a:buNone/>
+            </a:pPr>
+            <a:r>
+              <a:rPr lang="en-US" sz="1150" b="1" dirty="0">
+                <a:solidFill>
+                  <a:srgbClr val="FFFFFF"/>
+                </a:solidFill>
+                <a:latin typeface="Calibri" pitchFamily="34" charset="0"/>
+                <a:ea typeface="Calibri" pitchFamily="34" charset="-122"/>
+                <a:cs typeface="Calibri" pitchFamily="34" charset="-120"/>
+              </a:rPr>
+              <a:t>Las caminatas 1 están casi completas, pero la 2 va 77,6%.  </a:t>
+            </a:r>
+            <a:pPr indent="0" marL="0">
+              <a:lnSpc>
+                <a:spcPts val="1500"/>
+              </a:lnSpc>
+              <a:buNone/>
+            </a:pPr>
+            <a:r>
+              <a:rPr lang="en-US" sz="1150" dirty="0">
+                <a:solidFill>
+                  <a:srgbClr val="DCE6F0"/>
+                </a:solidFill>
+                <a:latin typeface="Calibri" pitchFamily="34" charset="0"/>
+                <a:ea typeface="Calibri" pitchFamily="34" charset="-122"/>
+                <a:cs typeface="Calibri" pitchFamily="34" charset="-120"/>
+              </a:rPr>
+              <a:t>Caminata 1: 199/219. Caminata 2: 170/219, con 40 ya agendadas y 9 sin programar.</a:t>
+            </a:r>
+            <a:endParaRPr lang="en-US" sz="1150" dirty="0"/>
+          </a:p>
+        </p:txBody>
+      </p:sp>
+      <p:sp>
+        <p:nvSpPr>
+          <p:cNvPr id="36" name="Shape 34"/>
+          <p:cNvSpPr/>
+          <p:nvPr/>
+        </p:nvSpPr>
+        <p:spPr>
+          <a:xfrm>
+            <a:off x="822960" y="5760720"/>
+            <a:ext cx="109728" cy="109728"/>
+          </a:xfrm>
+          <a:prstGeom prst="ellipse">
+            <a:avLst/>
+          </a:prstGeom>
+          <a:solidFill>
+            <a:srgbClr val="C87A32"/>
+          </a:solidFill>
+          <a:ln/>
+        </p:spPr>
+      </p:sp>
+      <p:sp>
+        <p:nvSpPr>
+          <p:cNvPr id="37" name="Text 35"/>
+          <p:cNvSpPr/>
+          <p:nvPr/>
+        </p:nvSpPr>
+        <p:spPr>
+          <a:xfrm>
+            <a:off x="1051560" y="5660136"/>
+            <a:ext cx="10424160" cy="457200"/>
+          </a:xfrm>
+          <a:prstGeom prst="rect">
+            <a:avLst/>
+          </a:prstGeom>
+          <a:noFill/>
+          <a:ln/>
+        </p:spPr>
+        <p:txBody>
+          <a:bodyPr wrap="square" lIns="0" tIns="0" rIns="0" bIns="0" rtlCol="0" anchor="t"/>
+          <a:lstStyle/>
+          <a:p>
+            <a:pPr indent="0" marL="0">
+              <a:lnSpc>
+                <a:spcPts val="1500"/>
+              </a:lnSpc>
+              <a:buNone/>
+            </a:pPr>
+            <a:r>
+              <a:rPr lang="en-US" sz="1150" b="1" dirty="0">
+                <a:solidFill>
+                  <a:srgbClr val="FFFFFF"/>
+                </a:solidFill>
+                <a:latin typeface="Calibri" pitchFamily="34" charset="0"/>
+                <a:ea typeface="Calibri" pitchFamily="34" charset="-122"/>
+                <a:cs typeface="Calibri" pitchFamily="34" charset="-120"/>
+              </a:rPr>
+              <a:t>Las carpetas avanzan bien salvo un grupo acotado.  </a:t>
+            </a:r>
+            <a:pPr indent="0" marL="0">
+              <a:lnSpc>
+                <a:spcPts val="1500"/>
+              </a:lnSpc>
+              <a:buNone/>
+            </a:pPr>
+            <a:r>
+              <a:rPr lang="en-US" sz="1150" dirty="0">
+                <a:solidFill>
+                  <a:srgbClr val="DCE6F0"/>
+                </a:solidFill>
+                <a:latin typeface="Calibri" pitchFamily="34" charset="0"/>
+                <a:ea typeface="Calibri" pitchFamily="34" charset="-122"/>
+                <a:cs typeface="Calibri" pitchFamily="34" charset="-120"/>
+              </a:rPr>
+              <a:t>Avance promedio 91,1%: 159 subsistemas sobre 95% y solo 10 bajo 80%. El archivo declara 0 carpetas en revisión del cliente.</a:t>
+            </a:r>
+            <a:endParaRPr lang="en-US" sz="1150" dirty="0"/>
+          </a:p>
+        </p:txBody>
+      </p:sp>
+      <p:sp>
+        <p:nvSpPr>
+          <p:cNvPr id="38" name="Text 36"/>
+          <p:cNvSpPr/>
+          <p:nvPr/>
+        </p:nvSpPr>
+        <p:spPr>
+          <a:xfrm>
+            <a:off x="457200" y="6473952"/>
+            <a:ext cx="9692640" cy="274320"/>
+          </a:xfrm>
+          <a:prstGeom prst="rect">
+            <a:avLst/>
+          </a:prstGeom>
+          <a:noFill/>
+          <a:ln/>
+        </p:spPr>
+        <p:txBody>
+          <a:bodyPr wrap="square" lIns="0" tIns="0" rIns="0" bIns="0" rtlCol="0" anchor="ctr"/>
+          <a:lstStyle/>
+          <a:p>
+            <a:pPr algn="l" indent="0" marL="0">
+              <a:buNone/>
+            </a:pPr>
+            <a:r>
+              <a:rPr lang="en-US" sz="850" dirty="0">
+                <a:solidFill>
+                  <a:srgbClr val="56606E"/>
+                </a:solidFill>
+                <a:latin typeface="Calibri" pitchFamily="34" charset="0"/>
+                <a:ea typeface="Calibri" pitchFamily="34" charset="-122"/>
+                <a:cs typeface="Calibri" pitchFamily="34" charset="-120"/>
+              </a:rPr>
+              <a:t>Fuente: TalabreSTATUS_PEC + TalabreCuadro_DT · 219 subsistemas · 1.951 DT · Atrasos al 27-07-2026</a:t>
+            </a:r>
+            <a:endParaRPr lang="en-US" sz="850" dirty="0"/>
+          </a:p>
+        </p:txBody>
+      </p:sp>
+      <p:sp>
+        <p:nvSpPr>
+          <p:cNvPr id="39" name="Text 37"/>
+          <p:cNvSpPr/>
+          <p:nvPr/>
+        </p:nvSpPr>
+        <p:spPr>
+          <a:xfrm>
+            <a:off x="11430000" y="6473952"/>
+            <a:ext cx="365760" cy="274320"/>
+          </a:xfrm>
+          <a:prstGeom prst="rect">
+            <a:avLst/>
+          </a:prstGeom>
+          <a:noFill/>
+          <a:ln/>
+        </p:spPr>
+        <p:txBody>
+          <a:bodyPr wrap="square" lIns="0" tIns="0" rIns="0" bIns="0" rtlCol="0" anchor="ctr"/>
+          <a:lstStyle/>
+          <a:p>
+            <a:pPr algn="r" indent="0" marL="0">
+              <a:buNone/>
+            </a:pPr>
+            <a:r>
+              <a:rPr lang="en-US" sz="900" dirty="0">
+                <a:solidFill>
+                  <a:srgbClr val="56606E"/>
+                </a:solidFill>
+                <a:latin typeface="Calibri" pitchFamily="34" charset="0"/>
+                <a:ea typeface="Calibri" pitchFamily="34" charset="-122"/>
+                <a:cs typeface="Calibri" pitchFamily="34" charset="-120"/>
+              </a:rPr>
+              <a:t>14</a:t>
+            </a:r>
+            <a:endParaRPr lang="en-US" sz="900" dirty="0"/>
+          </a:p>
+        </p:txBody>
+      </p:sp>
+    </p:spTree>
+  </p:cSld>
+  <p:clrMapOvr>
+    <a:masterClrMapping/>
+  </p:clrMapOvr>
+</p:sld>
+</file>
+
+<file path=ppt/slides/slide15.xml><?xml version="1.0" encoding="utf-8"?>
+<p:sld xmlns:a="http://schemas.openxmlformats.org/drawingml/2006/main" xmlns:r="http://schemas.openxmlformats.org/officeDocument/2006/relationships" xmlns:p="http://schemas.openxmlformats.org/presentationml/2006/main">
+  <p:cSld name="Slide 15">
+    <p:bg>
+      <p:bgPr>
+        <a:solidFill>
+          <a:srgbClr val="F4F6F9"/>
+        </a:solidFill>
+      </p:bgPr>
+    </p:bg>
+    <p:spTree>
+      <p:nvGrpSpPr>
+        <p:cNvPr id="1" name=""/>
+        <p:cNvGrpSpPr/>
+        <p:nvPr/>
+      </p:nvGrpSpPr>
+      <p:grpSpPr>
+        <a:xfrm>
+          <a:off x="0" y="0"/>
+          <a:ext cx="0" cy="0"/>
+          <a:chOff x="0" y="0"/>
+          <a:chExt cx="0" cy="0"/>
+        </a:xfrm>
+      </p:grpSpPr>
+      <p:sp>
+        <p:nvSpPr>
+          <p:cNvPr id="2" name="Text 0"/>
+          <p:cNvSpPr/>
+          <p:nvPr/>
+        </p:nvSpPr>
+        <p:spPr>
+          <a:xfrm>
+            <a:off x="457200" y="411480"/>
+            <a:ext cx="7315200" cy="256032"/>
+          </a:xfrm>
+          <a:prstGeom prst="rect">
+            <a:avLst/>
+          </a:prstGeom>
+          <a:noFill/>
+          <a:ln/>
+        </p:spPr>
+        <p:txBody>
+          <a:bodyPr wrap="square" lIns="0" tIns="0" rIns="0" bIns="0" rtlCol="0" anchor="ctr"/>
+          <a:lstStyle/>
+          <a:p>
+            <a:pPr algn="l" indent="0" marL="0">
+              <a:buNone/>
+            </a:pPr>
+            <a:r>
+              <a:rPr lang="en-US" sz="1100" b="1" spc="200" kern="0" dirty="0">
+                <a:solidFill>
+                  <a:srgbClr val="C87A32"/>
+                </a:solidFill>
+                <a:latin typeface="Calibri" pitchFamily="34" charset="0"/>
+                <a:ea typeface="Calibri" pitchFamily="34" charset="-122"/>
+                <a:cs typeface="Calibri" pitchFamily="34" charset="-120"/>
+              </a:rPr>
+              <a:t>TALABRE · FRENTES 1 Y 2</a:t>
+            </a:r>
+            <a:endParaRPr lang="en-US" sz="1100" dirty="0"/>
+          </a:p>
+        </p:txBody>
+      </p:sp>
+      <p:sp>
+        <p:nvSpPr>
+          <p:cNvPr id="3" name="Text 1"/>
+          <p:cNvSpPr/>
+          <p:nvPr/>
+        </p:nvSpPr>
+        <p:spPr>
+          <a:xfrm>
+            <a:off x="457200" y="658368"/>
+            <a:ext cx="11247120" cy="548640"/>
+          </a:xfrm>
+          <a:prstGeom prst="rect">
+            <a:avLst/>
+          </a:prstGeom>
+          <a:noFill/>
+          <a:ln/>
+        </p:spPr>
+        <p:txBody>
+          <a:bodyPr wrap="square" lIns="0" tIns="0" rIns="0" bIns="0" rtlCol="0" anchor="ctr"/>
+          <a:lstStyle/>
+          <a:p>
+            <a:pPr indent="0" marL="0">
+              <a:buNone/>
+            </a:pPr>
+            <a:r>
+              <a:rPr lang="en-US" sz="3000" b="1" dirty="0">
+                <a:solidFill>
+                  <a:srgbClr val="1A2433"/>
+                </a:solidFill>
+                <a:latin typeface="Cambria" pitchFamily="34" charset="0"/>
+                <a:ea typeface="Cambria" pitchFamily="34" charset="-122"/>
+                <a:cs typeface="Cambria" pitchFamily="34" charset="-120"/>
+              </a:rPr>
+              <a:t>Caminatas y avance de carpetas</a:t>
+            </a:r>
+            <a:endParaRPr lang="en-US" sz="3000" dirty="0"/>
+          </a:p>
+        </p:txBody>
+      </p:sp>
+      <p:sp>
+        <p:nvSpPr>
+          <p:cNvPr id="4" name="Text 2"/>
+          <p:cNvSpPr/>
+          <p:nvPr/>
+        </p:nvSpPr>
+        <p:spPr>
+          <a:xfrm>
+            <a:off x="457200" y="1234440"/>
+            <a:ext cx="11247120" cy="457200"/>
+          </a:xfrm>
+          <a:prstGeom prst="rect">
+            <a:avLst/>
+          </a:prstGeom>
+          <a:noFill/>
+          <a:ln/>
+        </p:spPr>
+        <p:txBody>
+          <a:bodyPr wrap="square" lIns="0" tIns="0" rIns="0" bIns="0" rtlCol="0" anchor="ctr"/>
+          <a:lstStyle/>
+          <a:p>
+            <a:pPr indent="0" marL="0">
+              <a:buNone/>
+            </a:pPr>
+            <a:r>
+              <a:rPr lang="en-US" sz="1350" dirty="0">
+                <a:solidFill>
+                  <a:srgbClr val="56606E"/>
+                </a:solidFill>
+                <a:latin typeface="Calibri" pitchFamily="34" charset="0"/>
+                <a:ea typeface="Calibri" pitchFamily="34" charset="-122"/>
+                <a:cs typeface="Calibri" pitchFamily="34" charset="-120"/>
+              </a:rPr>
+              <a:t>Caminata 2 realizada en 170 de 219 subsistemas (77,6%). Talabre mide la carpeta como % de avance (PEC), no como estado de aprobación.</a:t>
+            </a:r>
+            <a:endParaRPr lang="en-US" sz="1350" dirty="0"/>
+          </a:p>
+        </p:txBody>
+      </p:sp>
+      <p:graphicFrame>
+        <p:nvGraphicFramePr>
+          <p:cNvPr id="5" name="Chart 0" descr=""/>
+          <p:cNvGraphicFramePr/>
+          <p:nvPr/>
+        </p:nvGraphicFramePr>
+        <p:xfrm>
+          <a:off x="457200" y="1874520"/>
+          <a:ext cx="5852160" cy="4114800"/>
+        </p:xfrm>
+        <a:graphic xmlns:a="http://schemas.openxmlformats.org/drawingml/2006/main">
+          <a:graphicData uri="http://schemas.openxmlformats.org/drawingml/2006/chart">
+            <c:chart xmlns:c="http://schemas.openxmlformats.org/drawingml/2006/chart" r:id="rId1"/>
+          </a:graphicData>
+        </a:graphic>
+      </p:graphicFrame>
+      <p:graphicFrame>
+        <p:nvGraphicFramePr>
+          <p:cNvPr id="6" name="Chart 1" descr=""/>
+          <p:cNvGraphicFramePr/>
+          <p:nvPr/>
+        </p:nvGraphicFramePr>
+        <p:xfrm>
+          <a:off x="6446520" y="1874520"/>
+          <a:ext cx="5285232" cy="4114800"/>
+        </p:xfrm>
+        <a:graphic xmlns:a="http://schemas.openxmlformats.org/drawingml/2006/main">
+          <a:graphicData uri="http://schemas.openxmlformats.org/drawingml/2006/chart">
+            <c:chart xmlns:c="http://schemas.openxmlformats.org/drawingml/2006/chart" r:id="rId2"/>
+          </a:graphicData>
+        </a:graphic>
+      </p:graphicFrame>
+      <p:sp>
+        <p:nvSpPr>
+          <p:cNvPr id="7" name="Text 3"/>
+          <p:cNvSpPr/>
+          <p:nvPr/>
+        </p:nvSpPr>
+        <p:spPr>
+          <a:xfrm>
+            <a:off x="457200" y="6473952"/>
+            <a:ext cx="9692640" cy="274320"/>
+          </a:xfrm>
+          <a:prstGeom prst="rect">
+            <a:avLst/>
+          </a:prstGeom>
+          <a:noFill/>
+          <a:ln/>
+        </p:spPr>
+        <p:txBody>
+          <a:bodyPr wrap="square" lIns="0" tIns="0" rIns="0" bIns="0" rtlCol="0" anchor="ctr"/>
+          <a:lstStyle/>
+          <a:p>
+            <a:pPr algn="l" indent="0" marL="0">
+              <a:buNone/>
+            </a:pPr>
+            <a:r>
+              <a:rPr lang="en-US" sz="850" dirty="0">
+                <a:solidFill>
+                  <a:srgbClr val="56606E"/>
+                </a:solidFill>
+                <a:latin typeface="Calibri" pitchFamily="34" charset="0"/>
+                <a:ea typeface="Calibri" pitchFamily="34" charset="-122"/>
+                <a:cs typeface="Calibri" pitchFamily="34" charset="-120"/>
+              </a:rPr>
+              <a:t>Fuente: TalabreSTATUS_PEC + TalabreCuadro_DT · 219 subsistemas · 1.951 DT · Atrasos al 27-07-2026</a:t>
+            </a:r>
+            <a:endParaRPr lang="en-US" sz="850" dirty="0"/>
+          </a:p>
+        </p:txBody>
+      </p:sp>
+      <p:sp>
+        <p:nvSpPr>
+          <p:cNvPr id="8" name="Text 4"/>
+          <p:cNvSpPr/>
+          <p:nvPr/>
+        </p:nvSpPr>
+        <p:spPr>
+          <a:xfrm>
+            <a:off x="11430000" y="6473952"/>
+            <a:ext cx="365760" cy="274320"/>
+          </a:xfrm>
+          <a:prstGeom prst="rect">
+            <a:avLst/>
+          </a:prstGeom>
+          <a:noFill/>
+          <a:ln/>
+        </p:spPr>
+        <p:txBody>
+          <a:bodyPr wrap="square" lIns="0" tIns="0" rIns="0" bIns="0" rtlCol="0" anchor="ctr"/>
+          <a:lstStyle/>
+          <a:p>
+            <a:pPr algn="r" indent="0" marL="0">
+              <a:buNone/>
+            </a:pPr>
+            <a:r>
+              <a:rPr lang="en-US" sz="900" dirty="0">
+                <a:solidFill>
+                  <a:srgbClr val="56606E"/>
+                </a:solidFill>
+                <a:latin typeface="Calibri" pitchFamily="34" charset="0"/>
+                <a:ea typeface="Calibri" pitchFamily="34" charset="-122"/>
+                <a:cs typeface="Calibri" pitchFamily="34" charset="-120"/>
+              </a:rPr>
+              <a:t>15</a:t>
+            </a:r>
+            <a:endParaRPr lang="en-US" sz="900" dirty="0"/>
+          </a:p>
+        </p:txBody>
+      </p:sp>
+    </p:spTree>
+  </p:cSld>
+  <p:clrMapOvr>
+    <a:masterClrMapping/>
+  </p:clrMapOvr>
+</p:sld>
+</file>
+
+<file path=ppt/slides/slide16.xml><?xml version="1.0" encoding="utf-8"?>
+<p:sld xmlns:a="http://schemas.openxmlformats.org/drawingml/2006/main" xmlns:r="http://schemas.openxmlformats.org/officeDocument/2006/relationships" xmlns:p="http://schemas.openxmlformats.org/presentationml/2006/main">
+  <p:cSld name="Slide 16">
+    <p:bg>
+      <p:bgPr>
+        <a:solidFill>
+          <a:srgbClr val="F4F6F9"/>
+        </a:solidFill>
+      </p:bgPr>
+    </p:bg>
+    <p:spTree>
+      <p:nvGrpSpPr>
+        <p:cNvPr id="1" name=""/>
+        <p:cNvGrpSpPr/>
+        <p:nvPr/>
+      </p:nvGrpSpPr>
+      <p:grpSpPr>
+        <a:xfrm>
+          <a:off x="0" y="0"/>
+          <a:ext cx="0" cy="0"/>
+          <a:chOff x="0" y="0"/>
+          <a:chExt cx="0" cy="0"/>
+        </a:xfrm>
+      </p:grpSpPr>
+      <p:sp>
+        <p:nvSpPr>
+          <p:cNvPr id="2" name="Text 0"/>
+          <p:cNvSpPr/>
+          <p:nvPr/>
+        </p:nvSpPr>
+        <p:spPr>
+          <a:xfrm>
+            <a:off x="457200" y="411480"/>
+            <a:ext cx="7315200" cy="256032"/>
+          </a:xfrm>
+          <a:prstGeom prst="rect">
+            <a:avLst/>
+          </a:prstGeom>
+          <a:noFill/>
+          <a:ln/>
+        </p:spPr>
+        <p:txBody>
+          <a:bodyPr wrap="square" lIns="0" tIns="0" rIns="0" bIns="0" rtlCol="0" anchor="ctr"/>
+          <a:lstStyle/>
+          <a:p>
+            <a:pPr algn="l" indent="0" marL="0">
+              <a:buNone/>
+            </a:pPr>
+            <a:r>
+              <a:rPr lang="en-US" sz="1100" b="1" spc="200" kern="0" dirty="0">
+                <a:solidFill>
+                  <a:srgbClr val="C87A32"/>
+                </a:solidFill>
+                <a:latin typeface="Calibri" pitchFamily="34" charset="0"/>
+                <a:ea typeface="Calibri" pitchFamily="34" charset="-122"/>
+                <a:cs typeface="Calibri" pitchFamily="34" charset="-120"/>
+              </a:rPr>
+              <a:t>TALABRE · FRENTE 3</a:t>
+            </a:r>
+            <a:endParaRPr lang="en-US" sz="1100" dirty="0"/>
+          </a:p>
+        </p:txBody>
+      </p:sp>
+      <p:sp>
+        <p:nvSpPr>
+          <p:cNvPr id="3" name="Text 1"/>
+          <p:cNvSpPr/>
+          <p:nvPr/>
+        </p:nvSpPr>
+        <p:spPr>
+          <a:xfrm>
+            <a:off x="457200" y="658368"/>
+            <a:ext cx="11247120" cy="548640"/>
+          </a:xfrm>
+          <a:prstGeom prst="rect">
+            <a:avLst/>
+          </a:prstGeom>
+          <a:noFill/>
+          <a:ln/>
+        </p:spPr>
+        <p:txBody>
+          <a:bodyPr wrap="square" lIns="0" tIns="0" rIns="0" bIns="0" rtlCol="0" anchor="ctr"/>
+          <a:lstStyle/>
+          <a:p>
+            <a:pPr indent="0" marL="0">
+              <a:buNone/>
+            </a:pPr>
+            <a:r>
+              <a:rPr lang="en-US" sz="3000" b="1" dirty="0">
+                <a:solidFill>
+                  <a:srgbClr val="1A2433"/>
+                </a:solidFill>
+                <a:latin typeface="Cambria" pitchFamily="34" charset="0"/>
+                <a:ea typeface="Cambria" pitchFamily="34" charset="-122"/>
+                <a:cs typeface="Cambria" pitchFamily="34" charset="-120"/>
+              </a:rPr>
+              <a:t>Detalles de terminación</a:t>
+            </a:r>
+            <a:endParaRPr lang="en-US" sz="3000" dirty="0"/>
+          </a:p>
+        </p:txBody>
+      </p:sp>
+      <p:sp>
+        <p:nvSpPr>
+          <p:cNvPr id="4" name="Text 2"/>
+          <p:cNvSpPr/>
+          <p:nvPr/>
+        </p:nvSpPr>
+        <p:spPr>
+          <a:xfrm>
+            <a:off x="457200" y="1234440"/>
+            <a:ext cx="11247120" cy="457200"/>
+          </a:xfrm>
+          <a:prstGeom prst="rect">
+            <a:avLst/>
+          </a:prstGeom>
+          <a:noFill/>
+          <a:ln/>
+        </p:spPr>
+        <p:txBody>
+          <a:bodyPr wrap="square" lIns="0" tIns="0" rIns="0" bIns="0" rtlCol="0" anchor="ctr"/>
+          <a:lstStyle/>
+          <a:p>
+            <a:pPr indent="0" marL="0">
+              <a:buNone/>
+            </a:pPr>
+            <a:r>
+              <a:rPr lang="en-US" sz="1350" dirty="0">
+                <a:solidFill>
+                  <a:srgbClr val="56606E"/>
+                </a:solidFill>
+                <a:latin typeface="Calibri" pitchFamily="34" charset="0"/>
+                <a:ea typeface="Calibri" pitchFamily="34" charset="-122"/>
+                <a:cs typeface="Calibri" pitchFamily="34" charset="-120"/>
+              </a:rPr>
+              <a:t>1.951 DT levantados; 74,1% cerrados. Atrasado = DT abierto cuya fecha de compromiso de cierre ya venció al 27-07-2026.</a:t>
+            </a:r>
+            <a:endParaRPr lang="en-US" sz="1350" dirty="0"/>
+          </a:p>
+        </p:txBody>
+      </p:sp>
+      <p:graphicFrame>
+        <p:nvGraphicFramePr>
+          <p:cNvPr id="5" name="Chart 0" descr=""/>
+          <p:cNvGraphicFramePr/>
+          <p:nvPr/>
+        </p:nvGraphicFramePr>
+        <p:xfrm>
+          <a:off x="457200" y="1874520"/>
+          <a:ext cx="7040880" cy="4114800"/>
+        </p:xfrm>
+        <a:graphic xmlns:a="http://schemas.openxmlformats.org/drawingml/2006/main">
+          <a:graphicData uri="http://schemas.openxmlformats.org/drawingml/2006/chart">
+            <c:chart xmlns:c="http://schemas.openxmlformats.org/drawingml/2006/chart" r:id="rId1"/>
+          </a:graphicData>
+        </a:graphic>
+      </p:graphicFrame>
+      <p:sp>
+        <p:nvSpPr>
+          <p:cNvPr id="6" name="Shape 3"/>
+          <p:cNvSpPr/>
+          <p:nvPr/>
+        </p:nvSpPr>
+        <p:spPr>
+          <a:xfrm>
+            <a:off x="7680960" y="1874520"/>
+            <a:ext cx="4050792" cy="4114800"/>
+          </a:xfrm>
+          <a:prstGeom prst="roundRect">
+            <a:avLst>
+              <a:gd name="adj" fmla="val 1354"/>
+            </a:avLst>
+          </a:prstGeom>
+          <a:solidFill>
+            <a:srgbClr val="12233B"/>
+          </a:solidFill>
+          <a:ln/>
+        </p:spPr>
+      </p:sp>
+      <p:sp>
+        <p:nvSpPr>
+          <p:cNvPr id="7" name="Text 4"/>
+          <p:cNvSpPr/>
+          <p:nvPr/>
+        </p:nvSpPr>
+        <p:spPr>
+          <a:xfrm>
+            <a:off x="7936992" y="2084832"/>
+            <a:ext cx="3657600" cy="274320"/>
+          </a:xfrm>
+          <a:prstGeom prst="rect">
+            <a:avLst/>
+          </a:prstGeom>
+          <a:noFill/>
+          <a:ln/>
+        </p:spPr>
+        <p:txBody>
+          <a:bodyPr wrap="square" lIns="0" tIns="0" rIns="0" bIns="0" rtlCol="0" anchor="ctr"/>
+          <a:lstStyle/>
+          <a:p>
+            <a:pPr indent="0" marL="0">
+              <a:buNone/>
+            </a:pPr>
+            <a:r>
+              <a:rPr lang="en-US" sz="1100" b="1" spc="120" kern="0" dirty="0">
+                <a:solidFill>
+                  <a:srgbClr val="E3A55B"/>
+                </a:solidFill>
+                <a:latin typeface="Calibri" pitchFamily="34" charset="0"/>
+                <a:ea typeface="Calibri" pitchFamily="34" charset="-122"/>
+                <a:cs typeface="Calibri" pitchFamily="34" charset="-120"/>
+              </a:rPr>
+              <a:t>CIERRE POR PRIORIDAD</a:t>
+            </a:r>
+            <a:endParaRPr lang="en-US" sz="1100" dirty="0"/>
+          </a:p>
+        </p:txBody>
+      </p:sp>
+      <p:sp>
+        <p:nvSpPr>
+          <p:cNvPr id="8" name="Text 5"/>
+          <p:cNvSpPr/>
+          <p:nvPr/>
+        </p:nvSpPr>
+        <p:spPr>
+          <a:xfrm>
+            <a:off x="7936992" y="2487168"/>
+            <a:ext cx="914400" cy="237744"/>
+          </a:xfrm>
+          <a:prstGeom prst="rect">
+            <a:avLst/>
+          </a:prstGeom>
+          <a:noFill/>
+          <a:ln/>
+        </p:spPr>
+        <p:txBody>
+          <a:bodyPr wrap="square" lIns="0" tIns="0" rIns="0" bIns="0" rtlCol="0" anchor="ctr"/>
+          <a:lstStyle/>
+          <a:p>
+            <a:pPr indent="0" marL="0">
+              <a:buNone/>
+            </a:pPr>
+            <a:r>
+              <a:rPr lang="en-US" sz="1150" b="1" dirty="0">
+                <a:solidFill>
+                  <a:srgbClr val="FFFFFF"/>
+                </a:solidFill>
+                <a:latin typeface="Calibri" pitchFamily="34" charset="0"/>
+                <a:ea typeface="Calibri" pitchFamily="34" charset="-122"/>
+                <a:cs typeface="Calibri" pitchFamily="34" charset="-120"/>
+              </a:rPr>
+              <a:t>P1</a:t>
+            </a:r>
+            <a:endParaRPr lang="en-US" sz="1150" dirty="0"/>
+          </a:p>
+        </p:txBody>
+      </p:sp>
+      <p:sp>
+        <p:nvSpPr>
+          <p:cNvPr id="9" name="Text 6"/>
+          <p:cNvSpPr/>
+          <p:nvPr/>
+        </p:nvSpPr>
+        <p:spPr>
+          <a:xfrm>
+            <a:off x="8778240" y="2487168"/>
+            <a:ext cx="1463040" cy="237744"/>
+          </a:xfrm>
+          <a:prstGeom prst="rect">
+            <a:avLst/>
+          </a:prstGeom>
+          <a:noFill/>
+          <a:ln/>
+        </p:spPr>
+        <p:txBody>
+          <a:bodyPr wrap="square" lIns="0" tIns="0" rIns="0" bIns="0" rtlCol="0" anchor="ctr"/>
+          <a:lstStyle/>
+          <a:p>
+            <a:pPr algn="r" indent="0" marL="0">
+              <a:buNone/>
+            </a:pPr>
+            <a:r>
+              <a:rPr lang="en-US" sz="1050" dirty="0">
+                <a:solidFill>
+                  <a:srgbClr val="DCE6F0"/>
+                </a:solidFill>
+                <a:latin typeface="Calibri" pitchFamily="34" charset="0"/>
+                <a:ea typeface="Calibri" pitchFamily="34" charset="-122"/>
+                <a:cs typeface="Calibri" pitchFamily="34" charset="-120"/>
+              </a:rPr>
+              <a:t>313/335</a:t>
+            </a:r>
+            <a:endParaRPr lang="en-US" sz="1050" dirty="0"/>
+          </a:p>
+        </p:txBody>
+      </p:sp>
+      <p:sp>
+        <p:nvSpPr>
+          <p:cNvPr id="10" name="Text 7"/>
+          <p:cNvSpPr/>
+          <p:nvPr/>
+        </p:nvSpPr>
+        <p:spPr>
+          <a:xfrm>
+            <a:off x="10287000" y="2487168"/>
+            <a:ext cx="1234440" cy="237744"/>
+          </a:xfrm>
+          <a:prstGeom prst="rect">
+            <a:avLst/>
+          </a:prstGeom>
+          <a:noFill/>
+          <a:ln/>
+        </p:spPr>
+        <p:txBody>
+          <a:bodyPr wrap="square" lIns="0" tIns="0" rIns="0" bIns="0" rtlCol="0" anchor="ctr"/>
+          <a:lstStyle/>
+          <a:p>
+            <a:pPr algn="r" indent="0" marL="0">
+              <a:buNone/>
+            </a:pPr>
+            <a:r>
+              <a:rPr lang="en-US" sz="1100" b="1" dirty="0">
+                <a:solidFill>
+                  <a:srgbClr val="FFFFFF"/>
+                </a:solidFill>
+                <a:latin typeface="Calibri" pitchFamily="34" charset="0"/>
+                <a:ea typeface="Calibri" pitchFamily="34" charset="-122"/>
+                <a:cs typeface="Calibri" pitchFamily="34" charset="-120"/>
+              </a:rPr>
+              <a:t>93,4%</a:t>
+            </a:r>
+            <a:endParaRPr lang="en-US" sz="1100" dirty="0"/>
+          </a:p>
+        </p:txBody>
+      </p:sp>
+      <p:sp>
+        <p:nvSpPr>
+          <p:cNvPr id="11" name="Shape 8"/>
+          <p:cNvSpPr/>
+          <p:nvPr/>
+        </p:nvSpPr>
+        <p:spPr>
+          <a:xfrm>
+            <a:off x="7936992" y="2761488"/>
+            <a:ext cx="3566160" cy="118872"/>
+          </a:xfrm>
+          <a:prstGeom prst="rect">
+            <a:avLst/>
+          </a:prstGeom>
+          <a:solidFill>
+            <a:srgbClr val="1B3252"/>
+          </a:solidFill>
+          <a:ln/>
+        </p:spPr>
+      </p:sp>
+      <p:sp>
+        <p:nvSpPr>
+          <p:cNvPr id="12" name="Shape 9"/>
+          <p:cNvSpPr/>
+          <p:nvPr/>
+        </p:nvSpPr>
+        <p:spPr>
+          <a:xfrm>
+            <a:off x="7936992" y="2761488"/>
+            <a:ext cx="3330793" cy="118872"/>
+          </a:xfrm>
+          <a:prstGeom prst="rect">
+            <a:avLst/>
+          </a:prstGeom>
+          <a:solidFill>
+            <a:srgbClr val="2E9E5B"/>
+          </a:solidFill>
+          <a:ln/>
+        </p:spPr>
+      </p:sp>
+      <p:sp>
+        <p:nvSpPr>
+          <p:cNvPr id="13" name="Text 10"/>
+          <p:cNvSpPr/>
+          <p:nvPr/>
+        </p:nvSpPr>
+        <p:spPr>
+          <a:xfrm>
+            <a:off x="7936992" y="3054096"/>
+            <a:ext cx="914400" cy="237744"/>
+          </a:xfrm>
+          <a:prstGeom prst="rect">
+            <a:avLst/>
+          </a:prstGeom>
+          <a:noFill/>
+          <a:ln/>
+        </p:spPr>
+        <p:txBody>
+          <a:bodyPr wrap="square" lIns="0" tIns="0" rIns="0" bIns="0" rtlCol="0" anchor="ctr"/>
+          <a:lstStyle/>
+          <a:p>
+            <a:pPr indent="0" marL="0">
+              <a:buNone/>
+            </a:pPr>
+            <a:r>
+              <a:rPr lang="en-US" sz="1150" b="1" dirty="0">
+                <a:solidFill>
+                  <a:srgbClr val="FFFFFF"/>
+                </a:solidFill>
+                <a:latin typeface="Calibri" pitchFamily="34" charset="0"/>
+                <a:ea typeface="Calibri" pitchFamily="34" charset="-122"/>
+                <a:cs typeface="Calibri" pitchFamily="34" charset="-120"/>
+              </a:rPr>
+              <a:t>P2</a:t>
+            </a:r>
+            <a:endParaRPr lang="en-US" sz="1150" dirty="0"/>
+          </a:p>
+        </p:txBody>
+      </p:sp>
+      <p:sp>
+        <p:nvSpPr>
+          <p:cNvPr id="14" name="Text 11"/>
+          <p:cNvSpPr/>
+          <p:nvPr/>
+        </p:nvSpPr>
+        <p:spPr>
+          <a:xfrm>
+            <a:off x="8778240" y="3054096"/>
+            <a:ext cx="1463040" cy="237744"/>
+          </a:xfrm>
+          <a:prstGeom prst="rect">
+            <a:avLst/>
+          </a:prstGeom>
+          <a:noFill/>
+          <a:ln/>
+        </p:spPr>
+        <p:txBody>
+          <a:bodyPr wrap="square" lIns="0" tIns="0" rIns="0" bIns="0" rtlCol="0" anchor="ctr"/>
+          <a:lstStyle/>
+          <a:p>
+            <a:pPr algn="r" indent="0" marL="0">
+              <a:buNone/>
+            </a:pPr>
+            <a:r>
+              <a:rPr lang="en-US" sz="1050" dirty="0">
+                <a:solidFill>
+                  <a:srgbClr val="DCE6F0"/>
+                </a:solidFill>
+                <a:latin typeface="Calibri" pitchFamily="34" charset="0"/>
+                <a:ea typeface="Calibri" pitchFamily="34" charset="-122"/>
+                <a:cs typeface="Calibri" pitchFamily="34" charset="-120"/>
+              </a:rPr>
+              <a:t>1.053/1.318</a:t>
+            </a:r>
+            <a:endParaRPr lang="en-US" sz="1050" dirty="0"/>
+          </a:p>
+        </p:txBody>
+      </p:sp>
+      <p:sp>
+        <p:nvSpPr>
+          <p:cNvPr id="15" name="Text 12"/>
+          <p:cNvSpPr/>
+          <p:nvPr/>
+        </p:nvSpPr>
+        <p:spPr>
+          <a:xfrm>
+            <a:off x="10287000" y="3054096"/>
+            <a:ext cx="1234440" cy="237744"/>
+          </a:xfrm>
+          <a:prstGeom prst="rect">
+            <a:avLst/>
+          </a:prstGeom>
+          <a:noFill/>
+          <a:ln/>
+        </p:spPr>
+        <p:txBody>
+          <a:bodyPr wrap="square" lIns="0" tIns="0" rIns="0" bIns="0" rtlCol="0" anchor="ctr"/>
+          <a:lstStyle/>
+          <a:p>
+            <a:pPr algn="r" indent="0" marL="0">
+              <a:buNone/>
+            </a:pPr>
+            <a:r>
+              <a:rPr lang="en-US" sz="1100" b="1" dirty="0">
+                <a:solidFill>
+                  <a:srgbClr val="FFFFFF"/>
+                </a:solidFill>
+                <a:latin typeface="Calibri" pitchFamily="34" charset="0"/>
+                <a:ea typeface="Calibri" pitchFamily="34" charset="-122"/>
+                <a:cs typeface="Calibri" pitchFamily="34" charset="-120"/>
+              </a:rPr>
+              <a:t>79,9%</a:t>
+            </a:r>
+            <a:endParaRPr lang="en-US" sz="1100" dirty="0"/>
+          </a:p>
+        </p:txBody>
+      </p:sp>
+      <p:sp>
+        <p:nvSpPr>
+          <p:cNvPr id="16" name="Shape 13"/>
+          <p:cNvSpPr/>
+          <p:nvPr/>
+        </p:nvSpPr>
+        <p:spPr>
+          <a:xfrm>
+            <a:off x="7936992" y="3328416"/>
+            <a:ext cx="3566160" cy="118872"/>
+          </a:xfrm>
+          <a:prstGeom prst="rect">
+            <a:avLst/>
+          </a:prstGeom>
+          <a:solidFill>
+            <a:srgbClr val="1B3252"/>
+          </a:solidFill>
+          <a:ln/>
+        </p:spPr>
+      </p:sp>
+      <p:sp>
+        <p:nvSpPr>
+          <p:cNvPr id="17" name="Shape 14"/>
+          <p:cNvSpPr/>
+          <p:nvPr/>
+        </p:nvSpPr>
+        <p:spPr>
+          <a:xfrm>
+            <a:off x="7936992" y="3328416"/>
+            <a:ext cx="2849362" cy="118872"/>
+          </a:xfrm>
+          <a:prstGeom prst="rect">
+            <a:avLst/>
+          </a:prstGeom>
+          <a:solidFill>
+            <a:srgbClr val="E3A55B"/>
+          </a:solidFill>
+          <a:ln/>
+        </p:spPr>
+      </p:sp>
+      <p:sp>
+        <p:nvSpPr>
+          <p:cNvPr id="18" name="Text 15"/>
+          <p:cNvSpPr/>
+          <p:nvPr/>
+        </p:nvSpPr>
+        <p:spPr>
+          <a:xfrm>
+            <a:off x="7936992" y="3621024"/>
+            <a:ext cx="914400" cy="237744"/>
+          </a:xfrm>
+          <a:prstGeom prst="rect">
+            <a:avLst/>
+          </a:prstGeom>
+          <a:noFill/>
+          <a:ln/>
+        </p:spPr>
+        <p:txBody>
+          <a:bodyPr wrap="square" lIns="0" tIns="0" rIns="0" bIns="0" rtlCol="0" anchor="ctr"/>
+          <a:lstStyle/>
+          <a:p>
+            <a:pPr indent="0" marL="0">
+              <a:buNone/>
+            </a:pPr>
+            <a:r>
+              <a:rPr lang="en-US" sz="1150" b="1" dirty="0">
+                <a:solidFill>
+                  <a:srgbClr val="FFFFFF"/>
+                </a:solidFill>
+                <a:latin typeface="Calibri" pitchFamily="34" charset="0"/>
+                <a:ea typeface="Calibri" pitchFamily="34" charset="-122"/>
+                <a:cs typeface="Calibri" pitchFamily="34" charset="-120"/>
+              </a:rPr>
+              <a:t>P3</a:t>
+            </a:r>
+            <a:endParaRPr lang="en-US" sz="1150" dirty="0"/>
+          </a:p>
+        </p:txBody>
+      </p:sp>
+      <p:sp>
+        <p:nvSpPr>
+          <p:cNvPr id="19" name="Text 16"/>
+          <p:cNvSpPr/>
+          <p:nvPr/>
+        </p:nvSpPr>
+        <p:spPr>
+          <a:xfrm>
+            <a:off x="8778240" y="3621024"/>
+            <a:ext cx="1463040" cy="237744"/>
+          </a:xfrm>
+          <a:prstGeom prst="rect">
+            <a:avLst/>
+          </a:prstGeom>
+          <a:noFill/>
+          <a:ln/>
+        </p:spPr>
+        <p:txBody>
+          <a:bodyPr wrap="square" lIns="0" tIns="0" rIns="0" bIns="0" rtlCol="0" anchor="ctr"/>
+          <a:lstStyle/>
+          <a:p>
+            <a:pPr algn="r" indent="0" marL="0">
+              <a:buNone/>
+            </a:pPr>
+            <a:r>
+              <a:rPr lang="en-US" sz="1050" dirty="0">
+                <a:solidFill>
+                  <a:srgbClr val="DCE6F0"/>
+                </a:solidFill>
+                <a:latin typeface="Calibri" pitchFamily="34" charset="0"/>
+                <a:ea typeface="Calibri" pitchFamily="34" charset="-122"/>
+                <a:cs typeface="Calibri" pitchFamily="34" charset="-120"/>
+              </a:rPr>
+              <a:t>71/239</a:t>
+            </a:r>
+            <a:endParaRPr lang="en-US" sz="1050" dirty="0"/>
+          </a:p>
+        </p:txBody>
+      </p:sp>
+      <p:sp>
+        <p:nvSpPr>
+          <p:cNvPr id="20" name="Text 17"/>
+          <p:cNvSpPr/>
+          <p:nvPr/>
+        </p:nvSpPr>
+        <p:spPr>
+          <a:xfrm>
+            <a:off x="10287000" y="3621024"/>
+            <a:ext cx="1234440" cy="237744"/>
+          </a:xfrm>
+          <a:prstGeom prst="rect">
+            <a:avLst/>
+          </a:prstGeom>
+          <a:noFill/>
+          <a:ln/>
+        </p:spPr>
+        <p:txBody>
+          <a:bodyPr wrap="square" lIns="0" tIns="0" rIns="0" bIns="0" rtlCol="0" anchor="ctr"/>
+          <a:lstStyle/>
+          <a:p>
+            <a:pPr algn="r" indent="0" marL="0">
+              <a:buNone/>
+            </a:pPr>
+            <a:r>
+              <a:rPr lang="en-US" sz="1100" b="1" dirty="0">
+                <a:solidFill>
+                  <a:srgbClr val="FFFFFF"/>
+                </a:solidFill>
+                <a:latin typeface="Calibri" pitchFamily="34" charset="0"/>
+                <a:ea typeface="Calibri" pitchFamily="34" charset="-122"/>
+                <a:cs typeface="Calibri" pitchFamily="34" charset="-120"/>
+              </a:rPr>
+              <a:t>29,7%</a:t>
+            </a:r>
+            <a:endParaRPr lang="en-US" sz="1100" dirty="0"/>
+          </a:p>
+        </p:txBody>
+      </p:sp>
+      <p:sp>
+        <p:nvSpPr>
+          <p:cNvPr id="21" name="Shape 18"/>
+          <p:cNvSpPr/>
+          <p:nvPr/>
+        </p:nvSpPr>
+        <p:spPr>
+          <a:xfrm>
+            <a:off x="7936992" y="3895344"/>
+            <a:ext cx="3566160" cy="118872"/>
+          </a:xfrm>
+          <a:prstGeom prst="rect">
+            <a:avLst/>
+          </a:prstGeom>
+          <a:solidFill>
+            <a:srgbClr val="1B3252"/>
+          </a:solidFill>
+          <a:ln/>
+        </p:spPr>
+      </p:sp>
+      <p:sp>
+        <p:nvSpPr>
+          <p:cNvPr id="22" name="Shape 19"/>
+          <p:cNvSpPr/>
+          <p:nvPr/>
+        </p:nvSpPr>
+        <p:spPr>
+          <a:xfrm>
+            <a:off x="7936992" y="3895344"/>
+            <a:ext cx="1059150" cy="118872"/>
+          </a:xfrm>
+          <a:prstGeom prst="rect">
+            <a:avLst/>
+          </a:prstGeom>
+          <a:solidFill>
+            <a:srgbClr val="C0392B"/>
+          </a:solidFill>
+          <a:ln/>
+        </p:spPr>
+      </p:sp>
+      <p:sp>
+        <p:nvSpPr>
+          <p:cNvPr id="23" name="Text 20"/>
+          <p:cNvSpPr/>
+          <p:nvPr/>
+        </p:nvSpPr>
+        <p:spPr>
+          <a:xfrm>
+            <a:off x="7936992" y="4187952"/>
+            <a:ext cx="914400" cy="237744"/>
+          </a:xfrm>
+          <a:prstGeom prst="rect">
+            <a:avLst/>
+          </a:prstGeom>
+          <a:noFill/>
+          <a:ln/>
+        </p:spPr>
+        <p:txBody>
+          <a:bodyPr wrap="square" lIns="0" tIns="0" rIns="0" bIns="0" rtlCol="0" anchor="ctr"/>
+          <a:lstStyle/>
+          <a:p>
+            <a:pPr indent="0" marL="0">
+              <a:buNone/>
+            </a:pPr>
+            <a:r>
+              <a:rPr lang="en-US" sz="1150" b="1" dirty="0">
+                <a:solidFill>
+                  <a:srgbClr val="FFFFFF"/>
+                </a:solidFill>
+                <a:latin typeface="Calibri" pitchFamily="34" charset="0"/>
+                <a:ea typeface="Calibri" pitchFamily="34" charset="-122"/>
+                <a:cs typeface="Calibri" pitchFamily="34" charset="-120"/>
+              </a:rPr>
+              <a:t>P4</a:t>
+            </a:r>
+            <a:endParaRPr lang="en-US" sz="1150" dirty="0"/>
+          </a:p>
+        </p:txBody>
+      </p:sp>
+      <p:sp>
+        <p:nvSpPr>
+          <p:cNvPr id="24" name="Text 21"/>
+          <p:cNvSpPr/>
+          <p:nvPr/>
+        </p:nvSpPr>
+        <p:spPr>
+          <a:xfrm>
+            <a:off x="8778240" y="4187952"/>
+            <a:ext cx="1463040" cy="237744"/>
+          </a:xfrm>
+          <a:prstGeom prst="rect">
+            <a:avLst/>
+          </a:prstGeom>
+          <a:noFill/>
+          <a:ln/>
+        </p:spPr>
+        <p:txBody>
+          <a:bodyPr wrap="square" lIns="0" tIns="0" rIns="0" bIns="0" rtlCol="0" anchor="ctr"/>
+          <a:lstStyle/>
+          <a:p>
+            <a:pPr algn="r" indent="0" marL="0">
+              <a:buNone/>
+            </a:pPr>
+            <a:r>
+              <a:rPr lang="en-US" sz="1050" dirty="0">
+                <a:solidFill>
+                  <a:srgbClr val="DCE6F0"/>
+                </a:solidFill>
+                <a:latin typeface="Calibri" pitchFamily="34" charset="0"/>
+                <a:ea typeface="Calibri" pitchFamily="34" charset="-122"/>
+                <a:cs typeface="Calibri" pitchFamily="34" charset="-120"/>
+              </a:rPr>
+              <a:t>0/50</a:t>
+            </a:r>
+            <a:endParaRPr lang="en-US" sz="1050" dirty="0"/>
+          </a:p>
+        </p:txBody>
+      </p:sp>
+      <p:sp>
+        <p:nvSpPr>
+          <p:cNvPr id="25" name="Text 22"/>
+          <p:cNvSpPr/>
+          <p:nvPr/>
+        </p:nvSpPr>
+        <p:spPr>
+          <a:xfrm>
+            <a:off x="10287000" y="4187952"/>
+            <a:ext cx="1234440" cy="237744"/>
+          </a:xfrm>
+          <a:prstGeom prst="rect">
+            <a:avLst/>
+          </a:prstGeom>
+          <a:noFill/>
+          <a:ln/>
+        </p:spPr>
+        <p:txBody>
+          <a:bodyPr wrap="square" lIns="0" tIns="0" rIns="0" bIns="0" rtlCol="0" anchor="ctr"/>
+          <a:lstStyle/>
+          <a:p>
+            <a:pPr algn="r" indent="0" marL="0">
+              <a:buNone/>
+            </a:pPr>
+            <a:r>
+              <a:rPr lang="en-US" sz="1100" b="1" dirty="0">
+                <a:solidFill>
+                  <a:srgbClr val="FFFFFF"/>
+                </a:solidFill>
+                <a:latin typeface="Calibri" pitchFamily="34" charset="0"/>
+                <a:ea typeface="Calibri" pitchFamily="34" charset="-122"/>
+                <a:cs typeface="Calibri" pitchFamily="34" charset="-120"/>
+              </a:rPr>
+              <a:t>0%</a:t>
+            </a:r>
+            <a:endParaRPr lang="en-US" sz="1100" dirty="0"/>
+          </a:p>
+        </p:txBody>
+      </p:sp>
+      <p:sp>
+        <p:nvSpPr>
+          <p:cNvPr id="26" name="Shape 23"/>
+          <p:cNvSpPr/>
+          <p:nvPr/>
+        </p:nvSpPr>
+        <p:spPr>
+          <a:xfrm>
+            <a:off x="7936992" y="4462272"/>
+            <a:ext cx="3566160" cy="118872"/>
+          </a:xfrm>
+          <a:prstGeom prst="rect">
+            <a:avLst/>
+          </a:prstGeom>
+          <a:solidFill>
+            <a:srgbClr val="1B3252"/>
+          </a:solidFill>
+          <a:ln/>
+        </p:spPr>
+      </p:sp>
+      <p:sp>
+        <p:nvSpPr>
+          <p:cNvPr id="27" name="Text 24"/>
+          <p:cNvSpPr/>
+          <p:nvPr/>
+        </p:nvSpPr>
+        <p:spPr>
+          <a:xfrm>
+            <a:off x="7936992" y="4754880"/>
+            <a:ext cx="914400" cy="237744"/>
+          </a:xfrm>
+          <a:prstGeom prst="rect">
+            <a:avLst/>
+          </a:prstGeom>
+          <a:noFill/>
+          <a:ln/>
+        </p:spPr>
+        <p:txBody>
+          <a:bodyPr wrap="square" lIns="0" tIns="0" rIns="0" bIns="0" rtlCol="0" anchor="ctr"/>
+          <a:lstStyle/>
+          <a:p>
+            <a:pPr indent="0" marL="0">
+              <a:buNone/>
+            </a:pPr>
+            <a:r>
+              <a:rPr lang="en-US" sz="1150" b="1" dirty="0">
+                <a:solidFill>
+                  <a:srgbClr val="FFFFFF"/>
+                </a:solidFill>
+                <a:latin typeface="Calibri" pitchFamily="34" charset="0"/>
+                <a:ea typeface="Calibri" pitchFamily="34" charset="-122"/>
+                <a:cs typeface="Calibri" pitchFamily="34" charset="-120"/>
+              </a:rPr>
+              <a:t>Sin asignar</a:t>
+            </a:r>
+            <a:endParaRPr lang="en-US" sz="1150" dirty="0"/>
+          </a:p>
+        </p:txBody>
+      </p:sp>
+      <p:sp>
+        <p:nvSpPr>
+          <p:cNvPr id="28" name="Text 25"/>
+          <p:cNvSpPr/>
+          <p:nvPr/>
+        </p:nvSpPr>
+        <p:spPr>
+          <a:xfrm>
+            <a:off x="8778240" y="4754880"/>
+            <a:ext cx="1463040" cy="237744"/>
+          </a:xfrm>
+          <a:prstGeom prst="rect">
+            <a:avLst/>
+          </a:prstGeom>
+          <a:noFill/>
+          <a:ln/>
+        </p:spPr>
+        <p:txBody>
+          <a:bodyPr wrap="square" lIns="0" tIns="0" rIns="0" bIns="0" rtlCol="0" anchor="ctr"/>
+          <a:lstStyle/>
+          <a:p>
+            <a:pPr algn="r" indent="0" marL="0">
+              <a:buNone/>
+            </a:pPr>
+            <a:r>
+              <a:rPr lang="en-US" sz="1050" dirty="0">
+                <a:solidFill>
+                  <a:srgbClr val="DCE6F0"/>
+                </a:solidFill>
+                <a:latin typeface="Calibri" pitchFamily="34" charset="0"/>
+                <a:ea typeface="Calibri" pitchFamily="34" charset="-122"/>
+                <a:cs typeface="Calibri" pitchFamily="34" charset="-120"/>
+              </a:rPr>
+              <a:t>9/9</a:t>
+            </a:r>
+            <a:endParaRPr lang="en-US" sz="1050" dirty="0"/>
+          </a:p>
+        </p:txBody>
+      </p:sp>
+      <p:sp>
+        <p:nvSpPr>
+          <p:cNvPr id="29" name="Text 26"/>
+          <p:cNvSpPr/>
+          <p:nvPr/>
+        </p:nvSpPr>
+        <p:spPr>
+          <a:xfrm>
+            <a:off x="10287000" y="4754880"/>
+            <a:ext cx="1234440" cy="237744"/>
+          </a:xfrm>
+          <a:prstGeom prst="rect">
+            <a:avLst/>
+          </a:prstGeom>
+          <a:noFill/>
+          <a:ln/>
+        </p:spPr>
+        <p:txBody>
+          <a:bodyPr wrap="square" lIns="0" tIns="0" rIns="0" bIns="0" rtlCol="0" anchor="ctr"/>
+          <a:lstStyle/>
+          <a:p>
+            <a:pPr algn="r" indent="0" marL="0">
+              <a:buNone/>
+            </a:pPr>
+            <a:r>
+              <a:rPr lang="en-US" sz="1100" b="1" dirty="0">
+                <a:solidFill>
+                  <a:srgbClr val="FFFFFF"/>
+                </a:solidFill>
+                <a:latin typeface="Calibri" pitchFamily="34" charset="0"/>
+                <a:ea typeface="Calibri" pitchFamily="34" charset="-122"/>
+                <a:cs typeface="Calibri" pitchFamily="34" charset="-120"/>
+              </a:rPr>
+              <a:t>100%</a:t>
+            </a:r>
+            <a:endParaRPr lang="en-US" sz="1100" dirty="0"/>
+          </a:p>
+        </p:txBody>
+      </p:sp>
+      <p:sp>
+        <p:nvSpPr>
+          <p:cNvPr id="30" name="Shape 27"/>
+          <p:cNvSpPr/>
+          <p:nvPr/>
+        </p:nvSpPr>
+        <p:spPr>
+          <a:xfrm>
+            <a:off x="7936992" y="5029200"/>
+            <a:ext cx="3566160" cy="118872"/>
+          </a:xfrm>
+          <a:prstGeom prst="rect">
+            <a:avLst/>
+          </a:prstGeom>
+          <a:solidFill>
+            <a:srgbClr val="1B3252"/>
+          </a:solidFill>
+          <a:ln/>
+        </p:spPr>
+      </p:sp>
+      <p:sp>
+        <p:nvSpPr>
+          <p:cNvPr id="31" name="Shape 28"/>
+          <p:cNvSpPr/>
+          <p:nvPr/>
+        </p:nvSpPr>
+        <p:spPr>
+          <a:xfrm>
+            <a:off x="7936992" y="5029200"/>
+            <a:ext cx="3566160" cy="118872"/>
+          </a:xfrm>
+          <a:prstGeom prst="rect">
+            <a:avLst/>
+          </a:prstGeom>
+          <a:solidFill>
+            <a:srgbClr val="2E9E5B"/>
+          </a:solidFill>
+          <a:ln/>
+        </p:spPr>
+      </p:sp>
+      <p:sp>
+        <p:nvSpPr>
+          <p:cNvPr id="32" name="Shape 29"/>
+          <p:cNvSpPr/>
+          <p:nvPr/>
+        </p:nvSpPr>
+        <p:spPr>
+          <a:xfrm>
+            <a:off x="7936992" y="5376672"/>
+            <a:ext cx="3566160" cy="0"/>
+          </a:xfrm>
+          <a:prstGeom prst="line">
+            <a:avLst/>
+          </a:prstGeom>
+          <a:noFill/>
+          <a:ln w="12700">
+            <a:solidFill>
+              <a:srgbClr val="1B3252"/>
+            </a:solidFill>
+            <a:prstDash val="solid"/>
+          </a:ln>
+        </p:spPr>
+      </p:sp>
+      <p:sp>
+        <p:nvSpPr>
+          <p:cNvPr id="33" name="Text 30"/>
+          <p:cNvSpPr/>
+          <p:nvPr/>
+        </p:nvSpPr>
+        <p:spPr>
+          <a:xfrm>
+            <a:off x="7936992" y="5504688"/>
+            <a:ext cx="3611880" cy="1097280"/>
+          </a:xfrm>
+          <a:prstGeom prst="rect">
+            <a:avLst/>
+          </a:prstGeom>
+          <a:noFill/>
+          <a:ln/>
+        </p:spPr>
+        <p:txBody>
+          <a:bodyPr wrap="square" lIns="0" tIns="0" rIns="0" bIns="0" rtlCol="0" anchor="t"/>
+          <a:lstStyle/>
+          <a:p>
+            <a:pPr indent="0" marL="0">
+              <a:lnSpc>
+                <a:spcPts val="1400"/>
+              </a:lnSpc>
+              <a:buNone/>
+            </a:pPr>
+            <a:r>
+              <a:rPr lang="en-US" sz="1150" b="1" dirty="0">
+                <a:solidFill>
+                  <a:srgbClr val="E3A55B"/>
+                </a:solidFill>
+                <a:latin typeface="Calibri" pitchFamily="34" charset="0"/>
+                <a:ea typeface="Calibri" pitchFamily="34" charset="-122"/>
+                <a:cs typeface="Calibri" pitchFamily="34" charset="-120"/>
+              </a:rPr>
+              <a:t>Antigüedad del atraso
+</a:t>
+            </a:r>
+            <a:pPr indent="0" marL="0">
+              <a:lnSpc>
+                <a:spcPts val="1400"/>
+              </a:lnSpc>
+              <a:buNone/>
+            </a:pPr>
+            <a:r>
+              <a:rPr lang="en-US" sz="1100" dirty="0">
+                <a:solidFill>
+                  <a:srgbClr val="DCE6F0"/>
+                </a:solidFill>
+                <a:latin typeface="Calibri" pitchFamily="34" charset="0"/>
+                <a:ea typeface="Calibri" pitchFamily="34" charset="-122"/>
+                <a:cs typeface="Calibri" pitchFamily="34" charset="-120"/>
+              </a:rPr>
+              <a:t>Mediana de 36 días vencidos; el más antiguo lleva 189. 91 entre 1-30 días, 86 entre 31-90 días, 28 entre 91-180 días, 1 entre &gt;180 días.</a:t>
+            </a:r>
+            <a:endParaRPr lang="en-US" sz="1150" dirty="0"/>
+          </a:p>
+        </p:txBody>
+      </p:sp>
+      <p:sp>
+        <p:nvSpPr>
+          <p:cNvPr id="34" name="Text 31"/>
+          <p:cNvSpPr/>
+          <p:nvPr/>
+        </p:nvSpPr>
+        <p:spPr>
+          <a:xfrm>
+            <a:off x="457200" y="6473952"/>
+            <a:ext cx="9692640" cy="274320"/>
+          </a:xfrm>
+          <a:prstGeom prst="rect">
+            <a:avLst/>
+          </a:prstGeom>
+          <a:noFill/>
+          <a:ln/>
+        </p:spPr>
+        <p:txBody>
+          <a:bodyPr wrap="square" lIns="0" tIns="0" rIns="0" bIns="0" rtlCol="0" anchor="ctr"/>
+          <a:lstStyle/>
+          <a:p>
+            <a:pPr algn="l" indent="0" marL="0">
+              <a:buNone/>
+            </a:pPr>
+            <a:r>
+              <a:rPr lang="en-US" sz="850" dirty="0">
+                <a:solidFill>
+                  <a:srgbClr val="6E8CA8"/>
+                </a:solidFill>
+                <a:latin typeface="Calibri" pitchFamily="34" charset="0"/>
+                <a:ea typeface="Calibri" pitchFamily="34" charset="-122"/>
+                <a:cs typeface="Calibri" pitchFamily="34" charset="-120"/>
+              </a:rPr>
+              <a:t>Fuente: TalabreSTATUS_PEC + TalabreCuadro_DT · 219 subsistemas · 1.951 DT · Atrasos al 27-07-2026</a:t>
+            </a:r>
+            <a:endParaRPr lang="en-US" sz="850" dirty="0"/>
+          </a:p>
+        </p:txBody>
+      </p:sp>
+      <p:sp>
+        <p:nvSpPr>
+          <p:cNvPr id="35" name="Text 32"/>
+          <p:cNvSpPr/>
+          <p:nvPr/>
+        </p:nvSpPr>
+        <p:spPr>
+          <a:xfrm>
+            <a:off x="11430000" y="6473952"/>
+            <a:ext cx="365760" cy="274320"/>
+          </a:xfrm>
+          <a:prstGeom prst="rect">
+            <a:avLst/>
+          </a:prstGeom>
+          <a:noFill/>
+          <a:ln/>
+        </p:spPr>
+        <p:txBody>
+          <a:bodyPr wrap="square" lIns="0" tIns="0" rIns="0" bIns="0" rtlCol="0" anchor="ctr"/>
+          <a:lstStyle/>
+          <a:p>
+            <a:pPr algn="r" indent="0" marL="0">
+              <a:buNone/>
+            </a:pPr>
+            <a:r>
+              <a:rPr lang="en-US" sz="900" dirty="0">
+                <a:solidFill>
+                  <a:srgbClr val="6E8CA8"/>
+                </a:solidFill>
+                <a:latin typeface="Calibri" pitchFamily="34" charset="0"/>
+                <a:ea typeface="Calibri" pitchFamily="34" charset="-122"/>
+                <a:cs typeface="Calibri" pitchFamily="34" charset="-120"/>
+              </a:rPr>
+              <a:t>16</a:t>
+            </a:r>
+            <a:endParaRPr lang="en-US" sz="900" dirty="0"/>
+          </a:p>
+        </p:txBody>
+      </p:sp>
+    </p:spTree>
+  </p:cSld>
+  <p:clrMapOvr>
+    <a:masterClrMapping/>
+  </p:clrMapOvr>
+</p:sld>
+</file>
+
+<file path=ppt/slides/slide17.xml><?xml version="1.0" encoding="utf-8"?>
+<p:sld xmlns:a="http://schemas.openxmlformats.org/drawingml/2006/main" xmlns:r="http://schemas.openxmlformats.org/officeDocument/2006/relationships" xmlns:p="http://schemas.openxmlformats.org/presentationml/2006/main">
+  <p:cSld name="Slide 17">
+    <p:bg>
+      <p:bgPr>
+        <a:solidFill>
+          <a:srgbClr val="12233B"/>
+        </a:solidFill>
+      </p:bgPr>
+    </p:bg>
+    <p:spTree>
+      <p:nvGrpSpPr>
+        <p:cNvPr id="1" name=""/>
+        <p:cNvGrpSpPr/>
+        <p:nvPr/>
+      </p:nvGrpSpPr>
+      <p:grpSpPr>
+        <a:xfrm>
+          <a:off x="0" y="0"/>
+          <a:ext cx="0" cy="0"/>
+          <a:chOff x="0" y="0"/>
+          <a:chExt cx="0" cy="0"/>
+        </a:xfrm>
+      </p:grpSpPr>
+      <p:sp>
+        <p:nvSpPr>
+          <p:cNvPr id="2" name="Shape 0"/>
+          <p:cNvSpPr/>
+          <p:nvPr/>
+        </p:nvSpPr>
+        <p:spPr>
+          <a:xfrm>
+            <a:off x="9875520" y="-1645920"/>
+            <a:ext cx="4206240" cy="4206240"/>
+          </a:xfrm>
+          <a:prstGeom prst="ellipse">
+            <a:avLst/>
+          </a:prstGeom>
+          <a:solidFill>
+            <a:srgbClr val="1B3252"/>
+          </a:solidFill>
+          <a:ln/>
+        </p:spPr>
+      </p:sp>
+      <p:sp>
+        <p:nvSpPr>
+          <p:cNvPr id="3" name="Text 1"/>
+          <p:cNvSpPr/>
+          <p:nvPr/>
+        </p:nvSpPr>
+        <p:spPr>
+          <a:xfrm>
+            <a:off x="457200" y="457200"/>
+            <a:ext cx="7315200" cy="256032"/>
+          </a:xfrm>
+          <a:prstGeom prst="rect">
+            <a:avLst/>
+          </a:prstGeom>
+          <a:noFill/>
+          <a:ln/>
+        </p:spPr>
+        <p:txBody>
+          <a:bodyPr wrap="square" lIns="0" tIns="0" rIns="0" bIns="0" rtlCol="0" anchor="ctr"/>
+          <a:lstStyle/>
+          <a:p>
+            <a:pPr algn="l" indent="0" marL="0">
+              <a:buNone/>
+            </a:pPr>
+            <a:r>
+              <a:rPr lang="en-US" sz="1100" b="1" spc="200" kern="0" dirty="0">
+                <a:solidFill>
+                  <a:srgbClr val="E3A55B"/>
+                </a:solidFill>
+                <a:latin typeface="Calibri" pitchFamily="34" charset="0"/>
+                <a:ea typeface="Calibri" pitchFamily="34" charset="-122"/>
+                <a:cs typeface="Calibri" pitchFamily="34" charset="-120"/>
+              </a:rPr>
+              <a:t>TALABRE · FOCO DE GESTIÓN</a:t>
+            </a:r>
+            <a:endParaRPr lang="en-US" sz="1100" dirty="0"/>
+          </a:p>
+        </p:txBody>
+      </p:sp>
+      <p:sp>
+        <p:nvSpPr>
+          <p:cNvPr id="4" name="Text 2"/>
+          <p:cNvSpPr/>
+          <p:nvPr/>
+        </p:nvSpPr>
+        <p:spPr>
+          <a:xfrm>
+            <a:off x="457200" y="713232"/>
+            <a:ext cx="10972800" cy="548640"/>
+          </a:xfrm>
+          <a:prstGeom prst="rect">
+            <a:avLst/>
+          </a:prstGeom>
+          <a:noFill/>
+          <a:ln/>
+        </p:spPr>
+        <p:txBody>
+          <a:bodyPr wrap="square" lIns="0" tIns="0" rIns="0" bIns="0" rtlCol="0" anchor="ctr"/>
+          <a:lstStyle/>
+          <a:p>
+            <a:pPr indent="0" marL="0">
+              <a:buNone/>
+            </a:pPr>
+            <a:r>
+              <a:rPr lang="en-US" sz="3000" b="1" dirty="0">
+                <a:solidFill>
+                  <a:srgbClr val="FFFFFF"/>
+                </a:solidFill>
+                <a:latin typeface="Cambria" pitchFamily="34" charset="0"/>
+                <a:ea typeface="Cambria" pitchFamily="34" charset="-122"/>
+                <a:cs typeface="Cambria" pitchFamily="34" charset="-120"/>
+              </a:rPr>
+              <a:t>Dónde poner el esfuerzo esta semana</a:t>
+            </a:r>
+            <a:endParaRPr lang="en-US" sz="3000" dirty="0"/>
+          </a:p>
+        </p:txBody>
+      </p:sp>
+      <p:sp>
+        <p:nvSpPr>
+          <p:cNvPr id="5" name="Shape 3"/>
+          <p:cNvSpPr/>
+          <p:nvPr/>
+        </p:nvSpPr>
+        <p:spPr>
+          <a:xfrm>
+            <a:off x="457200" y="1600200"/>
+            <a:ext cx="5486400" cy="1920240"/>
+          </a:xfrm>
+          <a:prstGeom prst="roundRect">
+            <a:avLst>
+              <a:gd name="adj" fmla="val 3333"/>
+            </a:avLst>
+          </a:prstGeom>
+          <a:solidFill>
+            <a:srgbClr val="1B3252"/>
+          </a:solidFill>
+          <a:ln/>
+        </p:spPr>
+      </p:sp>
+      <p:sp>
+        <p:nvSpPr>
+          <p:cNvPr id="6" name="Text 4"/>
+          <p:cNvSpPr/>
+          <p:nvPr/>
+        </p:nvSpPr>
+        <p:spPr>
+          <a:xfrm>
+            <a:off x="731520" y="1801368"/>
+            <a:ext cx="1005840" cy="640080"/>
+          </a:xfrm>
+          <a:prstGeom prst="rect">
+            <a:avLst/>
+          </a:prstGeom>
+          <a:noFill/>
+          <a:ln/>
+        </p:spPr>
+        <p:txBody>
+          <a:bodyPr wrap="square" lIns="0" tIns="0" rIns="0" bIns="0" rtlCol="0" anchor="ctr"/>
+          <a:lstStyle/>
+          <a:p>
+            <a:pPr indent="0" marL="0">
+              <a:buNone/>
+            </a:pPr>
+            <a:r>
+              <a:rPr lang="en-US" sz="3400" b="1" dirty="0">
+                <a:solidFill>
+                  <a:srgbClr val="C0392B"/>
+                </a:solidFill>
+                <a:latin typeface="Cambria" pitchFamily="34" charset="0"/>
+                <a:ea typeface="Cambria" pitchFamily="34" charset="-122"/>
+                <a:cs typeface="Cambria" pitchFamily="34" charset="-120"/>
+              </a:rPr>
+              <a:t>01</a:t>
+            </a:r>
+            <a:endParaRPr lang="en-US" sz="3400" dirty="0"/>
+          </a:p>
+        </p:txBody>
+      </p:sp>
+      <p:sp>
+        <p:nvSpPr>
+          <p:cNvPr id="7" name="Text 5"/>
+          <p:cNvSpPr/>
+          <p:nvPr/>
+        </p:nvSpPr>
+        <p:spPr>
+          <a:xfrm>
+            <a:off x="1691640" y="1783080"/>
+            <a:ext cx="4023360" cy="603504"/>
+          </a:xfrm>
+          <a:prstGeom prst="rect">
+            <a:avLst/>
+          </a:prstGeom>
+          <a:noFill/>
+          <a:ln/>
+        </p:spPr>
+        <p:txBody>
+          <a:bodyPr wrap="square" lIns="0" tIns="0" rIns="0" bIns="0" rtlCol="0" anchor="ctr"/>
+          <a:lstStyle/>
+          <a:p>
+            <a:pPr indent="0" marL="0">
+              <a:buNone/>
+            </a:pPr>
+            <a:r>
+              <a:rPr lang="en-US" sz="1350" b="1" dirty="0">
+                <a:solidFill>
+                  <a:srgbClr val="FFFFFF"/>
+                </a:solidFill>
+                <a:latin typeface="Calibri" pitchFamily="34" charset="0"/>
+                <a:ea typeface="Calibri" pitchFamily="34" charset="-122"/>
+                <a:cs typeface="Calibri" pitchFamily="34" charset="-120"/>
+              </a:rPr>
+              <a:t>Recuperar los 206 DT atrasados</a:t>
+            </a:r>
+            <a:endParaRPr lang="en-US" sz="1350" dirty="0"/>
+          </a:p>
+        </p:txBody>
+      </p:sp>
+      <p:sp>
+        <p:nvSpPr>
+          <p:cNvPr id="8" name="Text 6"/>
+          <p:cNvSpPr/>
+          <p:nvPr/>
+        </p:nvSpPr>
+        <p:spPr>
+          <a:xfrm>
+            <a:off x="1691640" y="2404872"/>
+            <a:ext cx="3977640" cy="1005840"/>
+          </a:xfrm>
+          <a:prstGeom prst="rect">
+            <a:avLst/>
+          </a:prstGeom>
+          <a:noFill/>
+          <a:ln/>
+        </p:spPr>
+        <p:txBody>
+          <a:bodyPr wrap="square" lIns="0" tIns="0" rIns="0" bIns="0" rtlCol="0" anchor="t"/>
+          <a:lstStyle/>
+          <a:p>
+            <a:pPr indent="0" marL="0">
+              <a:lnSpc>
+                <a:spcPts val="1400"/>
+              </a:lnSpc>
+              <a:buNone/>
+            </a:pPr>
+            <a:r>
+              <a:rPr lang="en-US" sz="1100" dirty="0">
+                <a:solidFill>
+                  <a:srgbClr val="DCE6F0"/>
+                </a:solidFill>
+                <a:latin typeface="Calibri" pitchFamily="34" charset="0"/>
+                <a:ea typeface="Calibri" pitchFamily="34" charset="-122"/>
+                <a:cs typeface="Calibri" pitchFamily="34" charset="-120"/>
+              </a:rPr>
+              <a:t>192 son P2 y 13 son P1. La mediana de atraso es de 36 días y 29 superan los 90 días.</a:t>
+            </a:r>
+            <a:endParaRPr lang="en-US" sz="1100" dirty="0"/>
+          </a:p>
+        </p:txBody>
+      </p:sp>
+      <p:sp>
+        <p:nvSpPr>
+          <p:cNvPr id="9" name="Shape 7"/>
+          <p:cNvSpPr/>
+          <p:nvPr/>
+        </p:nvSpPr>
+        <p:spPr>
+          <a:xfrm>
+            <a:off x="6245352" y="1600200"/>
+            <a:ext cx="5486400" cy="1920240"/>
+          </a:xfrm>
+          <a:prstGeom prst="roundRect">
+            <a:avLst>
+              <a:gd name="adj" fmla="val 3333"/>
+            </a:avLst>
+          </a:prstGeom>
+          <a:solidFill>
+            <a:srgbClr val="1B3252"/>
+          </a:solidFill>
+          <a:ln/>
+        </p:spPr>
+      </p:sp>
+      <p:sp>
+        <p:nvSpPr>
+          <p:cNvPr id="10" name="Text 8"/>
+          <p:cNvSpPr/>
+          <p:nvPr/>
+        </p:nvSpPr>
+        <p:spPr>
+          <a:xfrm>
+            <a:off x="6519672" y="1801368"/>
+            <a:ext cx="1005840" cy="640080"/>
+          </a:xfrm>
+          <a:prstGeom prst="rect">
+            <a:avLst/>
+          </a:prstGeom>
+          <a:noFill/>
+          <a:ln/>
+        </p:spPr>
+        <p:txBody>
+          <a:bodyPr wrap="square" lIns="0" tIns="0" rIns="0" bIns="0" rtlCol="0" anchor="ctr"/>
+          <a:lstStyle/>
+          <a:p>
+            <a:pPr indent="0" marL="0">
+              <a:buNone/>
+            </a:pPr>
+            <a:r>
+              <a:rPr lang="en-US" sz="3400" b="1" dirty="0">
+                <a:solidFill>
+                  <a:srgbClr val="C87A32"/>
+                </a:solidFill>
+                <a:latin typeface="Cambria" pitchFamily="34" charset="0"/>
+                <a:ea typeface="Cambria" pitchFamily="34" charset="-122"/>
+                <a:cs typeface="Cambria" pitchFamily="34" charset="-120"/>
+              </a:rPr>
+              <a:t>02</a:t>
+            </a:r>
+            <a:endParaRPr lang="en-US" sz="3400" dirty="0"/>
+          </a:p>
+        </p:txBody>
+      </p:sp>
+      <p:sp>
+        <p:nvSpPr>
+          <p:cNvPr id="11" name="Text 9"/>
+          <p:cNvSpPr/>
+          <p:nvPr/>
+        </p:nvSpPr>
+        <p:spPr>
+          <a:xfrm>
+            <a:off x="7479792" y="1783080"/>
+            <a:ext cx="4023360" cy="603504"/>
+          </a:xfrm>
+          <a:prstGeom prst="rect">
+            <a:avLst/>
+          </a:prstGeom>
+          <a:noFill/>
+          <a:ln/>
+        </p:spPr>
+        <p:txBody>
+          <a:bodyPr wrap="square" lIns="0" tIns="0" rIns="0" bIns="0" rtlCol="0" anchor="ctr"/>
+          <a:lstStyle/>
+          <a:p>
+            <a:pPr indent="0" marL="0">
+              <a:buNone/>
+            </a:pPr>
+            <a:r>
+              <a:rPr lang="en-US" sz="1350" b="1" dirty="0">
+                <a:solidFill>
+                  <a:srgbClr val="FFFFFF"/>
+                </a:solidFill>
+                <a:latin typeface="Calibri" pitchFamily="34" charset="0"/>
+                <a:ea typeface="Calibri" pitchFamily="34" charset="-122"/>
+                <a:cs typeface="Calibri" pitchFamily="34" charset="-120"/>
+              </a:rPr>
+              <a:t>Ejecutar la caminata 2 en CERRO VERDE/PS2 y PISCINAS Y SEDIMENTADOR</a:t>
+            </a:r>
+            <a:endParaRPr lang="en-US" sz="1350" dirty="0"/>
+          </a:p>
+        </p:txBody>
+      </p:sp>
+      <p:sp>
+        <p:nvSpPr>
+          <p:cNvPr id="12" name="Text 10"/>
+          <p:cNvSpPr/>
+          <p:nvPr/>
+        </p:nvSpPr>
+        <p:spPr>
+          <a:xfrm>
+            <a:off x="7479792" y="2404872"/>
+            <a:ext cx="3977640" cy="1005840"/>
+          </a:xfrm>
+          <a:prstGeom prst="rect">
+            <a:avLst/>
+          </a:prstGeom>
+          <a:noFill/>
+          <a:ln/>
+        </p:spPr>
+        <p:txBody>
+          <a:bodyPr wrap="square" lIns="0" tIns="0" rIns="0" bIns="0" rtlCol="0" anchor="t"/>
+          <a:lstStyle/>
+          <a:p>
+            <a:pPr indent="0" marL="0">
+              <a:lnSpc>
+                <a:spcPts val="1400"/>
+              </a:lnSpc>
+              <a:buNone/>
+            </a:pPr>
+            <a:r>
+              <a:rPr lang="en-US" sz="1100" dirty="0">
+                <a:solidFill>
+                  <a:srgbClr val="DCE6F0"/>
+                </a:solidFill>
+                <a:latin typeface="Calibri" pitchFamily="34" charset="0"/>
+                <a:ea typeface="Calibri" pitchFamily="34" charset="-122"/>
+                <a:cs typeface="Calibri" pitchFamily="34" charset="-120"/>
+              </a:rPr>
+              <a:t>CERRO VERDE/PS2: 0/3 (0%) · PISCINAS Y SEDIMENTADOR: 5/22 (22,7%). A nivel proyecto la caminata 2 va 77,6% con 40 ya agendadas.</a:t>
+            </a:r>
+            <a:endParaRPr lang="en-US" sz="1100" dirty="0"/>
+          </a:p>
+        </p:txBody>
+      </p:sp>
+      <p:sp>
+        <p:nvSpPr>
+          <p:cNvPr id="13" name="Shape 11"/>
+          <p:cNvSpPr/>
+          <p:nvPr/>
+        </p:nvSpPr>
+        <p:spPr>
+          <a:xfrm>
+            <a:off x="457200" y="3749040"/>
+            <a:ext cx="5486400" cy="1920240"/>
+          </a:xfrm>
+          <a:prstGeom prst="roundRect">
+            <a:avLst>
+              <a:gd name="adj" fmla="val 3333"/>
+            </a:avLst>
+          </a:prstGeom>
+          <a:solidFill>
+            <a:srgbClr val="1B3252"/>
+          </a:solidFill>
+          <a:ln/>
+        </p:spPr>
+      </p:sp>
+      <p:sp>
+        <p:nvSpPr>
+          <p:cNvPr id="14" name="Text 12"/>
+          <p:cNvSpPr/>
+          <p:nvPr/>
+        </p:nvSpPr>
+        <p:spPr>
+          <a:xfrm>
+            <a:off x="731520" y="3950208"/>
+            <a:ext cx="1005840" cy="640080"/>
+          </a:xfrm>
+          <a:prstGeom prst="rect">
+            <a:avLst/>
+          </a:prstGeom>
+          <a:noFill/>
+          <a:ln/>
+        </p:spPr>
+        <p:txBody>
+          <a:bodyPr wrap="square" lIns="0" tIns="0" rIns="0" bIns="0" rtlCol="0" anchor="ctr"/>
+          <a:lstStyle/>
+          <a:p>
+            <a:pPr indent="0" marL="0">
+              <a:buNone/>
+            </a:pPr>
+            <a:r>
+              <a:rPr lang="en-US" sz="3400" b="1" dirty="0">
+                <a:solidFill>
+                  <a:srgbClr val="E0A32E"/>
+                </a:solidFill>
+                <a:latin typeface="Cambria" pitchFamily="34" charset="0"/>
+                <a:ea typeface="Cambria" pitchFamily="34" charset="-122"/>
+                <a:cs typeface="Cambria" pitchFamily="34" charset="-120"/>
+              </a:rPr>
+              <a:t>03</a:t>
+            </a:r>
+            <a:endParaRPr lang="en-US" sz="3400" dirty="0"/>
+          </a:p>
+        </p:txBody>
+      </p:sp>
+      <p:sp>
+        <p:nvSpPr>
+          <p:cNvPr id="15" name="Text 13"/>
+          <p:cNvSpPr/>
+          <p:nvPr/>
+        </p:nvSpPr>
+        <p:spPr>
+          <a:xfrm>
+            <a:off x="1691640" y="3931920"/>
+            <a:ext cx="4023360" cy="603504"/>
+          </a:xfrm>
+          <a:prstGeom prst="rect">
+            <a:avLst/>
+          </a:prstGeom>
+          <a:noFill/>
+          <a:ln/>
+        </p:spPr>
+        <p:txBody>
+          <a:bodyPr wrap="square" lIns="0" tIns="0" rIns="0" bIns="0" rtlCol="0" anchor="ctr"/>
+          <a:lstStyle/>
+          <a:p>
+            <a:pPr indent="0" marL="0">
+              <a:buNone/>
+            </a:pPr>
+            <a:r>
+              <a:rPr lang="en-US" sz="1350" b="1" dirty="0">
+                <a:solidFill>
+                  <a:srgbClr val="FFFFFF"/>
+                </a:solidFill>
+                <a:latin typeface="Calibri" pitchFamily="34" charset="0"/>
+                <a:ea typeface="Calibri" pitchFamily="34" charset="-122"/>
+                <a:cs typeface="Calibri" pitchFamily="34" charset="-120"/>
+              </a:rPr>
+              <a:t>Destrabar P4: 50 abiertos y ninguno cerrado</a:t>
+            </a:r>
+            <a:endParaRPr lang="en-US" sz="1350" dirty="0"/>
+          </a:p>
+        </p:txBody>
+      </p:sp>
+      <p:sp>
+        <p:nvSpPr>
+          <p:cNvPr id="16" name="Text 14"/>
+          <p:cNvSpPr/>
+          <p:nvPr/>
+        </p:nvSpPr>
+        <p:spPr>
+          <a:xfrm>
+            <a:off x="1691640" y="4553712"/>
+            <a:ext cx="3977640" cy="1005840"/>
+          </a:xfrm>
+          <a:prstGeom prst="rect">
+            <a:avLst/>
+          </a:prstGeom>
+          <a:noFill/>
+          <a:ln/>
+        </p:spPr>
+        <p:txBody>
+          <a:bodyPr wrap="square" lIns="0" tIns="0" rIns="0" bIns="0" rtlCol="0" anchor="t"/>
+          <a:lstStyle/>
+          <a:p>
+            <a:pPr indent="0" marL="0">
+              <a:lnSpc>
+                <a:spcPts val="1400"/>
+              </a:lnSpc>
+              <a:buNone/>
+            </a:pPr>
+            <a:r>
+              <a:rPr lang="en-US" sz="1100" dirty="0">
+                <a:solidFill>
+                  <a:srgbClr val="DCE6F0"/>
+                </a:solidFill>
+                <a:latin typeface="Calibri" pitchFamily="34" charset="0"/>
+                <a:ea typeface="Calibri" pitchFamily="34" charset="-122"/>
+                <a:cs typeface="Calibri" pitchFamily="34" charset="-120"/>
+              </a:rPr>
+              <a:t>De 50 DT levantados en P4 no se ha cerrado ninguno (0%). P3 tampoco despega: 29,7% de cierre.</a:t>
+            </a:r>
+            <a:endParaRPr lang="en-US" sz="1100" dirty="0"/>
+          </a:p>
+        </p:txBody>
+      </p:sp>
+      <p:sp>
+        <p:nvSpPr>
+          <p:cNvPr id="17" name="Shape 15"/>
+          <p:cNvSpPr/>
+          <p:nvPr/>
+        </p:nvSpPr>
+        <p:spPr>
+          <a:xfrm>
+            <a:off x="6245352" y="3749040"/>
+            <a:ext cx="5486400" cy="1920240"/>
+          </a:xfrm>
+          <a:prstGeom prst="roundRect">
+            <a:avLst>
+              <a:gd name="adj" fmla="val 3333"/>
+            </a:avLst>
+          </a:prstGeom>
+          <a:solidFill>
+            <a:srgbClr val="1B3252"/>
+          </a:solidFill>
+          <a:ln/>
+        </p:spPr>
+      </p:sp>
+      <p:sp>
+        <p:nvSpPr>
+          <p:cNvPr id="18" name="Text 16"/>
+          <p:cNvSpPr/>
+          <p:nvPr/>
+        </p:nvSpPr>
+        <p:spPr>
+          <a:xfrm>
+            <a:off x="6519672" y="3950208"/>
+            <a:ext cx="1005840" cy="640080"/>
+          </a:xfrm>
+          <a:prstGeom prst="rect">
+            <a:avLst/>
+          </a:prstGeom>
+          <a:noFill/>
+          <a:ln/>
+        </p:spPr>
+        <p:txBody>
+          <a:bodyPr wrap="square" lIns="0" tIns="0" rIns="0" bIns="0" rtlCol="0" anchor="ctr"/>
+          <a:lstStyle/>
+          <a:p>
+            <a:pPr indent="0" marL="0">
+              <a:buNone/>
+            </a:pPr>
+            <a:r>
+              <a:rPr lang="en-US" sz="3400" b="1" dirty="0">
+                <a:solidFill>
+                  <a:srgbClr val="2E9E5B"/>
+                </a:solidFill>
+                <a:latin typeface="Cambria" pitchFamily="34" charset="0"/>
+                <a:ea typeface="Cambria" pitchFamily="34" charset="-122"/>
+                <a:cs typeface="Cambria" pitchFamily="34" charset="-120"/>
+              </a:rPr>
+              <a:t>04</a:t>
+            </a:r>
+            <a:endParaRPr lang="en-US" sz="3400" dirty="0"/>
+          </a:p>
+        </p:txBody>
+      </p:sp>
+      <p:sp>
+        <p:nvSpPr>
+          <p:cNvPr id="19" name="Text 17"/>
+          <p:cNvSpPr/>
+          <p:nvPr/>
+        </p:nvSpPr>
+        <p:spPr>
+          <a:xfrm>
+            <a:off x="7479792" y="3931920"/>
+            <a:ext cx="4023360" cy="603504"/>
+          </a:xfrm>
+          <a:prstGeom prst="rect">
+            <a:avLst/>
+          </a:prstGeom>
+          <a:noFill/>
+          <a:ln/>
+        </p:spPr>
+        <p:txBody>
+          <a:bodyPr wrap="square" lIns="0" tIns="0" rIns="0" bIns="0" rtlCol="0" anchor="ctr"/>
+          <a:lstStyle/>
+          <a:p>
+            <a:pPr indent="0" marL="0">
+              <a:buNone/>
+            </a:pPr>
+            <a:r>
+              <a:rPr lang="en-US" sz="1350" b="1" dirty="0">
+                <a:solidFill>
+                  <a:srgbClr val="FFFFFF"/>
+                </a:solidFill>
+                <a:latin typeface="Calibri" pitchFamily="34" charset="0"/>
+                <a:ea typeface="Calibri" pitchFamily="34" charset="-122"/>
+                <a:cs typeface="Calibri" pitchFamily="34" charset="-120"/>
+              </a:rPr>
+              <a:t>Atender POZOS</a:t>
+            </a:r>
+            <a:endParaRPr lang="en-US" sz="1350" dirty="0"/>
+          </a:p>
+        </p:txBody>
+      </p:sp>
+      <p:sp>
+        <p:nvSpPr>
+          <p:cNvPr id="20" name="Text 18"/>
+          <p:cNvSpPr/>
+          <p:nvPr/>
+        </p:nvSpPr>
+        <p:spPr>
+          <a:xfrm>
+            <a:off x="7479792" y="4553712"/>
+            <a:ext cx="3977640" cy="1005840"/>
+          </a:xfrm>
+          <a:prstGeom prst="rect">
+            <a:avLst/>
+          </a:prstGeom>
+          <a:noFill/>
+          <a:ln/>
+        </p:spPr>
+        <p:txBody>
+          <a:bodyPr wrap="square" lIns="0" tIns="0" rIns="0" bIns="0" rtlCol="0" anchor="t"/>
+          <a:lstStyle/>
+          <a:p>
+            <a:pPr indent="0" marL="0">
+              <a:lnSpc>
+                <a:spcPts val="1400"/>
+              </a:lnSpc>
+              <a:buNone/>
+            </a:pPr>
+            <a:r>
+              <a:rPr lang="en-US" sz="1100" dirty="0">
+                <a:solidFill>
+                  <a:srgbClr val="DCE6F0"/>
+                </a:solidFill>
+                <a:latin typeface="Calibri" pitchFamily="34" charset="0"/>
+                <a:ea typeface="Calibri" pitchFamily="34" charset="-122"/>
+                <a:cs typeface="Calibri" pitchFamily="34" charset="-120"/>
+              </a:rPr>
+              <a:t>Concentra 256 de los 505 DT abiertos (50,7%), con 98 atrasados. Además hay 10 carpetas bajo 80% de avance que conviene cerrar en paralelo.</a:t>
+            </a:r>
+            <a:endParaRPr lang="en-US" sz="1100" dirty="0"/>
+          </a:p>
+        </p:txBody>
+      </p:sp>
+      <p:sp>
+        <p:nvSpPr>
+          <p:cNvPr id="21" name="Text 19"/>
+          <p:cNvSpPr/>
+          <p:nvPr/>
+        </p:nvSpPr>
+        <p:spPr>
+          <a:xfrm>
+            <a:off x="457200" y="6473952"/>
+            <a:ext cx="9692640" cy="274320"/>
+          </a:xfrm>
+          <a:prstGeom prst="rect">
+            <a:avLst/>
+          </a:prstGeom>
+          <a:noFill/>
+          <a:ln/>
+        </p:spPr>
+        <p:txBody>
+          <a:bodyPr wrap="square" lIns="0" tIns="0" rIns="0" bIns="0" rtlCol="0" anchor="ctr"/>
+          <a:lstStyle/>
+          <a:p>
+            <a:pPr algn="l" indent="0" marL="0">
+              <a:buNone/>
+            </a:pPr>
+            <a:r>
+              <a:rPr lang="en-US" sz="850" dirty="0">
+                <a:solidFill>
+                  <a:srgbClr val="6E8CA8"/>
+                </a:solidFill>
+                <a:latin typeface="Calibri" pitchFamily="34" charset="0"/>
+                <a:ea typeface="Calibri" pitchFamily="34" charset="-122"/>
+                <a:cs typeface="Calibri" pitchFamily="34" charset="-120"/>
+              </a:rPr>
+              <a:t>Fuente: TalabreSTATUS_PEC + TalabreCuadro_DT · 219 subsistemas · 1.951 DT · Atrasos al 27-07-2026</a:t>
+            </a:r>
+            <a:endParaRPr lang="en-US" sz="850" dirty="0"/>
+          </a:p>
+        </p:txBody>
+      </p:sp>
+      <p:sp>
+        <p:nvSpPr>
+          <p:cNvPr id="22" name="Text 20"/>
+          <p:cNvSpPr/>
+          <p:nvPr/>
+        </p:nvSpPr>
+        <p:spPr>
+          <a:xfrm>
+            <a:off x="11430000" y="6473952"/>
+            <a:ext cx="365760" cy="274320"/>
+          </a:xfrm>
+          <a:prstGeom prst="rect">
+            <a:avLst/>
+          </a:prstGeom>
+          <a:noFill/>
+          <a:ln/>
+        </p:spPr>
+        <p:txBody>
+          <a:bodyPr wrap="square" lIns="0" tIns="0" rIns="0" bIns="0" rtlCol="0" anchor="ctr"/>
+          <a:lstStyle/>
+          <a:p>
+            <a:pPr algn="r" indent="0" marL="0">
+              <a:buNone/>
+            </a:pPr>
+            <a:r>
+              <a:rPr lang="en-US" sz="900" dirty="0">
+                <a:solidFill>
+                  <a:srgbClr val="6E8CA8"/>
+                </a:solidFill>
+                <a:latin typeface="Calibri" pitchFamily="34" charset="0"/>
+                <a:ea typeface="Calibri" pitchFamily="34" charset="-122"/>
+                <a:cs typeface="Calibri" pitchFamily="34" charset="-120"/>
+              </a:rPr>
+              <a:t>17</a:t>
+            </a:r>
+            <a:endParaRPr lang="en-US" sz="900" dirty="0"/>
+          </a:p>
+        </p:txBody>
+      </p:sp>
+    </p:spTree>
+  </p:cSld>
+  <p:clrMapOvr>
+    <a:masterClrMapping/>
+  </p:clrMapOvr>
+</p:sld>
+</file>
+
 <file path=ppt/slides/slide2.xml><?xml version="1.0" encoding="utf-8"?>
 <p:sld xmlns:a="http://schemas.openxmlformats.org/drawingml/2006/main" xmlns:r="http://schemas.openxmlformats.org/officeDocument/2006/relationships" xmlns:p="http://schemas.openxmlformats.org/presentationml/2006/main">
   <p:cSld name="Slide 2">

--- a/panel_control_TOP_P1/Panel_Control_TOP_P1.pptx
+++ b/panel_control_TOP_P1/Panel_Control_TOP_P1.pptx
@@ -329,7 +329,7 @@
                 <c:formatCode>General</c:formatCode>
                 <c:ptCount val="4"/>
                 <c:pt idx="0">
-                  <c:v>0</c:v>
+                  <c:v/>
                 </c:pt>
                 <c:pt idx="1">
                   <c:v>40</c:v>
@@ -360,7 +360,7 @@
           </c:tx>
           <c:spPr>
             <a:solidFill>
-              <a:srgbClr val="9DBDE0"/>
+              <a:srgbClr val="3A6FA8"/>
             </a:solidFill>
             <a:effectLst/>
           </c:spPr>
@@ -419,16 +419,16 @@
                 <c:formatCode>General</c:formatCode>
                 <c:ptCount val="4"/>
                 <c:pt idx="0">
-                  <c:v>0</c:v>
+                  <c:v/>
                 </c:pt>
                 <c:pt idx="1">
                   <c:v>1</c:v>
                 </c:pt>
                 <c:pt idx="2">
-                  <c:v>0</c:v>
+                  <c:v/>
                 </c:pt>
                 <c:pt idx="3">
-                  <c:v>0</c:v>
+                  <c:v/>
                 </c:pt>
               </c:numCache>
             </c:numRef>
@@ -660,7 +660,7 @@
               <a:lstStyle/>
               <a:p>
                 <a:pPr>
-                  <a:defRPr b="1" i="0" strike="noStrike" sz="1000" u="none">
+                  <a:defRPr b="1" i="0" strike="noStrike" sz="1100" u="none">
                     <a:solidFill>
                       <a:srgbClr val="FFFFFF"/>
                     </a:solidFill>
@@ -756,7 +756,7 @@
               <a:lstStyle/>
               <a:p>
                 <a:pPr>
-                  <a:defRPr b="1" i="0" strike="noStrike" sz="1000" u="none">
+                  <a:defRPr b="1" i="0" strike="noStrike" sz="1100" u="none">
                     <a:solidFill>
                       <a:srgbClr val="FFFFFF"/>
                     </a:solidFill>
@@ -831,7 +831,7 @@
             <a:lstStyle/>
             <a:p>
               <a:pPr>
-                <a:defRPr b="1" i="0" strike="noStrike" sz="1000" u="none">
+                <a:defRPr b="1" i="0" strike="noStrike" sz="1100" u="none">
                   <a:solidFill>
                     <a:srgbClr val="FFFFFF"/>
                   </a:solidFill>
@@ -1050,7 +1050,7 @@
               <a:lstStyle/>
               <a:p>
                 <a:pPr>
-                  <a:defRPr b="1" i="0" strike="noStrike" sz="1000" u="none">
+                  <a:defRPr b="1" i="0" strike="noStrike" sz="1100" u="none">
                     <a:solidFill>
                       <a:srgbClr val="FFFFFF"/>
                     </a:solidFill>
@@ -1100,13 +1100,13 @@
                   <c:v>14</c:v>
                 </c:pt>
                 <c:pt idx="1">
-                  <c:v>0</c:v>
+                  <c:v/>
                 </c:pt>
                 <c:pt idx="2">
-                  <c:v>0</c:v>
+                  <c:v/>
                 </c:pt>
                 <c:pt idx="3">
-                  <c:v>0</c:v>
+                  <c:v/>
                 </c:pt>
               </c:numCache>
             </c:numRef>
@@ -1128,7 +1128,7 @@
           </c:tx>
           <c:spPr>
             <a:solidFill>
-              <a:srgbClr val="E0A32E"/>
+              <a:srgbClr val="9A6B0F"/>
             </a:solidFill>
             <a:effectLst/>
           </c:spPr>
@@ -1140,7 +1140,7 @@
               <a:lstStyle/>
               <a:p>
                 <a:pPr>
-                  <a:defRPr b="1" i="0" strike="noStrike" sz="1000" u="none">
+                  <a:defRPr b="1" i="0" strike="noStrike" sz="1100" u="none">
                     <a:solidFill>
                       <a:srgbClr val="FFFFFF"/>
                     </a:solidFill>
@@ -1187,16 +1187,16 @@
                 <c:formatCode>General</c:formatCode>
                 <c:ptCount val="4"/>
                 <c:pt idx="0">
-                  <c:v>0</c:v>
+                  <c:v/>
                 </c:pt>
                 <c:pt idx="1">
                   <c:v>1</c:v>
                 </c:pt>
                 <c:pt idx="2">
-                  <c:v>0</c:v>
+                  <c:v/>
                 </c:pt>
                 <c:pt idx="3">
-                  <c:v>0</c:v>
+                  <c:v/>
                 </c:pt>
               </c:numCache>
             </c:numRef>
@@ -1230,7 +1230,7 @@
               <a:lstStyle/>
               <a:p>
                 <a:pPr>
-                  <a:defRPr b="1" i="0" strike="noStrike" sz="1000" u="none">
+                  <a:defRPr b="1" i="0" strike="noStrike" sz="1100" u="none">
                     <a:solidFill>
                       <a:srgbClr val="FFFFFF"/>
                     </a:solidFill>
@@ -1286,7 +1286,7 @@
                   <c:v>1</c:v>
                 </c:pt>
                 <c:pt idx="3">
-                  <c:v>0</c:v>
+                  <c:v/>
                 </c:pt>
               </c:numCache>
             </c:numRef>
@@ -1308,7 +1308,7 @@
           </c:tx>
           <c:spPr>
             <a:solidFill>
-              <a:srgbClr val="D9DFE6"/>
+              <a:srgbClr val="5B6B7C"/>
             </a:solidFill>
             <a:effectLst/>
           </c:spPr>
@@ -1320,7 +1320,7 @@
               <a:lstStyle/>
               <a:p>
                 <a:pPr>
-                  <a:defRPr b="1" i="0" strike="noStrike" sz="1000" u="none">
+                  <a:defRPr b="1" i="0" strike="noStrike" sz="1100" u="none">
                     <a:solidFill>
                       <a:srgbClr val="FFFFFF"/>
                     </a:solidFill>
@@ -1389,7 +1389,7 @@
             <a:lstStyle/>
             <a:p>
               <a:pPr>
-                <a:defRPr b="1" i="0" strike="noStrike" sz="1000" u="none">
+                <a:defRPr b="1" i="0" strike="noStrike" sz="1100" u="none">
                   <a:solidFill>
                     <a:srgbClr val="FFFFFF"/>
                   </a:solidFill>
@@ -1608,7 +1608,7 @@
               <a:lstStyle/>
               <a:p>
                 <a:pPr>
-                  <a:defRPr b="1" i="0" strike="noStrike" sz="1000" u="none">
+                  <a:defRPr b="1" i="0" strike="noStrike" sz="1100" u="none">
                     <a:solidFill>
                       <a:srgbClr val="FFFFFF"/>
                     </a:solidFill>
@@ -1676,7 +1676,7 @@
                   <c:v>17</c:v>
                 </c:pt>
                 <c:pt idx="5">
-                  <c:v>0</c:v>
+                  <c:v/>
                 </c:pt>
               </c:numCache>
             </c:numRef>
@@ -1710,7 +1710,7 @@
               <a:lstStyle/>
               <a:p>
                 <a:pPr>
-                  <a:defRPr b="1" i="0" strike="noStrike" sz="1000" u="none">
+                  <a:defRPr b="1" i="0" strike="noStrike" sz="1100" u="none">
                     <a:solidFill>
                       <a:srgbClr val="FFFFFF"/>
                     </a:solidFill>
@@ -1791,7 +1791,7 @@
             <a:lstStyle/>
             <a:p>
               <a:pPr>
-                <a:defRPr b="1" i="0" strike="noStrike" sz="1000" u="none">
+                <a:defRPr b="1" i="0" strike="noStrike" sz="1100" u="none">
                   <a:solidFill>
                     <a:srgbClr val="FFFFFF"/>
                   </a:solidFill>
@@ -2263,7 +2263,7 @@
                 <a:pPr>
                   <a:defRPr b="1" i="0" strike="noStrike" sz="1100" u="none">
                     <a:solidFill>
-                      <a:srgbClr val="1A2433"/>
+                      <a:srgbClr val="FFFFFF"/>
                     </a:solidFill>
                     <a:latin typeface="Calibri"/>
                   </a:defRPr>
@@ -2333,7 +2333,7 @@
           </c:tx>
           <c:spPr>
             <a:solidFill>
-              <a:srgbClr val="D9DFE6"/>
+              <a:srgbClr val="5B6B7C"/>
             </a:solidFill>
             <a:effectLst/>
           </c:spPr>
@@ -2347,7 +2347,7 @@
                 <a:pPr>
                   <a:defRPr b="1" i="0" strike="noStrike" sz="1100" u="none">
                     <a:solidFill>
-                      <a:srgbClr val="1A2433"/>
+                      <a:srgbClr val="FFFFFF"/>
                     </a:solidFill>
                     <a:latin typeface="Calibri"/>
                   </a:defRPr>
@@ -2392,7 +2392,7 @@
                   <c:v>39</c:v>
                 </c:pt>
                 <c:pt idx="1">
-                  <c:v>0</c:v>
+                  <c:v/>
                 </c:pt>
                 <c:pt idx="2">
                   <c:v>5</c:v>
@@ -2410,7 +2410,7 @@
               <a:pPr>
                 <a:defRPr b="1" i="0" strike="noStrike" sz="1100" u="none">
                   <a:solidFill>
-                    <a:srgbClr val="1A2433"/>
+                    <a:srgbClr val="FFFFFF"/>
                   </a:solidFill>
                   <a:latin typeface="Calibri"/>
                 </a:defRPr>
@@ -2627,7 +2627,7 @@
               <a:lstStyle/>
               <a:p>
                 <a:pPr>
-                  <a:defRPr b="1" i="0" strike="noStrike" sz="1000" u="none">
+                  <a:defRPr b="1" i="0" strike="noStrike" sz="1100" u="none">
                     <a:solidFill>
                       <a:srgbClr val="FFFFFF"/>
                     </a:solidFill>
@@ -2723,7 +2723,7 @@
               <a:lstStyle/>
               <a:p>
                 <a:pPr>
-                  <a:defRPr b="1" i="0" strike="noStrike" sz="1000" u="none">
+                  <a:defRPr b="1" i="0" strike="noStrike" sz="1100" u="none">
                     <a:solidFill>
                       <a:srgbClr val="FFFFFF"/>
                     </a:solidFill>
@@ -2798,7 +2798,7 @@
             <a:lstStyle/>
             <a:p>
               <a:pPr>
-                <a:defRPr b="1" i="0" strike="noStrike" sz="1000" u="none">
+                <a:defRPr b="1" i="0" strike="noStrike" sz="1100" u="none">
                   <a:solidFill>
                     <a:srgbClr val="FFFFFF"/>
                   </a:solidFill>
@@ -3268,7 +3268,7 @@
               <a:lstStyle/>
               <a:p>
                 <a:pPr>
-                  <a:defRPr b="1" i="0" strike="noStrike" sz="950" u="none">
+                  <a:defRPr b="1" i="0" strike="noStrike" sz="1100" u="none">
                     <a:solidFill>
                       <a:srgbClr val="FFFFFF"/>
                     </a:solidFill>
@@ -3330,7 +3330,7 @@
                 <c:formatCode>General</c:formatCode>
                 <c:ptCount val="9"/>
                 <c:pt idx="0">
-                  <c:v>0</c:v>
+                  <c:v/>
                 </c:pt>
                 <c:pt idx="1">
                   <c:v>18</c:v>
@@ -3388,7 +3388,7 @@
               <a:lstStyle/>
               <a:p>
                 <a:pPr>
-                  <a:defRPr b="1" i="0" strike="noStrike" sz="950" u="none">
+                  <a:defRPr b="1" i="0" strike="noStrike" sz="1100" u="none">
                     <a:solidFill>
                       <a:srgbClr val="FFFFFF"/>
                     </a:solidFill>
@@ -3453,16 +3453,16 @@
                   <c:v>2</c:v>
                 </c:pt>
                 <c:pt idx="1">
-                  <c:v>0</c:v>
+                  <c:v/>
                 </c:pt>
                 <c:pt idx="2">
-                  <c:v>0</c:v>
+                  <c:v/>
                 </c:pt>
                 <c:pt idx="3">
-                  <c:v>0</c:v>
+                  <c:v/>
                 </c:pt>
                 <c:pt idx="4">
-                  <c:v>0</c:v>
+                  <c:v/>
                 </c:pt>
                 <c:pt idx="5">
                   <c:v>16</c:v>
@@ -3471,10 +3471,10 @@
                   <c:v>22</c:v>
                 </c:pt>
                 <c:pt idx="7">
-                  <c:v>0</c:v>
+                  <c:v/>
                 </c:pt>
                 <c:pt idx="8">
-                  <c:v>0</c:v>
+                  <c:v/>
                 </c:pt>
               </c:numCache>
             </c:numRef>
@@ -3496,7 +3496,7 @@
           </c:tx>
           <c:spPr>
             <a:solidFill>
-              <a:srgbClr val="D9DFE6"/>
+              <a:srgbClr val="5B6B7C"/>
             </a:solidFill>
             <a:effectLst/>
           </c:spPr>
@@ -3508,7 +3508,7 @@
               <a:lstStyle/>
               <a:p>
                 <a:pPr>
-                  <a:defRPr b="1" i="0" strike="noStrike" sz="950" u="none">
+                  <a:defRPr b="1" i="0" strike="noStrike" sz="1100" u="none">
                     <a:solidFill>
                       <a:srgbClr val="FFFFFF"/>
                     </a:solidFill>
@@ -3579,22 +3579,22 @@
                   <c:v>4</c:v>
                 </c:pt>
                 <c:pt idx="3">
-                  <c:v>0</c:v>
+                  <c:v/>
                 </c:pt>
                 <c:pt idx="4">
-                  <c:v>0</c:v>
+                  <c:v/>
                 </c:pt>
                 <c:pt idx="5">
                   <c:v>1</c:v>
                 </c:pt>
                 <c:pt idx="6">
-                  <c:v>0</c:v>
+                  <c:v/>
                 </c:pt>
                 <c:pt idx="7">
                   <c:v>1</c:v>
                 </c:pt>
                 <c:pt idx="8">
-                  <c:v>0</c:v>
+                  <c:v/>
                 </c:pt>
               </c:numCache>
             </c:numRef>
@@ -3607,7 +3607,7 @@
             <a:lstStyle/>
             <a:p>
               <a:pPr>
-                <a:defRPr b="1" i="0" strike="noStrike" sz="950" u="none">
+                <a:defRPr b="1" i="0" strike="noStrike" sz="1100" u="none">
                   <a:solidFill>
                     <a:srgbClr val="FFFFFF"/>
                   </a:solidFill>
@@ -3814,7 +3814,7 @@
           </c:tx>
           <c:spPr>
             <a:solidFill>
-              <a:srgbClr val="2E9E5B"/>
+              <a:srgbClr val="1F7A44"/>
             </a:solidFill>
             <a:effectLst/>
           </c:spPr>
@@ -3826,7 +3826,7 @@
               <a:lstStyle/>
               <a:p>
                 <a:pPr>
-                  <a:defRPr b="1" i="0" strike="noStrike" sz="950" u="none">
+                  <a:defRPr b="1" i="0" strike="noStrike" sz="1100" u="none">
                     <a:solidFill>
                       <a:srgbClr val="FFFFFF"/>
                     </a:solidFill>
@@ -3946,7 +3946,7 @@
               <a:lstStyle/>
               <a:p>
                 <a:pPr>
-                  <a:defRPr b="1" i="0" strike="noStrike" sz="950" u="none">
+                  <a:defRPr b="1" i="0" strike="noStrike" sz="1100" u="none">
                     <a:solidFill>
                       <a:srgbClr val="FFFFFF"/>
                     </a:solidFill>
@@ -4008,7 +4008,7 @@
                 <c:formatCode>General</c:formatCode>
                 <c:ptCount val="9"/>
                 <c:pt idx="0">
-                  <c:v>0</c:v>
+                  <c:v/>
                 </c:pt>
                 <c:pt idx="1">
                   <c:v>1</c:v>
@@ -4017,7 +4017,7 @@
                   <c:v>7</c:v>
                 </c:pt>
                 <c:pt idx="3">
-                  <c:v>0</c:v>
+                  <c:v/>
                 </c:pt>
                 <c:pt idx="4">
                   <c:v>3</c:v>
@@ -4032,7 +4032,7 @@
                   <c:v>4</c:v>
                 </c:pt>
                 <c:pt idx="8">
-                  <c:v>0</c:v>
+                  <c:v/>
                 </c:pt>
               </c:numCache>
             </c:numRef>
@@ -4066,7 +4066,7 @@
               <a:lstStyle/>
               <a:p>
                 <a:pPr>
-                  <a:defRPr b="1" i="0" strike="noStrike" sz="950" u="none">
+                  <a:defRPr b="1" i="0" strike="noStrike" sz="1100" u="none">
                     <a:solidFill>
                       <a:srgbClr val="FFFFFF"/>
                     </a:solidFill>
@@ -4137,7 +4137,7 @@
                   <c:v>3</c:v>
                 </c:pt>
                 <c:pt idx="3">
-                  <c:v>0</c:v>
+                  <c:v/>
                 </c:pt>
                 <c:pt idx="4">
                   <c:v>1</c:v>
@@ -4146,13 +4146,13 @@
                   <c:v>3</c:v>
                 </c:pt>
                 <c:pt idx="6">
-                  <c:v>0</c:v>
+                  <c:v/>
                 </c:pt>
                 <c:pt idx="7">
                   <c:v>1</c:v>
                 </c:pt>
                 <c:pt idx="8">
-                  <c:v>0</c:v>
+                  <c:v/>
                 </c:pt>
               </c:numCache>
             </c:numRef>
@@ -4165,7 +4165,7 @@
             <a:lstStyle/>
             <a:p>
               <a:pPr>
-                <a:defRPr b="1" i="0" strike="noStrike" sz="950" u="none">
+                <a:defRPr b="1" i="0" strike="noStrike" sz="1100" u="none">
                   <a:solidFill>
                     <a:srgbClr val="FFFFFF"/>
                   </a:solidFill>
@@ -6531,9 +6531,33 @@
           <a:ln/>
         </p:spPr>
       </p:sp>
-      <p:sp>
-        <p:nvSpPr>
-          <p:cNvPr id="4" name="Shape 2"/>
+      <p:pic>
+        <p:nvPicPr>
+          <p:cNvPr id="4" name="Image 0" descr="/home/user/Inversiones/panel_control_TOP_P1/besalco_logo.png">    </p:cNvPr>
+          <p:cNvPicPr>
+            <a:picLocks noChangeAspect="1"/>
+          </p:cNvPicPr>
+          <p:nvPr/>
+        </p:nvPicPr>
+        <p:blipFill>
+          <a:blip r:embed="rId1"/>
+          <a:stretch>
+            <a:fillRect/>
+          </a:stretch>
+        </p:blipFill>
+        <p:spPr>
+          <a:xfrm>
+            <a:off x="8357616" y="420624"/>
+            <a:ext cx="3547872" cy="768096"/>
+          </a:xfrm>
+          <a:prstGeom prst="rect">
+            <a:avLst/>
+          </a:prstGeom>
+        </p:spPr>
+      </p:pic>
+      <p:sp>
+        <p:nvSpPr>
+          <p:cNvPr id="5" name="Shape 2"/>
           <p:cNvSpPr/>
           <p:nvPr/>
         </p:nvSpPr>
@@ -6553,7 +6577,7 @@
       </p:sp>
       <p:sp>
         <p:nvSpPr>
-          <p:cNvPr id="5" name="Text 3"/>
+          <p:cNvPr id="6" name="Text 3"/>
           <p:cNvSpPr/>
           <p:nvPr/>
         </p:nvSpPr>
@@ -6584,7 +6608,7 @@
                 <a:ea typeface="Calibri" pitchFamily="34" charset="-122"/>
                 <a:cs typeface="Calibri" pitchFamily="34" charset="-120"/>
               </a:rPr>
-              <a:t>PANEL DE CONTROL DE AVANCE</a:t>
+              <a:t>PROYECTO 01</a:t>
             </a:r>
             <a:endParaRPr lang="en-US" sz="1300" dirty="0"/>
           </a:p>
@@ -6592,14 +6616,14 @@
       </p:sp>
       <p:sp>
         <p:nvSpPr>
-          <p:cNvPr id="6" name="Text 4"/>
-          <p:cNvSpPr/>
-          <p:nvPr/>
-        </p:nvSpPr>
-        <p:spPr>
-          <a:xfrm>
-            <a:off x="749808" y="1600200"/>
-            <a:ext cx="10607040" cy="1828800"/>
+          <p:cNvPr id="7" name="Text 4"/>
+          <p:cNvSpPr/>
+          <p:nvPr/>
+        </p:nvSpPr>
+        <p:spPr>
+          <a:xfrm>
+            <a:off x="749808" y="1572768"/>
+            <a:ext cx="10607040" cy="1005840"/>
           </a:xfrm>
           <a:prstGeom prst="rect">
             <a:avLst/>
@@ -6612,13 +6636,10 @@
           <a:lstStyle/>
           <a:p>
             <a:pPr indent="0" marL="0">
-              <a:lnSpc>
-                <a:spcPts val="4800"/>
-              </a:lnSpc>
-              <a:buNone/>
-            </a:pPr>
-            <a:r>
-              <a:rPr lang="en-US" sz="4400" b="1" dirty="0">
+              <a:buNone/>
+            </a:pPr>
+            <a:r>
+              <a:rPr lang="en-US" sz="4600" b="1" dirty="0">
                 <a:solidFill>
                   <a:srgbClr val="FFFFFF"/>
                 </a:solidFill>
@@ -6626,42 +6647,162 @@
                 <a:ea typeface="Cambria" pitchFamily="34" charset="-122"/>
                 <a:cs typeface="Cambria" pitchFamily="34" charset="-120"/>
               </a:rPr>
-              <a:t>Carpetas TOP, Caminatas y</a:t>
-            </a:r>
-            <a:endParaRPr lang="en-US" sz="4400" dirty="0"/>
-          </a:p>
+              <a:t>MASA</a:t>
+            </a:r>
+            <a:endParaRPr lang="en-US" sz="4600" dirty="0"/>
+          </a:p>
+        </p:txBody>
+      </p:sp>
+      <p:sp>
+        <p:nvSpPr>
+          <p:cNvPr id="8" name="Text 5"/>
+          <p:cNvSpPr/>
+          <p:nvPr/>
+        </p:nvSpPr>
+        <p:spPr>
+          <a:xfrm>
+            <a:off x="777240" y="2651760"/>
+            <a:ext cx="9601200" cy="457200"/>
+          </a:xfrm>
+          <a:prstGeom prst="rect">
+            <a:avLst/>
+          </a:prstGeom>
+          <a:noFill/>
+          <a:ln/>
+        </p:spPr>
+        <p:txBody>
+          <a:bodyPr wrap="square" lIns="0" tIns="0" rIns="0" bIns="0" rtlCol="0" anchor="ctr"/>
+          <a:lstStyle/>
+          <a:p>
+            <a:pPr indent="0" marL="0">
+              <a:buNone/>
+            </a:pPr>
+            <a:r>
+              <a:rPr lang="en-US" sz="1600" dirty="0">
+                <a:solidFill>
+                  <a:srgbClr val="DCE6F0"/>
+                </a:solidFill>
+                <a:latin typeface="Calibri" pitchFamily="34" charset="0"/>
+                <a:ea typeface="Calibri" pitchFamily="34" charset="-122"/>
+                <a:cs typeface="Calibri" pitchFamily="34" charset="-120"/>
+              </a:rPr>
+              <a:t>Proyecto Arqueros — Contrato Electromecánico Planta Concentradora y de Espesado</a:t>
+            </a:r>
+            <a:endParaRPr lang="en-US" sz="1600" dirty="0"/>
+          </a:p>
+        </p:txBody>
+      </p:sp>
+      <p:sp>
+        <p:nvSpPr>
+          <p:cNvPr id="9" name="Text 6"/>
+          <p:cNvSpPr/>
+          <p:nvPr/>
+        </p:nvSpPr>
+        <p:spPr>
+          <a:xfrm>
+            <a:off x="777240" y="3200400"/>
+            <a:ext cx="8778240" cy="1188720"/>
+          </a:xfrm>
+          <a:prstGeom prst="rect">
+            <a:avLst/>
+          </a:prstGeom>
+          <a:noFill/>
+          <a:ln/>
+        </p:spPr>
+        <p:txBody>
+          <a:bodyPr wrap="square" lIns="0" tIns="0" rIns="0" bIns="0" rtlCol="0" anchor="t"/>
+          <a:lstStyle/>
           <a:p>
             <a:pPr indent="0" marL="0">
               <a:lnSpc>
-                <a:spcPts val="4800"/>
+                <a:spcPts val="2000"/>
               </a:lnSpc>
               <a:buNone/>
             </a:pPr>
             <a:r>
-              <a:rPr lang="en-US" sz="4400" b="1" dirty="0">
-                <a:solidFill>
-                  <a:srgbClr val="FFFFFF"/>
+              <a:rPr lang="en-US" sz="1350" dirty="0">
+                <a:solidFill>
+                  <a:srgbClr val="6E8CA8"/>
+                </a:solidFill>
+                <a:latin typeface="Calibri" pitchFamily="34" charset="0"/>
+                <a:ea typeface="Calibri" pitchFamily="34" charset="-122"/>
+                <a:cs typeface="Calibri" pitchFamily="34" charset="-120"/>
+              </a:rPr>
+              <a:t>135 subsistemas en 4 áreas (2000 · 3000 · 4000 · 8000) · 2.963 detalles de terminación levantados.</a:t>
+            </a:r>
+            <a:endParaRPr lang="en-US" sz="1350" dirty="0"/>
+          </a:p>
+          <a:p>
+            <a:pPr indent="0" marL="0">
+              <a:lnSpc>
+                <a:spcPts val="2000"/>
+              </a:lnSpc>
+              <a:buNone/>
+            </a:pPr>
+            <a:r>
+              <a:rPr lang="en-US" sz="1350" dirty="0">
+                <a:solidFill>
+                  <a:srgbClr val="6E8CA8"/>
+                </a:solidFill>
+                <a:latin typeface="Calibri" pitchFamily="34" charset="0"/>
+                <a:ea typeface="Calibri" pitchFamily="34" charset="-122"/>
+                <a:cs typeface="Calibri" pitchFamily="34" charset="-120"/>
+              </a:rPr>
+              <a:t>Estatus de armado y entrega de carpetas TOP · avance de caminatas 80% / 100% · detalles de construcción en condición P1.</a:t>
+            </a:r>
+            <a:endParaRPr lang="en-US" sz="1350" dirty="0"/>
+          </a:p>
+        </p:txBody>
+      </p:sp>
+      <p:sp>
+        <p:nvSpPr>
+          <p:cNvPr id="10" name="Text 7"/>
+          <p:cNvSpPr/>
+          <p:nvPr/>
+        </p:nvSpPr>
+        <p:spPr>
+          <a:xfrm>
+            <a:off x="777240" y="4846320"/>
+            <a:ext cx="2651760" cy="640080"/>
+          </a:xfrm>
+          <a:prstGeom prst="rect">
+            <a:avLst/>
+          </a:prstGeom>
+          <a:noFill/>
+          <a:ln/>
+        </p:spPr>
+        <p:txBody>
+          <a:bodyPr wrap="square" lIns="0" tIns="0" rIns="0" bIns="0" rtlCol="0" anchor="ctr"/>
+          <a:lstStyle/>
+          <a:p>
+            <a:pPr indent="0" marL="0">
+              <a:buNone/>
+            </a:pPr>
+            <a:r>
+              <a:rPr lang="en-US" sz="3400" b="1" dirty="0">
+                <a:solidFill>
+                  <a:srgbClr val="E3A55B"/>
                 </a:solidFill>
                 <a:latin typeface="Cambria" pitchFamily="34" charset="0"/>
                 <a:ea typeface="Cambria" pitchFamily="34" charset="-122"/>
                 <a:cs typeface="Cambria" pitchFamily="34" charset="-120"/>
               </a:rPr>
-              <a:t>Detalles de Terminación P1</a:t>
-            </a:r>
-            <a:endParaRPr lang="en-US" sz="4400" dirty="0"/>
-          </a:p>
-        </p:txBody>
-      </p:sp>
-      <p:sp>
-        <p:nvSpPr>
-          <p:cNvPr id="7" name="Text 5"/>
-          <p:cNvSpPr/>
-          <p:nvPr/>
-        </p:nvSpPr>
-        <p:spPr>
-          <a:xfrm>
-            <a:off x="777240" y="3611880"/>
-            <a:ext cx="8412480" cy="914400"/>
+              <a:t>100%</a:t>
+            </a:r>
+            <a:endParaRPr lang="en-US" sz="3400" dirty="0"/>
+          </a:p>
+        </p:txBody>
+      </p:sp>
+      <p:sp>
+        <p:nvSpPr>
+          <p:cNvPr id="11" name="Text 8"/>
+          <p:cNvSpPr/>
+          <p:nvPr/>
+        </p:nvSpPr>
+        <p:spPr>
+          <a:xfrm>
+            <a:off x="777240" y="5486400"/>
+            <a:ext cx="2651760" cy="502920"/>
           </a:xfrm>
           <a:prstGeom prst="rect">
             <a:avLst/>
@@ -6674,13 +6815,10 @@
           <a:lstStyle/>
           <a:p>
             <a:pPr indent="0" marL="0">
-              <a:lnSpc>
-                <a:spcPts val="2300"/>
-              </a:lnSpc>
-              <a:buNone/>
-            </a:pPr>
-            <a:r>
-              <a:rPr lang="en-US" sz="1500" dirty="0">
+              <a:buNone/>
+            </a:pPr>
+            <a:r>
+              <a:rPr lang="en-US" sz="1150" dirty="0">
                 <a:solidFill>
                   <a:srgbClr val="DCE6F0"/>
                 </a:solidFill>
@@ -6688,22 +6826,22 @@
                 <a:ea typeface="Calibri" pitchFamily="34" charset="-122"/>
                 <a:cs typeface="Calibri" pitchFamily="34" charset="-120"/>
               </a:rPr>
-              <a:t>Estatus de armado y entrega de carpetas TOP · avance de caminatas 80% / 100% · detalles de construcción en condición P1. Vista ejecutiva por área y disciplina.</a:t>
-            </a:r>
-            <a:endParaRPr lang="en-US" sz="1500" dirty="0"/>
-          </a:p>
-        </p:txBody>
-      </p:sp>
-      <p:sp>
-        <p:nvSpPr>
-          <p:cNvPr id="8" name="Text 6"/>
-          <p:cNvSpPr/>
-          <p:nvPr/>
-        </p:nvSpPr>
-        <p:spPr>
-          <a:xfrm>
-            <a:off x="777240" y="4892040"/>
-            <a:ext cx="2514600" cy="640080"/>
+              <a:t>Caminatas 80%</a:t>
+            </a:r>
+            <a:endParaRPr lang="en-US" sz="1150" dirty="0"/>
+          </a:p>
+        </p:txBody>
+      </p:sp>
+      <p:sp>
+        <p:nvSpPr>
+          <p:cNvPr id="12" name="Text 9"/>
+          <p:cNvSpPr/>
+          <p:nvPr/>
+        </p:nvSpPr>
+        <p:spPr>
+          <a:xfrm>
+            <a:off x="3520440" y="4846320"/>
+            <a:ext cx="2651760" cy="640080"/>
           </a:xfrm>
           <a:prstGeom prst="rect">
             <a:avLst/>
@@ -6727,7 +6865,7 @@
                 <a:ea typeface="Cambria" pitchFamily="34" charset="-122"/>
                 <a:cs typeface="Cambria" pitchFamily="34" charset="-120"/>
               </a:rPr>
-              <a:t>100%</a:t>
+              <a:t>66,7%</a:t>
             </a:r>
             <a:endParaRPr lang="en-US" sz="3400" dirty="0"/>
           </a:p>
@@ -6735,14 +6873,14 @@
       </p:sp>
       <p:sp>
         <p:nvSpPr>
-          <p:cNvPr id="9" name="Text 7"/>
-          <p:cNvSpPr/>
-          <p:nvPr/>
-        </p:nvSpPr>
-        <p:spPr>
-          <a:xfrm>
-            <a:off x="777240" y="5532120"/>
-            <a:ext cx="2514600" cy="457200"/>
+          <p:cNvPr id="13" name="Text 10"/>
+          <p:cNvSpPr/>
+          <p:nvPr/>
+        </p:nvSpPr>
+        <p:spPr>
+          <a:xfrm>
+            <a:off x="3520440" y="5486400"/>
+            <a:ext cx="2651760" cy="502920"/>
           </a:xfrm>
           <a:prstGeom prst="rect">
             <a:avLst/>
@@ -6766,7 +6904,7 @@
                 <a:ea typeface="Calibri" pitchFamily="34" charset="-122"/>
                 <a:cs typeface="Calibri" pitchFamily="34" charset="-120"/>
               </a:rPr>
-              <a:t>Caminatas 80%</a:t>
+              <a:t>Caminatas 100%</a:t>
             </a:r>
             <a:endParaRPr lang="en-US" sz="1150" dirty="0"/>
           </a:p>
@@ -6774,14 +6912,14 @@
       </p:sp>
       <p:sp>
         <p:nvSpPr>
-          <p:cNvPr id="10" name="Text 8"/>
-          <p:cNvSpPr/>
-          <p:nvPr/>
-        </p:nvSpPr>
-        <p:spPr>
-          <a:xfrm>
-            <a:off x="3520440" y="4892040"/>
-            <a:ext cx="2514600" cy="640080"/>
+          <p:cNvPr id="14" name="Text 11"/>
+          <p:cNvSpPr/>
+          <p:nvPr/>
+        </p:nvSpPr>
+        <p:spPr>
+          <a:xfrm>
+            <a:off x="6263640" y="4846320"/>
+            <a:ext cx="2651760" cy="640080"/>
           </a:xfrm>
           <a:prstGeom prst="rect">
             <a:avLst/>
@@ -6805,7 +6943,7 @@
                 <a:ea typeface="Cambria" pitchFamily="34" charset="-122"/>
                 <a:cs typeface="Cambria" pitchFamily="34" charset="-120"/>
               </a:rPr>
-              <a:t>66,7%</a:t>
+              <a:t>20%</a:t>
             </a:r>
             <a:endParaRPr lang="en-US" sz="3400" dirty="0"/>
           </a:p>
@@ -6813,14 +6951,14 @@
       </p:sp>
       <p:sp>
         <p:nvSpPr>
-          <p:cNvPr id="11" name="Text 9"/>
-          <p:cNvSpPr/>
-          <p:nvPr/>
-        </p:nvSpPr>
-        <p:spPr>
-          <a:xfrm>
-            <a:off x="3520440" y="5532120"/>
-            <a:ext cx="2514600" cy="457200"/>
+          <p:cNvPr id="15" name="Text 12"/>
+          <p:cNvSpPr/>
+          <p:nvPr/>
+        </p:nvSpPr>
+        <p:spPr>
+          <a:xfrm>
+            <a:off x="6263640" y="5486400"/>
+            <a:ext cx="2651760" cy="502920"/>
           </a:xfrm>
           <a:prstGeom prst="rect">
             <a:avLst/>
@@ -6844,7 +6982,7 @@
                 <a:ea typeface="Calibri" pitchFamily="34" charset="-122"/>
                 <a:cs typeface="Calibri" pitchFamily="34" charset="-120"/>
               </a:rPr>
-              <a:t>Caminatas 100%</a:t>
+              <a:t>Carpetas TOP entregadas</a:t>
             </a:r>
             <a:endParaRPr lang="en-US" sz="1150" dirty="0"/>
           </a:p>
@@ -6852,14 +6990,14 @@
       </p:sp>
       <p:sp>
         <p:nvSpPr>
-          <p:cNvPr id="12" name="Text 10"/>
-          <p:cNvSpPr/>
-          <p:nvPr/>
-        </p:nvSpPr>
-        <p:spPr>
-          <a:xfrm>
-            <a:off x="6263640" y="4892040"/>
-            <a:ext cx="2514600" cy="640080"/>
+          <p:cNvPr id="16" name="Text 13"/>
+          <p:cNvSpPr/>
+          <p:nvPr/>
+        </p:nvSpPr>
+        <p:spPr>
+          <a:xfrm>
+            <a:off x="9006840" y="4846320"/>
+            <a:ext cx="2651760" cy="640080"/>
           </a:xfrm>
           <a:prstGeom prst="rect">
             <a:avLst/>
@@ -6883,7 +7021,7 @@
                 <a:ea typeface="Cambria" pitchFamily="34" charset="-122"/>
                 <a:cs typeface="Cambria" pitchFamily="34" charset="-120"/>
               </a:rPr>
-              <a:t>20%</a:t>
+              <a:t>57,7%</a:t>
             </a:r>
             <a:endParaRPr lang="en-US" sz="3400" dirty="0"/>
           </a:p>
@@ -6891,14 +7029,14 @@
       </p:sp>
       <p:sp>
         <p:nvSpPr>
-          <p:cNvPr id="13" name="Text 11"/>
-          <p:cNvSpPr/>
-          <p:nvPr/>
-        </p:nvSpPr>
-        <p:spPr>
-          <a:xfrm>
-            <a:off x="6263640" y="5532120"/>
-            <a:ext cx="2514600" cy="457200"/>
+          <p:cNvPr id="17" name="Text 14"/>
+          <p:cNvSpPr/>
+          <p:nvPr/>
+        </p:nvSpPr>
+        <p:spPr>
+          <a:xfrm>
+            <a:off x="9006840" y="5486400"/>
+            <a:ext cx="2651760" cy="502920"/>
           </a:xfrm>
           <a:prstGeom prst="rect">
             <a:avLst/>
@@ -6922,7 +7060,7 @@
                 <a:ea typeface="Calibri" pitchFamily="34" charset="-122"/>
                 <a:cs typeface="Calibri" pitchFamily="34" charset="-120"/>
               </a:rPr>
-              <a:t>Carpetas TOP entregadas</a:t>
+              <a:t>Cierre detalles P1</a:t>
             </a:r>
             <a:endParaRPr lang="en-US" sz="1150" dirty="0"/>
           </a:p>
@@ -6930,85 +7068,7 @@
       </p:sp>
       <p:sp>
         <p:nvSpPr>
-          <p:cNvPr id="14" name="Text 12"/>
-          <p:cNvSpPr/>
-          <p:nvPr/>
-        </p:nvSpPr>
-        <p:spPr>
-          <a:xfrm>
-            <a:off x="9006840" y="4892040"/>
-            <a:ext cx="2514600" cy="640080"/>
-          </a:xfrm>
-          <a:prstGeom prst="rect">
-            <a:avLst/>
-          </a:prstGeom>
-          <a:noFill/>
-          <a:ln/>
-        </p:spPr>
-        <p:txBody>
-          <a:bodyPr wrap="square" lIns="0" tIns="0" rIns="0" bIns="0" rtlCol="0" anchor="ctr"/>
-          <a:lstStyle/>
-          <a:p>
-            <a:pPr indent="0" marL="0">
-              <a:buNone/>
-            </a:pPr>
-            <a:r>
-              <a:rPr lang="en-US" sz="3400" b="1" dirty="0">
-                <a:solidFill>
-                  <a:srgbClr val="E3A55B"/>
-                </a:solidFill>
-                <a:latin typeface="Cambria" pitchFamily="34" charset="0"/>
-                <a:ea typeface="Cambria" pitchFamily="34" charset="-122"/>
-                <a:cs typeface="Cambria" pitchFamily="34" charset="-120"/>
-              </a:rPr>
-              <a:t>57,7%</a:t>
-            </a:r>
-            <a:endParaRPr lang="en-US" sz="3400" dirty="0"/>
-          </a:p>
-        </p:txBody>
-      </p:sp>
-      <p:sp>
-        <p:nvSpPr>
-          <p:cNvPr id="15" name="Text 13"/>
-          <p:cNvSpPr/>
-          <p:nvPr/>
-        </p:nvSpPr>
-        <p:spPr>
-          <a:xfrm>
-            <a:off x="9006840" y="5532120"/>
-            <a:ext cx="2514600" cy="457200"/>
-          </a:xfrm>
-          <a:prstGeom prst="rect">
-            <a:avLst/>
-          </a:prstGeom>
-          <a:noFill/>
-          <a:ln/>
-        </p:spPr>
-        <p:txBody>
-          <a:bodyPr wrap="square" lIns="0" tIns="0" rIns="0" bIns="0" rtlCol="0" anchor="ctr"/>
-          <a:lstStyle/>
-          <a:p>
-            <a:pPr indent="0" marL="0">
-              <a:buNone/>
-            </a:pPr>
-            <a:r>
-              <a:rPr lang="en-US" sz="1150" dirty="0">
-                <a:solidFill>
-                  <a:srgbClr val="DCE6F0"/>
-                </a:solidFill>
-                <a:latin typeface="Calibri" pitchFamily="34" charset="0"/>
-                <a:ea typeface="Calibri" pitchFamily="34" charset="-122"/>
-                <a:cs typeface="Calibri" pitchFamily="34" charset="-120"/>
-              </a:rPr>
-              <a:t>Cierre detalles P1</a:t>
-            </a:r>
-            <a:endParaRPr lang="en-US" sz="1150" dirty="0"/>
-          </a:p>
-        </p:txBody>
-      </p:sp>
-      <p:sp>
-        <p:nvSpPr>
-          <p:cNvPr id="16" name="Text 14"/>
+          <p:cNvPr id="18" name="Text 15"/>
           <p:cNvSpPr/>
           <p:nvPr/>
         </p:nvSpPr>
@@ -7042,6 +7102,84 @@
               <a:t>Corte: 26-07-2026   ·   Corte anterior: 16-07-2026</a:t>
             </a:r>
             <a:endParaRPr lang="en-US" sz="1100" dirty="0"/>
+          </a:p>
+        </p:txBody>
+      </p:sp>
+      <p:sp>
+        <p:nvSpPr>
+          <p:cNvPr id="19" name="Text 16"/>
+          <p:cNvSpPr/>
+          <p:nvPr/>
+        </p:nvSpPr>
+        <p:spPr>
+          <a:xfrm>
+            <a:off x="457200" y="6473952"/>
+            <a:ext cx="9692640" cy="274320"/>
+          </a:xfrm>
+          <a:prstGeom prst="rect">
+            <a:avLst/>
+          </a:prstGeom>
+          <a:noFill/>
+          <a:ln/>
+        </p:spPr>
+        <p:txBody>
+          <a:bodyPr wrap="square" lIns="0" tIns="0" rIns="0" bIns="0" rtlCol="0" anchor="ctr"/>
+          <a:lstStyle/>
+          <a:p>
+            <a:pPr algn="l" indent="0" marL="0">
+              <a:buNone/>
+            </a:pPr>
+            <a:r>
+              <a:rPr lang="en-US" sz="850" dirty="0">
+                <a:solidFill>
+                  <a:srgbClr val="6E8CA8"/>
+                </a:solidFill>
+                <a:latin typeface="Calibri" pitchFamily="34" charset="0"/>
+                <a:ea typeface="Calibri" pitchFamily="34" charset="-122"/>
+                <a:cs typeface="Calibri" pitchFamily="34" charset="-120"/>
+              </a:rPr>
+              <a:t>Fuente: Estatus_Resumen_General_QAQC.xlsx · Corte 26-07-2026 · Áreas 2000/3000/4000/8000</a:t>
+            </a:r>
+            <a:endParaRPr lang="en-US" sz="850" dirty="0"/>
+          </a:p>
+        </p:txBody>
+      </p:sp>
+      <p:sp>
+        <p:nvSpPr>
+          <p:cNvPr id="20" name="Text 17"/>
+          <p:cNvSpPr/>
+          <p:nvPr/>
+        </p:nvSpPr>
+        <p:spPr>
+          <a:xfrm>
+            <a:off x="11430000" y="6473952"/>
+            <a:ext cx="365760" cy="274320"/>
+          </a:xfrm>
+          <a:prstGeom prst="rect">
+            <a:avLst/>
+          </a:prstGeom>
+          <a:noFill/>
+          <a:ln/>
+        </p:spPr>
+        <p:txBody>
+          <a:bodyPr wrap="square" lIns="0" tIns="0" rIns="0" bIns="0" rtlCol="0" anchor="ctr"/>
+          <a:lstStyle/>
+          <a:p>
+            <a:pPr algn="r" indent="0" marL="0">
+              <a:buNone/>
+            </a:pPr>
+            <a:r>
+              <a:rPr lang="en-US" sz="900" dirty="0">
+                <a:solidFill>
+                  <a:srgbClr val="6E8CA8"/>
+                </a:solidFill>
+                <a:latin typeface="Calibri" pitchFamily="34" charset="0"/>
+                <a:ea typeface="Calibri" pitchFamily="34" charset="-122"/>
+                <a:cs typeface="Calibri" pitchFamily="34" charset="-120"/>
+              </a:rPr>
+              <a:t>1</a:t>
+            </a:r>
+            <a:endParaRPr lang="en-US" sz="900" dirty="0"/>
           </a:p>
         </p:txBody>
       </p:sp>
@@ -7077,9 +7215,33 @@
           <a:chExt cx="0" cy="0"/>
         </a:xfrm>
       </p:grpSpPr>
-      <p:sp>
-        <p:nvSpPr>
-          <p:cNvPr id="2" name="Text 0"/>
+      <p:pic>
+        <p:nvPicPr>
+          <p:cNvPr id="2" name="Image 0" descr="/home/user/Inversiones/panel_control_TOP_P1/besalco_logo.png">    </p:cNvPr>
+          <p:cNvPicPr>
+            <a:picLocks noChangeAspect="1"/>
+          </p:cNvPicPr>
+          <p:nvPr/>
+        </p:nvPicPr>
+        <p:blipFill>
+          <a:blip r:embed="rId1"/>
+          <a:stretch>
+            <a:fillRect/>
+          </a:stretch>
+        </p:blipFill>
+        <p:spPr>
+          <a:xfrm>
+            <a:off x="9116568" y="219456"/>
+            <a:ext cx="2770632" cy="594360"/>
+          </a:xfrm>
+          <a:prstGeom prst="rect">
+            <a:avLst/>
+          </a:prstGeom>
+        </p:spPr>
+      </p:pic>
+      <p:sp>
+        <p:nvSpPr>
+          <p:cNvPr id="3" name="Text 0"/>
           <p:cNvSpPr/>
           <p:nvPr/>
         </p:nvSpPr>
@@ -7118,7 +7280,7 @@
       </p:sp>
       <p:sp>
         <p:nvSpPr>
-          <p:cNvPr id="3" name="Text 1"/>
+          <p:cNvPr id="4" name="Text 1"/>
           <p:cNvSpPr/>
           <p:nvPr/>
         </p:nvSpPr>
@@ -7157,7 +7319,7 @@
       </p:sp>
       <p:sp>
         <p:nvSpPr>
-          <p:cNvPr id="4" name="Text 2"/>
+          <p:cNvPr id="5" name="Text 2"/>
           <p:cNvSpPr/>
           <p:nvPr/>
         </p:nvSpPr>
@@ -7196,7 +7358,7 @@
       </p:sp>
       <p:graphicFrame>
         <p:nvGraphicFramePr>
-          <p:cNvPr id="5" name="Chart 0" descr=""/>
+          <p:cNvPr id="6" name="Chart 0" descr=""/>
           <p:cNvGraphicFramePr/>
           <p:nvPr/>
         </p:nvGraphicFramePr>
@@ -7206,13 +7368,13 @@
         </p:xfrm>
         <a:graphic xmlns:a="http://schemas.openxmlformats.org/drawingml/2006/main">
           <a:graphicData uri="http://schemas.openxmlformats.org/drawingml/2006/chart">
-            <c:chart xmlns:c="http://schemas.openxmlformats.org/drawingml/2006/chart" r:id="rId1"/>
+            <c:chart xmlns:c="http://schemas.openxmlformats.org/drawingml/2006/chart" r:id="rId2"/>
           </a:graphicData>
         </a:graphic>
       </p:graphicFrame>
       <p:sp>
         <p:nvSpPr>
-          <p:cNvPr id="6" name="Shape 3"/>
+          <p:cNvPr id="7" name="Shape 3"/>
           <p:cNvSpPr/>
           <p:nvPr/>
         </p:nvSpPr>
@@ -7239,7 +7401,7 @@
       </p:sp>
       <p:sp>
         <p:nvSpPr>
-          <p:cNvPr id="7" name="Text 4"/>
+          <p:cNvPr id="8" name="Text 4"/>
           <p:cNvSpPr/>
           <p:nvPr/>
         </p:nvSpPr>
@@ -7278,7 +7440,7 @@
       </p:sp>
       <p:sp>
         <p:nvSpPr>
-          <p:cNvPr id="8" name="Shape 5"/>
+          <p:cNvPr id="9" name="Shape 5"/>
           <p:cNvSpPr/>
           <p:nvPr/>
         </p:nvSpPr>
@@ -7300,7 +7462,7 @@
       </p:sp>
       <p:sp>
         <p:nvSpPr>
-          <p:cNvPr id="9" name="Shape 6"/>
+          <p:cNvPr id="10" name="Shape 6"/>
           <p:cNvSpPr/>
           <p:nvPr/>
         </p:nvSpPr>
@@ -7320,7 +7482,7 @@
       </p:sp>
       <p:sp>
         <p:nvSpPr>
-          <p:cNvPr id="10" name="Text 7"/>
+          <p:cNvPr id="11" name="Text 7"/>
           <p:cNvSpPr/>
           <p:nvPr/>
         </p:nvSpPr>
@@ -7359,7 +7521,7 @@
       </p:sp>
       <p:sp>
         <p:nvSpPr>
-          <p:cNvPr id="11" name="Text 8"/>
+          <p:cNvPr id="12" name="Text 8"/>
           <p:cNvSpPr/>
           <p:nvPr/>
         </p:nvSpPr>
@@ -7398,7 +7560,7 @@
       </p:sp>
       <p:sp>
         <p:nvSpPr>
-          <p:cNvPr id="12" name="Text 9"/>
+          <p:cNvPr id="13" name="Text 9"/>
           <p:cNvSpPr/>
           <p:nvPr/>
         </p:nvSpPr>
@@ -7437,7 +7599,7 @@
       </p:sp>
       <p:sp>
         <p:nvSpPr>
-          <p:cNvPr id="13" name="Shape 10"/>
+          <p:cNvPr id="14" name="Shape 10"/>
           <p:cNvSpPr/>
           <p:nvPr/>
         </p:nvSpPr>
@@ -7459,7 +7621,7 @@
       </p:sp>
       <p:sp>
         <p:nvSpPr>
-          <p:cNvPr id="14" name="Shape 11"/>
+          <p:cNvPr id="15" name="Shape 11"/>
           <p:cNvSpPr/>
           <p:nvPr/>
         </p:nvSpPr>
@@ -7479,7 +7641,7 @@
       </p:sp>
       <p:sp>
         <p:nvSpPr>
-          <p:cNvPr id="15" name="Text 12"/>
+          <p:cNvPr id="16" name="Text 12"/>
           <p:cNvSpPr/>
           <p:nvPr/>
         </p:nvSpPr>
@@ -7518,7 +7680,7 @@
       </p:sp>
       <p:sp>
         <p:nvSpPr>
-          <p:cNvPr id="16" name="Text 13"/>
+          <p:cNvPr id="17" name="Text 13"/>
           <p:cNvSpPr/>
           <p:nvPr/>
         </p:nvSpPr>
@@ -7557,7 +7719,7 @@
       </p:sp>
       <p:sp>
         <p:nvSpPr>
-          <p:cNvPr id="17" name="Text 14"/>
+          <p:cNvPr id="18" name="Text 14"/>
           <p:cNvSpPr/>
           <p:nvPr/>
         </p:nvSpPr>
@@ -7596,7 +7758,7 @@
       </p:sp>
       <p:sp>
         <p:nvSpPr>
-          <p:cNvPr id="18" name="Shape 15"/>
+          <p:cNvPr id="19" name="Shape 15"/>
           <p:cNvSpPr/>
           <p:nvPr/>
         </p:nvSpPr>
@@ -7618,7 +7780,7 @@
       </p:sp>
       <p:sp>
         <p:nvSpPr>
-          <p:cNvPr id="19" name="Shape 16"/>
+          <p:cNvPr id="20" name="Shape 16"/>
           <p:cNvSpPr/>
           <p:nvPr/>
         </p:nvSpPr>
@@ -7638,7 +7800,7 @@
       </p:sp>
       <p:sp>
         <p:nvSpPr>
-          <p:cNvPr id="20" name="Text 17"/>
+          <p:cNvPr id="21" name="Text 17"/>
           <p:cNvSpPr/>
           <p:nvPr/>
         </p:nvSpPr>
@@ -7677,7 +7839,7 @@
       </p:sp>
       <p:sp>
         <p:nvSpPr>
-          <p:cNvPr id="21" name="Text 18"/>
+          <p:cNvPr id="22" name="Text 18"/>
           <p:cNvSpPr/>
           <p:nvPr/>
         </p:nvSpPr>
@@ -7716,7 +7878,7 @@
       </p:sp>
       <p:sp>
         <p:nvSpPr>
-          <p:cNvPr id="22" name="Text 19"/>
+          <p:cNvPr id="23" name="Text 19"/>
           <p:cNvSpPr/>
           <p:nvPr/>
         </p:nvSpPr>
@@ -7755,7 +7917,7 @@
       </p:sp>
       <p:sp>
         <p:nvSpPr>
-          <p:cNvPr id="23" name="Shape 20"/>
+          <p:cNvPr id="24" name="Shape 20"/>
           <p:cNvSpPr/>
           <p:nvPr/>
         </p:nvSpPr>
@@ -7777,7 +7939,7 @@
       </p:sp>
       <p:sp>
         <p:nvSpPr>
-          <p:cNvPr id="24" name="Shape 21"/>
+          <p:cNvPr id="25" name="Shape 21"/>
           <p:cNvSpPr/>
           <p:nvPr/>
         </p:nvSpPr>
@@ -7797,7 +7959,7 @@
       </p:sp>
       <p:sp>
         <p:nvSpPr>
-          <p:cNvPr id="25" name="Text 22"/>
+          <p:cNvPr id="26" name="Text 22"/>
           <p:cNvSpPr/>
           <p:nvPr/>
         </p:nvSpPr>
@@ -7836,7 +7998,7 @@
       </p:sp>
       <p:sp>
         <p:nvSpPr>
-          <p:cNvPr id="26" name="Text 23"/>
+          <p:cNvPr id="27" name="Text 23"/>
           <p:cNvSpPr/>
           <p:nvPr/>
         </p:nvSpPr>
@@ -7875,7 +8037,7 @@
       </p:sp>
       <p:sp>
         <p:nvSpPr>
-          <p:cNvPr id="27" name="Text 24"/>
+          <p:cNvPr id="28" name="Text 24"/>
           <p:cNvSpPr/>
           <p:nvPr/>
         </p:nvSpPr>
@@ -7914,7 +8076,7 @@
       </p:sp>
       <p:sp>
         <p:nvSpPr>
-          <p:cNvPr id="28" name="Shape 25"/>
+          <p:cNvPr id="29" name="Shape 25"/>
           <p:cNvSpPr/>
           <p:nvPr/>
         </p:nvSpPr>
@@ -7936,7 +8098,7 @@
       </p:sp>
       <p:sp>
         <p:nvSpPr>
-          <p:cNvPr id="29" name="Shape 26"/>
+          <p:cNvPr id="30" name="Shape 26"/>
           <p:cNvSpPr/>
           <p:nvPr/>
         </p:nvSpPr>
@@ -7956,7 +8118,7 @@
       </p:sp>
       <p:sp>
         <p:nvSpPr>
-          <p:cNvPr id="30" name="Text 27"/>
+          <p:cNvPr id="31" name="Text 27"/>
           <p:cNvSpPr/>
           <p:nvPr/>
         </p:nvSpPr>
@@ -7995,7 +8157,7 @@
       </p:sp>
       <p:sp>
         <p:nvSpPr>
-          <p:cNvPr id="31" name="Text 28"/>
+          <p:cNvPr id="32" name="Text 28"/>
           <p:cNvSpPr/>
           <p:nvPr/>
         </p:nvSpPr>
@@ -8034,7 +8196,7 @@
       </p:sp>
       <p:sp>
         <p:nvSpPr>
-          <p:cNvPr id="32" name="Text 29"/>
+          <p:cNvPr id="33" name="Text 29"/>
           <p:cNvSpPr/>
           <p:nvPr/>
         </p:nvSpPr>
@@ -8073,7 +8235,7 @@
       </p:sp>
       <p:sp>
         <p:nvSpPr>
-          <p:cNvPr id="33" name="Text 30"/>
+          <p:cNvPr id="34" name="Text 30"/>
           <p:cNvSpPr/>
           <p:nvPr/>
         </p:nvSpPr>
@@ -8115,7 +8277,7 @@
       </p:sp>
       <p:sp>
         <p:nvSpPr>
-          <p:cNvPr id="34" name="Text 31"/>
+          <p:cNvPr id="35" name="Text 31"/>
           <p:cNvSpPr/>
           <p:nvPr/>
         </p:nvSpPr>
@@ -8154,7 +8316,46 @@
       </p:sp>
       <p:sp>
         <p:nvSpPr>
-          <p:cNvPr id="35" name="Text 32"/>
+          <p:cNvPr id="36" name="Text 32"/>
+          <p:cNvSpPr/>
+          <p:nvPr/>
+        </p:nvSpPr>
+        <p:spPr>
+          <a:xfrm>
+            <a:off x="1828800" y="6483096"/>
+            <a:ext cx="9756648" cy="274320"/>
+          </a:xfrm>
+          <a:prstGeom prst="rect">
+            <a:avLst/>
+          </a:prstGeom>
+          <a:noFill/>
+          <a:ln/>
+        </p:spPr>
+        <p:txBody>
+          <a:bodyPr wrap="square" lIns="0" tIns="0" rIns="0" bIns="0" rtlCol="0" anchor="ctr"/>
+          <a:lstStyle/>
+          <a:p>
+            <a:pPr algn="r" indent="0" marL="0">
+              <a:buNone/>
+            </a:pPr>
+            <a:r>
+              <a:rPr lang="en-US" sz="850" dirty="0">
+                <a:solidFill>
+                  <a:srgbClr val="56606E"/>
+                </a:solidFill>
+                <a:latin typeface="Calibri" pitchFamily="34" charset="0"/>
+                <a:ea typeface="Calibri" pitchFamily="34" charset="-122"/>
+                <a:cs typeface="Calibri" pitchFamily="34" charset="-120"/>
+              </a:rPr>
+              <a:t>PROYECTO DESALADORA</a:t>
+            </a:r>
+            <a:endParaRPr lang="en-US" sz="850" dirty="0"/>
+          </a:p>
+        </p:txBody>
+      </p:sp>
+      <p:sp>
+        <p:nvSpPr>
+          <p:cNvPr id="37" name="Text 33"/>
           <p:cNvSpPr/>
           <p:nvPr/>
         </p:nvSpPr>
@@ -8223,9 +8424,33 @@
           <a:chExt cx="0" cy="0"/>
         </a:xfrm>
       </p:grpSpPr>
-      <p:sp>
-        <p:nvSpPr>
-          <p:cNvPr id="2" name="Text 0"/>
+      <p:pic>
+        <p:nvPicPr>
+          <p:cNvPr id="2" name="Image 0" descr="/home/user/Inversiones/panel_control_TOP_P1/besalco_logo.png">    </p:cNvPr>
+          <p:cNvPicPr>
+            <a:picLocks noChangeAspect="1"/>
+          </p:cNvPicPr>
+          <p:nvPr/>
+        </p:nvPicPr>
+        <p:blipFill>
+          <a:blip r:embed="rId1"/>
+          <a:stretch>
+            <a:fillRect/>
+          </a:stretch>
+        </p:blipFill>
+        <p:spPr>
+          <a:xfrm>
+            <a:off x="9116568" y="219456"/>
+            <a:ext cx="2770632" cy="594360"/>
+          </a:xfrm>
+          <a:prstGeom prst="rect">
+            <a:avLst/>
+          </a:prstGeom>
+        </p:spPr>
+      </p:pic>
+      <p:sp>
+        <p:nvSpPr>
+          <p:cNvPr id="3" name="Text 0"/>
           <p:cNvSpPr/>
           <p:nvPr/>
         </p:nvSpPr>
@@ -8264,7 +8489,7 @@
       </p:sp>
       <p:sp>
         <p:nvSpPr>
-          <p:cNvPr id="3" name="Text 1"/>
+          <p:cNvPr id="4" name="Text 1"/>
           <p:cNvSpPr/>
           <p:nvPr/>
         </p:nvSpPr>
@@ -8303,7 +8528,7 @@
       </p:sp>
       <p:sp>
         <p:nvSpPr>
-          <p:cNvPr id="4" name="Text 2"/>
+          <p:cNvPr id="5" name="Text 2"/>
           <p:cNvSpPr/>
           <p:nvPr/>
         </p:nvSpPr>
@@ -8342,7 +8567,7 @@
       </p:sp>
       <p:graphicFrame>
         <p:nvGraphicFramePr>
-          <p:cNvPr id="5" name="Chart 0" descr=""/>
+          <p:cNvPr id="6" name="Chart 0" descr=""/>
           <p:cNvGraphicFramePr/>
           <p:nvPr/>
         </p:nvGraphicFramePr>
@@ -8352,13 +8577,13 @@
         </p:xfrm>
         <a:graphic xmlns:a="http://schemas.openxmlformats.org/drawingml/2006/main">
           <a:graphicData uri="http://schemas.openxmlformats.org/drawingml/2006/chart">
-            <c:chart xmlns:c="http://schemas.openxmlformats.org/drawingml/2006/chart" r:id="rId1"/>
+            <c:chart xmlns:c="http://schemas.openxmlformats.org/drawingml/2006/chart" r:id="rId2"/>
           </a:graphicData>
         </a:graphic>
       </p:graphicFrame>
       <p:sp>
         <p:nvSpPr>
-          <p:cNvPr id="6" name="Shape 3"/>
+          <p:cNvPr id="7" name="Shape 3"/>
           <p:cNvSpPr/>
           <p:nvPr/>
         </p:nvSpPr>
@@ -8380,7 +8605,7 @@
       </p:sp>
       <p:sp>
         <p:nvSpPr>
-          <p:cNvPr id="7" name="Text 4"/>
+          <p:cNvPr id="8" name="Text 4"/>
           <p:cNvSpPr/>
           <p:nvPr/>
         </p:nvSpPr>
@@ -8419,7 +8644,7 @@
       </p:sp>
       <p:graphicFrame>
         <p:nvGraphicFramePr>
-          <p:cNvPr id="8" name="Chart 1" descr=""/>
+          <p:cNvPr id="9" name="Chart 1" descr=""/>
           <p:cNvGraphicFramePr/>
           <p:nvPr/>
         </p:nvGraphicFramePr>
@@ -8429,13 +8654,13 @@
         </p:xfrm>
         <a:graphic xmlns:a="http://schemas.openxmlformats.org/drawingml/2006/main">
           <a:graphicData uri="http://schemas.openxmlformats.org/drawingml/2006/chart">
-            <c:chart xmlns:c="http://schemas.openxmlformats.org/drawingml/2006/chart" r:id="rId2"/>
+            <c:chart xmlns:c="http://schemas.openxmlformats.org/drawingml/2006/chart" r:id="rId3"/>
           </a:graphicData>
         </a:graphic>
       </p:graphicFrame>
       <p:sp>
         <p:nvSpPr>
-          <p:cNvPr id="9" name="Text 5"/>
+          <p:cNvPr id="10" name="Text 5"/>
           <p:cNvSpPr/>
           <p:nvPr/>
         </p:nvSpPr>
@@ -8491,7 +8716,7 @@
       </p:sp>
       <p:sp>
         <p:nvSpPr>
-          <p:cNvPr id="10" name="Shape 6"/>
+          <p:cNvPr id="11" name="Shape 6"/>
           <p:cNvSpPr/>
           <p:nvPr/>
         </p:nvSpPr>
@@ -8511,7 +8736,7 @@
       </p:sp>
       <p:sp>
         <p:nvSpPr>
-          <p:cNvPr id="11" name="Text 7"/>
+          <p:cNvPr id="12" name="Text 7"/>
           <p:cNvSpPr/>
           <p:nvPr/>
         </p:nvSpPr>
@@ -8550,7 +8775,7 @@
       </p:sp>
       <p:sp>
         <p:nvSpPr>
-          <p:cNvPr id="12" name="Text 8"/>
+          <p:cNvPr id="13" name="Text 8"/>
           <p:cNvSpPr/>
           <p:nvPr/>
         </p:nvSpPr>
@@ -8589,7 +8814,7 @@
       </p:sp>
       <p:sp>
         <p:nvSpPr>
-          <p:cNvPr id="13" name="Shape 9"/>
+          <p:cNvPr id="14" name="Shape 9"/>
           <p:cNvSpPr/>
           <p:nvPr/>
         </p:nvSpPr>
@@ -8609,7 +8834,7 @@
       </p:sp>
       <p:sp>
         <p:nvSpPr>
-          <p:cNvPr id="14" name="Text 10"/>
+          <p:cNvPr id="15" name="Text 10"/>
           <p:cNvSpPr/>
           <p:nvPr/>
         </p:nvSpPr>
@@ -8648,7 +8873,7 @@
       </p:sp>
       <p:sp>
         <p:nvSpPr>
-          <p:cNvPr id="15" name="Text 11"/>
+          <p:cNvPr id="16" name="Text 11"/>
           <p:cNvSpPr/>
           <p:nvPr/>
         </p:nvSpPr>
@@ -8687,7 +8912,7 @@
       </p:sp>
       <p:sp>
         <p:nvSpPr>
-          <p:cNvPr id="16" name="Shape 12"/>
+          <p:cNvPr id="17" name="Shape 12"/>
           <p:cNvSpPr/>
           <p:nvPr/>
         </p:nvSpPr>
@@ -8707,7 +8932,7 @@
       </p:sp>
       <p:sp>
         <p:nvSpPr>
-          <p:cNvPr id="17" name="Text 13"/>
+          <p:cNvPr id="18" name="Text 13"/>
           <p:cNvSpPr/>
           <p:nvPr/>
         </p:nvSpPr>
@@ -8746,7 +8971,7 @@
       </p:sp>
       <p:sp>
         <p:nvSpPr>
-          <p:cNvPr id="18" name="Text 14"/>
+          <p:cNvPr id="19" name="Text 14"/>
           <p:cNvSpPr/>
           <p:nvPr/>
         </p:nvSpPr>
@@ -8785,7 +9010,7 @@
       </p:sp>
       <p:sp>
         <p:nvSpPr>
-          <p:cNvPr id="19" name="Shape 15"/>
+          <p:cNvPr id="20" name="Shape 15"/>
           <p:cNvSpPr/>
           <p:nvPr/>
         </p:nvSpPr>
@@ -8808,7 +9033,7 @@
       </p:sp>
       <p:sp>
         <p:nvSpPr>
-          <p:cNvPr id="20" name="Text 16"/>
+          <p:cNvPr id="21" name="Text 16"/>
           <p:cNvSpPr/>
           <p:nvPr/>
         </p:nvSpPr>
@@ -8868,7 +9093,7 @@
       </p:sp>
       <p:sp>
         <p:nvSpPr>
-          <p:cNvPr id="21" name="Text 17"/>
+          <p:cNvPr id="22" name="Text 17"/>
           <p:cNvSpPr/>
           <p:nvPr/>
         </p:nvSpPr>
@@ -8907,7 +9132,46 @@
       </p:sp>
       <p:sp>
         <p:nvSpPr>
-          <p:cNvPr id="22" name="Text 18"/>
+          <p:cNvPr id="23" name="Text 18"/>
+          <p:cNvSpPr/>
+          <p:nvPr/>
+        </p:nvSpPr>
+        <p:spPr>
+          <a:xfrm>
+            <a:off x="1828800" y="6483096"/>
+            <a:ext cx="9756648" cy="274320"/>
+          </a:xfrm>
+          <a:prstGeom prst="rect">
+            <a:avLst/>
+          </a:prstGeom>
+          <a:noFill/>
+          <a:ln/>
+        </p:spPr>
+        <p:txBody>
+          <a:bodyPr wrap="square" lIns="0" tIns="0" rIns="0" bIns="0" rtlCol="0" anchor="ctr"/>
+          <a:lstStyle/>
+          <a:p>
+            <a:pPr algn="r" indent="0" marL="0">
+              <a:buNone/>
+            </a:pPr>
+            <a:r>
+              <a:rPr lang="en-US" sz="850" dirty="0">
+                <a:solidFill>
+                  <a:srgbClr val="6E8CA8"/>
+                </a:solidFill>
+                <a:latin typeface="Calibri" pitchFamily="34" charset="0"/>
+                <a:ea typeface="Calibri" pitchFamily="34" charset="-122"/>
+                <a:cs typeface="Calibri" pitchFamily="34" charset="-120"/>
+              </a:rPr>
+              <a:t>PROYECTO DESALADORA</a:t>
+            </a:r>
+            <a:endParaRPr lang="en-US" sz="850" dirty="0"/>
+          </a:p>
+        </p:txBody>
+      </p:sp>
+      <p:sp>
+        <p:nvSpPr>
+          <p:cNvPr id="24" name="Text 19"/>
           <p:cNvSpPr/>
           <p:nvPr/>
         </p:nvSpPr>
@@ -8976,9 +9240,33 @@
           <a:chExt cx="0" cy="0"/>
         </a:xfrm>
       </p:grpSpPr>
-      <p:sp>
-        <p:nvSpPr>
-          <p:cNvPr id="2" name="Shape 0"/>
+      <p:pic>
+        <p:nvPicPr>
+          <p:cNvPr id="2" name="Image 0" descr="/home/user/Inversiones/panel_control_TOP_P1/besalco_logo.png">    </p:cNvPr>
+          <p:cNvPicPr>
+            <a:picLocks noChangeAspect="1"/>
+          </p:cNvPicPr>
+          <p:nvPr/>
+        </p:nvPicPr>
+        <p:blipFill>
+          <a:blip r:embed="rId1"/>
+          <a:stretch>
+            <a:fillRect/>
+          </a:stretch>
+        </p:blipFill>
+        <p:spPr>
+          <a:xfrm>
+            <a:off x="8357616" y="420624"/>
+            <a:ext cx="3547872" cy="768096"/>
+          </a:xfrm>
+          <a:prstGeom prst="rect">
+            <a:avLst/>
+          </a:prstGeom>
+        </p:spPr>
+      </p:pic>
+      <p:sp>
+        <p:nvSpPr>
+          <p:cNvPr id="3" name="Shape 0"/>
           <p:cNvSpPr/>
           <p:nvPr/>
         </p:nvSpPr>
@@ -8998,7 +9286,7 @@
       </p:sp>
       <p:sp>
         <p:nvSpPr>
-          <p:cNvPr id="3" name="Text 1"/>
+          <p:cNvPr id="4" name="Text 1"/>
           <p:cNvSpPr/>
           <p:nvPr/>
         </p:nvSpPr>
@@ -9037,7 +9325,7 @@
       </p:sp>
       <p:sp>
         <p:nvSpPr>
-          <p:cNvPr id="4" name="Text 2"/>
+          <p:cNvPr id="5" name="Text 2"/>
           <p:cNvSpPr/>
           <p:nvPr/>
         </p:nvSpPr>
@@ -9076,7 +9364,7 @@
       </p:sp>
       <p:sp>
         <p:nvSpPr>
-          <p:cNvPr id="5" name="Shape 3"/>
+          <p:cNvPr id="6" name="Shape 3"/>
           <p:cNvSpPr/>
           <p:nvPr/>
         </p:nvSpPr>
@@ -9098,7 +9386,7 @@
       </p:sp>
       <p:sp>
         <p:nvSpPr>
-          <p:cNvPr id="6" name="Text 4"/>
+          <p:cNvPr id="7" name="Text 4"/>
           <p:cNvSpPr/>
           <p:nvPr/>
         </p:nvSpPr>
@@ -9137,7 +9425,7 @@
       </p:sp>
       <p:sp>
         <p:nvSpPr>
-          <p:cNvPr id="7" name="Text 5"/>
+          <p:cNvPr id="8" name="Text 5"/>
           <p:cNvSpPr/>
           <p:nvPr/>
         </p:nvSpPr>
@@ -9176,7 +9464,7 @@
       </p:sp>
       <p:sp>
         <p:nvSpPr>
-          <p:cNvPr id="8" name="Text 6"/>
+          <p:cNvPr id="9" name="Text 6"/>
           <p:cNvSpPr/>
           <p:nvPr/>
         </p:nvSpPr>
@@ -9218,7 +9506,7 @@
       </p:sp>
       <p:sp>
         <p:nvSpPr>
-          <p:cNvPr id="9" name="Shape 7"/>
+          <p:cNvPr id="10" name="Shape 7"/>
           <p:cNvSpPr/>
           <p:nvPr/>
         </p:nvSpPr>
@@ -9240,7 +9528,7 @@
       </p:sp>
       <p:sp>
         <p:nvSpPr>
-          <p:cNvPr id="10" name="Text 8"/>
+          <p:cNvPr id="11" name="Text 8"/>
           <p:cNvSpPr/>
           <p:nvPr/>
         </p:nvSpPr>
@@ -9279,7 +9567,7 @@
       </p:sp>
       <p:sp>
         <p:nvSpPr>
-          <p:cNvPr id="11" name="Text 9"/>
+          <p:cNvPr id="12" name="Text 9"/>
           <p:cNvSpPr/>
           <p:nvPr/>
         </p:nvSpPr>
@@ -9318,7 +9606,7 @@
       </p:sp>
       <p:sp>
         <p:nvSpPr>
-          <p:cNvPr id="12" name="Text 10"/>
+          <p:cNvPr id="13" name="Text 10"/>
           <p:cNvSpPr/>
           <p:nvPr/>
         </p:nvSpPr>
@@ -9360,7 +9648,7 @@
       </p:sp>
       <p:sp>
         <p:nvSpPr>
-          <p:cNvPr id="13" name="Shape 11"/>
+          <p:cNvPr id="14" name="Shape 11"/>
           <p:cNvSpPr/>
           <p:nvPr/>
         </p:nvSpPr>
@@ -9382,7 +9670,7 @@
       </p:sp>
       <p:sp>
         <p:nvSpPr>
-          <p:cNvPr id="14" name="Text 12"/>
+          <p:cNvPr id="15" name="Text 12"/>
           <p:cNvSpPr/>
           <p:nvPr/>
         </p:nvSpPr>
@@ -9421,7 +9709,7 @@
       </p:sp>
       <p:sp>
         <p:nvSpPr>
-          <p:cNvPr id="15" name="Text 13"/>
+          <p:cNvPr id="16" name="Text 13"/>
           <p:cNvSpPr/>
           <p:nvPr/>
         </p:nvSpPr>
@@ -9460,7 +9748,7 @@
       </p:sp>
       <p:sp>
         <p:nvSpPr>
-          <p:cNvPr id="16" name="Text 14"/>
+          <p:cNvPr id="17" name="Text 14"/>
           <p:cNvSpPr/>
           <p:nvPr/>
         </p:nvSpPr>
@@ -9502,7 +9790,7 @@
       </p:sp>
       <p:sp>
         <p:nvSpPr>
-          <p:cNvPr id="17" name="Shape 15"/>
+          <p:cNvPr id="18" name="Shape 15"/>
           <p:cNvSpPr/>
           <p:nvPr/>
         </p:nvSpPr>
@@ -9524,7 +9812,7 @@
       </p:sp>
       <p:sp>
         <p:nvSpPr>
-          <p:cNvPr id="18" name="Text 16"/>
+          <p:cNvPr id="19" name="Text 16"/>
           <p:cNvSpPr/>
           <p:nvPr/>
         </p:nvSpPr>
@@ -9563,7 +9851,7 @@
       </p:sp>
       <p:sp>
         <p:nvSpPr>
-          <p:cNvPr id="19" name="Text 17"/>
+          <p:cNvPr id="20" name="Text 17"/>
           <p:cNvSpPr/>
           <p:nvPr/>
         </p:nvSpPr>
@@ -9602,7 +9890,7 @@
       </p:sp>
       <p:sp>
         <p:nvSpPr>
-          <p:cNvPr id="20" name="Text 18"/>
+          <p:cNvPr id="21" name="Text 18"/>
           <p:cNvSpPr/>
           <p:nvPr/>
         </p:nvSpPr>
@@ -9644,7 +9932,7 @@
       </p:sp>
       <p:sp>
         <p:nvSpPr>
-          <p:cNvPr id="21" name="Text 19"/>
+          <p:cNvPr id="22" name="Text 19"/>
           <p:cNvSpPr/>
           <p:nvPr/>
         </p:nvSpPr>
@@ -9683,7 +9971,46 @@
       </p:sp>
       <p:sp>
         <p:nvSpPr>
-          <p:cNvPr id="22" name="Text 20"/>
+          <p:cNvPr id="23" name="Text 20"/>
+          <p:cNvSpPr/>
+          <p:nvPr/>
+        </p:nvSpPr>
+        <p:spPr>
+          <a:xfrm>
+            <a:off x="1828800" y="6483096"/>
+            <a:ext cx="9756648" cy="274320"/>
+          </a:xfrm>
+          <a:prstGeom prst="rect">
+            <a:avLst/>
+          </a:prstGeom>
+          <a:noFill/>
+          <a:ln/>
+        </p:spPr>
+        <p:txBody>
+          <a:bodyPr wrap="square" lIns="0" tIns="0" rIns="0" bIns="0" rtlCol="0" anchor="ctr"/>
+          <a:lstStyle/>
+          <a:p>
+            <a:pPr algn="r" indent="0" marL="0">
+              <a:buNone/>
+            </a:pPr>
+            <a:r>
+              <a:rPr lang="en-US" sz="850" dirty="0">
+                <a:solidFill>
+                  <a:srgbClr val="6E8CA8"/>
+                </a:solidFill>
+                <a:latin typeface="Calibri" pitchFamily="34" charset="0"/>
+                <a:ea typeface="Calibri" pitchFamily="34" charset="-122"/>
+                <a:cs typeface="Calibri" pitchFamily="34" charset="-120"/>
+              </a:rPr>
+              <a:t>PROYECTO DESALADORA</a:t>
+            </a:r>
+            <a:endParaRPr lang="en-US" sz="850" dirty="0"/>
+          </a:p>
+        </p:txBody>
+      </p:sp>
+      <p:sp>
+        <p:nvSpPr>
+          <p:cNvPr id="24" name="Text 21"/>
           <p:cNvSpPr/>
           <p:nvPr/>
         </p:nvSpPr>
@@ -9752,9 +10079,33 @@
           <a:chExt cx="0" cy="0"/>
         </a:xfrm>
       </p:grpSpPr>
-      <p:sp>
-        <p:nvSpPr>
-          <p:cNvPr id="2" name="Shape 0"/>
+      <p:pic>
+        <p:nvPicPr>
+          <p:cNvPr id="2" name="Image 0" descr="/home/user/Inversiones/panel_control_TOP_P1/besalco_logo.png">    </p:cNvPr>
+          <p:cNvPicPr>
+            <a:picLocks noChangeAspect="1"/>
+          </p:cNvPicPr>
+          <p:nvPr/>
+        </p:nvPicPr>
+        <p:blipFill>
+          <a:blip r:embed="rId1"/>
+          <a:stretch>
+            <a:fillRect/>
+          </a:stretch>
+        </p:blipFill>
+        <p:spPr>
+          <a:xfrm>
+            <a:off x="8357616" y="420624"/>
+            <a:ext cx="3547872" cy="768096"/>
+          </a:xfrm>
+          <a:prstGeom prst="rect">
+            <a:avLst/>
+          </a:prstGeom>
+        </p:spPr>
+      </p:pic>
+      <p:sp>
+        <p:nvSpPr>
+          <p:cNvPr id="3" name="Shape 0"/>
           <p:cNvSpPr/>
           <p:nvPr/>
         </p:nvSpPr>
@@ -9774,7 +10125,7 @@
       </p:sp>
       <p:sp>
         <p:nvSpPr>
-          <p:cNvPr id="3" name="Shape 1"/>
+          <p:cNvPr id="4" name="Shape 1"/>
           <p:cNvSpPr/>
           <p:nvPr/>
         </p:nvSpPr>
@@ -9794,7 +10145,7 @@
       </p:sp>
       <p:sp>
         <p:nvSpPr>
-          <p:cNvPr id="4" name="Shape 2"/>
+          <p:cNvPr id="5" name="Shape 2"/>
           <p:cNvSpPr/>
           <p:nvPr/>
         </p:nvSpPr>
@@ -9814,7 +10165,7 @@
       </p:sp>
       <p:sp>
         <p:nvSpPr>
-          <p:cNvPr id="5" name="Text 3"/>
+          <p:cNvPr id="6" name="Text 3"/>
           <p:cNvSpPr/>
           <p:nvPr/>
         </p:nvSpPr>
@@ -9853,7 +10204,7 @@
       </p:sp>
       <p:sp>
         <p:nvSpPr>
-          <p:cNvPr id="6" name="Text 4"/>
+          <p:cNvPr id="7" name="Text 4"/>
           <p:cNvSpPr/>
           <p:nvPr/>
         </p:nvSpPr>
@@ -9892,7 +10243,7 @@
       </p:sp>
       <p:sp>
         <p:nvSpPr>
-          <p:cNvPr id="7" name="Text 5"/>
+          <p:cNvPr id="8" name="Text 5"/>
           <p:cNvSpPr/>
           <p:nvPr/>
         </p:nvSpPr>
@@ -9931,7 +10282,7 @@
       </p:sp>
       <p:sp>
         <p:nvSpPr>
-          <p:cNvPr id="8" name="Text 6"/>
+          <p:cNvPr id="9" name="Text 6"/>
           <p:cNvSpPr/>
           <p:nvPr/>
         </p:nvSpPr>
@@ -9973,7 +10324,7 @@
       </p:sp>
       <p:sp>
         <p:nvSpPr>
-          <p:cNvPr id="9" name="Text 7"/>
+          <p:cNvPr id="10" name="Text 7"/>
           <p:cNvSpPr/>
           <p:nvPr/>
         </p:nvSpPr>
@@ -10012,7 +10363,7 @@
       </p:sp>
       <p:sp>
         <p:nvSpPr>
-          <p:cNvPr id="10" name="Text 8"/>
+          <p:cNvPr id="11" name="Text 8"/>
           <p:cNvSpPr/>
           <p:nvPr/>
         </p:nvSpPr>
@@ -10051,7 +10402,7 @@
       </p:sp>
       <p:sp>
         <p:nvSpPr>
-          <p:cNvPr id="11" name="Text 9"/>
+          <p:cNvPr id="12" name="Text 9"/>
           <p:cNvSpPr/>
           <p:nvPr/>
         </p:nvSpPr>
@@ -10090,7 +10441,7 @@
       </p:sp>
       <p:sp>
         <p:nvSpPr>
-          <p:cNvPr id="12" name="Text 10"/>
+          <p:cNvPr id="13" name="Text 10"/>
           <p:cNvSpPr/>
           <p:nvPr/>
         </p:nvSpPr>
@@ -10129,7 +10480,7 @@
       </p:sp>
       <p:sp>
         <p:nvSpPr>
-          <p:cNvPr id="13" name="Text 11"/>
+          <p:cNvPr id="14" name="Text 11"/>
           <p:cNvSpPr/>
           <p:nvPr/>
         </p:nvSpPr>
@@ -10168,7 +10519,7 @@
       </p:sp>
       <p:sp>
         <p:nvSpPr>
-          <p:cNvPr id="14" name="Text 12"/>
+          <p:cNvPr id="15" name="Text 12"/>
           <p:cNvSpPr/>
           <p:nvPr/>
         </p:nvSpPr>
@@ -10207,7 +10558,7 @@
       </p:sp>
       <p:sp>
         <p:nvSpPr>
-          <p:cNvPr id="15" name="Text 13"/>
+          <p:cNvPr id="16" name="Text 13"/>
           <p:cNvSpPr/>
           <p:nvPr/>
         </p:nvSpPr>
@@ -10246,7 +10597,7 @@
       </p:sp>
       <p:sp>
         <p:nvSpPr>
-          <p:cNvPr id="16" name="Text 14"/>
+          <p:cNvPr id="17" name="Text 14"/>
           <p:cNvSpPr/>
           <p:nvPr/>
         </p:nvSpPr>
@@ -10285,7 +10636,7 @@
       </p:sp>
       <p:sp>
         <p:nvSpPr>
-          <p:cNvPr id="17" name="Text 15"/>
+          <p:cNvPr id="18" name="Text 15"/>
           <p:cNvSpPr/>
           <p:nvPr/>
         </p:nvSpPr>
@@ -10324,7 +10675,7 @@
       </p:sp>
       <p:sp>
         <p:nvSpPr>
-          <p:cNvPr id="18" name="Text 16"/>
+          <p:cNvPr id="19" name="Text 16"/>
           <p:cNvSpPr/>
           <p:nvPr/>
         </p:nvSpPr>
@@ -10363,7 +10714,7 @@
       </p:sp>
       <p:sp>
         <p:nvSpPr>
-          <p:cNvPr id="19" name="Text 17"/>
+          <p:cNvPr id="20" name="Text 17"/>
           <p:cNvSpPr/>
           <p:nvPr/>
         </p:nvSpPr>
@@ -10432,9 +10783,33 @@
           <a:chExt cx="0" cy="0"/>
         </a:xfrm>
       </p:grpSpPr>
-      <p:sp>
-        <p:nvSpPr>
-          <p:cNvPr id="2" name="Text 0"/>
+      <p:pic>
+        <p:nvPicPr>
+          <p:cNvPr id="2" name="Image 0" descr="/home/user/Inversiones/panel_control_TOP_P1/besalco_logo.png">    </p:cNvPr>
+          <p:cNvPicPr>
+            <a:picLocks noChangeAspect="1"/>
+          </p:cNvPicPr>
+          <p:nvPr/>
+        </p:nvPicPr>
+        <p:blipFill>
+          <a:blip r:embed="rId1"/>
+          <a:stretch>
+            <a:fillRect/>
+          </a:stretch>
+        </p:blipFill>
+        <p:spPr>
+          <a:xfrm>
+            <a:off x="9116568" y="219456"/>
+            <a:ext cx="2770632" cy="594360"/>
+          </a:xfrm>
+          <a:prstGeom prst="rect">
+            <a:avLst/>
+          </a:prstGeom>
+        </p:spPr>
+      </p:pic>
+      <p:sp>
+        <p:nvSpPr>
+          <p:cNvPr id="3" name="Text 0"/>
           <p:cNvSpPr/>
           <p:nvPr/>
         </p:nvSpPr>
@@ -10473,7 +10848,7 @@
       </p:sp>
       <p:sp>
         <p:nvSpPr>
-          <p:cNvPr id="3" name="Text 1"/>
+          <p:cNvPr id="4" name="Text 1"/>
           <p:cNvSpPr/>
           <p:nvPr/>
         </p:nvSpPr>
@@ -10512,7 +10887,7 @@
       </p:sp>
       <p:sp>
         <p:nvSpPr>
-          <p:cNvPr id="4" name="Shape 2"/>
+          <p:cNvPr id="5" name="Shape 2"/>
           <p:cNvSpPr/>
           <p:nvPr/>
         </p:nvSpPr>
@@ -10546,7 +10921,7 @@
       </p:sp>
       <p:sp>
         <p:nvSpPr>
-          <p:cNvPr id="5" name="Shape 3"/>
+          <p:cNvPr id="6" name="Shape 3"/>
           <p:cNvSpPr/>
           <p:nvPr/>
         </p:nvSpPr>
@@ -10566,7 +10941,7 @@
       </p:sp>
       <p:sp>
         <p:nvSpPr>
-          <p:cNvPr id="6" name="Text 4"/>
+          <p:cNvPr id="7" name="Text 4"/>
           <p:cNvSpPr/>
           <p:nvPr/>
         </p:nvSpPr>
@@ -10605,7 +10980,7 @@
       </p:sp>
       <p:sp>
         <p:nvSpPr>
-          <p:cNvPr id="7" name="Text 5"/>
+          <p:cNvPr id="8" name="Text 5"/>
           <p:cNvSpPr/>
           <p:nvPr/>
         </p:nvSpPr>
@@ -10644,7 +11019,7 @@
       </p:sp>
       <p:sp>
         <p:nvSpPr>
-          <p:cNvPr id="8" name="Text 6"/>
+          <p:cNvPr id="9" name="Text 6"/>
           <p:cNvSpPr/>
           <p:nvPr/>
         </p:nvSpPr>
@@ -10683,7 +11058,7 @@
       </p:sp>
       <p:sp>
         <p:nvSpPr>
-          <p:cNvPr id="9" name="Text 7"/>
+          <p:cNvPr id="10" name="Text 7"/>
           <p:cNvSpPr/>
           <p:nvPr/>
         </p:nvSpPr>
@@ -10725,7 +11100,7 @@
       </p:sp>
       <p:sp>
         <p:nvSpPr>
-          <p:cNvPr id="10" name="Shape 8"/>
+          <p:cNvPr id="11" name="Shape 8"/>
           <p:cNvSpPr/>
           <p:nvPr/>
         </p:nvSpPr>
@@ -10759,7 +11134,7 @@
       </p:sp>
       <p:sp>
         <p:nvSpPr>
-          <p:cNvPr id="11" name="Shape 9"/>
+          <p:cNvPr id="12" name="Shape 9"/>
           <p:cNvSpPr/>
           <p:nvPr/>
         </p:nvSpPr>
@@ -10779,7 +11154,7 @@
       </p:sp>
       <p:sp>
         <p:nvSpPr>
-          <p:cNvPr id="12" name="Text 10"/>
+          <p:cNvPr id="13" name="Text 10"/>
           <p:cNvSpPr/>
           <p:nvPr/>
         </p:nvSpPr>
@@ -10818,7 +11193,7 @@
       </p:sp>
       <p:sp>
         <p:nvSpPr>
-          <p:cNvPr id="13" name="Text 11"/>
+          <p:cNvPr id="14" name="Text 11"/>
           <p:cNvSpPr/>
           <p:nvPr/>
         </p:nvSpPr>
@@ -10857,7 +11232,7 @@
       </p:sp>
       <p:sp>
         <p:nvSpPr>
-          <p:cNvPr id="14" name="Text 12"/>
+          <p:cNvPr id="15" name="Text 12"/>
           <p:cNvSpPr/>
           <p:nvPr/>
         </p:nvSpPr>
@@ -10896,7 +11271,7 @@
       </p:sp>
       <p:sp>
         <p:nvSpPr>
-          <p:cNvPr id="15" name="Text 13"/>
+          <p:cNvPr id="16" name="Text 13"/>
           <p:cNvSpPr/>
           <p:nvPr/>
         </p:nvSpPr>
@@ -10938,7 +11313,7 @@
       </p:sp>
       <p:sp>
         <p:nvSpPr>
-          <p:cNvPr id="16" name="Shape 14"/>
+          <p:cNvPr id="17" name="Shape 14"/>
           <p:cNvSpPr/>
           <p:nvPr/>
         </p:nvSpPr>
@@ -10972,7 +11347,7 @@
       </p:sp>
       <p:sp>
         <p:nvSpPr>
-          <p:cNvPr id="17" name="Shape 15"/>
+          <p:cNvPr id="18" name="Shape 15"/>
           <p:cNvSpPr/>
           <p:nvPr/>
         </p:nvSpPr>
@@ -10992,7 +11367,7 @@
       </p:sp>
       <p:sp>
         <p:nvSpPr>
-          <p:cNvPr id="18" name="Text 16"/>
+          <p:cNvPr id="19" name="Text 16"/>
           <p:cNvSpPr/>
           <p:nvPr/>
         </p:nvSpPr>
@@ -11031,7 +11406,7 @@
       </p:sp>
       <p:sp>
         <p:nvSpPr>
-          <p:cNvPr id="19" name="Text 17"/>
+          <p:cNvPr id="20" name="Text 17"/>
           <p:cNvSpPr/>
           <p:nvPr/>
         </p:nvSpPr>
@@ -11070,7 +11445,7 @@
       </p:sp>
       <p:sp>
         <p:nvSpPr>
-          <p:cNvPr id="20" name="Text 18"/>
+          <p:cNvPr id="21" name="Text 18"/>
           <p:cNvSpPr/>
           <p:nvPr/>
         </p:nvSpPr>
@@ -11109,7 +11484,7 @@
       </p:sp>
       <p:sp>
         <p:nvSpPr>
-          <p:cNvPr id="21" name="Text 19"/>
+          <p:cNvPr id="22" name="Text 19"/>
           <p:cNvSpPr/>
           <p:nvPr/>
         </p:nvSpPr>
@@ -11151,7 +11526,7 @@
       </p:sp>
       <p:sp>
         <p:nvSpPr>
-          <p:cNvPr id="22" name="Shape 20"/>
+          <p:cNvPr id="23" name="Shape 20"/>
           <p:cNvSpPr/>
           <p:nvPr/>
         </p:nvSpPr>
@@ -11185,7 +11560,7 @@
       </p:sp>
       <p:sp>
         <p:nvSpPr>
-          <p:cNvPr id="23" name="Shape 21"/>
+          <p:cNvPr id="24" name="Shape 21"/>
           <p:cNvSpPr/>
           <p:nvPr/>
         </p:nvSpPr>
@@ -11205,7 +11580,7 @@
       </p:sp>
       <p:sp>
         <p:nvSpPr>
-          <p:cNvPr id="24" name="Text 22"/>
+          <p:cNvPr id="25" name="Text 22"/>
           <p:cNvSpPr/>
           <p:nvPr/>
         </p:nvSpPr>
@@ -11244,7 +11619,7 @@
       </p:sp>
       <p:sp>
         <p:nvSpPr>
-          <p:cNvPr id="25" name="Text 23"/>
+          <p:cNvPr id="26" name="Text 23"/>
           <p:cNvSpPr/>
           <p:nvPr/>
         </p:nvSpPr>
@@ -11283,7 +11658,7 @@
       </p:sp>
       <p:sp>
         <p:nvSpPr>
-          <p:cNvPr id="26" name="Text 24"/>
+          <p:cNvPr id="27" name="Text 24"/>
           <p:cNvSpPr/>
           <p:nvPr/>
         </p:nvSpPr>
@@ -11322,7 +11697,7 @@
       </p:sp>
       <p:sp>
         <p:nvSpPr>
-          <p:cNvPr id="27" name="Text 25"/>
+          <p:cNvPr id="28" name="Text 25"/>
           <p:cNvSpPr/>
           <p:nvPr/>
         </p:nvSpPr>
@@ -11364,7 +11739,7 @@
       </p:sp>
       <p:sp>
         <p:nvSpPr>
-          <p:cNvPr id="28" name="Shape 26"/>
+          <p:cNvPr id="29" name="Shape 26"/>
           <p:cNvSpPr/>
           <p:nvPr/>
         </p:nvSpPr>
@@ -11386,7 +11761,7 @@
       </p:sp>
       <p:sp>
         <p:nvSpPr>
-          <p:cNvPr id="29" name="Text 27"/>
+          <p:cNvPr id="30" name="Text 27"/>
           <p:cNvSpPr/>
           <p:nvPr/>
         </p:nvSpPr>
@@ -11425,7 +11800,7 @@
       </p:sp>
       <p:sp>
         <p:nvSpPr>
-          <p:cNvPr id="30" name="Shape 28"/>
+          <p:cNvPr id="31" name="Shape 28"/>
           <p:cNvSpPr/>
           <p:nvPr/>
         </p:nvSpPr>
@@ -11445,7 +11820,7 @@
       </p:sp>
       <p:sp>
         <p:nvSpPr>
-          <p:cNvPr id="31" name="Text 29"/>
+          <p:cNvPr id="32" name="Text 29"/>
           <p:cNvSpPr/>
           <p:nvPr/>
         </p:nvSpPr>
@@ -11504,7 +11879,7 @@
       </p:sp>
       <p:sp>
         <p:nvSpPr>
-          <p:cNvPr id="32" name="Shape 30"/>
+          <p:cNvPr id="33" name="Shape 30"/>
           <p:cNvSpPr/>
           <p:nvPr/>
         </p:nvSpPr>
@@ -11524,7 +11899,7 @@
       </p:sp>
       <p:sp>
         <p:nvSpPr>
-          <p:cNvPr id="33" name="Text 31"/>
+          <p:cNvPr id="34" name="Text 31"/>
           <p:cNvSpPr/>
           <p:nvPr/>
         </p:nvSpPr>
@@ -11583,7 +11958,7 @@
       </p:sp>
       <p:sp>
         <p:nvSpPr>
-          <p:cNvPr id="34" name="Shape 32"/>
+          <p:cNvPr id="35" name="Shape 32"/>
           <p:cNvSpPr/>
           <p:nvPr/>
         </p:nvSpPr>
@@ -11603,7 +11978,7 @@
       </p:sp>
       <p:sp>
         <p:nvSpPr>
-          <p:cNvPr id="35" name="Text 33"/>
+          <p:cNvPr id="36" name="Text 33"/>
           <p:cNvSpPr/>
           <p:nvPr/>
         </p:nvSpPr>
@@ -11662,7 +12037,7 @@
       </p:sp>
       <p:sp>
         <p:nvSpPr>
-          <p:cNvPr id="36" name="Shape 34"/>
+          <p:cNvPr id="37" name="Shape 34"/>
           <p:cNvSpPr/>
           <p:nvPr/>
         </p:nvSpPr>
@@ -11682,7 +12057,7 @@
       </p:sp>
       <p:sp>
         <p:nvSpPr>
-          <p:cNvPr id="37" name="Text 35"/>
+          <p:cNvPr id="38" name="Text 35"/>
           <p:cNvSpPr/>
           <p:nvPr/>
         </p:nvSpPr>
@@ -11741,7 +12116,7 @@
       </p:sp>
       <p:sp>
         <p:nvSpPr>
-          <p:cNvPr id="38" name="Text 36"/>
+          <p:cNvPr id="39" name="Text 36"/>
           <p:cNvSpPr/>
           <p:nvPr/>
         </p:nvSpPr>
@@ -11780,7 +12155,46 @@
       </p:sp>
       <p:sp>
         <p:nvSpPr>
-          <p:cNvPr id="39" name="Text 37"/>
+          <p:cNvPr id="40" name="Text 37"/>
+          <p:cNvSpPr/>
+          <p:nvPr/>
+        </p:nvSpPr>
+        <p:spPr>
+          <a:xfrm>
+            <a:off x="1828800" y="6483096"/>
+            <a:ext cx="9756648" cy="274320"/>
+          </a:xfrm>
+          <a:prstGeom prst="rect">
+            <a:avLst/>
+          </a:prstGeom>
+          <a:noFill/>
+          <a:ln/>
+        </p:spPr>
+        <p:txBody>
+          <a:bodyPr wrap="square" lIns="0" tIns="0" rIns="0" bIns="0" rtlCol="0" anchor="ctr"/>
+          <a:lstStyle/>
+          <a:p>
+            <a:pPr algn="r" indent="0" marL="0">
+              <a:buNone/>
+            </a:pPr>
+            <a:r>
+              <a:rPr lang="en-US" sz="850" dirty="0">
+                <a:solidFill>
+                  <a:srgbClr val="56606E"/>
+                </a:solidFill>
+                <a:latin typeface="Calibri" pitchFamily="34" charset="0"/>
+                <a:ea typeface="Calibri" pitchFamily="34" charset="-122"/>
+                <a:cs typeface="Calibri" pitchFamily="34" charset="-120"/>
+              </a:rPr>
+              <a:t>PROYECTO TALABRE</a:t>
+            </a:r>
+            <a:endParaRPr lang="en-US" sz="850" dirty="0"/>
+          </a:p>
+        </p:txBody>
+      </p:sp>
+      <p:sp>
+        <p:nvSpPr>
+          <p:cNvPr id="41" name="Text 38"/>
           <p:cNvSpPr/>
           <p:nvPr/>
         </p:nvSpPr>
@@ -11849,9 +12263,33 @@
           <a:chExt cx="0" cy="0"/>
         </a:xfrm>
       </p:grpSpPr>
-      <p:sp>
-        <p:nvSpPr>
-          <p:cNvPr id="2" name="Text 0"/>
+      <p:pic>
+        <p:nvPicPr>
+          <p:cNvPr id="2" name="Image 0" descr="/home/user/Inversiones/panel_control_TOP_P1/besalco_logo.png">    </p:cNvPr>
+          <p:cNvPicPr>
+            <a:picLocks noChangeAspect="1"/>
+          </p:cNvPicPr>
+          <p:nvPr/>
+        </p:nvPicPr>
+        <p:blipFill>
+          <a:blip r:embed="rId1"/>
+          <a:stretch>
+            <a:fillRect/>
+          </a:stretch>
+        </p:blipFill>
+        <p:spPr>
+          <a:xfrm>
+            <a:off x="9116568" y="219456"/>
+            <a:ext cx="2770632" cy="594360"/>
+          </a:xfrm>
+          <a:prstGeom prst="rect">
+            <a:avLst/>
+          </a:prstGeom>
+        </p:spPr>
+      </p:pic>
+      <p:sp>
+        <p:nvSpPr>
+          <p:cNvPr id="3" name="Text 0"/>
           <p:cNvSpPr/>
           <p:nvPr/>
         </p:nvSpPr>
@@ -11890,7 +12328,7 @@
       </p:sp>
       <p:sp>
         <p:nvSpPr>
-          <p:cNvPr id="3" name="Text 1"/>
+          <p:cNvPr id="4" name="Text 1"/>
           <p:cNvSpPr/>
           <p:nvPr/>
         </p:nvSpPr>
@@ -11929,7 +12367,7 @@
       </p:sp>
       <p:sp>
         <p:nvSpPr>
-          <p:cNvPr id="4" name="Text 2"/>
+          <p:cNvPr id="5" name="Text 2"/>
           <p:cNvSpPr/>
           <p:nvPr/>
         </p:nvSpPr>
@@ -11968,7 +12406,7 @@
       </p:sp>
       <p:graphicFrame>
         <p:nvGraphicFramePr>
-          <p:cNvPr id="5" name="Chart 0" descr=""/>
+          <p:cNvPr id="6" name="Chart 0" descr=""/>
           <p:cNvGraphicFramePr/>
           <p:nvPr/>
         </p:nvGraphicFramePr>
@@ -11978,13 +12416,13 @@
         </p:xfrm>
         <a:graphic xmlns:a="http://schemas.openxmlformats.org/drawingml/2006/main">
           <a:graphicData uri="http://schemas.openxmlformats.org/drawingml/2006/chart">
-            <c:chart xmlns:c="http://schemas.openxmlformats.org/drawingml/2006/chart" r:id="rId1"/>
+            <c:chart xmlns:c="http://schemas.openxmlformats.org/drawingml/2006/chart" r:id="rId2"/>
           </a:graphicData>
         </a:graphic>
       </p:graphicFrame>
       <p:graphicFrame>
         <p:nvGraphicFramePr>
-          <p:cNvPr id="6" name="Chart 1" descr=""/>
+          <p:cNvPr id="7" name="Chart 1" descr=""/>
           <p:cNvGraphicFramePr/>
           <p:nvPr/>
         </p:nvGraphicFramePr>
@@ -11994,13 +12432,13 @@
         </p:xfrm>
         <a:graphic xmlns:a="http://schemas.openxmlformats.org/drawingml/2006/main">
           <a:graphicData uri="http://schemas.openxmlformats.org/drawingml/2006/chart">
-            <c:chart xmlns:c="http://schemas.openxmlformats.org/drawingml/2006/chart" r:id="rId2"/>
+            <c:chart xmlns:c="http://schemas.openxmlformats.org/drawingml/2006/chart" r:id="rId3"/>
           </a:graphicData>
         </a:graphic>
       </p:graphicFrame>
       <p:sp>
         <p:nvSpPr>
-          <p:cNvPr id="7" name="Text 3"/>
+          <p:cNvPr id="8" name="Text 3"/>
           <p:cNvSpPr/>
           <p:nvPr/>
         </p:nvSpPr>
@@ -12039,7 +12477,46 @@
       </p:sp>
       <p:sp>
         <p:nvSpPr>
-          <p:cNvPr id="8" name="Text 4"/>
+          <p:cNvPr id="9" name="Text 4"/>
+          <p:cNvSpPr/>
+          <p:nvPr/>
+        </p:nvSpPr>
+        <p:spPr>
+          <a:xfrm>
+            <a:off x="1828800" y="6483096"/>
+            <a:ext cx="9756648" cy="274320"/>
+          </a:xfrm>
+          <a:prstGeom prst="rect">
+            <a:avLst/>
+          </a:prstGeom>
+          <a:noFill/>
+          <a:ln/>
+        </p:spPr>
+        <p:txBody>
+          <a:bodyPr wrap="square" lIns="0" tIns="0" rIns="0" bIns="0" rtlCol="0" anchor="ctr"/>
+          <a:lstStyle/>
+          <a:p>
+            <a:pPr algn="r" indent="0" marL="0">
+              <a:buNone/>
+            </a:pPr>
+            <a:r>
+              <a:rPr lang="en-US" sz="850" dirty="0">
+                <a:solidFill>
+                  <a:srgbClr val="56606E"/>
+                </a:solidFill>
+                <a:latin typeface="Calibri" pitchFamily="34" charset="0"/>
+                <a:ea typeface="Calibri" pitchFamily="34" charset="-122"/>
+                <a:cs typeface="Calibri" pitchFamily="34" charset="-120"/>
+              </a:rPr>
+              <a:t>PROYECTO TALABRE</a:t>
+            </a:r>
+            <a:endParaRPr lang="en-US" sz="850" dirty="0"/>
+          </a:p>
+        </p:txBody>
+      </p:sp>
+      <p:sp>
+        <p:nvSpPr>
+          <p:cNvPr id="10" name="Text 5"/>
           <p:cNvSpPr/>
           <p:nvPr/>
         </p:nvSpPr>
@@ -12108,9 +12585,33 @@
           <a:chExt cx="0" cy="0"/>
         </a:xfrm>
       </p:grpSpPr>
-      <p:sp>
-        <p:nvSpPr>
-          <p:cNvPr id="2" name="Text 0"/>
+      <p:pic>
+        <p:nvPicPr>
+          <p:cNvPr id="2" name="Image 0" descr="/home/user/Inversiones/panel_control_TOP_P1/besalco_logo.png">    </p:cNvPr>
+          <p:cNvPicPr>
+            <a:picLocks noChangeAspect="1"/>
+          </p:cNvPicPr>
+          <p:nvPr/>
+        </p:nvPicPr>
+        <p:blipFill>
+          <a:blip r:embed="rId1"/>
+          <a:stretch>
+            <a:fillRect/>
+          </a:stretch>
+        </p:blipFill>
+        <p:spPr>
+          <a:xfrm>
+            <a:off x="9116568" y="219456"/>
+            <a:ext cx="2770632" cy="594360"/>
+          </a:xfrm>
+          <a:prstGeom prst="rect">
+            <a:avLst/>
+          </a:prstGeom>
+        </p:spPr>
+      </p:pic>
+      <p:sp>
+        <p:nvSpPr>
+          <p:cNvPr id="3" name="Text 0"/>
           <p:cNvSpPr/>
           <p:nvPr/>
         </p:nvSpPr>
@@ -12149,7 +12650,7 @@
       </p:sp>
       <p:sp>
         <p:nvSpPr>
-          <p:cNvPr id="3" name="Text 1"/>
+          <p:cNvPr id="4" name="Text 1"/>
           <p:cNvSpPr/>
           <p:nvPr/>
         </p:nvSpPr>
@@ -12188,7 +12689,7 @@
       </p:sp>
       <p:sp>
         <p:nvSpPr>
-          <p:cNvPr id="4" name="Text 2"/>
+          <p:cNvPr id="5" name="Text 2"/>
           <p:cNvSpPr/>
           <p:nvPr/>
         </p:nvSpPr>
@@ -12227,7 +12728,7 @@
       </p:sp>
       <p:graphicFrame>
         <p:nvGraphicFramePr>
-          <p:cNvPr id="5" name="Chart 0" descr=""/>
+          <p:cNvPr id="6" name="Chart 0" descr=""/>
           <p:cNvGraphicFramePr/>
           <p:nvPr/>
         </p:nvGraphicFramePr>
@@ -12237,13 +12738,13 @@
         </p:xfrm>
         <a:graphic xmlns:a="http://schemas.openxmlformats.org/drawingml/2006/main">
           <a:graphicData uri="http://schemas.openxmlformats.org/drawingml/2006/chart">
-            <c:chart xmlns:c="http://schemas.openxmlformats.org/drawingml/2006/chart" r:id="rId1"/>
+            <c:chart xmlns:c="http://schemas.openxmlformats.org/drawingml/2006/chart" r:id="rId2"/>
           </a:graphicData>
         </a:graphic>
       </p:graphicFrame>
       <p:sp>
         <p:nvSpPr>
-          <p:cNvPr id="6" name="Shape 3"/>
+          <p:cNvPr id="7" name="Shape 3"/>
           <p:cNvSpPr/>
           <p:nvPr/>
         </p:nvSpPr>
@@ -12265,7 +12766,7 @@
       </p:sp>
       <p:sp>
         <p:nvSpPr>
-          <p:cNvPr id="7" name="Text 4"/>
+          <p:cNvPr id="8" name="Text 4"/>
           <p:cNvSpPr/>
           <p:nvPr/>
         </p:nvSpPr>
@@ -12304,7 +12805,7 @@
       </p:sp>
       <p:sp>
         <p:nvSpPr>
-          <p:cNvPr id="8" name="Text 5"/>
+          <p:cNvPr id="9" name="Text 5"/>
           <p:cNvSpPr/>
           <p:nvPr/>
         </p:nvSpPr>
@@ -12343,7 +12844,7 @@
       </p:sp>
       <p:sp>
         <p:nvSpPr>
-          <p:cNvPr id="9" name="Text 6"/>
+          <p:cNvPr id="10" name="Text 6"/>
           <p:cNvSpPr/>
           <p:nvPr/>
         </p:nvSpPr>
@@ -12382,7 +12883,7 @@
       </p:sp>
       <p:sp>
         <p:nvSpPr>
-          <p:cNvPr id="10" name="Text 7"/>
+          <p:cNvPr id="11" name="Text 7"/>
           <p:cNvSpPr/>
           <p:nvPr/>
         </p:nvSpPr>
@@ -12421,7 +12922,7 @@
       </p:sp>
       <p:sp>
         <p:nvSpPr>
-          <p:cNvPr id="11" name="Shape 8"/>
+          <p:cNvPr id="12" name="Shape 8"/>
           <p:cNvSpPr/>
           <p:nvPr/>
         </p:nvSpPr>
@@ -12441,7 +12942,7 @@
       </p:sp>
       <p:sp>
         <p:nvSpPr>
-          <p:cNvPr id="12" name="Shape 9"/>
+          <p:cNvPr id="13" name="Shape 9"/>
           <p:cNvSpPr/>
           <p:nvPr/>
         </p:nvSpPr>
@@ -12461,7 +12962,7 @@
       </p:sp>
       <p:sp>
         <p:nvSpPr>
-          <p:cNvPr id="13" name="Text 10"/>
+          <p:cNvPr id="14" name="Text 10"/>
           <p:cNvSpPr/>
           <p:nvPr/>
         </p:nvSpPr>
@@ -12500,7 +13001,7 @@
       </p:sp>
       <p:sp>
         <p:nvSpPr>
-          <p:cNvPr id="14" name="Text 11"/>
+          <p:cNvPr id="15" name="Text 11"/>
           <p:cNvSpPr/>
           <p:nvPr/>
         </p:nvSpPr>
@@ -12539,7 +13040,7 @@
       </p:sp>
       <p:sp>
         <p:nvSpPr>
-          <p:cNvPr id="15" name="Text 12"/>
+          <p:cNvPr id="16" name="Text 12"/>
           <p:cNvSpPr/>
           <p:nvPr/>
         </p:nvSpPr>
@@ -12578,7 +13079,7 @@
       </p:sp>
       <p:sp>
         <p:nvSpPr>
-          <p:cNvPr id="16" name="Shape 13"/>
+          <p:cNvPr id="17" name="Shape 13"/>
           <p:cNvSpPr/>
           <p:nvPr/>
         </p:nvSpPr>
@@ -12598,7 +13099,7 @@
       </p:sp>
       <p:sp>
         <p:nvSpPr>
-          <p:cNvPr id="17" name="Shape 14"/>
+          <p:cNvPr id="18" name="Shape 14"/>
           <p:cNvSpPr/>
           <p:nvPr/>
         </p:nvSpPr>
@@ -12618,7 +13119,7 @@
       </p:sp>
       <p:sp>
         <p:nvSpPr>
-          <p:cNvPr id="18" name="Text 15"/>
+          <p:cNvPr id="19" name="Text 15"/>
           <p:cNvSpPr/>
           <p:nvPr/>
         </p:nvSpPr>
@@ -12657,7 +13158,7 @@
       </p:sp>
       <p:sp>
         <p:nvSpPr>
-          <p:cNvPr id="19" name="Text 16"/>
+          <p:cNvPr id="20" name="Text 16"/>
           <p:cNvSpPr/>
           <p:nvPr/>
         </p:nvSpPr>
@@ -12696,7 +13197,7 @@
       </p:sp>
       <p:sp>
         <p:nvSpPr>
-          <p:cNvPr id="20" name="Text 17"/>
+          <p:cNvPr id="21" name="Text 17"/>
           <p:cNvSpPr/>
           <p:nvPr/>
         </p:nvSpPr>
@@ -12735,7 +13236,7 @@
       </p:sp>
       <p:sp>
         <p:nvSpPr>
-          <p:cNvPr id="21" name="Shape 18"/>
+          <p:cNvPr id="22" name="Shape 18"/>
           <p:cNvSpPr/>
           <p:nvPr/>
         </p:nvSpPr>
@@ -12755,7 +13256,7 @@
       </p:sp>
       <p:sp>
         <p:nvSpPr>
-          <p:cNvPr id="22" name="Shape 19"/>
+          <p:cNvPr id="23" name="Shape 19"/>
           <p:cNvSpPr/>
           <p:nvPr/>
         </p:nvSpPr>
@@ -12775,7 +13276,7 @@
       </p:sp>
       <p:sp>
         <p:nvSpPr>
-          <p:cNvPr id="23" name="Text 20"/>
+          <p:cNvPr id="24" name="Text 20"/>
           <p:cNvSpPr/>
           <p:nvPr/>
         </p:nvSpPr>
@@ -12814,7 +13315,7 @@
       </p:sp>
       <p:sp>
         <p:nvSpPr>
-          <p:cNvPr id="24" name="Text 21"/>
+          <p:cNvPr id="25" name="Text 21"/>
           <p:cNvSpPr/>
           <p:nvPr/>
         </p:nvSpPr>
@@ -12853,7 +13354,7 @@
       </p:sp>
       <p:sp>
         <p:nvSpPr>
-          <p:cNvPr id="25" name="Text 22"/>
+          <p:cNvPr id="26" name="Text 22"/>
           <p:cNvSpPr/>
           <p:nvPr/>
         </p:nvSpPr>
@@ -12892,7 +13393,7 @@
       </p:sp>
       <p:sp>
         <p:nvSpPr>
-          <p:cNvPr id="26" name="Shape 23"/>
+          <p:cNvPr id="27" name="Shape 23"/>
           <p:cNvSpPr/>
           <p:nvPr/>
         </p:nvSpPr>
@@ -12912,7 +13413,7 @@
       </p:sp>
       <p:sp>
         <p:nvSpPr>
-          <p:cNvPr id="27" name="Text 24"/>
+          <p:cNvPr id="28" name="Text 24"/>
           <p:cNvSpPr/>
           <p:nvPr/>
         </p:nvSpPr>
@@ -12951,7 +13452,7 @@
       </p:sp>
       <p:sp>
         <p:nvSpPr>
-          <p:cNvPr id="28" name="Text 25"/>
+          <p:cNvPr id="29" name="Text 25"/>
           <p:cNvSpPr/>
           <p:nvPr/>
         </p:nvSpPr>
@@ -12990,7 +13491,7 @@
       </p:sp>
       <p:sp>
         <p:nvSpPr>
-          <p:cNvPr id="29" name="Text 26"/>
+          <p:cNvPr id="30" name="Text 26"/>
           <p:cNvSpPr/>
           <p:nvPr/>
         </p:nvSpPr>
@@ -13029,7 +13530,7 @@
       </p:sp>
       <p:sp>
         <p:nvSpPr>
-          <p:cNvPr id="30" name="Shape 27"/>
+          <p:cNvPr id="31" name="Shape 27"/>
           <p:cNvSpPr/>
           <p:nvPr/>
         </p:nvSpPr>
@@ -13049,7 +13550,7 @@
       </p:sp>
       <p:sp>
         <p:nvSpPr>
-          <p:cNvPr id="31" name="Shape 28"/>
+          <p:cNvPr id="32" name="Shape 28"/>
           <p:cNvSpPr/>
           <p:nvPr/>
         </p:nvSpPr>
@@ -13069,7 +13570,7 @@
       </p:sp>
       <p:sp>
         <p:nvSpPr>
-          <p:cNvPr id="32" name="Shape 29"/>
+          <p:cNvPr id="33" name="Shape 29"/>
           <p:cNvSpPr/>
           <p:nvPr/>
         </p:nvSpPr>
@@ -13092,7 +13593,7 @@
       </p:sp>
       <p:sp>
         <p:nvSpPr>
-          <p:cNvPr id="33" name="Text 30"/>
+          <p:cNvPr id="34" name="Text 30"/>
           <p:cNvSpPr/>
           <p:nvPr/>
         </p:nvSpPr>
@@ -13152,7 +13653,7 @@
       </p:sp>
       <p:sp>
         <p:nvSpPr>
-          <p:cNvPr id="34" name="Text 31"/>
+          <p:cNvPr id="35" name="Text 31"/>
           <p:cNvSpPr/>
           <p:nvPr/>
         </p:nvSpPr>
@@ -13191,7 +13692,46 @@
       </p:sp>
       <p:sp>
         <p:nvSpPr>
-          <p:cNvPr id="35" name="Text 32"/>
+          <p:cNvPr id="36" name="Text 32"/>
+          <p:cNvSpPr/>
+          <p:nvPr/>
+        </p:nvSpPr>
+        <p:spPr>
+          <a:xfrm>
+            <a:off x="1828800" y="6483096"/>
+            <a:ext cx="9756648" cy="274320"/>
+          </a:xfrm>
+          <a:prstGeom prst="rect">
+            <a:avLst/>
+          </a:prstGeom>
+          <a:noFill/>
+          <a:ln/>
+        </p:spPr>
+        <p:txBody>
+          <a:bodyPr wrap="square" lIns="0" tIns="0" rIns="0" bIns="0" rtlCol="0" anchor="ctr"/>
+          <a:lstStyle/>
+          <a:p>
+            <a:pPr algn="r" indent="0" marL="0">
+              <a:buNone/>
+            </a:pPr>
+            <a:r>
+              <a:rPr lang="en-US" sz="850" dirty="0">
+                <a:solidFill>
+                  <a:srgbClr val="6E8CA8"/>
+                </a:solidFill>
+                <a:latin typeface="Calibri" pitchFamily="34" charset="0"/>
+                <a:ea typeface="Calibri" pitchFamily="34" charset="-122"/>
+                <a:cs typeface="Calibri" pitchFamily="34" charset="-120"/>
+              </a:rPr>
+              <a:t>PROYECTO TALABRE</a:t>
+            </a:r>
+            <a:endParaRPr lang="en-US" sz="850" dirty="0"/>
+          </a:p>
+        </p:txBody>
+      </p:sp>
+      <p:sp>
+        <p:nvSpPr>
+          <p:cNvPr id="37" name="Text 33"/>
           <p:cNvSpPr/>
           <p:nvPr/>
         </p:nvSpPr>
@@ -13260,9 +13800,33 @@
           <a:chExt cx="0" cy="0"/>
         </a:xfrm>
       </p:grpSpPr>
-      <p:sp>
-        <p:nvSpPr>
-          <p:cNvPr id="2" name="Shape 0"/>
+      <p:pic>
+        <p:nvPicPr>
+          <p:cNvPr id="2" name="Image 0" descr="/home/user/Inversiones/panel_control_TOP_P1/besalco_logo.png">    </p:cNvPr>
+          <p:cNvPicPr>
+            <a:picLocks noChangeAspect="1"/>
+          </p:cNvPicPr>
+          <p:nvPr/>
+        </p:nvPicPr>
+        <p:blipFill>
+          <a:blip r:embed="rId1"/>
+          <a:stretch>
+            <a:fillRect/>
+          </a:stretch>
+        </p:blipFill>
+        <p:spPr>
+          <a:xfrm>
+            <a:off x="8357616" y="420624"/>
+            <a:ext cx="3547872" cy="768096"/>
+          </a:xfrm>
+          <a:prstGeom prst="rect">
+            <a:avLst/>
+          </a:prstGeom>
+        </p:spPr>
+      </p:pic>
+      <p:sp>
+        <p:nvSpPr>
+          <p:cNvPr id="3" name="Shape 0"/>
           <p:cNvSpPr/>
           <p:nvPr/>
         </p:nvSpPr>
@@ -13282,7 +13846,7 @@
       </p:sp>
       <p:sp>
         <p:nvSpPr>
-          <p:cNvPr id="3" name="Text 1"/>
+          <p:cNvPr id="4" name="Text 1"/>
           <p:cNvSpPr/>
           <p:nvPr/>
         </p:nvSpPr>
@@ -13321,7 +13885,7 @@
       </p:sp>
       <p:sp>
         <p:nvSpPr>
-          <p:cNvPr id="4" name="Text 2"/>
+          <p:cNvPr id="5" name="Text 2"/>
           <p:cNvSpPr/>
           <p:nvPr/>
         </p:nvSpPr>
@@ -13360,7 +13924,7 @@
       </p:sp>
       <p:sp>
         <p:nvSpPr>
-          <p:cNvPr id="5" name="Shape 3"/>
+          <p:cNvPr id="6" name="Shape 3"/>
           <p:cNvSpPr/>
           <p:nvPr/>
         </p:nvSpPr>
@@ -13382,7 +13946,7 @@
       </p:sp>
       <p:sp>
         <p:nvSpPr>
-          <p:cNvPr id="6" name="Text 4"/>
+          <p:cNvPr id="7" name="Text 4"/>
           <p:cNvSpPr/>
           <p:nvPr/>
         </p:nvSpPr>
@@ -13421,7 +13985,7 @@
       </p:sp>
       <p:sp>
         <p:nvSpPr>
-          <p:cNvPr id="7" name="Text 5"/>
+          <p:cNvPr id="8" name="Text 5"/>
           <p:cNvSpPr/>
           <p:nvPr/>
         </p:nvSpPr>
@@ -13460,7 +14024,7 @@
       </p:sp>
       <p:sp>
         <p:nvSpPr>
-          <p:cNvPr id="8" name="Text 6"/>
+          <p:cNvPr id="9" name="Text 6"/>
           <p:cNvSpPr/>
           <p:nvPr/>
         </p:nvSpPr>
@@ -13502,7 +14066,7 @@
       </p:sp>
       <p:sp>
         <p:nvSpPr>
-          <p:cNvPr id="9" name="Shape 7"/>
+          <p:cNvPr id="10" name="Shape 7"/>
           <p:cNvSpPr/>
           <p:nvPr/>
         </p:nvSpPr>
@@ -13524,7 +14088,7 @@
       </p:sp>
       <p:sp>
         <p:nvSpPr>
-          <p:cNvPr id="10" name="Text 8"/>
+          <p:cNvPr id="11" name="Text 8"/>
           <p:cNvSpPr/>
           <p:nvPr/>
         </p:nvSpPr>
@@ -13563,7 +14127,7 @@
       </p:sp>
       <p:sp>
         <p:nvSpPr>
-          <p:cNvPr id="11" name="Text 9"/>
+          <p:cNvPr id="12" name="Text 9"/>
           <p:cNvSpPr/>
           <p:nvPr/>
         </p:nvSpPr>
@@ -13602,7 +14166,7 @@
       </p:sp>
       <p:sp>
         <p:nvSpPr>
-          <p:cNvPr id="12" name="Text 10"/>
+          <p:cNvPr id="13" name="Text 10"/>
           <p:cNvSpPr/>
           <p:nvPr/>
         </p:nvSpPr>
@@ -13644,7 +14208,7 @@
       </p:sp>
       <p:sp>
         <p:nvSpPr>
-          <p:cNvPr id="13" name="Shape 11"/>
+          <p:cNvPr id="14" name="Shape 11"/>
           <p:cNvSpPr/>
           <p:nvPr/>
         </p:nvSpPr>
@@ -13666,7 +14230,7 @@
       </p:sp>
       <p:sp>
         <p:nvSpPr>
-          <p:cNvPr id="14" name="Text 12"/>
+          <p:cNvPr id="15" name="Text 12"/>
           <p:cNvSpPr/>
           <p:nvPr/>
         </p:nvSpPr>
@@ -13705,7 +14269,7 @@
       </p:sp>
       <p:sp>
         <p:nvSpPr>
-          <p:cNvPr id="15" name="Text 13"/>
+          <p:cNvPr id="16" name="Text 13"/>
           <p:cNvSpPr/>
           <p:nvPr/>
         </p:nvSpPr>
@@ -13744,7 +14308,7 @@
       </p:sp>
       <p:sp>
         <p:nvSpPr>
-          <p:cNvPr id="16" name="Text 14"/>
+          <p:cNvPr id="17" name="Text 14"/>
           <p:cNvSpPr/>
           <p:nvPr/>
         </p:nvSpPr>
@@ -13786,7 +14350,7 @@
       </p:sp>
       <p:sp>
         <p:nvSpPr>
-          <p:cNvPr id="17" name="Shape 15"/>
+          <p:cNvPr id="18" name="Shape 15"/>
           <p:cNvSpPr/>
           <p:nvPr/>
         </p:nvSpPr>
@@ -13808,7 +14372,7 @@
       </p:sp>
       <p:sp>
         <p:nvSpPr>
-          <p:cNvPr id="18" name="Text 16"/>
+          <p:cNvPr id="19" name="Text 16"/>
           <p:cNvSpPr/>
           <p:nvPr/>
         </p:nvSpPr>
@@ -13847,7 +14411,7 @@
       </p:sp>
       <p:sp>
         <p:nvSpPr>
-          <p:cNvPr id="19" name="Text 17"/>
+          <p:cNvPr id="20" name="Text 17"/>
           <p:cNvSpPr/>
           <p:nvPr/>
         </p:nvSpPr>
@@ -13886,7 +14450,7 @@
       </p:sp>
       <p:sp>
         <p:nvSpPr>
-          <p:cNvPr id="20" name="Text 18"/>
+          <p:cNvPr id="21" name="Text 18"/>
           <p:cNvSpPr/>
           <p:nvPr/>
         </p:nvSpPr>
@@ -13928,7 +14492,7 @@
       </p:sp>
       <p:sp>
         <p:nvSpPr>
-          <p:cNvPr id="21" name="Text 19"/>
+          <p:cNvPr id="22" name="Text 19"/>
           <p:cNvSpPr/>
           <p:nvPr/>
         </p:nvSpPr>
@@ -13967,7 +14531,46 @@
       </p:sp>
       <p:sp>
         <p:nvSpPr>
-          <p:cNvPr id="22" name="Text 20"/>
+          <p:cNvPr id="23" name="Text 20"/>
+          <p:cNvSpPr/>
+          <p:nvPr/>
+        </p:nvSpPr>
+        <p:spPr>
+          <a:xfrm>
+            <a:off x="1828800" y="6483096"/>
+            <a:ext cx="9756648" cy="274320"/>
+          </a:xfrm>
+          <a:prstGeom prst="rect">
+            <a:avLst/>
+          </a:prstGeom>
+          <a:noFill/>
+          <a:ln/>
+        </p:spPr>
+        <p:txBody>
+          <a:bodyPr wrap="square" lIns="0" tIns="0" rIns="0" bIns="0" rtlCol="0" anchor="ctr"/>
+          <a:lstStyle/>
+          <a:p>
+            <a:pPr algn="r" indent="0" marL="0">
+              <a:buNone/>
+            </a:pPr>
+            <a:r>
+              <a:rPr lang="en-US" sz="850" dirty="0">
+                <a:solidFill>
+                  <a:srgbClr val="6E8CA8"/>
+                </a:solidFill>
+                <a:latin typeface="Calibri" pitchFamily="34" charset="0"/>
+                <a:ea typeface="Calibri" pitchFamily="34" charset="-122"/>
+                <a:cs typeface="Calibri" pitchFamily="34" charset="-120"/>
+              </a:rPr>
+              <a:t>PROYECTO TALABRE</a:t>
+            </a:r>
+            <a:endParaRPr lang="en-US" sz="850" dirty="0"/>
+          </a:p>
+        </p:txBody>
+      </p:sp>
+      <p:sp>
+        <p:nvSpPr>
+          <p:cNvPr id="24" name="Text 21"/>
           <p:cNvSpPr/>
           <p:nvPr/>
         </p:nvSpPr>
@@ -14036,9 +14639,33 @@
           <a:chExt cx="0" cy="0"/>
         </a:xfrm>
       </p:grpSpPr>
-      <p:sp>
-        <p:nvSpPr>
-          <p:cNvPr id="2" name="Text 0"/>
+      <p:pic>
+        <p:nvPicPr>
+          <p:cNvPr id="2" name="Image 0" descr="/home/user/Inversiones/panel_control_TOP_P1/besalco_logo.png">    </p:cNvPr>
+          <p:cNvPicPr>
+            <a:picLocks noChangeAspect="1"/>
+          </p:cNvPicPr>
+          <p:nvPr/>
+        </p:nvPicPr>
+        <p:blipFill>
+          <a:blip r:embed="rId1"/>
+          <a:stretch>
+            <a:fillRect/>
+          </a:stretch>
+        </p:blipFill>
+        <p:spPr>
+          <a:xfrm>
+            <a:off x="9116568" y="219456"/>
+            <a:ext cx="2770632" cy="594360"/>
+          </a:xfrm>
+          <a:prstGeom prst="rect">
+            <a:avLst/>
+          </a:prstGeom>
+        </p:spPr>
+      </p:pic>
+      <p:sp>
+        <p:nvSpPr>
+          <p:cNvPr id="3" name="Text 0"/>
           <p:cNvSpPr/>
           <p:nvPr/>
         </p:nvSpPr>
@@ -14077,7 +14704,7 @@
       </p:sp>
       <p:sp>
         <p:nvSpPr>
-          <p:cNvPr id="3" name="Text 1"/>
+          <p:cNvPr id="4" name="Text 1"/>
           <p:cNvSpPr/>
           <p:nvPr/>
         </p:nvSpPr>
@@ -14116,7 +14743,7 @@
       </p:sp>
       <p:sp>
         <p:nvSpPr>
-          <p:cNvPr id="4" name="Shape 2"/>
+          <p:cNvPr id="5" name="Shape 2"/>
           <p:cNvSpPr/>
           <p:nvPr/>
         </p:nvSpPr>
@@ -14150,7 +14777,7 @@
       </p:sp>
       <p:sp>
         <p:nvSpPr>
-          <p:cNvPr id="5" name="Shape 3"/>
+          <p:cNvPr id="6" name="Shape 3"/>
           <p:cNvSpPr/>
           <p:nvPr/>
         </p:nvSpPr>
@@ -14170,7 +14797,7 @@
       </p:sp>
       <p:sp>
         <p:nvSpPr>
-          <p:cNvPr id="6" name="Text 4"/>
+          <p:cNvPr id="7" name="Text 4"/>
           <p:cNvSpPr/>
           <p:nvPr/>
         </p:nvSpPr>
@@ -14209,7 +14836,7 @@
       </p:sp>
       <p:sp>
         <p:nvSpPr>
-          <p:cNvPr id="7" name="Text 5"/>
+          <p:cNvPr id="8" name="Text 5"/>
           <p:cNvSpPr/>
           <p:nvPr/>
         </p:nvSpPr>
@@ -14248,7 +14875,7 @@
       </p:sp>
       <p:sp>
         <p:nvSpPr>
-          <p:cNvPr id="8" name="Text 6"/>
+          <p:cNvPr id="9" name="Text 6"/>
           <p:cNvSpPr/>
           <p:nvPr/>
         </p:nvSpPr>
@@ -14287,7 +14914,7 @@
       </p:sp>
       <p:sp>
         <p:nvSpPr>
-          <p:cNvPr id="9" name="Text 7"/>
+          <p:cNvPr id="10" name="Text 7"/>
           <p:cNvSpPr/>
           <p:nvPr/>
         </p:nvSpPr>
@@ -14326,7 +14953,7 @@
       </p:sp>
       <p:sp>
         <p:nvSpPr>
-          <p:cNvPr id="10" name="Shape 8"/>
+          <p:cNvPr id="11" name="Shape 8"/>
           <p:cNvSpPr/>
           <p:nvPr/>
         </p:nvSpPr>
@@ -14360,7 +14987,7 @@
       </p:sp>
       <p:sp>
         <p:nvSpPr>
-          <p:cNvPr id="11" name="Shape 9"/>
+          <p:cNvPr id="12" name="Shape 9"/>
           <p:cNvSpPr/>
           <p:nvPr/>
         </p:nvSpPr>
@@ -14380,7 +15007,7 @@
       </p:sp>
       <p:sp>
         <p:nvSpPr>
-          <p:cNvPr id="12" name="Text 10"/>
+          <p:cNvPr id="13" name="Text 10"/>
           <p:cNvSpPr/>
           <p:nvPr/>
         </p:nvSpPr>
@@ -14419,7 +15046,7 @@
       </p:sp>
       <p:sp>
         <p:nvSpPr>
-          <p:cNvPr id="13" name="Text 11"/>
+          <p:cNvPr id="14" name="Text 11"/>
           <p:cNvSpPr/>
           <p:nvPr/>
         </p:nvSpPr>
@@ -14458,7 +15085,7 @@
       </p:sp>
       <p:sp>
         <p:nvSpPr>
-          <p:cNvPr id="14" name="Text 12"/>
+          <p:cNvPr id="15" name="Text 12"/>
           <p:cNvSpPr/>
           <p:nvPr/>
         </p:nvSpPr>
@@ -14497,7 +15124,7 @@
       </p:sp>
       <p:sp>
         <p:nvSpPr>
-          <p:cNvPr id="15" name="Text 13"/>
+          <p:cNvPr id="16" name="Text 13"/>
           <p:cNvSpPr/>
           <p:nvPr/>
         </p:nvSpPr>
@@ -14536,7 +15163,7 @@
       </p:sp>
       <p:sp>
         <p:nvSpPr>
-          <p:cNvPr id="16" name="Text 14"/>
+          <p:cNvPr id="17" name="Text 14"/>
           <p:cNvSpPr/>
           <p:nvPr/>
         </p:nvSpPr>
@@ -14575,7 +15202,7 @@
       </p:sp>
       <p:sp>
         <p:nvSpPr>
-          <p:cNvPr id="17" name="Shape 15"/>
+          <p:cNvPr id="18" name="Shape 15"/>
           <p:cNvSpPr/>
           <p:nvPr/>
         </p:nvSpPr>
@@ -14609,7 +15236,7 @@
       </p:sp>
       <p:sp>
         <p:nvSpPr>
-          <p:cNvPr id="18" name="Shape 16"/>
+          <p:cNvPr id="19" name="Shape 16"/>
           <p:cNvSpPr/>
           <p:nvPr/>
         </p:nvSpPr>
@@ -14629,7 +15256,7 @@
       </p:sp>
       <p:sp>
         <p:nvSpPr>
-          <p:cNvPr id="19" name="Text 17"/>
+          <p:cNvPr id="20" name="Text 17"/>
           <p:cNvSpPr/>
           <p:nvPr/>
         </p:nvSpPr>
@@ -14668,7 +15295,7 @@
       </p:sp>
       <p:sp>
         <p:nvSpPr>
-          <p:cNvPr id="20" name="Text 18"/>
+          <p:cNvPr id="21" name="Text 18"/>
           <p:cNvSpPr/>
           <p:nvPr/>
         </p:nvSpPr>
@@ -14707,7 +15334,7 @@
       </p:sp>
       <p:sp>
         <p:nvSpPr>
-          <p:cNvPr id="21" name="Text 19"/>
+          <p:cNvPr id="22" name="Text 19"/>
           <p:cNvSpPr/>
           <p:nvPr/>
         </p:nvSpPr>
@@ -14746,7 +15373,7 @@
       </p:sp>
       <p:sp>
         <p:nvSpPr>
-          <p:cNvPr id="22" name="Text 20"/>
+          <p:cNvPr id="23" name="Text 20"/>
           <p:cNvSpPr/>
           <p:nvPr/>
         </p:nvSpPr>
@@ -14785,7 +15412,7 @@
       </p:sp>
       <p:sp>
         <p:nvSpPr>
-          <p:cNvPr id="23" name="Text 21"/>
+          <p:cNvPr id="24" name="Text 21"/>
           <p:cNvSpPr/>
           <p:nvPr/>
         </p:nvSpPr>
@@ -14824,7 +15451,7 @@
       </p:sp>
       <p:sp>
         <p:nvSpPr>
-          <p:cNvPr id="24" name="Shape 22"/>
+          <p:cNvPr id="25" name="Shape 22"/>
           <p:cNvSpPr/>
           <p:nvPr/>
         </p:nvSpPr>
@@ -14858,7 +15485,7 @@
       </p:sp>
       <p:sp>
         <p:nvSpPr>
-          <p:cNvPr id="25" name="Shape 23"/>
+          <p:cNvPr id="26" name="Shape 23"/>
           <p:cNvSpPr/>
           <p:nvPr/>
         </p:nvSpPr>
@@ -14878,7 +15505,7 @@
       </p:sp>
       <p:sp>
         <p:nvSpPr>
-          <p:cNvPr id="26" name="Text 24"/>
+          <p:cNvPr id="27" name="Text 24"/>
           <p:cNvSpPr/>
           <p:nvPr/>
         </p:nvSpPr>
@@ -14917,7 +15544,7 @@
       </p:sp>
       <p:sp>
         <p:nvSpPr>
-          <p:cNvPr id="27" name="Text 25"/>
+          <p:cNvPr id="28" name="Text 25"/>
           <p:cNvSpPr/>
           <p:nvPr/>
         </p:nvSpPr>
@@ -14956,7 +15583,7 @@
       </p:sp>
       <p:sp>
         <p:nvSpPr>
-          <p:cNvPr id="28" name="Text 26"/>
+          <p:cNvPr id="29" name="Text 26"/>
           <p:cNvSpPr/>
           <p:nvPr/>
         </p:nvSpPr>
@@ -14995,7 +15622,7 @@
       </p:sp>
       <p:sp>
         <p:nvSpPr>
-          <p:cNvPr id="29" name="Text 27"/>
+          <p:cNvPr id="30" name="Text 27"/>
           <p:cNvSpPr/>
           <p:nvPr/>
         </p:nvSpPr>
@@ -15034,7 +15661,7 @@
       </p:sp>
       <p:sp>
         <p:nvSpPr>
-          <p:cNvPr id="30" name="Text 28"/>
+          <p:cNvPr id="31" name="Text 28"/>
           <p:cNvSpPr/>
           <p:nvPr/>
         </p:nvSpPr>
@@ -15073,7 +15700,7 @@
       </p:sp>
       <p:sp>
         <p:nvSpPr>
-          <p:cNvPr id="31" name="Shape 29"/>
+          <p:cNvPr id="32" name="Shape 29"/>
           <p:cNvSpPr/>
           <p:nvPr/>
         </p:nvSpPr>
@@ -15095,7 +15722,7 @@
       </p:sp>
       <p:sp>
         <p:nvSpPr>
-          <p:cNvPr id="32" name="Text 30"/>
+          <p:cNvPr id="33" name="Text 30"/>
           <p:cNvSpPr/>
           <p:nvPr/>
         </p:nvSpPr>
@@ -15134,7 +15761,7 @@
       </p:sp>
       <p:sp>
         <p:nvSpPr>
-          <p:cNvPr id="33" name="Shape 31"/>
+          <p:cNvPr id="34" name="Shape 31"/>
           <p:cNvSpPr/>
           <p:nvPr/>
         </p:nvSpPr>
@@ -15154,7 +15781,7 @@
       </p:sp>
       <p:sp>
         <p:nvSpPr>
-          <p:cNvPr id="34" name="Text 32"/>
+          <p:cNvPr id="35" name="Text 32"/>
           <p:cNvSpPr/>
           <p:nvPr/>
         </p:nvSpPr>
@@ -15213,7 +15840,7 @@
       </p:sp>
       <p:sp>
         <p:nvSpPr>
-          <p:cNvPr id="35" name="Shape 33"/>
+          <p:cNvPr id="36" name="Shape 33"/>
           <p:cNvSpPr/>
           <p:nvPr/>
         </p:nvSpPr>
@@ -15233,7 +15860,7 @@
       </p:sp>
       <p:sp>
         <p:nvSpPr>
-          <p:cNvPr id="36" name="Text 34"/>
+          <p:cNvPr id="37" name="Text 34"/>
           <p:cNvSpPr/>
           <p:nvPr/>
         </p:nvSpPr>
@@ -15292,7 +15919,7 @@
       </p:sp>
       <p:sp>
         <p:nvSpPr>
-          <p:cNvPr id="37" name="Shape 35"/>
+          <p:cNvPr id="38" name="Shape 35"/>
           <p:cNvSpPr/>
           <p:nvPr/>
         </p:nvSpPr>
@@ -15312,7 +15939,7 @@
       </p:sp>
       <p:sp>
         <p:nvSpPr>
-          <p:cNvPr id="38" name="Text 36"/>
+          <p:cNvPr id="39" name="Text 36"/>
           <p:cNvSpPr/>
           <p:nvPr/>
         </p:nvSpPr>
@@ -15371,7 +15998,7 @@
       </p:sp>
       <p:sp>
         <p:nvSpPr>
-          <p:cNvPr id="39" name="Text 37"/>
+          <p:cNvPr id="40" name="Text 37"/>
           <p:cNvSpPr/>
           <p:nvPr/>
         </p:nvSpPr>
@@ -15410,7 +16037,46 @@
       </p:sp>
       <p:sp>
         <p:nvSpPr>
-          <p:cNvPr id="40" name="Text 38"/>
+          <p:cNvPr id="41" name="Text 38"/>
+          <p:cNvSpPr/>
+          <p:nvPr/>
+        </p:nvSpPr>
+        <p:spPr>
+          <a:xfrm>
+            <a:off x="1828800" y="6483096"/>
+            <a:ext cx="9756648" cy="274320"/>
+          </a:xfrm>
+          <a:prstGeom prst="rect">
+            <a:avLst/>
+          </a:prstGeom>
+          <a:noFill/>
+          <a:ln/>
+        </p:spPr>
+        <p:txBody>
+          <a:bodyPr wrap="square" lIns="0" tIns="0" rIns="0" bIns="0" rtlCol="0" anchor="ctr"/>
+          <a:lstStyle/>
+          <a:p>
+            <a:pPr algn="r" indent="0" marL="0">
+              <a:buNone/>
+            </a:pPr>
+            <a:r>
+              <a:rPr lang="en-US" sz="850" dirty="0">
+                <a:solidFill>
+                  <a:srgbClr val="56606E"/>
+                </a:solidFill>
+                <a:latin typeface="Calibri" pitchFamily="34" charset="0"/>
+                <a:ea typeface="Calibri" pitchFamily="34" charset="-122"/>
+                <a:cs typeface="Calibri" pitchFamily="34" charset="-120"/>
+              </a:rPr>
+              <a:t>PROYECTO MASA</a:t>
+            </a:r>
+            <a:endParaRPr lang="en-US" sz="850" dirty="0"/>
+          </a:p>
+        </p:txBody>
+      </p:sp>
+      <p:sp>
+        <p:nvSpPr>
+          <p:cNvPr id="42" name="Text 39"/>
           <p:cNvSpPr/>
           <p:nvPr/>
         </p:nvSpPr>
@@ -15479,9 +16145,33 @@
           <a:chExt cx="0" cy="0"/>
         </a:xfrm>
       </p:grpSpPr>
-      <p:sp>
-        <p:nvSpPr>
-          <p:cNvPr id="2" name="Text 0"/>
+      <p:pic>
+        <p:nvPicPr>
+          <p:cNvPr id="2" name="Image 0" descr="/home/user/Inversiones/panel_control_TOP_P1/besalco_logo.png">    </p:cNvPr>
+          <p:cNvPicPr>
+            <a:picLocks noChangeAspect="1"/>
+          </p:cNvPicPr>
+          <p:nvPr/>
+        </p:nvPicPr>
+        <p:blipFill>
+          <a:blip r:embed="rId1"/>
+          <a:stretch>
+            <a:fillRect/>
+          </a:stretch>
+        </p:blipFill>
+        <p:spPr>
+          <a:xfrm>
+            <a:off x="9116568" y="219456"/>
+            <a:ext cx="2770632" cy="594360"/>
+          </a:xfrm>
+          <a:prstGeom prst="rect">
+            <a:avLst/>
+          </a:prstGeom>
+        </p:spPr>
+      </p:pic>
+      <p:sp>
+        <p:nvSpPr>
+          <p:cNvPr id="3" name="Text 0"/>
           <p:cNvSpPr/>
           <p:nvPr/>
         </p:nvSpPr>
@@ -15520,7 +16210,7 @@
       </p:sp>
       <p:sp>
         <p:nvSpPr>
-          <p:cNvPr id="3" name="Text 1"/>
+          <p:cNvPr id="4" name="Text 1"/>
           <p:cNvSpPr/>
           <p:nvPr/>
         </p:nvSpPr>
@@ -15559,7 +16249,7 @@
       </p:sp>
       <p:sp>
         <p:nvSpPr>
-          <p:cNvPr id="4" name="Text 2"/>
+          <p:cNvPr id="5" name="Text 2"/>
           <p:cNvSpPr/>
           <p:nvPr/>
         </p:nvSpPr>
@@ -15598,7 +16288,7 @@
       </p:sp>
       <p:sp>
         <p:nvSpPr>
-          <p:cNvPr id="5" name="Text 3"/>
+          <p:cNvPr id="6" name="Text 3"/>
           <p:cNvSpPr/>
           <p:nvPr/>
         </p:nvSpPr>
@@ -15637,7 +16327,7 @@
       </p:sp>
       <p:sp>
         <p:nvSpPr>
-          <p:cNvPr id="6" name="Text 4"/>
+          <p:cNvPr id="7" name="Text 4"/>
           <p:cNvSpPr/>
           <p:nvPr/>
         </p:nvSpPr>
@@ -15676,7 +16366,7 @@
       </p:sp>
       <p:sp>
         <p:nvSpPr>
-          <p:cNvPr id="7" name="Text 5"/>
+          <p:cNvPr id="8" name="Text 5"/>
           <p:cNvSpPr/>
           <p:nvPr/>
         </p:nvSpPr>
@@ -15715,7 +16405,7 @@
       </p:sp>
       <p:sp>
         <p:nvSpPr>
-          <p:cNvPr id="8" name="Text 6"/>
+          <p:cNvPr id="9" name="Text 6"/>
           <p:cNvSpPr/>
           <p:nvPr/>
         </p:nvSpPr>
@@ -15754,7 +16444,7 @@
       </p:sp>
       <p:sp>
         <p:nvSpPr>
-          <p:cNvPr id="9" name="Text 7"/>
+          <p:cNvPr id="10" name="Text 7"/>
           <p:cNvSpPr/>
           <p:nvPr/>
         </p:nvSpPr>
@@ -15793,7 +16483,7 @@
       </p:sp>
       <p:sp>
         <p:nvSpPr>
-          <p:cNvPr id="10" name="Text 8"/>
+          <p:cNvPr id="11" name="Text 8"/>
           <p:cNvSpPr/>
           <p:nvPr/>
         </p:nvSpPr>
@@ -15832,7 +16522,7 @@
       </p:sp>
       <p:sp>
         <p:nvSpPr>
-          <p:cNvPr id="11" name="Shape 9"/>
+          <p:cNvPr id="12" name="Shape 9"/>
           <p:cNvSpPr/>
           <p:nvPr/>
         </p:nvSpPr>
@@ -15855,7 +16545,7 @@
       </p:sp>
       <p:sp>
         <p:nvSpPr>
-          <p:cNvPr id="12" name="Text 10"/>
+          <p:cNvPr id="13" name="Text 10"/>
           <p:cNvSpPr/>
           <p:nvPr/>
         </p:nvSpPr>
@@ -15894,7 +16584,7 @@
       </p:sp>
       <p:sp>
         <p:nvSpPr>
-          <p:cNvPr id="13" name="Text 11"/>
+          <p:cNvPr id="14" name="Text 11"/>
           <p:cNvSpPr/>
           <p:nvPr/>
         </p:nvSpPr>
@@ -15933,7 +16623,7 @@
       </p:sp>
       <p:sp>
         <p:nvSpPr>
-          <p:cNvPr id="14" name="Text 12"/>
+          <p:cNvPr id="15" name="Text 12"/>
           <p:cNvSpPr/>
           <p:nvPr/>
         </p:nvSpPr>
@@ -15972,7 +16662,7 @@
       </p:sp>
       <p:sp>
         <p:nvSpPr>
-          <p:cNvPr id="15" name="Text 13"/>
+          <p:cNvPr id="16" name="Text 13"/>
           <p:cNvSpPr/>
           <p:nvPr/>
         </p:nvSpPr>
@@ -16011,7 +16701,7 @@
       </p:sp>
       <p:sp>
         <p:nvSpPr>
-          <p:cNvPr id="16" name="Text 14"/>
+          <p:cNvPr id="17" name="Text 14"/>
           <p:cNvSpPr/>
           <p:nvPr/>
         </p:nvSpPr>
@@ -16050,7 +16740,7 @@
       </p:sp>
       <p:sp>
         <p:nvSpPr>
-          <p:cNvPr id="17" name="Text 15"/>
+          <p:cNvPr id="18" name="Text 15"/>
           <p:cNvSpPr/>
           <p:nvPr/>
         </p:nvSpPr>
@@ -16089,7 +16779,7 @@
       </p:sp>
       <p:sp>
         <p:nvSpPr>
-          <p:cNvPr id="18" name="Text 16"/>
+          <p:cNvPr id="19" name="Text 16"/>
           <p:cNvSpPr/>
           <p:nvPr/>
         </p:nvSpPr>
@@ -16128,7 +16818,7 @@
       </p:sp>
       <p:sp>
         <p:nvSpPr>
-          <p:cNvPr id="19" name="Shape 17"/>
+          <p:cNvPr id="20" name="Shape 17"/>
           <p:cNvSpPr/>
           <p:nvPr/>
         </p:nvSpPr>
@@ -16150,7 +16840,7 @@
       </p:sp>
       <p:sp>
         <p:nvSpPr>
-          <p:cNvPr id="20" name="Text 18"/>
+          <p:cNvPr id="21" name="Text 18"/>
           <p:cNvSpPr/>
           <p:nvPr/>
         </p:nvSpPr>
@@ -16189,7 +16879,7 @@
       </p:sp>
       <p:sp>
         <p:nvSpPr>
-          <p:cNvPr id="21" name="Shape 19"/>
+          <p:cNvPr id="22" name="Shape 19"/>
           <p:cNvSpPr/>
           <p:nvPr/>
         </p:nvSpPr>
@@ -16212,7 +16902,7 @@
       </p:sp>
       <p:sp>
         <p:nvSpPr>
-          <p:cNvPr id="22" name="Shape 20"/>
+          <p:cNvPr id="23" name="Shape 20"/>
           <p:cNvSpPr/>
           <p:nvPr/>
         </p:nvSpPr>
@@ -16232,7 +16922,7 @@
       </p:sp>
       <p:sp>
         <p:nvSpPr>
-          <p:cNvPr id="23" name="Text 21"/>
+          <p:cNvPr id="24" name="Text 21"/>
           <p:cNvSpPr/>
           <p:nvPr/>
         </p:nvSpPr>
@@ -16271,7 +16961,7 @@
       </p:sp>
       <p:sp>
         <p:nvSpPr>
-          <p:cNvPr id="24" name="Text 22"/>
+          <p:cNvPr id="25" name="Text 22"/>
           <p:cNvSpPr/>
           <p:nvPr/>
         </p:nvSpPr>
@@ -16310,7 +17000,7 @@
       </p:sp>
       <p:sp>
         <p:nvSpPr>
-          <p:cNvPr id="25" name="Text 23"/>
+          <p:cNvPr id="26" name="Text 23"/>
           <p:cNvSpPr/>
           <p:nvPr/>
         </p:nvSpPr>
@@ -16349,7 +17039,7 @@
       </p:sp>
       <p:sp>
         <p:nvSpPr>
-          <p:cNvPr id="26" name="Text 24"/>
+          <p:cNvPr id="27" name="Text 24"/>
           <p:cNvSpPr/>
           <p:nvPr/>
         </p:nvSpPr>
@@ -16388,7 +17078,7 @@
       </p:sp>
       <p:sp>
         <p:nvSpPr>
-          <p:cNvPr id="27" name="Text 25"/>
+          <p:cNvPr id="28" name="Text 25"/>
           <p:cNvSpPr/>
           <p:nvPr/>
         </p:nvSpPr>
@@ -16427,7 +17117,7 @@
       </p:sp>
       <p:sp>
         <p:nvSpPr>
-          <p:cNvPr id="28" name="Text 26"/>
+          <p:cNvPr id="29" name="Text 26"/>
           <p:cNvSpPr/>
           <p:nvPr/>
         </p:nvSpPr>
@@ -16466,7 +17156,7 @@
       </p:sp>
       <p:sp>
         <p:nvSpPr>
-          <p:cNvPr id="29" name="Text 27"/>
+          <p:cNvPr id="30" name="Text 27"/>
           <p:cNvSpPr/>
           <p:nvPr/>
         </p:nvSpPr>
@@ -16505,7 +17195,7 @@
       </p:sp>
       <p:sp>
         <p:nvSpPr>
-          <p:cNvPr id="30" name="Shape 28"/>
+          <p:cNvPr id="31" name="Shape 28"/>
           <p:cNvSpPr/>
           <p:nvPr/>
         </p:nvSpPr>
@@ -16527,7 +17217,7 @@
       </p:sp>
       <p:sp>
         <p:nvSpPr>
-          <p:cNvPr id="31" name="Text 29"/>
+          <p:cNvPr id="32" name="Text 29"/>
           <p:cNvSpPr/>
           <p:nvPr/>
         </p:nvSpPr>
@@ -16566,7 +17256,7 @@
       </p:sp>
       <p:sp>
         <p:nvSpPr>
-          <p:cNvPr id="32" name="Shape 30"/>
+          <p:cNvPr id="33" name="Shape 30"/>
           <p:cNvSpPr/>
           <p:nvPr/>
         </p:nvSpPr>
@@ -16589,7 +17279,7 @@
       </p:sp>
       <p:sp>
         <p:nvSpPr>
-          <p:cNvPr id="33" name="Text 31"/>
+          <p:cNvPr id="34" name="Text 31"/>
           <p:cNvSpPr/>
           <p:nvPr/>
         </p:nvSpPr>
@@ -16628,7 +17318,7 @@
       </p:sp>
       <p:sp>
         <p:nvSpPr>
-          <p:cNvPr id="34" name="Text 32"/>
+          <p:cNvPr id="35" name="Text 32"/>
           <p:cNvSpPr/>
           <p:nvPr/>
         </p:nvSpPr>
@@ -16667,7 +17357,7 @@
       </p:sp>
       <p:sp>
         <p:nvSpPr>
-          <p:cNvPr id="35" name="Text 33"/>
+          <p:cNvPr id="36" name="Text 33"/>
           <p:cNvSpPr/>
           <p:nvPr/>
         </p:nvSpPr>
@@ -16706,7 +17396,7 @@
       </p:sp>
       <p:sp>
         <p:nvSpPr>
-          <p:cNvPr id="36" name="Text 34"/>
+          <p:cNvPr id="37" name="Text 34"/>
           <p:cNvSpPr/>
           <p:nvPr/>
         </p:nvSpPr>
@@ -16745,7 +17435,7 @@
       </p:sp>
       <p:sp>
         <p:nvSpPr>
-          <p:cNvPr id="37" name="Text 35"/>
+          <p:cNvPr id="38" name="Text 35"/>
           <p:cNvSpPr/>
           <p:nvPr/>
         </p:nvSpPr>
@@ -16784,7 +17474,7 @@
       </p:sp>
       <p:sp>
         <p:nvSpPr>
-          <p:cNvPr id="38" name="Text 36"/>
+          <p:cNvPr id="39" name="Text 36"/>
           <p:cNvSpPr/>
           <p:nvPr/>
         </p:nvSpPr>
@@ -16823,7 +17513,7 @@
       </p:sp>
       <p:sp>
         <p:nvSpPr>
-          <p:cNvPr id="39" name="Text 37"/>
+          <p:cNvPr id="40" name="Text 37"/>
           <p:cNvSpPr/>
           <p:nvPr/>
         </p:nvSpPr>
@@ -16862,7 +17552,7 @@
       </p:sp>
       <p:sp>
         <p:nvSpPr>
-          <p:cNvPr id="40" name="Shape 38"/>
+          <p:cNvPr id="41" name="Shape 38"/>
           <p:cNvSpPr/>
           <p:nvPr/>
         </p:nvSpPr>
@@ -16884,7 +17574,7 @@
       </p:sp>
       <p:sp>
         <p:nvSpPr>
-          <p:cNvPr id="41" name="Text 39"/>
+          <p:cNvPr id="42" name="Text 39"/>
           <p:cNvSpPr/>
           <p:nvPr/>
         </p:nvSpPr>
@@ -16923,7 +17613,7 @@
       </p:sp>
       <p:sp>
         <p:nvSpPr>
-          <p:cNvPr id="42" name="Shape 40"/>
+          <p:cNvPr id="43" name="Shape 40"/>
           <p:cNvSpPr/>
           <p:nvPr/>
         </p:nvSpPr>
@@ -16946,7 +17636,7 @@
       </p:sp>
       <p:sp>
         <p:nvSpPr>
-          <p:cNvPr id="43" name="Shape 41"/>
+          <p:cNvPr id="44" name="Shape 41"/>
           <p:cNvSpPr/>
           <p:nvPr/>
         </p:nvSpPr>
@@ -16966,7 +17656,7 @@
       </p:sp>
       <p:sp>
         <p:nvSpPr>
-          <p:cNvPr id="44" name="Text 42"/>
+          <p:cNvPr id="45" name="Text 42"/>
           <p:cNvSpPr/>
           <p:nvPr/>
         </p:nvSpPr>
@@ -17005,7 +17695,7 @@
       </p:sp>
       <p:sp>
         <p:nvSpPr>
-          <p:cNvPr id="45" name="Text 43"/>
+          <p:cNvPr id="46" name="Text 43"/>
           <p:cNvSpPr/>
           <p:nvPr/>
         </p:nvSpPr>
@@ -17044,7 +17734,7 @@
       </p:sp>
       <p:sp>
         <p:nvSpPr>
-          <p:cNvPr id="46" name="Text 44"/>
+          <p:cNvPr id="47" name="Text 44"/>
           <p:cNvSpPr/>
           <p:nvPr/>
         </p:nvSpPr>
@@ -17083,7 +17773,7 @@
       </p:sp>
       <p:sp>
         <p:nvSpPr>
-          <p:cNvPr id="47" name="Text 45"/>
+          <p:cNvPr id="48" name="Text 45"/>
           <p:cNvSpPr/>
           <p:nvPr/>
         </p:nvSpPr>
@@ -17122,7 +17812,7 @@
       </p:sp>
       <p:sp>
         <p:nvSpPr>
-          <p:cNvPr id="48" name="Text 46"/>
+          <p:cNvPr id="49" name="Text 46"/>
           <p:cNvSpPr/>
           <p:nvPr/>
         </p:nvSpPr>
@@ -17161,7 +17851,7 @@
       </p:sp>
       <p:sp>
         <p:nvSpPr>
-          <p:cNvPr id="49" name="Text 47"/>
+          <p:cNvPr id="50" name="Text 47"/>
           <p:cNvSpPr/>
           <p:nvPr/>
         </p:nvSpPr>
@@ -17200,7 +17890,7 @@
       </p:sp>
       <p:sp>
         <p:nvSpPr>
-          <p:cNvPr id="50" name="Text 48"/>
+          <p:cNvPr id="51" name="Text 48"/>
           <p:cNvSpPr/>
           <p:nvPr/>
         </p:nvSpPr>
@@ -17239,7 +17929,7 @@
       </p:sp>
       <p:sp>
         <p:nvSpPr>
-          <p:cNvPr id="51" name="Shape 49"/>
+          <p:cNvPr id="52" name="Shape 49"/>
           <p:cNvSpPr/>
           <p:nvPr/>
         </p:nvSpPr>
@@ -17261,7 +17951,7 @@
       </p:sp>
       <p:sp>
         <p:nvSpPr>
-          <p:cNvPr id="52" name="Text 50"/>
+          <p:cNvPr id="53" name="Text 50"/>
           <p:cNvSpPr/>
           <p:nvPr/>
         </p:nvSpPr>
@@ -17300,7 +17990,7 @@
       </p:sp>
       <p:sp>
         <p:nvSpPr>
-          <p:cNvPr id="53" name="Shape 51"/>
+          <p:cNvPr id="54" name="Shape 51"/>
           <p:cNvSpPr/>
           <p:nvPr/>
         </p:nvSpPr>
@@ -17323,7 +18013,7 @@
       </p:sp>
       <p:sp>
         <p:nvSpPr>
-          <p:cNvPr id="54" name="Text 52"/>
+          <p:cNvPr id="55" name="Text 52"/>
           <p:cNvSpPr/>
           <p:nvPr/>
         </p:nvSpPr>
@@ -17362,7 +18052,7 @@
       </p:sp>
       <p:sp>
         <p:nvSpPr>
-          <p:cNvPr id="55" name="Text 53"/>
+          <p:cNvPr id="56" name="Text 53"/>
           <p:cNvSpPr/>
           <p:nvPr/>
         </p:nvSpPr>
@@ -17401,7 +18091,46 @@
       </p:sp>
       <p:sp>
         <p:nvSpPr>
-          <p:cNvPr id="56" name="Text 54"/>
+          <p:cNvPr id="57" name="Text 54"/>
+          <p:cNvSpPr/>
+          <p:nvPr/>
+        </p:nvSpPr>
+        <p:spPr>
+          <a:xfrm>
+            <a:off x="1828800" y="6483096"/>
+            <a:ext cx="9756648" cy="274320"/>
+          </a:xfrm>
+          <a:prstGeom prst="rect">
+            <a:avLst/>
+          </a:prstGeom>
+          <a:noFill/>
+          <a:ln/>
+        </p:spPr>
+        <p:txBody>
+          <a:bodyPr wrap="square" lIns="0" tIns="0" rIns="0" bIns="0" rtlCol="0" anchor="ctr"/>
+          <a:lstStyle/>
+          <a:p>
+            <a:pPr algn="r" indent="0" marL="0">
+              <a:buNone/>
+            </a:pPr>
+            <a:r>
+              <a:rPr lang="en-US" sz="850" dirty="0">
+                <a:solidFill>
+                  <a:srgbClr val="56606E"/>
+                </a:solidFill>
+                <a:latin typeface="Calibri" pitchFamily="34" charset="0"/>
+                <a:ea typeface="Calibri" pitchFamily="34" charset="-122"/>
+                <a:cs typeface="Calibri" pitchFamily="34" charset="-120"/>
+              </a:rPr>
+              <a:t>PROYECTO MASA</a:t>
+            </a:r>
+            <a:endParaRPr lang="en-US" sz="850" dirty="0"/>
+          </a:p>
+        </p:txBody>
+      </p:sp>
+      <p:sp>
+        <p:nvSpPr>
+          <p:cNvPr id="58" name="Text 55"/>
           <p:cNvSpPr/>
           <p:nvPr/>
         </p:nvSpPr>
@@ -17470,9 +18199,33 @@
           <a:chExt cx="0" cy="0"/>
         </a:xfrm>
       </p:grpSpPr>
-      <p:sp>
-        <p:nvSpPr>
-          <p:cNvPr id="2" name="Text 0"/>
+      <p:pic>
+        <p:nvPicPr>
+          <p:cNvPr id="2" name="Image 0" descr="/home/user/Inversiones/panel_control_TOP_P1/besalco_logo.png">    </p:cNvPr>
+          <p:cNvPicPr>
+            <a:picLocks noChangeAspect="1"/>
+          </p:cNvPicPr>
+          <p:nvPr/>
+        </p:nvPicPr>
+        <p:blipFill>
+          <a:blip r:embed="rId1"/>
+          <a:stretch>
+            <a:fillRect/>
+          </a:stretch>
+        </p:blipFill>
+        <p:spPr>
+          <a:xfrm>
+            <a:off x="9116568" y="219456"/>
+            <a:ext cx="2770632" cy="594360"/>
+          </a:xfrm>
+          <a:prstGeom prst="rect">
+            <a:avLst/>
+          </a:prstGeom>
+        </p:spPr>
+      </p:pic>
+      <p:sp>
+        <p:nvSpPr>
+          <p:cNvPr id="3" name="Text 0"/>
           <p:cNvSpPr/>
           <p:nvPr/>
         </p:nvSpPr>
@@ -17511,7 +18264,7 @@
       </p:sp>
       <p:sp>
         <p:nvSpPr>
-          <p:cNvPr id="3" name="Text 1"/>
+          <p:cNvPr id="4" name="Text 1"/>
           <p:cNvSpPr/>
           <p:nvPr/>
         </p:nvSpPr>
@@ -17550,7 +18303,7 @@
       </p:sp>
       <p:sp>
         <p:nvSpPr>
-          <p:cNvPr id="4" name="Text 2"/>
+          <p:cNvPr id="5" name="Text 2"/>
           <p:cNvSpPr/>
           <p:nvPr/>
         </p:nvSpPr>
@@ -17589,7 +18342,7 @@
       </p:sp>
       <p:graphicFrame>
         <p:nvGraphicFramePr>
-          <p:cNvPr id="5" name="Chart 0" descr=""/>
+          <p:cNvPr id="6" name="Chart 0" descr=""/>
           <p:cNvGraphicFramePr/>
           <p:nvPr/>
         </p:nvGraphicFramePr>
@@ -17599,13 +18352,13 @@
         </p:xfrm>
         <a:graphic xmlns:a="http://schemas.openxmlformats.org/drawingml/2006/main">
           <a:graphicData uri="http://schemas.openxmlformats.org/drawingml/2006/chart">
-            <c:chart xmlns:c="http://schemas.openxmlformats.org/drawingml/2006/chart" r:id="rId1"/>
+            <c:chart xmlns:c="http://schemas.openxmlformats.org/drawingml/2006/chart" r:id="rId2"/>
           </a:graphicData>
         </a:graphic>
       </p:graphicFrame>
       <p:sp>
         <p:nvSpPr>
-          <p:cNvPr id="6" name="Shape 3"/>
+          <p:cNvPr id="7" name="Shape 3"/>
           <p:cNvSpPr/>
           <p:nvPr/>
         </p:nvSpPr>
@@ -17627,7 +18380,7 @@
       </p:sp>
       <p:sp>
         <p:nvSpPr>
-          <p:cNvPr id="7" name="Text 4"/>
+          <p:cNvPr id="8" name="Text 4"/>
           <p:cNvSpPr/>
           <p:nvPr/>
         </p:nvSpPr>
@@ -17666,7 +18419,7 @@
       </p:sp>
       <p:sp>
         <p:nvSpPr>
-          <p:cNvPr id="8" name="Text 5"/>
+          <p:cNvPr id="9" name="Text 5"/>
           <p:cNvSpPr/>
           <p:nvPr/>
         </p:nvSpPr>
@@ -17705,7 +18458,7 @@
       </p:sp>
       <p:sp>
         <p:nvSpPr>
-          <p:cNvPr id="9" name="Text 6"/>
+          <p:cNvPr id="10" name="Text 6"/>
           <p:cNvSpPr/>
           <p:nvPr/>
         </p:nvSpPr>
@@ -17744,7 +18497,7 @@
       </p:sp>
       <p:sp>
         <p:nvSpPr>
-          <p:cNvPr id="10" name="Shape 7"/>
+          <p:cNvPr id="11" name="Shape 7"/>
           <p:cNvSpPr/>
           <p:nvPr/>
         </p:nvSpPr>
@@ -17767,7 +18520,7 @@
       </p:sp>
       <p:sp>
         <p:nvSpPr>
-          <p:cNvPr id="11" name="Text 8"/>
+          <p:cNvPr id="12" name="Text 8"/>
           <p:cNvSpPr/>
           <p:nvPr/>
         </p:nvSpPr>
@@ -17806,7 +18559,7 @@
       </p:sp>
       <p:sp>
         <p:nvSpPr>
-          <p:cNvPr id="12" name="Text 9"/>
+          <p:cNvPr id="13" name="Text 9"/>
           <p:cNvSpPr/>
           <p:nvPr/>
         </p:nvSpPr>
@@ -17845,7 +18598,7 @@
       </p:sp>
       <p:sp>
         <p:nvSpPr>
-          <p:cNvPr id="13" name="Text 10"/>
+          <p:cNvPr id="14" name="Text 10"/>
           <p:cNvSpPr/>
           <p:nvPr/>
         </p:nvSpPr>
@@ -17884,7 +18637,7 @@
       </p:sp>
       <p:sp>
         <p:nvSpPr>
-          <p:cNvPr id="14" name="Text 11"/>
+          <p:cNvPr id="15" name="Text 11"/>
           <p:cNvSpPr/>
           <p:nvPr/>
         </p:nvSpPr>
@@ -17943,7 +18696,7 @@
       </p:sp>
       <p:sp>
         <p:nvSpPr>
-          <p:cNvPr id="15" name="Text 12"/>
+          <p:cNvPr id="16" name="Text 12"/>
           <p:cNvSpPr/>
           <p:nvPr/>
         </p:nvSpPr>
@@ -17982,7 +18735,46 @@
       </p:sp>
       <p:sp>
         <p:nvSpPr>
-          <p:cNvPr id="16" name="Text 13"/>
+          <p:cNvPr id="17" name="Text 13"/>
+          <p:cNvSpPr/>
+          <p:nvPr/>
+        </p:nvSpPr>
+        <p:spPr>
+          <a:xfrm>
+            <a:off x="1828800" y="6483096"/>
+            <a:ext cx="9756648" cy="274320"/>
+          </a:xfrm>
+          <a:prstGeom prst="rect">
+            <a:avLst/>
+          </a:prstGeom>
+          <a:noFill/>
+          <a:ln/>
+        </p:spPr>
+        <p:txBody>
+          <a:bodyPr wrap="square" lIns="0" tIns="0" rIns="0" bIns="0" rtlCol="0" anchor="ctr"/>
+          <a:lstStyle/>
+          <a:p>
+            <a:pPr algn="r" indent="0" marL="0">
+              <a:buNone/>
+            </a:pPr>
+            <a:r>
+              <a:rPr lang="en-US" sz="850" dirty="0">
+                <a:solidFill>
+                  <a:srgbClr val="56606E"/>
+                </a:solidFill>
+                <a:latin typeface="Calibri" pitchFamily="34" charset="0"/>
+                <a:ea typeface="Calibri" pitchFamily="34" charset="-122"/>
+                <a:cs typeface="Calibri" pitchFamily="34" charset="-120"/>
+              </a:rPr>
+              <a:t>PROYECTO MASA</a:t>
+            </a:r>
+            <a:endParaRPr lang="en-US" sz="850" dirty="0"/>
+          </a:p>
+        </p:txBody>
+      </p:sp>
+      <p:sp>
+        <p:nvSpPr>
+          <p:cNvPr id="18" name="Text 14"/>
           <p:cNvSpPr/>
           <p:nvPr/>
         </p:nvSpPr>
@@ -18051,9 +18843,33 @@
           <a:chExt cx="0" cy="0"/>
         </a:xfrm>
       </p:grpSpPr>
-      <p:sp>
-        <p:nvSpPr>
-          <p:cNvPr id="2" name="Text 0"/>
+      <p:pic>
+        <p:nvPicPr>
+          <p:cNvPr id="2" name="Image 0" descr="/home/user/Inversiones/panel_control_TOP_P1/besalco_logo.png">    </p:cNvPr>
+          <p:cNvPicPr>
+            <a:picLocks noChangeAspect="1"/>
+          </p:cNvPicPr>
+          <p:nvPr/>
+        </p:nvPicPr>
+        <p:blipFill>
+          <a:blip r:embed="rId1"/>
+          <a:stretch>
+            <a:fillRect/>
+          </a:stretch>
+        </p:blipFill>
+        <p:spPr>
+          <a:xfrm>
+            <a:off x="9116568" y="219456"/>
+            <a:ext cx="2770632" cy="594360"/>
+          </a:xfrm>
+          <a:prstGeom prst="rect">
+            <a:avLst/>
+          </a:prstGeom>
+        </p:spPr>
+      </p:pic>
+      <p:sp>
+        <p:nvSpPr>
+          <p:cNvPr id="3" name="Text 0"/>
           <p:cNvSpPr/>
           <p:nvPr/>
         </p:nvSpPr>
@@ -18092,7 +18908,7 @@
       </p:sp>
       <p:sp>
         <p:nvSpPr>
-          <p:cNvPr id="3" name="Text 1"/>
+          <p:cNvPr id="4" name="Text 1"/>
           <p:cNvSpPr/>
           <p:nvPr/>
         </p:nvSpPr>
@@ -18131,7 +18947,7 @@
       </p:sp>
       <p:sp>
         <p:nvSpPr>
-          <p:cNvPr id="4" name="Text 2"/>
+          <p:cNvPr id="5" name="Text 2"/>
           <p:cNvSpPr/>
           <p:nvPr/>
         </p:nvSpPr>
@@ -18170,7 +18986,7 @@
       </p:sp>
       <p:graphicFrame>
         <p:nvGraphicFramePr>
-          <p:cNvPr id="5" name="Chart 0" descr=""/>
+          <p:cNvPr id="6" name="Chart 0" descr=""/>
           <p:cNvGraphicFramePr/>
           <p:nvPr/>
         </p:nvGraphicFramePr>
@@ -18180,13 +18996,13 @@
         </p:xfrm>
         <a:graphic xmlns:a="http://schemas.openxmlformats.org/drawingml/2006/main">
           <a:graphicData uri="http://schemas.openxmlformats.org/drawingml/2006/chart">
-            <c:chart xmlns:c="http://schemas.openxmlformats.org/drawingml/2006/chart" r:id="rId1"/>
+            <c:chart xmlns:c="http://schemas.openxmlformats.org/drawingml/2006/chart" r:id="rId2"/>
           </a:graphicData>
         </a:graphic>
       </p:graphicFrame>
       <p:sp>
         <p:nvSpPr>
-          <p:cNvPr id="6" name="Shape 3"/>
+          <p:cNvPr id="7" name="Shape 3"/>
           <p:cNvSpPr/>
           <p:nvPr/>
         </p:nvSpPr>
@@ -18213,7 +19029,7 @@
       </p:sp>
       <p:sp>
         <p:nvSpPr>
-          <p:cNvPr id="7" name="Text 4"/>
+          <p:cNvPr id="8" name="Text 4"/>
           <p:cNvSpPr/>
           <p:nvPr/>
         </p:nvSpPr>
@@ -18252,7 +19068,7 @@
       </p:sp>
       <p:sp>
         <p:nvSpPr>
-          <p:cNvPr id="8" name="Shape 5"/>
+          <p:cNvPr id="9" name="Shape 5"/>
           <p:cNvSpPr/>
           <p:nvPr/>
         </p:nvSpPr>
@@ -18274,7 +19090,7 @@
       </p:sp>
       <p:sp>
         <p:nvSpPr>
-          <p:cNvPr id="9" name="Shape 6"/>
+          <p:cNvPr id="10" name="Shape 6"/>
           <p:cNvSpPr/>
           <p:nvPr/>
         </p:nvSpPr>
@@ -18294,7 +19110,7 @@
       </p:sp>
       <p:sp>
         <p:nvSpPr>
-          <p:cNvPr id="10" name="Text 7"/>
+          <p:cNvPr id="11" name="Text 7"/>
           <p:cNvSpPr/>
           <p:nvPr/>
         </p:nvSpPr>
@@ -18333,7 +19149,7 @@
       </p:sp>
       <p:sp>
         <p:nvSpPr>
-          <p:cNvPr id="11" name="Text 8"/>
+          <p:cNvPr id="12" name="Text 8"/>
           <p:cNvSpPr/>
           <p:nvPr/>
         </p:nvSpPr>
@@ -18372,7 +19188,7 @@
       </p:sp>
       <p:sp>
         <p:nvSpPr>
-          <p:cNvPr id="12" name="Text 9"/>
+          <p:cNvPr id="13" name="Text 9"/>
           <p:cNvSpPr/>
           <p:nvPr/>
         </p:nvSpPr>
@@ -18411,7 +19227,7 @@
       </p:sp>
       <p:sp>
         <p:nvSpPr>
-          <p:cNvPr id="13" name="Shape 10"/>
+          <p:cNvPr id="14" name="Shape 10"/>
           <p:cNvSpPr/>
           <p:nvPr/>
         </p:nvSpPr>
@@ -18433,7 +19249,7 @@
       </p:sp>
       <p:sp>
         <p:nvSpPr>
-          <p:cNvPr id="14" name="Shape 11"/>
+          <p:cNvPr id="15" name="Shape 11"/>
           <p:cNvSpPr/>
           <p:nvPr/>
         </p:nvSpPr>
@@ -18453,7 +19269,7 @@
       </p:sp>
       <p:sp>
         <p:nvSpPr>
-          <p:cNvPr id="15" name="Text 12"/>
+          <p:cNvPr id="16" name="Text 12"/>
           <p:cNvSpPr/>
           <p:nvPr/>
         </p:nvSpPr>
@@ -18492,7 +19308,7 @@
       </p:sp>
       <p:sp>
         <p:nvSpPr>
-          <p:cNvPr id="16" name="Text 13"/>
+          <p:cNvPr id="17" name="Text 13"/>
           <p:cNvSpPr/>
           <p:nvPr/>
         </p:nvSpPr>
@@ -18531,7 +19347,7 @@
       </p:sp>
       <p:sp>
         <p:nvSpPr>
-          <p:cNvPr id="17" name="Text 14"/>
+          <p:cNvPr id="18" name="Text 14"/>
           <p:cNvSpPr/>
           <p:nvPr/>
         </p:nvSpPr>
@@ -18570,7 +19386,7 @@
       </p:sp>
       <p:sp>
         <p:nvSpPr>
-          <p:cNvPr id="18" name="Shape 15"/>
+          <p:cNvPr id="19" name="Shape 15"/>
           <p:cNvSpPr/>
           <p:nvPr/>
         </p:nvSpPr>
@@ -18592,7 +19408,7 @@
       </p:sp>
       <p:sp>
         <p:nvSpPr>
-          <p:cNvPr id="19" name="Shape 16"/>
+          <p:cNvPr id="20" name="Shape 16"/>
           <p:cNvSpPr/>
           <p:nvPr/>
         </p:nvSpPr>
@@ -18612,7 +19428,7 @@
       </p:sp>
       <p:sp>
         <p:nvSpPr>
-          <p:cNvPr id="20" name="Text 17"/>
+          <p:cNvPr id="21" name="Text 17"/>
           <p:cNvSpPr/>
           <p:nvPr/>
         </p:nvSpPr>
@@ -18651,7 +19467,7 @@
       </p:sp>
       <p:sp>
         <p:nvSpPr>
-          <p:cNvPr id="21" name="Text 18"/>
+          <p:cNvPr id="22" name="Text 18"/>
           <p:cNvSpPr/>
           <p:nvPr/>
         </p:nvSpPr>
@@ -18690,7 +19506,7 @@
       </p:sp>
       <p:sp>
         <p:nvSpPr>
-          <p:cNvPr id="22" name="Shape 19"/>
+          <p:cNvPr id="23" name="Shape 19"/>
           <p:cNvSpPr/>
           <p:nvPr/>
         </p:nvSpPr>
@@ -18712,7 +19528,7 @@
       </p:sp>
       <p:sp>
         <p:nvSpPr>
-          <p:cNvPr id="23" name="Shape 20"/>
+          <p:cNvPr id="24" name="Shape 20"/>
           <p:cNvSpPr/>
           <p:nvPr/>
         </p:nvSpPr>
@@ -18732,7 +19548,7 @@
       </p:sp>
       <p:sp>
         <p:nvSpPr>
-          <p:cNvPr id="24" name="Text 21"/>
+          <p:cNvPr id="25" name="Text 21"/>
           <p:cNvSpPr/>
           <p:nvPr/>
         </p:nvSpPr>
@@ -18771,7 +19587,7 @@
       </p:sp>
       <p:sp>
         <p:nvSpPr>
-          <p:cNvPr id="25" name="Text 22"/>
+          <p:cNvPr id="26" name="Text 22"/>
           <p:cNvSpPr/>
           <p:nvPr/>
         </p:nvSpPr>
@@ -18810,7 +19626,7 @@
       </p:sp>
       <p:sp>
         <p:nvSpPr>
-          <p:cNvPr id="26" name="Text 23"/>
+          <p:cNvPr id="27" name="Text 23"/>
           <p:cNvSpPr/>
           <p:nvPr/>
         </p:nvSpPr>
@@ -18849,7 +19665,7 @@
       </p:sp>
       <p:sp>
         <p:nvSpPr>
-          <p:cNvPr id="27" name="Shape 24"/>
+          <p:cNvPr id="28" name="Shape 24"/>
           <p:cNvSpPr/>
           <p:nvPr/>
         </p:nvSpPr>
@@ -18871,7 +19687,7 @@
       </p:sp>
       <p:sp>
         <p:nvSpPr>
-          <p:cNvPr id="28" name="Shape 25"/>
+          <p:cNvPr id="29" name="Shape 25"/>
           <p:cNvSpPr/>
           <p:nvPr/>
         </p:nvSpPr>
@@ -18891,7 +19707,7 @@
       </p:sp>
       <p:sp>
         <p:nvSpPr>
-          <p:cNvPr id="29" name="Text 26"/>
+          <p:cNvPr id="30" name="Text 26"/>
           <p:cNvSpPr/>
           <p:nvPr/>
         </p:nvSpPr>
@@ -18930,7 +19746,7 @@
       </p:sp>
       <p:sp>
         <p:nvSpPr>
-          <p:cNvPr id="30" name="Text 27"/>
+          <p:cNvPr id="31" name="Text 27"/>
           <p:cNvSpPr/>
           <p:nvPr/>
         </p:nvSpPr>
@@ -18969,7 +19785,7 @@
       </p:sp>
       <p:sp>
         <p:nvSpPr>
-          <p:cNvPr id="31" name="Text 28"/>
+          <p:cNvPr id="32" name="Text 28"/>
           <p:cNvSpPr/>
           <p:nvPr/>
         </p:nvSpPr>
@@ -19008,7 +19824,7 @@
       </p:sp>
       <p:sp>
         <p:nvSpPr>
-          <p:cNvPr id="32" name="Text 29"/>
+          <p:cNvPr id="33" name="Text 29"/>
           <p:cNvSpPr/>
           <p:nvPr/>
         </p:nvSpPr>
@@ -19047,7 +19863,46 @@
       </p:sp>
       <p:sp>
         <p:nvSpPr>
-          <p:cNvPr id="33" name="Text 30"/>
+          <p:cNvPr id="34" name="Text 30"/>
+          <p:cNvSpPr/>
+          <p:nvPr/>
+        </p:nvSpPr>
+        <p:spPr>
+          <a:xfrm>
+            <a:off x="1828800" y="6483096"/>
+            <a:ext cx="9756648" cy="274320"/>
+          </a:xfrm>
+          <a:prstGeom prst="rect">
+            <a:avLst/>
+          </a:prstGeom>
+          <a:noFill/>
+          <a:ln/>
+        </p:spPr>
+        <p:txBody>
+          <a:bodyPr wrap="square" lIns="0" tIns="0" rIns="0" bIns="0" rtlCol="0" anchor="ctr"/>
+          <a:lstStyle/>
+          <a:p>
+            <a:pPr algn="r" indent="0" marL="0">
+              <a:buNone/>
+            </a:pPr>
+            <a:r>
+              <a:rPr lang="en-US" sz="850" dirty="0">
+                <a:solidFill>
+                  <a:srgbClr val="56606E"/>
+                </a:solidFill>
+                <a:latin typeface="Calibri" pitchFamily="34" charset="0"/>
+                <a:ea typeface="Calibri" pitchFamily="34" charset="-122"/>
+                <a:cs typeface="Calibri" pitchFamily="34" charset="-120"/>
+              </a:rPr>
+              <a:t>PROYECTO MASA</a:t>
+            </a:r>
+            <a:endParaRPr lang="en-US" sz="850" dirty="0"/>
+          </a:p>
+        </p:txBody>
+      </p:sp>
+      <p:sp>
+        <p:nvSpPr>
+          <p:cNvPr id="35" name="Text 31"/>
           <p:cNvSpPr/>
           <p:nvPr/>
         </p:nvSpPr>
@@ -19116,9 +19971,33 @@
           <a:chExt cx="0" cy="0"/>
         </a:xfrm>
       </p:grpSpPr>
-      <p:sp>
-        <p:nvSpPr>
-          <p:cNvPr id="2" name="Text 0"/>
+      <p:pic>
+        <p:nvPicPr>
+          <p:cNvPr id="2" name="Image 0" descr="/home/user/Inversiones/panel_control_TOP_P1/besalco_logo.png">    </p:cNvPr>
+          <p:cNvPicPr>
+            <a:picLocks noChangeAspect="1"/>
+          </p:cNvPicPr>
+          <p:nvPr/>
+        </p:nvPicPr>
+        <p:blipFill>
+          <a:blip r:embed="rId1"/>
+          <a:stretch>
+            <a:fillRect/>
+          </a:stretch>
+        </p:blipFill>
+        <p:spPr>
+          <a:xfrm>
+            <a:off x="9116568" y="219456"/>
+            <a:ext cx="2770632" cy="594360"/>
+          </a:xfrm>
+          <a:prstGeom prst="rect">
+            <a:avLst/>
+          </a:prstGeom>
+        </p:spPr>
+      </p:pic>
+      <p:sp>
+        <p:nvSpPr>
+          <p:cNvPr id="3" name="Text 0"/>
           <p:cNvSpPr/>
           <p:nvPr/>
         </p:nvSpPr>
@@ -19157,7 +20036,7 @@
       </p:sp>
       <p:sp>
         <p:nvSpPr>
-          <p:cNvPr id="3" name="Text 1"/>
+          <p:cNvPr id="4" name="Text 1"/>
           <p:cNvSpPr/>
           <p:nvPr/>
         </p:nvSpPr>
@@ -19196,7 +20075,7 @@
       </p:sp>
       <p:sp>
         <p:nvSpPr>
-          <p:cNvPr id="4" name="Text 2"/>
+          <p:cNvPr id="5" name="Text 2"/>
           <p:cNvSpPr/>
           <p:nvPr/>
         </p:nvSpPr>
@@ -19235,7 +20114,7 @@
       </p:sp>
       <p:graphicFrame>
         <p:nvGraphicFramePr>
-          <p:cNvPr id="5" name="Chart 0" descr=""/>
+          <p:cNvPr id="6" name="Chart 0" descr=""/>
           <p:cNvGraphicFramePr/>
           <p:nvPr/>
         </p:nvGraphicFramePr>
@@ -19245,13 +20124,13 @@
         </p:xfrm>
         <a:graphic xmlns:a="http://schemas.openxmlformats.org/drawingml/2006/main">
           <a:graphicData uri="http://schemas.openxmlformats.org/drawingml/2006/chart">
-            <c:chart xmlns:c="http://schemas.openxmlformats.org/drawingml/2006/chart" r:id="rId1"/>
+            <c:chart xmlns:c="http://schemas.openxmlformats.org/drawingml/2006/chart" r:id="rId2"/>
           </a:graphicData>
         </a:graphic>
       </p:graphicFrame>
       <p:sp>
         <p:nvSpPr>
-          <p:cNvPr id="6" name="Shape 3"/>
+          <p:cNvPr id="7" name="Shape 3"/>
           <p:cNvSpPr/>
           <p:nvPr/>
         </p:nvSpPr>
@@ -19273,7 +20152,7 @@
       </p:sp>
       <p:sp>
         <p:nvSpPr>
-          <p:cNvPr id="7" name="Text 4"/>
+          <p:cNvPr id="8" name="Text 4"/>
           <p:cNvSpPr/>
           <p:nvPr/>
         </p:nvSpPr>
@@ -19312,7 +20191,7 @@
       </p:sp>
       <p:graphicFrame>
         <p:nvGraphicFramePr>
-          <p:cNvPr id="8" name="Chart 1" descr=""/>
+          <p:cNvPr id="9" name="Chart 1" descr=""/>
           <p:cNvGraphicFramePr/>
           <p:nvPr/>
         </p:nvGraphicFramePr>
@@ -19322,13 +20201,13 @@
         </p:xfrm>
         <a:graphic xmlns:a="http://schemas.openxmlformats.org/drawingml/2006/main">
           <a:graphicData uri="http://schemas.openxmlformats.org/drawingml/2006/chart">
-            <c:chart xmlns:c="http://schemas.openxmlformats.org/drawingml/2006/chart" r:id="rId2"/>
+            <c:chart xmlns:c="http://schemas.openxmlformats.org/drawingml/2006/chart" r:id="rId3"/>
           </a:graphicData>
         </a:graphic>
       </p:graphicFrame>
       <p:sp>
         <p:nvSpPr>
-          <p:cNvPr id="9" name="Text 5"/>
+          <p:cNvPr id="10" name="Text 5"/>
           <p:cNvSpPr/>
           <p:nvPr/>
         </p:nvSpPr>
@@ -19384,7 +20263,7 @@
       </p:sp>
       <p:sp>
         <p:nvSpPr>
-          <p:cNvPr id="10" name="Shape 6"/>
+          <p:cNvPr id="11" name="Shape 6"/>
           <p:cNvSpPr/>
           <p:nvPr/>
         </p:nvSpPr>
@@ -19404,7 +20283,7 @@
       </p:sp>
       <p:sp>
         <p:nvSpPr>
-          <p:cNvPr id="11" name="Text 7"/>
+          <p:cNvPr id="12" name="Text 7"/>
           <p:cNvSpPr/>
           <p:nvPr/>
         </p:nvSpPr>
@@ -19443,7 +20322,7 @@
       </p:sp>
       <p:sp>
         <p:nvSpPr>
-          <p:cNvPr id="12" name="Text 8"/>
+          <p:cNvPr id="13" name="Text 8"/>
           <p:cNvSpPr/>
           <p:nvPr/>
         </p:nvSpPr>
@@ -19482,7 +20361,7 @@
       </p:sp>
       <p:sp>
         <p:nvSpPr>
-          <p:cNvPr id="13" name="Shape 9"/>
+          <p:cNvPr id="14" name="Shape 9"/>
           <p:cNvSpPr/>
           <p:nvPr/>
         </p:nvSpPr>
@@ -19502,7 +20381,7 @@
       </p:sp>
       <p:sp>
         <p:nvSpPr>
-          <p:cNvPr id="14" name="Text 10"/>
+          <p:cNvPr id="15" name="Text 10"/>
           <p:cNvSpPr/>
           <p:nvPr/>
         </p:nvSpPr>
@@ -19541,7 +20420,7 @@
       </p:sp>
       <p:sp>
         <p:nvSpPr>
-          <p:cNvPr id="15" name="Text 11"/>
+          <p:cNvPr id="16" name="Text 11"/>
           <p:cNvSpPr/>
           <p:nvPr/>
         </p:nvSpPr>
@@ -19580,7 +20459,7 @@
       </p:sp>
       <p:sp>
         <p:nvSpPr>
-          <p:cNvPr id="16" name="Shape 12"/>
+          <p:cNvPr id="17" name="Shape 12"/>
           <p:cNvSpPr/>
           <p:nvPr/>
         </p:nvSpPr>
@@ -19600,7 +20479,7 @@
       </p:sp>
       <p:sp>
         <p:nvSpPr>
-          <p:cNvPr id="17" name="Text 13"/>
+          <p:cNvPr id="18" name="Text 13"/>
           <p:cNvSpPr/>
           <p:nvPr/>
         </p:nvSpPr>
@@ -19639,7 +20518,7 @@
       </p:sp>
       <p:sp>
         <p:nvSpPr>
-          <p:cNvPr id="18" name="Text 14"/>
+          <p:cNvPr id="19" name="Text 14"/>
           <p:cNvSpPr/>
           <p:nvPr/>
         </p:nvSpPr>
@@ -19678,7 +20557,7 @@
       </p:sp>
       <p:sp>
         <p:nvSpPr>
-          <p:cNvPr id="19" name="Shape 15"/>
+          <p:cNvPr id="20" name="Shape 15"/>
           <p:cNvSpPr/>
           <p:nvPr/>
         </p:nvSpPr>
@@ -19701,7 +20580,7 @@
       </p:sp>
       <p:sp>
         <p:nvSpPr>
-          <p:cNvPr id="20" name="Text 16"/>
+          <p:cNvPr id="21" name="Text 16"/>
           <p:cNvSpPr/>
           <p:nvPr/>
         </p:nvSpPr>
@@ -19761,7 +20640,7 @@
       </p:sp>
       <p:sp>
         <p:nvSpPr>
-          <p:cNvPr id="21" name="Text 17"/>
+          <p:cNvPr id="22" name="Text 17"/>
           <p:cNvSpPr/>
           <p:nvPr/>
         </p:nvSpPr>
@@ -19800,7 +20679,46 @@
       </p:sp>
       <p:sp>
         <p:nvSpPr>
-          <p:cNvPr id="22" name="Text 18"/>
+          <p:cNvPr id="23" name="Text 18"/>
+          <p:cNvSpPr/>
+          <p:nvPr/>
+        </p:nvSpPr>
+        <p:spPr>
+          <a:xfrm>
+            <a:off x="1828800" y="6483096"/>
+            <a:ext cx="9756648" cy="274320"/>
+          </a:xfrm>
+          <a:prstGeom prst="rect">
+            <a:avLst/>
+          </a:prstGeom>
+          <a:noFill/>
+          <a:ln/>
+        </p:spPr>
+        <p:txBody>
+          <a:bodyPr wrap="square" lIns="0" tIns="0" rIns="0" bIns="0" rtlCol="0" anchor="ctr"/>
+          <a:lstStyle/>
+          <a:p>
+            <a:pPr algn="r" indent="0" marL="0">
+              <a:buNone/>
+            </a:pPr>
+            <a:r>
+              <a:rPr lang="en-US" sz="850" dirty="0">
+                <a:solidFill>
+                  <a:srgbClr val="6E8CA8"/>
+                </a:solidFill>
+                <a:latin typeface="Calibri" pitchFamily="34" charset="0"/>
+                <a:ea typeface="Calibri" pitchFamily="34" charset="-122"/>
+                <a:cs typeface="Calibri" pitchFamily="34" charset="-120"/>
+              </a:rPr>
+              <a:t>PROYECTO MASA</a:t>
+            </a:r>
+            <a:endParaRPr lang="en-US" sz="850" dirty="0"/>
+          </a:p>
+        </p:txBody>
+      </p:sp>
+      <p:sp>
+        <p:nvSpPr>
+          <p:cNvPr id="24" name="Text 19"/>
           <p:cNvSpPr/>
           <p:nvPr/>
         </p:nvSpPr>
@@ -19869,9 +20787,33 @@
           <a:chExt cx="0" cy="0"/>
         </a:xfrm>
       </p:grpSpPr>
-      <p:sp>
-        <p:nvSpPr>
-          <p:cNvPr id="2" name="Shape 0"/>
+      <p:pic>
+        <p:nvPicPr>
+          <p:cNvPr id="2" name="Image 0" descr="/home/user/Inversiones/panel_control_TOP_P1/besalco_logo.png">    </p:cNvPr>
+          <p:cNvPicPr>
+            <a:picLocks noChangeAspect="1"/>
+          </p:cNvPicPr>
+          <p:nvPr/>
+        </p:nvPicPr>
+        <p:blipFill>
+          <a:blip r:embed="rId1"/>
+          <a:stretch>
+            <a:fillRect/>
+          </a:stretch>
+        </p:blipFill>
+        <p:spPr>
+          <a:xfrm>
+            <a:off x="8357616" y="420624"/>
+            <a:ext cx="3547872" cy="768096"/>
+          </a:xfrm>
+          <a:prstGeom prst="rect">
+            <a:avLst/>
+          </a:prstGeom>
+        </p:spPr>
+      </p:pic>
+      <p:sp>
+        <p:nvSpPr>
+          <p:cNvPr id="3" name="Shape 0"/>
           <p:cNvSpPr/>
           <p:nvPr/>
         </p:nvSpPr>
@@ -19891,7 +20833,7 @@
       </p:sp>
       <p:sp>
         <p:nvSpPr>
-          <p:cNvPr id="3" name="Text 1"/>
+          <p:cNvPr id="4" name="Text 1"/>
           <p:cNvSpPr/>
           <p:nvPr/>
         </p:nvSpPr>
@@ -19930,7 +20872,7 @@
       </p:sp>
       <p:sp>
         <p:nvSpPr>
-          <p:cNvPr id="4" name="Text 2"/>
+          <p:cNvPr id="5" name="Text 2"/>
           <p:cNvSpPr/>
           <p:nvPr/>
         </p:nvSpPr>
@@ -19969,7 +20911,7 @@
       </p:sp>
       <p:sp>
         <p:nvSpPr>
-          <p:cNvPr id="5" name="Shape 3"/>
+          <p:cNvPr id="6" name="Shape 3"/>
           <p:cNvSpPr/>
           <p:nvPr/>
         </p:nvSpPr>
@@ -19991,7 +20933,7 @@
       </p:sp>
       <p:sp>
         <p:nvSpPr>
-          <p:cNvPr id="6" name="Text 4"/>
+          <p:cNvPr id="7" name="Text 4"/>
           <p:cNvSpPr/>
           <p:nvPr/>
         </p:nvSpPr>
@@ -20030,7 +20972,7 @@
       </p:sp>
       <p:sp>
         <p:nvSpPr>
-          <p:cNvPr id="7" name="Text 5"/>
+          <p:cNvPr id="8" name="Text 5"/>
           <p:cNvSpPr/>
           <p:nvPr/>
         </p:nvSpPr>
@@ -20069,7 +21011,7 @@
       </p:sp>
       <p:sp>
         <p:nvSpPr>
-          <p:cNvPr id="8" name="Text 6"/>
+          <p:cNvPr id="9" name="Text 6"/>
           <p:cNvSpPr/>
           <p:nvPr/>
         </p:nvSpPr>
@@ -20111,7 +21053,7 @@
       </p:sp>
       <p:sp>
         <p:nvSpPr>
-          <p:cNvPr id="9" name="Shape 7"/>
+          <p:cNvPr id="10" name="Shape 7"/>
           <p:cNvSpPr/>
           <p:nvPr/>
         </p:nvSpPr>
@@ -20133,7 +21075,7 @@
       </p:sp>
       <p:sp>
         <p:nvSpPr>
-          <p:cNvPr id="10" name="Text 8"/>
+          <p:cNvPr id="11" name="Text 8"/>
           <p:cNvSpPr/>
           <p:nvPr/>
         </p:nvSpPr>
@@ -20172,7 +21114,7 @@
       </p:sp>
       <p:sp>
         <p:nvSpPr>
-          <p:cNvPr id="11" name="Text 9"/>
+          <p:cNvPr id="12" name="Text 9"/>
           <p:cNvSpPr/>
           <p:nvPr/>
         </p:nvSpPr>
@@ -20211,7 +21153,7 @@
       </p:sp>
       <p:sp>
         <p:nvSpPr>
-          <p:cNvPr id="12" name="Text 10"/>
+          <p:cNvPr id="13" name="Text 10"/>
           <p:cNvSpPr/>
           <p:nvPr/>
         </p:nvSpPr>
@@ -20253,7 +21195,7 @@
       </p:sp>
       <p:sp>
         <p:nvSpPr>
-          <p:cNvPr id="13" name="Shape 11"/>
+          <p:cNvPr id="14" name="Shape 11"/>
           <p:cNvSpPr/>
           <p:nvPr/>
         </p:nvSpPr>
@@ -20275,7 +21217,7 @@
       </p:sp>
       <p:sp>
         <p:nvSpPr>
-          <p:cNvPr id="14" name="Text 12"/>
+          <p:cNvPr id="15" name="Text 12"/>
           <p:cNvSpPr/>
           <p:nvPr/>
         </p:nvSpPr>
@@ -20314,7 +21256,7 @@
       </p:sp>
       <p:sp>
         <p:nvSpPr>
-          <p:cNvPr id="15" name="Text 13"/>
+          <p:cNvPr id="16" name="Text 13"/>
           <p:cNvSpPr/>
           <p:nvPr/>
         </p:nvSpPr>
@@ -20353,7 +21295,7 @@
       </p:sp>
       <p:sp>
         <p:nvSpPr>
-          <p:cNvPr id="16" name="Text 14"/>
+          <p:cNvPr id="17" name="Text 14"/>
           <p:cNvSpPr/>
           <p:nvPr/>
         </p:nvSpPr>
@@ -20395,7 +21337,7 @@
       </p:sp>
       <p:sp>
         <p:nvSpPr>
-          <p:cNvPr id="17" name="Shape 15"/>
+          <p:cNvPr id="18" name="Shape 15"/>
           <p:cNvSpPr/>
           <p:nvPr/>
         </p:nvSpPr>
@@ -20417,7 +21359,7 @@
       </p:sp>
       <p:sp>
         <p:nvSpPr>
-          <p:cNvPr id="18" name="Text 16"/>
+          <p:cNvPr id="19" name="Text 16"/>
           <p:cNvSpPr/>
           <p:nvPr/>
         </p:nvSpPr>
@@ -20456,7 +21398,7 @@
       </p:sp>
       <p:sp>
         <p:nvSpPr>
-          <p:cNvPr id="19" name="Text 17"/>
+          <p:cNvPr id="20" name="Text 17"/>
           <p:cNvSpPr/>
           <p:nvPr/>
         </p:nvSpPr>
@@ -20495,7 +21437,7 @@
       </p:sp>
       <p:sp>
         <p:nvSpPr>
-          <p:cNvPr id="20" name="Text 18"/>
+          <p:cNvPr id="21" name="Text 18"/>
           <p:cNvSpPr/>
           <p:nvPr/>
         </p:nvSpPr>
@@ -20537,7 +21479,7 @@
       </p:sp>
       <p:sp>
         <p:nvSpPr>
-          <p:cNvPr id="21" name="Text 19"/>
+          <p:cNvPr id="22" name="Text 19"/>
           <p:cNvSpPr/>
           <p:nvPr/>
         </p:nvSpPr>
@@ -20576,7 +21518,46 @@
       </p:sp>
       <p:sp>
         <p:nvSpPr>
-          <p:cNvPr id="22" name="Text 20"/>
+          <p:cNvPr id="23" name="Text 20"/>
+          <p:cNvSpPr/>
+          <p:nvPr/>
+        </p:nvSpPr>
+        <p:spPr>
+          <a:xfrm>
+            <a:off x="1828800" y="6483096"/>
+            <a:ext cx="9756648" cy="274320"/>
+          </a:xfrm>
+          <a:prstGeom prst="rect">
+            <a:avLst/>
+          </a:prstGeom>
+          <a:noFill/>
+          <a:ln/>
+        </p:spPr>
+        <p:txBody>
+          <a:bodyPr wrap="square" lIns="0" tIns="0" rIns="0" bIns="0" rtlCol="0" anchor="ctr"/>
+          <a:lstStyle/>
+          <a:p>
+            <a:pPr algn="r" indent="0" marL="0">
+              <a:buNone/>
+            </a:pPr>
+            <a:r>
+              <a:rPr lang="en-US" sz="850" dirty="0">
+                <a:solidFill>
+                  <a:srgbClr val="6E8CA8"/>
+                </a:solidFill>
+                <a:latin typeface="Calibri" pitchFamily="34" charset="0"/>
+                <a:ea typeface="Calibri" pitchFamily="34" charset="-122"/>
+                <a:cs typeface="Calibri" pitchFamily="34" charset="-120"/>
+              </a:rPr>
+              <a:t>PROYECTO MASA</a:t>
+            </a:r>
+            <a:endParaRPr lang="en-US" sz="850" dirty="0"/>
+          </a:p>
+        </p:txBody>
+      </p:sp>
+      <p:sp>
+        <p:nvSpPr>
+          <p:cNvPr id="24" name="Text 21"/>
           <p:cNvSpPr/>
           <p:nvPr/>
         </p:nvSpPr>
@@ -20645,9 +21626,33 @@
           <a:chExt cx="0" cy="0"/>
         </a:xfrm>
       </p:grpSpPr>
-      <p:sp>
-        <p:nvSpPr>
-          <p:cNvPr id="2" name="Shape 0"/>
+      <p:pic>
+        <p:nvPicPr>
+          <p:cNvPr id="2" name="Image 0" descr="/home/user/Inversiones/panel_control_TOP_P1/besalco_logo.png">    </p:cNvPr>
+          <p:cNvPicPr>
+            <a:picLocks noChangeAspect="1"/>
+          </p:cNvPicPr>
+          <p:nvPr/>
+        </p:nvPicPr>
+        <p:blipFill>
+          <a:blip r:embed="rId1"/>
+          <a:stretch>
+            <a:fillRect/>
+          </a:stretch>
+        </p:blipFill>
+        <p:spPr>
+          <a:xfrm>
+            <a:off x="8357616" y="420624"/>
+            <a:ext cx="3547872" cy="768096"/>
+          </a:xfrm>
+          <a:prstGeom prst="rect">
+            <a:avLst/>
+          </a:prstGeom>
+        </p:spPr>
+      </p:pic>
+      <p:sp>
+        <p:nvSpPr>
+          <p:cNvPr id="3" name="Shape 0"/>
           <p:cNvSpPr/>
           <p:nvPr/>
         </p:nvSpPr>
@@ -20667,7 +21672,7 @@
       </p:sp>
       <p:sp>
         <p:nvSpPr>
-          <p:cNvPr id="3" name="Shape 1"/>
+          <p:cNvPr id="4" name="Shape 1"/>
           <p:cNvSpPr/>
           <p:nvPr/>
         </p:nvSpPr>
@@ -20687,7 +21692,7 @@
       </p:sp>
       <p:sp>
         <p:nvSpPr>
-          <p:cNvPr id="4" name="Shape 2"/>
+          <p:cNvPr id="5" name="Shape 2"/>
           <p:cNvSpPr/>
           <p:nvPr/>
         </p:nvSpPr>
@@ -20707,7 +21712,7 @@
       </p:sp>
       <p:sp>
         <p:nvSpPr>
-          <p:cNvPr id="5" name="Text 3"/>
+          <p:cNvPr id="6" name="Text 3"/>
           <p:cNvSpPr/>
           <p:nvPr/>
         </p:nvSpPr>
@@ -20746,7 +21751,7 @@
       </p:sp>
       <p:sp>
         <p:nvSpPr>
-          <p:cNvPr id="6" name="Text 4"/>
+          <p:cNvPr id="7" name="Text 4"/>
           <p:cNvSpPr/>
           <p:nvPr/>
         </p:nvSpPr>
@@ -20785,7 +21790,7 @@
       </p:sp>
       <p:sp>
         <p:nvSpPr>
-          <p:cNvPr id="7" name="Text 5"/>
+          <p:cNvPr id="8" name="Text 5"/>
           <p:cNvSpPr/>
           <p:nvPr/>
         </p:nvSpPr>
@@ -20824,7 +21829,7 @@
       </p:sp>
       <p:sp>
         <p:nvSpPr>
-          <p:cNvPr id="8" name="Text 6"/>
+          <p:cNvPr id="9" name="Text 6"/>
           <p:cNvSpPr/>
           <p:nvPr/>
         </p:nvSpPr>
@@ -20866,7 +21871,7 @@
       </p:sp>
       <p:sp>
         <p:nvSpPr>
-          <p:cNvPr id="9" name="Text 7"/>
+          <p:cNvPr id="10" name="Text 7"/>
           <p:cNvSpPr/>
           <p:nvPr/>
         </p:nvSpPr>
@@ -20905,7 +21910,7 @@
       </p:sp>
       <p:sp>
         <p:nvSpPr>
-          <p:cNvPr id="10" name="Text 8"/>
+          <p:cNvPr id="11" name="Text 8"/>
           <p:cNvSpPr/>
           <p:nvPr/>
         </p:nvSpPr>
@@ -20944,7 +21949,7 @@
       </p:sp>
       <p:sp>
         <p:nvSpPr>
-          <p:cNvPr id="11" name="Text 9"/>
+          <p:cNvPr id="12" name="Text 9"/>
           <p:cNvSpPr/>
           <p:nvPr/>
         </p:nvSpPr>
@@ -20983,7 +21988,7 @@
       </p:sp>
       <p:sp>
         <p:nvSpPr>
-          <p:cNvPr id="12" name="Text 10"/>
+          <p:cNvPr id="13" name="Text 10"/>
           <p:cNvSpPr/>
           <p:nvPr/>
         </p:nvSpPr>
@@ -21022,7 +22027,7 @@
       </p:sp>
       <p:sp>
         <p:nvSpPr>
-          <p:cNvPr id="13" name="Text 11"/>
+          <p:cNvPr id="14" name="Text 11"/>
           <p:cNvSpPr/>
           <p:nvPr/>
         </p:nvSpPr>
@@ -21061,7 +22066,7 @@
       </p:sp>
       <p:sp>
         <p:nvSpPr>
-          <p:cNvPr id="14" name="Text 12"/>
+          <p:cNvPr id="15" name="Text 12"/>
           <p:cNvSpPr/>
           <p:nvPr/>
         </p:nvSpPr>
@@ -21100,7 +22105,7 @@
       </p:sp>
       <p:sp>
         <p:nvSpPr>
-          <p:cNvPr id="15" name="Text 13"/>
+          <p:cNvPr id="16" name="Text 13"/>
           <p:cNvSpPr/>
           <p:nvPr/>
         </p:nvSpPr>
@@ -21139,7 +22144,7 @@
       </p:sp>
       <p:sp>
         <p:nvSpPr>
-          <p:cNvPr id="16" name="Text 14"/>
+          <p:cNvPr id="17" name="Text 14"/>
           <p:cNvSpPr/>
           <p:nvPr/>
         </p:nvSpPr>
@@ -21178,7 +22183,7 @@
       </p:sp>
       <p:sp>
         <p:nvSpPr>
-          <p:cNvPr id="17" name="Text 15"/>
+          <p:cNvPr id="18" name="Text 15"/>
           <p:cNvSpPr/>
           <p:nvPr/>
         </p:nvSpPr>
@@ -21217,7 +22222,7 @@
       </p:sp>
       <p:sp>
         <p:nvSpPr>
-          <p:cNvPr id="18" name="Text 16"/>
+          <p:cNvPr id="19" name="Text 16"/>
           <p:cNvSpPr/>
           <p:nvPr/>
         </p:nvSpPr>
@@ -21256,7 +22261,7 @@
       </p:sp>
       <p:sp>
         <p:nvSpPr>
-          <p:cNvPr id="19" name="Text 17"/>
+          <p:cNvPr id="20" name="Text 17"/>
           <p:cNvSpPr/>
           <p:nvPr/>
         </p:nvSpPr>
@@ -21325,9 +22330,33 @@
           <a:chExt cx="0" cy="0"/>
         </a:xfrm>
       </p:grpSpPr>
-      <p:sp>
-        <p:nvSpPr>
-          <p:cNvPr id="2" name="Text 0"/>
+      <p:pic>
+        <p:nvPicPr>
+          <p:cNvPr id="2" name="Image 0" descr="/home/user/Inversiones/panel_control_TOP_P1/besalco_logo.png">    </p:cNvPr>
+          <p:cNvPicPr>
+            <a:picLocks noChangeAspect="1"/>
+          </p:cNvPicPr>
+          <p:nvPr/>
+        </p:nvPicPr>
+        <p:blipFill>
+          <a:blip r:embed="rId1"/>
+          <a:stretch>
+            <a:fillRect/>
+          </a:stretch>
+        </p:blipFill>
+        <p:spPr>
+          <a:xfrm>
+            <a:off x="9116568" y="219456"/>
+            <a:ext cx="2770632" cy="594360"/>
+          </a:xfrm>
+          <a:prstGeom prst="rect">
+            <a:avLst/>
+          </a:prstGeom>
+        </p:spPr>
+      </p:pic>
+      <p:sp>
+        <p:nvSpPr>
+          <p:cNvPr id="3" name="Text 0"/>
           <p:cNvSpPr/>
           <p:nvPr/>
         </p:nvSpPr>
@@ -21366,7 +22395,7 @@
       </p:sp>
       <p:sp>
         <p:nvSpPr>
-          <p:cNvPr id="3" name="Text 1"/>
+          <p:cNvPr id="4" name="Text 1"/>
           <p:cNvSpPr/>
           <p:nvPr/>
         </p:nvSpPr>
@@ -21405,7 +22434,7 @@
       </p:sp>
       <p:sp>
         <p:nvSpPr>
-          <p:cNvPr id="4" name="Shape 2"/>
+          <p:cNvPr id="5" name="Shape 2"/>
           <p:cNvSpPr/>
           <p:nvPr/>
         </p:nvSpPr>
@@ -21439,7 +22468,7 @@
       </p:sp>
       <p:sp>
         <p:nvSpPr>
-          <p:cNvPr id="5" name="Shape 3"/>
+          <p:cNvPr id="6" name="Shape 3"/>
           <p:cNvSpPr/>
           <p:nvPr/>
         </p:nvSpPr>
@@ -21459,7 +22488,7 @@
       </p:sp>
       <p:sp>
         <p:nvSpPr>
-          <p:cNvPr id="6" name="Text 4"/>
+          <p:cNvPr id="7" name="Text 4"/>
           <p:cNvSpPr/>
           <p:nvPr/>
         </p:nvSpPr>
@@ -21498,7 +22527,7 @@
       </p:sp>
       <p:sp>
         <p:nvSpPr>
-          <p:cNvPr id="7" name="Text 5"/>
+          <p:cNvPr id="8" name="Text 5"/>
           <p:cNvSpPr/>
           <p:nvPr/>
         </p:nvSpPr>
@@ -21537,7 +22566,7 @@
       </p:sp>
       <p:sp>
         <p:nvSpPr>
-          <p:cNvPr id="8" name="Text 6"/>
+          <p:cNvPr id="9" name="Text 6"/>
           <p:cNvSpPr/>
           <p:nvPr/>
         </p:nvSpPr>
@@ -21576,7 +22605,7 @@
       </p:sp>
       <p:sp>
         <p:nvSpPr>
-          <p:cNvPr id="9" name="Text 7"/>
+          <p:cNvPr id="10" name="Text 7"/>
           <p:cNvSpPr/>
           <p:nvPr/>
         </p:nvSpPr>
@@ -21618,7 +22647,7 @@
       </p:sp>
       <p:sp>
         <p:nvSpPr>
-          <p:cNvPr id="10" name="Shape 8"/>
+          <p:cNvPr id="11" name="Shape 8"/>
           <p:cNvSpPr/>
           <p:nvPr/>
         </p:nvSpPr>
@@ -21652,7 +22681,7 @@
       </p:sp>
       <p:sp>
         <p:nvSpPr>
-          <p:cNvPr id="11" name="Shape 9"/>
+          <p:cNvPr id="12" name="Shape 9"/>
           <p:cNvSpPr/>
           <p:nvPr/>
         </p:nvSpPr>
@@ -21672,7 +22701,7 @@
       </p:sp>
       <p:sp>
         <p:nvSpPr>
-          <p:cNvPr id="12" name="Text 10"/>
+          <p:cNvPr id="13" name="Text 10"/>
           <p:cNvSpPr/>
           <p:nvPr/>
         </p:nvSpPr>
@@ -21711,7 +22740,7 @@
       </p:sp>
       <p:sp>
         <p:nvSpPr>
-          <p:cNvPr id="13" name="Text 11"/>
+          <p:cNvPr id="14" name="Text 11"/>
           <p:cNvSpPr/>
           <p:nvPr/>
         </p:nvSpPr>
@@ -21750,7 +22779,7 @@
       </p:sp>
       <p:sp>
         <p:nvSpPr>
-          <p:cNvPr id="14" name="Text 12"/>
+          <p:cNvPr id="15" name="Text 12"/>
           <p:cNvSpPr/>
           <p:nvPr/>
         </p:nvSpPr>
@@ -21789,7 +22818,7 @@
       </p:sp>
       <p:sp>
         <p:nvSpPr>
-          <p:cNvPr id="15" name="Text 13"/>
+          <p:cNvPr id="16" name="Text 13"/>
           <p:cNvSpPr/>
           <p:nvPr/>
         </p:nvSpPr>
@@ -21831,7 +22860,7 @@
       </p:sp>
       <p:sp>
         <p:nvSpPr>
-          <p:cNvPr id="16" name="Shape 14"/>
+          <p:cNvPr id="17" name="Shape 14"/>
           <p:cNvSpPr/>
           <p:nvPr/>
         </p:nvSpPr>
@@ -21865,7 +22894,7 @@
       </p:sp>
       <p:sp>
         <p:nvSpPr>
-          <p:cNvPr id="17" name="Shape 15"/>
+          <p:cNvPr id="18" name="Shape 15"/>
           <p:cNvSpPr/>
           <p:nvPr/>
         </p:nvSpPr>
@@ -21885,7 +22914,7 @@
       </p:sp>
       <p:sp>
         <p:nvSpPr>
-          <p:cNvPr id="18" name="Text 16"/>
+          <p:cNvPr id="19" name="Text 16"/>
           <p:cNvSpPr/>
           <p:nvPr/>
         </p:nvSpPr>
@@ -21924,7 +22953,7 @@
       </p:sp>
       <p:sp>
         <p:nvSpPr>
-          <p:cNvPr id="19" name="Text 17"/>
+          <p:cNvPr id="20" name="Text 17"/>
           <p:cNvSpPr/>
           <p:nvPr/>
         </p:nvSpPr>
@@ -21963,7 +22992,7 @@
       </p:sp>
       <p:sp>
         <p:nvSpPr>
-          <p:cNvPr id="20" name="Text 18"/>
+          <p:cNvPr id="21" name="Text 18"/>
           <p:cNvSpPr/>
           <p:nvPr/>
         </p:nvSpPr>
@@ -22002,7 +23031,7 @@
       </p:sp>
       <p:sp>
         <p:nvSpPr>
-          <p:cNvPr id="21" name="Text 19"/>
+          <p:cNvPr id="22" name="Text 19"/>
           <p:cNvSpPr/>
           <p:nvPr/>
         </p:nvSpPr>
@@ -22044,7 +23073,7 @@
       </p:sp>
       <p:sp>
         <p:nvSpPr>
-          <p:cNvPr id="22" name="Shape 20"/>
+          <p:cNvPr id="23" name="Shape 20"/>
           <p:cNvSpPr/>
           <p:nvPr/>
         </p:nvSpPr>
@@ -22078,7 +23107,7 @@
       </p:sp>
       <p:sp>
         <p:nvSpPr>
-          <p:cNvPr id="23" name="Shape 21"/>
+          <p:cNvPr id="24" name="Shape 21"/>
           <p:cNvSpPr/>
           <p:nvPr/>
         </p:nvSpPr>
@@ -22098,7 +23127,7 @@
       </p:sp>
       <p:sp>
         <p:nvSpPr>
-          <p:cNvPr id="24" name="Text 22"/>
+          <p:cNvPr id="25" name="Text 22"/>
           <p:cNvSpPr/>
           <p:nvPr/>
         </p:nvSpPr>
@@ -22137,7 +23166,7 @@
       </p:sp>
       <p:sp>
         <p:nvSpPr>
-          <p:cNvPr id="25" name="Text 23"/>
+          <p:cNvPr id="26" name="Text 23"/>
           <p:cNvSpPr/>
           <p:nvPr/>
         </p:nvSpPr>
@@ -22176,7 +23205,7 @@
       </p:sp>
       <p:sp>
         <p:nvSpPr>
-          <p:cNvPr id="26" name="Text 24"/>
+          <p:cNvPr id="27" name="Text 24"/>
           <p:cNvSpPr/>
           <p:nvPr/>
         </p:nvSpPr>
@@ -22215,7 +23244,7 @@
       </p:sp>
       <p:sp>
         <p:nvSpPr>
-          <p:cNvPr id="27" name="Text 25"/>
+          <p:cNvPr id="28" name="Text 25"/>
           <p:cNvSpPr/>
           <p:nvPr/>
         </p:nvSpPr>
@@ -22257,7 +23286,7 @@
       </p:sp>
       <p:sp>
         <p:nvSpPr>
-          <p:cNvPr id="28" name="Shape 26"/>
+          <p:cNvPr id="29" name="Shape 26"/>
           <p:cNvSpPr/>
           <p:nvPr/>
         </p:nvSpPr>
@@ -22279,7 +23308,7 @@
       </p:sp>
       <p:sp>
         <p:nvSpPr>
-          <p:cNvPr id="29" name="Text 27"/>
+          <p:cNvPr id="30" name="Text 27"/>
           <p:cNvSpPr/>
           <p:nvPr/>
         </p:nvSpPr>
@@ -22318,7 +23347,7 @@
       </p:sp>
       <p:sp>
         <p:nvSpPr>
-          <p:cNvPr id="30" name="Shape 28"/>
+          <p:cNvPr id="31" name="Shape 28"/>
           <p:cNvSpPr/>
           <p:nvPr/>
         </p:nvSpPr>
@@ -22338,7 +23367,7 @@
       </p:sp>
       <p:sp>
         <p:nvSpPr>
-          <p:cNvPr id="31" name="Text 29"/>
+          <p:cNvPr id="32" name="Text 29"/>
           <p:cNvSpPr/>
           <p:nvPr/>
         </p:nvSpPr>
@@ -22397,7 +23426,7 @@
       </p:sp>
       <p:sp>
         <p:nvSpPr>
-          <p:cNvPr id="32" name="Shape 30"/>
+          <p:cNvPr id="33" name="Shape 30"/>
           <p:cNvSpPr/>
           <p:nvPr/>
         </p:nvSpPr>
@@ -22417,7 +23446,7 @@
       </p:sp>
       <p:sp>
         <p:nvSpPr>
-          <p:cNvPr id="33" name="Text 31"/>
+          <p:cNvPr id="34" name="Text 31"/>
           <p:cNvSpPr/>
           <p:nvPr/>
         </p:nvSpPr>
@@ -22476,7 +23505,7 @@
       </p:sp>
       <p:sp>
         <p:nvSpPr>
-          <p:cNvPr id="34" name="Shape 32"/>
+          <p:cNvPr id="35" name="Shape 32"/>
           <p:cNvSpPr/>
           <p:nvPr/>
         </p:nvSpPr>
@@ -22496,7 +23525,7 @@
       </p:sp>
       <p:sp>
         <p:nvSpPr>
-          <p:cNvPr id="35" name="Text 33"/>
+          <p:cNvPr id="36" name="Text 33"/>
           <p:cNvSpPr/>
           <p:nvPr/>
         </p:nvSpPr>
@@ -22555,7 +23584,7 @@
       </p:sp>
       <p:sp>
         <p:nvSpPr>
-          <p:cNvPr id="36" name="Shape 34"/>
+          <p:cNvPr id="37" name="Shape 34"/>
           <p:cNvSpPr/>
           <p:nvPr/>
         </p:nvSpPr>
@@ -22575,7 +23604,7 @@
       </p:sp>
       <p:sp>
         <p:nvSpPr>
-          <p:cNvPr id="37" name="Text 35"/>
+          <p:cNvPr id="38" name="Text 35"/>
           <p:cNvSpPr/>
           <p:nvPr/>
         </p:nvSpPr>
@@ -22634,7 +23663,7 @@
       </p:sp>
       <p:sp>
         <p:nvSpPr>
-          <p:cNvPr id="38" name="Text 36"/>
+          <p:cNvPr id="39" name="Text 36"/>
           <p:cNvSpPr/>
           <p:nvPr/>
         </p:nvSpPr>
@@ -22673,7 +23702,46 @@
       </p:sp>
       <p:sp>
         <p:nvSpPr>
-          <p:cNvPr id="39" name="Text 37"/>
+          <p:cNvPr id="40" name="Text 37"/>
+          <p:cNvSpPr/>
+          <p:nvPr/>
+        </p:nvSpPr>
+        <p:spPr>
+          <a:xfrm>
+            <a:off x="1828800" y="6483096"/>
+            <a:ext cx="9756648" cy="274320"/>
+          </a:xfrm>
+          <a:prstGeom prst="rect">
+            <a:avLst/>
+          </a:prstGeom>
+          <a:noFill/>
+          <a:ln/>
+        </p:spPr>
+        <p:txBody>
+          <a:bodyPr wrap="square" lIns="0" tIns="0" rIns="0" bIns="0" rtlCol="0" anchor="ctr"/>
+          <a:lstStyle/>
+          <a:p>
+            <a:pPr algn="r" indent="0" marL="0">
+              <a:buNone/>
+            </a:pPr>
+            <a:r>
+              <a:rPr lang="en-US" sz="850" dirty="0">
+                <a:solidFill>
+                  <a:srgbClr val="56606E"/>
+                </a:solidFill>
+                <a:latin typeface="Calibri" pitchFamily="34" charset="0"/>
+                <a:ea typeface="Calibri" pitchFamily="34" charset="-122"/>
+                <a:cs typeface="Calibri" pitchFamily="34" charset="-120"/>
+              </a:rPr>
+              <a:t>PROYECTO DESALADORA</a:t>
+            </a:r>
+            <a:endParaRPr lang="en-US" sz="850" dirty="0"/>
+          </a:p>
+        </p:txBody>
+      </p:sp>
+      <p:sp>
+        <p:nvSpPr>
+          <p:cNvPr id="41" name="Text 38"/>
           <p:cNvSpPr/>
           <p:nvPr/>
         </p:nvSpPr>

--- a/panel_control_TOP_P1/Panel_Control_TOP_P1.pptx
+++ b/panel_control_TOP_P1/Panel_Control_TOP_P1.pptx
@@ -2281,17 +2281,14 @@
           </c:dLbls>
           <c:cat>
             <c:multiLvlStrRef>
-              <c:f>Sheet1!$A$2:$A$4</c:f>
+              <c:f>Sheet1!$A$2:$A$3</c:f>
               <c:multiLvlStrCache>
-                <c:ptCount val="3"/>
+                <c:ptCount val="2"/>
                 <c:lvl>
                   <c:pt idx="0">
                     <c:v>Operable (C2)</c:v>
                   </c:pt>
                   <c:pt idx="1">
-                    <c:v>Componente (C2)</c:v>
-                  </c:pt>
-                  <c:pt idx="2">
                     <c:v>Facility (C1)</c:v>
                   </c:pt>
                 </c:lvl>
@@ -2300,17 +2297,14 @@
           </c:cat>
           <c:val>
             <c:numRef>
-              <c:f>Sheet1!$B$2:$B$4</c:f>
+              <c:f>Sheet1!$B$2:$B$3</c:f>
               <c:numCache>
                 <c:formatCode>General</c:formatCode>
-                <c:ptCount val="3"/>
+                <c:ptCount val="2"/>
                 <c:pt idx="0">
                   <c:v>41</c:v>
                 </c:pt>
                 <c:pt idx="1">
-                  <c:v>2</c:v>
-                </c:pt>
-                <c:pt idx="2">
                   <c:v>10</c:v>
                 </c:pt>
               </c:numCache>
@@ -2365,17 +2359,14 @@
           </c:dLbls>
           <c:cat>
             <c:multiLvlStrRef>
-              <c:f>Sheet1!$A$2:$A$4</c:f>
+              <c:f>Sheet1!$A$2:$A$3</c:f>
               <c:multiLvlStrCache>
-                <c:ptCount val="3"/>
+                <c:ptCount val="2"/>
                 <c:lvl>
                   <c:pt idx="0">
                     <c:v>Operable (C2)</c:v>
                   </c:pt>
                   <c:pt idx="1">
-                    <c:v>Componente (C2)</c:v>
-                  </c:pt>
-                  <c:pt idx="2">
                     <c:v>Facility (C1)</c:v>
                   </c:pt>
                 </c:lvl>
@@ -2384,17 +2375,14 @@
           </c:cat>
           <c:val>
             <c:numRef>
-              <c:f>Sheet1!$C$2:$C$4</c:f>
+              <c:f>Sheet1!$C$2:$C$3</c:f>
               <c:numCache>
                 <c:formatCode>General</c:formatCode>
-                <c:ptCount val="3"/>
+                <c:ptCount val="2"/>
                 <c:pt idx="0">
                   <c:v>39</c:v>
                 </c:pt>
                 <c:pt idx="1">
-                  <c:v/>
-                </c:pt>
-                <c:pt idx="2">
                   <c:v>5</c:v>
                 </c:pt>
               </c:numCache>
@@ -7432,7 +7420,7 @@
                 <a:ea typeface="Calibri" pitchFamily="34" charset="-122"/>
                 <a:cs typeface="Calibri" pitchFamily="34" charset="-120"/>
               </a:rPr>
-              <a:t>CERTIFICADO DE ENTREGA (97 SUBSISTEMAS)</a:t>
+              <a:t>CERTIFICADO DE ENTREGA (95 SUBSISTEMAS)</a:t>
             </a:r>
             <a:endParaRPr lang="en-US" sz="1100" dirty="0"/>
           </a:p>
@@ -7552,7 +7540,7 @@
                 <a:ea typeface="Calibri" pitchFamily="34" charset="-122"/>
                 <a:cs typeface="Calibri" pitchFamily="34" charset="-120"/>
               </a:rPr>
-              <a:t>22,7%</a:t>
+              <a:t>21,1%</a:t>
             </a:r>
             <a:endParaRPr lang="en-US" sz="1100" dirty="0"/>
           </a:p>
@@ -7591,7 +7579,7 @@
                 <a:ea typeface="Cambria" pitchFamily="34" charset="-122"/>
                 <a:cs typeface="Cambria" pitchFamily="34" charset="-120"/>
               </a:rPr>
-              <a:t>22</a:t>
+              <a:t>20</a:t>
             </a:r>
             <a:endParaRPr lang="en-US" sz="2200" dirty="0"/>
           </a:p>
@@ -7711,7 +7699,7 @@
                 <a:ea typeface="Calibri" pitchFamily="34" charset="-122"/>
                 <a:cs typeface="Calibri" pitchFamily="34" charset="-120"/>
               </a:rPr>
-              <a:t>8,2%</a:t>
+              <a:t>8,4%</a:t>
             </a:r>
             <a:endParaRPr lang="en-US" sz="1100" dirty="0"/>
           </a:p>
@@ -7870,7 +7858,7 @@
                 <a:ea typeface="Calibri" pitchFamily="34" charset="-122"/>
                 <a:cs typeface="Calibri" pitchFamily="34" charset="-120"/>
               </a:rPr>
-              <a:t>9,3%</a:t>
+              <a:t>9,5%</a:t>
             </a:r>
             <a:endParaRPr lang="en-US" sz="1100" dirty="0"/>
           </a:p>
@@ -8029,7 +8017,7 @@
                 <a:ea typeface="Calibri" pitchFamily="34" charset="-122"/>
                 <a:cs typeface="Calibri" pitchFamily="34" charset="-120"/>
               </a:rPr>
-              <a:t>14,4%</a:t>
+              <a:t>14,7%</a:t>
             </a:r>
             <a:endParaRPr lang="en-US" sz="1100" dirty="0"/>
           </a:p>
@@ -8188,7 +8176,7 @@
                 <a:ea typeface="Calibri" pitchFamily="34" charset="-122"/>
                 <a:cs typeface="Calibri" pitchFamily="34" charset="-120"/>
               </a:rPr>
-              <a:t>45,4%</a:t>
+              <a:t>46,3%</a:t>
             </a:r>
             <a:endParaRPr lang="en-US" sz="1100" dirty="0"/>
           </a:p>
@@ -8269,7 +8257,7 @@
                 <a:ea typeface="Calibri" pitchFamily="34" charset="-122"/>
                 <a:cs typeface="Calibri" pitchFamily="34" charset="-120"/>
               </a:rPr>
-              <a:t>39 carpetas ya están en manos del cliente (40,2%) y 27 subsistemas tienen tarjeta verde. El grueso del pendiente todavía no sale de Besalco.</a:t>
+              <a:t>37 carpetas ya están en manos del cliente (38,9%) y 25 subsistemas tienen tarjeta verde. El grueso del pendiente todavía no sale de Besalco.</a:t>
             </a:r>
             <a:endParaRPr lang="en-US" sz="1000" dirty="0"/>
           </a:p>
@@ -9782,7 +9770,7 @@
                 <a:ea typeface="Calibri" pitchFamily="34" charset="-122"/>
                 <a:cs typeface="Calibri" pitchFamily="34" charset="-120"/>
               </a:rPr>
-              <a:t>14 están en preparación y 44 sin iniciar. Solo 39 de 97 (40,2%) llegaron al cliente; 9 volvieron rechazadas y hay que rearmarlas.</a:t>
+              <a:t>14 están en preparación y 44 sin iniciar. Solo 37 de 95 (38,9%) llegaron al cliente; 9 volvieron rechazadas y hay que rearmarlas.</a:t>
             </a:r>
             <a:endParaRPr lang="en-US" sz="1100" dirty="0"/>
           </a:p>
@@ -9924,7 +9912,7 @@
                 <a:ea typeface="Calibri" pitchFamily="34" charset="-122"/>
                 <a:cs typeface="Calibri" pitchFamily="34" charset="-120"/>
               </a:rPr>
-              <a:t>Concentra 181 P1 abiertos y 144 atrasados sobre 75 subsistemas. Es la ruta crítica del proyecto.</a:t>
+              <a:t>Concentra 181 P1 abiertos y 144 atrasados sobre 74 subsistemas. Es la ruta crítica del proyecto.</a:t>
             </a:r>
             <a:endParaRPr lang="en-US" sz="1100" dirty="0"/>
           </a:p>
@@ -21836,7 +21824,7 @@
         <p:spPr>
           <a:xfrm>
             <a:off x="777240" y="3154680"/>
-            <a:ext cx="8778240" cy="822960"/>
+            <a:ext cx="8778240" cy="1005840"/>
           </a:xfrm>
           <a:prstGeom prst="rect">
             <a:avLst/>
@@ -21863,7 +21851,27 @@
                 <a:ea typeface="Calibri" pitchFamily="34" charset="-122"/>
                 <a:cs typeface="Calibri" pitchFamily="34" charset="-120"/>
               </a:rPr>
-              <a:t>Contrato VPP-1001-03-CC-088 · 97 subsistemas (80 Operable · 2 Componente · 15 Facility) en Desaladora y EB-2.</a:t>
+              <a:t>Contrato VPP-1001-03-CC-088 · 95 subsistemas (80 Operable · 15 Facility) en Desaladora y EB-2.</a:t>
+            </a:r>
+            <a:endParaRPr lang="en-US" sz="1350" dirty="0"/>
+          </a:p>
+          <a:p>
+            <a:pPr indent="0" marL="0">
+              <a:lnSpc>
+                <a:spcPts val="2000"/>
+              </a:lnSpc>
+              <a:buNone/>
+            </a:pPr>
+            <a:r>
+              <a:rPr lang="en-US" sz="1350" dirty="0">
+                <a:solidFill>
+                  <a:srgbClr val="6E8CA8"/>
+                </a:solidFill>
+                <a:latin typeface="Calibri" pitchFamily="34" charset="0"/>
+                <a:ea typeface="Calibri" pitchFamily="34" charset="-122"/>
+                <a:cs typeface="Calibri" pitchFamily="34" charset="-120"/>
+              </a:rPr>
+              <a:t>No suman al universo 2 componentes ya entregados: son entregas parciales de un subsistema que ya está contado.</a:t>
             </a:r>
             <a:endParaRPr lang="en-US" sz="1350" dirty="0"/>
           </a:p>
@@ -22058,7 +22066,7 @@
                 <a:ea typeface="Cambria" pitchFamily="34" charset="-122"/>
                 <a:cs typeface="Cambria" pitchFamily="34" charset="-120"/>
               </a:rPr>
-              <a:t>40,2%</a:t>
+              <a:t>38,9%</a:t>
             </a:r>
             <a:endParaRPr lang="en-US" sz="3400" dirty="0"/>
           </a:p>
@@ -22945,7 +22953,7 @@
                 <a:ea typeface="Cambria" pitchFamily="34" charset="-122"/>
                 <a:cs typeface="Cambria" pitchFamily="34" charset="-120"/>
               </a:rPr>
-              <a:t>40,2%</a:t>
+              <a:t>38,9%</a:t>
             </a:r>
             <a:endParaRPr lang="en-US" sz="3800" dirty="0"/>
           </a:p>
@@ -22984,7 +22992,7 @@
                 <a:ea typeface="Calibri" pitchFamily="34" charset="-122"/>
                 <a:cs typeface="Calibri" pitchFamily="34" charset="-120"/>
               </a:rPr>
-              <a:t>39/97</a:t>
+              <a:t>37/95</a:t>
             </a:r>
             <a:endParaRPr lang="en-US" sz="1400" dirty="0"/>
           </a:p>
@@ -23065,7 +23073,7 @@
                 <a:ea typeface="Calibri" pitchFamily="34" charset="-122"/>
                 <a:cs typeface="Calibri" pitchFamily="34" charset="-120"/>
               </a:rPr>
-              <a:t>22 aprobadas · 9 rechazadas · 14 en preparación</a:t>
+              <a:t>20 aprobadas · 9 rechazadas · 14 en preparación</a:t>
             </a:r>
             <a:endParaRPr lang="en-US" sz="950" dirty="0"/>
           </a:p>
@@ -23559,7 +23567,7 @@
                 <a:ea typeface="Calibri" pitchFamily="34" charset="-122"/>
                 <a:cs typeface="Calibri" pitchFamily="34" charset="-120"/>
               </a:rPr>
-              <a:t>Las carpetas están a 40,2% de entrega y el cuello está en el armado interno.  </a:t>
+              <a:t>Las carpetas están a 38,9% de entrega y el cuello está en el armado interno.  </a:t>
             </a:r>
             <a:pPr indent="0" marL="0">
               <a:lnSpc>
@@ -23576,7 +23584,7 @@
                 <a:ea typeface="Calibri" pitchFamily="34" charset="-122"/>
                 <a:cs typeface="Calibri" pitchFamily="34" charset="-120"/>
               </a:rPr>
-              <a:t>39 entregadas de 97: 22 aprobadas, 8 en revisión y 9 rechazadas. Quedan 14 en preparación y 44 sin iniciar.</a:t>
+              <a:t>37 entregadas de 95: 20 aprobadas, 8 en revisión y 9 rechazadas. Quedan 14 en preparación y 44 sin iniciar.</a:t>
             </a:r>
             <a:endParaRPr lang="en-US" sz="1150" dirty="0"/>
           </a:p>

--- a/panel_control_TOP_P1/Panel_Control_TOP_P1.pptx
+++ b/panel_control_TOP_P1/Panel_Control_TOP_P1.pptx
@@ -6596,7 +6596,7 @@
                 <a:ea typeface="Calibri" pitchFamily="34" charset="-122"/>
                 <a:cs typeface="Calibri" pitchFamily="34" charset="-120"/>
               </a:rPr>
-              <a:t>PROYECTO 01</a:t>
+              <a:t>PROYECTO 01 · P2416</a:t>
             </a:r>
             <a:endParaRPr lang="en-US" sz="1300" dirty="0"/>
           </a:p>
@@ -6674,7 +6674,7 @@
                 <a:ea typeface="Calibri" pitchFamily="34" charset="-122"/>
                 <a:cs typeface="Calibri" pitchFamily="34" charset="-120"/>
               </a:rPr>
-              <a:t>PV3 Montaje Electromecánico — Ampliación Desaladora · Minera Los Pelambres (AMSA)</a:t>
+              <a:t>PV3 Montaje Electromecánico — Ampliación Desaladora · ANTOFAGASTA MINERALS</a:t>
             </a:r>
             <a:endParaRPr lang="en-US" sz="1600" dirty="0"/>
           </a:p>
@@ -8159,7 +8159,7 @@
                 <a:ea typeface="Calibri" pitchFamily="34" charset="-122"/>
                 <a:cs typeface="Calibri" pitchFamily="34" charset="-120"/>
               </a:rPr>
-              <a:t>PROYECTO 03</a:t>
+              <a:t>PROYECTO 03 · P2342</a:t>
             </a:r>
             <a:endParaRPr lang="en-US" sz="1300" dirty="0"/>
           </a:p>
@@ -20214,7 +20214,7 @@
                 <a:ea typeface="Calibri" pitchFamily="34" charset="-122"/>
                 <a:cs typeface="Calibri" pitchFamily="34" charset="-120"/>
               </a:rPr>
-              <a:t>PROYECTO 02</a:t>
+              <a:t>PROYECTO 02 · P2407</a:t>
             </a:r>
             <a:endParaRPr lang="en-US" sz="1300" dirty="0"/>
           </a:p>
@@ -20292,7 +20292,7 @@
                 <a:ea typeface="Calibri" pitchFamily="34" charset="-122"/>
                 <a:cs typeface="Calibri" pitchFamily="34" charset="-120"/>
               </a:rPr>
-              <a:t>Captación de agua, pozos y estaciones de bombeo · Codelco</a:t>
+              <a:t>Captación de agua, pozos y estaciones de bombeo · CODELCO</a:t>
             </a:r>
             <a:endParaRPr lang="en-US" sz="1600" dirty="0"/>
           </a:p>

--- a/panel_control_TOP_P1/Panel_Control_TOP_P1.pptx
+++ b/panel_control_TOP_P1/Panel_Control_TOP_P1.pptx
@@ -20373,7 +20373,7 @@
                 <a:ea typeface="Cambria" pitchFamily="34" charset="-122"/>
                 <a:cs typeface="Cambria" pitchFamily="34" charset="-120"/>
               </a:rPr>
-              <a:t>90,9%</a:t>
+              <a:t>96,6%</a:t>
             </a:r>
             <a:endParaRPr lang="en-US" sz="3400" dirty="0"/>
           </a:p>
@@ -20412,7 +20412,7 @@
                 <a:ea typeface="Calibri" pitchFamily="34" charset="-122"/>
                 <a:cs typeface="Calibri" pitchFamily="34" charset="-120"/>
               </a:rPr>
-              <a:t>Caminata 1 realizada</a:t>
+              <a:t>Caminata 1 · exigible</a:t>
             </a:r>
             <a:endParaRPr lang="en-US" sz="1150" dirty="0"/>
           </a:p>
@@ -20451,7 +20451,7 @@
                 <a:ea typeface="Cambria" pitchFamily="34" charset="-122"/>
                 <a:cs typeface="Cambria" pitchFamily="34" charset="-120"/>
               </a:rPr>
-              <a:t>77,6%</a:t>
+              <a:t>95%</a:t>
             </a:r>
             <a:endParaRPr lang="en-US" sz="3400" dirty="0"/>
           </a:p>
@@ -20490,7 +20490,7 @@
                 <a:ea typeface="Calibri" pitchFamily="34" charset="-122"/>
                 <a:cs typeface="Calibri" pitchFamily="34" charset="-120"/>
               </a:rPr>
-              <a:t>Caminata 2 realizada</a:t>
+              <a:t>Caminata 2 · exigible</a:t>
             </a:r>
             <a:endParaRPr lang="en-US" sz="1150" dirty="0"/>
           </a:p>
@@ -20607,7 +20607,7 @@
                 <a:ea typeface="Cambria" pitchFamily="34" charset="-122"/>
                 <a:cs typeface="Cambria" pitchFamily="34" charset="-120"/>
               </a:rPr>
-              <a:t>74,1%</a:t>
+              <a:t>82,6%</a:t>
             </a:r>
             <a:endParaRPr lang="en-US" sz="3400" dirty="0"/>
           </a:p>
@@ -20646,7 +20646,7 @@
                 <a:ea typeface="Calibri" pitchFamily="34" charset="-122"/>
                 <a:cs typeface="Calibri" pitchFamily="34" charset="-120"/>
               </a:rPr>
-              <a:t>Cierre de DT</a:t>
+              <a:t>Cierre de DT P1+P2</a:t>
             </a:r>
             <a:endParaRPr lang="en-US" sz="1150" dirty="0"/>
           </a:p>
@@ -20990,7 +20990,7 @@
                 <a:ea typeface="Cambria" pitchFamily="34" charset="-122"/>
                 <a:cs typeface="Cambria" pitchFamily="34" charset="-120"/>
               </a:rPr>
-              <a:t>90,9%</a:t>
+              <a:t>96,6%</a:t>
             </a:r>
             <a:endParaRPr lang="en-US" sz="3800" dirty="0"/>
           </a:p>
@@ -21029,7 +21029,7 @@
                 <a:ea typeface="Calibri" pitchFamily="34" charset="-122"/>
                 <a:cs typeface="Calibri" pitchFamily="34" charset="-120"/>
               </a:rPr>
-              <a:t>199/219</a:t>
+              <a:t>199/206 exigibles</a:t>
             </a:r>
             <a:endParaRPr lang="en-US" sz="1300" dirty="0"/>
           </a:p>
@@ -21110,7 +21110,7 @@
                 <a:ea typeface="Calibri" pitchFamily="34" charset="-122"/>
                 <a:cs typeface="Calibri" pitchFamily="34" charset="-120"/>
               </a:rPr>
-              <a:t>13 agendadas · 7 sin programar</a:t>
+              <a:t>90,9% del universo · 13 programadas en plazo · 7 sin programar</a:t>
             </a:r>
             <a:endParaRPr lang="en-US" sz="950" dirty="0"/>
           </a:p>
@@ -21203,7 +21203,7 @@
                 <a:ea typeface="Cambria" pitchFamily="34" charset="-122"/>
                 <a:cs typeface="Cambria" pitchFamily="34" charset="-120"/>
               </a:rPr>
-              <a:t>77,6%</a:t>
+              <a:t>95%</a:t>
             </a:r>
             <a:endParaRPr lang="en-US" sz="3800" dirty="0"/>
           </a:p>
@@ -21242,7 +21242,7 @@
                 <a:ea typeface="Calibri" pitchFamily="34" charset="-122"/>
                 <a:cs typeface="Calibri" pitchFamily="34" charset="-120"/>
               </a:rPr>
-              <a:t>170/219</a:t>
+              <a:t>170/179 exigibles</a:t>
             </a:r>
             <a:endParaRPr lang="en-US" sz="1300" dirty="0"/>
           </a:p>
@@ -21323,7 +21323,7 @@
                 <a:ea typeface="Calibri" pitchFamily="34" charset="-122"/>
                 <a:cs typeface="Calibri" pitchFamily="34" charset="-120"/>
               </a:rPr>
-              <a:t>40 agendadas · 9 sin programar</a:t>
+              <a:t>77,6% del universo · 40 programadas en plazo · 9 sin programar</a:t>
             </a:r>
             <a:endParaRPr lang="en-US" sz="950" dirty="0"/>
           </a:p>
@@ -22416,7 +22416,7 @@
                 <a:ea typeface="Calibri" pitchFamily="34" charset="-122"/>
                 <a:cs typeface="Calibri" pitchFamily="34" charset="-120"/>
               </a:rPr>
-              <a:t>Caminata 2 realizada en 170 de 219 subsistemas (77,6%). Talabre mide la carpeta como % de avance (PEC), no como estado de aprobación.</a:t>
+              <a:t>Caminata 2: 95% de lo exigible (170/179) — se descuentan 40 agendadas a fecha futura, que no son incumplimiento al corte. Talabre mide la carpeta como % de avance (PEC), no como estado de aprobación.</a:t>
             </a:r>
             <a:endParaRPr lang="en-US" sz="1350" dirty="0"/>
           </a:p>

--- a/panel_control_TOP_P1/Panel_Control_TOP_P1.pptx
+++ b/panel_control_TOP_P1/Panel_Control_TOP_P1.pptx
@@ -1503,7 +1503,7 @@
                   <c:v/>
                 </c:pt>
                 <c:pt idx="1">
-                  <c:v>18</c:v>
+                  <c:v>19</c:v>
                 </c:pt>
                 <c:pt idx="2">
                   <c:v>22</c:v>
@@ -1515,10 +1515,10 @@
                   <c:v>14</c:v>
                 </c:pt>
                 <c:pt idx="5">
-                  <c:v>5</c:v>
+                  <c:v>10</c:v>
                 </c:pt>
                 <c:pt idx="6">
-                  <c:v>88</c:v>
+                  <c:v>104</c:v>
                 </c:pt>
                 <c:pt idx="7">
                   <c:v>12</c:v>
@@ -1539,7 +1539,7 @@
               <c:strCache>
                 <c:ptCount val="1"/>
                 <c:pt idx="0">
-                  <c:v>Agendada</c:v>
+                  <c:v>Agendada en plazo</c:v>
                 </c:pt>
               </c:strCache>
             </c:strRef>
@@ -1620,13 +1620,13 @@
                 <c:formatCode>General</c:formatCode>
                 <c:ptCount val="9"/>
                 <c:pt idx="0">
-                  <c:v>2</c:v>
+                  <c:v>3</c:v>
                 </c:pt>
                 <c:pt idx="1">
-                  <c:v/>
+                  <c:v>1</c:v>
                 </c:pt>
                 <c:pt idx="2">
-                  <c:v/>
+                  <c:v>3</c:v>
                 </c:pt>
                 <c:pt idx="3">
                   <c:v/>
@@ -1635,10 +1635,10 @@
                   <c:v/>
                 </c:pt>
                 <c:pt idx="5">
-                  <c:v>16</c:v>
+                  <c:v>12</c:v>
                 </c:pt>
                 <c:pt idx="6">
-                  <c:v>22</c:v>
+                  <c:v>6</c:v>
                 </c:pt>
                 <c:pt idx="7">
                   <c:v/>
@@ -1740,13 +1740,13 @@
                 <c:formatCode>General</c:formatCode>
                 <c:ptCount val="9"/>
                 <c:pt idx="0">
-                  <c:v>1</c:v>
+                  <c:v/>
                 </c:pt>
                 <c:pt idx="1">
-                  <c:v>2</c:v>
+                  <c:v/>
                 </c:pt>
                 <c:pt idx="2">
-                  <c:v>4</c:v>
+                  <c:v/>
                 </c:pt>
                 <c:pt idx="3">
                   <c:v/>
@@ -1755,7 +1755,7 @@
                   <c:v/>
                 </c:pt>
                 <c:pt idx="5">
-                  <c:v>1</c:v>
+                  <c:v/>
                 </c:pt>
                 <c:pt idx="6">
                   <c:v/>
@@ -2076,7 +2076,7 @@
                   <c:v>6</c:v>
                 </c:pt>
                 <c:pt idx="6">
-                  <c:v>88</c:v>
+                  <c:v>110</c:v>
                 </c:pt>
                 <c:pt idx="7">
                   <c:v>8</c:v>
@@ -2196,7 +2196,7 @@
                   <c:v>13</c:v>
                 </c:pt>
                 <c:pt idx="6">
-                  <c:v>22</c:v>
+                  <c:v/>
                 </c:pt>
                 <c:pt idx="7">
                   <c:v>4</c:v>
@@ -2304,7 +2304,7 @@
                   <c:v>1</c:v>
                 </c:pt>
                 <c:pt idx="2">
-                  <c:v>3</c:v>
+                  <c:v>2</c:v>
                 </c:pt>
                 <c:pt idx="3">
                   <c:v/>
@@ -2579,10 +2579,10 @@
                 <c:ptCount val="5"/>
                 <c:lvl>
                   <c:pt idx="0">
-                    <c:v>Obras Civiles</c:v>
+                    <c:v>Piping</c:v>
                   </c:pt>
                   <c:pt idx="1">
-                    <c:v>Piping</c:v>
+                    <c:v>Obras Civiles</c:v>
                   </c:pt>
                   <c:pt idx="2">
                     <c:v>Eléctrica</c:v>
@@ -2604,19 +2604,19 @@
                 <c:formatCode>General</c:formatCode>
                 <c:ptCount val="5"/>
                 <c:pt idx="0">
-                  <c:v>85</c:v>
+                  <c:v>38</c:v>
                 </c:pt>
                 <c:pt idx="1">
-                  <c:v>63</c:v>
+                  <c:v>59</c:v>
                 </c:pt>
                 <c:pt idx="2">
-                  <c:v>34</c:v>
+                  <c:v>45</c:v>
                 </c:pt>
                 <c:pt idx="3">
-                  <c:v>6</c:v>
+                  <c:v>9</c:v>
                 </c:pt>
                 <c:pt idx="4">
-                  <c:v>18</c:v>
+                  <c:v>7</c:v>
                 </c:pt>
               </c:numCache>
             </c:numRef>
@@ -2675,10 +2675,10 @@
                 <c:ptCount val="5"/>
                 <c:lvl>
                   <c:pt idx="0">
-                    <c:v>Obras Civiles</c:v>
+                    <c:v>Piping</c:v>
                   </c:pt>
                   <c:pt idx="1">
-                    <c:v>Piping</c:v>
+                    <c:v>Obras Civiles</c:v>
                   </c:pt>
                   <c:pt idx="2">
                     <c:v>Eléctrica</c:v>
@@ -2700,16 +2700,16 @@
                 <c:formatCode>General</c:formatCode>
                 <c:ptCount val="5"/>
                 <c:pt idx="0">
-                  <c:v>119</c:v>
+                  <c:v>170</c:v>
                 </c:pt>
                 <c:pt idx="1">
-                  <c:v>141</c:v>
+                  <c:v>91</c:v>
                 </c:pt>
                 <c:pt idx="2">
-                  <c:v>5</c:v>
+                  <c:v>34</c:v>
                 </c:pt>
                 <c:pt idx="3">
-                  <c:v>31</c:v>
+                  <c:v>24</c:v>
                 </c:pt>
                 <c:pt idx="4">
                   <c:v>3</c:v>
@@ -7419,7 +7419,7 @@
                 <a:ea typeface="Calibri" pitchFamily="34" charset="-122"/>
                 <a:cs typeface="Calibri" pitchFamily="34" charset="-120"/>
               </a:rPr>
-              <a:t>Recuperar los 206 DT atrasados</a:t>
+              <a:t>Recuperar los 158 DT atrasados</a:t>
             </a:r>
             <a:endParaRPr lang="en-US" sz="1350" dirty="0"/>
           </a:p>
@@ -7461,7 +7461,7 @@
                 <a:ea typeface="Calibri" pitchFamily="34" charset="-122"/>
                 <a:cs typeface="Calibri" pitchFamily="34" charset="-120"/>
               </a:rPr>
-              <a:t>192 son P2 y 13 son P1. La mediana de atraso es de 36 días y 29 superan los 90 días.</a:t>
+              <a:t>145 son P2 y 11 son P1. La mediana de atraso es de 31 días y 21 superan los 90 días.</a:t>
             </a:r>
             <a:endParaRPr lang="en-US" sz="1100" dirty="0"/>
           </a:p>
@@ -7603,7 +7603,7 @@
                 <a:ea typeface="Calibri" pitchFamily="34" charset="-122"/>
                 <a:cs typeface="Calibri" pitchFamily="34" charset="-120"/>
               </a:rPr>
-              <a:t>CERRO VERDE/PS2: 0/3 (0%) · PISCINAS Y SEDIMENTADOR: 5/22 (22,7%). A nivel proyecto la caminata 2 va 77,6% con 40 ya agendadas.</a:t>
+              <a:t>CERRO VERDE/PS2: 0/3 (0%) · PISCINAS Y SEDIMENTADOR: 10/22 (45,5%). A nivel proyecto la caminata 2 va 88,1% con 25 ya agendadas.</a:t>
             </a:r>
             <a:endParaRPr lang="en-US" sz="1100" dirty="0"/>
           </a:p>
@@ -7745,7 +7745,7 @@
                 <a:ea typeface="Calibri" pitchFamily="34" charset="-122"/>
                 <a:cs typeface="Calibri" pitchFamily="34" charset="-120"/>
               </a:rPr>
-              <a:t>De 50 DT levantados en P4 no se ha cerrado ninguno (0%). P3 tampoco despega: 29,7% de cierre.</a:t>
+              <a:t>De 50 DT levantados en P4 no se ha cerrado ninguno (0%). P3 tampoco despega: 28,5% de cierre.</a:t>
             </a:r>
             <a:endParaRPr lang="en-US" sz="1100" dirty="0"/>
           </a:p>
@@ -7887,7 +7887,7 @@
                 <a:ea typeface="Calibri" pitchFamily="34" charset="-122"/>
                 <a:cs typeface="Calibri" pitchFamily="34" charset="-120"/>
               </a:rPr>
-              <a:t>Concentra 256 de los 505 DT abiertos (50,7%), con 98 atrasados. Además hay 10 carpetas bajo 80% de avance que conviene cerrar en paralelo.</a:t>
+              <a:t>Concentra 154 de los 480 DT abiertos (32,1%), con 31 atrasados. Además hay 9 carpetas bajo 80% de avance que conviene cerrar en paralelo.</a:t>
             </a:r>
             <a:endParaRPr lang="en-US" sz="1100" dirty="0"/>
           </a:p>
@@ -7926,7 +7926,7 @@
                 <a:ea typeface="Calibri" pitchFamily="34" charset="-122"/>
                 <a:cs typeface="Calibri" pitchFamily="34" charset="-120"/>
               </a:rPr>
-              <a:t>Fuente: TalabreSTATUS_PEC + TalabreCuadro_DT · 219 subsistemas · 1.951 DT · Atrasos al 27-07-2026</a:t>
+              <a:t>Fuente: STATUS_SUBSISTEMAS_TALABRE + Detalle_de_Terminaciones · 218 subsistemas · 2.024 DT · Atrasos al 03-08-2026</a:t>
             </a:r>
             <a:endParaRPr lang="en-US" sz="850" dirty="0"/>
           </a:p>
@@ -20334,7 +20334,7 @@
                 <a:ea typeface="Calibri" pitchFamily="34" charset="-122"/>
                 <a:cs typeface="Calibri" pitchFamily="34" charset="-120"/>
               </a:rPr>
-              <a:t>Contrato 4600029355 · 219 subsistemas en 9 áreas · 1.951 detalles de terminación levantados.</a:t>
+              <a:t>Contrato 4600029355 · 218 subsistemas en 9 áreas · 2.024 detalles de terminación levantados.</a:t>
             </a:r>
             <a:endParaRPr lang="en-US" sz="1350" dirty="0"/>
           </a:p>
@@ -20373,7 +20373,7 @@
                 <a:ea typeface="Cambria" pitchFamily="34" charset="-122"/>
                 <a:cs typeface="Cambria" pitchFamily="34" charset="-120"/>
               </a:rPr>
-              <a:t>96,6%</a:t>
+              <a:t>98,6%</a:t>
             </a:r>
             <a:endParaRPr lang="en-US" sz="3400" dirty="0"/>
           </a:p>
@@ -20451,7 +20451,7 @@
                 <a:ea typeface="Cambria" pitchFamily="34" charset="-122"/>
                 <a:cs typeface="Cambria" pitchFamily="34" charset="-120"/>
               </a:rPr>
-              <a:t>95%</a:t>
+              <a:t>99,5%</a:t>
             </a:r>
             <a:endParaRPr lang="en-US" sz="3400" dirty="0"/>
           </a:p>
@@ -20529,7 +20529,7 @@
                 <a:ea typeface="Cambria" pitchFamily="34" charset="-122"/>
                 <a:cs typeface="Cambria" pitchFamily="34" charset="-120"/>
               </a:rPr>
-              <a:t>91,1%</a:t>
+              <a:t>92,7%</a:t>
             </a:r>
             <a:endParaRPr lang="en-US" sz="3400" dirty="0"/>
           </a:p>
@@ -20607,7 +20607,7 @@
                 <a:ea typeface="Cambria" pitchFamily="34" charset="-122"/>
                 <a:cs typeface="Cambria" pitchFamily="34" charset="-120"/>
               </a:rPr>
-              <a:t>82,6%</a:t>
+              <a:t>85%</a:t>
             </a:r>
             <a:endParaRPr lang="en-US" sz="3400" dirty="0"/>
           </a:p>
@@ -20685,7 +20685,7 @@
                 <a:ea typeface="Calibri" pitchFamily="34" charset="-122"/>
                 <a:cs typeface="Calibri" pitchFamily="34" charset="-120"/>
               </a:rPr>
-              <a:t>Atrasos calculados al 27-07-2026</a:t>
+              <a:t>Atrasos calculados al 03-08-2026</a:t>
             </a:r>
             <a:endParaRPr lang="en-US" sz="1100" dirty="0"/>
           </a:p>
@@ -20724,7 +20724,7 @@
                 <a:ea typeface="Calibri" pitchFamily="34" charset="-122"/>
                 <a:cs typeface="Calibri" pitchFamily="34" charset="-120"/>
               </a:rPr>
-              <a:t>Fuente: TalabreSTATUS_PEC + TalabreCuadro_DT · 219 subsistemas · 1.951 DT · Atrasos al 27-07-2026</a:t>
+              <a:t>Fuente: STATUS_SUBSISTEMAS_TALABRE + Detalle_de_Terminaciones · 218 subsistemas · 2.024 DT · Atrasos al 03-08-2026</a:t>
             </a:r>
             <a:endParaRPr lang="en-US" sz="850" dirty="0"/>
           </a:p>
@@ -20990,7 +20990,7 @@
                 <a:ea typeface="Cambria" pitchFamily="34" charset="-122"/>
                 <a:cs typeface="Cambria" pitchFamily="34" charset="-120"/>
               </a:rPr>
-              <a:t>96,6%</a:t>
+              <a:t>98,6%</a:t>
             </a:r>
             <a:endParaRPr lang="en-US" sz="3800" dirty="0"/>
           </a:p>
@@ -21029,7 +21029,7 @@
                 <a:ea typeface="Calibri" pitchFamily="34" charset="-122"/>
                 <a:cs typeface="Calibri" pitchFamily="34" charset="-120"/>
               </a:rPr>
-              <a:t>199/206 exigibles</a:t>
+              <a:t>205/208 exigibles</a:t>
             </a:r>
             <a:endParaRPr lang="en-US" sz="1300" dirty="0"/>
           </a:p>
@@ -21110,7 +21110,7 @@
                 <a:ea typeface="Calibri" pitchFamily="34" charset="-122"/>
                 <a:cs typeface="Calibri" pitchFamily="34" charset="-120"/>
               </a:rPr>
-              <a:t>90,9% del universo · 13 programadas en plazo · 7 sin programar</a:t>
+              <a:t>94% del universo · 10 programadas en plazo · 2 con agenda vencida · 1 sin programar</a:t>
             </a:r>
             <a:endParaRPr lang="en-US" sz="950" dirty="0"/>
           </a:p>
@@ -21203,7 +21203,7 @@
                 <a:ea typeface="Cambria" pitchFamily="34" charset="-122"/>
                 <a:cs typeface="Cambria" pitchFamily="34" charset="-120"/>
               </a:rPr>
-              <a:t>95%</a:t>
+              <a:t>99,5%</a:t>
             </a:r>
             <a:endParaRPr lang="en-US" sz="3800" dirty="0"/>
           </a:p>
@@ -21242,7 +21242,7 @@
                 <a:ea typeface="Calibri" pitchFamily="34" charset="-122"/>
                 <a:cs typeface="Calibri" pitchFamily="34" charset="-120"/>
               </a:rPr>
-              <a:t>170/179 exigibles</a:t>
+              <a:t>192/193 exigibles</a:t>
             </a:r>
             <a:endParaRPr lang="en-US" sz="1300" dirty="0"/>
           </a:p>
@@ -21323,7 +21323,7 @@
                 <a:ea typeface="Calibri" pitchFamily="34" charset="-122"/>
                 <a:cs typeface="Calibri" pitchFamily="34" charset="-120"/>
               </a:rPr>
-              <a:t>77,6% del universo · 40 programadas en plazo · 9 sin programar</a:t>
+              <a:t>88,1% del universo · 25 programadas en plazo · 1 sin programar</a:t>
             </a:r>
             <a:endParaRPr lang="en-US" sz="950" dirty="0"/>
           </a:p>
@@ -21416,7 +21416,7 @@
                 <a:ea typeface="Cambria" pitchFamily="34" charset="-122"/>
                 <a:cs typeface="Cambria" pitchFamily="34" charset="-120"/>
               </a:rPr>
-              <a:t>91,1%</a:t>
+              <a:t>92,7%</a:t>
             </a:r>
             <a:endParaRPr lang="en-US" sz="3800" dirty="0"/>
           </a:p>
@@ -21455,7 +21455,7 @@
                 <a:ea typeface="Calibri" pitchFamily="34" charset="-122"/>
                 <a:cs typeface="Calibri" pitchFamily="34" charset="-120"/>
               </a:rPr>
-              <a:t>159/219 sobre 95%</a:t>
+              <a:t>181/218 sobre 95%</a:t>
             </a:r>
             <a:endParaRPr lang="en-US" sz="1300" dirty="0"/>
           </a:p>
@@ -21536,7 +21536,7 @@
                 <a:ea typeface="Calibri" pitchFamily="34" charset="-122"/>
                 <a:cs typeface="Calibri" pitchFamily="34" charset="-120"/>
               </a:rPr>
-              <a:t>10 subsistemas bajo 80% de avance</a:t>
+              <a:t>9 subsistemas bajo 80% de avance</a:t>
             </a:r>
             <a:endParaRPr lang="en-US" sz="950" dirty="0"/>
           </a:p>
@@ -21629,7 +21629,7 @@
                 <a:ea typeface="Cambria" pitchFamily="34" charset="-122"/>
                 <a:cs typeface="Cambria" pitchFamily="34" charset="-120"/>
               </a:rPr>
-              <a:t>93,4%</a:t>
+              <a:t>91,8%</a:t>
             </a:r>
             <a:endParaRPr lang="en-US" sz="3800" dirty="0"/>
           </a:p>
@@ -21668,7 +21668,7 @@
                 <a:ea typeface="Calibri" pitchFamily="34" charset="-122"/>
                 <a:cs typeface="Calibri" pitchFamily="34" charset="-120"/>
               </a:rPr>
-              <a:t>313/335</a:t>
+              <a:t>323/352</a:t>
             </a:r>
             <a:endParaRPr lang="en-US" sz="1300" dirty="0"/>
           </a:p>
@@ -21749,7 +21749,7 @@
                 <a:ea typeface="Calibri" pitchFamily="34" charset="-122"/>
                 <a:cs typeface="Calibri" pitchFamily="34" charset="-120"/>
               </a:rPr>
-              <a:t>22 abiertos · 13 atrasados</a:t>
+              <a:t>29 abiertos · 11 atrasados</a:t>
             </a:r>
             <a:endParaRPr lang="en-US" sz="950" dirty="0"/>
           </a:p>
@@ -21889,7 +21889,7 @@
                 <a:ea typeface="Calibri" pitchFamily="34" charset="-122"/>
                 <a:cs typeface="Calibri" pitchFamily="34" charset="-120"/>
               </a:rPr>
-              <a:t>93,4% de cierre en P1 (22 abiertos), pero 483 DT abiertos entre P2, P3 y P4 sobre un total de 505.</a:t>
+              <a:t>91,8% de cierre en P1 (29 abiertos), pero 451 DT abiertos entre P2, P3 y P4 sobre un total de 480.</a:t>
             </a:r>
             <a:endParaRPr lang="en-US" sz="1150" dirty="0"/>
           </a:p>
@@ -21968,7 +21968,7 @@
                 <a:ea typeface="Calibri" pitchFamily="34" charset="-122"/>
                 <a:cs typeface="Calibri" pitchFamily="34" charset="-120"/>
               </a:rPr>
-              <a:t>206 DT con la fecha de compromiso vencida; mediana de 36 días y el más antiguo lleva 189. Los 215 abiertos sin fecha de compromiso no se cuentan como atrasados.</a:t>
+              <a:t>158 DT con la fecha de compromiso vencida; mediana de 31 días y el más antiguo lleva 137. Los 218 abiertos sin fecha de compromiso no se cuentan como atrasados.</a:t>
             </a:r>
             <a:endParaRPr lang="en-US" sz="1150" dirty="0"/>
           </a:p>
@@ -22030,7 +22030,7 @@
                 <a:ea typeface="Calibri" pitchFamily="34" charset="-122"/>
                 <a:cs typeface="Calibri" pitchFamily="34" charset="-120"/>
               </a:rPr>
-              <a:t>Las caminatas 1 están casi completas, pero la 2 va 77,6%.  </a:t>
+              <a:t>Caminatas: 98,6% y 99,5% de lo exigible (C1 y C2).  </a:t>
             </a:r>
             <a:pPr indent="0" marL="0">
               <a:lnSpc>
@@ -22047,7 +22047,7 @@
                 <a:ea typeface="Calibri" pitchFamily="34" charset="-122"/>
                 <a:cs typeface="Calibri" pitchFamily="34" charset="-120"/>
               </a:rPr>
-              <a:t>Caminata 1: 199/219. Caminata 2: 170/219, con 40 ya agendadas y 9 sin programar.</a:t>
+              <a:t>Caminata 1: 205/208 exigibles, 2 con agenda vencida. Caminata 2: 192/193, con 25 agendadas en plazo y 1 sin programar.</a:t>
             </a:r>
             <a:endParaRPr lang="en-US" sz="1150" dirty="0"/>
           </a:p>
@@ -22126,7 +22126,7 @@
                 <a:ea typeface="Calibri" pitchFamily="34" charset="-122"/>
                 <a:cs typeface="Calibri" pitchFamily="34" charset="-120"/>
               </a:rPr>
-              <a:t>Avance promedio 91,1%: 159 subsistemas sobre 95% y solo 10 bajo 80%. El archivo declara 0 carpetas en revisión del cliente.</a:t>
+              <a:t>Avance promedio 92,7%: 181 subsistemas sobre 95% y solo 9 bajo 80%.</a:t>
             </a:r>
             <a:endParaRPr lang="en-US" sz="1150" dirty="0"/>
           </a:p>
@@ -22165,7 +22165,7 @@
                 <a:ea typeface="Calibri" pitchFamily="34" charset="-122"/>
                 <a:cs typeface="Calibri" pitchFamily="34" charset="-120"/>
               </a:rPr>
-              <a:t>Fuente: TalabreSTATUS_PEC + TalabreCuadro_DT · 219 subsistemas · 1.951 DT · Atrasos al 27-07-2026</a:t>
+              <a:t>Fuente: STATUS_SUBSISTEMAS_TALABRE + Detalle_de_Terminaciones · 218 subsistemas · 2.024 DT · Atrasos al 03-08-2026</a:t>
             </a:r>
             <a:endParaRPr lang="en-US" sz="850" dirty="0"/>
           </a:p>
@@ -22416,7 +22416,7 @@
                 <a:ea typeface="Calibri" pitchFamily="34" charset="-122"/>
                 <a:cs typeface="Calibri" pitchFamily="34" charset="-120"/>
               </a:rPr>
-              <a:t>Caminata 2: 95% de lo exigible (170/179) — se descuentan 40 agendadas a fecha futura, que no son incumplimiento al corte. Talabre mide la carpeta como % de avance (PEC), no como estado de aprobación.</a:t>
+              <a:t>Caminata 2: 99,5% de lo exigible (192/193) — se descuentan 25 agendadas a fecha futura, que no son incumplimiento al corte. Talabre mide la carpeta como % de avance (PEC), no como estado de aprobación.</a:t>
             </a:r>
             <a:endParaRPr lang="en-US" sz="1350" dirty="0"/>
           </a:p>
@@ -22487,7 +22487,7 @@
                 <a:ea typeface="Calibri" pitchFamily="34" charset="-122"/>
                 <a:cs typeface="Calibri" pitchFamily="34" charset="-120"/>
               </a:rPr>
-              <a:t>Fuente: TalabreSTATUS_PEC + TalabreCuadro_DT · 219 subsistemas · 1.951 DT · Atrasos al 27-07-2026</a:t>
+              <a:t>Fuente: STATUS_SUBSISTEMAS_TALABRE + Detalle_de_Terminaciones · 218 subsistemas · 2.024 DT · Atrasos al 03-08-2026</a:t>
             </a:r>
             <a:endParaRPr lang="en-US" sz="850" dirty="0"/>
           </a:p>
@@ -22738,7 +22738,7 @@
                 <a:ea typeface="Calibri" pitchFamily="34" charset="-122"/>
                 <a:cs typeface="Calibri" pitchFamily="34" charset="-120"/>
               </a:rPr>
-              <a:t>1.951 DT levantados; 74,1% cerrados. Atrasado = DT abierto cuya fecha de compromiso de cierre ya venció al 27-07-2026.</a:t>
+              <a:t>2.024 DT levantados; 76,3% cerrados. Atrasado = DT abierto cuya fecha de compromiso de cierre ya venció al 03-08-2026.</a:t>
             </a:r>
             <a:endParaRPr lang="en-US" sz="1350" dirty="0"/>
           </a:p>
@@ -22829,7 +22829,7 @@
         </p:nvSpPr>
         <p:spPr>
           <a:xfrm>
-            <a:off x="7936992" y="2487168"/>
+            <a:off x="7936992" y="2432304"/>
             <a:ext cx="914400" cy="237744"/>
           </a:xfrm>
           <a:prstGeom prst="rect">
@@ -22868,7 +22868,7 @@
         </p:nvSpPr>
         <p:spPr>
           <a:xfrm>
-            <a:off x="8778240" y="2487168"/>
+            <a:off x="8778240" y="2432304"/>
             <a:ext cx="1463040" cy="237744"/>
           </a:xfrm>
           <a:prstGeom prst="rect">
@@ -22893,7 +22893,7 @@
                 <a:ea typeface="Calibri" pitchFamily="34" charset="-122"/>
                 <a:cs typeface="Calibri" pitchFamily="34" charset="-120"/>
               </a:rPr>
-              <a:t>313/335</a:t>
+              <a:t>323/352</a:t>
             </a:r>
             <a:endParaRPr lang="en-US" sz="1050" dirty="0"/>
           </a:p>
@@ -22907,7 +22907,7 @@
         </p:nvSpPr>
         <p:spPr>
           <a:xfrm>
-            <a:off x="10287000" y="2487168"/>
+            <a:off x="10287000" y="2432304"/>
             <a:ext cx="1234440" cy="237744"/>
           </a:xfrm>
           <a:prstGeom prst="rect">
@@ -22932,7 +22932,7 @@
                 <a:ea typeface="Calibri" pitchFamily="34" charset="-122"/>
                 <a:cs typeface="Calibri" pitchFamily="34" charset="-120"/>
               </a:rPr>
-              <a:t>93,4%</a:t>
+              <a:t>91,8%</a:t>
             </a:r>
             <a:endParaRPr lang="en-US" sz="1100" dirty="0"/>
           </a:p>
@@ -22946,7 +22946,7 @@
         </p:nvSpPr>
         <p:spPr>
           <a:xfrm>
-            <a:off x="7936992" y="2761488"/>
+            <a:off x="7936992" y="2688336"/>
             <a:ext cx="3566160" cy="118872"/>
           </a:xfrm>
           <a:prstGeom prst="rect">
@@ -22966,8 +22966,8 @@
         </p:nvSpPr>
         <p:spPr>
           <a:xfrm>
-            <a:off x="7936992" y="2761488"/>
-            <a:ext cx="3330793" cy="118872"/>
+            <a:off x="7936992" y="2688336"/>
+            <a:ext cx="3273735" cy="118872"/>
           </a:xfrm>
           <a:prstGeom prst="rect">
             <a:avLst/>
@@ -22986,7 +22986,7 @@
         </p:nvSpPr>
         <p:spPr>
           <a:xfrm>
-            <a:off x="7936992" y="3054096"/>
+            <a:off x="7936992" y="2944368"/>
             <a:ext cx="914400" cy="237744"/>
           </a:xfrm>
           <a:prstGeom prst="rect">
@@ -23025,7 +23025,7 @@
         </p:nvSpPr>
         <p:spPr>
           <a:xfrm>
-            <a:off x="8778240" y="3054096"/>
+            <a:off x="8778240" y="2944368"/>
             <a:ext cx="1463040" cy="237744"/>
           </a:xfrm>
           <a:prstGeom prst="rect">
@@ -23050,7 +23050,7 @@
                 <a:ea typeface="Calibri" pitchFamily="34" charset="-122"/>
                 <a:cs typeface="Calibri" pitchFamily="34" charset="-120"/>
               </a:rPr>
-              <a:t>1.053/1.318</a:t>
+              <a:t>1.144/1.374</a:t>
             </a:r>
             <a:endParaRPr lang="en-US" sz="1050" dirty="0"/>
           </a:p>
@@ -23064,7 +23064,7 @@
         </p:nvSpPr>
         <p:spPr>
           <a:xfrm>
-            <a:off x="10287000" y="3054096"/>
+            <a:off x="10287000" y="2944368"/>
             <a:ext cx="1234440" cy="237744"/>
           </a:xfrm>
           <a:prstGeom prst="rect">
@@ -23089,7 +23089,7 @@
                 <a:ea typeface="Calibri" pitchFamily="34" charset="-122"/>
                 <a:cs typeface="Calibri" pitchFamily="34" charset="-120"/>
               </a:rPr>
-              <a:t>79,9%</a:t>
+              <a:t>83,3%</a:t>
             </a:r>
             <a:endParaRPr lang="en-US" sz="1100" dirty="0"/>
           </a:p>
@@ -23103,7 +23103,7 @@
         </p:nvSpPr>
         <p:spPr>
           <a:xfrm>
-            <a:off x="7936992" y="3328416"/>
+            <a:off x="7936992" y="3200400"/>
             <a:ext cx="3566160" cy="118872"/>
           </a:xfrm>
           <a:prstGeom prst="rect">
@@ -23123,8 +23123,8 @@
         </p:nvSpPr>
         <p:spPr>
           <a:xfrm>
-            <a:off x="7936992" y="3328416"/>
-            <a:ext cx="2849362" cy="118872"/>
+            <a:off x="7936992" y="3200400"/>
+            <a:ext cx="2970611" cy="118872"/>
           </a:xfrm>
           <a:prstGeom prst="rect">
             <a:avLst/>
@@ -23143,7 +23143,7 @@
         </p:nvSpPr>
         <p:spPr>
           <a:xfrm>
-            <a:off x="7936992" y="3621024"/>
+            <a:off x="7936992" y="3456432"/>
             <a:ext cx="914400" cy="237744"/>
           </a:xfrm>
           <a:prstGeom prst="rect">
@@ -23182,7 +23182,7 @@
         </p:nvSpPr>
         <p:spPr>
           <a:xfrm>
-            <a:off x="8778240" y="3621024"/>
+            <a:off x="8778240" y="3456432"/>
             <a:ext cx="1463040" cy="237744"/>
           </a:xfrm>
           <a:prstGeom prst="rect">
@@ -23207,7 +23207,7 @@
                 <a:ea typeface="Calibri" pitchFamily="34" charset="-122"/>
                 <a:cs typeface="Calibri" pitchFamily="34" charset="-120"/>
               </a:rPr>
-              <a:t>71/239</a:t>
+              <a:t>68/239</a:t>
             </a:r>
             <a:endParaRPr lang="en-US" sz="1050" dirty="0"/>
           </a:p>
@@ -23221,7 +23221,7 @@
         </p:nvSpPr>
         <p:spPr>
           <a:xfrm>
-            <a:off x="10287000" y="3621024"/>
+            <a:off x="10287000" y="3456432"/>
             <a:ext cx="1234440" cy="237744"/>
           </a:xfrm>
           <a:prstGeom prst="rect">
@@ -23246,7 +23246,7 @@
                 <a:ea typeface="Calibri" pitchFamily="34" charset="-122"/>
                 <a:cs typeface="Calibri" pitchFamily="34" charset="-120"/>
               </a:rPr>
-              <a:t>29,7%</a:t>
+              <a:t>28,5%</a:t>
             </a:r>
             <a:endParaRPr lang="en-US" sz="1100" dirty="0"/>
           </a:p>
@@ -23260,7 +23260,7 @@
         </p:nvSpPr>
         <p:spPr>
           <a:xfrm>
-            <a:off x="7936992" y="3895344"/>
+            <a:off x="7936992" y="3712464"/>
             <a:ext cx="3566160" cy="118872"/>
           </a:xfrm>
           <a:prstGeom prst="rect">
@@ -23280,8 +23280,8 @@
         </p:nvSpPr>
         <p:spPr>
           <a:xfrm>
-            <a:off x="7936992" y="3895344"/>
-            <a:ext cx="1059150" cy="118872"/>
+            <a:off x="7936992" y="3712464"/>
+            <a:ext cx="1016356" cy="118872"/>
           </a:xfrm>
           <a:prstGeom prst="rect">
             <a:avLst/>
@@ -23300,7 +23300,7 @@
         </p:nvSpPr>
         <p:spPr>
           <a:xfrm>
-            <a:off x="7936992" y="4187952"/>
+            <a:off x="7936992" y="3968496"/>
             <a:ext cx="914400" cy="237744"/>
           </a:xfrm>
           <a:prstGeom prst="rect">
@@ -23339,7 +23339,7 @@
         </p:nvSpPr>
         <p:spPr>
           <a:xfrm>
-            <a:off x="8778240" y="4187952"/>
+            <a:off x="8778240" y="3968496"/>
             <a:ext cx="1463040" cy="237744"/>
           </a:xfrm>
           <a:prstGeom prst="rect">
@@ -23378,7 +23378,7 @@
         </p:nvSpPr>
         <p:spPr>
           <a:xfrm>
-            <a:off x="10287000" y="4187952"/>
+            <a:off x="10287000" y="3968496"/>
             <a:ext cx="1234440" cy="237744"/>
           </a:xfrm>
           <a:prstGeom prst="rect">
@@ -23417,7 +23417,7 @@
         </p:nvSpPr>
         <p:spPr>
           <a:xfrm>
-            <a:off x="7936992" y="4462272"/>
+            <a:off x="7936992" y="4224528"/>
             <a:ext cx="3566160" cy="118872"/>
           </a:xfrm>
           <a:prstGeom prst="rect">
@@ -23437,7 +23437,7 @@
         </p:nvSpPr>
         <p:spPr>
           <a:xfrm>
-            <a:off x="7936992" y="4754880"/>
+            <a:off x="7936992" y="4480560"/>
             <a:ext cx="914400" cy="237744"/>
           </a:xfrm>
           <a:prstGeom prst="rect">
@@ -23476,7 +23476,7 @@
         </p:nvSpPr>
         <p:spPr>
           <a:xfrm>
-            <a:off x="8778240" y="4754880"/>
+            <a:off x="8778240" y="4480560"/>
             <a:ext cx="1463040" cy="237744"/>
           </a:xfrm>
           <a:prstGeom prst="rect">
@@ -23515,7 +23515,7 @@
         </p:nvSpPr>
         <p:spPr>
           <a:xfrm>
-            <a:off x="10287000" y="4754880"/>
+            <a:off x="10287000" y="4480560"/>
             <a:ext cx="1234440" cy="237744"/>
           </a:xfrm>
           <a:prstGeom prst="rect">
@@ -23554,7 +23554,7 @@
         </p:nvSpPr>
         <p:spPr>
           <a:xfrm>
-            <a:off x="7936992" y="5029200"/>
+            <a:off x="7936992" y="4736592"/>
             <a:ext cx="3566160" cy="118872"/>
           </a:xfrm>
           <a:prstGeom prst="rect">
@@ -23574,7 +23574,7 @@
         </p:nvSpPr>
         <p:spPr>
           <a:xfrm>
-            <a:off x="7936992" y="5029200"/>
+            <a:off x="7936992" y="4736592"/>
             <a:ext cx="3566160" cy="118872"/>
           </a:xfrm>
           <a:prstGeom prst="rect">
@@ -23594,7 +23594,7 @@
         </p:nvSpPr>
         <p:spPr>
           <a:xfrm>
-            <a:off x="7936992" y="5376672"/>
+            <a:off x="7936992" y="5029200"/>
             <a:ext cx="3566160" cy="0"/>
           </a:xfrm>
           <a:prstGeom prst="line">
@@ -23617,8 +23617,8 @@
         </p:nvSpPr>
         <p:spPr>
           <a:xfrm>
-            <a:off x="7936992" y="5504688"/>
-            <a:ext cx="3611880" cy="1097280"/>
+            <a:off x="7936992" y="5138928"/>
+            <a:ext cx="3611880" cy="822960"/>
           </a:xfrm>
           <a:prstGeom prst="rect">
             <a:avLst/>
@@ -23663,7 +23663,7 @@
                 <a:ea typeface="Calibri" pitchFamily="34" charset="-122"/>
                 <a:cs typeface="Calibri" pitchFamily="34" charset="-120"/>
               </a:rPr>
-              <a:t>Mediana de 36 días vencidos; el más antiguo lleva 189. 91 entre 1-30 días, 86 entre 31-90 días, 28 entre 91-180 días, 1 entre &gt;180 días.</a:t>
+              <a:t>Mediana de 31 días vencidos; el más antiguo lleva 137. 78 entre 1-30 días, 59 entre 31-90 días, 21 entre 91-180 días.</a:t>
             </a:r>
             <a:endParaRPr lang="en-US" sz="1150" dirty="0"/>
           </a:p>
@@ -23702,7 +23702,7 @@
                 <a:ea typeface="Calibri" pitchFamily="34" charset="-122"/>
                 <a:cs typeface="Calibri" pitchFamily="34" charset="-120"/>
               </a:rPr>
-              <a:t>Fuente: TalabreSTATUS_PEC + TalabreCuadro_DT · 219 subsistemas · 1.951 DT · Atrasos al 27-07-2026</a:t>
+              <a:t>Fuente: STATUS_SUBSISTEMAS_TALABRE + Detalle_de_Terminaciones · 218 subsistemas · 2.024 DT · Atrasos al 03-08-2026</a:t>
             </a:r>
             <a:endParaRPr lang="en-US" sz="850" dirty="0"/>
           </a:p>

--- a/panel_control_TOP_P1/Panel_Control_TOP_P1.pptx
+++ b/panel_control_TOP_P1/Panel_Control_TOP_P1.pptx
@@ -9531,7 +9531,7 @@
                 <a:ea typeface="Calibri" pitchFamily="34" charset="-122"/>
                 <a:cs typeface="Calibri" pitchFamily="34" charset="-120"/>
               </a:rPr>
-              <a:t>0 aprobadas · 12 rechazadas · 14 en revisión</a:t>
+              <a:t>0 aprobadas · 12 rechazadas · 14 en revisión · 1 observadas</a:t>
             </a:r>
             <a:endParaRPr lang="en-US" sz="950" dirty="0"/>
           </a:p>
@@ -9780,7 +9780,7 @@
                 <a:ea typeface="Calibri" pitchFamily="34" charset="-122"/>
                 <a:cs typeface="Calibri" pitchFamily="34" charset="-120"/>
               </a:rPr>
-              <a:t>830 abiertos · 405 vencidos</a:t>
+              <a:t>830 abiertos · 405 vencidos · 10 en trámite</a:t>
             </a:r>
             <a:endParaRPr lang="en-US" sz="950" dirty="0"/>
           </a:p>
@@ -16488,7 +16488,7 @@
                 <a:ea typeface="Calibri" pitchFamily="34" charset="-122"/>
                 <a:cs typeface="Calibri" pitchFamily="34" charset="-120"/>
               </a:rPr>
-              <a:t>20 aprobadas · 9 rechazadas · 14 en preparación</a:t>
+              <a:t>20 aprobadas · 8 en revisión · 9 rechazadas</a:t>
             </a:r>
             <a:endParaRPr lang="en-US" sz="950" dirty="0"/>
           </a:p>

--- a/panel_control_TOP_P1/Panel_Control_TOP_P1.pptx
+++ b/panel_control_TOP_P1/Panel_Control_TOP_P1.pptx
@@ -233,7 +233,7 @@
                 <c:formatCode>General</c:formatCode>
                 <c:ptCount val="2"/>
                 <c:pt idx="0">
-                  <c:v>41</c:v>
+                  <c:v>42</c:v>
                 </c:pt>
                 <c:pt idx="1">
                   <c:v>10</c:v>
@@ -311,7 +311,7 @@
                 <c:formatCode>General</c:formatCode>
                 <c:ptCount val="2"/>
                 <c:pt idx="0">
-                  <c:v>39</c:v>
+                  <c:v>38</c:v>
                 </c:pt>
                 <c:pt idx="1">
                   <c:v>5</c:v>
@@ -822,10 +822,10 @@
                 <c:ptCount val="5"/>
                 <c:lvl>
                   <c:pt idx="0">
-                    <c:v>Piping</c:v>
+                    <c:v>Eléctrica</c:v>
                   </c:pt>
                   <c:pt idx="1">
-                    <c:v>Eléctrica</c:v>
+                    <c:v>Piping</c:v>
                   </c:pt>
                   <c:pt idx="2">
                     <c:v>Obras Civiles</c:v>
@@ -847,19 +847,19 @@
                 <c:formatCode>General</c:formatCode>
                 <c:ptCount val="5"/>
                 <c:pt idx="0">
-                  <c:v>72</c:v>
+                  <c:v>52</c:v>
                 </c:pt>
                 <c:pt idx="1">
-                  <c:v>58</c:v>
+                  <c:v>7</c:v>
                 </c:pt>
                 <c:pt idx="2">
-                  <c:v>29</c:v>
+                  <c:v>7</c:v>
                 </c:pt>
                 <c:pt idx="3">
-                  <c:v>13</c:v>
+                  <c:v>8</c:v>
                 </c:pt>
                 <c:pt idx="4">
-                  <c:v>6</c:v>
+                  <c:v>2</c:v>
                 </c:pt>
               </c:numCache>
             </c:numRef>
@@ -918,10 +918,10 @@
                 <c:ptCount val="5"/>
                 <c:lvl>
                   <c:pt idx="0">
-                    <c:v>Piping</c:v>
+                    <c:v>Eléctrica</c:v>
                   </c:pt>
                   <c:pt idx="1">
-                    <c:v>Eléctrica</c:v>
+                    <c:v>Piping</c:v>
                   </c:pt>
                   <c:pt idx="2">
                     <c:v>Obras Civiles</c:v>
@@ -943,19 +943,19 @@
                 <c:formatCode>General</c:formatCode>
                 <c:ptCount val="5"/>
                 <c:pt idx="0">
-                  <c:v>25</c:v>
+                  <c:v>60</c:v>
                 </c:pt>
                 <c:pt idx="1">
-                  <c:v>23</c:v>
+                  <c:v>67</c:v>
                 </c:pt>
                 <c:pt idx="2">
+                  <c:v>10</c:v>
+                </c:pt>
+                <c:pt idx="3">
                   <c:v>5</c:v>
                 </c:pt>
-                <c:pt idx="3">
-                  <c:v>3</c:v>
-                </c:pt>
                 <c:pt idx="4">
-                  <c:v>3</c:v>
+                  <c:v>7</c:v>
                 </c:pt>
               </c:numCache>
             </c:numRef>
@@ -1328,13 +1328,13 @@
               <c:numCache>
                 <c:ptCount val="3"/>
                 <c:pt idx="0">
-                  <c:v>592</c:v>
+                  <c:v>637</c:v>
                 </c:pt>
                 <c:pt idx="1">
-                  <c:v>178</c:v>
+                  <c:v>76</c:v>
                 </c:pt>
                 <c:pt idx="2">
-                  <c:v>59</c:v>
+                  <c:v>149</c:v>
                 </c:pt>
               </c:numCache>
             </c:numRef>
@@ -6775,7 +6775,7 @@
                 <a:ea typeface="Cambria" pitchFamily="34" charset="-122"/>
                 <a:cs typeface="Cambria" pitchFamily="34" charset="-120"/>
               </a:rPr>
-              <a:t>51,3%</a:t>
+              <a:t>52,5%</a:t>
             </a:r>
             <a:endParaRPr lang="en-US" sz="3400" dirty="0"/>
           </a:p>
@@ -6931,7 +6931,7 @@
                 <a:ea typeface="Cambria" pitchFamily="34" charset="-122"/>
                 <a:cs typeface="Cambria" pitchFamily="34" charset="-120"/>
               </a:rPr>
-              <a:t>38,9%</a:t>
+              <a:t>43,2%</a:t>
             </a:r>
             <a:endParaRPr lang="en-US" sz="3400" dirty="0"/>
           </a:p>
@@ -7009,7 +7009,7 @@
                 <a:ea typeface="Cambria" pitchFamily="34" charset="-122"/>
                 <a:cs typeface="Cambria" pitchFamily="34" charset="-120"/>
               </a:rPr>
-              <a:t>71,4%</a:t>
+              <a:t>73,9%</a:t>
             </a:r>
             <a:endParaRPr lang="en-US" sz="3400" dirty="0"/>
           </a:p>
@@ -7087,7 +7087,7 @@
                 <a:ea typeface="Calibri" pitchFamily="34" charset="-122"/>
                 <a:cs typeface="Calibri" pitchFamily="34" charset="-120"/>
               </a:rPr>
-              <a:t>Corte: 27-07-2026</a:t>
+              <a:t>Corte: 05-08-2026</a:t>
             </a:r>
             <a:endParaRPr lang="en-US" sz="1100" dirty="0"/>
           </a:p>
@@ -7126,7 +7126,7 @@
                 <a:ea typeface="Calibri" pitchFamily="34" charset="-122"/>
                 <a:cs typeface="Calibri" pitchFamily="34" charset="-120"/>
               </a:rPr>
-              <a:t>Fuente: REPORTE_GERENCIAL + Listado de Puntos Punch Consolidado · Corte 27-07-2026 · Atrasos al 27-07-2026</a:t>
+              <a:t>Fuente: REPORTE_GERENCIAL + Listado de Puntos Punch Consolidado · Corte 05-08-2026 · Atrasos al 05-08-2026</a:t>
             </a:r>
             <a:endParaRPr lang="en-US" sz="850" dirty="0"/>
           </a:p>
@@ -15942,7 +15942,7 @@
                 <a:ea typeface="Cambria" pitchFamily="34" charset="-122"/>
                 <a:cs typeface="Cambria" pitchFamily="34" charset="-120"/>
               </a:rPr>
-              <a:t>51,3%</a:t>
+              <a:t>52,5%</a:t>
             </a:r>
             <a:endParaRPr lang="en-US" sz="3800" dirty="0"/>
           </a:p>
@@ -15981,7 +15981,7 @@
                 <a:ea typeface="Calibri" pitchFamily="34" charset="-122"/>
                 <a:cs typeface="Calibri" pitchFamily="34" charset="-120"/>
               </a:rPr>
-              <a:t>41/80</a:t>
+              <a:t>42/80</a:t>
             </a:r>
             <a:endParaRPr lang="en-US" sz="1400" dirty="0"/>
           </a:p>
@@ -16062,7 +16062,7 @@
                 <a:ea typeface="Calibri" pitchFamily="34" charset="-122"/>
                 <a:cs typeface="Calibri" pitchFamily="34" charset="-120"/>
               </a:rPr>
-              <a:t>39 subsistemas por caminar</a:t>
+              <a:t>38 subsistemas por caminar</a:t>
             </a:r>
             <a:endParaRPr lang="en-US" sz="950" dirty="0"/>
           </a:p>
@@ -16368,7 +16368,7 @@
                 <a:ea typeface="Cambria" pitchFamily="34" charset="-122"/>
                 <a:cs typeface="Cambria" pitchFamily="34" charset="-120"/>
               </a:rPr>
-              <a:t>38,9%</a:t>
+              <a:t>43,2%</a:t>
             </a:r>
             <a:endParaRPr lang="en-US" sz="3800" dirty="0"/>
           </a:p>
@@ -16407,7 +16407,7 @@
                 <a:ea typeface="Calibri" pitchFamily="34" charset="-122"/>
                 <a:cs typeface="Calibri" pitchFamily="34" charset="-120"/>
               </a:rPr>
-              <a:t>37/95</a:t>
+              <a:t>41/95</a:t>
             </a:r>
             <a:endParaRPr lang="en-US" sz="1400" dirty="0"/>
           </a:p>
@@ -16488,7 +16488,7 @@
                 <a:ea typeface="Calibri" pitchFamily="34" charset="-122"/>
                 <a:cs typeface="Calibri" pitchFamily="34" charset="-120"/>
               </a:rPr>
-              <a:t>20 aprobadas · 8 en revisión · 9 rechazadas</a:t>
+              <a:t>22 aprobadas · 14 en revisión · 5 rechazadas</a:t>
             </a:r>
             <a:endParaRPr lang="en-US" sz="950" dirty="0"/>
           </a:p>
@@ -16581,7 +16581,7 @@
                 <a:ea typeface="Cambria" pitchFamily="34" charset="-122"/>
                 <a:cs typeface="Cambria" pitchFamily="34" charset="-120"/>
               </a:rPr>
-              <a:t>71,4%</a:t>
+              <a:t>73,9%</a:t>
             </a:r>
             <a:endParaRPr lang="en-US" sz="3800" dirty="0"/>
           </a:p>
@@ -16620,7 +16620,7 @@
                 <a:ea typeface="Calibri" pitchFamily="34" charset="-122"/>
                 <a:cs typeface="Calibri" pitchFamily="34" charset="-120"/>
               </a:rPr>
-              <a:t>592/829</a:t>
+              <a:t>637/862</a:t>
             </a:r>
             <a:endParaRPr lang="en-US" sz="1400" dirty="0"/>
           </a:p>
@@ -16701,7 +16701,7 @@
                 <a:ea typeface="Calibri" pitchFamily="34" charset="-122"/>
                 <a:cs typeface="Calibri" pitchFamily="34" charset="-120"/>
               </a:rPr>
-              <a:t>237 abiertos · 178 atrasados</a:t>
+              <a:t>225 abiertos · 76 atrasados</a:t>
             </a:r>
             <a:endParaRPr lang="en-US" sz="950" dirty="0"/>
           </a:p>
@@ -16841,7 +16841,7 @@
                 <a:ea typeface="Calibri" pitchFamily="34" charset="-122"/>
                 <a:cs typeface="Calibri" pitchFamily="34" charset="-120"/>
               </a:rPr>
-              <a:t>960 de 1.386 ítems cerrados (69,3%); de los 426 abiertos, 332 ya pasaron su fecha requerida de cierre (77,9%).</a:t>
+              <a:t>1.022 de 1.437 ítems cerrados (71,1%); de los 415 abiertos, 166 ya pasaron su fecha requerida de cierre (40%).</a:t>
             </a:r>
             <a:endParaRPr lang="en-US" sz="1150" dirty="0"/>
           </a:p>
@@ -16920,7 +16920,7 @@
                 <a:ea typeface="Calibri" pitchFamily="34" charset="-122"/>
                 <a:cs typeface="Calibri" pitchFamily="34" charset="-120"/>
               </a:rPr>
-              <a:t>Operables 41/80 por Caminata 2 (51,3%); Facility 10/15 por Caminata 1 (66,7%).</a:t>
+              <a:t>Operables 42/80 por Caminata 2 (52,5%); Facility 10/15 por Caminata 1 (66,7%).</a:t>
             </a:r>
             <a:endParaRPr lang="en-US" sz="1150" dirty="0"/>
           </a:p>
@@ -16982,7 +16982,7 @@
                 <a:ea typeface="Calibri" pitchFamily="34" charset="-122"/>
                 <a:cs typeface="Calibri" pitchFamily="34" charset="-120"/>
               </a:rPr>
-              <a:t>Las carpetas están a 38,9% de entrega y el cuello está en el armado interno.  </a:t>
+              <a:t>Las carpetas están a 43,2% de entrega y el cuello está en el armado interno.  </a:t>
             </a:r>
             <a:pPr indent="0" marL="0">
               <a:lnSpc>
@@ -16999,7 +16999,7 @@
                 <a:ea typeface="Calibri" pitchFamily="34" charset="-122"/>
                 <a:cs typeface="Calibri" pitchFamily="34" charset="-120"/>
               </a:rPr>
-              <a:t>37 entregadas de 95: 20 aprobadas, 8 en revisión y 9 rechazadas. Quedan 14 en preparación y 44 sin iniciar.</a:t>
+              <a:t>41 entregadas de 95: 22 aprobadas, 14 en revisión y 5 rechazadas. Quedan 11 en preparación y 43 sin iniciar.</a:t>
             </a:r>
             <a:endParaRPr lang="en-US" sz="1150" dirty="0"/>
           </a:p>
@@ -17061,7 +17061,7 @@
                 <a:ea typeface="Calibri" pitchFamily="34" charset="-122"/>
                 <a:cs typeface="Calibri" pitchFamily="34" charset="-120"/>
               </a:rPr>
-              <a:t>Piping concentra el pendiente de P1.  </a:t>
+              <a:t>Eléctrica concentra el pendiente de P1.  </a:t>
             </a:r>
             <a:pPr indent="0" marL="0">
               <a:lnSpc>
@@ -17078,7 +17078,7 @@
                 <a:ea typeface="Calibri" pitchFamily="34" charset="-122"/>
                 <a:cs typeface="Calibri" pitchFamily="34" charset="-120"/>
               </a:rPr>
-              <a:t>97 de los 237 P1 abiertos (40,9%), con 72 atrasados.</a:t>
+              <a:t>112 de los 225 P1 abiertos (49,8%), con 52 atrasados.</a:t>
             </a:r>
             <a:endParaRPr lang="en-US" sz="1150" dirty="0"/>
           </a:p>
@@ -17117,7 +17117,7 @@
                 <a:ea typeface="Calibri" pitchFamily="34" charset="-122"/>
                 <a:cs typeface="Calibri" pitchFamily="34" charset="-120"/>
               </a:rPr>
-              <a:t>Fuente: REPORTE_GERENCIAL + Listado de Puntos Punch Consolidado · Corte 27-07-2026 · Atrasos al 27-07-2026</a:t>
+              <a:t>Fuente: REPORTE_GERENCIAL + Listado de Puntos Punch Consolidado · Corte 05-08-2026 · Atrasos al 05-08-2026</a:t>
             </a:r>
             <a:endParaRPr lang="en-US" sz="850" dirty="0"/>
           </a:p>
@@ -17570,7 +17570,7 @@
                 <a:ea typeface="Calibri" pitchFamily="34" charset="-122"/>
                 <a:cs typeface="Calibri" pitchFamily="34" charset="-120"/>
               </a:rPr>
-              <a:t>21,1%</a:t>
+              <a:t>23,2%</a:t>
             </a:r>
             <a:endParaRPr lang="en-US" sz="1100" dirty="0"/>
           </a:p>
@@ -17609,7 +17609,7 @@
                 <a:ea typeface="Cambria" pitchFamily="34" charset="-122"/>
                 <a:cs typeface="Cambria" pitchFamily="34" charset="-120"/>
               </a:rPr>
-              <a:t>20</a:t>
+              <a:t>22</a:t>
             </a:r>
             <a:endParaRPr lang="en-US" sz="2200" dirty="0"/>
           </a:p>
@@ -17729,7 +17729,7 @@
                 <a:ea typeface="Calibri" pitchFamily="34" charset="-122"/>
                 <a:cs typeface="Calibri" pitchFamily="34" charset="-120"/>
               </a:rPr>
-              <a:t>8,4%</a:t>
+              <a:t>14,7%</a:t>
             </a:r>
             <a:endParaRPr lang="en-US" sz="1100" dirty="0"/>
           </a:p>
@@ -17768,7 +17768,7 @@
                 <a:ea typeface="Cambria" pitchFamily="34" charset="-122"/>
                 <a:cs typeface="Cambria" pitchFamily="34" charset="-120"/>
               </a:rPr>
-              <a:t>8</a:t>
+              <a:t>14</a:t>
             </a:r>
             <a:endParaRPr lang="en-US" sz="2200" dirty="0"/>
           </a:p>
@@ -17888,7 +17888,7 @@
                 <a:ea typeface="Calibri" pitchFamily="34" charset="-122"/>
                 <a:cs typeface="Calibri" pitchFamily="34" charset="-120"/>
               </a:rPr>
-              <a:t>9,5%</a:t>
+              <a:t>5,3%</a:t>
             </a:r>
             <a:endParaRPr lang="en-US" sz="1100" dirty="0"/>
           </a:p>
@@ -17927,7 +17927,7 @@
                 <a:ea typeface="Cambria" pitchFamily="34" charset="-122"/>
                 <a:cs typeface="Cambria" pitchFamily="34" charset="-120"/>
               </a:rPr>
-              <a:t>9</a:t>
+              <a:t>5</a:t>
             </a:r>
             <a:endParaRPr lang="en-US" sz="2200" dirty="0"/>
           </a:p>
@@ -18047,7 +18047,7 @@
                 <a:ea typeface="Calibri" pitchFamily="34" charset="-122"/>
                 <a:cs typeface="Calibri" pitchFamily="34" charset="-120"/>
               </a:rPr>
-              <a:t>14,7%</a:t>
+              <a:t>11,6%</a:t>
             </a:r>
             <a:endParaRPr lang="en-US" sz="1100" dirty="0"/>
           </a:p>
@@ -18086,7 +18086,7 @@
                 <a:ea typeface="Cambria" pitchFamily="34" charset="-122"/>
                 <a:cs typeface="Cambria" pitchFamily="34" charset="-120"/>
               </a:rPr>
-              <a:t>14</a:t>
+              <a:t>11</a:t>
             </a:r>
             <a:endParaRPr lang="en-US" sz="2200" dirty="0"/>
           </a:p>
@@ -18206,7 +18206,7 @@
                 <a:ea typeface="Calibri" pitchFamily="34" charset="-122"/>
                 <a:cs typeface="Calibri" pitchFamily="34" charset="-120"/>
               </a:rPr>
-              <a:t>46,3%</a:t>
+              <a:t>45,3%</a:t>
             </a:r>
             <a:endParaRPr lang="en-US" sz="1100" dirty="0"/>
           </a:p>
@@ -18245,7 +18245,7 @@
                 <a:ea typeface="Cambria" pitchFamily="34" charset="-122"/>
                 <a:cs typeface="Cambria" pitchFamily="34" charset="-120"/>
               </a:rPr>
-              <a:t>44</a:t>
+              <a:t>43</a:t>
             </a:r>
             <a:endParaRPr lang="en-US" sz="2200" dirty="0"/>
           </a:p>
@@ -18287,7 +18287,7 @@
                 <a:ea typeface="Calibri" pitchFamily="34" charset="-122"/>
                 <a:cs typeface="Calibri" pitchFamily="34" charset="-120"/>
               </a:rPr>
-              <a:t>37 carpetas ya están en manos del cliente (38,9%) y 25 subsistemas tienen tarjeta verde. El grueso del pendiente todavía no sale de Besalco.</a:t>
+              <a:t>41 carpetas ya están en manos del cliente (43,2%) y 28 subsistemas tienen tarjeta verde. El grueso del pendiente todavía no sale de Besalco.</a:t>
             </a:r>
             <a:endParaRPr lang="en-US" sz="1000" dirty="0"/>
           </a:p>
@@ -18326,7 +18326,7 @@
                 <a:ea typeface="Calibri" pitchFamily="34" charset="-122"/>
                 <a:cs typeface="Calibri" pitchFamily="34" charset="-120"/>
               </a:rPr>
-              <a:t>Fuente: REPORTE_GERENCIAL + Listado de Puntos Punch Consolidado · Corte 27-07-2026 · Atrasos al 27-07-2026</a:t>
+              <a:t>Fuente: REPORTE_GERENCIAL + Listado de Puntos Punch Consolidado · Corte 05-08-2026 · Atrasos al 05-08-2026</a:t>
             </a:r>
             <a:endParaRPr lang="en-US" sz="850" dirty="0"/>
           </a:p>
@@ -18577,7 +18577,7 @@
                 <a:ea typeface="Calibri" pitchFamily="34" charset="-122"/>
                 <a:cs typeface="Calibri" pitchFamily="34" charset="-120"/>
               </a:rPr>
-              <a:t>829 P1 levantados; 71,4% cerrados. Atrasado = ítem abierto cuya fecha requerida de cierre ya venció al 27-07-2026.</a:t>
+              <a:t>862 P1 levantados; 73,9% cerrados. Atrasado = ítem abierto cuya fecha requerida de cierre ya venció al 05-08-2026.</a:t>
             </a:r>
             <a:endParaRPr lang="en-US" sz="1350" dirty="0"/>
           </a:p>
@@ -18709,7 +18709,7 @@
                 <a:ea typeface="Cambria" pitchFamily="34" charset="-122"/>
                 <a:cs typeface="Cambria" pitchFamily="34" charset="-120"/>
               </a:rPr>
-              <a:t>71,4%</a:t>
+              <a:t>73,9%</a:t>
             </a:r>
             <a:endParaRPr lang="en-US" sz="1900" dirty="0"/>
           </a:p>
@@ -18824,7 +18824,7 @@
                 <a:ea typeface="Calibri" pitchFamily="34" charset="-122"/>
                 <a:cs typeface="Calibri" pitchFamily="34" charset="-120"/>
               </a:rPr>
-              <a:t>592</a:t>
+              <a:t>637</a:t>
             </a:r>
             <a:endParaRPr lang="en-US" sz="1100" dirty="0"/>
           </a:p>
@@ -18922,7 +18922,7 @@
                 <a:ea typeface="Calibri" pitchFamily="34" charset="-122"/>
                 <a:cs typeface="Calibri" pitchFamily="34" charset="-120"/>
               </a:rPr>
-              <a:t>178</a:t>
+              <a:t>76</a:t>
             </a:r>
             <a:endParaRPr lang="en-US" sz="1100" dirty="0"/>
           </a:p>
@@ -19020,7 +19020,7 @@
                 <a:ea typeface="Calibri" pitchFamily="34" charset="-122"/>
                 <a:cs typeface="Calibri" pitchFamily="34" charset="-120"/>
               </a:rPr>
-              <a:t>59</a:t>
+              <a:t>149</a:t>
             </a:r>
             <a:endParaRPr lang="en-US" sz="1100" dirty="0"/>
           </a:p>
@@ -19103,7 +19103,7 @@
                 <a:ea typeface="Calibri" pitchFamily="34" charset="-122"/>
                 <a:cs typeface="Calibri" pitchFamily="34" charset="-120"/>
               </a:rPr>
-              <a:t>Mediana de 22 días vencidos; el más antiguo lleva 78. 281 entre 1-30 días, 51 entre 31-90 días.</a:t>
+              <a:t>Mediana de 31 días vencidos; el más antiguo lleva 87. 21 entre 1-30 días, 145 entre 31-90 días.</a:t>
             </a:r>
             <a:endParaRPr lang="en-US" sz="1150" dirty="0"/>
           </a:p>
@@ -19142,7 +19142,7 @@
                 <a:ea typeface="Calibri" pitchFamily="34" charset="-122"/>
                 <a:cs typeface="Calibri" pitchFamily="34" charset="-120"/>
               </a:rPr>
-              <a:t>Fuente: REPORTE_GERENCIAL + Listado de Puntos Punch Consolidado · Corte 27-07-2026 · Atrasos al 27-07-2026</a:t>
+              <a:t>Fuente: REPORTE_GERENCIAL + Listado de Puntos Punch Consolidado · Corte 05-08-2026 · Atrasos al 05-08-2026</a:t>
             </a:r>
             <a:endParaRPr lang="en-US" sz="850" dirty="0"/>
           </a:p>
@@ -19474,7 +19474,7 @@
                 <a:ea typeface="Calibri" pitchFamily="34" charset="-122"/>
                 <a:cs typeface="Calibri" pitchFamily="34" charset="-120"/>
               </a:rPr>
-              <a:t>Recuperar los 332 ítems atrasados</a:t>
+              <a:t>Recuperar los 166 ítems atrasados</a:t>
             </a:r>
             <a:endParaRPr lang="en-US" sz="1400" dirty="0"/>
           </a:p>
@@ -19516,7 +19516,7 @@
                 <a:ea typeface="Calibri" pitchFamily="34" charset="-122"/>
                 <a:cs typeface="Calibri" pitchFamily="34" charset="-120"/>
               </a:rPr>
-              <a:t>77,9% de los 426 abiertos ya venció su fecha requerida. Foco en Piping (72), Eléctrica (58), Obras Civiles (29).</a:t>
+              <a:t>40% de los 415 abiertos ya venció su fecha requerida. Foco en Eléctrica (52), Piping (7), Obras Civiles (7).</a:t>
             </a:r>
             <a:endParaRPr lang="en-US" sz="1100" dirty="0"/>
           </a:p>
@@ -19616,7 +19616,7 @@
                 <a:ea typeface="Calibri" pitchFamily="34" charset="-122"/>
                 <a:cs typeface="Calibri" pitchFamily="34" charset="-120"/>
               </a:rPr>
-              <a:t>Ejecutar las 39 caminatas de Operables pendientes</a:t>
+              <a:t>Ejecutar las 38 caminatas de Operables pendientes</a:t>
             </a:r>
             <a:endParaRPr lang="en-US" sz="1400" dirty="0"/>
           </a:p>
@@ -19658,7 +19658,7 @@
                 <a:ea typeface="Calibri" pitchFamily="34" charset="-122"/>
                 <a:cs typeface="Calibri" pitchFamily="34" charset="-120"/>
               </a:rPr>
-              <a:t>La Caminata 2 va en 51,3% (41/80). Sin caminata no se levanta el punch final ni se habilita la entrega de la carpeta.</a:t>
+              <a:t>La Caminata 2 va en 52,5% (42/80). Sin caminata no se levanta el punch final ni se habilita la entrega de la carpeta.</a:t>
             </a:r>
             <a:endParaRPr lang="en-US" sz="1100" dirty="0"/>
           </a:p>
@@ -19758,7 +19758,7 @@
                 <a:ea typeface="Calibri" pitchFamily="34" charset="-122"/>
                 <a:cs typeface="Calibri" pitchFamily="34" charset="-120"/>
               </a:rPr>
-              <a:t>Sacar del armado interno las 58 carpetas retenidas</a:t>
+              <a:t>Sacar del armado interno las 54 carpetas retenidas</a:t>
             </a:r>
             <a:endParaRPr lang="en-US" sz="1400" dirty="0"/>
           </a:p>
@@ -19800,7 +19800,7 @@
                 <a:ea typeface="Calibri" pitchFamily="34" charset="-122"/>
                 <a:cs typeface="Calibri" pitchFamily="34" charset="-120"/>
               </a:rPr>
-              <a:t>14 están en preparación y 44 sin iniciar. Solo 37 de 95 (38,9%) llegaron al cliente; 9 volvieron rechazadas y hay que rearmarlas.</a:t>
+              <a:t>11 están en preparación y 43 sin iniciar. Solo 41 de 95 (43,2%) llegaron al cliente; 5 volvieron rechazadas y hay que rearmarlas.</a:t>
             </a:r>
             <a:endParaRPr lang="en-US" sz="1100" dirty="0"/>
           </a:p>
@@ -19942,7 +19942,7 @@
                 <a:ea typeface="Calibri" pitchFamily="34" charset="-122"/>
                 <a:cs typeface="Calibri" pitchFamily="34" charset="-120"/>
               </a:rPr>
-              <a:t>Concentra 181 P1 abiertos y 144 atrasados sobre 74 subsistemas. Es la ruta crítica del proyecto.</a:t>
+              <a:t>Concentra 169 P1 abiertos y 44 atrasados sobre 74 subsistemas. Es la ruta crítica del proyecto.</a:t>
             </a:r>
             <a:endParaRPr lang="en-US" sz="1100" dirty="0"/>
           </a:p>
@@ -19981,7 +19981,7 @@
                 <a:ea typeface="Calibri" pitchFamily="34" charset="-122"/>
                 <a:cs typeface="Calibri" pitchFamily="34" charset="-120"/>
               </a:rPr>
-              <a:t>Fuente: REPORTE_GERENCIAL + Listado de Puntos Punch Consolidado · Corte 27-07-2026 · Atrasos al 27-07-2026</a:t>
+              <a:t>Fuente: REPORTE_GERENCIAL + Listado de Puntos Punch Consolidado · Corte 05-08-2026 · Atrasos al 05-08-2026</a:t>
             </a:r>
             <a:endParaRPr lang="en-US" sz="850" dirty="0"/>
           </a:p>

--- a/panel_control_TOP_P1/Panel_Control_TOP_P1.pptx
+++ b/panel_control_TOP_P1/Panel_Control_TOP_P1.pptx
@@ -687,13 +687,13 @@
               <c:numCache>
                 <c:ptCount val="3"/>
                 <c:pt idx="0">
-                  <c:v>1148</c:v>
+                  <c:v>1154</c:v>
                 </c:pt>
                 <c:pt idx="1">
-                  <c:v>830</c:v>
+                  <c:v>828</c:v>
                 </c:pt>
                 <c:pt idx="2">
-                  <c:v>10</c:v>
+                  <c:v>6</c:v>
                 </c:pt>
               </c:numCache>
             </c:numRef>
@@ -4023,16 +4023,16 @@
                 <c:formatCode>General</c:formatCode>
                 <c:ptCount val="6"/>
                 <c:pt idx="0">
-                  <c:v>74</c:v>
+                  <c:v>217</c:v>
                 </c:pt>
                 <c:pt idx="1">
-                  <c:v>98</c:v>
+                  <c:v>173</c:v>
                 </c:pt>
                 <c:pt idx="2">
-                  <c:v>128</c:v>
+                  <c:v>153</c:v>
                 </c:pt>
                 <c:pt idx="3">
-                  <c:v>88</c:v>
+                  <c:v>107</c:v>
                 </c:pt>
                 <c:pt idx="4">
                   <c:v>17</c:v>
@@ -4125,16 +4125,16 @@
                 <c:formatCode>General</c:formatCode>
                 <c:ptCount val="6"/>
                 <c:pt idx="0">
-                  <c:v>177</c:v>
+                  <c:v>32</c:v>
                 </c:pt>
                 <c:pt idx="1">
-                  <c:v>118</c:v>
+                  <c:v>43</c:v>
                 </c:pt>
                 <c:pt idx="2">
-                  <c:v>53</c:v>
+                  <c:v>28</c:v>
                 </c:pt>
                 <c:pt idx="3">
-                  <c:v>38</c:v>
+                  <c:v>19</c:v>
                 </c:pt>
                 <c:pt idx="4">
                   <c:v>19</c:v>
@@ -8572,7 +8572,7 @@
                 <a:ea typeface="Cambria" pitchFamily="34" charset="-122"/>
                 <a:cs typeface="Cambria" pitchFamily="34" charset="-120"/>
               </a:rPr>
-              <a:t>57,7%</a:t>
+              <a:t>58%</a:t>
             </a:r>
             <a:endParaRPr lang="en-US" sz="3400" dirty="0"/>
           </a:p>
@@ -8650,7 +8650,7 @@
                 <a:ea typeface="Calibri" pitchFamily="34" charset="-122"/>
                 <a:cs typeface="Calibri" pitchFamily="34" charset="-120"/>
               </a:rPr>
-              <a:t>Corte: 26-07-2026   ·   Corte anterior: 16-07-2026</a:t>
+              <a:t>Corte: 10-08-2026   ·   Corte anterior: 26-07-2026</a:t>
             </a:r>
             <a:endParaRPr lang="en-US" sz="1100" dirty="0"/>
           </a:p>
@@ -8689,7 +8689,7 @@
                 <a:ea typeface="Calibri" pitchFamily="34" charset="-122"/>
                 <a:cs typeface="Calibri" pitchFamily="34" charset="-120"/>
               </a:rPr>
-              <a:t>Fuente: Estatus_Resumen_General_QAQC.xlsx · Corte 26-07-2026 · Áreas 2000/3000/4000/8000</a:t>
+              <a:t>Fuente: Estatus_Resumen_General_QAQC.xlsx · Corte 10-08-2026 · Áreas 2000/3000/4000/8000</a:t>
             </a:r>
             <a:endParaRPr lang="en-US" sz="850" dirty="0"/>
           </a:p>
@@ -9564,13 +9564,13 @@
             <a:r>
               <a:rPr lang="en-US" sz="900" b="1" dirty="0">
                 <a:solidFill>
-                  <a:srgbClr val="1F7A44"/>
-                </a:solidFill>
-                <a:latin typeface="Calibri" pitchFamily="34" charset="0"/>
-                <a:ea typeface="Calibri" pitchFamily="34" charset="-122"/>
-                <a:cs typeface="Calibri" pitchFamily="34" charset="-120"/>
-              </a:rPr>
-              <a:t>▲ +1 vs. corte anterior</a:t>
+                  <a:srgbClr val="56606E"/>
+                </a:solidFill>
+                <a:latin typeface="Calibri" pitchFamily="34" charset="0"/>
+                <a:ea typeface="Calibri" pitchFamily="34" charset="-122"/>
+                <a:cs typeface="Calibri" pitchFamily="34" charset="-120"/>
+              </a:rPr>
+              <a:t>= sin cambio vs. corte anterior</a:t>
             </a:r>
             <a:endParaRPr lang="en-US" sz="900" dirty="0"/>
           </a:p>
@@ -9663,7 +9663,7 @@
                 <a:ea typeface="Cambria" pitchFamily="34" charset="-122"/>
                 <a:cs typeface="Cambria" pitchFamily="34" charset="-120"/>
               </a:rPr>
-              <a:t>57,7%</a:t>
+              <a:t>58%</a:t>
             </a:r>
             <a:endParaRPr lang="en-US" sz="4000" dirty="0"/>
           </a:p>
@@ -9702,7 +9702,7 @@
                 <a:ea typeface="Calibri" pitchFamily="34" charset="-122"/>
                 <a:cs typeface="Calibri" pitchFamily="34" charset="-120"/>
               </a:rPr>
-              <a:t>1.148/1.988</a:t>
+              <a:t>1.154/1.988</a:t>
             </a:r>
             <a:endParaRPr lang="en-US" sz="1400" dirty="0"/>
           </a:p>
@@ -9780,7 +9780,7 @@
                 <a:ea typeface="Calibri" pitchFamily="34" charset="-122"/>
                 <a:cs typeface="Calibri" pitchFamily="34" charset="-120"/>
               </a:rPr>
-              <a:t>830 abiertos · 405 vencidos · 10 en trámite</a:t>
+              <a:t>828 abiertos · 667 vencidos · 6 en trámite</a:t>
             </a:r>
             <a:endParaRPr lang="en-US" sz="950" dirty="0"/>
           </a:p>
@@ -9819,7 +9819,7 @@
                 <a:ea typeface="Calibri" pitchFamily="34" charset="-122"/>
                 <a:cs typeface="Calibri" pitchFamily="34" charset="-120"/>
               </a:rPr>
-              <a:t>▲ +1 vs. corte anterior</a:t>
+              <a:t>▲ +6 vs. corte anterior</a:t>
             </a:r>
             <a:endParaRPr lang="en-US" sz="900" dirty="0"/>
           </a:p>
@@ -9942,7 +9942,7 @@
                 <a:ea typeface="Calibri" pitchFamily="34" charset="-122"/>
                 <a:cs typeface="Calibri" pitchFamily="34" charset="-120"/>
               </a:rPr>
-              <a:t>Se destrabó la programación de caminatas, pero no la ejecución.  </a:t>
+              <a:t>Avance de caminatas al 100%.  </a:t>
             </a:r>
             <a:pPr indent="0" marL="0">
               <a:lnSpc>
@@ -9959,7 +9959,7 @@
                 <a:ea typeface="Calibri" pitchFamily="34" charset="-122"/>
                 <a:cs typeface="Calibri" pitchFamily="34" charset="-120"/>
               </a:rPr>
-              <a:t>Los subsistemas «por programar» bajaron de 36 a 1, mientras las realizadas al 100% se mantienen en 90 (66,7%).</a:t>
+              <a:t>90 de 135 realizadas (66,7%); 44 próximas y 1 por programar.</a:t>
             </a:r>
             <a:endParaRPr lang="en-US" sz="1250" dirty="0"/>
           </a:p>
@@ -10021,7 +10021,7 @@
                 <a:ea typeface="Calibri" pitchFamily="34" charset="-122"/>
                 <a:cs typeface="Calibri" pitchFamily="34" charset="-120"/>
               </a:rPr>
-              <a:t>Las carpetas TOP siguen sin aprobaciones y suben los rechazos.  </a:t>
+              <a:t>Las carpetas TOP siguen sin aprobaciones.  </a:t>
             </a:r>
             <a:pPr indent="0" marL="0">
               <a:lnSpc>
@@ -10038,7 +10038,7 @@
                 <a:ea typeface="Calibri" pitchFamily="34" charset="-122"/>
                 <a:cs typeface="Calibri" pitchFamily="34" charset="-120"/>
               </a:rPr>
-              <a:t>27 entregadas de 135 (20%) y 0 aprobadas; las rechazadas pasaron de 8 a 12.</a:t>
+              <a:t>27 entregadas de 135 (20%) y 0 aprobadas; 12 rechazadas.</a:t>
             </a:r>
             <a:endParaRPr lang="en-US" sz="1250" dirty="0"/>
           </a:p>
@@ -10117,7 +10117,7 @@
                 <a:ea typeface="Calibri" pitchFamily="34" charset="-122"/>
                 <a:cs typeface="Calibri" pitchFamily="34" charset="-120"/>
               </a:rPr>
-              <a:t>+1 P1 cerrado desde el corte anterior; 830 abiertos, de los cuales 405 superaron su fecha de vencimiento (+4 en el período). El área 3000 concentra 707 (85,2%).</a:t>
+              <a:t>+6 P1 cerrado desde el corte anterior; 828 abiertos, de los cuales 667 superaron su fecha de vencimiento (+262 en el período). El área 3000 concentra 705 (85,1%).</a:t>
             </a:r>
             <a:endParaRPr lang="en-US" sz="1250" dirty="0"/>
           </a:p>
@@ -10156,7 +10156,7 @@
                 <a:ea typeface="Calibri" pitchFamily="34" charset="-122"/>
                 <a:cs typeface="Calibri" pitchFamily="34" charset="-120"/>
               </a:rPr>
-              <a:t>Fuente: Estatus_Resumen_General_QAQC.xlsx · Corte 26-07-2026 · Áreas 2000/3000/4000/8000</a:t>
+              <a:t>Fuente: Estatus_Resumen_General_QAQC.xlsx · Corte 10-08-2026 · Áreas 2000/3000/4000/8000</a:t>
             </a:r>
             <a:endParaRPr lang="en-US" sz="850" dirty="0"/>
           </a:p>
@@ -10898,7 +10898,7 @@
                 <a:ea typeface="Calibri" pitchFamily="34" charset="-122"/>
                 <a:cs typeface="Calibri" pitchFamily="34" charset="-120"/>
               </a:rPr>
-              <a:t>91,9%</a:t>
+              <a:t>92,8%</a:t>
             </a:r>
             <a:endParaRPr lang="en-US" sz="1300" dirty="0"/>
           </a:p>
@@ -10937,7 +10937,7 @@
                 <a:ea typeface="Calibri" pitchFamily="34" charset="-122"/>
                 <a:cs typeface="Calibri" pitchFamily="34" charset="-120"/>
               </a:rPr>
-              <a:t>38 (19)</a:t>
+              <a:t>38 (27)</a:t>
             </a:r>
             <a:endParaRPr lang="en-US" sz="1300" dirty="0"/>
           </a:p>
@@ -11314,7 +11314,7 @@
                 <a:ea typeface="Calibri" pitchFamily="34" charset="-122"/>
                 <a:cs typeface="Calibri" pitchFamily="34" charset="-120"/>
               </a:rPr>
-              <a:t>707 (366)</a:t>
+              <a:t>705 (598)</a:t>
             </a:r>
             <a:endParaRPr lang="en-US" sz="1300" dirty="0"/>
           </a:p>
@@ -11632,7 +11632,7 @@
                 <a:ea typeface="Calibri" pitchFamily="34" charset="-122"/>
                 <a:cs typeface="Calibri" pitchFamily="34" charset="-120"/>
               </a:rPr>
-              <a:t>75,9%</a:t>
+              <a:t>76,2%</a:t>
             </a:r>
             <a:endParaRPr lang="en-US" sz="1300" dirty="0"/>
           </a:p>
@@ -11671,7 +11671,7 @@
                 <a:ea typeface="Calibri" pitchFamily="34" charset="-122"/>
                 <a:cs typeface="Calibri" pitchFamily="34" charset="-120"/>
               </a:rPr>
-              <a:t>84 (19)</a:t>
+              <a:t>84 (41)</a:t>
             </a:r>
             <a:endParaRPr lang="en-US" sz="1300" dirty="0"/>
           </a:p>
@@ -12210,7 +12210,7 @@
                 <a:ea typeface="Calibri" pitchFamily="34" charset="-122"/>
                 <a:cs typeface="Calibri" pitchFamily="34" charset="-120"/>
               </a:rPr>
-              <a:t>Fuente: Estatus_Resumen_General_QAQC.xlsx · Corte 26-07-2026 · Áreas 2000/3000/4000/8000</a:t>
+              <a:t>Fuente: Estatus_Resumen_General_QAQC.xlsx · Corte 10-08-2026 · Áreas 2000/3000/4000/8000</a:t>
             </a:r>
             <a:endParaRPr lang="en-US" sz="850" dirty="0"/>
           </a:p>
@@ -12815,7 +12815,7 @@
                 <a:ea typeface="Calibri" pitchFamily="34" charset="-122"/>
                 <a:cs typeface="Calibri" pitchFamily="34" charset="-120"/>
               </a:rPr>
-              <a:t>44 próximas a realizar y 1 por programar. Las «por programar» bajaron 35 en el período.</a:t>
+              <a:t>44 próximas a realizar y 1 por programar.</a:t>
             </a:r>
             <a:endParaRPr lang="en-US" sz="1150" dirty="0"/>
           </a:p>
@@ -12854,7 +12854,7 @@
                 <a:ea typeface="Calibri" pitchFamily="34" charset="-122"/>
                 <a:cs typeface="Calibri" pitchFamily="34" charset="-120"/>
               </a:rPr>
-              <a:t>Fuente: Estatus_Resumen_General_QAQC.xlsx · Corte 26-07-2026 · Áreas 2000/3000/4000/8000</a:t>
+              <a:t>Fuente: Estatus_Resumen_General_QAQC.xlsx · Corte 10-08-2026 · Áreas 2000/3000/4000/8000</a:t>
             </a:r>
             <a:endParaRPr lang="en-US" sz="850" dirty="0"/>
           </a:p>
@@ -13282,45 +13282,6 @@
         </p:nvSpPr>
         <p:spPr>
           <a:xfrm>
-            <a:off x="9509760" y="2450592"/>
-            <a:ext cx="914400" cy="566928"/>
-          </a:xfrm>
-          <a:prstGeom prst="rect">
-            <a:avLst/>
-          </a:prstGeom>
-          <a:noFill/>
-          <a:ln/>
-        </p:spPr>
-        <p:txBody>
-          <a:bodyPr wrap="square" lIns="0" tIns="0" rIns="0" bIns="0" rtlCol="0" anchor="ctr"/>
-          <a:lstStyle/>
-          <a:p>
-            <a:pPr algn="r" indent="0" marL="0">
-              <a:buNone/>
-            </a:pPr>
-            <a:r>
-              <a:rPr lang="en-US" sz="950" b="1" dirty="0">
-                <a:solidFill>
-                  <a:srgbClr val="1F7A44"/>
-                </a:solidFill>
-                <a:latin typeface="Calibri" pitchFamily="34" charset="0"/>
-                <a:ea typeface="Calibri" pitchFamily="34" charset="-122"/>
-                <a:cs typeface="Calibri" pitchFamily="34" charset="-120"/>
-              </a:rPr>
-              <a:t>▲ +1</a:t>
-            </a:r>
-            <a:endParaRPr lang="en-US" sz="950" dirty="0"/>
-          </a:p>
-        </p:txBody>
-      </p:sp>
-      <p:sp>
-        <p:nvSpPr>
-          <p:cNvPr id="13" name="Text 9"/>
-          <p:cNvSpPr/>
-          <p:nvPr/>
-        </p:nvSpPr>
-        <p:spPr>
-          <a:xfrm>
             <a:off x="10469880" y="2450592"/>
             <a:ext cx="868680" cy="566928"/>
           </a:xfrm>
@@ -13354,7 +13315,7 @@
       </p:sp>
       <p:sp>
         <p:nvSpPr>
-          <p:cNvPr id="14" name="Shape 10"/>
+          <p:cNvPr id="13" name="Shape 9"/>
           <p:cNvSpPr/>
           <p:nvPr/>
         </p:nvSpPr>
@@ -13376,7 +13337,7 @@
       </p:sp>
       <p:sp>
         <p:nvSpPr>
-          <p:cNvPr id="15" name="Shape 11"/>
+          <p:cNvPr id="14" name="Shape 10"/>
           <p:cNvSpPr/>
           <p:nvPr/>
         </p:nvSpPr>
@@ -13396,7 +13357,7 @@
       </p:sp>
       <p:sp>
         <p:nvSpPr>
-          <p:cNvPr id="16" name="Text 12"/>
+          <p:cNvPr id="15" name="Text 11"/>
           <p:cNvSpPr/>
           <p:nvPr/>
         </p:nvSpPr>
@@ -13435,46 +13396,7 @@
       </p:sp>
       <p:sp>
         <p:nvSpPr>
-          <p:cNvPr id="17" name="Text 13"/>
-          <p:cNvSpPr/>
-          <p:nvPr/>
-        </p:nvSpPr>
-        <p:spPr>
-          <a:xfrm>
-            <a:off x="9509760" y="3072384"/>
-            <a:ext cx="914400" cy="566928"/>
-          </a:xfrm>
-          <a:prstGeom prst="rect">
-            <a:avLst/>
-          </a:prstGeom>
-          <a:noFill/>
-          <a:ln/>
-        </p:spPr>
-        <p:txBody>
-          <a:bodyPr wrap="square" lIns="0" tIns="0" rIns="0" bIns="0" rtlCol="0" anchor="ctr"/>
-          <a:lstStyle/>
-          <a:p>
-            <a:pPr algn="r" indent="0" marL="0">
-              <a:buNone/>
-            </a:pPr>
-            <a:r>
-              <a:rPr lang="en-US" sz="950" b="1" dirty="0">
-                <a:solidFill>
-                  <a:srgbClr val="C0392B"/>
-                </a:solidFill>
-                <a:latin typeface="Calibri" pitchFamily="34" charset="0"/>
-                <a:ea typeface="Calibri" pitchFamily="34" charset="-122"/>
-                <a:cs typeface="Calibri" pitchFamily="34" charset="-120"/>
-              </a:rPr>
-              <a:t>▼ -3</a:t>
-            </a:r>
-            <a:endParaRPr lang="en-US" sz="950" dirty="0"/>
-          </a:p>
-        </p:txBody>
-      </p:sp>
-      <p:sp>
-        <p:nvSpPr>
-          <p:cNvPr id="18" name="Text 14"/>
+          <p:cNvPr id="16" name="Text 12"/>
           <p:cNvSpPr/>
           <p:nvPr/>
         </p:nvSpPr>
@@ -13513,7 +13435,7 @@
       </p:sp>
       <p:sp>
         <p:nvSpPr>
-          <p:cNvPr id="19" name="Shape 15"/>
+          <p:cNvPr id="17" name="Shape 13"/>
           <p:cNvSpPr/>
           <p:nvPr/>
         </p:nvSpPr>
@@ -13535,7 +13457,7 @@
       </p:sp>
       <p:sp>
         <p:nvSpPr>
-          <p:cNvPr id="20" name="Shape 16"/>
+          <p:cNvPr id="18" name="Shape 14"/>
           <p:cNvSpPr/>
           <p:nvPr/>
         </p:nvSpPr>
@@ -13555,7 +13477,7 @@
       </p:sp>
       <p:sp>
         <p:nvSpPr>
-          <p:cNvPr id="21" name="Text 17"/>
+          <p:cNvPr id="19" name="Text 15"/>
           <p:cNvSpPr/>
           <p:nvPr/>
         </p:nvSpPr>
@@ -13594,7 +13516,7 @@
       </p:sp>
       <p:sp>
         <p:nvSpPr>
-          <p:cNvPr id="22" name="Text 18"/>
+          <p:cNvPr id="20" name="Text 16"/>
           <p:cNvSpPr/>
           <p:nvPr/>
         </p:nvSpPr>
@@ -13633,7 +13555,7 @@
       </p:sp>
       <p:sp>
         <p:nvSpPr>
-          <p:cNvPr id="23" name="Shape 19"/>
+          <p:cNvPr id="21" name="Shape 17"/>
           <p:cNvSpPr/>
           <p:nvPr/>
         </p:nvSpPr>
@@ -13655,7 +13577,7 @@
       </p:sp>
       <p:sp>
         <p:nvSpPr>
-          <p:cNvPr id="24" name="Shape 20"/>
+          <p:cNvPr id="22" name="Shape 18"/>
           <p:cNvSpPr/>
           <p:nvPr/>
         </p:nvSpPr>
@@ -13675,7 +13597,7 @@
       </p:sp>
       <p:sp>
         <p:nvSpPr>
-          <p:cNvPr id="25" name="Text 21"/>
+          <p:cNvPr id="23" name="Text 19"/>
           <p:cNvSpPr/>
           <p:nvPr/>
         </p:nvSpPr>
@@ -13714,46 +13636,7 @@
       </p:sp>
       <p:sp>
         <p:nvSpPr>
-          <p:cNvPr id="26" name="Text 22"/>
-          <p:cNvSpPr/>
-          <p:nvPr/>
-        </p:nvSpPr>
-        <p:spPr>
-          <a:xfrm>
-            <a:off x="9509760" y="4315968"/>
-            <a:ext cx="914400" cy="566928"/>
-          </a:xfrm>
-          <a:prstGeom prst="rect">
-            <a:avLst/>
-          </a:prstGeom>
-          <a:noFill/>
-          <a:ln/>
-        </p:spPr>
-        <p:txBody>
-          <a:bodyPr wrap="square" lIns="0" tIns="0" rIns="0" bIns="0" rtlCol="0" anchor="ctr"/>
-          <a:lstStyle/>
-          <a:p>
-            <a:pPr algn="r" indent="0" marL="0">
-              <a:buNone/>
-            </a:pPr>
-            <a:r>
-              <a:rPr lang="en-US" sz="950" b="1" dirty="0">
-                <a:solidFill>
-                  <a:srgbClr val="C0392B"/>
-                </a:solidFill>
-                <a:latin typeface="Calibri" pitchFamily="34" charset="0"/>
-                <a:ea typeface="Calibri" pitchFamily="34" charset="-122"/>
-                <a:cs typeface="Calibri" pitchFamily="34" charset="-120"/>
-              </a:rPr>
-              <a:t>▲ +4</a:t>
-            </a:r>
-            <a:endParaRPr lang="en-US" sz="950" dirty="0"/>
-          </a:p>
-        </p:txBody>
-      </p:sp>
-      <p:sp>
-        <p:nvSpPr>
-          <p:cNvPr id="27" name="Text 23"/>
+          <p:cNvPr id="24" name="Text 20"/>
           <p:cNvSpPr/>
           <p:nvPr/>
         </p:nvSpPr>
@@ -13792,7 +13675,7 @@
       </p:sp>
       <p:sp>
         <p:nvSpPr>
-          <p:cNvPr id="28" name="Shape 24"/>
+          <p:cNvPr id="25" name="Shape 21"/>
           <p:cNvSpPr/>
           <p:nvPr/>
         </p:nvSpPr>
@@ -13814,7 +13697,7 @@
       </p:sp>
       <p:sp>
         <p:nvSpPr>
-          <p:cNvPr id="29" name="Shape 25"/>
+          <p:cNvPr id="26" name="Shape 22"/>
           <p:cNvSpPr/>
           <p:nvPr/>
         </p:nvSpPr>
@@ -13834,7 +13717,7 @@
       </p:sp>
       <p:sp>
         <p:nvSpPr>
-          <p:cNvPr id="30" name="Text 26"/>
+          <p:cNvPr id="27" name="Text 23"/>
           <p:cNvSpPr/>
           <p:nvPr/>
         </p:nvSpPr>
@@ -13873,7 +13756,7 @@
       </p:sp>
       <p:sp>
         <p:nvSpPr>
-          <p:cNvPr id="31" name="Text 27"/>
+          <p:cNvPr id="28" name="Text 24"/>
           <p:cNvSpPr/>
           <p:nvPr/>
         </p:nvSpPr>
@@ -13912,7 +13795,7 @@
       </p:sp>
       <p:sp>
         <p:nvSpPr>
-          <p:cNvPr id="32" name="Text 28"/>
+          <p:cNvPr id="29" name="Text 25"/>
           <p:cNvSpPr/>
           <p:nvPr/>
         </p:nvSpPr>
@@ -13951,7 +13834,7 @@
       </p:sp>
       <p:sp>
         <p:nvSpPr>
-          <p:cNvPr id="33" name="Text 29"/>
+          <p:cNvPr id="30" name="Text 26"/>
           <p:cNvSpPr/>
           <p:nvPr/>
         </p:nvSpPr>
@@ -13982,7 +13865,7 @@
                 <a:ea typeface="Calibri" pitchFamily="34" charset="-122"/>
                 <a:cs typeface="Calibri" pitchFamily="34" charset="-120"/>
               </a:rPr>
-              <a:t>Fuente: Estatus_Resumen_General_QAQC.xlsx · Corte 26-07-2026 · Áreas 2000/3000/4000/8000</a:t>
+              <a:t>Fuente: Estatus_Resumen_General_QAQC.xlsx · Corte 10-08-2026 · Áreas 2000/3000/4000/8000</a:t>
             </a:r>
             <a:endParaRPr lang="en-US" sz="850" dirty="0"/>
           </a:p>
@@ -13990,7 +13873,7 @@
       </p:sp>
       <p:sp>
         <p:nvSpPr>
-          <p:cNvPr id="34" name="Text 30"/>
+          <p:cNvPr id="31" name="Text 27"/>
           <p:cNvSpPr/>
           <p:nvPr/>
         </p:nvSpPr>
@@ -14029,7 +13912,7 @@
       </p:sp>
       <p:sp>
         <p:nvSpPr>
-          <p:cNvPr id="35" name="Text 31"/>
+          <p:cNvPr id="32" name="Text 28"/>
           <p:cNvSpPr/>
           <p:nvPr/>
         </p:nvSpPr>
@@ -14233,7 +14116,7 @@
                 <a:ea typeface="Calibri" pitchFamily="34" charset="-122"/>
                 <a:cs typeface="Calibri" pitchFamily="34" charset="-120"/>
               </a:rPr>
-              <a:t>1.988 P1 levantados; 57,7% cerrados. El pendiente se concentra en Piping, Eléctrica, Instrumentación y Control, y físicamente en el área 3000.</a:t>
+              <a:t>1.988 P1 levantados; 58% cerrados. El pendiente se concentra en Piping, Eléctrica, Instrumentación y Control, y físicamente en el área 3000.</a:t>
             </a:r>
             <a:endParaRPr lang="en-US" sz="1350" dirty="0"/>
           </a:p>
@@ -14365,7 +14248,7 @@
                 <a:ea typeface="Cambria" pitchFamily="34" charset="-122"/>
                 <a:cs typeface="Cambria" pitchFamily="34" charset="-120"/>
               </a:rPr>
-              <a:t>57,7%</a:t>
+              <a:t>58%</a:t>
             </a:r>
             <a:endParaRPr lang="en-US" sz="1900" dirty="0"/>
           </a:p>
@@ -14480,7 +14363,7 @@
                 <a:ea typeface="Calibri" pitchFamily="34" charset="-122"/>
                 <a:cs typeface="Calibri" pitchFamily="34" charset="-120"/>
               </a:rPr>
-              <a:t>1.148</a:t>
+              <a:t>1.154</a:t>
             </a:r>
             <a:endParaRPr lang="en-US" sz="1100" dirty="0"/>
           </a:p>
@@ -14578,7 +14461,7 @@
                 <a:ea typeface="Calibri" pitchFamily="34" charset="-122"/>
                 <a:cs typeface="Calibri" pitchFamily="34" charset="-120"/>
               </a:rPr>
-              <a:t>830</a:t>
+              <a:t>828</a:t>
             </a:r>
             <a:endParaRPr lang="en-US" sz="1100" dirty="0"/>
           </a:p>
@@ -14676,7 +14559,7 @@
                 <a:ea typeface="Calibri" pitchFamily="34" charset="-122"/>
                 <a:cs typeface="Calibri" pitchFamily="34" charset="-120"/>
               </a:rPr>
-              <a:t>10</a:t>
+              <a:t>6</a:t>
             </a:r>
             <a:endParaRPr lang="en-US" sz="1100" dirty="0"/>
           </a:p>
@@ -14759,7 +14642,7 @@
                 <a:ea typeface="Calibri" pitchFamily="34" charset="-122"/>
                 <a:cs typeface="Calibri" pitchFamily="34" charset="-120"/>
               </a:rPr>
-              <a:t>707 de 830 P1 abiertos (85,2%) están en el área 3000. Áreas 2000 y 8000 sobre 90% de cierre.</a:t>
+              <a:t>705 de 828 P1 abiertos (85,1%) están en el área 3000. Áreas 2000 y 8000 sobre 90% de cierre.</a:t>
             </a:r>
             <a:endParaRPr lang="en-US" sz="1150" dirty="0"/>
           </a:p>
@@ -14798,7 +14681,7 @@
                 <a:ea typeface="Calibri" pitchFamily="34" charset="-122"/>
                 <a:cs typeface="Calibri" pitchFamily="34" charset="-120"/>
               </a:rPr>
-              <a:t>Fuente: Estatus_Resumen_General_QAQC.xlsx · Corte 26-07-2026 · Áreas 2000/3000/4000/8000</a:t>
+              <a:t>Fuente: Estatus_Resumen_General_QAQC.xlsx · Corte 10-08-2026 · Áreas 2000/3000/4000/8000</a:t>
             </a:r>
             <a:endParaRPr lang="en-US" sz="850" dirty="0"/>
           </a:p>
@@ -15314,7 +15197,7 @@
                 <a:ea typeface="Calibri" pitchFamily="34" charset="-122"/>
                 <a:cs typeface="Calibri" pitchFamily="34" charset="-120"/>
               </a:rPr>
-              <a:t>707 P1 abiertos (85,2% del total) y 41 caminatas 100% pendientes. Es la ruta crítica: sin esta área no mejora ningún indicador global.</a:t>
+              <a:t>705 P1 abiertos (85,1% del total) y 41 caminatas 100% pendientes. Es la ruta crítica: sin esta área no mejora ningún indicador global.</a:t>
             </a:r>
             <a:endParaRPr lang="en-US" sz="1150" dirty="0"/>
           </a:p>
@@ -15414,7 +15297,7 @@
                 <a:ea typeface="Calibri" pitchFamily="34" charset="-122"/>
                 <a:cs typeface="Calibri" pitchFamily="34" charset="-120"/>
               </a:rPr>
-              <a:t>Recuperar los 405 P1 vencidos</a:t>
+              <a:t>Recuperar los 667 P1 vencidos</a:t>
             </a:r>
             <a:endParaRPr lang="en-US" sz="1500" dirty="0"/>
           </a:p>
@@ -15456,7 +15339,7 @@
                 <a:ea typeface="Calibri" pitchFamily="34" charset="-122"/>
                 <a:cs typeface="Calibri" pitchFamily="34" charset="-120"/>
               </a:rPr>
-              <a:t>48,8% de los P1 abiertos superó su fecha de vencimiento. Foco en Instrumentación y Control (128), Eléctrica (98), Mecánica (88).</a:t>
+              <a:t>80,6% de los P1 abiertos superó su fecha de vencimiento. Foco en Piping (217), Eléctrica (173), Instrumentación y Control (153).</a:t>
             </a:r>
             <a:endParaRPr lang="en-US" sz="1150" dirty="0"/>
           </a:p>
@@ -15637,7 +15520,7 @@
                 <a:ea typeface="Calibri" pitchFamily="34" charset="-122"/>
                 <a:cs typeface="Calibri" pitchFamily="34" charset="-120"/>
               </a:rPr>
-              <a:t>Fuente: Estatus_Resumen_General_QAQC.xlsx · Corte 26-07-2026 · Áreas 2000/3000/4000/8000</a:t>
+              <a:t>Fuente: Estatus_Resumen_General_QAQC.xlsx · Corte 10-08-2026 · Áreas 2000/3000/4000/8000</a:t>
             </a:r>
             <a:endParaRPr lang="en-US" sz="850" dirty="0"/>
           </a:p>

--- a/panel_control_TOP_P1/Panel_Control_TOP_P1.pptx
+++ b/panel_control_TOP_P1/Panel_Control_TOP_P1.pptx
@@ -1515,10 +1515,10 @@
                   <c:v>14</c:v>
                 </c:pt>
                 <c:pt idx="5">
-                  <c:v>10</c:v>
+                  <c:v>6</c:v>
                 </c:pt>
                 <c:pt idx="6">
-                  <c:v>104</c:v>
+                  <c:v>110</c:v>
                 </c:pt>
                 <c:pt idx="7">
                   <c:v>12</c:v>
@@ -1635,10 +1635,10 @@
                   <c:v/>
                 </c:pt>
                 <c:pt idx="5">
-                  <c:v>12</c:v>
+                  <c:v>16</c:v>
                 </c:pt>
                 <c:pt idx="6">
-                  <c:v>6</c:v>
+                  <c:v/>
                 </c:pt>
                 <c:pt idx="7">
                   <c:v/>
@@ -2193,7 +2193,7 @@
                   <c:v>3</c:v>
                 </c:pt>
                 <c:pt idx="5">
-                  <c:v>13</c:v>
+                  <c:v>14</c:v>
                 </c:pt>
                 <c:pt idx="6">
                   <c:v/>
@@ -2313,7 +2313,7 @@
                   <c:v>1</c:v>
                 </c:pt>
                 <c:pt idx="5">
-                  <c:v>3</c:v>
+                  <c:v>2</c:v>
                 </c:pt>
                 <c:pt idx="6">
                   <c:v/>
@@ -2604,19 +2604,19 @@
                 <c:formatCode>General</c:formatCode>
                 <c:ptCount val="5"/>
                 <c:pt idx="0">
-                  <c:v>38</c:v>
+                  <c:v>57</c:v>
                 </c:pt>
                 <c:pt idx="1">
-                  <c:v>59</c:v>
+                  <c:v>89</c:v>
                 </c:pt>
                 <c:pt idx="2">
-                  <c:v>45</c:v>
+                  <c:v>64</c:v>
                 </c:pt>
                 <c:pt idx="3">
-                  <c:v>9</c:v>
+                  <c:v>20</c:v>
                 </c:pt>
                 <c:pt idx="4">
-                  <c:v>7</c:v>
+                  <c:v>9</c:v>
                 </c:pt>
               </c:numCache>
             </c:numRef>
@@ -2700,16 +2700,16 @@
                 <c:formatCode>General</c:formatCode>
                 <c:ptCount val="5"/>
                 <c:pt idx="0">
-                  <c:v>170</c:v>
+                  <c:v>140</c:v>
                 </c:pt>
                 <c:pt idx="1">
-                  <c:v>91</c:v>
+                  <c:v>61</c:v>
                 </c:pt>
                 <c:pt idx="2">
-                  <c:v>34</c:v>
+                  <c:v>42</c:v>
                 </c:pt>
                 <c:pt idx="3">
-                  <c:v>24</c:v>
+                  <c:v>13</c:v>
                 </c:pt>
                 <c:pt idx="4">
                   <c:v>3</c:v>
@@ -7419,7 +7419,7 @@
                 <a:ea typeface="Calibri" pitchFamily="34" charset="-122"/>
                 <a:cs typeface="Calibri" pitchFamily="34" charset="-120"/>
               </a:rPr>
-              <a:t>Recuperar los 158 DT atrasados</a:t>
+              <a:t>Recuperar los 239 DT atrasados</a:t>
             </a:r>
             <a:endParaRPr lang="en-US" sz="1350" dirty="0"/>
           </a:p>
@@ -7461,7 +7461,7 @@
                 <a:ea typeface="Calibri" pitchFamily="34" charset="-122"/>
                 <a:cs typeface="Calibri" pitchFamily="34" charset="-120"/>
               </a:rPr>
-              <a:t>145 son P2 y 11 son P1. La mediana de atraso es de 31 días y 21 superan los 90 días.</a:t>
+              <a:t>214 son P2 y 22 son P1. La mediana de atraso es de 13 días y 21 superan los 90 días.</a:t>
             </a:r>
             <a:endParaRPr lang="en-US" sz="1100" dirty="0"/>
           </a:p>
@@ -7603,7 +7603,7 @@
                 <a:ea typeface="Calibri" pitchFamily="34" charset="-122"/>
                 <a:cs typeface="Calibri" pitchFamily="34" charset="-120"/>
               </a:rPr>
-              <a:t>CERRO VERDE/PS2: 0/3 (0%) · PISCINAS Y SEDIMENTADOR: 10/22 (45,5%). A nivel proyecto la caminata 2 va 88,1% con 25 ya agendadas.</a:t>
+              <a:t>CERRO VERDE/PS2: 0/3 (0%) · PISCINAS Y SEDIMENTADOR: 6/22 (27,3%). A nivel proyecto la caminata 2 va 89% con 23 ya agendadas.</a:t>
             </a:r>
             <a:endParaRPr lang="en-US" sz="1100" dirty="0"/>
           </a:p>
@@ -7887,7 +7887,7 @@
                 <a:ea typeface="Calibri" pitchFamily="34" charset="-122"/>
                 <a:cs typeface="Calibri" pitchFamily="34" charset="-120"/>
               </a:rPr>
-              <a:t>Concentra 154 de los 480 DT abiertos (32,1%), con 31 atrasados. Además hay 9 carpetas bajo 80% de avance que conviene cerrar en paralelo.</a:t>
+              <a:t>Concentra 161 de los 498 DT abiertos (32,3%), con 55 atrasados. Además hay 8 carpetas bajo 80% de avance que conviene cerrar en paralelo.</a:t>
             </a:r>
             <a:endParaRPr lang="en-US" sz="1100" dirty="0"/>
           </a:p>
@@ -7926,7 +7926,7 @@
                 <a:ea typeface="Calibri" pitchFamily="34" charset="-122"/>
                 <a:cs typeface="Calibri" pitchFamily="34" charset="-120"/>
               </a:rPr>
-              <a:t>Fuente: STATUS_SUBSISTEMAS_TALABRE + Detalle_de_Terminaciones · 218 subsistemas · 2.024 DT · Atrasos al 03-08-2026</a:t>
+              <a:t>Fuente: STATUS_SUBSISTEMAS_TALABRE + Detalle_de_Terminaciones · 218 subsistemas · 2.057 DT · Atrasos al 10-08-2026</a:t>
             </a:r>
             <a:endParaRPr lang="en-US" sz="850" dirty="0"/>
           </a:p>
@@ -20217,7 +20217,7 @@
                 <a:ea typeface="Calibri" pitchFamily="34" charset="-122"/>
                 <a:cs typeface="Calibri" pitchFamily="34" charset="-120"/>
               </a:rPr>
-              <a:t>Contrato 4600029355 · 218 subsistemas en 9 áreas · 2.024 detalles de terminación levantados.</a:t>
+              <a:t>Contrato 4600029355 · 218 subsistemas en 9 áreas · 2.057 detalles de terminación levantados.</a:t>
             </a:r>
             <a:endParaRPr lang="en-US" sz="1350" dirty="0"/>
           </a:p>
@@ -20256,7 +20256,7 @@
                 <a:ea typeface="Cambria" pitchFamily="34" charset="-122"/>
                 <a:cs typeface="Cambria" pitchFamily="34" charset="-120"/>
               </a:rPr>
-              <a:t>98,6%</a:t>
+              <a:t>99,5%</a:t>
             </a:r>
             <a:endParaRPr lang="en-US" sz="3400" dirty="0"/>
           </a:p>
@@ -20412,7 +20412,7 @@
                 <a:ea typeface="Cambria" pitchFamily="34" charset="-122"/>
                 <a:cs typeface="Cambria" pitchFamily="34" charset="-120"/>
               </a:rPr>
-              <a:t>92,7%</a:t>
+              <a:t>92,8%</a:t>
             </a:r>
             <a:endParaRPr lang="en-US" sz="3400" dirty="0"/>
           </a:p>
@@ -20490,7 +20490,7 @@
                 <a:ea typeface="Cambria" pitchFamily="34" charset="-122"/>
                 <a:cs typeface="Cambria" pitchFamily="34" charset="-120"/>
               </a:rPr>
-              <a:t>85%</a:t>
+              <a:t>84,3%</a:t>
             </a:r>
             <a:endParaRPr lang="en-US" sz="3400" dirty="0"/>
           </a:p>
@@ -20568,7 +20568,7 @@
                 <a:ea typeface="Calibri" pitchFamily="34" charset="-122"/>
                 <a:cs typeface="Calibri" pitchFamily="34" charset="-120"/>
               </a:rPr>
-              <a:t>Atrasos calculados al 03-08-2026</a:t>
+              <a:t>Atrasos calculados al 10-08-2026</a:t>
             </a:r>
             <a:endParaRPr lang="en-US" sz="1100" dirty="0"/>
           </a:p>
@@ -20607,7 +20607,7 @@
                 <a:ea typeface="Calibri" pitchFamily="34" charset="-122"/>
                 <a:cs typeface="Calibri" pitchFamily="34" charset="-120"/>
               </a:rPr>
-              <a:t>Fuente: STATUS_SUBSISTEMAS_TALABRE + Detalle_de_Terminaciones · 218 subsistemas · 2.024 DT · Atrasos al 03-08-2026</a:t>
+              <a:t>Fuente: STATUS_SUBSISTEMAS_TALABRE + Detalle_de_Terminaciones · 218 subsistemas · 2.057 DT · Atrasos al 10-08-2026</a:t>
             </a:r>
             <a:endParaRPr lang="en-US" sz="850" dirty="0"/>
           </a:p>
@@ -20873,7 +20873,7 @@
                 <a:ea typeface="Cambria" pitchFamily="34" charset="-122"/>
                 <a:cs typeface="Cambria" pitchFamily="34" charset="-120"/>
               </a:rPr>
-              <a:t>98,6%</a:t>
+              <a:t>99,5%</a:t>
             </a:r>
             <a:endParaRPr lang="en-US" sz="3800" dirty="0"/>
           </a:p>
@@ -20912,7 +20912,7 @@
                 <a:ea typeface="Calibri" pitchFamily="34" charset="-122"/>
                 <a:cs typeface="Calibri" pitchFamily="34" charset="-120"/>
               </a:rPr>
-              <a:t>205/208 exigibles</a:t>
+              <a:t>207/208 exigibles</a:t>
             </a:r>
             <a:endParaRPr lang="en-US" sz="1300" dirty="0"/>
           </a:p>
@@ -20993,7 +20993,7 @@
                 <a:ea typeface="Calibri" pitchFamily="34" charset="-122"/>
                 <a:cs typeface="Calibri" pitchFamily="34" charset="-120"/>
               </a:rPr>
-              <a:t>94% del universo · 10 programadas en plazo · 2 con agenda vencida · 1 sin programar</a:t>
+              <a:t>95% del universo · 10 programadas en plazo · 1 sin programar</a:t>
             </a:r>
             <a:endParaRPr lang="en-US" sz="950" dirty="0"/>
           </a:p>
@@ -21125,7 +21125,7 @@
                 <a:ea typeface="Calibri" pitchFamily="34" charset="-122"/>
                 <a:cs typeface="Calibri" pitchFamily="34" charset="-120"/>
               </a:rPr>
-              <a:t>192/193 exigibles</a:t>
+              <a:t>194/195 exigibles</a:t>
             </a:r>
             <a:endParaRPr lang="en-US" sz="1300" dirty="0"/>
           </a:p>
@@ -21206,7 +21206,7 @@
                 <a:ea typeface="Calibri" pitchFamily="34" charset="-122"/>
                 <a:cs typeface="Calibri" pitchFamily="34" charset="-120"/>
               </a:rPr>
-              <a:t>88,1% del universo · 25 programadas en plazo · 1 sin programar</a:t>
+              <a:t>89% del universo · 23 programadas en plazo · 1 sin programar</a:t>
             </a:r>
             <a:endParaRPr lang="en-US" sz="950" dirty="0"/>
           </a:p>
@@ -21299,7 +21299,7 @@
                 <a:ea typeface="Cambria" pitchFamily="34" charset="-122"/>
                 <a:cs typeface="Cambria" pitchFamily="34" charset="-120"/>
               </a:rPr>
-              <a:t>92,7%</a:t>
+              <a:t>92,8%</a:t>
             </a:r>
             <a:endParaRPr lang="en-US" sz="3800" dirty="0"/>
           </a:p>
@@ -21419,7 +21419,7 @@
                 <a:ea typeface="Calibri" pitchFamily="34" charset="-122"/>
                 <a:cs typeface="Calibri" pitchFamily="34" charset="-120"/>
               </a:rPr>
-              <a:t>9 subsistemas bajo 80% de avance</a:t>
+              <a:t>8 subsistemas bajo 80% de avance</a:t>
             </a:r>
             <a:endParaRPr lang="en-US" sz="950" dirty="0"/>
           </a:p>
@@ -21512,7 +21512,7 @@
                 <a:ea typeface="Cambria" pitchFamily="34" charset="-122"/>
                 <a:cs typeface="Cambria" pitchFamily="34" charset="-120"/>
               </a:rPr>
-              <a:t>91,8%</a:t>
+              <a:t>87,5%</a:t>
             </a:r>
             <a:endParaRPr lang="en-US" sz="3800" dirty="0"/>
           </a:p>
@@ -21551,7 +21551,7 @@
                 <a:ea typeface="Calibri" pitchFamily="34" charset="-122"/>
                 <a:cs typeface="Calibri" pitchFamily="34" charset="-120"/>
               </a:rPr>
-              <a:t>323/352</a:t>
+              <a:t>329/376</a:t>
             </a:r>
             <a:endParaRPr lang="en-US" sz="1300" dirty="0"/>
           </a:p>
@@ -21632,7 +21632,7 @@
                 <a:ea typeface="Calibri" pitchFamily="34" charset="-122"/>
                 <a:cs typeface="Calibri" pitchFamily="34" charset="-120"/>
               </a:rPr>
-              <a:t>29 abiertos · 11 atrasados</a:t>
+              <a:t>47 abiertos · 22 atrasados</a:t>
             </a:r>
             <a:endParaRPr lang="en-US" sz="950" dirty="0"/>
           </a:p>
@@ -21772,7 +21772,7 @@
                 <a:ea typeface="Calibri" pitchFamily="34" charset="-122"/>
                 <a:cs typeface="Calibri" pitchFamily="34" charset="-120"/>
               </a:rPr>
-              <a:t>91,8% de cierre en P1 (29 abiertos), pero 451 DT abiertos entre P2, P3 y P4 sobre un total de 480.</a:t>
+              <a:t>87,5% de cierre en P1 (47 abiertos), pero 451 DT abiertos entre P2, P3 y P4 sobre un total de 498.</a:t>
             </a:r>
             <a:endParaRPr lang="en-US" sz="1150" dirty="0"/>
           </a:p>
@@ -21851,7 +21851,7 @@
                 <a:ea typeface="Calibri" pitchFamily="34" charset="-122"/>
                 <a:cs typeface="Calibri" pitchFamily="34" charset="-120"/>
               </a:rPr>
-              <a:t>158 DT con la fecha de compromiso vencida; mediana de 31 días y el más antiguo lleva 137. Los 218 abiertos sin fecha de compromiso no se cuentan como atrasados.</a:t>
+              <a:t>239 DT con la fecha de compromiso vencida; mediana de 13 días y el más antiguo lleva 144. Los 218 abiertos sin fecha de compromiso no se cuentan como atrasados.</a:t>
             </a:r>
             <a:endParaRPr lang="en-US" sz="1150" dirty="0"/>
           </a:p>
@@ -21913,7 +21913,7 @@
                 <a:ea typeface="Calibri" pitchFamily="34" charset="-122"/>
                 <a:cs typeface="Calibri" pitchFamily="34" charset="-120"/>
               </a:rPr>
-              <a:t>Caminatas: 98,6% y 99,5% de lo exigible (C1 y C2).  </a:t>
+              <a:t>Caminatas: 99,5% y 99,5% de lo exigible (C1 y C2).  </a:t>
             </a:r>
             <a:pPr indent="0" marL="0">
               <a:lnSpc>
@@ -21930,7 +21930,7 @@
                 <a:ea typeface="Calibri" pitchFamily="34" charset="-122"/>
                 <a:cs typeface="Calibri" pitchFamily="34" charset="-120"/>
               </a:rPr>
-              <a:t>Caminata 1: 205/208 exigibles, 2 con agenda vencida. Caminata 2: 192/193, con 25 agendadas en plazo y 1 sin programar.</a:t>
+              <a:t>Caminata 1: 207/208 exigibles. Caminata 2: 194/195, con 23 agendadas en plazo y 1 sin programar.</a:t>
             </a:r>
             <a:endParaRPr lang="en-US" sz="1150" dirty="0"/>
           </a:p>
@@ -22009,7 +22009,7 @@
                 <a:ea typeface="Calibri" pitchFamily="34" charset="-122"/>
                 <a:cs typeface="Calibri" pitchFamily="34" charset="-120"/>
               </a:rPr>
-              <a:t>Avance promedio 92,7%: 181 subsistemas sobre 95% y solo 9 bajo 80%.</a:t>
+              <a:t>Avance promedio 92,8%: 181 subsistemas sobre 95% y solo 8 bajo 80%.</a:t>
             </a:r>
             <a:endParaRPr lang="en-US" sz="1150" dirty="0"/>
           </a:p>
@@ -22048,7 +22048,7 @@
                 <a:ea typeface="Calibri" pitchFamily="34" charset="-122"/>
                 <a:cs typeface="Calibri" pitchFamily="34" charset="-120"/>
               </a:rPr>
-              <a:t>Fuente: STATUS_SUBSISTEMAS_TALABRE + Detalle_de_Terminaciones · 218 subsistemas · 2.024 DT · Atrasos al 03-08-2026</a:t>
+              <a:t>Fuente: STATUS_SUBSISTEMAS_TALABRE + Detalle_de_Terminaciones · 218 subsistemas · 2.057 DT · Atrasos al 10-08-2026</a:t>
             </a:r>
             <a:endParaRPr lang="en-US" sz="850" dirty="0"/>
           </a:p>
@@ -22299,7 +22299,7 @@
                 <a:ea typeface="Calibri" pitchFamily="34" charset="-122"/>
                 <a:cs typeface="Calibri" pitchFamily="34" charset="-120"/>
               </a:rPr>
-              <a:t>Caminata 2: 99,5% de lo exigible (192/193) — se descuentan 25 agendadas a fecha futura, que no son incumplimiento al corte. Talabre mide la carpeta como % de avance (PEC), no como estado de aprobación.</a:t>
+              <a:t>Caminata 2: 99,5% de lo exigible (194/195) — se descuentan 23 agendadas a fecha futura, que no son incumplimiento al corte. Talabre mide la carpeta como % de avance (PEC), no como estado de aprobación.</a:t>
             </a:r>
             <a:endParaRPr lang="en-US" sz="1350" dirty="0"/>
           </a:p>
@@ -22370,7 +22370,7 @@
                 <a:ea typeface="Calibri" pitchFamily="34" charset="-122"/>
                 <a:cs typeface="Calibri" pitchFamily="34" charset="-120"/>
               </a:rPr>
-              <a:t>Fuente: STATUS_SUBSISTEMAS_TALABRE + Detalle_de_Terminaciones · 218 subsistemas · 2.024 DT · Atrasos al 03-08-2026</a:t>
+              <a:t>Fuente: STATUS_SUBSISTEMAS_TALABRE + Detalle_de_Terminaciones · 218 subsistemas · 2.057 DT · Atrasos al 10-08-2026</a:t>
             </a:r>
             <a:endParaRPr lang="en-US" sz="850" dirty="0"/>
           </a:p>
@@ -22621,7 +22621,7 @@
                 <a:ea typeface="Calibri" pitchFamily="34" charset="-122"/>
                 <a:cs typeface="Calibri" pitchFamily="34" charset="-120"/>
               </a:rPr>
-              <a:t>2.024 DT levantados; 76,3% cerrados. Atrasado = DT abierto cuya fecha de compromiso de cierre ya venció al 03-08-2026.</a:t>
+              <a:t>2.057 DT levantados; 75,8% cerrados. Atrasado = DT abierto cuya fecha de compromiso de cierre ya venció al 10-08-2026.</a:t>
             </a:r>
             <a:endParaRPr lang="en-US" sz="1350" dirty="0"/>
           </a:p>
@@ -22776,7 +22776,7 @@
                 <a:ea typeface="Calibri" pitchFamily="34" charset="-122"/>
                 <a:cs typeface="Calibri" pitchFamily="34" charset="-120"/>
               </a:rPr>
-              <a:t>323/352</a:t>
+              <a:t>329/376</a:t>
             </a:r>
             <a:endParaRPr lang="en-US" sz="1050" dirty="0"/>
           </a:p>
@@ -22815,7 +22815,7 @@
                 <a:ea typeface="Calibri" pitchFamily="34" charset="-122"/>
                 <a:cs typeface="Calibri" pitchFamily="34" charset="-120"/>
               </a:rPr>
-              <a:t>91,8%</a:t>
+              <a:t>87,5%</a:t>
             </a:r>
             <a:endParaRPr lang="en-US" sz="1100" dirty="0"/>
           </a:p>
@@ -22850,13 +22850,13 @@
         <p:spPr>
           <a:xfrm>
             <a:off x="7936992" y="2688336"/>
-            <a:ext cx="3273735" cy="118872"/>
+            <a:ext cx="3120390" cy="118872"/>
           </a:xfrm>
           <a:prstGeom prst="rect">
             <a:avLst/>
           </a:prstGeom>
           <a:solidFill>
-            <a:srgbClr val="2E9E5B"/>
+            <a:srgbClr val="E3A55B"/>
           </a:solidFill>
           <a:ln/>
         </p:spPr>
@@ -22933,7 +22933,7 @@
                 <a:ea typeface="Calibri" pitchFamily="34" charset="-122"/>
                 <a:cs typeface="Calibri" pitchFamily="34" charset="-120"/>
               </a:rPr>
-              <a:t>1.144/1.374</a:t>
+              <a:t>1.153/1.383</a:t>
             </a:r>
             <a:endParaRPr lang="en-US" sz="1050" dirty="0"/>
           </a:p>
@@ -22972,7 +22972,7 @@
                 <a:ea typeface="Calibri" pitchFamily="34" charset="-122"/>
                 <a:cs typeface="Calibri" pitchFamily="34" charset="-120"/>
               </a:rPr>
-              <a:t>83,3%</a:t>
+              <a:t>83,4%</a:t>
             </a:r>
             <a:endParaRPr lang="en-US" sz="1100" dirty="0"/>
           </a:p>
@@ -23007,7 +23007,7 @@
         <p:spPr>
           <a:xfrm>
             <a:off x="7936992" y="3200400"/>
-            <a:ext cx="2970611" cy="118872"/>
+            <a:ext cx="2974177" cy="118872"/>
           </a:xfrm>
           <a:prstGeom prst="rect">
             <a:avLst/>
@@ -23546,7 +23546,7 @@
                 <a:ea typeface="Calibri" pitchFamily="34" charset="-122"/>
                 <a:cs typeface="Calibri" pitchFamily="34" charset="-120"/>
               </a:rPr>
-              <a:t>Mediana de 31 días vencidos; el más antiguo lleva 137. 78 entre 1-30 días, 59 entre 31-90 días, 21 entre 91-180 días.</a:t>
+              <a:t>Mediana de 13 días vencidos; el más antiguo lleva 144. 157 entre 1-30 días, 61 entre 31-90 días, 21 entre 91-180 días.</a:t>
             </a:r>
             <a:endParaRPr lang="en-US" sz="1150" dirty="0"/>
           </a:p>
@@ -23585,7 +23585,7 @@
                 <a:ea typeface="Calibri" pitchFamily="34" charset="-122"/>
                 <a:cs typeface="Calibri" pitchFamily="34" charset="-120"/>
               </a:rPr>
-              <a:t>Fuente: STATUS_SUBSISTEMAS_TALABRE + Detalle_de_Terminaciones · 218 subsistemas · 2.024 DT · Atrasos al 03-08-2026</a:t>
+              <a:t>Fuente: STATUS_SUBSISTEMAS_TALABRE + Detalle_de_Terminaciones · 218 subsistemas · 2.057 DT · Atrasos al 10-08-2026</a:t>
             </a:r>
             <a:endParaRPr lang="en-US" sz="850" dirty="0"/>
           </a:p>

--- a/panel_control_TOP_P1/Panel_Control_TOP_P1.pptx
+++ b/panel_control_TOP_P1/Panel_Control_TOP_P1.pptx
@@ -233,7 +233,7 @@
                 <c:formatCode>General</c:formatCode>
                 <c:ptCount val="2"/>
                 <c:pt idx="0">
-                  <c:v>42</c:v>
+                  <c:v>43</c:v>
                 </c:pt>
                 <c:pt idx="1">
                   <c:v>10</c:v>
@@ -311,7 +311,7 @@
                 <c:formatCode>General</c:formatCode>
                 <c:ptCount val="2"/>
                 <c:pt idx="0">
-                  <c:v>38</c:v>
+                  <c:v>37</c:v>
                 </c:pt>
                 <c:pt idx="1">
                   <c:v>5</c:v>
@@ -850,7 +850,7 @@
                   <c:v>52</c:v>
                 </c:pt>
                 <c:pt idx="1">
-                  <c:v>7</c:v>
+                  <c:v>5</c:v>
                 </c:pt>
                 <c:pt idx="2">
                   <c:v>7</c:v>
@@ -943,19 +943,19 @@
                 <c:formatCode>General</c:formatCode>
                 <c:ptCount val="5"/>
                 <c:pt idx="0">
+                  <c:v>70</c:v>
+                </c:pt>
+                <c:pt idx="1">
                   <c:v>60</c:v>
                 </c:pt>
-                <c:pt idx="1">
-                  <c:v>67</c:v>
+                <c:pt idx="2">
+                  <c:v>13</c:v>
                 </c:pt>
-                <c:pt idx="2">
+                <c:pt idx="3">
                   <c:v>10</c:v>
                 </c:pt>
-                <c:pt idx="3">
-                  <c:v>5</c:v>
-                </c:pt>
                 <c:pt idx="4">
-                  <c:v>7</c:v>
+                  <c:v>10</c:v>
                 </c:pt>
               </c:numCache>
             </c:numRef>
@@ -1328,13 +1328,13 @@
               <c:numCache>
                 <c:ptCount val="3"/>
                 <c:pt idx="0">
-                  <c:v>637</c:v>
+                  <c:v>667</c:v>
                 </c:pt>
                 <c:pt idx="1">
-                  <c:v>76</c:v>
+                  <c:v>74</c:v>
                 </c:pt>
                 <c:pt idx="2">
-                  <c:v>149</c:v>
+                  <c:v>163</c:v>
                 </c:pt>
               </c:numCache>
             </c:numRef>
@@ -6481,7 +6481,7 @@
       </p:grpSpPr>
       <p:pic>
         <p:nvPicPr>
-          <p:cNvPr id="2" name="Image 0" descr="/home/user/Inversiones/panel_control_TOP_P1/besalco_logo.png">    </p:cNvPr>
+          <p:cNvPr id="2" name="Image 0" descr="/workspace/dashboard-hseq/panel_control_TOP_P1/besalco_logo.png">    </p:cNvPr>
           <p:cNvPicPr>
             <a:picLocks noChangeAspect="1"/>
           </p:cNvPicPr>
@@ -6736,7 +6736,7 @@
                 <a:ea typeface="Calibri" pitchFamily="34" charset="-122"/>
                 <a:cs typeface="Calibri" pitchFamily="34" charset="-120"/>
               </a:rPr>
-              <a:t>No suman al universo 2 componentes ya entregados: son entregas parciales de un subsistema que ya está contado.</a:t>
+              <a:t>No suman al universo 3 componentes ya entregados: son entregas parciales de un subsistema que ya está contado.</a:t>
             </a:r>
             <a:endParaRPr lang="en-US" sz="1350" dirty="0"/>
           </a:p>
@@ -6775,7 +6775,7 @@
                 <a:ea typeface="Cambria" pitchFamily="34" charset="-122"/>
                 <a:cs typeface="Cambria" pitchFamily="34" charset="-120"/>
               </a:rPr>
-              <a:t>52,5%</a:t>
+              <a:t>53,8%</a:t>
             </a:r>
             <a:endParaRPr lang="en-US" sz="3400" dirty="0"/>
           </a:p>
@@ -7009,7 +7009,7 @@
                 <a:ea typeface="Cambria" pitchFamily="34" charset="-122"/>
                 <a:cs typeface="Cambria" pitchFamily="34" charset="-120"/>
               </a:rPr>
-              <a:t>73,9%</a:t>
+              <a:t>73,8%</a:t>
             </a:r>
             <a:endParaRPr lang="en-US" sz="3400" dirty="0"/>
           </a:p>
@@ -7087,7 +7087,7 @@
                 <a:ea typeface="Calibri" pitchFamily="34" charset="-122"/>
                 <a:cs typeface="Calibri" pitchFamily="34" charset="-120"/>
               </a:rPr>
-              <a:t>Corte: 05-08-2026</a:t>
+              <a:t>Corte: 11-08-2026</a:t>
             </a:r>
             <a:endParaRPr lang="en-US" sz="1100" dirty="0"/>
           </a:p>
@@ -7126,7 +7126,7 @@
                 <a:ea typeface="Calibri" pitchFamily="34" charset="-122"/>
                 <a:cs typeface="Calibri" pitchFamily="34" charset="-120"/>
               </a:rPr>
-              <a:t>Fuente: REPORTE_GERENCIAL + Listado de Puntos Punch Consolidado · Corte 05-08-2026 · Atrasos al 05-08-2026</a:t>
+              <a:t>Fuente: REPORTE_GERENCIAL + Listado de Puntos Punch Consolidado · Corte 11-08-2026 · Atrasos al 11-08-2026</a:t>
             </a:r>
             <a:endParaRPr lang="en-US" sz="850" dirty="0"/>
           </a:p>
@@ -7205,7 +7205,7 @@
       </p:grpSpPr>
       <p:pic>
         <p:nvPicPr>
-          <p:cNvPr id="2" name="Image 0" descr="/home/user/Inversiones/panel_control_TOP_P1/besalco_logo.png">    </p:cNvPr>
+          <p:cNvPr id="2" name="Image 0" descr="/workspace/dashboard-hseq/panel_control_TOP_P1/besalco_logo.png">    </p:cNvPr>
           <p:cNvPicPr>
             <a:picLocks noChangeAspect="1"/>
           </p:cNvPicPr>
@@ -8084,7 +8084,7 @@
       </p:sp>
       <p:pic>
         <p:nvPicPr>
-          <p:cNvPr id="4" name="Image 0" descr="/home/user/Inversiones/panel_control_TOP_P1/besalco_logo.png">    </p:cNvPr>
+          <p:cNvPr id="4" name="Image 0" descr="/workspace/dashboard-hseq/panel_control_TOP_P1/besalco_logo.png">    </p:cNvPr>
           <p:cNvPicPr>
             <a:picLocks noChangeAspect="1"/>
           </p:cNvPicPr>
@@ -8768,7 +8768,7 @@
       </p:grpSpPr>
       <p:pic>
         <p:nvPicPr>
-          <p:cNvPr id="2" name="Image 0" descr="/home/user/Inversiones/panel_control_TOP_P1/besalco_logo.png">    </p:cNvPr>
+          <p:cNvPr id="2" name="Image 0" descr="/workspace/dashboard-hseq/panel_control_TOP_P1/besalco_logo.png">    </p:cNvPr>
           <p:cNvPicPr>
             <a:picLocks noChangeAspect="1"/>
           </p:cNvPicPr>
@@ -10274,7 +10274,7 @@
       </p:grpSpPr>
       <p:pic>
         <p:nvPicPr>
-          <p:cNvPr id="2" name="Image 0" descr="/home/user/Inversiones/panel_control_TOP_P1/besalco_logo.png">    </p:cNvPr>
+          <p:cNvPr id="2" name="Image 0" descr="/workspace/dashboard-hseq/panel_control_TOP_P1/besalco_logo.png">    </p:cNvPr>
           <p:cNvPicPr>
             <a:picLocks noChangeAspect="1"/>
           </p:cNvPicPr>
@@ -12328,7 +12328,7 @@
       </p:grpSpPr>
       <p:pic>
         <p:nvPicPr>
-          <p:cNvPr id="2" name="Image 0" descr="/home/user/Inversiones/panel_control_TOP_P1/besalco_logo.png">    </p:cNvPr>
+          <p:cNvPr id="2" name="Image 0" descr="/workspace/dashboard-hseq/panel_control_TOP_P1/besalco_logo.png">    </p:cNvPr>
           <p:cNvPicPr>
             <a:picLocks noChangeAspect="1"/>
           </p:cNvPicPr>
@@ -12972,7 +12972,7 @@
       </p:grpSpPr>
       <p:pic>
         <p:nvPicPr>
-          <p:cNvPr id="2" name="Image 0" descr="/home/user/Inversiones/panel_control_TOP_P1/besalco_logo.png">    </p:cNvPr>
+          <p:cNvPr id="2" name="Image 0" descr="/workspace/dashboard-hseq/panel_control_TOP_P1/besalco_logo.png">    </p:cNvPr>
           <p:cNvPicPr>
             <a:picLocks noChangeAspect="1"/>
           </p:cNvPicPr>
@@ -13983,7 +13983,7 @@
       </p:grpSpPr>
       <p:pic>
         <p:nvPicPr>
-          <p:cNvPr id="2" name="Image 0" descr="/home/user/Inversiones/panel_control_TOP_P1/besalco_logo.png">    </p:cNvPr>
+          <p:cNvPr id="2" name="Image 0" descr="/workspace/dashboard-hseq/panel_control_TOP_P1/besalco_logo.png">    </p:cNvPr>
           <p:cNvPicPr>
             <a:picLocks noChangeAspect="1"/>
           </p:cNvPicPr>
@@ -14799,7 +14799,7 @@
       </p:grpSpPr>
       <p:pic>
         <p:nvPicPr>
-          <p:cNvPr id="2" name="Image 0" descr="/home/user/Inversiones/panel_control_TOP_P1/besalco_logo.png">    </p:cNvPr>
+          <p:cNvPr id="2" name="Image 0" descr="/workspace/dashboard-hseq/panel_control_TOP_P1/besalco_logo.png">    </p:cNvPr>
           <p:cNvPicPr>
             <a:picLocks noChangeAspect="1"/>
           </p:cNvPicPr>
@@ -15638,7 +15638,7 @@
       </p:grpSpPr>
       <p:pic>
         <p:nvPicPr>
-          <p:cNvPr id="2" name="Image 0" descr="/home/user/Inversiones/panel_control_TOP_P1/besalco_logo.png">    </p:cNvPr>
+          <p:cNvPr id="2" name="Image 0" descr="/workspace/dashboard-hseq/panel_control_TOP_P1/besalco_logo.png">    </p:cNvPr>
           <p:cNvPicPr>
             <a:picLocks noChangeAspect="1"/>
           </p:cNvPicPr>
@@ -15825,7 +15825,7 @@
                 <a:ea typeface="Cambria" pitchFamily="34" charset="-122"/>
                 <a:cs typeface="Cambria" pitchFamily="34" charset="-120"/>
               </a:rPr>
-              <a:t>52,5%</a:t>
+              <a:t>53,8%</a:t>
             </a:r>
             <a:endParaRPr lang="en-US" sz="3800" dirty="0"/>
           </a:p>
@@ -15864,7 +15864,7 @@
                 <a:ea typeface="Calibri" pitchFamily="34" charset="-122"/>
                 <a:cs typeface="Calibri" pitchFamily="34" charset="-120"/>
               </a:rPr>
-              <a:t>42/80</a:t>
+              <a:t>43/80</a:t>
             </a:r>
             <a:endParaRPr lang="en-US" sz="1400" dirty="0"/>
           </a:p>
@@ -15945,7 +15945,7 @@
                 <a:ea typeface="Calibri" pitchFamily="34" charset="-122"/>
                 <a:cs typeface="Calibri" pitchFamily="34" charset="-120"/>
               </a:rPr>
-              <a:t>38 subsistemas por caminar</a:t>
+              <a:t>37 subsistemas por caminar</a:t>
             </a:r>
             <a:endParaRPr lang="en-US" sz="950" dirty="0"/>
           </a:p>
@@ -16371,7 +16371,7 @@
                 <a:ea typeface="Calibri" pitchFamily="34" charset="-122"/>
                 <a:cs typeface="Calibri" pitchFamily="34" charset="-120"/>
               </a:rPr>
-              <a:t>22 aprobadas · 14 en revisión · 5 rechazadas</a:t>
+              <a:t>25 aprobadas · 11 en revisión · 5 rechazadas</a:t>
             </a:r>
             <a:endParaRPr lang="en-US" sz="950" dirty="0"/>
           </a:p>
@@ -16464,7 +16464,7 @@
                 <a:ea typeface="Cambria" pitchFamily="34" charset="-122"/>
                 <a:cs typeface="Cambria" pitchFamily="34" charset="-120"/>
               </a:rPr>
-              <a:t>73,9%</a:t>
+              <a:t>73,8%</a:t>
             </a:r>
             <a:endParaRPr lang="en-US" sz="3800" dirty="0"/>
           </a:p>
@@ -16503,7 +16503,7 @@
                 <a:ea typeface="Calibri" pitchFamily="34" charset="-122"/>
                 <a:cs typeface="Calibri" pitchFamily="34" charset="-120"/>
               </a:rPr>
-              <a:t>637/862</a:t>
+              <a:t>667/904</a:t>
             </a:r>
             <a:endParaRPr lang="en-US" sz="1400" dirty="0"/>
           </a:p>
@@ -16584,7 +16584,7 @@
                 <a:ea typeface="Calibri" pitchFamily="34" charset="-122"/>
                 <a:cs typeface="Calibri" pitchFamily="34" charset="-120"/>
               </a:rPr>
-              <a:t>225 abiertos · 76 atrasados</a:t>
+              <a:t>237 abiertos · 74 atrasados</a:t>
             </a:r>
             <a:endParaRPr lang="en-US" sz="950" dirty="0"/>
           </a:p>
@@ -16724,7 +16724,7 @@
                 <a:ea typeface="Calibri" pitchFamily="34" charset="-122"/>
                 <a:cs typeface="Calibri" pitchFamily="34" charset="-120"/>
               </a:rPr>
-              <a:t>1.022 de 1.437 ítems cerrados (71,1%); de los 415 abiertos, 166 ya pasaron su fecha requerida de cierre (40%).</a:t>
+              <a:t>1.078 de 1.501 ítems cerrados (71,8%); de los 423 abiertos, 160 ya pasaron su fecha requerida de cierre (37,8%).</a:t>
             </a:r>
             <a:endParaRPr lang="en-US" sz="1150" dirty="0"/>
           </a:p>
@@ -16803,7 +16803,7 @@
                 <a:ea typeface="Calibri" pitchFamily="34" charset="-122"/>
                 <a:cs typeface="Calibri" pitchFamily="34" charset="-120"/>
               </a:rPr>
-              <a:t>Operables 42/80 por Caminata 2 (52,5%); Facility 10/15 por Caminata 1 (66,7%).</a:t>
+              <a:t>Operables 43/80 por Caminata 2 (53,8%); Facility 10/15 por Caminata 1 (66,7%).</a:t>
             </a:r>
             <a:endParaRPr lang="en-US" sz="1150" dirty="0"/>
           </a:p>
@@ -16882,7 +16882,7 @@
                 <a:ea typeface="Calibri" pitchFamily="34" charset="-122"/>
                 <a:cs typeface="Calibri" pitchFamily="34" charset="-120"/>
               </a:rPr>
-              <a:t>41 entregadas de 95: 22 aprobadas, 14 en revisión y 5 rechazadas. Quedan 11 en preparación y 43 sin iniciar.</a:t>
+              <a:t>41 entregadas de 95: 25 aprobadas, 11 en revisión y 5 rechazadas. Quedan 12 en preparación y 42 sin iniciar.</a:t>
             </a:r>
             <a:endParaRPr lang="en-US" sz="1150" dirty="0"/>
           </a:p>
@@ -16961,7 +16961,7 @@
                 <a:ea typeface="Calibri" pitchFamily="34" charset="-122"/>
                 <a:cs typeface="Calibri" pitchFamily="34" charset="-120"/>
               </a:rPr>
-              <a:t>112 de los 225 P1 abiertos (49,8%), con 52 atrasados.</a:t>
+              <a:t>122 de los 237 P1 abiertos (51,5%), con 52 atrasados.</a:t>
             </a:r>
             <a:endParaRPr lang="en-US" sz="1150" dirty="0"/>
           </a:p>
@@ -17000,7 +17000,7 @@
                 <a:ea typeface="Calibri" pitchFamily="34" charset="-122"/>
                 <a:cs typeface="Calibri" pitchFamily="34" charset="-120"/>
               </a:rPr>
-              <a:t>Fuente: REPORTE_GERENCIAL + Listado de Puntos Punch Consolidado · Corte 05-08-2026 · Atrasos al 05-08-2026</a:t>
+              <a:t>Fuente: REPORTE_GERENCIAL + Listado de Puntos Punch Consolidado · Corte 11-08-2026 · Atrasos al 11-08-2026</a:t>
             </a:r>
             <a:endParaRPr lang="en-US" sz="850" dirty="0"/>
           </a:p>
@@ -17118,7 +17118,7 @@
       </p:grpSpPr>
       <p:pic>
         <p:nvPicPr>
-          <p:cNvPr id="2" name="Image 0" descr="/home/user/Inversiones/panel_control_TOP_P1/besalco_logo.png">    </p:cNvPr>
+          <p:cNvPr id="2" name="Image 0" descr="/workspace/dashboard-hseq/panel_control_TOP_P1/besalco_logo.png">    </p:cNvPr>
           <p:cNvPicPr>
             <a:picLocks noChangeAspect="1"/>
           </p:cNvPicPr>
@@ -17453,7 +17453,7 @@
                 <a:ea typeface="Calibri" pitchFamily="34" charset="-122"/>
                 <a:cs typeface="Calibri" pitchFamily="34" charset="-120"/>
               </a:rPr>
-              <a:t>23,2%</a:t>
+              <a:t>26,3%</a:t>
             </a:r>
             <a:endParaRPr lang="en-US" sz="1100" dirty="0"/>
           </a:p>
@@ -17492,7 +17492,7 @@
                 <a:ea typeface="Cambria" pitchFamily="34" charset="-122"/>
                 <a:cs typeface="Cambria" pitchFamily="34" charset="-120"/>
               </a:rPr>
-              <a:t>22</a:t>
+              <a:t>25</a:t>
             </a:r>
             <a:endParaRPr lang="en-US" sz="2200" dirty="0"/>
           </a:p>
@@ -17612,7 +17612,7 @@
                 <a:ea typeface="Calibri" pitchFamily="34" charset="-122"/>
                 <a:cs typeface="Calibri" pitchFamily="34" charset="-120"/>
               </a:rPr>
-              <a:t>14,7%</a:t>
+              <a:t>11,6%</a:t>
             </a:r>
             <a:endParaRPr lang="en-US" sz="1100" dirty="0"/>
           </a:p>
@@ -17651,7 +17651,7 @@
                 <a:ea typeface="Cambria" pitchFamily="34" charset="-122"/>
                 <a:cs typeface="Cambria" pitchFamily="34" charset="-120"/>
               </a:rPr>
-              <a:t>14</a:t>
+              <a:t>11</a:t>
             </a:r>
             <a:endParaRPr lang="en-US" sz="2200" dirty="0"/>
           </a:p>
@@ -17930,7 +17930,7 @@
                 <a:ea typeface="Calibri" pitchFamily="34" charset="-122"/>
                 <a:cs typeface="Calibri" pitchFamily="34" charset="-120"/>
               </a:rPr>
-              <a:t>11,6%</a:t>
+              <a:t>12,6%</a:t>
             </a:r>
             <a:endParaRPr lang="en-US" sz="1100" dirty="0"/>
           </a:p>
@@ -17969,7 +17969,7 @@
                 <a:ea typeface="Cambria" pitchFamily="34" charset="-122"/>
                 <a:cs typeface="Cambria" pitchFamily="34" charset="-120"/>
               </a:rPr>
-              <a:t>11</a:t>
+              <a:t>12</a:t>
             </a:r>
             <a:endParaRPr lang="en-US" sz="2200" dirty="0"/>
           </a:p>
@@ -18089,7 +18089,7 @@
                 <a:ea typeface="Calibri" pitchFamily="34" charset="-122"/>
                 <a:cs typeface="Calibri" pitchFamily="34" charset="-120"/>
               </a:rPr>
-              <a:t>45,3%</a:t>
+              <a:t>44,2%</a:t>
             </a:r>
             <a:endParaRPr lang="en-US" sz="1100" dirty="0"/>
           </a:p>
@@ -18128,7 +18128,7 @@
                 <a:ea typeface="Cambria" pitchFamily="34" charset="-122"/>
                 <a:cs typeface="Cambria" pitchFamily="34" charset="-120"/>
               </a:rPr>
-              <a:t>43</a:t>
+              <a:t>42</a:t>
             </a:r>
             <a:endParaRPr lang="en-US" sz="2200" dirty="0"/>
           </a:p>
@@ -18170,7 +18170,7 @@
                 <a:ea typeface="Calibri" pitchFamily="34" charset="-122"/>
                 <a:cs typeface="Calibri" pitchFamily="34" charset="-120"/>
               </a:rPr>
-              <a:t>41 carpetas ya están en manos del cliente (43,2%) y 28 subsistemas tienen tarjeta verde. El grueso del pendiente todavía no sale de Besalco.</a:t>
+              <a:t>41 carpetas ya están en manos del cliente (43,2%) y 29 subsistemas tienen tarjeta verde. El grueso del pendiente todavía no sale de Besalco.</a:t>
             </a:r>
             <a:endParaRPr lang="en-US" sz="1000" dirty="0"/>
           </a:p>
@@ -18209,7 +18209,7 @@
                 <a:ea typeface="Calibri" pitchFamily="34" charset="-122"/>
                 <a:cs typeface="Calibri" pitchFamily="34" charset="-120"/>
               </a:rPr>
-              <a:t>Fuente: REPORTE_GERENCIAL + Listado de Puntos Punch Consolidado · Corte 05-08-2026 · Atrasos al 05-08-2026</a:t>
+              <a:t>Fuente: REPORTE_GERENCIAL + Listado de Puntos Punch Consolidado · Corte 11-08-2026 · Atrasos al 11-08-2026</a:t>
             </a:r>
             <a:endParaRPr lang="en-US" sz="850" dirty="0"/>
           </a:p>
@@ -18327,7 +18327,7 @@
       </p:grpSpPr>
       <p:pic>
         <p:nvPicPr>
-          <p:cNvPr id="2" name="Image 0" descr="/home/user/Inversiones/panel_control_TOP_P1/besalco_logo.png">    </p:cNvPr>
+          <p:cNvPr id="2" name="Image 0" descr="/workspace/dashboard-hseq/panel_control_TOP_P1/besalco_logo.png">    </p:cNvPr>
           <p:cNvPicPr>
             <a:picLocks noChangeAspect="1"/>
           </p:cNvPicPr>
@@ -18460,7 +18460,7 @@
                 <a:ea typeface="Calibri" pitchFamily="34" charset="-122"/>
                 <a:cs typeface="Calibri" pitchFamily="34" charset="-120"/>
               </a:rPr>
-              <a:t>862 P1 levantados; 73,9% cerrados. Atrasado = ítem abierto cuya fecha requerida de cierre ya venció al 05-08-2026.</a:t>
+              <a:t>904 P1 levantados; 73,8% cerrados. Atrasado = ítem abierto cuya fecha requerida de cierre ya venció al 11-08-2026.</a:t>
             </a:r>
             <a:endParaRPr lang="en-US" sz="1350" dirty="0"/>
           </a:p>
@@ -18592,7 +18592,7 @@
                 <a:ea typeface="Cambria" pitchFamily="34" charset="-122"/>
                 <a:cs typeface="Cambria" pitchFamily="34" charset="-120"/>
               </a:rPr>
-              <a:t>73,9%</a:t>
+              <a:t>73,8%</a:t>
             </a:r>
             <a:endParaRPr lang="en-US" sz="1900" dirty="0"/>
           </a:p>
@@ -18707,7 +18707,7 @@
                 <a:ea typeface="Calibri" pitchFamily="34" charset="-122"/>
                 <a:cs typeface="Calibri" pitchFamily="34" charset="-120"/>
               </a:rPr>
-              <a:t>637</a:t>
+              <a:t>667</a:t>
             </a:r>
             <a:endParaRPr lang="en-US" sz="1100" dirty="0"/>
           </a:p>
@@ -18805,7 +18805,7 @@
                 <a:ea typeface="Calibri" pitchFamily="34" charset="-122"/>
                 <a:cs typeface="Calibri" pitchFamily="34" charset="-120"/>
               </a:rPr>
-              <a:t>76</a:t>
+              <a:t>74</a:t>
             </a:r>
             <a:endParaRPr lang="en-US" sz="1100" dirty="0"/>
           </a:p>
@@ -18903,7 +18903,7 @@
                 <a:ea typeface="Calibri" pitchFamily="34" charset="-122"/>
                 <a:cs typeface="Calibri" pitchFamily="34" charset="-120"/>
               </a:rPr>
-              <a:t>149</a:t>
+              <a:t>163</a:t>
             </a:r>
             <a:endParaRPr lang="en-US" sz="1100" dirty="0"/>
           </a:p>
@@ -18986,7 +18986,7 @@
                 <a:ea typeface="Calibri" pitchFamily="34" charset="-122"/>
                 <a:cs typeface="Calibri" pitchFamily="34" charset="-120"/>
               </a:rPr>
-              <a:t>Mediana de 31 días vencidos; el más antiguo lleva 87. 21 entre 1-30 días, 145 entre 31-90 días.</a:t>
+              <a:t>Mediana de 37 días vencidos; el más antiguo lleva 93. 157 entre 31-90 días, 3 entre 91-180 días.</a:t>
             </a:r>
             <a:endParaRPr lang="en-US" sz="1150" dirty="0"/>
           </a:p>
@@ -19025,7 +19025,7 @@
                 <a:ea typeface="Calibri" pitchFamily="34" charset="-122"/>
                 <a:cs typeface="Calibri" pitchFamily="34" charset="-120"/>
               </a:rPr>
-              <a:t>Fuente: REPORTE_GERENCIAL + Listado de Puntos Punch Consolidado · Corte 05-08-2026 · Atrasos al 05-08-2026</a:t>
+              <a:t>Fuente: REPORTE_GERENCIAL + Listado de Puntos Punch Consolidado · Corte 11-08-2026 · Atrasos al 11-08-2026</a:t>
             </a:r>
             <a:endParaRPr lang="en-US" sz="850" dirty="0"/>
           </a:p>
@@ -19143,7 +19143,7 @@
       </p:grpSpPr>
       <p:pic>
         <p:nvPicPr>
-          <p:cNvPr id="2" name="Image 0" descr="/home/user/Inversiones/panel_control_TOP_P1/besalco_logo.png">    </p:cNvPr>
+          <p:cNvPr id="2" name="Image 0" descr="/workspace/dashboard-hseq/panel_control_TOP_P1/besalco_logo.png">    </p:cNvPr>
           <p:cNvPicPr>
             <a:picLocks noChangeAspect="1"/>
           </p:cNvPicPr>
@@ -19357,7 +19357,7 @@
                 <a:ea typeface="Calibri" pitchFamily="34" charset="-122"/>
                 <a:cs typeface="Calibri" pitchFamily="34" charset="-120"/>
               </a:rPr>
-              <a:t>Recuperar los 166 ítems atrasados</a:t>
+              <a:t>Recuperar los 160 ítems atrasados</a:t>
             </a:r>
             <a:endParaRPr lang="en-US" sz="1400" dirty="0"/>
           </a:p>
@@ -19399,7 +19399,7 @@
                 <a:ea typeface="Calibri" pitchFamily="34" charset="-122"/>
                 <a:cs typeface="Calibri" pitchFamily="34" charset="-120"/>
               </a:rPr>
-              <a:t>40% de los 415 abiertos ya venció su fecha requerida. Foco en Eléctrica (52), Piping (7), Obras Civiles (7).</a:t>
+              <a:t>37,8% de los 423 abiertos ya venció su fecha requerida. Foco en Eléctrica (52), Piping (5), Obras Civiles (7).</a:t>
             </a:r>
             <a:endParaRPr lang="en-US" sz="1100" dirty="0"/>
           </a:p>
@@ -19499,7 +19499,7 @@
                 <a:ea typeface="Calibri" pitchFamily="34" charset="-122"/>
                 <a:cs typeface="Calibri" pitchFamily="34" charset="-120"/>
               </a:rPr>
-              <a:t>Ejecutar las 38 caminatas de Operables pendientes</a:t>
+              <a:t>Ejecutar las 37 caminatas de Operables pendientes</a:t>
             </a:r>
             <a:endParaRPr lang="en-US" sz="1400" dirty="0"/>
           </a:p>
@@ -19541,7 +19541,7 @@
                 <a:ea typeface="Calibri" pitchFamily="34" charset="-122"/>
                 <a:cs typeface="Calibri" pitchFamily="34" charset="-120"/>
               </a:rPr>
-              <a:t>La Caminata 2 va en 52,5% (42/80). Sin caminata no se levanta el punch final ni se habilita la entrega de la carpeta.</a:t>
+              <a:t>La Caminata 2 va en 53,8% (43/80). Sin caminata no se levanta el punch final ni se habilita la entrega de la carpeta.</a:t>
             </a:r>
             <a:endParaRPr lang="en-US" sz="1100" dirty="0"/>
           </a:p>
@@ -19683,7 +19683,7 @@
                 <a:ea typeface="Calibri" pitchFamily="34" charset="-122"/>
                 <a:cs typeface="Calibri" pitchFamily="34" charset="-120"/>
               </a:rPr>
-              <a:t>11 están en preparación y 43 sin iniciar. Solo 41 de 95 (43,2%) llegaron al cliente; 5 volvieron rechazadas y hay que rearmarlas.</a:t>
+              <a:t>12 están en preparación y 42 sin iniciar. Solo 41 de 95 (43,2%) llegaron al cliente; 5 volvieron rechazadas y hay que rearmarlas.</a:t>
             </a:r>
             <a:endParaRPr lang="en-US" sz="1100" dirty="0"/>
           </a:p>
@@ -19825,7 +19825,7 @@
                 <a:ea typeface="Calibri" pitchFamily="34" charset="-122"/>
                 <a:cs typeface="Calibri" pitchFamily="34" charset="-120"/>
               </a:rPr>
-              <a:t>Concentra 169 P1 abiertos y 44 atrasados sobre 74 subsistemas. Es la ruta crítica del proyecto.</a:t>
+              <a:t>Concentra 181 P1 abiertos y 42 atrasados sobre 74 subsistemas. Es la ruta crítica del proyecto.</a:t>
             </a:r>
             <a:endParaRPr lang="en-US" sz="1100" dirty="0"/>
           </a:p>
@@ -19864,7 +19864,7 @@
                 <a:ea typeface="Calibri" pitchFamily="34" charset="-122"/>
                 <a:cs typeface="Calibri" pitchFamily="34" charset="-120"/>
               </a:rPr>
-              <a:t>Fuente: REPORTE_GERENCIAL + Listado de Puntos Punch Consolidado · Corte 05-08-2026 · Atrasos al 05-08-2026</a:t>
+              <a:t>Fuente: REPORTE_GERENCIAL + Listado de Puntos Punch Consolidado · Corte 11-08-2026 · Atrasos al 11-08-2026</a:t>
             </a:r>
             <a:endParaRPr lang="en-US" sz="850" dirty="0"/>
           </a:p>
@@ -19982,7 +19982,7 @@
       </p:grpSpPr>
       <p:pic>
         <p:nvPicPr>
-          <p:cNvPr id="2" name="Image 0" descr="/home/user/Inversiones/panel_control_TOP_P1/besalco_logo.png">    </p:cNvPr>
+          <p:cNvPr id="2" name="Image 0" descr="/workspace/dashboard-hseq/panel_control_TOP_P1/besalco_logo.png">    </p:cNvPr>
           <p:cNvPicPr>
             <a:picLocks noChangeAspect="1"/>
           </p:cNvPicPr>
@@ -20686,7 +20686,7 @@
       </p:grpSpPr>
       <p:pic>
         <p:nvPicPr>
-          <p:cNvPr id="2" name="Image 0" descr="/home/user/Inversiones/panel_control_TOP_P1/besalco_logo.png">    </p:cNvPr>
+          <p:cNvPr id="2" name="Image 0" descr="/workspace/dashboard-hseq/panel_control_TOP_P1/besalco_logo.png">    </p:cNvPr>
           <p:cNvPicPr>
             <a:picLocks noChangeAspect="1"/>
           </p:cNvPicPr>
@@ -22166,7 +22166,7 @@
       </p:grpSpPr>
       <p:pic>
         <p:nvPicPr>
-          <p:cNvPr id="2" name="Image 0" descr="/home/user/Inversiones/panel_control_TOP_P1/besalco_logo.png">    </p:cNvPr>
+          <p:cNvPr id="2" name="Image 0" descr="/workspace/dashboard-hseq/panel_control_TOP_P1/besalco_logo.png">    </p:cNvPr>
           <p:cNvPicPr>
             <a:picLocks noChangeAspect="1"/>
           </p:cNvPicPr>
@@ -22488,7 +22488,7 @@
       </p:grpSpPr>
       <p:pic>
         <p:nvPicPr>
-          <p:cNvPr id="2" name="Image 0" descr="/home/user/Inversiones/panel_control_TOP_P1/besalco_logo.png">    </p:cNvPr>
+          <p:cNvPr id="2" name="Image 0" descr="/workspace/dashboard-hseq/panel_control_TOP_P1/besalco_logo.png">    </p:cNvPr>
           <p:cNvPicPr>
             <a:picLocks noChangeAspect="1"/>
           </p:cNvPicPr>

--- a/panel_control_TOP_P1/Panel_Control_TOP_P1.pptx
+++ b/panel_control_TOP_P1/Panel_Control_TOP_P1.pptx
@@ -7126,7 +7126,7 @@
                 <a:ea typeface="Calibri" pitchFamily="34" charset="-122"/>
                 <a:cs typeface="Calibri" pitchFamily="34" charset="-120"/>
               </a:rPr>
-              <a:t>Fuente: REPORTE_GERENCIAL + Listado de Puntos Punch Consolidado · Corte 11-08-2026 · Atrasos al 11-08-2026</a:t>
+              <a:t>Fuente: REPORTE_GERENCIAL + Listado de Puntos Punch Consolidado · Corte 11-08-2026 · Atrasos al 17-08-2026</a:t>
             </a:r>
             <a:endParaRPr lang="en-US" sz="850" dirty="0"/>
           </a:p>
@@ -17000,7 +17000,7 @@
                 <a:ea typeface="Calibri" pitchFamily="34" charset="-122"/>
                 <a:cs typeface="Calibri" pitchFamily="34" charset="-120"/>
               </a:rPr>
-              <a:t>Fuente: REPORTE_GERENCIAL + Listado de Puntos Punch Consolidado · Corte 11-08-2026 · Atrasos al 11-08-2026</a:t>
+              <a:t>Fuente: REPORTE_GERENCIAL + Listado de Puntos Punch Consolidado · Corte 11-08-2026 · Atrasos al 17-08-2026</a:t>
             </a:r>
             <a:endParaRPr lang="en-US" sz="850" dirty="0"/>
           </a:p>
@@ -18209,7 +18209,7 @@
                 <a:ea typeface="Calibri" pitchFamily="34" charset="-122"/>
                 <a:cs typeface="Calibri" pitchFamily="34" charset="-120"/>
               </a:rPr>
-              <a:t>Fuente: REPORTE_GERENCIAL + Listado de Puntos Punch Consolidado · Corte 11-08-2026 · Atrasos al 11-08-2026</a:t>
+              <a:t>Fuente: REPORTE_GERENCIAL + Listado de Puntos Punch Consolidado · Corte 11-08-2026 · Atrasos al 17-08-2026</a:t>
             </a:r>
             <a:endParaRPr lang="en-US" sz="850" dirty="0"/>
           </a:p>
@@ -18460,7 +18460,7 @@
                 <a:ea typeface="Calibri" pitchFamily="34" charset="-122"/>
                 <a:cs typeface="Calibri" pitchFamily="34" charset="-120"/>
               </a:rPr>
-              <a:t>904 P1 levantados; 73,8% cerrados. Atrasado = ítem abierto cuya fecha requerida de cierre ya venció al 11-08-2026.</a:t>
+              <a:t>904 P1 levantados; 73,8% cerrados. Atrasado = ítem abierto cuya fecha requerida de cierre ya venció al 17-08-2026.</a:t>
             </a:r>
             <a:endParaRPr lang="en-US" sz="1350" dirty="0"/>
           </a:p>
@@ -18986,7 +18986,7 @@
                 <a:ea typeface="Calibri" pitchFamily="34" charset="-122"/>
                 <a:cs typeface="Calibri" pitchFamily="34" charset="-120"/>
               </a:rPr>
-              <a:t>Mediana de 37 días vencidos; el más antiguo lleva 93. 157 entre 31-90 días, 3 entre 91-180 días.</a:t>
+              <a:t>Mediana de 43 días vencidos; el más antiguo lleva 99. 145 entre 31-90 días, 15 entre 91-180 días.</a:t>
             </a:r>
             <a:endParaRPr lang="en-US" sz="1150" dirty="0"/>
           </a:p>
@@ -19025,7 +19025,7 @@
                 <a:ea typeface="Calibri" pitchFamily="34" charset="-122"/>
                 <a:cs typeface="Calibri" pitchFamily="34" charset="-120"/>
               </a:rPr>
-              <a:t>Fuente: REPORTE_GERENCIAL + Listado de Puntos Punch Consolidado · Corte 11-08-2026 · Atrasos al 11-08-2026</a:t>
+              <a:t>Fuente: REPORTE_GERENCIAL + Listado de Puntos Punch Consolidado · Corte 11-08-2026 · Atrasos al 17-08-2026</a:t>
             </a:r>
             <a:endParaRPr lang="en-US" sz="850" dirty="0"/>
           </a:p>
@@ -19864,7 +19864,7 @@
                 <a:ea typeface="Calibri" pitchFamily="34" charset="-122"/>
                 <a:cs typeface="Calibri" pitchFamily="34" charset="-120"/>
               </a:rPr>
-              <a:t>Fuente: REPORTE_GERENCIAL + Listado de Puntos Punch Consolidado · Corte 11-08-2026 · Atrasos al 11-08-2026</a:t>
+              <a:t>Fuente: REPORTE_GERENCIAL + Listado de Puntos Punch Consolidado · Corte 11-08-2026 · Atrasos al 17-08-2026</a:t>
             </a:r>
             <a:endParaRPr lang="en-US" sz="850" dirty="0"/>
           </a:p>

--- a/panel_control_TOP_P1/Panel_Control_TOP_P1.pptx
+++ b/panel_control_TOP_P1/Panel_Control_TOP_P1.pptx
@@ -1641,7 +1641,7 @@
                   <c:v/>
                 </c:pt>
                 <c:pt idx="7">
-                  <c:v/>
+                  <c:v>1</c:v>
                 </c:pt>
                 <c:pt idx="8">
                   <c:v/>
@@ -1761,7 +1761,7 @@
                   <c:v/>
                 </c:pt>
                 <c:pt idx="7">
-                  <c:v>1</c:v>
+                  <c:v/>
                 </c:pt>
                 <c:pt idx="8">
                   <c:v/>
@@ -2073,7 +2073,7 @@
                   <c:v>10</c:v>
                 </c:pt>
                 <c:pt idx="5">
-                  <c:v>6</c:v>
+                  <c:v>7</c:v>
                 </c:pt>
                 <c:pt idx="6">
                   <c:v>110</c:v>
@@ -2193,7 +2193,7 @@
                   <c:v>3</c:v>
                 </c:pt>
                 <c:pt idx="5">
-                  <c:v>14</c:v>
+                  <c:v>13</c:v>
                 </c:pt>
                 <c:pt idx="6">
                   <c:v/>
@@ -2604,19 +2604,19 @@
                 <c:formatCode>General</c:formatCode>
                 <c:ptCount val="5"/>
                 <c:pt idx="0">
-                  <c:v>57</c:v>
+                  <c:v>39</c:v>
                 </c:pt>
                 <c:pt idx="1">
-                  <c:v>89</c:v>
+                  <c:v>81</c:v>
                 </c:pt>
                 <c:pt idx="2">
-                  <c:v>64</c:v>
+                  <c:v>38</c:v>
                 </c:pt>
                 <c:pt idx="3">
-                  <c:v>20</c:v>
+                  <c:v>17</c:v>
                 </c:pt>
                 <c:pt idx="4">
-                  <c:v>9</c:v>
+                  <c:v>4</c:v>
                 </c:pt>
               </c:numCache>
             </c:numRef>
@@ -2700,13 +2700,13 @@
                 <c:formatCode>General</c:formatCode>
                 <c:ptCount val="5"/>
                 <c:pt idx="0">
-                  <c:v>140</c:v>
+                  <c:v>138</c:v>
                 </c:pt>
                 <c:pt idx="1">
-                  <c:v>61</c:v>
+                  <c:v>56</c:v>
                 </c:pt>
                 <c:pt idx="2">
-                  <c:v>42</c:v>
+                  <c:v>32</c:v>
                 </c:pt>
                 <c:pt idx="3">
                   <c:v>13</c:v>
@@ -7419,7 +7419,7 @@
                 <a:ea typeface="Calibri" pitchFamily="34" charset="-122"/>
                 <a:cs typeface="Calibri" pitchFamily="34" charset="-120"/>
               </a:rPr>
-              <a:t>Recuperar los 239 DT atrasados</a:t>
+              <a:t>Recuperar los 179 DT atrasados</a:t>
             </a:r>
             <a:endParaRPr lang="en-US" sz="1350" dirty="0"/>
           </a:p>
@@ -7461,7 +7461,7 @@
                 <a:ea typeface="Calibri" pitchFamily="34" charset="-122"/>
                 <a:cs typeface="Calibri" pitchFamily="34" charset="-120"/>
               </a:rPr>
-              <a:t>214 son P2 y 22 son P1. La mediana de atraso es de 13 días y 21 superan los 90 días.</a:t>
+              <a:t>161 son P2 y 15 son P1. La mediana de atraso es de 19 días y 15 superan los 90 días.</a:t>
             </a:r>
             <a:endParaRPr lang="en-US" sz="1100" dirty="0"/>
           </a:p>
@@ -7603,7 +7603,7 @@
                 <a:ea typeface="Calibri" pitchFamily="34" charset="-122"/>
                 <a:cs typeface="Calibri" pitchFamily="34" charset="-120"/>
               </a:rPr>
-              <a:t>CERRO VERDE/PS2: 0/3 (0%) · PISCINAS Y SEDIMENTADOR: 6/22 (27,3%). A nivel proyecto la caminata 2 va 89% con 23 ya agendadas.</a:t>
+              <a:t>CERRO VERDE/PS2: 0/3 (0%) · PISCINAS Y SEDIMENTADOR: 6/22 (27,3%). A nivel proyecto la caminata 2 va 89% con 24 ya agendadas.</a:t>
             </a:r>
             <a:endParaRPr lang="en-US" sz="1100" dirty="0"/>
           </a:p>
@@ -7745,7 +7745,7 @@
                 <a:ea typeface="Calibri" pitchFamily="34" charset="-122"/>
                 <a:cs typeface="Calibri" pitchFamily="34" charset="-120"/>
               </a:rPr>
-              <a:t>De 50 DT levantados en P4 no se ha cerrado ninguno (0%). P3 tampoco despega: 28,5% de cierre.</a:t>
+              <a:t>De 50 DT levantados en P4 no se ha cerrado ninguno (0%). P3 tampoco despega: 28,9% de cierre.</a:t>
             </a:r>
             <a:endParaRPr lang="en-US" sz="1100" dirty="0"/>
           </a:p>
@@ -7887,7 +7887,7 @@
                 <a:ea typeface="Calibri" pitchFamily="34" charset="-122"/>
                 <a:cs typeface="Calibri" pitchFamily="34" charset="-120"/>
               </a:rPr>
-              <a:t>Concentra 161 de los 498 DT abiertos (32,3%), con 55 atrasados. Además hay 8 carpetas bajo 80% de avance que conviene cerrar en paralelo.</a:t>
+              <a:t>Concentra 119 de los 421 DT abiertos (28,3%), con 13 atrasados. Además hay 8 carpetas bajo 80% de avance que conviene cerrar en paralelo.</a:t>
             </a:r>
             <a:endParaRPr lang="en-US" sz="1100" dirty="0"/>
           </a:p>
@@ -7926,7 +7926,7 @@
                 <a:ea typeface="Calibri" pitchFamily="34" charset="-122"/>
                 <a:cs typeface="Calibri" pitchFamily="34" charset="-120"/>
               </a:rPr>
-              <a:t>Fuente: STATUS_SUBSISTEMAS_TALABRE + Detalle_de_Terminaciones · 218 subsistemas · 2.057 DT · Atrasos al 10-08-2026</a:t>
+              <a:t>Fuente: STATUS_SUBSISTEMAS_TALABRE + Detalle_de_Terminaciones · 218 subsistemas · 2.062 DT · Atrasos al 17-08-2026</a:t>
             </a:r>
             <a:endParaRPr lang="en-US" sz="850" dirty="0"/>
           </a:p>
@@ -20217,7 +20217,7 @@
                 <a:ea typeface="Calibri" pitchFamily="34" charset="-122"/>
                 <a:cs typeface="Calibri" pitchFamily="34" charset="-120"/>
               </a:rPr>
-              <a:t>Contrato 4600029355 · 218 subsistemas en 9 áreas · 2.057 detalles de terminación levantados.</a:t>
+              <a:t>Contrato 4600029355 · 218 subsistemas en 9 áreas · 2.062 detalles de terminación levantados.</a:t>
             </a:r>
             <a:endParaRPr lang="en-US" sz="1350" dirty="0"/>
           </a:p>
@@ -20256,7 +20256,7 @@
                 <a:ea typeface="Cambria" pitchFamily="34" charset="-122"/>
                 <a:cs typeface="Cambria" pitchFamily="34" charset="-120"/>
               </a:rPr>
-              <a:t>99,5%</a:t>
+              <a:t>100%</a:t>
             </a:r>
             <a:endParaRPr lang="en-US" sz="3400" dirty="0"/>
           </a:p>
@@ -20334,7 +20334,7 @@
                 <a:ea typeface="Cambria" pitchFamily="34" charset="-122"/>
                 <a:cs typeface="Cambria" pitchFamily="34" charset="-120"/>
               </a:rPr>
-              <a:t>99,5%</a:t>
+              <a:t>100%</a:t>
             </a:r>
             <a:endParaRPr lang="en-US" sz="3400" dirty="0"/>
           </a:p>
@@ -20412,7 +20412,7 @@
                 <a:ea typeface="Cambria" pitchFamily="34" charset="-122"/>
                 <a:cs typeface="Cambria" pitchFamily="34" charset="-120"/>
               </a:rPr>
-              <a:t>92,8%</a:t>
+              <a:t>93,1%</a:t>
             </a:r>
             <a:endParaRPr lang="en-US" sz="3400" dirty="0"/>
           </a:p>
@@ -20490,7 +20490,7 @@
                 <a:ea typeface="Cambria" pitchFamily="34" charset="-122"/>
                 <a:cs typeface="Cambria" pitchFamily="34" charset="-120"/>
               </a:rPr>
-              <a:t>84,3%</a:t>
+              <a:t>88,6%</a:t>
             </a:r>
             <a:endParaRPr lang="en-US" sz="3400" dirty="0"/>
           </a:p>
@@ -20568,7 +20568,7 @@
                 <a:ea typeface="Calibri" pitchFamily="34" charset="-122"/>
                 <a:cs typeface="Calibri" pitchFamily="34" charset="-120"/>
               </a:rPr>
-              <a:t>Atrasos calculados al 10-08-2026</a:t>
+              <a:t>Atrasos calculados al 17-08-2026</a:t>
             </a:r>
             <a:endParaRPr lang="en-US" sz="1100" dirty="0"/>
           </a:p>
@@ -20607,7 +20607,7 @@
                 <a:ea typeface="Calibri" pitchFamily="34" charset="-122"/>
                 <a:cs typeface="Calibri" pitchFamily="34" charset="-120"/>
               </a:rPr>
-              <a:t>Fuente: STATUS_SUBSISTEMAS_TALABRE + Detalle_de_Terminaciones · 218 subsistemas · 2.057 DT · Atrasos al 10-08-2026</a:t>
+              <a:t>Fuente: STATUS_SUBSISTEMAS_TALABRE + Detalle_de_Terminaciones · 218 subsistemas · 2.062 DT · Atrasos al 17-08-2026</a:t>
             </a:r>
             <a:endParaRPr lang="en-US" sz="850" dirty="0"/>
           </a:p>
@@ -20873,7 +20873,7 @@
                 <a:ea typeface="Cambria" pitchFamily="34" charset="-122"/>
                 <a:cs typeface="Cambria" pitchFamily="34" charset="-120"/>
               </a:rPr>
-              <a:t>99,5%</a:t>
+              <a:t>100%</a:t>
             </a:r>
             <a:endParaRPr lang="en-US" sz="3800" dirty="0"/>
           </a:p>
@@ -20912,7 +20912,7 @@
                 <a:ea typeface="Calibri" pitchFamily="34" charset="-122"/>
                 <a:cs typeface="Calibri" pitchFamily="34" charset="-120"/>
               </a:rPr>
-              <a:t>207/208 exigibles</a:t>
+              <a:t>211/211 exigibles</a:t>
             </a:r>
             <a:endParaRPr lang="en-US" sz="1300" dirty="0"/>
           </a:p>
@@ -20993,7 +20993,7 @@
                 <a:ea typeface="Calibri" pitchFamily="34" charset="-122"/>
                 <a:cs typeface="Calibri" pitchFamily="34" charset="-120"/>
               </a:rPr>
-              <a:t>95% del universo · 10 programadas en plazo · 1 sin programar</a:t>
+              <a:t>96,8% del universo · 7 programadas en plazo · 0 sin programar</a:t>
             </a:r>
             <a:endParaRPr lang="en-US" sz="950" dirty="0"/>
           </a:p>
@@ -21086,7 +21086,7 @@
                 <a:ea typeface="Cambria" pitchFamily="34" charset="-122"/>
                 <a:cs typeface="Cambria" pitchFamily="34" charset="-120"/>
               </a:rPr>
-              <a:t>99,5%</a:t>
+              <a:t>100%</a:t>
             </a:r>
             <a:endParaRPr lang="en-US" sz="3800" dirty="0"/>
           </a:p>
@@ -21125,7 +21125,7 @@
                 <a:ea typeface="Calibri" pitchFamily="34" charset="-122"/>
                 <a:cs typeface="Calibri" pitchFamily="34" charset="-120"/>
               </a:rPr>
-              <a:t>194/195 exigibles</a:t>
+              <a:t>194/194 exigibles</a:t>
             </a:r>
             <a:endParaRPr lang="en-US" sz="1300" dirty="0"/>
           </a:p>
@@ -21206,7 +21206,7 @@
                 <a:ea typeface="Calibri" pitchFamily="34" charset="-122"/>
                 <a:cs typeface="Calibri" pitchFamily="34" charset="-120"/>
               </a:rPr>
-              <a:t>89% del universo · 23 programadas en plazo · 1 sin programar</a:t>
+              <a:t>89% del universo · 24 programadas en plazo · 0 sin programar</a:t>
             </a:r>
             <a:endParaRPr lang="en-US" sz="950" dirty="0"/>
           </a:p>
@@ -21299,7 +21299,7 @@
                 <a:ea typeface="Cambria" pitchFamily="34" charset="-122"/>
                 <a:cs typeface="Cambria" pitchFamily="34" charset="-120"/>
               </a:rPr>
-              <a:t>92,8%</a:t>
+              <a:t>93,1%</a:t>
             </a:r>
             <a:endParaRPr lang="en-US" sz="3800" dirty="0"/>
           </a:p>
@@ -21338,7 +21338,7 @@
                 <a:ea typeface="Calibri" pitchFamily="34" charset="-122"/>
                 <a:cs typeface="Calibri" pitchFamily="34" charset="-120"/>
               </a:rPr>
-              <a:t>181/218 sobre 95%</a:t>
+              <a:t>182/218 sobre 95%</a:t>
             </a:r>
             <a:endParaRPr lang="en-US" sz="1300" dirty="0"/>
           </a:p>
@@ -21512,7 +21512,7 @@
                 <a:ea typeface="Cambria" pitchFamily="34" charset="-122"/>
                 <a:cs typeface="Cambria" pitchFamily="34" charset="-120"/>
               </a:rPr>
-              <a:t>87,5%</a:t>
+              <a:t>89,6%</a:t>
             </a:r>
             <a:endParaRPr lang="en-US" sz="3800" dirty="0"/>
           </a:p>
@@ -21551,7 +21551,7 @@
                 <a:ea typeface="Calibri" pitchFamily="34" charset="-122"/>
                 <a:cs typeface="Calibri" pitchFamily="34" charset="-120"/>
               </a:rPr>
-              <a:t>329/376</a:t>
+              <a:t>337/376</a:t>
             </a:r>
             <a:endParaRPr lang="en-US" sz="1300" dirty="0"/>
           </a:p>
@@ -21632,7 +21632,7 @@
                 <a:ea typeface="Calibri" pitchFamily="34" charset="-122"/>
                 <a:cs typeface="Calibri" pitchFamily="34" charset="-120"/>
               </a:rPr>
-              <a:t>47 abiertos · 22 atrasados</a:t>
+              <a:t>39 abiertos · 15 atrasados</a:t>
             </a:r>
             <a:endParaRPr lang="en-US" sz="950" dirty="0"/>
           </a:p>
@@ -21772,7 +21772,7 @@
                 <a:ea typeface="Calibri" pitchFamily="34" charset="-122"/>
                 <a:cs typeface="Calibri" pitchFamily="34" charset="-120"/>
               </a:rPr>
-              <a:t>87,5% de cierre en P1 (47 abiertos), pero 451 DT abiertos entre P2, P3 y P4 sobre un total de 498.</a:t>
+              <a:t>89,6% de cierre en P1 (39 abiertos), pero 382 DT abiertos entre P2, P3 y P4 sobre un total de 421.</a:t>
             </a:r>
             <a:endParaRPr lang="en-US" sz="1150" dirty="0"/>
           </a:p>
@@ -21851,7 +21851,7 @@
                 <a:ea typeface="Calibri" pitchFamily="34" charset="-122"/>
                 <a:cs typeface="Calibri" pitchFamily="34" charset="-120"/>
               </a:rPr>
-              <a:t>239 DT con la fecha de compromiso vencida; mediana de 13 días y el más antiguo lleva 144. Los 218 abiertos sin fecha de compromiso no se cuentan como atrasados.</a:t>
+              <a:t>179 DT con la fecha de compromiso vencida; mediana de 19 días y el más antiguo lleva 151. Los 217 abiertos sin fecha de compromiso no se cuentan como atrasados.</a:t>
             </a:r>
             <a:endParaRPr lang="en-US" sz="1150" dirty="0"/>
           </a:p>
@@ -21913,7 +21913,7 @@
                 <a:ea typeface="Calibri" pitchFamily="34" charset="-122"/>
                 <a:cs typeface="Calibri" pitchFamily="34" charset="-120"/>
               </a:rPr>
-              <a:t>Caminatas: 99,5% y 99,5% de lo exigible (C1 y C2).  </a:t>
+              <a:t>Caminatas: 100% y 100% de lo exigible (C1 y C2).  </a:t>
             </a:r>
             <a:pPr indent="0" marL="0">
               <a:lnSpc>
@@ -21930,7 +21930,7 @@
                 <a:ea typeface="Calibri" pitchFamily="34" charset="-122"/>
                 <a:cs typeface="Calibri" pitchFamily="34" charset="-120"/>
               </a:rPr>
-              <a:t>Caminata 1: 207/208 exigibles. Caminata 2: 194/195, con 23 agendadas en plazo y 1 sin programar.</a:t>
+              <a:t>Caminata 1: 211/211 exigibles. Caminata 2: 194/194, con 24 agendadas en plazo y 0 sin programar.</a:t>
             </a:r>
             <a:endParaRPr lang="en-US" sz="1150" dirty="0"/>
           </a:p>
@@ -22009,7 +22009,7 @@
                 <a:ea typeface="Calibri" pitchFamily="34" charset="-122"/>
                 <a:cs typeface="Calibri" pitchFamily="34" charset="-120"/>
               </a:rPr>
-              <a:t>Avance promedio 92,8%: 181 subsistemas sobre 95% y solo 8 bajo 80%.</a:t>
+              <a:t>Avance promedio 93,1%: 182 subsistemas sobre 95% y solo 8 bajo 80%.</a:t>
             </a:r>
             <a:endParaRPr lang="en-US" sz="1150" dirty="0"/>
           </a:p>
@@ -22048,7 +22048,7 @@
                 <a:ea typeface="Calibri" pitchFamily="34" charset="-122"/>
                 <a:cs typeface="Calibri" pitchFamily="34" charset="-120"/>
               </a:rPr>
-              <a:t>Fuente: STATUS_SUBSISTEMAS_TALABRE + Detalle_de_Terminaciones · 218 subsistemas · 2.057 DT · Atrasos al 10-08-2026</a:t>
+              <a:t>Fuente: STATUS_SUBSISTEMAS_TALABRE + Detalle_de_Terminaciones · 218 subsistemas · 2.062 DT · Atrasos al 17-08-2026</a:t>
             </a:r>
             <a:endParaRPr lang="en-US" sz="850" dirty="0"/>
           </a:p>
@@ -22299,7 +22299,7 @@
                 <a:ea typeface="Calibri" pitchFamily="34" charset="-122"/>
                 <a:cs typeface="Calibri" pitchFamily="34" charset="-120"/>
               </a:rPr>
-              <a:t>Caminata 2: 99,5% de lo exigible (194/195) — se descuentan 23 agendadas a fecha futura, que no son incumplimiento al corte. Talabre mide la carpeta como % de avance (PEC), no como estado de aprobación.</a:t>
+              <a:t>Caminata 2: 100% de lo exigible (194/194) — se descuentan 24 agendadas a fecha futura, que no son incumplimiento al corte. Talabre mide la carpeta como % de avance (PEC), no como estado de aprobación.</a:t>
             </a:r>
             <a:endParaRPr lang="en-US" sz="1350" dirty="0"/>
           </a:p>
@@ -22370,7 +22370,7 @@
                 <a:ea typeface="Calibri" pitchFamily="34" charset="-122"/>
                 <a:cs typeface="Calibri" pitchFamily="34" charset="-120"/>
               </a:rPr>
-              <a:t>Fuente: STATUS_SUBSISTEMAS_TALABRE + Detalle_de_Terminaciones · 218 subsistemas · 2.057 DT · Atrasos al 10-08-2026</a:t>
+              <a:t>Fuente: STATUS_SUBSISTEMAS_TALABRE + Detalle_de_Terminaciones · 218 subsistemas · 2.062 DT · Atrasos al 17-08-2026</a:t>
             </a:r>
             <a:endParaRPr lang="en-US" sz="850" dirty="0"/>
           </a:p>
@@ -22621,7 +22621,7 @@
                 <a:ea typeface="Calibri" pitchFamily="34" charset="-122"/>
                 <a:cs typeface="Calibri" pitchFamily="34" charset="-120"/>
               </a:rPr>
-              <a:t>2.057 DT levantados; 75,8% cerrados. Atrasado = DT abierto cuya fecha de compromiso de cierre ya venció al 10-08-2026.</a:t>
+              <a:t>2.062 DT levantados; 79,6% cerrados. Atrasado = DT abierto cuya fecha de compromiso de cierre ya venció al 17-08-2026.</a:t>
             </a:r>
             <a:endParaRPr lang="en-US" sz="1350" dirty="0"/>
           </a:p>
@@ -22776,7 +22776,7 @@
                 <a:ea typeface="Calibri" pitchFamily="34" charset="-122"/>
                 <a:cs typeface="Calibri" pitchFamily="34" charset="-120"/>
               </a:rPr>
-              <a:t>329/376</a:t>
+              <a:t>337/376</a:t>
             </a:r>
             <a:endParaRPr lang="en-US" sz="1050" dirty="0"/>
           </a:p>
@@ -22815,7 +22815,7 @@
                 <a:ea typeface="Calibri" pitchFamily="34" charset="-122"/>
                 <a:cs typeface="Calibri" pitchFamily="34" charset="-120"/>
               </a:rPr>
-              <a:t>87,5%</a:t>
+              <a:t>89,6%</a:t>
             </a:r>
             <a:endParaRPr lang="en-US" sz="1100" dirty="0"/>
           </a:p>
@@ -22850,7 +22850,7 @@
         <p:spPr>
           <a:xfrm>
             <a:off x="7936992" y="2688336"/>
-            <a:ext cx="3120390" cy="118872"/>
+            <a:ext cx="3195279" cy="118872"/>
           </a:xfrm>
           <a:prstGeom prst="rect">
             <a:avLst/>
@@ -22933,7 +22933,7 @@
                 <a:ea typeface="Calibri" pitchFamily="34" charset="-122"/>
                 <a:cs typeface="Calibri" pitchFamily="34" charset="-120"/>
               </a:rPr>
-              <a:t>1.153/1.383</a:t>
+              <a:t>1.226/1.388</a:t>
             </a:r>
             <a:endParaRPr lang="en-US" sz="1050" dirty="0"/>
           </a:p>
@@ -22972,7 +22972,7 @@
                 <a:ea typeface="Calibri" pitchFamily="34" charset="-122"/>
                 <a:cs typeface="Calibri" pitchFamily="34" charset="-120"/>
               </a:rPr>
-              <a:t>83,4%</a:t>
+              <a:t>88,3%</a:t>
             </a:r>
             <a:endParaRPr lang="en-US" sz="1100" dirty="0"/>
           </a:p>
@@ -23007,7 +23007,7 @@
         <p:spPr>
           <a:xfrm>
             <a:off x="7936992" y="3200400"/>
-            <a:ext cx="2974177" cy="118872"/>
+            <a:ext cx="3148919" cy="118872"/>
           </a:xfrm>
           <a:prstGeom prst="rect">
             <a:avLst/>
@@ -23090,7 +23090,7 @@
                 <a:ea typeface="Calibri" pitchFamily="34" charset="-122"/>
                 <a:cs typeface="Calibri" pitchFamily="34" charset="-120"/>
               </a:rPr>
-              <a:t>68/239</a:t>
+              <a:t>69/239</a:t>
             </a:r>
             <a:endParaRPr lang="en-US" sz="1050" dirty="0"/>
           </a:p>
@@ -23129,7 +23129,7 @@
                 <a:ea typeface="Calibri" pitchFamily="34" charset="-122"/>
                 <a:cs typeface="Calibri" pitchFamily="34" charset="-120"/>
               </a:rPr>
-              <a:t>28,5%</a:t>
+              <a:t>28,9%</a:t>
             </a:r>
             <a:endParaRPr lang="en-US" sz="1100" dirty="0"/>
           </a:p>
@@ -23164,7 +23164,7 @@
         <p:spPr>
           <a:xfrm>
             <a:off x="7936992" y="3712464"/>
-            <a:ext cx="1016356" cy="118872"/>
+            <a:ext cx="1030620" cy="118872"/>
           </a:xfrm>
           <a:prstGeom prst="rect">
             <a:avLst/>
@@ -23546,7 +23546,7 @@
                 <a:ea typeface="Calibri" pitchFamily="34" charset="-122"/>
                 <a:cs typeface="Calibri" pitchFamily="34" charset="-120"/>
               </a:rPr>
-              <a:t>Mediana de 13 días vencidos; el más antiguo lleva 144. 157 entre 1-30 días, 61 entre 31-90 días, 21 entre 91-180 días.</a:t>
+              <a:t>Mediana de 19 días vencidos; el más antiguo lleva 151. 102 entre 1-30 días, 62 entre 31-90 días, 15 entre 91-180 días.</a:t>
             </a:r>
             <a:endParaRPr lang="en-US" sz="1150" dirty="0"/>
           </a:p>
@@ -23585,7 +23585,7 @@
                 <a:ea typeface="Calibri" pitchFamily="34" charset="-122"/>
                 <a:cs typeface="Calibri" pitchFamily="34" charset="-120"/>
               </a:rPr>
-              <a:t>Fuente: STATUS_SUBSISTEMAS_TALABRE + Detalle_de_Terminaciones · 218 subsistemas · 2.057 DT · Atrasos al 10-08-2026</a:t>
+              <a:t>Fuente: STATUS_SUBSISTEMAS_TALABRE + Detalle_de_Terminaciones · 218 subsistemas · 2.062 DT · Atrasos al 17-08-2026</a:t>
             </a:r>
             <a:endParaRPr lang="en-US" sz="850" dirty="0"/>
           </a:p>

--- a/panel_control_TOP_P1/Panel_Control_TOP_P1.pptx
+++ b/panel_control_TOP_P1/Panel_Control_TOP_P1.pptx
@@ -233,10 +233,10 @@
                 <c:formatCode>General</c:formatCode>
                 <c:ptCount val="2"/>
                 <c:pt idx="0">
-                  <c:v>43</c:v>
+                  <c:v>46</c:v>
                 </c:pt>
                 <c:pt idx="1">
-                  <c:v>10</c:v>
+                  <c:v>11</c:v>
                 </c:pt>
               </c:numCache>
             </c:numRef>
@@ -311,10 +311,10 @@
                 <c:formatCode>General</c:formatCode>
                 <c:ptCount val="2"/>
                 <c:pt idx="0">
-                  <c:v>37</c:v>
+                  <c:v>34</c:v>
                 </c:pt>
                 <c:pt idx="1">
-                  <c:v>5</c:v>
+                  <c:v>4</c:v>
                 </c:pt>
               </c:numCache>
             </c:numRef>
@@ -690,10 +690,10 @@
                   <c:v>1154</c:v>
                 </c:pt>
                 <c:pt idx="1">
-                  <c:v>828</c:v>
+                  <c:v>826</c:v>
                 </c:pt>
                 <c:pt idx="2">
-                  <c:v>6</c:v>
+                  <c:v>8</c:v>
                 </c:pt>
               </c:numCache>
             </c:numRef>
@@ -847,19 +847,19 @@
                 <c:formatCode>General</c:formatCode>
                 <c:ptCount val="5"/>
                 <c:pt idx="0">
-                  <c:v>52</c:v>
+                  <c:v>3</c:v>
                 </c:pt>
                 <c:pt idx="1">
                   <c:v>5</c:v>
                 </c:pt>
                 <c:pt idx="2">
-                  <c:v>7</c:v>
+                  <c:v/>
                 </c:pt>
                 <c:pt idx="3">
-                  <c:v>8</c:v>
+                  <c:v/>
                 </c:pt>
                 <c:pt idx="4">
-                  <c:v>2</c:v>
+                  <c:v/>
                 </c:pt>
               </c:numCache>
             </c:numRef>
@@ -943,19 +943,19 @@
                 <c:formatCode>General</c:formatCode>
                 <c:ptCount val="5"/>
                 <c:pt idx="0">
-                  <c:v>70</c:v>
+                  <c:v>161</c:v>
                 </c:pt>
                 <c:pt idx="1">
                   <c:v>60</c:v>
                 </c:pt>
                 <c:pt idx="2">
-                  <c:v>13</c:v>
+                  <c:v>20</c:v>
                 </c:pt>
                 <c:pt idx="3">
-                  <c:v>10</c:v>
+                  <c:v>19</c:v>
                 </c:pt>
                 <c:pt idx="4">
-                  <c:v>10</c:v>
+                  <c:v>12</c:v>
                 </c:pt>
               </c:numCache>
             </c:numRef>
@@ -1328,13 +1328,13 @@
               <c:numCache>
                 <c:ptCount val="3"/>
                 <c:pt idx="0">
-                  <c:v>667</c:v>
+                  <c:v>676</c:v>
                 </c:pt>
                 <c:pt idx="1">
-                  <c:v>74</c:v>
+                  <c:v>8</c:v>
                 </c:pt>
                 <c:pt idx="2">
-                  <c:v>163</c:v>
+                  <c:v>272</c:v>
                 </c:pt>
               </c:numCache>
             </c:numRef>
@@ -1623,10 +1623,10 @@
                   <c:v>3</c:v>
                 </c:pt>
                 <c:pt idx="1">
-                  <c:v>1</c:v>
+                  <c:v/>
                 </c:pt>
                 <c:pt idx="2">
-                  <c:v>3</c:v>
+                  <c:v/>
                 </c:pt>
                 <c:pt idx="3">
                   <c:v/>
@@ -1656,6 +1656,126 @@
           <c:tx>
             <c:strRef>
               <c:f>Sheet1!$D$1</c:f>
+              <c:strCache>
+                <c:ptCount val="1"/>
+                <c:pt idx="0">
+                  <c:v>Agenda vencida</c:v>
+                </c:pt>
+              </c:strCache>
+            </c:strRef>
+          </c:tx>
+          <c:spPr>
+            <a:solidFill>
+              <a:srgbClr val="9A6B0F"/>
+            </a:solidFill>
+            <a:effectLst/>
+          </c:spPr>
+          <c:invertIfNegative val="0"/>
+          <c:dLbls>
+            <c:numFmt formatCode="#,##0" sourceLinked="0"/>
+            <c:txPr>
+              <a:bodyPr/>
+              <a:lstStyle/>
+              <a:p>
+                <a:pPr>
+                  <a:defRPr b="1" i="0" strike="noStrike" sz="1100" u="none">
+                    <a:solidFill>
+                      <a:srgbClr val="FFFFFF"/>
+                    </a:solidFill>
+                    <a:latin typeface="Calibri"/>
+                  </a:defRPr>
+                </a:pPr>
+              </a:p>
+            </c:txPr>
+            <c:dLblPos val="ctr"/>
+            <c:showLegendKey val="0"/>
+            <c:showVal val="1"/>
+            <c:showCatName val="0"/>
+            <c:showSerName val="0"/>
+            <c:showPercent val="0"/>
+            <c:showBubbleSize val="0"/>
+            <c:showLeaderLines val="0"/>
+          </c:dLbls>
+          <c:cat>
+            <c:multiLvlStrRef>
+              <c:f>Sheet1!$A$2:$A$10</c:f>
+              <c:multiLvlStrCache>
+                <c:ptCount val="9"/>
+                <c:lvl>
+                  <c:pt idx="0">
+                    <c:v>CERRO VERDE/PS2</c:v>
+                  </c:pt>
+                  <c:pt idx="1">
+                    <c:v>EBMP</c:v>
+                  </c:pt>
+                  <c:pt idx="2">
+                    <c:v>EBMS</c:v>
+                  </c:pt>
+                  <c:pt idx="3">
+                    <c:v>IMPULSIÓN ADUCCIÓN</c:v>
+                  </c:pt>
+                  <c:pt idx="4">
+                    <c:v>LÍNEAS IMPULSIÓN</c:v>
+                  </c:pt>
+                  <c:pt idx="5">
+                    <c:v>PISCINAS Y SEDIMENTADOR</c:v>
+                  </c:pt>
+                  <c:pt idx="6">
+                    <c:v>POZOS</c:v>
+                  </c:pt>
+                  <c:pt idx="7">
+                    <c:v>PQS</c:v>
+                  </c:pt>
+                  <c:pt idx="8">
+                    <c:v>SALA GAR</c:v>
+                  </c:pt>
+                </c:lvl>
+              </c:multiLvlStrCache>
+            </c:multiLvlStrRef>
+          </c:cat>
+          <c:val>
+            <c:numRef>
+              <c:f>Sheet1!$D$2:$D$10</c:f>
+              <c:numCache>
+                <c:formatCode>General</c:formatCode>
+                <c:ptCount val="9"/>
+                <c:pt idx="0">
+                  <c:v/>
+                </c:pt>
+                <c:pt idx="1">
+                  <c:v>1</c:v>
+                </c:pt>
+                <c:pt idx="2">
+                  <c:v>3</c:v>
+                </c:pt>
+                <c:pt idx="3">
+                  <c:v/>
+                </c:pt>
+                <c:pt idx="4">
+                  <c:v/>
+                </c:pt>
+                <c:pt idx="5">
+                  <c:v/>
+                </c:pt>
+                <c:pt idx="6">
+                  <c:v/>
+                </c:pt>
+                <c:pt idx="7">
+                  <c:v/>
+                </c:pt>
+                <c:pt idx="8">
+                  <c:v/>
+                </c:pt>
+              </c:numCache>
+            </c:numRef>
+          </c:val>
+        </c:ser>
+        <c:ser>
+          <c:idx val="3"/>
+          <c:order val="3"/>
+          <c:tx>
+            <c:strRef>
+              <c:f>Sheet1!$E$1</c:f>
               <c:strCache>
                 <c:ptCount val="1"/>
                 <c:pt idx="0">
@@ -1735,7 +1855,7 @@
           </c:cat>
           <c:val>
             <c:numRef>
-              <c:f>Sheet1!$D$2:$D$10</c:f>
+              <c:f>Sheet1!$E$2:$E$10</c:f>
               <c:numCache>
                 <c:formatCode>General</c:formatCode>
                 <c:ptCount val="9"/>
@@ -2181,10 +2301,10 @@
                   <c:v/>
                 </c:pt>
                 <c:pt idx="1">
-                  <c:v>1</c:v>
+                  <c:v>2</c:v>
                 </c:pt>
                 <c:pt idx="2">
-                  <c:v>7</c:v>
+                  <c:v>8</c:v>
                 </c:pt>
                 <c:pt idx="3">
                   <c:v/>
@@ -2301,10 +2421,10 @@
                   <c:v>1</c:v>
                 </c:pt>
                 <c:pt idx="1">
-                  <c:v>1</c:v>
+                  <c:v/>
                 </c:pt>
                 <c:pt idx="2">
-                  <c:v>2</c:v>
+                  <c:v>1</c:v>
                 </c:pt>
                 <c:pt idx="3">
                   <c:v/>
@@ -2604,13 +2724,13 @@
                 <c:formatCode>General</c:formatCode>
                 <c:ptCount val="5"/>
                 <c:pt idx="0">
-                  <c:v>39</c:v>
+                  <c:v>18</c:v>
                 </c:pt>
                 <c:pt idx="1">
-                  <c:v>81</c:v>
+                  <c:v>77</c:v>
                 </c:pt>
                 <c:pt idx="2">
-                  <c:v>38</c:v>
+                  <c:v>32</c:v>
                 </c:pt>
                 <c:pt idx="3">
                   <c:v>17</c:v>
@@ -2700,13 +2820,13 @@
                 <c:formatCode>General</c:formatCode>
                 <c:ptCount val="5"/>
                 <c:pt idx="0">
-                  <c:v>138</c:v>
+                  <c:v>132</c:v>
                 </c:pt>
                 <c:pt idx="1">
                   <c:v>56</c:v>
                 </c:pt>
                 <c:pt idx="2">
-                  <c:v>32</c:v>
+                  <c:v>28</c:v>
                 </c:pt>
                 <c:pt idx="3">
                   <c:v>13</c:v>
@@ -3465,7 +3585,7 @@
                   <c:v/>
                 </c:pt>
                 <c:pt idx="2">
-                  <c:v/>
+                  <c:v>1</c:v>
                 </c:pt>
                 <c:pt idx="3">
                   <c:v/>
@@ -3735,7 +3855,7 @@
                   <c:v>68</c:v>
                 </c:pt>
                 <c:pt idx="2">
-                  <c:v>21</c:v>
+                  <c:v>20</c:v>
                 </c:pt>
                 <c:pt idx="3">
                   <c:v>2</c:v>
@@ -4023,7 +4143,7 @@
                 <c:formatCode>General</c:formatCode>
                 <c:ptCount val="6"/>
                 <c:pt idx="0">
-                  <c:v>217</c:v>
+                  <c:v>219</c:v>
                 </c:pt>
                 <c:pt idx="1">
                   <c:v>173</c:v>
@@ -4032,7 +4152,7 @@
                   <c:v>153</c:v>
                 </c:pt>
                 <c:pt idx="3">
-                  <c:v>107</c:v>
+                  <c:v>111</c:v>
                 </c:pt>
                 <c:pt idx="4">
                   <c:v>17</c:v>
@@ -4125,16 +4245,16 @@
                 <c:formatCode>General</c:formatCode>
                 <c:ptCount val="6"/>
                 <c:pt idx="0">
-                  <c:v>32</c:v>
+                  <c:v>30</c:v>
                 </c:pt>
                 <c:pt idx="1">
-                  <c:v>43</c:v>
+                  <c:v>42</c:v>
                 </c:pt>
                 <c:pt idx="2">
                   <c:v>28</c:v>
                 </c:pt>
                 <c:pt idx="3">
-                  <c:v>19</c:v>
+                  <c:v>14</c:v>
                 </c:pt>
                 <c:pt idx="4">
                   <c:v>19</c:v>
@@ -6775,7 +6895,7 @@
                 <a:ea typeface="Cambria" pitchFamily="34" charset="-122"/>
                 <a:cs typeface="Cambria" pitchFamily="34" charset="-120"/>
               </a:rPr>
-              <a:t>53,8%</a:t>
+              <a:t>57,5%</a:t>
             </a:r>
             <a:endParaRPr lang="en-US" sz="3400" dirty="0"/>
           </a:p>
@@ -6853,7 +6973,7 @@
                 <a:ea typeface="Cambria" pitchFamily="34" charset="-122"/>
                 <a:cs typeface="Cambria" pitchFamily="34" charset="-120"/>
               </a:rPr>
-              <a:t>66,7%</a:t>
+              <a:t>73,3%</a:t>
             </a:r>
             <a:endParaRPr lang="en-US" sz="3400" dirty="0"/>
           </a:p>
@@ -6931,7 +7051,7 @@
                 <a:ea typeface="Cambria" pitchFamily="34" charset="-122"/>
                 <a:cs typeface="Cambria" pitchFamily="34" charset="-120"/>
               </a:rPr>
-              <a:t>43,2%</a:t>
+              <a:t>44,2%</a:t>
             </a:r>
             <a:endParaRPr lang="en-US" sz="3400" dirty="0"/>
           </a:p>
@@ -7009,7 +7129,7 @@
                 <a:ea typeface="Cambria" pitchFamily="34" charset="-122"/>
                 <a:cs typeface="Cambria" pitchFamily="34" charset="-120"/>
               </a:rPr>
-              <a:t>73,8%</a:t>
+              <a:t>70,7%</a:t>
             </a:r>
             <a:endParaRPr lang="en-US" sz="3400" dirty="0"/>
           </a:p>
@@ -7087,7 +7207,7 @@
                 <a:ea typeface="Calibri" pitchFamily="34" charset="-122"/>
                 <a:cs typeface="Calibri" pitchFamily="34" charset="-120"/>
               </a:rPr>
-              <a:t>Corte: 11-08-2026</a:t>
+              <a:t>Corte: 18-08-2026</a:t>
             </a:r>
             <a:endParaRPr lang="en-US" sz="1100" dirty="0"/>
           </a:p>
@@ -7126,7 +7246,7 @@
                 <a:ea typeface="Calibri" pitchFamily="34" charset="-122"/>
                 <a:cs typeface="Calibri" pitchFamily="34" charset="-120"/>
               </a:rPr>
-              <a:t>Fuente: REPORTE_GERENCIAL + Listado de Puntos Punch Consolidado · Corte 11-08-2026 · Atrasos al 17-08-2026</a:t>
+              <a:t>Fuente: REPORTE_GERENCIAL + Listado de Puntos Punch Consolidado · Corte 18-08-2026 · Atrasos al 24-08-2026</a:t>
             </a:r>
             <a:endParaRPr lang="en-US" sz="850" dirty="0"/>
           </a:p>
@@ -7419,7 +7539,7 @@
                 <a:ea typeface="Calibri" pitchFamily="34" charset="-122"/>
                 <a:cs typeface="Calibri" pitchFamily="34" charset="-120"/>
               </a:rPr>
-              <a:t>Recuperar los 179 DT atrasados</a:t>
+              <a:t>Recuperar los 148 DT atrasados</a:t>
             </a:r>
             <a:endParaRPr lang="en-US" sz="1350" dirty="0"/>
           </a:p>
@@ -7461,7 +7581,7 @@
                 <a:ea typeface="Calibri" pitchFamily="34" charset="-122"/>
                 <a:cs typeface="Calibri" pitchFamily="34" charset="-120"/>
               </a:rPr>
-              <a:t>161 son P2 y 15 son P1. La mediana de atraso es de 19 días y 15 superan los 90 días.</a:t>
+              <a:t>131 son P2 y 14 son P1. La mediana de atraso es de 23 días y 10 superan los 90 días.</a:t>
             </a:r>
             <a:endParaRPr lang="en-US" sz="1100" dirty="0"/>
           </a:p>
@@ -7603,7 +7723,7 @@
                 <a:ea typeface="Calibri" pitchFamily="34" charset="-122"/>
                 <a:cs typeface="Calibri" pitchFamily="34" charset="-120"/>
               </a:rPr>
-              <a:t>CERRO VERDE/PS2: 0/3 (0%) · PISCINAS Y SEDIMENTADOR: 6/22 (27,3%). A nivel proyecto la caminata 2 va 89% con 24 ya agendadas.</a:t>
+              <a:t>CERRO VERDE/PS2: 0/3 (0%) · PISCINAS Y SEDIMENTADOR: 6/22 (27,3%). A nivel proyecto la caminata 2 va 89% con 20 ya agendadas.</a:t>
             </a:r>
             <a:endParaRPr lang="en-US" sz="1100" dirty="0"/>
           </a:p>
@@ -7745,7 +7865,7 @@
                 <a:ea typeface="Calibri" pitchFamily="34" charset="-122"/>
                 <a:cs typeface="Calibri" pitchFamily="34" charset="-120"/>
               </a:rPr>
-              <a:t>De 50 DT levantados en P4 no se ha cerrado ninguno (0%). P3 tampoco despega: 28,9% de cierre.</a:t>
+              <a:t>De 50 DT levantados en P4 no se ha cerrado ninguno (0%). P3 tampoco despega: 31,4% de cierre.</a:t>
             </a:r>
             <a:endParaRPr lang="en-US" sz="1100" dirty="0"/>
           </a:p>
@@ -7887,7 +8007,7 @@
                 <a:ea typeface="Calibri" pitchFamily="34" charset="-122"/>
                 <a:cs typeface="Calibri" pitchFamily="34" charset="-120"/>
               </a:rPr>
-              <a:t>Concentra 119 de los 421 DT abiertos (28,3%), con 13 atrasados. Además hay 8 carpetas bajo 80% de avance que conviene cerrar en paralelo.</a:t>
+              <a:t>Concentra 112 de los 380 DT abiertos (29,5%), con 6 atrasados. Además hay 6 carpetas bajo 80% de avance que conviene cerrar en paralelo.</a:t>
             </a:r>
             <a:endParaRPr lang="en-US" sz="1100" dirty="0"/>
           </a:p>
@@ -7926,7 +8046,7 @@
                 <a:ea typeface="Calibri" pitchFamily="34" charset="-122"/>
                 <a:cs typeface="Calibri" pitchFamily="34" charset="-120"/>
               </a:rPr>
-              <a:t>Fuente: STATUS_SUBSISTEMAS_TALABRE + Detalle_de_Terminaciones · 218 subsistemas · 2.062 DT · Atrasos al 17-08-2026</a:t>
+              <a:t>Fuente: STATUS_SUBSISTEMAS_TALABRE + Detalle_de_Terminaciones · 218 subsistemas · 2.062 DT · Atrasos al 24-08-2026</a:t>
             </a:r>
             <a:endParaRPr lang="en-US" sz="850" dirty="0"/>
           </a:p>
@@ -8494,7 +8614,7 @@
                 <a:ea typeface="Cambria" pitchFamily="34" charset="-122"/>
                 <a:cs typeface="Cambria" pitchFamily="34" charset="-120"/>
               </a:rPr>
-              <a:t>20%</a:t>
+              <a:t>20,7%</a:t>
             </a:r>
             <a:endParaRPr lang="en-US" sz="3400" dirty="0"/>
           </a:p>
@@ -8650,7 +8770,7 @@
                 <a:ea typeface="Calibri" pitchFamily="34" charset="-122"/>
                 <a:cs typeface="Calibri" pitchFamily="34" charset="-120"/>
               </a:rPr>
-              <a:t>Corte: 10-08-2026   ·   Corte anterior: 26-07-2026</a:t>
+              <a:t>Corte: 17-08-2026   ·   Corte anterior: 10-08-2026</a:t>
             </a:r>
             <a:endParaRPr lang="en-US" sz="1100" dirty="0"/>
           </a:p>
@@ -8689,7 +8809,7 @@
                 <a:ea typeface="Calibri" pitchFamily="34" charset="-122"/>
                 <a:cs typeface="Calibri" pitchFamily="34" charset="-120"/>
               </a:rPr>
-              <a:t>Fuente: Estatus_Resumen_General_QAQC.xlsx · Corte 10-08-2026 · Áreas 2000/3000/4000/8000</a:t>
+              <a:t>Fuente: Estatus_Resumen_General_QAQC.xlsx · Corte 17-08-2026 · Áreas 2000/3000/4000/8000</a:t>
             </a:r>
             <a:endParaRPr lang="en-US" sz="850" dirty="0"/>
           </a:p>
@@ -9414,7 +9534,7 @@
                 <a:ea typeface="Cambria" pitchFamily="34" charset="-122"/>
                 <a:cs typeface="Cambria" pitchFamily="34" charset="-120"/>
               </a:rPr>
-              <a:t>20%</a:t>
+              <a:t>20,7%</a:t>
             </a:r>
             <a:endParaRPr lang="en-US" sz="4000" dirty="0"/>
           </a:p>
@@ -9453,7 +9573,7 @@
                 <a:ea typeface="Calibri" pitchFamily="34" charset="-122"/>
                 <a:cs typeface="Calibri" pitchFamily="34" charset="-120"/>
               </a:rPr>
-              <a:t>27/135</a:t>
+              <a:t>28/135</a:t>
             </a:r>
             <a:endParaRPr lang="en-US" sz="1400" dirty="0"/>
           </a:p>
@@ -9531,7 +9651,7 @@
                 <a:ea typeface="Calibri" pitchFamily="34" charset="-122"/>
                 <a:cs typeface="Calibri" pitchFamily="34" charset="-120"/>
               </a:rPr>
-              <a:t>0 aprobadas · 12 rechazadas · 14 en revisión · 1 observadas</a:t>
+              <a:t>0 aprobadas · 12 rechazadas · 15 en revisión · 1 observadas</a:t>
             </a:r>
             <a:endParaRPr lang="en-US" sz="950" dirty="0"/>
           </a:p>
@@ -9564,13 +9684,13 @@
             <a:r>
               <a:rPr lang="en-US" sz="900" b="1" dirty="0">
                 <a:solidFill>
-                  <a:srgbClr val="56606E"/>
-                </a:solidFill>
-                <a:latin typeface="Calibri" pitchFamily="34" charset="0"/>
-                <a:ea typeface="Calibri" pitchFamily="34" charset="-122"/>
-                <a:cs typeface="Calibri" pitchFamily="34" charset="-120"/>
-              </a:rPr>
-              <a:t>= sin cambio vs. corte anterior</a:t>
+                  <a:srgbClr val="1F7A44"/>
+                </a:solidFill>
+                <a:latin typeface="Calibri" pitchFamily="34" charset="0"/>
+                <a:ea typeface="Calibri" pitchFamily="34" charset="-122"/>
+                <a:cs typeface="Calibri" pitchFamily="34" charset="-120"/>
+              </a:rPr>
+              <a:t>▲ +1 vs. corte anterior</a:t>
             </a:r>
             <a:endParaRPr lang="en-US" sz="900" dirty="0"/>
           </a:p>
@@ -9780,7 +9900,7 @@
                 <a:ea typeface="Calibri" pitchFamily="34" charset="-122"/>
                 <a:cs typeface="Calibri" pitchFamily="34" charset="-120"/>
               </a:rPr>
-              <a:t>828 abiertos · 667 vencidos · 6 en trámite</a:t>
+              <a:t>826 abiertos · 673 vencidos · 8 en trámite</a:t>
             </a:r>
             <a:endParaRPr lang="en-US" sz="950" dirty="0"/>
           </a:p>
@@ -9813,13 +9933,13 @@
             <a:r>
               <a:rPr lang="en-US" sz="900" b="1" dirty="0">
                 <a:solidFill>
-                  <a:srgbClr val="1F7A44"/>
-                </a:solidFill>
-                <a:latin typeface="Calibri" pitchFamily="34" charset="0"/>
-                <a:ea typeface="Calibri" pitchFamily="34" charset="-122"/>
-                <a:cs typeface="Calibri" pitchFamily="34" charset="-120"/>
-              </a:rPr>
-              <a:t>▲ +6 vs. corte anterior</a:t>
+                  <a:srgbClr val="56606E"/>
+                </a:solidFill>
+                <a:latin typeface="Calibri" pitchFamily="34" charset="0"/>
+                <a:ea typeface="Calibri" pitchFamily="34" charset="-122"/>
+                <a:cs typeface="Calibri" pitchFamily="34" charset="-120"/>
+              </a:rPr>
+              <a:t>= sin cambio vs. corte anterior</a:t>
             </a:r>
             <a:endParaRPr lang="en-US" sz="900" dirty="0"/>
           </a:p>
@@ -10038,7 +10158,7 @@
                 <a:ea typeface="Calibri" pitchFamily="34" charset="-122"/>
                 <a:cs typeface="Calibri" pitchFamily="34" charset="-120"/>
               </a:rPr>
-              <a:t>27 entregadas de 135 (20%) y 0 aprobadas; 12 rechazadas.</a:t>
+              <a:t>28 entregadas de 135 (20,7%) y 0 aprobadas; 12 rechazadas.</a:t>
             </a:r>
             <a:endParaRPr lang="en-US" sz="1250" dirty="0"/>
           </a:p>
@@ -10117,7 +10237,7 @@
                 <a:ea typeface="Calibri" pitchFamily="34" charset="-122"/>
                 <a:cs typeface="Calibri" pitchFamily="34" charset="-120"/>
               </a:rPr>
-              <a:t>+6 P1 cerrado desde el corte anterior; 828 abiertos, de los cuales 667 superaron su fecha de vencimiento (+262 en el período). El área 3000 concentra 705 (85,1%).</a:t>
+              <a:t>Ningún P1 cerrado desde el corte anterior; 826 abiertos, de los cuales 673 superaron su fecha de vencimiento (+6 en el período). El área 3000 concentra 703 (85,1%).</a:t>
             </a:r>
             <a:endParaRPr lang="en-US" sz="1250" dirty="0"/>
           </a:p>
@@ -10156,7 +10276,7 @@
                 <a:ea typeface="Calibri" pitchFamily="34" charset="-122"/>
                 <a:cs typeface="Calibri" pitchFamily="34" charset="-120"/>
               </a:rPr>
-              <a:t>Fuente: Estatus_Resumen_General_QAQC.xlsx · Corte 10-08-2026 · Áreas 2000/3000/4000/8000</a:t>
+              <a:t>Fuente: Estatus_Resumen_General_QAQC.xlsx · Corte 17-08-2026 · Áreas 2000/3000/4000/8000</a:t>
             </a:r>
             <a:endParaRPr lang="en-US" sz="850" dirty="0"/>
           </a:p>
@@ -11314,7 +11434,7 @@
                 <a:ea typeface="Calibri" pitchFamily="34" charset="-122"/>
                 <a:cs typeface="Calibri" pitchFamily="34" charset="-120"/>
               </a:rPr>
-              <a:t>705 (598)</a:t>
+              <a:t>703 (604)</a:t>
             </a:r>
             <a:endParaRPr lang="en-US" sz="1300" dirty="0"/>
           </a:p>
@@ -11593,7 +11713,7 @@
                 <a:ea typeface="Calibri" pitchFamily="34" charset="-122"/>
                 <a:cs typeface="Calibri" pitchFamily="34" charset="-120"/>
               </a:rPr>
-              <a:t>1/22 · 4,5%</a:t>
+              <a:t>2/22 · 9,1%</a:t>
             </a:r>
             <a:endParaRPr lang="en-US" sz="1300" dirty="0"/>
           </a:p>
@@ -12210,7 +12330,7 @@
                 <a:ea typeface="Calibri" pitchFamily="34" charset="-122"/>
                 <a:cs typeface="Calibri" pitchFamily="34" charset="-120"/>
               </a:rPr>
-              <a:t>Fuente: Estatus_Resumen_General_QAQC.xlsx · Corte 10-08-2026 · Áreas 2000/3000/4000/8000</a:t>
+              <a:t>Fuente: Estatus_Resumen_General_QAQC.xlsx · Corte 17-08-2026 · Áreas 2000/3000/4000/8000</a:t>
             </a:r>
             <a:endParaRPr lang="en-US" sz="850" dirty="0"/>
           </a:p>
@@ -12854,7 +12974,7 @@
                 <a:ea typeface="Calibri" pitchFamily="34" charset="-122"/>
                 <a:cs typeface="Calibri" pitchFamily="34" charset="-120"/>
               </a:rPr>
-              <a:t>Fuente: Estatus_Resumen_General_QAQC.xlsx · Corte 10-08-2026 · Áreas 2000/3000/4000/8000</a:t>
+              <a:t>Fuente: Estatus_Resumen_General_QAQC.xlsx · Corte 17-08-2026 · Áreas 2000/3000/4000/8000</a:t>
             </a:r>
             <a:endParaRPr lang="en-US" sz="850" dirty="0"/>
           </a:p>
@@ -13105,7 +13225,7 @@
                 <a:ea typeface="Calibri" pitchFamily="34" charset="-122"/>
                 <a:cs typeface="Calibri" pitchFamily="34" charset="-120"/>
               </a:rPr>
-              <a:t>27 carpetas entregadas de 135 (20%). Ninguna aprobada aún: el flujo se acumula en revisión y hay 12 rechazos que requieren rearmado.</a:t>
+              <a:t>28 carpetas entregadas de 135 (20,7%). Ninguna aprobada aún: el flujo se acumula en revisión y hay 12 rechazos que requieren rearmado.</a:t>
             </a:r>
             <a:endParaRPr lang="en-US" sz="1350" dirty="0"/>
           </a:p>
@@ -13282,6 +13402,45 @@
         </p:nvSpPr>
         <p:spPr>
           <a:xfrm>
+            <a:off x="9509760" y="2450592"/>
+            <a:ext cx="914400" cy="566928"/>
+          </a:xfrm>
+          <a:prstGeom prst="rect">
+            <a:avLst/>
+          </a:prstGeom>
+          <a:noFill/>
+          <a:ln/>
+        </p:spPr>
+        <p:txBody>
+          <a:bodyPr wrap="square" lIns="0" tIns="0" rIns="0" bIns="0" rtlCol="0" anchor="ctr"/>
+          <a:lstStyle/>
+          <a:p>
+            <a:pPr algn="r" indent="0" marL="0">
+              <a:buNone/>
+            </a:pPr>
+            <a:r>
+              <a:rPr lang="en-US" sz="950" b="1" dirty="0">
+                <a:solidFill>
+                  <a:srgbClr val="1F7A44"/>
+                </a:solidFill>
+                <a:latin typeface="Calibri" pitchFamily="34" charset="0"/>
+                <a:ea typeface="Calibri" pitchFamily="34" charset="-122"/>
+                <a:cs typeface="Calibri" pitchFamily="34" charset="-120"/>
+              </a:rPr>
+              <a:t>▲ +1</a:t>
+            </a:r>
+            <a:endParaRPr lang="en-US" sz="950" dirty="0"/>
+          </a:p>
+        </p:txBody>
+      </p:sp>
+      <p:sp>
+        <p:nvSpPr>
+          <p:cNvPr id="13" name="Text 9"/>
+          <p:cNvSpPr/>
+          <p:nvPr/>
+        </p:nvSpPr>
+        <p:spPr>
+          <a:xfrm>
             <a:off x="10469880" y="2450592"/>
             <a:ext cx="868680" cy="566928"/>
           </a:xfrm>
@@ -13307,7 +13466,7 @@
                 <a:ea typeface="Cambria" pitchFamily="34" charset="-122"/>
                 <a:cs typeface="Cambria" pitchFamily="34" charset="-120"/>
               </a:rPr>
-              <a:t>27</a:t>
+              <a:t>28</a:t>
             </a:r>
             <a:endParaRPr lang="en-US" sz="2200" dirty="0"/>
           </a:p>
@@ -13315,7 +13474,7 @@
       </p:sp>
       <p:sp>
         <p:nvSpPr>
-          <p:cNvPr id="13" name="Shape 9"/>
+          <p:cNvPr id="14" name="Shape 10"/>
           <p:cNvSpPr/>
           <p:nvPr/>
         </p:nvSpPr>
@@ -13337,7 +13496,7 @@
       </p:sp>
       <p:sp>
         <p:nvSpPr>
-          <p:cNvPr id="14" name="Shape 10"/>
+          <p:cNvPr id="15" name="Shape 11"/>
           <p:cNvSpPr/>
           <p:nvPr/>
         </p:nvSpPr>
@@ -13357,7 +13516,7 @@
       </p:sp>
       <p:sp>
         <p:nvSpPr>
-          <p:cNvPr id="15" name="Text 11"/>
+          <p:cNvPr id="16" name="Text 12"/>
           <p:cNvSpPr/>
           <p:nvPr/>
         </p:nvSpPr>
@@ -13396,7 +13555,46 @@
       </p:sp>
       <p:sp>
         <p:nvSpPr>
-          <p:cNvPr id="16" name="Text 12"/>
+          <p:cNvPr id="17" name="Text 13"/>
+          <p:cNvSpPr/>
+          <p:nvPr/>
+        </p:nvSpPr>
+        <p:spPr>
+          <a:xfrm>
+            <a:off x="9509760" y="3072384"/>
+            <a:ext cx="914400" cy="566928"/>
+          </a:xfrm>
+          <a:prstGeom prst="rect">
+            <a:avLst/>
+          </a:prstGeom>
+          <a:noFill/>
+          <a:ln/>
+        </p:spPr>
+        <p:txBody>
+          <a:bodyPr wrap="square" lIns="0" tIns="0" rIns="0" bIns="0" rtlCol="0" anchor="ctr"/>
+          <a:lstStyle/>
+          <a:p>
+            <a:pPr algn="r" indent="0" marL="0">
+              <a:buNone/>
+            </a:pPr>
+            <a:r>
+              <a:rPr lang="en-US" sz="950" b="1" dirty="0">
+                <a:solidFill>
+                  <a:srgbClr val="1F7A44"/>
+                </a:solidFill>
+                <a:latin typeface="Calibri" pitchFamily="34" charset="0"/>
+                <a:ea typeface="Calibri" pitchFamily="34" charset="-122"/>
+                <a:cs typeface="Calibri" pitchFamily="34" charset="-120"/>
+              </a:rPr>
+              <a:t>▲ +1</a:t>
+            </a:r>
+            <a:endParaRPr lang="en-US" sz="950" dirty="0"/>
+          </a:p>
+        </p:txBody>
+      </p:sp>
+      <p:sp>
+        <p:nvSpPr>
+          <p:cNvPr id="18" name="Text 14"/>
           <p:cNvSpPr/>
           <p:nvPr/>
         </p:nvSpPr>
@@ -13427,7 +13625,7 @@
                 <a:ea typeface="Cambria" pitchFamily="34" charset="-122"/>
                 <a:cs typeface="Cambria" pitchFamily="34" charset="-120"/>
               </a:rPr>
-              <a:t>14</a:t>
+              <a:t>15</a:t>
             </a:r>
             <a:endParaRPr lang="en-US" sz="2200" dirty="0"/>
           </a:p>
@@ -13435,7 +13633,7 @@
       </p:sp>
       <p:sp>
         <p:nvSpPr>
-          <p:cNvPr id="17" name="Shape 13"/>
+          <p:cNvPr id="19" name="Shape 15"/>
           <p:cNvSpPr/>
           <p:nvPr/>
         </p:nvSpPr>
@@ -13457,7 +13655,7 @@
       </p:sp>
       <p:sp>
         <p:nvSpPr>
-          <p:cNvPr id="18" name="Shape 14"/>
+          <p:cNvPr id="20" name="Shape 16"/>
           <p:cNvSpPr/>
           <p:nvPr/>
         </p:nvSpPr>
@@ -13477,7 +13675,7 @@
       </p:sp>
       <p:sp>
         <p:nvSpPr>
-          <p:cNvPr id="19" name="Text 15"/>
+          <p:cNvPr id="21" name="Text 17"/>
           <p:cNvSpPr/>
           <p:nvPr/>
         </p:nvSpPr>
@@ -13516,7 +13714,7 @@
       </p:sp>
       <p:sp>
         <p:nvSpPr>
-          <p:cNvPr id="20" name="Text 16"/>
+          <p:cNvPr id="22" name="Text 18"/>
           <p:cNvSpPr/>
           <p:nvPr/>
         </p:nvSpPr>
@@ -13555,7 +13753,7 @@
       </p:sp>
       <p:sp>
         <p:nvSpPr>
-          <p:cNvPr id="21" name="Shape 17"/>
+          <p:cNvPr id="23" name="Shape 19"/>
           <p:cNvSpPr/>
           <p:nvPr/>
         </p:nvSpPr>
@@ -13577,7 +13775,7 @@
       </p:sp>
       <p:sp>
         <p:nvSpPr>
-          <p:cNvPr id="22" name="Shape 18"/>
+          <p:cNvPr id="24" name="Shape 20"/>
           <p:cNvSpPr/>
           <p:nvPr/>
         </p:nvSpPr>
@@ -13597,7 +13795,7 @@
       </p:sp>
       <p:sp>
         <p:nvSpPr>
-          <p:cNvPr id="23" name="Text 19"/>
+          <p:cNvPr id="25" name="Text 21"/>
           <p:cNvSpPr/>
           <p:nvPr/>
         </p:nvSpPr>
@@ -13636,7 +13834,7 @@
       </p:sp>
       <p:sp>
         <p:nvSpPr>
-          <p:cNvPr id="24" name="Text 20"/>
+          <p:cNvPr id="26" name="Text 22"/>
           <p:cNvSpPr/>
           <p:nvPr/>
         </p:nvSpPr>
@@ -13675,7 +13873,7 @@
       </p:sp>
       <p:sp>
         <p:nvSpPr>
-          <p:cNvPr id="25" name="Shape 21"/>
+          <p:cNvPr id="27" name="Shape 23"/>
           <p:cNvSpPr/>
           <p:nvPr/>
         </p:nvSpPr>
@@ -13697,7 +13895,7 @@
       </p:sp>
       <p:sp>
         <p:nvSpPr>
-          <p:cNvPr id="26" name="Shape 22"/>
+          <p:cNvPr id="28" name="Shape 24"/>
           <p:cNvSpPr/>
           <p:nvPr/>
         </p:nvSpPr>
@@ -13717,7 +13915,7 @@
       </p:sp>
       <p:sp>
         <p:nvSpPr>
-          <p:cNvPr id="27" name="Text 23"/>
+          <p:cNvPr id="29" name="Text 25"/>
           <p:cNvSpPr/>
           <p:nvPr/>
         </p:nvSpPr>
@@ -13756,7 +13954,7 @@
       </p:sp>
       <p:sp>
         <p:nvSpPr>
-          <p:cNvPr id="28" name="Text 24"/>
+          <p:cNvPr id="30" name="Text 26"/>
           <p:cNvSpPr/>
           <p:nvPr/>
         </p:nvSpPr>
@@ -13795,7 +13993,7 @@
       </p:sp>
       <p:sp>
         <p:nvSpPr>
-          <p:cNvPr id="29" name="Text 25"/>
+          <p:cNvPr id="31" name="Text 27"/>
           <p:cNvSpPr/>
           <p:nvPr/>
         </p:nvSpPr>
@@ -13834,7 +14032,7 @@
       </p:sp>
       <p:sp>
         <p:nvSpPr>
-          <p:cNvPr id="30" name="Text 26"/>
+          <p:cNvPr id="32" name="Text 28"/>
           <p:cNvSpPr/>
           <p:nvPr/>
         </p:nvSpPr>
@@ -13865,7 +14063,7 @@
                 <a:ea typeface="Calibri" pitchFamily="34" charset="-122"/>
                 <a:cs typeface="Calibri" pitchFamily="34" charset="-120"/>
               </a:rPr>
-              <a:t>Fuente: Estatus_Resumen_General_QAQC.xlsx · Corte 10-08-2026 · Áreas 2000/3000/4000/8000</a:t>
+              <a:t>Fuente: Estatus_Resumen_General_QAQC.xlsx · Corte 17-08-2026 · Áreas 2000/3000/4000/8000</a:t>
             </a:r>
             <a:endParaRPr lang="en-US" sz="850" dirty="0"/>
           </a:p>
@@ -13873,7 +14071,7 @@
       </p:sp>
       <p:sp>
         <p:nvSpPr>
-          <p:cNvPr id="31" name="Text 27"/>
+          <p:cNvPr id="33" name="Text 29"/>
           <p:cNvSpPr/>
           <p:nvPr/>
         </p:nvSpPr>
@@ -13912,7 +14110,7 @@
       </p:sp>
       <p:sp>
         <p:nvSpPr>
-          <p:cNvPr id="32" name="Text 28"/>
+          <p:cNvPr id="34" name="Text 30"/>
           <p:cNvSpPr/>
           <p:nvPr/>
         </p:nvSpPr>
@@ -14461,7 +14659,7 @@
                 <a:ea typeface="Calibri" pitchFamily="34" charset="-122"/>
                 <a:cs typeface="Calibri" pitchFamily="34" charset="-120"/>
               </a:rPr>
-              <a:t>828</a:t>
+              <a:t>826</a:t>
             </a:r>
             <a:endParaRPr lang="en-US" sz="1100" dirty="0"/>
           </a:p>
@@ -14559,7 +14757,7 @@
                 <a:ea typeface="Calibri" pitchFamily="34" charset="-122"/>
                 <a:cs typeface="Calibri" pitchFamily="34" charset="-120"/>
               </a:rPr>
-              <a:t>6</a:t>
+              <a:t>8</a:t>
             </a:r>
             <a:endParaRPr lang="en-US" sz="1100" dirty="0"/>
           </a:p>
@@ -14642,7 +14840,7 @@
                 <a:ea typeface="Calibri" pitchFamily="34" charset="-122"/>
                 <a:cs typeface="Calibri" pitchFamily="34" charset="-120"/>
               </a:rPr>
-              <a:t>705 de 828 P1 abiertos (85,1%) están en el área 3000. Áreas 2000 y 8000 sobre 90% de cierre.</a:t>
+              <a:t>703 de 826 P1 abiertos (85,1%) están en el área 3000. Áreas 2000 y 8000 sobre 90% de cierre.</a:t>
             </a:r>
             <a:endParaRPr lang="en-US" sz="1150" dirty="0"/>
           </a:p>
@@ -14681,7 +14879,7 @@
                 <a:ea typeface="Calibri" pitchFamily="34" charset="-122"/>
                 <a:cs typeface="Calibri" pitchFamily="34" charset="-120"/>
               </a:rPr>
-              <a:t>Fuente: Estatus_Resumen_General_QAQC.xlsx · Corte 10-08-2026 · Áreas 2000/3000/4000/8000</a:t>
+              <a:t>Fuente: Estatus_Resumen_General_QAQC.xlsx · Corte 17-08-2026 · Áreas 2000/3000/4000/8000</a:t>
             </a:r>
             <a:endParaRPr lang="en-US" sz="850" dirty="0"/>
           </a:p>
@@ -15055,7 +15253,7 @@
                 <a:ea typeface="Calibri" pitchFamily="34" charset="-122"/>
                 <a:cs typeface="Calibri" pitchFamily="34" charset="-120"/>
               </a:rPr>
-              <a:t>0 aprobadas de 135. Priorizar el cierre de las 14 en revisión y el rearmado de las 12 rechazadas para convertir entregas en aprobaciones.</a:t>
+              <a:t>0 aprobadas de 135. Priorizar el cierre de las 15 en revisión y el rearmado de las 12 rechazadas para convertir entregas en aprobaciones.</a:t>
             </a:r>
             <a:endParaRPr lang="en-US" sz="1150" dirty="0"/>
           </a:p>
@@ -15197,7 +15395,7 @@
                 <a:ea typeface="Calibri" pitchFamily="34" charset="-122"/>
                 <a:cs typeface="Calibri" pitchFamily="34" charset="-120"/>
               </a:rPr>
-              <a:t>705 P1 abiertos (85,1% del total) y 41 caminatas 100% pendientes. Es la ruta crítica: sin esta área no mejora ningún indicador global.</a:t>
+              <a:t>703 P1 abiertos (85,1% del total) y 41 caminatas 100% pendientes. Es la ruta crítica: sin esta área no mejora ningún indicador global.</a:t>
             </a:r>
             <a:endParaRPr lang="en-US" sz="1150" dirty="0"/>
           </a:p>
@@ -15297,7 +15495,7 @@
                 <a:ea typeface="Calibri" pitchFamily="34" charset="-122"/>
                 <a:cs typeface="Calibri" pitchFamily="34" charset="-120"/>
               </a:rPr>
-              <a:t>Recuperar los 667 P1 vencidos</a:t>
+              <a:t>Recuperar los 673 P1 vencidos</a:t>
             </a:r>
             <a:endParaRPr lang="en-US" sz="1500" dirty="0"/>
           </a:p>
@@ -15339,7 +15537,7 @@
                 <a:ea typeface="Calibri" pitchFamily="34" charset="-122"/>
                 <a:cs typeface="Calibri" pitchFamily="34" charset="-120"/>
               </a:rPr>
-              <a:t>80,6% de los P1 abiertos superó su fecha de vencimiento. Foco en Piping (217), Eléctrica (173), Instrumentación y Control (153).</a:t>
+              <a:t>81,5% de los P1 abiertos superó su fecha de vencimiento. Foco en Piping (219), Eléctrica (173), Instrumentación y Control (153).</a:t>
             </a:r>
             <a:endParaRPr lang="en-US" sz="1150" dirty="0"/>
           </a:p>
@@ -15520,7 +15718,7 @@
                 <a:ea typeface="Calibri" pitchFamily="34" charset="-122"/>
                 <a:cs typeface="Calibri" pitchFamily="34" charset="-120"/>
               </a:rPr>
-              <a:t>Fuente: Estatus_Resumen_General_QAQC.xlsx · Corte 10-08-2026 · Áreas 2000/3000/4000/8000</a:t>
+              <a:t>Fuente: Estatus_Resumen_General_QAQC.xlsx · Corte 17-08-2026 · Áreas 2000/3000/4000/8000</a:t>
             </a:r>
             <a:endParaRPr lang="en-US" sz="850" dirty="0"/>
           </a:p>
@@ -15825,7 +16023,7 @@
                 <a:ea typeface="Cambria" pitchFamily="34" charset="-122"/>
                 <a:cs typeface="Cambria" pitchFamily="34" charset="-120"/>
               </a:rPr>
-              <a:t>53,8%</a:t>
+              <a:t>57,5%</a:t>
             </a:r>
             <a:endParaRPr lang="en-US" sz="3800" dirty="0"/>
           </a:p>
@@ -15864,7 +16062,7 @@
                 <a:ea typeface="Calibri" pitchFamily="34" charset="-122"/>
                 <a:cs typeface="Calibri" pitchFamily="34" charset="-120"/>
               </a:rPr>
-              <a:t>43/80</a:t>
+              <a:t>46/80</a:t>
             </a:r>
             <a:endParaRPr lang="en-US" sz="1400" dirty="0"/>
           </a:p>
@@ -15945,7 +16143,7 @@
                 <a:ea typeface="Calibri" pitchFamily="34" charset="-122"/>
                 <a:cs typeface="Calibri" pitchFamily="34" charset="-120"/>
               </a:rPr>
-              <a:t>37 subsistemas por caminar</a:t>
+              <a:t>34 subsistemas por caminar</a:t>
             </a:r>
             <a:endParaRPr lang="en-US" sz="950" dirty="0"/>
           </a:p>
@@ -16038,7 +16236,7 @@
                 <a:ea typeface="Cambria" pitchFamily="34" charset="-122"/>
                 <a:cs typeface="Cambria" pitchFamily="34" charset="-120"/>
               </a:rPr>
-              <a:t>66,7%</a:t>
+              <a:t>73,3%</a:t>
             </a:r>
             <a:endParaRPr lang="en-US" sz="3800" dirty="0"/>
           </a:p>
@@ -16077,7 +16275,7 @@
                 <a:ea typeface="Calibri" pitchFamily="34" charset="-122"/>
                 <a:cs typeface="Calibri" pitchFamily="34" charset="-120"/>
               </a:rPr>
-              <a:t>10/15</a:t>
+              <a:t>11/15</a:t>
             </a:r>
             <a:endParaRPr lang="en-US" sz="1400" dirty="0"/>
           </a:p>
@@ -16158,7 +16356,7 @@
                 <a:ea typeface="Calibri" pitchFamily="34" charset="-122"/>
                 <a:cs typeface="Calibri" pitchFamily="34" charset="-120"/>
               </a:rPr>
-              <a:t>5 facilities por caminar</a:t>
+              <a:t>4 facilities por caminar</a:t>
             </a:r>
             <a:endParaRPr lang="en-US" sz="950" dirty="0"/>
           </a:p>
@@ -16251,7 +16449,7 @@
                 <a:ea typeface="Cambria" pitchFamily="34" charset="-122"/>
                 <a:cs typeface="Cambria" pitchFamily="34" charset="-120"/>
               </a:rPr>
-              <a:t>43,2%</a:t>
+              <a:t>44,2%</a:t>
             </a:r>
             <a:endParaRPr lang="en-US" sz="3800" dirty="0"/>
           </a:p>
@@ -16290,7 +16488,7 @@
                 <a:ea typeface="Calibri" pitchFamily="34" charset="-122"/>
                 <a:cs typeface="Calibri" pitchFamily="34" charset="-120"/>
               </a:rPr>
-              <a:t>41/95</a:t>
+              <a:t>42/95</a:t>
             </a:r>
             <a:endParaRPr lang="en-US" sz="1400" dirty="0"/>
           </a:p>
@@ -16371,7 +16569,7 @@
                 <a:ea typeface="Calibri" pitchFamily="34" charset="-122"/>
                 <a:cs typeface="Calibri" pitchFamily="34" charset="-120"/>
               </a:rPr>
-              <a:t>25 aprobadas · 11 en revisión · 5 rechazadas</a:t>
+              <a:t>22 aprobadas · 16 en revisión · 4 rechazadas</a:t>
             </a:r>
             <a:endParaRPr lang="en-US" sz="950" dirty="0"/>
           </a:p>
@@ -16464,7 +16662,7 @@
                 <a:ea typeface="Cambria" pitchFamily="34" charset="-122"/>
                 <a:cs typeface="Cambria" pitchFamily="34" charset="-120"/>
               </a:rPr>
-              <a:t>73,8%</a:t>
+              <a:t>70,7%</a:t>
             </a:r>
             <a:endParaRPr lang="en-US" sz="3800" dirty="0"/>
           </a:p>
@@ -16503,7 +16701,7 @@
                 <a:ea typeface="Calibri" pitchFamily="34" charset="-122"/>
                 <a:cs typeface="Calibri" pitchFamily="34" charset="-120"/>
               </a:rPr>
-              <a:t>667/904</a:t>
+              <a:t>676/956</a:t>
             </a:r>
             <a:endParaRPr lang="en-US" sz="1400" dirty="0"/>
           </a:p>
@@ -16584,7 +16782,7 @@
                 <a:ea typeface="Calibri" pitchFamily="34" charset="-122"/>
                 <a:cs typeface="Calibri" pitchFamily="34" charset="-120"/>
               </a:rPr>
-              <a:t>237 abiertos · 74 atrasados</a:t>
+              <a:t>280 abiertos · 8 atrasados</a:t>
             </a:r>
             <a:endParaRPr lang="en-US" sz="950" dirty="0"/>
           </a:p>
@@ -16724,7 +16922,7 @@
                 <a:ea typeface="Calibri" pitchFamily="34" charset="-122"/>
                 <a:cs typeface="Calibri" pitchFamily="34" charset="-120"/>
               </a:rPr>
-              <a:t>1.078 de 1.501 ítems cerrados (71,8%); de los 423 abiertos, 160 ya pasaron su fecha requerida de cierre (37,8%).</a:t>
+              <a:t>1.092 de 1.596 ítems cerrados (68,4%); de los 504 abiertos, 15 ya pasaron su fecha requerida de cierre (3%).</a:t>
             </a:r>
             <a:endParaRPr lang="en-US" sz="1150" dirty="0"/>
           </a:p>
@@ -16803,7 +17001,7 @@
                 <a:ea typeface="Calibri" pitchFamily="34" charset="-122"/>
                 <a:cs typeface="Calibri" pitchFamily="34" charset="-120"/>
               </a:rPr>
-              <a:t>Operables 43/80 por Caminata 2 (53,8%); Facility 10/15 por Caminata 1 (66,7%).</a:t>
+              <a:t>Operables 46/80 por Caminata 2 (57,5%); Facility 11/15 por Caminata 1 (73,3%).</a:t>
             </a:r>
             <a:endParaRPr lang="en-US" sz="1150" dirty="0"/>
           </a:p>
@@ -16865,7 +17063,7 @@
                 <a:ea typeface="Calibri" pitchFamily="34" charset="-122"/>
                 <a:cs typeface="Calibri" pitchFamily="34" charset="-120"/>
               </a:rPr>
-              <a:t>Las carpetas están a 43,2% de entrega y el cuello está en el armado interno.  </a:t>
+              <a:t>Las carpetas están a 44,2% de entrega y el cuello está en el armado interno.  </a:t>
             </a:r>
             <a:pPr indent="0" marL="0">
               <a:lnSpc>
@@ -16882,7 +17080,7 @@
                 <a:ea typeface="Calibri" pitchFamily="34" charset="-122"/>
                 <a:cs typeface="Calibri" pitchFamily="34" charset="-120"/>
               </a:rPr>
-              <a:t>41 entregadas de 95: 25 aprobadas, 11 en revisión y 5 rechazadas. Quedan 12 en preparación y 42 sin iniciar.</a:t>
+              <a:t>42 entregadas de 95: 22 aprobadas, 16 en revisión y 4 rechazadas. Quedan 15 en preparación y 38 sin iniciar.</a:t>
             </a:r>
             <a:endParaRPr lang="en-US" sz="1150" dirty="0"/>
           </a:p>
@@ -16961,7 +17159,7 @@
                 <a:ea typeface="Calibri" pitchFamily="34" charset="-122"/>
                 <a:cs typeface="Calibri" pitchFamily="34" charset="-120"/>
               </a:rPr>
-              <a:t>122 de los 237 P1 abiertos (51,5%), con 52 atrasados.</a:t>
+              <a:t>164 de los 280 P1 abiertos (58,6%), con 3 atrasados.</a:t>
             </a:r>
             <a:endParaRPr lang="en-US" sz="1150" dirty="0"/>
           </a:p>
@@ -17000,7 +17198,7 @@
                 <a:ea typeface="Calibri" pitchFamily="34" charset="-122"/>
                 <a:cs typeface="Calibri" pitchFamily="34" charset="-120"/>
               </a:rPr>
-              <a:t>Fuente: REPORTE_GERENCIAL + Listado de Puntos Punch Consolidado · Corte 11-08-2026 · Atrasos al 17-08-2026</a:t>
+              <a:t>Fuente: REPORTE_GERENCIAL + Listado de Puntos Punch Consolidado · Corte 18-08-2026 · Atrasos al 24-08-2026</a:t>
             </a:r>
             <a:endParaRPr lang="en-US" sz="850" dirty="0"/>
           </a:p>
@@ -17453,7 +17651,7 @@
                 <a:ea typeface="Calibri" pitchFamily="34" charset="-122"/>
                 <a:cs typeface="Calibri" pitchFamily="34" charset="-120"/>
               </a:rPr>
-              <a:t>26,3%</a:t>
+              <a:t>23,2%</a:t>
             </a:r>
             <a:endParaRPr lang="en-US" sz="1100" dirty="0"/>
           </a:p>
@@ -17492,7 +17690,7 @@
                 <a:ea typeface="Cambria" pitchFamily="34" charset="-122"/>
                 <a:cs typeface="Cambria" pitchFamily="34" charset="-120"/>
               </a:rPr>
-              <a:t>25</a:t>
+              <a:t>22</a:t>
             </a:r>
             <a:endParaRPr lang="en-US" sz="2200" dirty="0"/>
           </a:p>
@@ -17612,7 +17810,7 @@
                 <a:ea typeface="Calibri" pitchFamily="34" charset="-122"/>
                 <a:cs typeface="Calibri" pitchFamily="34" charset="-120"/>
               </a:rPr>
-              <a:t>11,6%</a:t>
+              <a:t>16,8%</a:t>
             </a:r>
             <a:endParaRPr lang="en-US" sz="1100" dirty="0"/>
           </a:p>
@@ -17651,7 +17849,7 @@
                 <a:ea typeface="Cambria" pitchFamily="34" charset="-122"/>
                 <a:cs typeface="Cambria" pitchFamily="34" charset="-120"/>
               </a:rPr>
-              <a:t>11</a:t>
+              <a:t>16</a:t>
             </a:r>
             <a:endParaRPr lang="en-US" sz="2200" dirty="0"/>
           </a:p>
@@ -17771,7 +17969,7 @@
                 <a:ea typeface="Calibri" pitchFamily="34" charset="-122"/>
                 <a:cs typeface="Calibri" pitchFamily="34" charset="-120"/>
               </a:rPr>
-              <a:t>5,3%</a:t>
+              <a:t>4,2%</a:t>
             </a:r>
             <a:endParaRPr lang="en-US" sz="1100" dirty="0"/>
           </a:p>
@@ -17810,7 +18008,7 @@
                 <a:ea typeface="Cambria" pitchFamily="34" charset="-122"/>
                 <a:cs typeface="Cambria" pitchFamily="34" charset="-120"/>
               </a:rPr>
-              <a:t>5</a:t>
+              <a:t>4</a:t>
             </a:r>
             <a:endParaRPr lang="en-US" sz="2200" dirty="0"/>
           </a:p>
@@ -17930,7 +18128,7 @@
                 <a:ea typeface="Calibri" pitchFamily="34" charset="-122"/>
                 <a:cs typeface="Calibri" pitchFamily="34" charset="-120"/>
               </a:rPr>
-              <a:t>12,6%</a:t>
+              <a:t>15,8%</a:t>
             </a:r>
             <a:endParaRPr lang="en-US" sz="1100" dirty="0"/>
           </a:p>
@@ -17969,7 +18167,7 @@
                 <a:ea typeface="Cambria" pitchFamily="34" charset="-122"/>
                 <a:cs typeface="Cambria" pitchFamily="34" charset="-120"/>
               </a:rPr>
-              <a:t>12</a:t>
+              <a:t>15</a:t>
             </a:r>
             <a:endParaRPr lang="en-US" sz="2200" dirty="0"/>
           </a:p>
@@ -18089,7 +18287,7 @@
                 <a:ea typeface="Calibri" pitchFamily="34" charset="-122"/>
                 <a:cs typeface="Calibri" pitchFamily="34" charset="-120"/>
               </a:rPr>
-              <a:t>44,2%</a:t>
+              <a:t>40%</a:t>
             </a:r>
             <a:endParaRPr lang="en-US" sz="1100" dirty="0"/>
           </a:p>
@@ -18128,7 +18326,7 @@
                 <a:ea typeface="Cambria" pitchFamily="34" charset="-122"/>
                 <a:cs typeface="Cambria" pitchFamily="34" charset="-120"/>
               </a:rPr>
-              <a:t>42</a:t>
+              <a:t>38</a:t>
             </a:r>
             <a:endParaRPr lang="en-US" sz="2200" dirty="0"/>
           </a:p>
@@ -18170,7 +18368,7 @@
                 <a:ea typeface="Calibri" pitchFamily="34" charset="-122"/>
                 <a:cs typeface="Calibri" pitchFamily="34" charset="-120"/>
               </a:rPr>
-              <a:t>41 carpetas ya están en manos del cliente (43,2%) y 29 subsistemas tienen tarjeta verde. El grueso del pendiente todavía no sale de Besalco.</a:t>
+              <a:t>42 carpetas ya están en manos del cliente (44,2%) y 0 subsistemas tienen tarjeta verde. El grueso del pendiente todavía no sale de Besalco.</a:t>
             </a:r>
             <a:endParaRPr lang="en-US" sz="1000" dirty="0"/>
           </a:p>
@@ -18209,7 +18407,7 @@
                 <a:ea typeface="Calibri" pitchFamily="34" charset="-122"/>
                 <a:cs typeface="Calibri" pitchFamily="34" charset="-120"/>
               </a:rPr>
-              <a:t>Fuente: REPORTE_GERENCIAL + Listado de Puntos Punch Consolidado · Corte 11-08-2026 · Atrasos al 17-08-2026</a:t>
+              <a:t>Fuente: REPORTE_GERENCIAL + Listado de Puntos Punch Consolidado · Corte 18-08-2026 · Atrasos al 24-08-2026</a:t>
             </a:r>
             <a:endParaRPr lang="en-US" sz="850" dirty="0"/>
           </a:p>
@@ -18460,7 +18658,7 @@
                 <a:ea typeface="Calibri" pitchFamily="34" charset="-122"/>
                 <a:cs typeface="Calibri" pitchFamily="34" charset="-120"/>
               </a:rPr>
-              <a:t>904 P1 levantados; 73,8% cerrados. Atrasado = ítem abierto cuya fecha requerida de cierre ya venció al 17-08-2026.</a:t>
+              <a:t>956 P1 levantados; 70,7% cerrados. Atrasado = ítem abierto cuya fecha requerida de cierre ya venció al 24-08-2026.</a:t>
             </a:r>
             <a:endParaRPr lang="en-US" sz="1350" dirty="0"/>
           </a:p>
@@ -18592,7 +18790,7 @@
                 <a:ea typeface="Cambria" pitchFamily="34" charset="-122"/>
                 <a:cs typeface="Cambria" pitchFamily="34" charset="-120"/>
               </a:rPr>
-              <a:t>73,8%</a:t>
+              <a:t>70,7%</a:t>
             </a:r>
             <a:endParaRPr lang="en-US" sz="1900" dirty="0"/>
           </a:p>
@@ -18707,7 +18905,7 @@
                 <a:ea typeface="Calibri" pitchFamily="34" charset="-122"/>
                 <a:cs typeface="Calibri" pitchFamily="34" charset="-120"/>
               </a:rPr>
-              <a:t>667</a:t>
+              <a:t>676</a:t>
             </a:r>
             <a:endParaRPr lang="en-US" sz="1100" dirty="0"/>
           </a:p>
@@ -18805,7 +19003,7 @@
                 <a:ea typeface="Calibri" pitchFamily="34" charset="-122"/>
                 <a:cs typeface="Calibri" pitchFamily="34" charset="-120"/>
               </a:rPr>
-              <a:t>74</a:t>
+              <a:t>8</a:t>
             </a:r>
             <a:endParaRPr lang="en-US" sz="1100" dirty="0"/>
           </a:p>
@@ -18903,7 +19101,7 @@
                 <a:ea typeface="Calibri" pitchFamily="34" charset="-122"/>
                 <a:cs typeface="Calibri" pitchFamily="34" charset="-120"/>
               </a:rPr>
-              <a:t>163</a:t>
+              <a:t>272</a:t>
             </a:r>
             <a:endParaRPr lang="en-US" sz="1100" dirty="0"/>
           </a:p>
@@ -18986,7 +19184,7 @@
                 <a:ea typeface="Calibri" pitchFamily="34" charset="-122"/>
                 <a:cs typeface="Calibri" pitchFamily="34" charset="-120"/>
               </a:rPr>
-              <a:t>Mediana de 43 días vencidos; el más antiguo lleva 99. 145 entre 31-90 días, 15 entre 91-180 días.</a:t>
+              <a:t>Mediana de 4 días vencidos; el más antiguo lleva 4. 15 entre 1-30 días.</a:t>
             </a:r>
             <a:endParaRPr lang="en-US" sz="1150" dirty="0"/>
           </a:p>
@@ -19025,7 +19223,7 @@
                 <a:ea typeface="Calibri" pitchFamily="34" charset="-122"/>
                 <a:cs typeface="Calibri" pitchFamily="34" charset="-120"/>
               </a:rPr>
-              <a:t>Fuente: REPORTE_GERENCIAL + Listado de Puntos Punch Consolidado · Corte 11-08-2026 · Atrasos al 17-08-2026</a:t>
+              <a:t>Fuente: REPORTE_GERENCIAL + Listado de Puntos Punch Consolidado · Corte 18-08-2026 · Atrasos al 24-08-2026</a:t>
             </a:r>
             <a:endParaRPr lang="en-US" sz="850" dirty="0"/>
           </a:p>
@@ -19357,7 +19555,7 @@
                 <a:ea typeface="Calibri" pitchFamily="34" charset="-122"/>
                 <a:cs typeface="Calibri" pitchFamily="34" charset="-120"/>
               </a:rPr>
-              <a:t>Recuperar los 160 ítems atrasados</a:t>
+              <a:t>Recuperar los 15 ítems atrasados</a:t>
             </a:r>
             <a:endParaRPr lang="en-US" sz="1400" dirty="0"/>
           </a:p>
@@ -19399,7 +19597,7 @@
                 <a:ea typeface="Calibri" pitchFamily="34" charset="-122"/>
                 <a:cs typeface="Calibri" pitchFamily="34" charset="-120"/>
               </a:rPr>
-              <a:t>37,8% de los 423 abiertos ya venció su fecha requerida. Foco en Eléctrica (52), Piping (5), Obras Civiles (7).</a:t>
+              <a:t>3% de los 504 abiertos ya venció su fecha requerida. Foco en Eléctrica (3), Piping (5), Obras Civiles (0).</a:t>
             </a:r>
             <a:endParaRPr lang="en-US" sz="1100" dirty="0"/>
           </a:p>
@@ -19499,7 +19697,7 @@
                 <a:ea typeface="Calibri" pitchFamily="34" charset="-122"/>
                 <a:cs typeface="Calibri" pitchFamily="34" charset="-120"/>
               </a:rPr>
-              <a:t>Ejecutar las 37 caminatas de Operables pendientes</a:t>
+              <a:t>Ejecutar las 34 caminatas de Operables pendientes</a:t>
             </a:r>
             <a:endParaRPr lang="en-US" sz="1400" dirty="0"/>
           </a:p>
@@ -19541,7 +19739,7 @@
                 <a:ea typeface="Calibri" pitchFamily="34" charset="-122"/>
                 <a:cs typeface="Calibri" pitchFamily="34" charset="-120"/>
               </a:rPr>
-              <a:t>La Caminata 2 va en 53,8% (43/80). Sin caminata no se levanta el punch final ni se habilita la entrega de la carpeta.</a:t>
+              <a:t>La Caminata 2 va en 57,5% (46/80). Sin caminata no se levanta el punch final ni se habilita la entrega de la carpeta.</a:t>
             </a:r>
             <a:endParaRPr lang="en-US" sz="1100" dirty="0"/>
           </a:p>
@@ -19641,7 +19839,7 @@
                 <a:ea typeface="Calibri" pitchFamily="34" charset="-122"/>
                 <a:cs typeface="Calibri" pitchFamily="34" charset="-120"/>
               </a:rPr>
-              <a:t>Sacar del armado interno las 54 carpetas retenidas</a:t>
+              <a:t>Sacar del armado interno las 53 carpetas retenidas</a:t>
             </a:r>
             <a:endParaRPr lang="en-US" sz="1400" dirty="0"/>
           </a:p>
@@ -19683,7 +19881,7 @@
                 <a:ea typeface="Calibri" pitchFamily="34" charset="-122"/>
                 <a:cs typeface="Calibri" pitchFamily="34" charset="-120"/>
               </a:rPr>
-              <a:t>12 están en preparación y 42 sin iniciar. Solo 41 de 95 (43,2%) llegaron al cliente; 5 volvieron rechazadas y hay que rearmarlas.</a:t>
+              <a:t>15 están en preparación y 38 sin iniciar. Solo 42 de 95 (44,2%) llegaron al cliente; 4 volvieron rechazadas y hay que rearmarlas.</a:t>
             </a:r>
             <a:endParaRPr lang="en-US" sz="1100" dirty="0"/>
           </a:p>
@@ -19825,7 +20023,7 @@
                 <a:ea typeface="Calibri" pitchFamily="34" charset="-122"/>
                 <a:cs typeface="Calibri" pitchFamily="34" charset="-120"/>
               </a:rPr>
-              <a:t>Concentra 181 P1 abiertos y 42 atrasados sobre 74 subsistemas. Es la ruta crítica del proyecto.</a:t>
+              <a:t>Concentra 224 P1 abiertos y 8 atrasados sobre 74 subsistemas. Es la ruta crítica del proyecto.</a:t>
             </a:r>
             <a:endParaRPr lang="en-US" sz="1100" dirty="0"/>
           </a:p>
@@ -19864,7 +20062,7 @@
                 <a:ea typeface="Calibri" pitchFamily="34" charset="-122"/>
                 <a:cs typeface="Calibri" pitchFamily="34" charset="-120"/>
               </a:rPr>
-              <a:t>Fuente: REPORTE_GERENCIAL + Listado de Puntos Punch Consolidado · Corte 11-08-2026 · Atrasos al 17-08-2026</a:t>
+              <a:t>Fuente: REPORTE_GERENCIAL + Listado de Puntos Punch Consolidado · Corte 18-08-2026 · Atrasos al 24-08-2026</a:t>
             </a:r>
             <a:endParaRPr lang="en-US" sz="850" dirty="0"/>
           </a:p>
@@ -20256,7 +20454,7 @@
                 <a:ea typeface="Cambria" pitchFamily="34" charset="-122"/>
                 <a:cs typeface="Cambria" pitchFamily="34" charset="-120"/>
               </a:rPr>
-              <a:t>100%</a:t>
+              <a:t>99,5%</a:t>
             </a:r>
             <a:endParaRPr lang="en-US" sz="3400" dirty="0"/>
           </a:p>
@@ -20334,7 +20532,7 @@
                 <a:ea typeface="Cambria" pitchFamily="34" charset="-122"/>
                 <a:cs typeface="Cambria" pitchFamily="34" charset="-120"/>
               </a:rPr>
-              <a:t>100%</a:t>
+              <a:t>98%</a:t>
             </a:r>
             <a:endParaRPr lang="en-US" sz="3400" dirty="0"/>
           </a:p>
@@ -20412,7 +20610,7 @@
                 <a:ea typeface="Cambria" pitchFamily="34" charset="-122"/>
                 <a:cs typeface="Cambria" pitchFamily="34" charset="-120"/>
               </a:rPr>
-              <a:t>93,1%</a:t>
+              <a:t>93,8%</a:t>
             </a:r>
             <a:endParaRPr lang="en-US" sz="3400" dirty="0"/>
           </a:p>
@@ -20490,7 +20688,7 @@
                 <a:ea typeface="Cambria" pitchFamily="34" charset="-122"/>
                 <a:cs typeface="Cambria" pitchFamily="34" charset="-120"/>
               </a:rPr>
-              <a:t>88,6%</a:t>
+              <a:t>90,6%</a:t>
             </a:r>
             <a:endParaRPr lang="en-US" sz="3400" dirty="0"/>
           </a:p>
@@ -20568,7 +20766,7 @@
                 <a:ea typeface="Calibri" pitchFamily="34" charset="-122"/>
                 <a:cs typeface="Calibri" pitchFamily="34" charset="-120"/>
               </a:rPr>
-              <a:t>Atrasos calculados al 17-08-2026</a:t>
+              <a:t>Atrasos calculados al 24-08-2026</a:t>
             </a:r>
             <a:endParaRPr lang="en-US" sz="1100" dirty="0"/>
           </a:p>
@@ -20607,7 +20805,7 @@
                 <a:ea typeface="Calibri" pitchFamily="34" charset="-122"/>
                 <a:cs typeface="Calibri" pitchFamily="34" charset="-120"/>
               </a:rPr>
-              <a:t>Fuente: STATUS_SUBSISTEMAS_TALABRE + Detalle_de_Terminaciones · 218 subsistemas · 2.062 DT · Atrasos al 17-08-2026</a:t>
+              <a:t>Fuente: STATUS_SUBSISTEMAS_TALABRE + Detalle_de_Terminaciones · 218 subsistemas · 2.062 DT · Atrasos al 24-08-2026</a:t>
             </a:r>
             <a:endParaRPr lang="en-US" sz="850" dirty="0"/>
           </a:p>
@@ -20873,7 +21071,7 @@
                 <a:ea typeface="Cambria" pitchFamily="34" charset="-122"/>
                 <a:cs typeface="Cambria" pitchFamily="34" charset="-120"/>
               </a:rPr>
-              <a:t>100%</a:t>
+              <a:t>99,5%</a:t>
             </a:r>
             <a:endParaRPr lang="en-US" sz="3800" dirty="0"/>
           </a:p>
@@ -20912,7 +21110,7 @@
                 <a:ea typeface="Calibri" pitchFamily="34" charset="-122"/>
                 <a:cs typeface="Calibri" pitchFamily="34" charset="-120"/>
               </a:rPr>
-              <a:t>211/211 exigibles</a:t>
+              <a:t>211/212 exigibles</a:t>
             </a:r>
             <a:endParaRPr lang="en-US" sz="1300" dirty="0"/>
           </a:p>
@@ -20993,7 +21191,7 @@
                 <a:ea typeface="Calibri" pitchFamily="34" charset="-122"/>
                 <a:cs typeface="Calibri" pitchFamily="34" charset="-120"/>
               </a:rPr>
-              <a:t>96,8% del universo · 7 programadas en plazo · 0 sin programar</a:t>
+              <a:t>96,8% del universo · 6 programadas en plazo · 1 con agenda vencida · 0 sin programar</a:t>
             </a:r>
             <a:endParaRPr lang="en-US" sz="950" dirty="0"/>
           </a:p>
@@ -21086,7 +21284,7 @@
                 <a:ea typeface="Cambria" pitchFamily="34" charset="-122"/>
                 <a:cs typeface="Cambria" pitchFamily="34" charset="-120"/>
               </a:rPr>
-              <a:t>100%</a:t>
+              <a:t>98%</a:t>
             </a:r>
             <a:endParaRPr lang="en-US" sz="3800" dirty="0"/>
           </a:p>
@@ -21125,7 +21323,7 @@
                 <a:ea typeface="Calibri" pitchFamily="34" charset="-122"/>
                 <a:cs typeface="Calibri" pitchFamily="34" charset="-120"/>
               </a:rPr>
-              <a:t>194/194 exigibles</a:t>
+              <a:t>194/198 exigibles</a:t>
             </a:r>
             <a:endParaRPr lang="en-US" sz="1300" dirty="0"/>
           </a:p>
@@ -21206,7 +21404,7 @@
                 <a:ea typeface="Calibri" pitchFamily="34" charset="-122"/>
                 <a:cs typeface="Calibri" pitchFamily="34" charset="-120"/>
               </a:rPr>
-              <a:t>89% del universo · 24 programadas en plazo · 0 sin programar</a:t>
+              <a:t>89% del universo · 20 programadas en plazo · 4 con agenda vencida · 0 sin programar</a:t>
             </a:r>
             <a:endParaRPr lang="en-US" sz="950" dirty="0"/>
           </a:p>
@@ -21299,7 +21497,7 @@
                 <a:ea typeface="Cambria" pitchFamily="34" charset="-122"/>
                 <a:cs typeface="Cambria" pitchFamily="34" charset="-120"/>
               </a:rPr>
-              <a:t>93,1%</a:t>
+              <a:t>93,8%</a:t>
             </a:r>
             <a:endParaRPr lang="en-US" sz="3800" dirty="0"/>
           </a:p>
@@ -21419,7 +21617,7 @@
                 <a:ea typeface="Calibri" pitchFamily="34" charset="-122"/>
                 <a:cs typeface="Calibri" pitchFamily="34" charset="-120"/>
               </a:rPr>
-              <a:t>8 subsistemas bajo 80% de avance</a:t>
+              <a:t>6 subsistemas bajo 80% de avance</a:t>
             </a:r>
             <a:endParaRPr lang="en-US" sz="950" dirty="0"/>
           </a:p>
@@ -21512,7 +21710,7 @@
                 <a:ea typeface="Cambria" pitchFamily="34" charset="-122"/>
                 <a:cs typeface="Cambria" pitchFamily="34" charset="-120"/>
               </a:rPr>
-              <a:t>89,6%</a:t>
+              <a:t>91%</a:t>
             </a:r>
             <a:endParaRPr lang="en-US" sz="3800" dirty="0"/>
           </a:p>
@@ -21551,7 +21749,7 @@
                 <a:ea typeface="Calibri" pitchFamily="34" charset="-122"/>
                 <a:cs typeface="Calibri" pitchFamily="34" charset="-120"/>
               </a:rPr>
-              <a:t>337/376</a:t>
+              <a:t>342/376</a:t>
             </a:r>
             <a:endParaRPr lang="en-US" sz="1300" dirty="0"/>
           </a:p>
@@ -21632,7 +21830,7 @@
                 <a:ea typeface="Calibri" pitchFamily="34" charset="-122"/>
                 <a:cs typeface="Calibri" pitchFamily="34" charset="-120"/>
               </a:rPr>
-              <a:t>39 abiertos · 15 atrasados</a:t>
+              <a:t>34 abiertos · 14 atrasados</a:t>
             </a:r>
             <a:endParaRPr lang="en-US" sz="950" dirty="0"/>
           </a:p>
@@ -21772,7 +21970,7 @@
                 <a:ea typeface="Calibri" pitchFamily="34" charset="-122"/>
                 <a:cs typeface="Calibri" pitchFamily="34" charset="-120"/>
               </a:rPr>
-              <a:t>89,6% de cierre en P1 (39 abiertos), pero 382 DT abiertos entre P2, P3 y P4 sobre un total de 421.</a:t>
+              <a:t>91% de cierre en P1 (34 abiertos), pero 346 DT abiertos entre P2, P3 y P4 sobre un total de 380.</a:t>
             </a:r>
             <a:endParaRPr lang="en-US" sz="1150" dirty="0"/>
           </a:p>
@@ -21851,7 +22049,7 @@
                 <a:ea typeface="Calibri" pitchFamily="34" charset="-122"/>
                 <a:cs typeface="Calibri" pitchFamily="34" charset="-120"/>
               </a:rPr>
-              <a:t>179 DT con la fecha de compromiso vencida; mediana de 19 días y el más antiguo lleva 151. Los 217 abiertos sin fecha de compromiso no se cuentan como atrasados.</a:t>
+              <a:t>148 DT con la fecha de compromiso vencida; mediana de 23 días y el más antiguo lleva 158. Los 211 abiertos sin fecha de compromiso no se cuentan como atrasados.</a:t>
             </a:r>
             <a:endParaRPr lang="en-US" sz="1150" dirty="0"/>
           </a:p>
@@ -21913,7 +22111,7 @@
                 <a:ea typeface="Calibri" pitchFamily="34" charset="-122"/>
                 <a:cs typeface="Calibri" pitchFamily="34" charset="-120"/>
               </a:rPr>
-              <a:t>Caminatas: 100% y 100% de lo exigible (C1 y C2).  </a:t>
+              <a:t>Caminatas: 99,5% y 98% de lo exigible (C1 y C2).  </a:t>
             </a:r>
             <a:pPr indent="0" marL="0">
               <a:lnSpc>
@@ -21930,7 +22128,7 @@
                 <a:ea typeface="Calibri" pitchFamily="34" charset="-122"/>
                 <a:cs typeface="Calibri" pitchFamily="34" charset="-120"/>
               </a:rPr>
-              <a:t>Caminata 1: 211/211 exigibles. Caminata 2: 194/194, con 24 agendadas en plazo y 0 sin programar.</a:t>
+              <a:t>Caminata 1: 211/212 exigibles, 1 con agenda vencida. Caminata 2: 194/198, con 20 agendadas en plazo y 0 sin programar.</a:t>
             </a:r>
             <a:endParaRPr lang="en-US" sz="1150" dirty="0"/>
           </a:p>
@@ -22009,7 +22207,7 @@
                 <a:ea typeface="Calibri" pitchFamily="34" charset="-122"/>
                 <a:cs typeface="Calibri" pitchFamily="34" charset="-120"/>
               </a:rPr>
-              <a:t>Avance promedio 93,1%: 182 subsistemas sobre 95% y solo 8 bajo 80%.</a:t>
+              <a:t>Avance promedio 93,8%: 182 subsistemas sobre 95% y solo 6 bajo 80%.</a:t>
             </a:r>
             <a:endParaRPr lang="en-US" sz="1150" dirty="0"/>
           </a:p>
@@ -22048,7 +22246,7 @@
                 <a:ea typeface="Calibri" pitchFamily="34" charset="-122"/>
                 <a:cs typeface="Calibri" pitchFamily="34" charset="-120"/>
               </a:rPr>
-              <a:t>Fuente: STATUS_SUBSISTEMAS_TALABRE + Detalle_de_Terminaciones · 218 subsistemas · 2.062 DT · Atrasos al 17-08-2026</a:t>
+              <a:t>Fuente: STATUS_SUBSISTEMAS_TALABRE + Detalle_de_Terminaciones · 218 subsistemas · 2.062 DT · Atrasos al 24-08-2026</a:t>
             </a:r>
             <a:endParaRPr lang="en-US" sz="850" dirty="0"/>
           </a:p>
@@ -22299,7 +22497,7 @@
                 <a:ea typeface="Calibri" pitchFamily="34" charset="-122"/>
                 <a:cs typeface="Calibri" pitchFamily="34" charset="-120"/>
               </a:rPr>
-              <a:t>Caminata 2: 100% de lo exigible (194/194) — se descuentan 24 agendadas a fecha futura, que no son incumplimiento al corte. Talabre mide la carpeta como % de avance (PEC), no como estado de aprobación.</a:t>
+              <a:t>Caminata 2: 98% de lo exigible (194/198) — se descuentan 20 agendadas a fecha futura, que no son incumplimiento al corte. Talabre mide la carpeta como % de avance (PEC), no como estado de aprobación.</a:t>
             </a:r>
             <a:endParaRPr lang="en-US" sz="1350" dirty="0"/>
           </a:p>
@@ -22370,7 +22568,7 @@
                 <a:ea typeface="Calibri" pitchFamily="34" charset="-122"/>
                 <a:cs typeface="Calibri" pitchFamily="34" charset="-120"/>
               </a:rPr>
-              <a:t>Fuente: STATUS_SUBSISTEMAS_TALABRE + Detalle_de_Terminaciones · 218 subsistemas · 2.062 DT · Atrasos al 17-08-2026</a:t>
+              <a:t>Fuente: STATUS_SUBSISTEMAS_TALABRE + Detalle_de_Terminaciones · 218 subsistemas · 2.062 DT · Atrasos al 24-08-2026</a:t>
             </a:r>
             <a:endParaRPr lang="en-US" sz="850" dirty="0"/>
           </a:p>
@@ -22621,7 +22819,7 @@
                 <a:ea typeface="Calibri" pitchFamily="34" charset="-122"/>
                 <a:cs typeface="Calibri" pitchFamily="34" charset="-120"/>
               </a:rPr>
-              <a:t>2.062 DT levantados; 79,6% cerrados. Atrasado = DT abierto cuya fecha de compromiso de cierre ya venció al 17-08-2026.</a:t>
+              <a:t>2.062 DT levantados; 81,6% cerrados. Atrasado = DT abierto cuya fecha de compromiso de cierre ya venció al 24-08-2026.</a:t>
             </a:r>
             <a:endParaRPr lang="en-US" sz="1350" dirty="0"/>
           </a:p>
@@ -22776,7 +22974,7 @@
                 <a:ea typeface="Calibri" pitchFamily="34" charset="-122"/>
                 <a:cs typeface="Calibri" pitchFamily="34" charset="-120"/>
               </a:rPr>
-              <a:t>337/376</a:t>
+              <a:t>342/376</a:t>
             </a:r>
             <a:endParaRPr lang="en-US" sz="1050" dirty="0"/>
           </a:p>
@@ -22815,7 +23013,7 @@
                 <a:ea typeface="Calibri" pitchFamily="34" charset="-122"/>
                 <a:cs typeface="Calibri" pitchFamily="34" charset="-120"/>
               </a:rPr>
-              <a:t>89,6%</a:t>
+              <a:t>91%</a:t>
             </a:r>
             <a:endParaRPr lang="en-US" sz="1100" dirty="0"/>
           </a:p>
@@ -22850,13 +23048,13 @@
         <p:spPr>
           <a:xfrm>
             <a:off x="7936992" y="2688336"/>
-            <a:ext cx="3195279" cy="118872"/>
+            <a:ext cx="3245206" cy="118872"/>
           </a:xfrm>
           <a:prstGeom prst="rect">
             <a:avLst/>
           </a:prstGeom>
           <a:solidFill>
-            <a:srgbClr val="E3A55B"/>
+            <a:srgbClr val="2E9E5B"/>
           </a:solidFill>
           <a:ln/>
         </p:spPr>
@@ -22933,7 +23131,7 @@
                 <a:ea typeface="Calibri" pitchFamily="34" charset="-122"/>
                 <a:cs typeface="Calibri" pitchFamily="34" charset="-120"/>
               </a:rPr>
-              <a:t>1.226/1.388</a:t>
+              <a:t>1.256/1.388</a:t>
             </a:r>
             <a:endParaRPr lang="en-US" sz="1050" dirty="0"/>
           </a:p>
@@ -22972,7 +23170,7 @@
                 <a:ea typeface="Calibri" pitchFamily="34" charset="-122"/>
                 <a:cs typeface="Calibri" pitchFamily="34" charset="-120"/>
               </a:rPr>
-              <a:t>88,3%</a:t>
+              <a:t>90,5%</a:t>
             </a:r>
             <a:endParaRPr lang="en-US" sz="1100" dirty="0"/>
           </a:p>
@@ -23007,13 +23205,13 @@
         <p:spPr>
           <a:xfrm>
             <a:off x="7936992" y="3200400"/>
-            <a:ext cx="3148919" cy="118872"/>
+            <a:ext cx="3227375" cy="118872"/>
           </a:xfrm>
           <a:prstGeom prst="rect">
             <a:avLst/>
           </a:prstGeom>
           <a:solidFill>
-            <a:srgbClr val="E3A55B"/>
+            <a:srgbClr val="2E9E5B"/>
           </a:solidFill>
           <a:ln/>
         </p:spPr>
@@ -23090,7 +23288,7 @@
                 <a:ea typeface="Calibri" pitchFamily="34" charset="-122"/>
                 <a:cs typeface="Calibri" pitchFamily="34" charset="-120"/>
               </a:rPr>
-              <a:t>69/239</a:t>
+              <a:t>75/239</a:t>
             </a:r>
             <a:endParaRPr lang="en-US" sz="1050" dirty="0"/>
           </a:p>
@@ -23129,7 +23327,7 @@
                 <a:ea typeface="Calibri" pitchFamily="34" charset="-122"/>
                 <a:cs typeface="Calibri" pitchFamily="34" charset="-120"/>
               </a:rPr>
-              <a:t>28,9%</a:t>
+              <a:t>31,4%</a:t>
             </a:r>
             <a:endParaRPr lang="en-US" sz="1100" dirty="0"/>
           </a:p>
@@ -23164,7 +23362,7 @@
         <p:spPr>
           <a:xfrm>
             <a:off x="7936992" y="3712464"/>
-            <a:ext cx="1030620" cy="118872"/>
+            <a:ext cx="1119774" cy="118872"/>
           </a:xfrm>
           <a:prstGeom prst="rect">
             <a:avLst/>
@@ -23546,7 +23744,7 @@
                 <a:ea typeface="Calibri" pitchFamily="34" charset="-122"/>
                 <a:cs typeface="Calibri" pitchFamily="34" charset="-120"/>
               </a:rPr>
-              <a:t>Mediana de 19 días vencidos; el más antiguo lleva 151. 102 entre 1-30 días, 62 entre 31-90 días, 15 entre 91-180 días.</a:t>
+              <a:t>Mediana de 23 días vencidos; el más antiguo lleva 158. 90 entre 1-30 días, 48 entre 31-90 días, 10 entre 91-180 días.</a:t>
             </a:r>
             <a:endParaRPr lang="en-US" sz="1150" dirty="0"/>
           </a:p>
@@ -23585,7 +23783,7 @@
                 <a:ea typeface="Calibri" pitchFamily="34" charset="-122"/>
                 <a:cs typeface="Calibri" pitchFamily="34" charset="-120"/>
               </a:rPr>
-              <a:t>Fuente: STATUS_SUBSISTEMAS_TALABRE + Detalle_de_Terminaciones · 218 subsistemas · 2.062 DT · Atrasos al 17-08-2026</a:t>
+              <a:t>Fuente: STATUS_SUBSISTEMAS_TALABRE + Detalle_de_Terminaciones · 218 subsistemas · 2.062 DT · Atrasos al 24-08-2026</a:t>
             </a:r>
             <a:endParaRPr lang="en-US" sz="850" dirty="0"/>
           </a:p>

--- a/panel_control_TOP_P1/Panel_Control_TOP_P1.pptx
+++ b/panel_control_TOP_P1/Panel_Control_TOP_P1.pptx
@@ -233,10 +233,10 @@
                 <c:formatCode>General</c:formatCode>
                 <c:ptCount val="2"/>
                 <c:pt idx="0">
-                  <c:v>46</c:v>
+                  <c:v>49</c:v>
                 </c:pt>
                 <c:pt idx="1">
-                  <c:v>11</c:v>
+                  <c:v>12</c:v>
                 </c:pt>
               </c:numCache>
             </c:numRef>
@@ -311,10 +311,10 @@
                 <c:formatCode>General</c:formatCode>
                 <c:ptCount val="2"/>
                 <c:pt idx="0">
-                  <c:v>34</c:v>
+                  <c:v>31</c:v>
                 </c:pt>
                 <c:pt idx="1">
-                  <c:v>4</c:v>
+                  <c:v>3</c:v>
                 </c:pt>
               </c:numCache>
             </c:numRef>
@@ -687,13 +687,13 @@
               <c:numCache>
                 <c:ptCount val="3"/>
                 <c:pt idx="0">
-                  <c:v>1154</c:v>
+                  <c:v>1156</c:v>
                 </c:pt>
                 <c:pt idx="1">
-                  <c:v>826</c:v>
+                  <c:v>825</c:v>
                 </c:pt>
                 <c:pt idx="2">
-                  <c:v>8</c:v>
+                  <c:v>7</c:v>
                 </c:pt>
               </c:numCache>
             </c:numRef>
@@ -817,9 +817,9 @@
           </c:dLbls>
           <c:cat>
             <c:multiLvlStrRef>
-              <c:f>Sheet1!$A$2:$A$6</c:f>
+              <c:f>Sheet1!$A$2:$A$7</c:f>
               <c:multiLvlStrCache>
-                <c:ptCount val="5"/>
+                <c:ptCount val="6"/>
                 <c:lvl>
                   <c:pt idx="0">
                     <c:v>Eléctrica</c:v>
@@ -834,6 +834,9 @@
                     <c:v>Mecánica</c:v>
                   </c:pt>
                   <c:pt idx="4">
+                    <c:v>Instr. y Control</c:v>
+                  </c:pt>
+                  <c:pt idx="5">
                     <c:v>Estructura</c:v>
                   </c:pt>
                 </c:lvl>
@@ -842,15 +845,15 @@
           </c:cat>
           <c:val>
             <c:numRef>
-              <c:f>Sheet1!$B$2:$B$6</c:f>
+              <c:f>Sheet1!$B$2:$B$7</c:f>
               <c:numCache>
                 <c:formatCode>General</c:formatCode>
-                <c:ptCount val="5"/>
+                <c:ptCount val="6"/>
                 <c:pt idx="0">
-                  <c:v>3</c:v>
+                  <c:v>6</c:v>
                 </c:pt>
                 <c:pt idx="1">
-                  <c:v>5</c:v>
+                  <c:v>2</c:v>
                 </c:pt>
                 <c:pt idx="2">
                   <c:v/>
@@ -859,6 +862,9 @@
                   <c:v/>
                 </c:pt>
                 <c:pt idx="4">
+                  <c:v/>
+                </c:pt>
+                <c:pt idx="5">
                   <c:v/>
                 </c:pt>
               </c:numCache>
@@ -913,9 +919,9 @@
           </c:dLbls>
           <c:cat>
             <c:multiLvlStrRef>
-              <c:f>Sheet1!$A$2:$A$6</c:f>
+              <c:f>Sheet1!$A$2:$A$7</c:f>
               <c:multiLvlStrCache>
-                <c:ptCount val="5"/>
+                <c:ptCount val="6"/>
                 <c:lvl>
                   <c:pt idx="0">
                     <c:v>Eléctrica</c:v>
@@ -930,6 +936,9 @@
                     <c:v>Mecánica</c:v>
                   </c:pt>
                   <c:pt idx="4">
+                    <c:v>Instr. y Control</c:v>
+                  </c:pt>
+                  <c:pt idx="5">
                     <c:v>Estructura</c:v>
                   </c:pt>
                 </c:lvl>
@@ -938,23 +947,26 @@
           </c:cat>
           <c:val>
             <c:numRef>
-              <c:f>Sheet1!$C$2:$C$6</c:f>
+              <c:f>Sheet1!$C$2:$C$7</c:f>
               <c:numCache>
                 <c:formatCode>General</c:formatCode>
-                <c:ptCount val="5"/>
+                <c:ptCount val="6"/>
                 <c:pt idx="0">
-                  <c:v>161</c:v>
+                  <c:v>160</c:v>
                 </c:pt>
                 <c:pt idx="1">
-                  <c:v>60</c:v>
+                  <c:v>91</c:v>
                 </c:pt>
                 <c:pt idx="2">
                   <c:v>20</c:v>
                 </c:pt>
                 <c:pt idx="3">
-                  <c:v>19</c:v>
+                  <c:v>18</c:v>
                 </c:pt>
                 <c:pt idx="4">
+                  <c:v>15</c:v>
+                </c:pt>
+                <c:pt idx="5">
                   <c:v>12</c:v>
                 </c:pt>
               </c:numCache>
@@ -1328,13 +1340,13 @@
               <c:numCache>
                 <c:ptCount val="3"/>
                 <c:pt idx="0">
-                  <c:v>676</c:v>
+                  <c:v>714</c:v>
                 </c:pt>
                 <c:pt idx="1">
                   <c:v>8</c:v>
                 </c:pt>
                 <c:pt idx="2">
-                  <c:v>272</c:v>
+                  <c:v>316</c:v>
                 </c:pt>
               </c:numCache>
             </c:numRef>
@@ -1515,7 +1527,7 @@
                   <c:v>14</c:v>
                 </c:pt>
                 <c:pt idx="5">
-                  <c:v>6</c:v>
+                  <c:v>10</c:v>
                 </c:pt>
                 <c:pt idx="6">
                   <c:v>110</c:v>
@@ -1620,13 +1632,13 @@
                 <c:formatCode>General</c:formatCode>
                 <c:ptCount val="9"/>
                 <c:pt idx="0">
-                  <c:v>3</c:v>
+                  <c:v/>
                 </c:pt>
                 <c:pt idx="1">
                   <c:v/>
                 </c:pt>
                 <c:pt idx="2">
-                  <c:v/>
+                  <c:v>1</c:v>
                 </c:pt>
                 <c:pt idx="3">
                   <c:v/>
@@ -1635,7 +1647,7 @@
                   <c:v/>
                 </c:pt>
                 <c:pt idx="5">
-                  <c:v>16</c:v>
+                  <c:v>6</c:v>
                 </c:pt>
                 <c:pt idx="6">
                   <c:v/>
@@ -1740,13 +1752,13 @@
                 <c:formatCode>General</c:formatCode>
                 <c:ptCount val="9"/>
                 <c:pt idx="0">
-                  <c:v/>
+                  <c:v>3</c:v>
                 </c:pt>
                 <c:pt idx="1">
                   <c:v>1</c:v>
                 </c:pt>
                 <c:pt idx="2">
-                  <c:v>3</c:v>
+                  <c:v>2</c:v>
                 </c:pt>
                 <c:pt idx="3">
                   <c:v/>
@@ -1755,7 +1767,7 @@
                   <c:v/>
                 </c:pt>
                 <c:pt idx="5">
-                  <c:v/>
+                  <c:v>6</c:v>
                 </c:pt>
                 <c:pt idx="6">
                   <c:v/>
@@ -2193,7 +2205,7 @@
                   <c:v>10</c:v>
                 </c:pt>
                 <c:pt idx="5">
-                  <c:v>7</c:v>
+                  <c:v>10</c:v>
                 </c:pt>
                 <c:pt idx="6">
                   <c:v>110</c:v>
@@ -2304,7 +2316,7 @@
                   <c:v>2</c:v>
                 </c:pt>
                 <c:pt idx="2">
-                  <c:v>8</c:v>
+                  <c:v>9</c:v>
                 </c:pt>
                 <c:pt idx="3">
                   <c:v/>
@@ -2313,7 +2325,7 @@
                   <c:v>3</c:v>
                 </c:pt>
                 <c:pt idx="5">
-                  <c:v>13</c:v>
+                  <c:v>11</c:v>
                 </c:pt>
                 <c:pt idx="6">
                   <c:v/>
@@ -2424,7 +2436,7 @@
                   <c:v/>
                 </c:pt>
                 <c:pt idx="2">
-                  <c:v>1</c:v>
+                  <c:v/>
                 </c:pt>
                 <c:pt idx="3">
                   <c:v/>
@@ -2433,7 +2445,7 @@
                   <c:v>1</c:v>
                 </c:pt>
                 <c:pt idx="5">
-                  <c:v>2</c:v>
+                  <c:v>1</c:v>
                 </c:pt>
                 <c:pt idx="6">
                   <c:v/>
@@ -2724,16 +2736,16 @@
                 <c:formatCode>General</c:formatCode>
                 <c:ptCount val="5"/>
                 <c:pt idx="0">
-                  <c:v>18</c:v>
+                  <c:v>9</c:v>
                 </c:pt>
                 <c:pt idx="1">
-                  <c:v>77</c:v>
+                  <c:v>61</c:v>
                 </c:pt>
                 <c:pt idx="2">
-                  <c:v>32</c:v>
+                  <c:v>39</c:v>
                 </c:pt>
                 <c:pt idx="3">
-                  <c:v>17</c:v>
+                  <c:v>12</c:v>
                 </c:pt>
                 <c:pt idx="4">
                   <c:v>4</c:v>
@@ -2820,13 +2832,13 @@
                 <c:formatCode>General</c:formatCode>
                 <c:ptCount val="5"/>
                 <c:pt idx="0">
-                  <c:v>132</c:v>
+                  <c:v>140</c:v>
                 </c:pt>
                 <c:pt idx="1">
-                  <c:v>56</c:v>
+                  <c:v>60</c:v>
                 </c:pt>
                 <c:pt idx="2">
-                  <c:v>28</c:v>
+                  <c:v>11</c:v>
                 </c:pt>
                 <c:pt idx="3">
                   <c:v>13</c:v>
@@ -4152,7 +4164,7 @@
                   <c:v>153</c:v>
                 </c:pt>
                 <c:pt idx="3">
-                  <c:v>111</c:v>
+                  <c:v>110</c:v>
                 </c:pt>
                 <c:pt idx="4">
                   <c:v>17</c:v>
@@ -6895,7 +6907,7 @@
                 <a:ea typeface="Cambria" pitchFamily="34" charset="-122"/>
                 <a:cs typeface="Cambria" pitchFamily="34" charset="-120"/>
               </a:rPr>
-              <a:t>57,5%</a:t>
+              <a:t>61,3%</a:t>
             </a:r>
             <a:endParaRPr lang="en-US" sz="3400" dirty="0"/>
           </a:p>
@@ -6973,7 +6985,7 @@
                 <a:ea typeface="Cambria" pitchFamily="34" charset="-122"/>
                 <a:cs typeface="Cambria" pitchFamily="34" charset="-120"/>
               </a:rPr>
-              <a:t>73,3%</a:t>
+              <a:t>80%</a:t>
             </a:r>
             <a:endParaRPr lang="en-US" sz="3400" dirty="0"/>
           </a:p>
@@ -7051,7 +7063,7 @@
                 <a:ea typeface="Cambria" pitchFamily="34" charset="-122"/>
                 <a:cs typeface="Cambria" pitchFamily="34" charset="-120"/>
               </a:rPr>
-              <a:t>44,2%</a:t>
+              <a:t>45,3%</a:t>
             </a:r>
             <a:endParaRPr lang="en-US" sz="3400" dirty="0"/>
           </a:p>
@@ -7129,7 +7141,7 @@
                 <a:ea typeface="Cambria" pitchFamily="34" charset="-122"/>
                 <a:cs typeface="Cambria" pitchFamily="34" charset="-120"/>
               </a:rPr>
-              <a:t>70,7%</a:t>
+              <a:t>68,8%</a:t>
             </a:r>
             <a:endParaRPr lang="en-US" sz="3400" dirty="0"/>
           </a:p>
@@ -7207,7 +7219,7 @@
                 <a:ea typeface="Calibri" pitchFamily="34" charset="-122"/>
                 <a:cs typeface="Calibri" pitchFamily="34" charset="-120"/>
               </a:rPr>
-              <a:t>Corte: 18-08-2026</a:t>
+              <a:t>Corte: 25-08-2026</a:t>
             </a:r>
             <a:endParaRPr lang="en-US" sz="1100" dirty="0"/>
           </a:p>
@@ -7246,7 +7258,7 @@
                 <a:ea typeface="Calibri" pitchFamily="34" charset="-122"/>
                 <a:cs typeface="Calibri" pitchFamily="34" charset="-120"/>
               </a:rPr>
-              <a:t>Fuente: REPORTE_GERENCIAL + Listado de Puntos Punch Consolidado · Corte 18-08-2026 · Atrasos al 24-08-2026</a:t>
+              <a:t>Fuente: REPORTE_GERENCIAL + Listado de Puntos Punch Consolidado · Corte 25-08-2026 · Atrasos al 31-08-2026</a:t>
             </a:r>
             <a:endParaRPr lang="en-US" sz="850" dirty="0"/>
           </a:p>
@@ -7539,7 +7551,7 @@
                 <a:ea typeface="Calibri" pitchFamily="34" charset="-122"/>
                 <a:cs typeface="Calibri" pitchFamily="34" charset="-120"/>
               </a:rPr>
-              <a:t>Recuperar los 148 DT atrasados</a:t>
+              <a:t>Recuperar los 125 DT atrasados</a:t>
             </a:r>
             <a:endParaRPr lang="en-US" sz="1350" dirty="0"/>
           </a:p>
@@ -7581,7 +7593,7 @@
                 <a:ea typeface="Calibri" pitchFamily="34" charset="-122"/>
                 <a:cs typeface="Calibri" pitchFamily="34" charset="-120"/>
               </a:rPr>
-              <a:t>131 son P2 y 14 son P1. La mediana de atraso es de 23 días y 10 superan los 90 días.</a:t>
+              <a:t>100 son P2 y 22 son P1. La mediana de atraso es de 28 días y 10 superan los 90 días.</a:t>
             </a:r>
             <a:endParaRPr lang="en-US" sz="1100" dirty="0"/>
           </a:p>
@@ -7723,7 +7735,7 @@
                 <a:ea typeface="Calibri" pitchFamily="34" charset="-122"/>
                 <a:cs typeface="Calibri" pitchFamily="34" charset="-120"/>
               </a:rPr>
-              <a:t>CERRO VERDE/PS2: 0/3 (0%) · PISCINAS Y SEDIMENTADOR: 6/22 (27,3%). A nivel proyecto la caminata 2 va 89% con 20 ya agendadas.</a:t>
+              <a:t>CERRO VERDE/PS2: 0/3 (0%) · PISCINAS Y SEDIMENTADOR: 10/22 (45,5%). A nivel proyecto la caminata 2 va 90,8% con 8 ya agendadas.</a:t>
             </a:r>
             <a:endParaRPr lang="en-US" sz="1100" dirty="0"/>
           </a:p>
@@ -8007,7 +8019,7 @@
                 <a:ea typeface="Calibri" pitchFamily="34" charset="-122"/>
                 <a:cs typeface="Calibri" pitchFamily="34" charset="-120"/>
               </a:rPr>
-              <a:t>Concentra 112 de los 380 DT abiertos (29,5%), con 6 atrasados. Además hay 6 carpetas bajo 80% de avance que conviene cerrar en paralelo.</a:t>
+              <a:t>Concentra 110 de los 352 DT abiertos (31,3%), con 4 atrasados. Además hay 4 carpetas bajo 80% de avance que conviene cerrar en paralelo.</a:t>
             </a:r>
             <a:endParaRPr lang="en-US" sz="1100" dirty="0"/>
           </a:p>
@@ -8046,7 +8058,7 @@
                 <a:ea typeface="Calibri" pitchFamily="34" charset="-122"/>
                 <a:cs typeface="Calibri" pitchFamily="34" charset="-120"/>
               </a:rPr>
-              <a:t>Fuente: STATUS_SUBSISTEMAS_TALABRE + Detalle_de_Terminaciones · 218 subsistemas · 2.062 DT · Atrasos al 24-08-2026</a:t>
+              <a:t>Fuente: STATUS_SUBSISTEMAS_TALABRE + Detalle_de_Terminaciones · 218 subsistemas · 2.078 DT · Atrasos al 31-08-2026</a:t>
             </a:r>
             <a:endParaRPr lang="en-US" sz="850" dirty="0"/>
           </a:p>
@@ -8692,7 +8704,7 @@
                 <a:ea typeface="Cambria" pitchFamily="34" charset="-122"/>
                 <a:cs typeface="Cambria" pitchFamily="34" charset="-120"/>
               </a:rPr>
-              <a:t>58%</a:t>
+              <a:t>58,1%</a:t>
             </a:r>
             <a:endParaRPr lang="en-US" sz="3400" dirty="0"/>
           </a:p>
@@ -8770,7 +8782,7 @@
                 <a:ea typeface="Calibri" pitchFamily="34" charset="-122"/>
                 <a:cs typeface="Calibri" pitchFamily="34" charset="-120"/>
               </a:rPr>
-              <a:t>Corte: 17-08-2026   ·   Corte anterior: 10-08-2026</a:t>
+              <a:t>Corte: 24-08-2026   ·   Corte anterior: 17-08-2026</a:t>
             </a:r>
             <a:endParaRPr lang="en-US" sz="1100" dirty="0"/>
           </a:p>
@@ -8809,7 +8821,7 @@
                 <a:ea typeface="Calibri" pitchFamily="34" charset="-122"/>
                 <a:cs typeface="Calibri" pitchFamily="34" charset="-120"/>
               </a:rPr>
-              <a:t>Fuente: Estatus_Resumen_General_QAQC.xlsx · Corte 17-08-2026 · Áreas 2000/3000/4000/8000</a:t>
+              <a:t>Fuente: Estatus_Resumen_General_QAQC.xlsx · Corte 24-08-2026 · Áreas 2000/3000/4000/8000</a:t>
             </a:r>
             <a:endParaRPr lang="en-US" sz="850" dirty="0"/>
           </a:p>
@@ -9684,13 +9696,13 @@
             <a:r>
               <a:rPr lang="en-US" sz="900" b="1" dirty="0">
                 <a:solidFill>
-                  <a:srgbClr val="1F7A44"/>
-                </a:solidFill>
-                <a:latin typeface="Calibri" pitchFamily="34" charset="0"/>
-                <a:ea typeface="Calibri" pitchFamily="34" charset="-122"/>
-                <a:cs typeface="Calibri" pitchFamily="34" charset="-120"/>
-              </a:rPr>
-              <a:t>▲ +1 vs. corte anterior</a:t>
+                  <a:srgbClr val="56606E"/>
+                </a:solidFill>
+                <a:latin typeface="Calibri" pitchFamily="34" charset="0"/>
+                <a:ea typeface="Calibri" pitchFamily="34" charset="-122"/>
+                <a:cs typeface="Calibri" pitchFamily="34" charset="-120"/>
+              </a:rPr>
+              <a:t>= sin cambio vs. corte anterior</a:t>
             </a:r>
             <a:endParaRPr lang="en-US" sz="900" dirty="0"/>
           </a:p>
@@ -9783,7 +9795,7 @@
                 <a:ea typeface="Cambria" pitchFamily="34" charset="-122"/>
                 <a:cs typeface="Cambria" pitchFamily="34" charset="-120"/>
               </a:rPr>
-              <a:t>58%</a:t>
+              <a:t>58,1%</a:t>
             </a:r>
             <a:endParaRPr lang="en-US" sz="4000" dirty="0"/>
           </a:p>
@@ -9822,7 +9834,7 @@
                 <a:ea typeface="Calibri" pitchFamily="34" charset="-122"/>
                 <a:cs typeface="Calibri" pitchFamily="34" charset="-120"/>
               </a:rPr>
-              <a:t>1.154/1.988</a:t>
+              <a:t>1.156/1.988</a:t>
             </a:r>
             <a:endParaRPr lang="en-US" sz="1400" dirty="0"/>
           </a:p>
@@ -9900,7 +9912,7 @@
                 <a:ea typeface="Calibri" pitchFamily="34" charset="-122"/>
                 <a:cs typeface="Calibri" pitchFamily="34" charset="-120"/>
               </a:rPr>
-              <a:t>826 abiertos · 673 vencidos · 8 en trámite</a:t>
+              <a:t>825 abiertos · 672 vencidos · 7 en trámite</a:t>
             </a:r>
             <a:endParaRPr lang="en-US" sz="950" dirty="0"/>
           </a:p>
@@ -9933,13 +9945,13 @@
             <a:r>
               <a:rPr lang="en-US" sz="900" b="1" dirty="0">
                 <a:solidFill>
-                  <a:srgbClr val="56606E"/>
-                </a:solidFill>
-                <a:latin typeface="Calibri" pitchFamily="34" charset="0"/>
-                <a:ea typeface="Calibri" pitchFamily="34" charset="-122"/>
-                <a:cs typeface="Calibri" pitchFamily="34" charset="-120"/>
-              </a:rPr>
-              <a:t>= sin cambio vs. corte anterior</a:t>
+                  <a:srgbClr val="1F7A44"/>
+                </a:solidFill>
+                <a:latin typeface="Calibri" pitchFamily="34" charset="0"/>
+                <a:ea typeface="Calibri" pitchFamily="34" charset="-122"/>
+                <a:cs typeface="Calibri" pitchFamily="34" charset="-120"/>
+              </a:rPr>
+              <a:t>▲ +2 vs. corte anterior</a:t>
             </a:r>
             <a:endParaRPr lang="en-US" sz="900" dirty="0"/>
           </a:p>
@@ -10237,7 +10249,7 @@
                 <a:ea typeface="Calibri" pitchFamily="34" charset="-122"/>
                 <a:cs typeface="Calibri" pitchFamily="34" charset="-120"/>
               </a:rPr>
-              <a:t>Ningún P1 cerrado desde el corte anterior; 826 abiertos, de los cuales 673 superaron su fecha de vencimiento (+6 en el período). El área 3000 concentra 703 (85,1%).</a:t>
+              <a:t>+2 P1 cerrado desde el corte anterior; 825 abiertos, de los cuales 672 superaron su fecha de vencimiento. El área 3000 concentra 702 (85,1%).</a:t>
             </a:r>
             <a:endParaRPr lang="en-US" sz="1250" dirty="0"/>
           </a:p>
@@ -10276,7 +10288,7 @@
                 <a:ea typeface="Calibri" pitchFamily="34" charset="-122"/>
                 <a:cs typeface="Calibri" pitchFamily="34" charset="-120"/>
               </a:rPr>
-              <a:t>Fuente: Estatus_Resumen_General_QAQC.xlsx · Corte 17-08-2026 · Áreas 2000/3000/4000/8000</a:t>
+              <a:t>Fuente: Estatus_Resumen_General_QAQC.xlsx · Corte 24-08-2026 · Áreas 2000/3000/4000/8000</a:t>
             </a:r>
             <a:endParaRPr lang="en-US" sz="850" dirty="0"/>
           </a:p>
@@ -11018,7 +11030,7 @@
                 <a:ea typeface="Calibri" pitchFamily="34" charset="-122"/>
                 <a:cs typeface="Calibri" pitchFamily="34" charset="-120"/>
               </a:rPr>
-              <a:t>92,8%</a:t>
+              <a:t>93,2%</a:t>
             </a:r>
             <a:endParaRPr lang="en-US" sz="1300" dirty="0"/>
           </a:p>
@@ -11434,7 +11446,7 @@
                 <a:ea typeface="Calibri" pitchFamily="34" charset="-122"/>
                 <a:cs typeface="Calibri" pitchFamily="34" charset="-120"/>
               </a:rPr>
-              <a:t>703 (604)</a:t>
+              <a:t>702 (603)</a:t>
             </a:r>
             <a:endParaRPr lang="en-US" sz="1300" dirty="0"/>
           </a:p>
@@ -12330,7 +12342,7 @@
                 <a:ea typeface="Calibri" pitchFamily="34" charset="-122"/>
                 <a:cs typeface="Calibri" pitchFamily="34" charset="-120"/>
               </a:rPr>
-              <a:t>Fuente: Estatus_Resumen_General_QAQC.xlsx · Corte 17-08-2026 · Áreas 2000/3000/4000/8000</a:t>
+              <a:t>Fuente: Estatus_Resumen_General_QAQC.xlsx · Corte 24-08-2026 · Áreas 2000/3000/4000/8000</a:t>
             </a:r>
             <a:endParaRPr lang="en-US" sz="850" dirty="0"/>
           </a:p>
@@ -12974,7 +12986,7 @@
                 <a:ea typeface="Calibri" pitchFamily="34" charset="-122"/>
                 <a:cs typeface="Calibri" pitchFamily="34" charset="-120"/>
               </a:rPr>
-              <a:t>Fuente: Estatus_Resumen_General_QAQC.xlsx · Corte 17-08-2026 · Áreas 2000/3000/4000/8000</a:t>
+              <a:t>Fuente: Estatus_Resumen_General_QAQC.xlsx · Corte 24-08-2026 · Áreas 2000/3000/4000/8000</a:t>
             </a:r>
             <a:endParaRPr lang="en-US" sz="850" dirty="0"/>
           </a:p>
@@ -13402,45 +13414,6 @@
         </p:nvSpPr>
         <p:spPr>
           <a:xfrm>
-            <a:off x="9509760" y="2450592"/>
-            <a:ext cx="914400" cy="566928"/>
-          </a:xfrm>
-          <a:prstGeom prst="rect">
-            <a:avLst/>
-          </a:prstGeom>
-          <a:noFill/>
-          <a:ln/>
-        </p:spPr>
-        <p:txBody>
-          <a:bodyPr wrap="square" lIns="0" tIns="0" rIns="0" bIns="0" rtlCol="0" anchor="ctr"/>
-          <a:lstStyle/>
-          <a:p>
-            <a:pPr algn="r" indent="0" marL="0">
-              <a:buNone/>
-            </a:pPr>
-            <a:r>
-              <a:rPr lang="en-US" sz="950" b="1" dirty="0">
-                <a:solidFill>
-                  <a:srgbClr val="1F7A44"/>
-                </a:solidFill>
-                <a:latin typeface="Calibri" pitchFamily="34" charset="0"/>
-                <a:ea typeface="Calibri" pitchFamily="34" charset="-122"/>
-                <a:cs typeface="Calibri" pitchFamily="34" charset="-120"/>
-              </a:rPr>
-              <a:t>▲ +1</a:t>
-            </a:r>
-            <a:endParaRPr lang="en-US" sz="950" dirty="0"/>
-          </a:p>
-        </p:txBody>
-      </p:sp>
-      <p:sp>
-        <p:nvSpPr>
-          <p:cNvPr id="13" name="Text 9"/>
-          <p:cNvSpPr/>
-          <p:nvPr/>
-        </p:nvSpPr>
-        <p:spPr>
-          <a:xfrm>
             <a:off x="10469880" y="2450592"/>
             <a:ext cx="868680" cy="566928"/>
           </a:xfrm>
@@ -13474,7 +13447,7 @@
       </p:sp>
       <p:sp>
         <p:nvSpPr>
-          <p:cNvPr id="14" name="Shape 10"/>
+          <p:cNvPr id="13" name="Shape 9"/>
           <p:cNvSpPr/>
           <p:nvPr/>
         </p:nvSpPr>
@@ -13496,7 +13469,7 @@
       </p:sp>
       <p:sp>
         <p:nvSpPr>
-          <p:cNvPr id="15" name="Shape 11"/>
+          <p:cNvPr id="14" name="Shape 10"/>
           <p:cNvSpPr/>
           <p:nvPr/>
         </p:nvSpPr>
@@ -13516,7 +13489,7 @@
       </p:sp>
       <p:sp>
         <p:nvSpPr>
-          <p:cNvPr id="16" name="Text 12"/>
+          <p:cNvPr id="15" name="Text 11"/>
           <p:cNvSpPr/>
           <p:nvPr/>
         </p:nvSpPr>
@@ -13555,46 +13528,7 @@
       </p:sp>
       <p:sp>
         <p:nvSpPr>
-          <p:cNvPr id="17" name="Text 13"/>
-          <p:cNvSpPr/>
-          <p:nvPr/>
-        </p:nvSpPr>
-        <p:spPr>
-          <a:xfrm>
-            <a:off x="9509760" y="3072384"/>
-            <a:ext cx="914400" cy="566928"/>
-          </a:xfrm>
-          <a:prstGeom prst="rect">
-            <a:avLst/>
-          </a:prstGeom>
-          <a:noFill/>
-          <a:ln/>
-        </p:spPr>
-        <p:txBody>
-          <a:bodyPr wrap="square" lIns="0" tIns="0" rIns="0" bIns="0" rtlCol="0" anchor="ctr"/>
-          <a:lstStyle/>
-          <a:p>
-            <a:pPr algn="r" indent="0" marL="0">
-              <a:buNone/>
-            </a:pPr>
-            <a:r>
-              <a:rPr lang="en-US" sz="950" b="1" dirty="0">
-                <a:solidFill>
-                  <a:srgbClr val="1F7A44"/>
-                </a:solidFill>
-                <a:latin typeface="Calibri" pitchFamily="34" charset="0"/>
-                <a:ea typeface="Calibri" pitchFamily="34" charset="-122"/>
-                <a:cs typeface="Calibri" pitchFamily="34" charset="-120"/>
-              </a:rPr>
-              <a:t>▲ +1</a:t>
-            </a:r>
-            <a:endParaRPr lang="en-US" sz="950" dirty="0"/>
-          </a:p>
-        </p:txBody>
-      </p:sp>
-      <p:sp>
-        <p:nvSpPr>
-          <p:cNvPr id="18" name="Text 14"/>
+          <p:cNvPr id="16" name="Text 12"/>
           <p:cNvSpPr/>
           <p:nvPr/>
         </p:nvSpPr>
@@ -13633,7 +13567,7 @@
       </p:sp>
       <p:sp>
         <p:nvSpPr>
-          <p:cNvPr id="19" name="Shape 15"/>
+          <p:cNvPr id="17" name="Shape 13"/>
           <p:cNvSpPr/>
           <p:nvPr/>
         </p:nvSpPr>
@@ -13655,7 +13589,7 @@
       </p:sp>
       <p:sp>
         <p:nvSpPr>
-          <p:cNvPr id="20" name="Shape 16"/>
+          <p:cNvPr id="18" name="Shape 14"/>
           <p:cNvSpPr/>
           <p:nvPr/>
         </p:nvSpPr>
@@ -13675,7 +13609,7 @@
       </p:sp>
       <p:sp>
         <p:nvSpPr>
-          <p:cNvPr id="21" name="Text 17"/>
+          <p:cNvPr id="19" name="Text 15"/>
           <p:cNvSpPr/>
           <p:nvPr/>
         </p:nvSpPr>
@@ -13714,7 +13648,7 @@
       </p:sp>
       <p:sp>
         <p:nvSpPr>
-          <p:cNvPr id="22" name="Text 18"/>
+          <p:cNvPr id="20" name="Text 16"/>
           <p:cNvSpPr/>
           <p:nvPr/>
         </p:nvSpPr>
@@ -13753,7 +13687,7 @@
       </p:sp>
       <p:sp>
         <p:nvSpPr>
-          <p:cNvPr id="23" name="Shape 19"/>
+          <p:cNvPr id="21" name="Shape 17"/>
           <p:cNvSpPr/>
           <p:nvPr/>
         </p:nvSpPr>
@@ -13775,7 +13709,7 @@
       </p:sp>
       <p:sp>
         <p:nvSpPr>
-          <p:cNvPr id="24" name="Shape 20"/>
+          <p:cNvPr id="22" name="Shape 18"/>
           <p:cNvSpPr/>
           <p:nvPr/>
         </p:nvSpPr>
@@ -13795,7 +13729,7 @@
       </p:sp>
       <p:sp>
         <p:nvSpPr>
-          <p:cNvPr id="25" name="Text 21"/>
+          <p:cNvPr id="23" name="Text 19"/>
           <p:cNvSpPr/>
           <p:nvPr/>
         </p:nvSpPr>
@@ -13834,7 +13768,7 @@
       </p:sp>
       <p:sp>
         <p:nvSpPr>
-          <p:cNvPr id="26" name="Text 22"/>
+          <p:cNvPr id="24" name="Text 20"/>
           <p:cNvSpPr/>
           <p:nvPr/>
         </p:nvSpPr>
@@ -13873,7 +13807,7 @@
       </p:sp>
       <p:sp>
         <p:nvSpPr>
-          <p:cNvPr id="27" name="Shape 23"/>
+          <p:cNvPr id="25" name="Shape 21"/>
           <p:cNvSpPr/>
           <p:nvPr/>
         </p:nvSpPr>
@@ -13895,7 +13829,7 @@
       </p:sp>
       <p:sp>
         <p:nvSpPr>
-          <p:cNvPr id="28" name="Shape 24"/>
+          <p:cNvPr id="26" name="Shape 22"/>
           <p:cNvSpPr/>
           <p:nvPr/>
         </p:nvSpPr>
@@ -13915,7 +13849,7 @@
       </p:sp>
       <p:sp>
         <p:nvSpPr>
-          <p:cNvPr id="29" name="Text 25"/>
+          <p:cNvPr id="27" name="Text 23"/>
           <p:cNvSpPr/>
           <p:nvPr/>
         </p:nvSpPr>
@@ -13954,7 +13888,7 @@
       </p:sp>
       <p:sp>
         <p:nvSpPr>
-          <p:cNvPr id="30" name="Text 26"/>
+          <p:cNvPr id="28" name="Text 24"/>
           <p:cNvSpPr/>
           <p:nvPr/>
         </p:nvSpPr>
@@ -13993,7 +13927,7 @@
       </p:sp>
       <p:sp>
         <p:nvSpPr>
-          <p:cNvPr id="31" name="Text 27"/>
+          <p:cNvPr id="29" name="Text 25"/>
           <p:cNvSpPr/>
           <p:nvPr/>
         </p:nvSpPr>
@@ -14032,7 +13966,7 @@
       </p:sp>
       <p:sp>
         <p:nvSpPr>
-          <p:cNvPr id="32" name="Text 28"/>
+          <p:cNvPr id="30" name="Text 26"/>
           <p:cNvSpPr/>
           <p:nvPr/>
         </p:nvSpPr>
@@ -14063,7 +13997,7 @@
                 <a:ea typeface="Calibri" pitchFamily="34" charset="-122"/>
                 <a:cs typeface="Calibri" pitchFamily="34" charset="-120"/>
               </a:rPr>
-              <a:t>Fuente: Estatus_Resumen_General_QAQC.xlsx · Corte 17-08-2026 · Áreas 2000/3000/4000/8000</a:t>
+              <a:t>Fuente: Estatus_Resumen_General_QAQC.xlsx · Corte 24-08-2026 · Áreas 2000/3000/4000/8000</a:t>
             </a:r>
             <a:endParaRPr lang="en-US" sz="850" dirty="0"/>
           </a:p>
@@ -14071,7 +14005,7 @@
       </p:sp>
       <p:sp>
         <p:nvSpPr>
-          <p:cNvPr id="33" name="Text 29"/>
+          <p:cNvPr id="31" name="Text 27"/>
           <p:cNvSpPr/>
           <p:nvPr/>
         </p:nvSpPr>
@@ -14110,7 +14044,7 @@
       </p:sp>
       <p:sp>
         <p:nvSpPr>
-          <p:cNvPr id="34" name="Text 30"/>
+          <p:cNvPr id="32" name="Text 28"/>
           <p:cNvSpPr/>
           <p:nvPr/>
         </p:nvSpPr>
@@ -14314,7 +14248,7 @@
                 <a:ea typeface="Calibri" pitchFamily="34" charset="-122"/>
                 <a:cs typeface="Calibri" pitchFamily="34" charset="-120"/>
               </a:rPr>
-              <a:t>1.988 P1 levantados; 58% cerrados. El pendiente se concentra en Piping, Eléctrica, Instrumentación y Control, y físicamente en el área 3000.</a:t>
+              <a:t>1.988 P1 levantados; 58,1% cerrados. El pendiente se concentra en Piping, Eléctrica, Instrumentación y Control, y físicamente en el área 3000.</a:t>
             </a:r>
             <a:endParaRPr lang="en-US" sz="1350" dirty="0"/>
           </a:p>
@@ -14446,7 +14380,7 @@
                 <a:ea typeface="Cambria" pitchFamily="34" charset="-122"/>
                 <a:cs typeface="Cambria" pitchFamily="34" charset="-120"/>
               </a:rPr>
-              <a:t>58%</a:t>
+              <a:t>58,1%</a:t>
             </a:r>
             <a:endParaRPr lang="en-US" sz="1900" dirty="0"/>
           </a:p>
@@ -14561,7 +14495,7 @@
                 <a:ea typeface="Calibri" pitchFamily="34" charset="-122"/>
                 <a:cs typeface="Calibri" pitchFamily="34" charset="-120"/>
               </a:rPr>
-              <a:t>1.154</a:t>
+              <a:t>1.156</a:t>
             </a:r>
             <a:endParaRPr lang="en-US" sz="1100" dirty="0"/>
           </a:p>
@@ -14659,7 +14593,7 @@
                 <a:ea typeface="Calibri" pitchFamily="34" charset="-122"/>
                 <a:cs typeface="Calibri" pitchFamily="34" charset="-120"/>
               </a:rPr>
-              <a:t>826</a:t>
+              <a:t>825</a:t>
             </a:r>
             <a:endParaRPr lang="en-US" sz="1100" dirty="0"/>
           </a:p>
@@ -14757,7 +14691,7 @@
                 <a:ea typeface="Calibri" pitchFamily="34" charset="-122"/>
                 <a:cs typeface="Calibri" pitchFamily="34" charset="-120"/>
               </a:rPr>
-              <a:t>8</a:t>
+              <a:t>7</a:t>
             </a:r>
             <a:endParaRPr lang="en-US" sz="1100" dirty="0"/>
           </a:p>
@@ -14840,7 +14774,7 @@
                 <a:ea typeface="Calibri" pitchFamily="34" charset="-122"/>
                 <a:cs typeface="Calibri" pitchFamily="34" charset="-120"/>
               </a:rPr>
-              <a:t>703 de 826 P1 abiertos (85,1%) están en el área 3000. Áreas 2000 y 8000 sobre 90% de cierre.</a:t>
+              <a:t>702 de 825 P1 abiertos (85,1%) están en el área 3000. Áreas 2000 y 8000 sobre 90% de cierre.</a:t>
             </a:r>
             <a:endParaRPr lang="en-US" sz="1150" dirty="0"/>
           </a:p>
@@ -14879,7 +14813,7 @@
                 <a:ea typeface="Calibri" pitchFamily="34" charset="-122"/>
                 <a:cs typeface="Calibri" pitchFamily="34" charset="-120"/>
               </a:rPr>
-              <a:t>Fuente: Estatus_Resumen_General_QAQC.xlsx · Corte 17-08-2026 · Áreas 2000/3000/4000/8000</a:t>
+              <a:t>Fuente: Estatus_Resumen_General_QAQC.xlsx · Corte 24-08-2026 · Áreas 2000/3000/4000/8000</a:t>
             </a:r>
             <a:endParaRPr lang="en-US" sz="850" dirty="0"/>
           </a:p>
@@ -15395,7 +15329,7 @@
                 <a:ea typeface="Calibri" pitchFamily="34" charset="-122"/>
                 <a:cs typeface="Calibri" pitchFamily="34" charset="-120"/>
               </a:rPr>
-              <a:t>703 P1 abiertos (85,1% del total) y 41 caminatas 100% pendientes. Es la ruta crítica: sin esta área no mejora ningún indicador global.</a:t>
+              <a:t>702 P1 abiertos (85,1% del total) y 41 caminatas 100% pendientes. Es la ruta crítica: sin esta área no mejora ningún indicador global.</a:t>
             </a:r>
             <a:endParaRPr lang="en-US" sz="1150" dirty="0"/>
           </a:p>
@@ -15495,7 +15429,7 @@
                 <a:ea typeface="Calibri" pitchFamily="34" charset="-122"/>
                 <a:cs typeface="Calibri" pitchFamily="34" charset="-120"/>
               </a:rPr>
-              <a:t>Recuperar los 673 P1 vencidos</a:t>
+              <a:t>Recuperar los 672 P1 vencidos</a:t>
             </a:r>
             <a:endParaRPr lang="en-US" sz="1500" dirty="0"/>
           </a:p>
@@ -15718,7 +15652,7 @@
                 <a:ea typeface="Calibri" pitchFamily="34" charset="-122"/>
                 <a:cs typeface="Calibri" pitchFamily="34" charset="-120"/>
               </a:rPr>
-              <a:t>Fuente: Estatus_Resumen_General_QAQC.xlsx · Corte 17-08-2026 · Áreas 2000/3000/4000/8000</a:t>
+              <a:t>Fuente: Estatus_Resumen_General_QAQC.xlsx · Corte 24-08-2026 · Áreas 2000/3000/4000/8000</a:t>
             </a:r>
             <a:endParaRPr lang="en-US" sz="850" dirty="0"/>
           </a:p>
@@ -16023,7 +15957,7 @@
                 <a:ea typeface="Cambria" pitchFamily="34" charset="-122"/>
                 <a:cs typeface="Cambria" pitchFamily="34" charset="-120"/>
               </a:rPr>
-              <a:t>57,5%</a:t>
+              <a:t>61,3%</a:t>
             </a:r>
             <a:endParaRPr lang="en-US" sz="3800" dirty="0"/>
           </a:p>
@@ -16062,7 +15996,7 @@
                 <a:ea typeface="Calibri" pitchFamily="34" charset="-122"/>
                 <a:cs typeface="Calibri" pitchFamily="34" charset="-120"/>
               </a:rPr>
-              <a:t>46/80</a:t>
+              <a:t>49/80</a:t>
             </a:r>
             <a:endParaRPr lang="en-US" sz="1400" dirty="0"/>
           </a:p>
@@ -16143,7 +16077,7 @@
                 <a:ea typeface="Calibri" pitchFamily="34" charset="-122"/>
                 <a:cs typeface="Calibri" pitchFamily="34" charset="-120"/>
               </a:rPr>
-              <a:t>34 subsistemas por caminar</a:t>
+              <a:t>31 subsistemas por caminar</a:t>
             </a:r>
             <a:endParaRPr lang="en-US" sz="950" dirty="0"/>
           </a:p>
@@ -16236,7 +16170,7 @@
                 <a:ea typeface="Cambria" pitchFamily="34" charset="-122"/>
                 <a:cs typeface="Cambria" pitchFamily="34" charset="-120"/>
               </a:rPr>
-              <a:t>73,3%</a:t>
+              <a:t>80%</a:t>
             </a:r>
             <a:endParaRPr lang="en-US" sz="3800" dirty="0"/>
           </a:p>
@@ -16275,7 +16209,7 @@
                 <a:ea typeface="Calibri" pitchFamily="34" charset="-122"/>
                 <a:cs typeface="Calibri" pitchFamily="34" charset="-120"/>
               </a:rPr>
-              <a:t>11/15</a:t>
+              <a:t>12/15</a:t>
             </a:r>
             <a:endParaRPr lang="en-US" sz="1400" dirty="0"/>
           </a:p>
@@ -16356,7 +16290,7 @@
                 <a:ea typeface="Calibri" pitchFamily="34" charset="-122"/>
                 <a:cs typeface="Calibri" pitchFamily="34" charset="-120"/>
               </a:rPr>
-              <a:t>4 facilities por caminar</a:t>
+              <a:t>3 facilities por caminar</a:t>
             </a:r>
             <a:endParaRPr lang="en-US" sz="950" dirty="0"/>
           </a:p>
@@ -16449,7 +16383,7 @@
                 <a:ea typeface="Cambria" pitchFamily="34" charset="-122"/>
                 <a:cs typeface="Cambria" pitchFamily="34" charset="-120"/>
               </a:rPr>
-              <a:t>44,2%</a:t>
+              <a:t>45,3%</a:t>
             </a:r>
             <a:endParaRPr lang="en-US" sz="3800" dirty="0"/>
           </a:p>
@@ -16488,7 +16422,7 @@
                 <a:ea typeface="Calibri" pitchFamily="34" charset="-122"/>
                 <a:cs typeface="Calibri" pitchFamily="34" charset="-120"/>
               </a:rPr>
-              <a:t>42/95</a:t>
+              <a:t>43/95</a:t>
             </a:r>
             <a:endParaRPr lang="en-US" sz="1400" dirty="0"/>
           </a:p>
@@ -16569,7 +16503,7 @@
                 <a:ea typeface="Calibri" pitchFamily="34" charset="-122"/>
                 <a:cs typeface="Calibri" pitchFamily="34" charset="-120"/>
               </a:rPr>
-              <a:t>22 aprobadas · 16 en revisión · 4 rechazadas</a:t>
+              <a:t>28 aprobadas · 13 en revisión · 2 rechazadas</a:t>
             </a:r>
             <a:endParaRPr lang="en-US" sz="950" dirty="0"/>
           </a:p>
@@ -16662,7 +16596,7 @@
                 <a:ea typeface="Cambria" pitchFamily="34" charset="-122"/>
                 <a:cs typeface="Cambria" pitchFamily="34" charset="-120"/>
               </a:rPr>
-              <a:t>70,7%</a:t>
+              <a:t>68,8%</a:t>
             </a:r>
             <a:endParaRPr lang="en-US" sz="3800" dirty="0"/>
           </a:p>
@@ -16701,7 +16635,7 @@
                 <a:ea typeface="Calibri" pitchFamily="34" charset="-122"/>
                 <a:cs typeface="Calibri" pitchFamily="34" charset="-120"/>
               </a:rPr>
-              <a:t>676/956</a:t>
+              <a:t>714/1.038</a:t>
             </a:r>
             <a:endParaRPr lang="en-US" sz="1400" dirty="0"/>
           </a:p>
@@ -16782,7 +16716,7 @@
                 <a:ea typeface="Calibri" pitchFamily="34" charset="-122"/>
                 <a:cs typeface="Calibri" pitchFamily="34" charset="-120"/>
               </a:rPr>
-              <a:t>280 abiertos · 8 atrasados</a:t>
+              <a:t>324 abiertos · 8 atrasados</a:t>
             </a:r>
             <a:endParaRPr lang="en-US" sz="950" dirty="0"/>
           </a:p>
@@ -16922,7 +16856,7 @@
                 <a:ea typeface="Calibri" pitchFamily="34" charset="-122"/>
                 <a:cs typeface="Calibri" pitchFamily="34" charset="-120"/>
               </a:rPr>
-              <a:t>1.092 de 1.596 ítems cerrados (68,4%); de los 504 abiertos, 15 ya pasaron su fecha requerida de cierre (3%).</a:t>
+              <a:t>1.169 de 1.722 ítems cerrados (67,9%); de los 553 abiertos, 14 ya pasaron su fecha requerida de cierre (2,5%).</a:t>
             </a:r>
             <a:endParaRPr lang="en-US" sz="1150" dirty="0"/>
           </a:p>
@@ -17001,7 +16935,7 @@
                 <a:ea typeface="Calibri" pitchFamily="34" charset="-122"/>
                 <a:cs typeface="Calibri" pitchFamily="34" charset="-120"/>
               </a:rPr>
-              <a:t>Operables 46/80 por Caminata 2 (57,5%); Facility 11/15 por Caminata 1 (73,3%).</a:t>
+              <a:t>Operables 49/80 por Caminata 2 (61,3%); Facility 12/15 por Caminata 1 (80%).</a:t>
             </a:r>
             <a:endParaRPr lang="en-US" sz="1150" dirty="0"/>
           </a:p>
@@ -17063,7 +16997,7 @@
                 <a:ea typeface="Calibri" pitchFamily="34" charset="-122"/>
                 <a:cs typeface="Calibri" pitchFamily="34" charset="-120"/>
               </a:rPr>
-              <a:t>Las carpetas están a 44,2% de entrega y el cuello está en el armado interno.  </a:t>
+              <a:t>Las carpetas están a 45,3% de entrega y el cuello está en el armado interno.  </a:t>
             </a:r>
             <a:pPr indent="0" marL="0">
               <a:lnSpc>
@@ -17080,7 +17014,7 @@
                 <a:ea typeface="Calibri" pitchFamily="34" charset="-122"/>
                 <a:cs typeface="Calibri" pitchFamily="34" charset="-120"/>
               </a:rPr>
-              <a:t>42 entregadas de 95: 22 aprobadas, 16 en revisión y 4 rechazadas. Quedan 15 en preparación y 38 sin iniciar.</a:t>
+              <a:t>43 entregadas de 95: 28 aprobadas, 13 en revisión y 2 rechazadas. Quedan 18 en preparación y 34 sin iniciar.</a:t>
             </a:r>
             <a:endParaRPr lang="en-US" sz="1150" dirty="0"/>
           </a:p>
@@ -17159,7 +17093,7 @@
                 <a:ea typeface="Calibri" pitchFamily="34" charset="-122"/>
                 <a:cs typeface="Calibri" pitchFamily="34" charset="-120"/>
               </a:rPr>
-              <a:t>164 de los 280 P1 abiertos (58,6%), con 3 atrasados.</a:t>
+              <a:t>166 de los 324 P1 abiertos (51,2%), con 6 atrasados.</a:t>
             </a:r>
             <a:endParaRPr lang="en-US" sz="1150" dirty="0"/>
           </a:p>
@@ -17198,7 +17132,7 @@
                 <a:ea typeface="Calibri" pitchFamily="34" charset="-122"/>
                 <a:cs typeface="Calibri" pitchFamily="34" charset="-120"/>
               </a:rPr>
-              <a:t>Fuente: REPORTE_GERENCIAL + Listado de Puntos Punch Consolidado · Corte 18-08-2026 · Atrasos al 24-08-2026</a:t>
+              <a:t>Fuente: REPORTE_GERENCIAL + Listado de Puntos Punch Consolidado · Corte 25-08-2026 · Atrasos al 31-08-2026</a:t>
             </a:r>
             <a:endParaRPr lang="en-US" sz="850" dirty="0"/>
           </a:p>
@@ -17651,7 +17585,7 @@
                 <a:ea typeface="Calibri" pitchFamily="34" charset="-122"/>
                 <a:cs typeface="Calibri" pitchFamily="34" charset="-120"/>
               </a:rPr>
-              <a:t>23,2%</a:t>
+              <a:t>29,5%</a:t>
             </a:r>
             <a:endParaRPr lang="en-US" sz="1100" dirty="0"/>
           </a:p>
@@ -17690,7 +17624,7 @@
                 <a:ea typeface="Cambria" pitchFamily="34" charset="-122"/>
                 <a:cs typeface="Cambria" pitchFamily="34" charset="-120"/>
               </a:rPr>
-              <a:t>22</a:t>
+              <a:t>28</a:t>
             </a:r>
             <a:endParaRPr lang="en-US" sz="2200" dirty="0"/>
           </a:p>
@@ -17810,7 +17744,7 @@
                 <a:ea typeface="Calibri" pitchFamily="34" charset="-122"/>
                 <a:cs typeface="Calibri" pitchFamily="34" charset="-120"/>
               </a:rPr>
-              <a:t>16,8%</a:t>
+              <a:t>13,7%</a:t>
             </a:r>
             <a:endParaRPr lang="en-US" sz="1100" dirty="0"/>
           </a:p>
@@ -17849,7 +17783,7 @@
                 <a:ea typeface="Cambria" pitchFamily="34" charset="-122"/>
                 <a:cs typeface="Cambria" pitchFamily="34" charset="-120"/>
               </a:rPr>
-              <a:t>16</a:t>
+              <a:t>13</a:t>
             </a:r>
             <a:endParaRPr lang="en-US" sz="2200" dirty="0"/>
           </a:p>
@@ -17969,7 +17903,7 @@
                 <a:ea typeface="Calibri" pitchFamily="34" charset="-122"/>
                 <a:cs typeface="Calibri" pitchFamily="34" charset="-120"/>
               </a:rPr>
-              <a:t>4,2%</a:t>
+              <a:t>2,1%</a:t>
             </a:r>
             <a:endParaRPr lang="en-US" sz="1100" dirty="0"/>
           </a:p>
@@ -18008,7 +17942,7 @@
                 <a:ea typeface="Cambria" pitchFamily="34" charset="-122"/>
                 <a:cs typeface="Cambria" pitchFamily="34" charset="-120"/>
               </a:rPr>
-              <a:t>4</a:t>
+              <a:t>2</a:t>
             </a:r>
             <a:endParaRPr lang="en-US" sz="2200" dirty="0"/>
           </a:p>
@@ -18128,7 +18062,7 @@
                 <a:ea typeface="Calibri" pitchFamily="34" charset="-122"/>
                 <a:cs typeface="Calibri" pitchFamily="34" charset="-120"/>
               </a:rPr>
-              <a:t>15,8%</a:t>
+              <a:t>18,9%</a:t>
             </a:r>
             <a:endParaRPr lang="en-US" sz="1100" dirty="0"/>
           </a:p>
@@ -18167,7 +18101,7 @@
                 <a:ea typeface="Cambria" pitchFamily="34" charset="-122"/>
                 <a:cs typeface="Cambria" pitchFamily="34" charset="-120"/>
               </a:rPr>
-              <a:t>15</a:t>
+              <a:t>18</a:t>
             </a:r>
             <a:endParaRPr lang="en-US" sz="2200" dirty="0"/>
           </a:p>
@@ -18287,7 +18221,7 @@
                 <a:ea typeface="Calibri" pitchFamily="34" charset="-122"/>
                 <a:cs typeface="Calibri" pitchFamily="34" charset="-120"/>
               </a:rPr>
-              <a:t>40%</a:t>
+              <a:t>35,8%</a:t>
             </a:r>
             <a:endParaRPr lang="en-US" sz="1100" dirty="0"/>
           </a:p>
@@ -18326,7 +18260,7 @@
                 <a:ea typeface="Cambria" pitchFamily="34" charset="-122"/>
                 <a:cs typeface="Cambria" pitchFamily="34" charset="-120"/>
               </a:rPr>
-              <a:t>38</a:t>
+              <a:t>34</a:t>
             </a:r>
             <a:endParaRPr lang="en-US" sz="2200" dirty="0"/>
           </a:p>
@@ -18368,7 +18302,7 @@
                 <a:ea typeface="Calibri" pitchFamily="34" charset="-122"/>
                 <a:cs typeface="Calibri" pitchFamily="34" charset="-120"/>
               </a:rPr>
-              <a:t>42 carpetas ya están en manos del cliente (44,2%) y 0 subsistemas tienen tarjeta verde. El grueso del pendiente todavía no sale de Besalco.</a:t>
+              <a:t>43 carpetas ya están en manos del cliente (45,3%) y 0 subsistemas tienen tarjeta verde. El grueso del pendiente todavía no sale de Besalco.</a:t>
             </a:r>
             <a:endParaRPr lang="en-US" sz="1000" dirty="0"/>
           </a:p>
@@ -18407,7 +18341,7 @@
                 <a:ea typeface="Calibri" pitchFamily="34" charset="-122"/>
                 <a:cs typeface="Calibri" pitchFamily="34" charset="-120"/>
               </a:rPr>
-              <a:t>Fuente: REPORTE_GERENCIAL + Listado de Puntos Punch Consolidado · Corte 18-08-2026 · Atrasos al 24-08-2026</a:t>
+              <a:t>Fuente: REPORTE_GERENCIAL + Listado de Puntos Punch Consolidado · Corte 25-08-2026 · Atrasos al 31-08-2026</a:t>
             </a:r>
             <a:endParaRPr lang="en-US" sz="850" dirty="0"/>
           </a:p>
@@ -18658,7 +18592,7 @@
                 <a:ea typeface="Calibri" pitchFamily="34" charset="-122"/>
                 <a:cs typeface="Calibri" pitchFamily="34" charset="-120"/>
               </a:rPr>
-              <a:t>956 P1 levantados; 70,7% cerrados. Atrasado = ítem abierto cuya fecha requerida de cierre ya venció al 24-08-2026.</a:t>
+              <a:t>1.038 P1 levantados; 68,8% cerrados. Atrasado = ítem abierto cuya fecha requerida de cierre ya venció al 31-08-2026.</a:t>
             </a:r>
             <a:endParaRPr lang="en-US" sz="1350" dirty="0"/>
           </a:p>
@@ -18790,7 +18724,7 @@
                 <a:ea typeface="Cambria" pitchFamily="34" charset="-122"/>
                 <a:cs typeface="Cambria" pitchFamily="34" charset="-120"/>
               </a:rPr>
-              <a:t>70,7%</a:t>
+              <a:t>68,8%</a:t>
             </a:r>
             <a:endParaRPr lang="en-US" sz="1900" dirty="0"/>
           </a:p>
@@ -18905,7 +18839,7 @@
                 <a:ea typeface="Calibri" pitchFamily="34" charset="-122"/>
                 <a:cs typeface="Calibri" pitchFamily="34" charset="-120"/>
               </a:rPr>
-              <a:t>676</a:t>
+              <a:t>714</a:t>
             </a:r>
             <a:endParaRPr lang="en-US" sz="1100" dirty="0"/>
           </a:p>
@@ -19101,7 +19035,7 @@
                 <a:ea typeface="Calibri" pitchFamily="34" charset="-122"/>
                 <a:cs typeface="Calibri" pitchFamily="34" charset="-120"/>
               </a:rPr>
-              <a:t>272</a:t>
+              <a:t>316</a:t>
             </a:r>
             <a:endParaRPr lang="en-US" sz="1100" dirty="0"/>
           </a:p>
@@ -19184,7 +19118,7 @@
                 <a:ea typeface="Calibri" pitchFamily="34" charset="-122"/>
                 <a:cs typeface="Calibri" pitchFamily="34" charset="-120"/>
               </a:rPr>
-              <a:t>Mediana de 4 días vencidos; el más antiguo lleva 4. 15 entre 1-30 días.</a:t>
+              <a:t>Mediana de 11 días vencidos; el más antiguo lleva 11. 14 entre 1-30 días.</a:t>
             </a:r>
             <a:endParaRPr lang="en-US" sz="1150" dirty="0"/>
           </a:p>
@@ -19223,7 +19157,7 @@
                 <a:ea typeface="Calibri" pitchFamily="34" charset="-122"/>
                 <a:cs typeface="Calibri" pitchFamily="34" charset="-120"/>
               </a:rPr>
-              <a:t>Fuente: REPORTE_GERENCIAL + Listado de Puntos Punch Consolidado · Corte 18-08-2026 · Atrasos al 24-08-2026</a:t>
+              <a:t>Fuente: REPORTE_GERENCIAL + Listado de Puntos Punch Consolidado · Corte 25-08-2026 · Atrasos al 31-08-2026</a:t>
             </a:r>
             <a:endParaRPr lang="en-US" sz="850" dirty="0"/>
           </a:p>
@@ -19555,7 +19489,7 @@
                 <a:ea typeface="Calibri" pitchFamily="34" charset="-122"/>
                 <a:cs typeface="Calibri" pitchFamily="34" charset="-120"/>
               </a:rPr>
-              <a:t>Recuperar los 15 ítems atrasados</a:t>
+              <a:t>Recuperar los 14 ítems atrasados</a:t>
             </a:r>
             <a:endParaRPr lang="en-US" sz="1400" dirty="0"/>
           </a:p>
@@ -19597,7 +19531,7 @@
                 <a:ea typeface="Calibri" pitchFamily="34" charset="-122"/>
                 <a:cs typeface="Calibri" pitchFamily="34" charset="-120"/>
               </a:rPr>
-              <a:t>3% de los 504 abiertos ya venció su fecha requerida. Foco en Eléctrica (3), Piping (5), Obras Civiles (0).</a:t>
+              <a:t>2,5% de los 553 abiertos ya venció su fecha requerida. Foco en Eléctrica (6), Piping (2), Obras Civiles (0).</a:t>
             </a:r>
             <a:endParaRPr lang="en-US" sz="1100" dirty="0"/>
           </a:p>
@@ -19697,7 +19631,7 @@
                 <a:ea typeface="Calibri" pitchFamily="34" charset="-122"/>
                 <a:cs typeface="Calibri" pitchFamily="34" charset="-120"/>
               </a:rPr>
-              <a:t>Ejecutar las 34 caminatas de Operables pendientes</a:t>
+              <a:t>Ejecutar las 31 caminatas de Operables pendientes</a:t>
             </a:r>
             <a:endParaRPr lang="en-US" sz="1400" dirty="0"/>
           </a:p>
@@ -19739,7 +19673,7 @@
                 <a:ea typeface="Calibri" pitchFamily="34" charset="-122"/>
                 <a:cs typeface="Calibri" pitchFamily="34" charset="-120"/>
               </a:rPr>
-              <a:t>La Caminata 2 va en 57,5% (46/80). Sin caminata no se levanta el punch final ni se habilita la entrega de la carpeta.</a:t>
+              <a:t>La Caminata 2 va en 61,3% (49/80). Sin caminata no se levanta el punch final ni se habilita la entrega de la carpeta.</a:t>
             </a:r>
             <a:endParaRPr lang="en-US" sz="1100" dirty="0"/>
           </a:p>
@@ -19839,7 +19773,7 @@
                 <a:ea typeface="Calibri" pitchFamily="34" charset="-122"/>
                 <a:cs typeface="Calibri" pitchFamily="34" charset="-120"/>
               </a:rPr>
-              <a:t>Sacar del armado interno las 53 carpetas retenidas</a:t>
+              <a:t>Sacar del armado interno las 52 carpetas retenidas</a:t>
             </a:r>
             <a:endParaRPr lang="en-US" sz="1400" dirty="0"/>
           </a:p>
@@ -19881,7 +19815,7 @@
                 <a:ea typeface="Calibri" pitchFamily="34" charset="-122"/>
                 <a:cs typeface="Calibri" pitchFamily="34" charset="-120"/>
               </a:rPr>
-              <a:t>15 están en preparación y 38 sin iniciar. Solo 42 de 95 (44,2%) llegaron al cliente; 4 volvieron rechazadas y hay que rearmarlas.</a:t>
+              <a:t>18 están en preparación y 34 sin iniciar. Solo 43 de 95 (45,3%) llegaron al cliente; 2 volvieron rechazadas y hay que rearmarlas.</a:t>
             </a:r>
             <a:endParaRPr lang="en-US" sz="1100" dirty="0"/>
           </a:p>
@@ -20023,7 +19957,7 @@
                 <a:ea typeface="Calibri" pitchFamily="34" charset="-122"/>
                 <a:cs typeface="Calibri" pitchFamily="34" charset="-120"/>
               </a:rPr>
-              <a:t>Concentra 224 P1 abiertos y 8 atrasados sobre 74 subsistemas. Es la ruta crítica del proyecto.</a:t>
+              <a:t>Concentra 256 P1 abiertos y 8 atrasados sobre 74 subsistemas. Es la ruta crítica del proyecto.</a:t>
             </a:r>
             <a:endParaRPr lang="en-US" sz="1100" dirty="0"/>
           </a:p>
@@ -20062,7 +19996,7 @@
                 <a:ea typeface="Calibri" pitchFamily="34" charset="-122"/>
                 <a:cs typeface="Calibri" pitchFamily="34" charset="-120"/>
               </a:rPr>
-              <a:t>Fuente: REPORTE_GERENCIAL + Listado de Puntos Punch Consolidado · Corte 18-08-2026 · Atrasos al 24-08-2026</a:t>
+              <a:t>Fuente: REPORTE_GERENCIAL + Listado de Puntos Punch Consolidado · Corte 25-08-2026 · Atrasos al 31-08-2026</a:t>
             </a:r>
             <a:endParaRPr lang="en-US" sz="850" dirty="0"/>
           </a:p>
@@ -20415,7 +20349,7 @@
                 <a:ea typeface="Calibri" pitchFamily="34" charset="-122"/>
                 <a:cs typeface="Calibri" pitchFamily="34" charset="-120"/>
               </a:rPr>
-              <a:t>Contrato 4600029355 · 218 subsistemas en 9 áreas · 2.062 detalles de terminación levantados.</a:t>
+              <a:t>Contrato 4600029355 · 218 subsistemas en 9 áreas · 2.078 detalles de terminación levantados.</a:t>
             </a:r>
             <a:endParaRPr lang="en-US" sz="1350" dirty="0"/>
           </a:p>
@@ -20454,7 +20388,7 @@
                 <a:ea typeface="Cambria" pitchFamily="34" charset="-122"/>
                 <a:cs typeface="Cambria" pitchFamily="34" charset="-120"/>
               </a:rPr>
-              <a:t>99,5%</a:t>
+              <a:t>99,1%</a:t>
             </a:r>
             <a:endParaRPr lang="en-US" sz="3400" dirty="0"/>
           </a:p>
@@ -20532,7 +20466,7 @@
                 <a:ea typeface="Cambria" pitchFamily="34" charset="-122"/>
                 <a:cs typeface="Cambria" pitchFamily="34" charset="-120"/>
               </a:rPr>
-              <a:t>98%</a:t>
+              <a:t>94,3%</a:t>
             </a:r>
             <a:endParaRPr lang="en-US" sz="3400" dirty="0"/>
           </a:p>
@@ -20610,7 +20544,7 @@
                 <a:ea typeface="Cambria" pitchFamily="34" charset="-122"/>
                 <a:cs typeface="Cambria" pitchFamily="34" charset="-120"/>
               </a:rPr>
-              <a:t>93,8%</a:t>
+              <a:t>94%</a:t>
             </a:r>
             <a:endParaRPr lang="en-US" sz="3400" dirty="0"/>
           </a:p>
@@ -20688,7 +20622,7 @@
                 <a:ea typeface="Cambria" pitchFamily="34" charset="-122"/>
                 <a:cs typeface="Cambria" pitchFamily="34" charset="-120"/>
               </a:rPr>
-              <a:t>90,6%</a:t>
+              <a:t>92,2%</a:t>
             </a:r>
             <a:endParaRPr lang="en-US" sz="3400" dirty="0"/>
           </a:p>
@@ -20766,7 +20700,7 @@
                 <a:ea typeface="Calibri" pitchFamily="34" charset="-122"/>
                 <a:cs typeface="Calibri" pitchFamily="34" charset="-120"/>
               </a:rPr>
-              <a:t>Atrasos calculados al 24-08-2026</a:t>
+              <a:t>Atrasos calculados al 31-08-2026</a:t>
             </a:r>
             <a:endParaRPr lang="en-US" sz="1100" dirty="0"/>
           </a:p>
@@ -20805,7 +20739,7 @@
                 <a:ea typeface="Calibri" pitchFamily="34" charset="-122"/>
                 <a:cs typeface="Calibri" pitchFamily="34" charset="-120"/>
               </a:rPr>
-              <a:t>Fuente: STATUS_SUBSISTEMAS_TALABRE + Detalle_de_Terminaciones · 218 subsistemas · 2.062 DT · Atrasos al 24-08-2026</a:t>
+              <a:t>Fuente: STATUS_SUBSISTEMAS_TALABRE + Detalle_de_Terminaciones · 218 subsistemas · 2.078 DT · Atrasos al 31-08-2026</a:t>
             </a:r>
             <a:endParaRPr lang="en-US" sz="850" dirty="0"/>
           </a:p>
@@ -21071,7 +21005,7 @@
                 <a:ea typeface="Cambria" pitchFamily="34" charset="-122"/>
                 <a:cs typeface="Cambria" pitchFamily="34" charset="-120"/>
               </a:rPr>
-              <a:t>99,5%</a:t>
+              <a:t>99,1%</a:t>
             </a:r>
             <a:endParaRPr lang="en-US" sz="3800" dirty="0"/>
           </a:p>
@@ -21110,7 +21044,7 @@
                 <a:ea typeface="Calibri" pitchFamily="34" charset="-122"/>
                 <a:cs typeface="Calibri" pitchFamily="34" charset="-120"/>
               </a:rPr>
-              <a:t>211/212 exigibles</a:t>
+              <a:t>215/217 exigibles</a:t>
             </a:r>
             <a:endParaRPr lang="en-US" sz="1300" dirty="0"/>
           </a:p>
@@ -21191,7 +21125,7 @@
                 <a:ea typeface="Calibri" pitchFamily="34" charset="-122"/>
                 <a:cs typeface="Calibri" pitchFamily="34" charset="-120"/>
               </a:rPr>
-              <a:t>96,8% del universo · 6 programadas en plazo · 1 con agenda vencida · 0 sin programar</a:t>
+              <a:t>98,6% del universo · 1 programadas en plazo · 2 con agenda vencida · 0 sin programar</a:t>
             </a:r>
             <a:endParaRPr lang="en-US" sz="950" dirty="0"/>
           </a:p>
@@ -21284,7 +21218,7 @@
                 <a:ea typeface="Cambria" pitchFamily="34" charset="-122"/>
                 <a:cs typeface="Cambria" pitchFamily="34" charset="-120"/>
               </a:rPr>
-              <a:t>98%</a:t>
+              <a:t>94,3%</a:t>
             </a:r>
             <a:endParaRPr lang="en-US" sz="3800" dirty="0"/>
           </a:p>
@@ -21323,7 +21257,7 @@
                 <a:ea typeface="Calibri" pitchFamily="34" charset="-122"/>
                 <a:cs typeface="Calibri" pitchFamily="34" charset="-120"/>
               </a:rPr>
-              <a:t>194/198 exigibles</a:t>
+              <a:t>198/210 exigibles</a:t>
             </a:r>
             <a:endParaRPr lang="en-US" sz="1300" dirty="0"/>
           </a:p>
@@ -21404,7 +21338,7 @@
                 <a:ea typeface="Calibri" pitchFamily="34" charset="-122"/>
                 <a:cs typeface="Calibri" pitchFamily="34" charset="-120"/>
               </a:rPr>
-              <a:t>89% del universo · 20 programadas en plazo · 4 con agenda vencida · 0 sin programar</a:t>
+              <a:t>90,8% del universo · 8 programadas en plazo · 12 con agenda vencida · 0 sin programar</a:t>
             </a:r>
             <a:endParaRPr lang="en-US" sz="950" dirty="0"/>
           </a:p>
@@ -21497,7 +21431,7 @@
                 <a:ea typeface="Cambria" pitchFamily="34" charset="-122"/>
                 <a:cs typeface="Cambria" pitchFamily="34" charset="-120"/>
               </a:rPr>
-              <a:t>93,8%</a:t>
+              <a:t>94%</a:t>
             </a:r>
             <a:endParaRPr lang="en-US" sz="3800" dirty="0"/>
           </a:p>
@@ -21536,7 +21470,7 @@
                 <a:ea typeface="Calibri" pitchFamily="34" charset="-122"/>
                 <a:cs typeface="Calibri" pitchFamily="34" charset="-120"/>
               </a:rPr>
-              <a:t>182/218 sobre 95%</a:t>
+              <a:t>185/218 sobre 95%</a:t>
             </a:r>
             <a:endParaRPr lang="en-US" sz="1300" dirty="0"/>
           </a:p>
@@ -21617,7 +21551,7 @@
                 <a:ea typeface="Calibri" pitchFamily="34" charset="-122"/>
                 <a:cs typeface="Calibri" pitchFamily="34" charset="-120"/>
               </a:rPr>
-              <a:t>6 subsistemas bajo 80% de avance</a:t>
+              <a:t>4 subsistemas bajo 80% de avance</a:t>
             </a:r>
             <a:endParaRPr lang="en-US" sz="950" dirty="0"/>
           </a:p>
@@ -21710,7 +21644,7 @@
                 <a:ea typeface="Cambria" pitchFamily="34" charset="-122"/>
                 <a:cs typeface="Cambria" pitchFamily="34" charset="-120"/>
               </a:rPr>
-              <a:t>91%</a:t>
+              <a:t>93,2%</a:t>
             </a:r>
             <a:endParaRPr lang="en-US" sz="3800" dirty="0"/>
           </a:p>
@@ -21749,7 +21683,7 @@
                 <a:ea typeface="Calibri" pitchFamily="34" charset="-122"/>
                 <a:cs typeface="Calibri" pitchFamily="34" charset="-120"/>
               </a:rPr>
-              <a:t>342/376</a:t>
+              <a:t>354/380</a:t>
             </a:r>
             <a:endParaRPr lang="en-US" sz="1300" dirty="0"/>
           </a:p>
@@ -21830,7 +21764,7 @@
                 <a:ea typeface="Calibri" pitchFamily="34" charset="-122"/>
                 <a:cs typeface="Calibri" pitchFamily="34" charset="-120"/>
               </a:rPr>
-              <a:t>34 abiertos · 14 atrasados</a:t>
+              <a:t>26 abiertos · 22 atrasados</a:t>
             </a:r>
             <a:endParaRPr lang="en-US" sz="950" dirty="0"/>
           </a:p>
@@ -21970,7 +21904,7 @@
                 <a:ea typeface="Calibri" pitchFamily="34" charset="-122"/>
                 <a:cs typeface="Calibri" pitchFamily="34" charset="-120"/>
               </a:rPr>
-              <a:t>91% de cierre en P1 (34 abiertos), pero 346 DT abiertos entre P2, P3 y P4 sobre un total de 380.</a:t>
+              <a:t>93,2% de cierre en P1 (26 abiertos), pero 326 DT abiertos entre P2, P3 y P4 sobre un total de 352.</a:t>
             </a:r>
             <a:endParaRPr lang="en-US" sz="1150" dirty="0"/>
           </a:p>
@@ -22049,7 +21983,7 @@
                 <a:ea typeface="Calibri" pitchFamily="34" charset="-122"/>
                 <a:cs typeface="Calibri" pitchFamily="34" charset="-120"/>
               </a:rPr>
-              <a:t>148 DT con la fecha de compromiso vencida; mediana de 23 días y el más antiguo lleva 158. Los 211 abiertos sin fecha de compromiso no se cuentan como atrasados.</a:t>
+              <a:t>125 DT con la fecha de compromiso vencida; mediana de 28 días y el más antiguo lleva 165. Los 211 abiertos sin fecha de compromiso no se cuentan como atrasados.</a:t>
             </a:r>
             <a:endParaRPr lang="en-US" sz="1150" dirty="0"/>
           </a:p>
@@ -22111,7 +22045,7 @@
                 <a:ea typeface="Calibri" pitchFamily="34" charset="-122"/>
                 <a:cs typeface="Calibri" pitchFamily="34" charset="-120"/>
               </a:rPr>
-              <a:t>Caminatas: 99,5% y 98% de lo exigible (C1 y C2).  </a:t>
+              <a:t>Caminatas: 99,1% y 94,3% de lo exigible (C1 y C2).  </a:t>
             </a:r>
             <a:pPr indent="0" marL="0">
               <a:lnSpc>
@@ -22128,7 +22062,7 @@
                 <a:ea typeface="Calibri" pitchFamily="34" charset="-122"/>
                 <a:cs typeface="Calibri" pitchFamily="34" charset="-120"/>
               </a:rPr>
-              <a:t>Caminata 1: 211/212 exigibles, 1 con agenda vencida. Caminata 2: 194/198, con 20 agendadas en plazo y 0 sin programar.</a:t>
+              <a:t>Caminata 1: 215/217 exigibles, 2 con agenda vencida. Caminata 2: 198/210, con 8 agendadas en plazo y 0 sin programar.</a:t>
             </a:r>
             <a:endParaRPr lang="en-US" sz="1150" dirty="0"/>
           </a:p>
@@ -22207,7 +22141,7 @@
                 <a:ea typeface="Calibri" pitchFamily="34" charset="-122"/>
                 <a:cs typeface="Calibri" pitchFamily="34" charset="-120"/>
               </a:rPr>
-              <a:t>Avance promedio 93,8%: 182 subsistemas sobre 95% y solo 6 bajo 80%.</a:t>
+              <a:t>Avance promedio 94%: 185 subsistemas sobre 95% y solo 4 bajo 80%.</a:t>
             </a:r>
             <a:endParaRPr lang="en-US" sz="1150" dirty="0"/>
           </a:p>
@@ -22246,7 +22180,7 @@
                 <a:ea typeface="Calibri" pitchFamily="34" charset="-122"/>
                 <a:cs typeface="Calibri" pitchFamily="34" charset="-120"/>
               </a:rPr>
-              <a:t>Fuente: STATUS_SUBSISTEMAS_TALABRE + Detalle_de_Terminaciones · 218 subsistemas · 2.062 DT · Atrasos al 24-08-2026</a:t>
+              <a:t>Fuente: STATUS_SUBSISTEMAS_TALABRE + Detalle_de_Terminaciones · 218 subsistemas · 2.078 DT · Atrasos al 31-08-2026</a:t>
             </a:r>
             <a:endParaRPr lang="en-US" sz="850" dirty="0"/>
           </a:p>
@@ -22497,7 +22431,7 @@
                 <a:ea typeface="Calibri" pitchFamily="34" charset="-122"/>
                 <a:cs typeface="Calibri" pitchFamily="34" charset="-120"/>
               </a:rPr>
-              <a:t>Caminata 2: 98% de lo exigible (194/198) — se descuentan 20 agendadas a fecha futura, que no son incumplimiento al corte. Talabre mide la carpeta como % de avance (PEC), no como estado de aprobación.</a:t>
+              <a:t>Caminata 2: 94,3% de lo exigible (198/210) — se descuentan 8 agendadas a fecha futura, que no son incumplimiento al corte. Talabre mide la carpeta como % de avance (PEC), no como estado de aprobación.</a:t>
             </a:r>
             <a:endParaRPr lang="en-US" sz="1350" dirty="0"/>
           </a:p>
@@ -22568,7 +22502,7 @@
                 <a:ea typeface="Calibri" pitchFamily="34" charset="-122"/>
                 <a:cs typeface="Calibri" pitchFamily="34" charset="-120"/>
               </a:rPr>
-              <a:t>Fuente: STATUS_SUBSISTEMAS_TALABRE + Detalle_de_Terminaciones · 218 subsistemas · 2.062 DT · Atrasos al 24-08-2026</a:t>
+              <a:t>Fuente: STATUS_SUBSISTEMAS_TALABRE + Detalle_de_Terminaciones · 218 subsistemas · 2.078 DT · Atrasos al 31-08-2026</a:t>
             </a:r>
             <a:endParaRPr lang="en-US" sz="850" dirty="0"/>
           </a:p>
@@ -22819,7 +22753,7 @@
                 <a:ea typeface="Calibri" pitchFamily="34" charset="-122"/>
                 <a:cs typeface="Calibri" pitchFamily="34" charset="-120"/>
               </a:rPr>
-              <a:t>2.062 DT levantados; 81,6% cerrados. Atrasado = DT abierto cuya fecha de compromiso de cierre ya venció al 24-08-2026.</a:t>
+              <a:t>2.078 DT levantados; 83,1% cerrados. Atrasado = DT abierto cuya fecha de compromiso de cierre ya venció al 31-08-2026.</a:t>
             </a:r>
             <a:endParaRPr lang="en-US" sz="1350" dirty="0"/>
           </a:p>
@@ -22974,7 +22908,7 @@
                 <a:ea typeface="Calibri" pitchFamily="34" charset="-122"/>
                 <a:cs typeface="Calibri" pitchFamily="34" charset="-120"/>
               </a:rPr>
-              <a:t>342/376</a:t>
+              <a:t>354/380</a:t>
             </a:r>
             <a:endParaRPr lang="en-US" sz="1050" dirty="0"/>
           </a:p>
@@ -23013,7 +22947,7 @@
                 <a:ea typeface="Calibri" pitchFamily="34" charset="-122"/>
                 <a:cs typeface="Calibri" pitchFamily="34" charset="-120"/>
               </a:rPr>
-              <a:t>91%</a:t>
+              <a:t>93,2%</a:t>
             </a:r>
             <a:endParaRPr lang="en-US" sz="1100" dirty="0"/>
           </a:p>
@@ -23048,7 +22982,7 @@
         <p:spPr>
           <a:xfrm>
             <a:off x="7936992" y="2688336"/>
-            <a:ext cx="3245206" cy="118872"/>
+            <a:ext cx="3323661" cy="118872"/>
           </a:xfrm>
           <a:prstGeom prst="rect">
             <a:avLst/>
@@ -23131,7 +23065,7 @@
                 <a:ea typeface="Calibri" pitchFamily="34" charset="-122"/>
                 <a:cs typeface="Calibri" pitchFamily="34" charset="-120"/>
               </a:rPr>
-              <a:t>1.256/1.388</a:t>
+              <a:t>1.288/1.400</a:t>
             </a:r>
             <a:endParaRPr lang="en-US" sz="1050" dirty="0"/>
           </a:p>
@@ -23170,7 +23104,7 @@
                 <a:ea typeface="Calibri" pitchFamily="34" charset="-122"/>
                 <a:cs typeface="Calibri" pitchFamily="34" charset="-120"/>
               </a:rPr>
-              <a:t>90,5%</a:t>
+              <a:t>92%</a:t>
             </a:r>
             <a:endParaRPr lang="en-US" sz="1100" dirty="0"/>
           </a:p>
@@ -23205,7 +23139,7 @@
         <p:spPr>
           <a:xfrm>
             <a:off x="7936992" y="3200400"/>
-            <a:ext cx="3227375" cy="118872"/>
+            <a:ext cx="3280867" cy="118872"/>
           </a:xfrm>
           <a:prstGeom prst="rect">
             <a:avLst/>
@@ -23744,7 +23678,7 @@
                 <a:ea typeface="Calibri" pitchFamily="34" charset="-122"/>
                 <a:cs typeface="Calibri" pitchFamily="34" charset="-120"/>
               </a:rPr>
-              <a:t>Mediana de 23 días vencidos; el más antiguo lleva 158. 90 entre 1-30 días, 48 entre 31-90 días, 10 entre 91-180 días.</a:t>
+              <a:t>Mediana de 28 días vencidos; el más antiguo lleva 165. 69 entre 1-30 días, 46 entre 31-90 días, 10 entre 91-180 días.</a:t>
             </a:r>
             <a:endParaRPr lang="en-US" sz="1150" dirty="0"/>
           </a:p>
@@ -23783,7 +23717,7 @@
                 <a:ea typeface="Calibri" pitchFamily="34" charset="-122"/>
                 <a:cs typeface="Calibri" pitchFamily="34" charset="-120"/>
               </a:rPr>
-              <a:t>Fuente: STATUS_SUBSISTEMAS_TALABRE + Detalle_de_Terminaciones · 218 subsistemas · 2.062 DT · Atrasos al 24-08-2026</a:t>
+              <a:t>Fuente: STATUS_SUBSISTEMAS_TALABRE + Detalle_de_Terminaciones · 218 subsistemas · 2.078 DT · Atrasos al 31-08-2026</a:t>
             </a:r>
             <a:endParaRPr lang="en-US" sz="850" dirty="0"/>
           </a:p>

--- a/panel_control_TOP_P1/Panel_Control_TOP_P1.pptx
+++ b/panel_control_TOP_P1/Panel_Control_TOP_P1.pptx
@@ -233,7 +233,7 @@
                 <c:formatCode>General</c:formatCode>
                 <c:ptCount val="2"/>
                 <c:pt idx="0">
-                  <c:v>49</c:v>
+                  <c:v>52</c:v>
                 </c:pt>
                 <c:pt idx="1">
                   <c:v>12</c:v>
@@ -311,7 +311,7 @@
                 <c:formatCode>General</c:formatCode>
                 <c:ptCount val="2"/>
                 <c:pt idx="0">
-                  <c:v>31</c:v>
+                  <c:v>28</c:v>
                 </c:pt>
                 <c:pt idx="1">
                   <c:v>3</c:v>
@@ -687,13 +687,13 @@
               <c:numCache>
                 <c:ptCount val="3"/>
                 <c:pt idx="0">
-                  <c:v>1156</c:v>
+                  <c:v>1189</c:v>
                 </c:pt>
                 <c:pt idx="1">
-                  <c:v>825</c:v>
+                  <c:v>779</c:v>
                 </c:pt>
                 <c:pt idx="2">
-                  <c:v>7</c:v>
+                  <c:v>20</c:v>
                 </c:pt>
               </c:numCache>
             </c:numRef>
@@ -831,13 +831,13 @@
                     <c:v>Obras Civiles</c:v>
                   </c:pt>
                   <c:pt idx="3">
+                    <c:v>Estructura</c:v>
+                  </c:pt>
+                  <c:pt idx="4">
                     <c:v>Mecánica</c:v>
                   </c:pt>
-                  <c:pt idx="4">
+                  <c:pt idx="5">
                     <c:v>Instr. y Control</c:v>
-                  </c:pt>
-                  <c:pt idx="5">
-                    <c:v>Estructura</c:v>
                   </c:pt>
                 </c:lvl>
               </c:multiLvlStrCache>
@@ -850,19 +850,19 @@
                 <c:formatCode>General</c:formatCode>
                 <c:ptCount val="6"/>
                 <c:pt idx="0">
-                  <c:v>6</c:v>
+                  <c:v>119</c:v>
                 </c:pt>
                 <c:pt idx="1">
-                  <c:v>2</c:v>
+                  <c:v>35</c:v>
                 </c:pt>
                 <c:pt idx="2">
-                  <c:v/>
+                  <c:v>13</c:v>
                 </c:pt>
                 <c:pt idx="3">
-                  <c:v/>
+                  <c:v>7</c:v>
                 </c:pt>
                 <c:pt idx="4">
-                  <c:v/>
+                  <c:v>10</c:v>
                 </c:pt>
                 <c:pt idx="5">
                   <c:v/>
@@ -933,13 +933,13 @@
                     <c:v>Obras Civiles</c:v>
                   </c:pt>
                   <c:pt idx="3">
+                    <c:v>Estructura</c:v>
+                  </c:pt>
+                  <c:pt idx="4">
                     <c:v>Mecánica</c:v>
                   </c:pt>
-                  <c:pt idx="4">
+                  <c:pt idx="5">
                     <c:v>Instr. y Control</c:v>
-                  </c:pt>
-                  <c:pt idx="5">
-                    <c:v>Estructura</c:v>
                   </c:pt>
                 </c:lvl>
               </c:multiLvlStrCache>
@@ -952,22 +952,22 @@
                 <c:formatCode>General</c:formatCode>
                 <c:ptCount val="6"/>
                 <c:pt idx="0">
-                  <c:v>160</c:v>
+                  <c:v>52</c:v>
                 </c:pt>
                 <c:pt idx="1">
                   <c:v>91</c:v>
                 </c:pt>
                 <c:pt idx="2">
-                  <c:v>20</c:v>
+                  <c:v>8</c:v>
                 </c:pt>
                 <c:pt idx="3">
-                  <c:v>18</c:v>
+                  <c:v>7</c:v>
                 </c:pt>
                 <c:pt idx="4">
-                  <c:v>15</c:v>
+                  <c:v>1</c:v>
                 </c:pt>
                 <c:pt idx="5">
-                  <c:v>12</c:v>
+                  <c:v>8</c:v>
                 </c:pt>
               </c:numCache>
             </c:numRef>
@@ -1340,13 +1340,13 @@
               <c:numCache>
                 <c:ptCount val="3"/>
                 <c:pt idx="0">
-                  <c:v>714</c:v>
+                  <c:v>794</c:v>
                 </c:pt>
                 <c:pt idx="1">
-                  <c:v>8</c:v>
+                  <c:v>184</c:v>
                 </c:pt>
                 <c:pt idx="2">
-                  <c:v>316</c:v>
+                  <c:v>167</c:v>
                 </c:pt>
               </c:numCache>
             </c:numRef>
@@ -1515,10 +1515,10 @@
                   <c:v/>
                 </c:pt>
                 <c:pt idx="1">
-                  <c:v>19</c:v>
+                  <c:v>20</c:v>
                 </c:pt>
                 <c:pt idx="2">
-                  <c:v>22</c:v>
+                  <c:v>23</c:v>
                 </c:pt>
                 <c:pt idx="3">
                   <c:v>3</c:v>
@@ -1527,7 +1527,7 @@
                   <c:v>14</c:v>
                 </c:pt>
                 <c:pt idx="5">
-                  <c:v>10</c:v>
+                  <c:v>15</c:v>
                 </c:pt>
                 <c:pt idx="6">
                   <c:v>110</c:v>
@@ -1632,13 +1632,13 @@
                 <c:formatCode>General</c:formatCode>
                 <c:ptCount val="9"/>
                 <c:pt idx="0">
-                  <c:v/>
+                  <c:v>3</c:v>
                 </c:pt>
                 <c:pt idx="1">
                   <c:v/>
                 </c:pt>
                 <c:pt idx="2">
-                  <c:v>1</c:v>
+                  <c:v>2</c:v>
                 </c:pt>
                 <c:pt idx="3">
                   <c:v/>
@@ -1647,7 +1647,7 @@
                   <c:v/>
                 </c:pt>
                 <c:pt idx="5">
-                  <c:v>6</c:v>
+                  <c:v>7</c:v>
                 </c:pt>
                 <c:pt idx="6">
                   <c:v/>
@@ -1668,126 +1668,6 @@
           <c:tx>
             <c:strRef>
               <c:f>Sheet1!$D$1</c:f>
-              <c:strCache>
-                <c:ptCount val="1"/>
-                <c:pt idx="0">
-                  <c:v>Agenda vencida</c:v>
-                </c:pt>
-              </c:strCache>
-            </c:strRef>
-          </c:tx>
-          <c:spPr>
-            <a:solidFill>
-              <a:srgbClr val="9A6B0F"/>
-            </a:solidFill>
-            <a:effectLst/>
-          </c:spPr>
-          <c:invertIfNegative val="0"/>
-          <c:dLbls>
-            <c:numFmt formatCode="#,##0" sourceLinked="0"/>
-            <c:txPr>
-              <a:bodyPr/>
-              <a:lstStyle/>
-              <a:p>
-                <a:pPr>
-                  <a:defRPr b="1" i="0" strike="noStrike" sz="1100" u="none">
-                    <a:solidFill>
-                      <a:srgbClr val="FFFFFF"/>
-                    </a:solidFill>
-                    <a:latin typeface="Calibri"/>
-                  </a:defRPr>
-                </a:pPr>
-              </a:p>
-            </c:txPr>
-            <c:dLblPos val="ctr"/>
-            <c:showLegendKey val="0"/>
-            <c:showVal val="1"/>
-            <c:showCatName val="0"/>
-            <c:showSerName val="0"/>
-            <c:showPercent val="0"/>
-            <c:showBubbleSize val="0"/>
-            <c:showLeaderLines val="0"/>
-          </c:dLbls>
-          <c:cat>
-            <c:multiLvlStrRef>
-              <c:f>Sheet1!$A$2:$A$10</c:f>
-              <c:multiLvlStrCache>
-                <c:ptCount val="9"/>
-                <c:lvl>
-                  <c:pt idx="0">
-                    <c:v>CERRO VERDE/PS2</c:v>
-                  </c:pt>
-                  <c:pt idx="1">
-                    <c:v>EBMP</c:v>
-                  </c:pt>
-                  <c:pt idx="2">
-                    <c:v>EBMS</c:v>
-                  </c:pt>
-                  <c:pt idx="3">
-                    <c:v>IMPULSIÓN ADUCCIÓN</c:v>
-                  </c:pt>
-                  <c:pt idx="4">
-                    <c:v>LÍNEAS IMPULSIÓN</c:v>
-                  </c:pt>
-                  <c:pt idx="5">
-                    <c:v>PISCINAS Y SEDIMENTADOR</c:v>
-                  </c:pt>
-                  <c:pt idx="6">
-                    <c:v>POZOS</c:v>
-                  </c:pt>
-                  <c:pt idx="7">
-                    <c:v>PQS</c:v>
-                  </c:pt>
-                  <c:pt idx="8">
-                    <c:v>SALA GAR</c:v>
-                  </c:pt>
-                </c:lvl>
-              </c:multiLvlStrCache>
-            </c:multiLvlStrRef>
-          </c:cat>
-          <c:val>
-            <c:numRef>
-              <c:f>Sheet1!$D$2:$D$10</c:f>
-              <c:numCache>
-                <c:formatCode>General</c:formatCode>
-                <c:ptCount val="9"/>
-                <c:pt idx="0">
-                  <c:v>3</c:v>
-                </c:pt>
-                <c:pt idx="1">
-                  <c:v>1</c:v>
-                </c:pt>
-                <c:pt idx="2">
-                  <c:v>2</c:v>
-                </c:pt>
-                <c:pt idx="3">
-                  <c:v/>
-                </c:pt>
-                <c:pt idx="4">
-                  <c:v/>
-                </c:pt>
-                <c:pt idx="5">
-                  <c:v>6</c:v>
-                </c:pt>
-                <c:pt idx="6">
-                  <c:v/>
-                </c:pt>
-                <c:pt idx="7">
-                  <c:v/>
-                </c:pt>
-                <c:pt idx="8">
-                  <c:v/>
-                </c:pt>
-              </c:numCache>
-            </c:numRef>
-          </c:val>
-        </c:ser>
-        <c:ser>
-          <c:idx val="3"/>
-          <c:order val="3"/>
-          <c:tx>
-            <c:strRef>
-              <c:f>Sheet1!$E$1</c:f>
               <c:strCache>
                 <c:ptCount val="1"/>
                 <c:pt idx="0">
@@ -1867,7 +1747,7 @@
           </c:cat>
           <c:val>
             <c:numRef>
-              <c:f>Sheet1!$E$2:$E$10</c:f>
+              <c:f>Sheet1!$D$2:$D$10</c:f>
               <c:numCache>
                 <c:formatCode>General</c:formatCode>
                 <c:ptCount val="9"/>
@@ -2736,19 +2616,19 @@
                 <c:formatCode>General</c:formatCode>
                 <c:ptCount val="5"/>
                 <c:pt idx="0">
-                  <c:v>9</c:v>
+                  <c:v>5</c:v>
                 </c:pt>
                 <c:pt idx="1">
                   <c:v>61</c:v>
                 </c:pt>
                 <c:pt idx="2">
-                  <c:v>39</c:v>
+                  <c:v>23</c:v>
                 </c:pt>
                 <c:pt idx="3">
                   <c:v>12</c:v>
                 </c:pt>
                 <c:pt idx="4">
-                  <c:v>4</c:v>
+                  <c:v/>
                 </c:pt>
               </c:numCache>
             </c:numRef>
@@ -2832,19 +2712,19 @@
                 <c:formatCode>General</c:formatCode>
                 <c:ptCount val="5"/>
                 <c:pt idx="0">
-                  <c:v>140</c:v>
+                  <c:v>133</c:v>
                 </c:pt>
                 <c:pt idx="1">
-                  <c:v>60</c:v>
+                  <c:v>71</c:v>
                 </c:pt>
                 <c:pt idx="2">
-                  <c:v>11</c:v>
+                  <c:v>9</c:v>
                 </c:pt>
                 <c:pt idx="3">
                   <c:v>13</c:v>
                 </c:pt>
                 <c:pt idx="4">
-                  <c:v>3</c:v>
+                  <c:v>5</c:v>
                 </c:pt>
               </c:numCache>
             </c:numRef>
@@ -3126,7 +3006,7 @@
                   <c:v>35</c:v>
                 </c:pt>
                 <c:pt idx="1">
-                  <c:v>35</c:v>
+                  <c:v>37</c:v>
                 </c:pt>
                 <c:pt idx="2">
                   <c:v>19</c:v>
@@ -3306,7 +3186,7 @@
                   <c:v/>
                 </c:pt>
                 <c:pt idx="1">
-                  <c:v>1</c:v>
+                  <c:v/>
                 </c:pt>
                 <c:pt idx="2">
                   <c:v/>
@@ -3591,7 +3471,7 @@
                 <c:formatCode>General</c:formatCode>
                 <c:ptCount val="4"/>
                 <c:pt idx="0">
-                  <c:v>14</c:v>
+                  <c:v>9</c:v>
                 </c:pt>
                 <c:pt idx="1">
                   <c:v/>
@@ -3771,7 +3651,7 @@
                 <c:formatCode>General</c:formatCode>
                 <c:ptCount val="4"/>
                 <c:pt idx="0">
-                  <c:v>4</c:v>
+                  <c:v>9</c:v>
                 </c:pt>
                 <c:pt idx="1">
                   <c:v>7</c:v>
@@ -3864,7 +3744,7 @@
                   <c:v>17</c:v>
                 </c:pt>
                 <c:pt idx="1">
-                  <c:v>68</c:v>
+                  <c:v>69</c:v>
                 </c:pt>
                 <c:pt idx="2">
                   <c:v>20</c:v>
@@ -4155,19 +4035,19 @@
                 <c:formatCode>General</c:formatCode>
                 <c:ptCount val="6"/>
                 <c:pt idx="0">
-                  <c:v>219</c:v>
+                  <c:v>206</c:v>
                 </c:pt>
                 <c:pt idx="1">
-                  <c:v>173</c:v>
+                  <c:v>171</c:v>
                 </c:pt>
                 <c:pt idx="2">
-                  <c:v>153</c:v>
+                  <c:v>149</c:v>
                 </c:pt>
                 <c:pt idx="3">
-                  <c:v>110</c:v>
+                  <c:v>104</c:v>
                 </c:pt>
                 <c:pt idx="4">
-                  <c:v>17</c:v>
+                  <c:v>15</c:v>
                 </c:pt>
                 <c:pt idx="5">
                   <c:v/>
@@ -4257,19 +4137,19 @@
                 <c:formatCode>General</c:formatCode>
                 <c:ptCount val="6"/>
                 <c:pt idx="0">
-                  <c:v>30</c:v>
+                  <c:v>26</c:v>
                 </c:pt>
                 <c:pt idx="1">
-                  <c:v>42</c:v>
+                  <c:v>34</c:v>
                 </c:pt>
                 <c:pt idx="2">
-                  <c:v>28</c:v>
+                  <c:v>25</c:v>
                 </c:pt>
                 <c:pt idx="3">
-                  <c:v>14</c:v>
+                  <c:v>12</c:v>
                 </c:pt>
                 <c:pt idx="4">
-                  <c:v>19</c:v>
+                  <c:v>17</c:v>
                 </c:pt>
                 <c:pt idx="5">
                   <c:v>20</c:v>
@@ -6907,7 +6787,7 @@
                 <a:ea typeface="Cambria" pitchFamily="34" charset="-122"/>
                 <a:cs typeface="Cambria" pitchFamily="34" charset="-120"/>
               </a:rPr>
-              <a:t>61,3%</a:t>
+              <a:t>65%</a:t>
             </a:r>
             <a:endParaRPr lang="en-US" sz="3400" dirty="0"/>
           </a:p>
@@ -7063,7 +6943,7 @@
                 <a:ea typeface="Cambria" pitchFamily="34" charset="-122"/>
                 <a:cs typeface="Cambria" pitchFamily="34" charset="-120"/>
               </a:rPr>
-              <a:t>45,3%</a:t>
+              <a:t>49,5%</a:t>
             </a:r>
             <a:endParaRPr lang="en-US" sz="3400" dirty="0"/>
           </a:p>
@@ -7141,7 +7021,7 @@
                 <a:ea typeface="Cambria" pitchFamily="34" charset="-122"/>
                 <a:cs typeface="Cambria" pitchFamily="34" charset="-120"/>
               </a:rPr>
-              <a:t>68,8%</a:t>
+              <a:t>69,3%</a:t>
             </a:r>
             <a:endParaRPr lang="en-US" sz="3400" dirty="0"/>
           </a:p>
@@ -7219,7 +7099,7 @@
                 <a:ea typeface="Calibri" pitchFamily="34" charset="-122"/>
                 <a:cs typeface="Calibri" pitchFamily="34" charset="-120"/>
               </a:rPr>
-              <a:t>Corte: 25-08-2026</a:t>
+              <a:t>Corte: 01-09-2026</a:t>
             </a:r>
             <a:endParaRPr lang="en-US" sz="1100" dirty="0"/>
           </a:p>
@@ -7258,7 +7138,7 @@
                 <a:ea typeface="Calibri" pitchFamily="34" charset="-122"/>
                 <a:cs typeface="Calibri" pitchFamily="34" charset="-120"/>
               </a:rPr>
-              <a:t>Fuente: REPORTE_GERENCIAL + Listado de Puntos Punch Consolidado · Corte 25-08-2026 · Atrasos al 31-08-2026</a:t>
+              <a:t>Fuente: REPORTE_GERENCIAL + Listado de Puntos Punch Consolidado · Corte 01-09-2026 · Atrasos al 07-09-2026</a:t>
             </a:r>
             <a:endParaRPr lang="en-US" sz="850" dirty="0"/>
           </a:p>
@@ -7551,7 +7431,7 @@
                 <a:ea typeface="Calibri" pitchFamily="34" charset="-122"/>
                 <a:cs typeface="Calibri" pitchFamily="34" charset="-120"/>
               </a:rPr>
-              <a:t>Recuperar los 125 DT atrasados</a:t>
+              <a:t>Recuperar los 101 DT atrasados</a:t>
             </a:r>
             <a:endParaRPr lang="en-US" sz="1350" dirty="0"/>
           </a:p>
@@ -7593,7 +7473,7 @@
                 <a:ea typeface="Calibri" pitchFamily="34" charset="-122"/>
                 <a:cs typeface="Calibri" pitchFamily="34" charset="-120"/>
               </a:rPr>
-              <a:t>100 son P2 y 22 son P1. La mediana de atraso es de 28 días y 10 superan los 90 días.</a:t>
+              <a:t>81 son P2 y 17 son P1. La mediana de atraso es de 33 días y 9 superan los 90 días.</a:t>
             </a:r>
             <a:endParaRPr lang="en-US" sz="1100" dirty="0"/>
           </a:p>
@@ -7693,7 +7573,7 @@
                 <a:ea typeface="Calibri" pitchFamily="34" charset="-122"/>
                 <a:cs typeface="Calibri" pitchFamily="34" charset="-120"/>
               </a:rPr>
-              <a:t>Ejecutar la caminata 2 en CERRO VERDE/PS2 y PISCINAS Y SEDIMENTADOR</a:t>
+              <a:t>Ejecutar la caminata 2 en CERRO VERDE/PS2</a:t>
             </a:r>
             <a:endParaRPr lang="en-US" sz="1350" dirty="0"/>
           </a:p>
@@ -7735,7 +7615,7 @@
                 <a:ea typeface="Calibri" pitchFamily="34" charset="-122"/>
                 <a:cs typeface="Calibri" pitchFamily="34" charset="-120"/>
               </a:rPr>
-              <a:t>CERRO VERDE/PS2: 0/3 (0%) · PISCINAS Y SEDIMENTADOR: 10/22 (45,5%). A nivel proyecto la caminata 2 va 90,8% con 8 ya agendadas.</a:t>
+              <a:t>CERRO VERDE/PS2: 0/3 (0%). A nivel proyecto la caminata 2 va 94% con 13 ya agendadas.</a:t>
             </a:r>
             <a:endParaRPr lang="en-US" sz="1100" dirty="0"/>
           </a:p>
@@ -8019,7 +7899,7 @@
                 <a:ea typeface="Calibri" pitchFamily="34" charset="-122"/>
                 <a:cs typeface="Calibri" pitchFamily="34" charset="-120"/>
               </a:rPr>
-              <a:t>Concentra 110 de los 352 DT abiertos (31,3%), con 4 atrasados. Además hay 4 carpetas bajo 80% de avance que conviene cerrar en paralelo.</a:t>
+              <a:t>Concentra 110 de los 332 DT abiertos (33,1%), con 4 atrasados. Además hay 4 carpetas bajo 80% de avance que conviene cerrar en paralelo.</a:t>
             </a:r>
             <a:endParaRPr lang="en-US" sz="1100" dirty="0"/>
           </a:p>
@@ -8058,7 +7938,7 @@
                 <a:ea typeface="Calibri" pitchFamily="34" charset="-122"/>
                 <a:cs typeface="Calibri" pitchFamily="34" charset="-120"/>
               </a:rPr>
-              <a:t>Fuente: STATUS_SUBSISTEMAS_TALABRE + Detalle_de_Terminaciones · 218 subsistemas · 2.078 DT · Atrasos al 31-08-2026</a:t>
+              <a:t>Fuente: STATUS_SUBSISTEMAS_TALABRE + Detalle_de_Terminaciones · 218 subsistemas · 2.101 DT · Atrasos al 07-09-2026</a:t>
             </a:r>
             <a:endParaRPr lang="en-US" sz="850" dirty="0"/>
           </a:p>
@@ -8411,7 +8291,7 @@
                 <a:ea typeface="Calibri" pitchFamily="34" charset="-122"/>
                 <a:cs typeface="Calibri" pitchFamily="34" charset="-120"/>
               </a:rPr>
-              <a:t>135 subsistemas en 4 áreas (2000 · 3000 · 4000 · 8000) · 2.963 detalles de terminación levantados.</a:t>
+              <a:t>136 subsistemas en 4 áreas (2000 · 3000 · 4000 · 8000) · 2.963 detalles de terminación levantados.</a:t>
             </a:r>
             <a:endParaRPr lang="en-US" sz="1350" dirty="0"/>
           </a:p>
@@ -8548,7 +8428,7 @@
                 <a:ea typeface="Cambria" pitchFamily="34" charset="-122"/>
                 <a:cs typeface="Cambria" pitchFamily="34" charset="-120"/>
               </a:rPr>
-              <a:t>66,7%</a:t>
+              <a:t>67,6%</a:t>
             </a:r>
             <a:endParaRPr lang="en-US" sz="3400" dirty="0"/>
           </a:p>
@@ -8626,7 +8506,7 @@
                 <a:ea typeface="Cambria" pitchFamily="34" charset="-122"/>
                 <a:cs typeface="Cambria" pitchFamily="34" charset="-120"/>
               </a:rPr>
-              <a:t>20,7%</a:t>
+              <a:t>20,6%</a:t>
             </a:r>
             <a:endParaRPr lang="en-US" sz="3400" dirty="0"/>
           </a:p>
@@ -8704,7 +8584,7 @@
                 <a:ea typeface="Cambria" pitchFamily="34" charset="-122"/>
                 <a:cs typeface="Cambria" pitchFamily="34" charset="-120"/>
               </a:rPr>
-              <a:t>58,1%</a:t>
+              <a:t>59,8%</a:t>
             </a:r>
             <a:endParaRPr lang="en-US" sz="3400" dirty="0"/>
           </a:p>
@@ -8782,7 +8662,7 @@
                 <a:ea typeface="Calibri" pitchFamily="34" charset="-122"/>
                 <a:cs typeface="Calibri" pitchFamily="34" charset="-120"/>
               </a:rPr>
-              <a:t>Corte: 24-08-2026   ·   Corte anterior: 17-08-2026</a:t>
+              <a:t>Corte: 07-09-2026   ·   Corte anterior: 24-08-2026</a:t>
             </a:r>
             <a:endParaRPr lang="en-US" sz="1100" dirty="0"/>
           </a:p>
@@ -8821,7 +8701,7 @@
                 <a:ea typeface="Calibri" pitchFamily="34" charset="-122"/>
                 <a:cs typeface="Calibri" pitchFamily="34" charset="-120"/>
               </a:rPr>
-              <a:t>Fuente: Estatus_Resumen_General_QAQC.xlsx · Corte 24-08-2026 · Áreas 2000/3000/4000/8000</a:t>
+              <a:t>Fuente: Estatus_Resumen_General_QAQC.xlsx · Corte 07-09-2026 · Áreas 2000/3000/4000/8000</a:t>
             </a:r>
             <a:endParaRPr lang="en-US" sz="850" dirty="0"/>
           </a:p>
@@ -9126,7 +9006,7 @@
                 <a:ea typeface="Calibri" pitchFamily="34" charset="-122"/>
                 <a:cs typeface="Calibri" pitchFamily="34" charset="-120"/>
               </a:rPr>
-              <a:t>135/135</a:t>
+              <a:t>136/136</a:t>
             </a:r>
             <a:endParaRPr lang="en-US" sz="1400" dirty="0"/>
           </a:p>
@@ -9297,7 +9177,7 @@
                 <a:ea typeface="Cambria" pitchFamily="34" charset="-122"/>
                 <a:cs typeface="Cambria" pitchFamily="34" charset="-120"/>
               </a:rPr>
-              <a:t>66,7%</a:t>
+              <a:t>67,6%</a:t>
             </a:r>
             <a:endParaRPr lang="en-US" sz="4000" dirty="0"/>
           </a:p>
@@ -9336,7 +9216,7 @@
                 <a:ea typeface="Calibri" pitchFamily="34" charset="-122"/>
                 <a:cs typeface="Calibri" pitchFamily="34" charset="-120"/>
               </a:rPr>
-              <a:t>90/135</a:t>
+              <a:t>92/136</a:t>
             </a:r>
             <a:endParaRPr lang="en-US" sz="1400" dirty="0"/>
           </a:p>
@@ -9414,7 +9294,7 @@
                 <a:ea typeface="Calibri" pitchFamily="34" charset="-122"/>
                 <a:cs typeface="Calibri" pitchFamily="34" charset="-120"/>
               </a:rPr>
-              <a:t>44 próximas · 1 por programar</a:t>
+              <a:t>44 próximas · 0 por programar</a:t>
             </a:r>
             <a:endParaRPr lang="en-US" sz="950" dirty="0"/>
           </a:p>
@@ -9447,13 +9327,13 @@
             <a:r>
               <a:rPr lang="en-US" sz="900" b="1" dirty="0">
                 <a:solidFill>
-                  <a:srgbClr val="56606E"/>
-                </a:solidFill>
-                <a:latin typeface="Calibri" pitchFamily="34" charset="0"/>
-                <a:ea typeface="Calibri" pitchFamily="34" charset="-122"/>
-                <a:cs typeface="Calibri" pitchFamily="34" charset="-120"/>
-              </a:rPr>
-              <a:t>= sin cambio vs. corte anterior</a:t>
+                  <a:srgbClr val="1F7A44"/>
+                </a:solidFill>
+                <a:latin typeface="Calibri" pitchFamily="34" charset="0"/>
+                <a:ea typeface="Calibri" pitchFamily="34" charset="-122"/>
+                <a:cs typeface="Calibri" pitchFamily="34" charset="-120"/>
+              </a:rPr>
+              <a:t>▲ +2 vs. corte anterior</a:t>
             </a:r>
             <a:endParaRPr lang="en-US" sz="900" dirty="0"/>
           </a:p>
@@ -9546,7 +9426,7 @@
                 <a:ea typeface="Cambria" pitchFamily="34" charset="-122"/>
                 <a:cs typeface="Cambria" pitchFamily="34" charset="-120"/>
               </a:rPr>
-              <a:t>20,7%</a:t>
+              <a:t>20,6%</a:t>
             </a:r>
             <a:endParaRPr lang="en-US" sz="4000" dirty="0"/>
           </a:p>
@@ -9585,7 +9465,7 @@
                 <a:ea typeface="Calibri" pitchFamily="34" charset="-122"/>
                 <a:cs typeface="Calibri" pitchFamily="34" charset="-120"/>
               </a:rPr>
-              <a:t>28/135</a:t>
+              <a:t>28/136</a:t>
             </a:r>
             <a:endParaRPr lang="en-US" sz="1400" dirty="0"/>
           </a:p>
@@ -9663,7 +9543,7 @@
                 <a:ea typeface="Calibri" pitchFamily="34" charset="-122"/>
                 <a:cs typeface="Calibri" pitchFamily="34" charset="-120"/>
               </a:rPr>
-              <a:t>0 aprobadas · 12 rechazadas · 15 en revisión · 1 observadas</a:t>
+              <a:t>0 aprobadas · 17 rechazadas · 10 en revisión · 1 observadas</a:t>
             </a:r>
             <a:endParaRPr lang="en-US" sz="950" dirty="0"/>
           </a:p>
@@ -9795,7 +9675,7 @@
                 <a:ea typeface="Cambria" pitchFamily="34" charset="-122"/>
                 <a:cs typeface="Cambria" pitchFamily="34" charset="-120"/>
               </a:rPr>
-              <a:t>58,1%</a:t>
+              <a:t>59,8%</a:t>
             </a:r>
             <a:endParaRPr lang="en-US" sz="4000" dirty="0"/>
           </a:p>
@@ -9834,7 +9714,7 @@
                 <a:ea typeface="Calibri" pitchFamily="34" charset="-122"/>
                 <a:cs typeface="Calibri" pitchFamily="34" charset="-120"/>
               </a:rPr>
-              <a:t>1.156/1.988</a:t>
+              <a:t>1.189/1.988</a:t>
             </a:r>
             <a:endParaRPr lang="en-US" sz="1400" dirty="0"/>
           </a:p>
@@ -9912,7 +9792,7 @@
                 <a:ea typeface="Calibri" pitchFamily="34" charset="-122"/>
                 <a:cs typeface="Calibri" pitchFamily="34" charset="-120"/>
               </a:rPr>
-              <a:t>825 abiertos · 672 vencidos · 7 en trámite</a:t>
+              <a:t>779 abiertos · 645 vencidos · 20 en trámite</a:t>
             </a:r>
             <a:endParaRPr lang="en-US" sz="950" dirty="0"/>
           </a:p>
@@ -9951,7 +9831,7 @@
                 <a:ea typeface="Calibri" pitchFamily="34" charset="-122"/>
                 <a:cs typeface="Calibri" pitchFamily="34" charset="-120"/>
               </a:rPr>
-              <a:t>▲ +2 vs. corte anterior</a:t>
+              <a:t>▲ +33 vs. corte anterior</a:t>
             </a:r>
             <a:endParaRPr lang="en-US" sz="900" dirty="0"/>
           </a:p>
@@ -10074,7 +9954,7 @@
                 <a:ea typeface="Calibri" pitchFamily="34" charset="-122"/>
                 <a:cs typeface="Calibri" pitchFamily="34" charset="-120"/>
               </a:rPr>
-              <a:t>Avance de caminatas al 100%.  </a:t>
+              <a:t>Se destrabó la programación de caminatas, pero no la ejecución.  </a:t>
             </a:r>
             <a:pPr indent="0" marL="0">
               <a:lnSpc>
@@ -10091,7 +9971,7 @@
                 <a:ea typeface="Calibri" pitchFamily="34" charset="-122"/>
                 <a:cs typeface="Calibri" pitchFamily="34" charset="-120"/>
               </a:rPr>
-              <a:t>90 de 135 realizadas (66,7%); 44 próximas y 1 por programar.</a:t>
+              <a:t>Los subsistemas «por programar» bajaron de 1 a 0, mientras las realizadas al 100% se mantienen en 92 (67,6%).</a:t>
             </a:r>
             <a:endParaRPr lang="en-US" sz="1250" dirty="0"/>
           </a:p>
@@ -10153,7 +10033,7 @@
                 <a:ea typeface="Calibri" pitchFamily="34" charset="-122"/>
                 <a:cs typeface="Calibri" pitchFamily="34" charset="-120"/>
               </a:rPr>
-              <a:t>Las carpetas TOP siguen sin aprobaciones.  </a:t>
+              <a:t>Las carpetas TOP siguen sin aprobaciones y suben los rechazos.  </a:t>
             </a:r>
             <a:pPr indent="0" marL="0">
               <a:lnSpc>
@@ -10170,7 +10050,7 @@
                 <a:ea typeface="Calibri" pitchFamily="34" charset="-122"/>
                 <a:cs typeface="Calibri" pitchFamily="34" charset="-120"/>
               </a:rPr>
-              <a:t>28 entregadas de 135 (20,7%) y 0 aprobadas; 12 rechazadas.</a:t>
+              <a:t>28 entregadas de 136 (20,6%) y 0 aprobadas; las rechazadas pasaron de 12 a 17.</a:t>
             </a:r>
             <a:endParaRPr lang="en-US" sz="1250" dirty="0"/>
           </a:p>
@@ -10249,7 +10129,7 @@
                 <a:ea typeface="Calibri" pitchFamily="34" charset="-122"/>
                 <a:cs typeface="Calibri" pitchFamily="34" charset="-120"/>
               </a:rPr>
-              <a:t>+2 P1 cerrado desde el corte anterior; 825 abiertos, de los cuales 672 superaron su fecha de vencimiento. El área 3000 concentra 702 (85,1%).</a:t>
+              <a:t>+33 P1 cerrado desde el corte anterior; 779 abiertos, de los cuales 645 superaron su fecha de vencimiento. El área 3000 concentra 687 (88,2%).</a:t>
             </a:r>
             <a:endParaRPr lang="en-US" sz="1250" dirty="0"/>
           </a:p>
@@ -10288,7 +10168,7 @@
                 <a:ea typeface="Calibri" pitchFamily="34" charset="-122"/>
                 <a:cs typeface="Calibri" pitchFamily="34" charset="-120"/>
               </a:rPr>
-              <a:t>Fuente: Estatus_Resumen_General_QAQC.xlsx · Corte 24-08-2026 · Áreas 2000/3000/4000/8000</a:t>
+              <a:t>Fuente: Estatus_Resumen_General_QAQC.xlsx · Corte 07-09-2026 · Áreas 2000/3000/4000/8000</a:t>
             </a:r>
             <a:endParaRPr lang="en-US" sz="850" dirty="0"/>
           </a:p>
@@ -11030,7 +10910,7 @@
                 <a:ea typeface="Calibri" pitchFamily="34" charset="-122"/>
                 <a:cs typeface="Calibri" pitchFamily="34" charset="-120"/>
               </a:rPr>
-              <a:t>93,2%</a:t>
+              <a:t>94,6%</a:t>
             </a:r>
             <a:endParaRPr lang="en-US" sz="1300" dirty="0"/>
           </a:p>
@@ -11069,7 +10949,7 @@
                 <a:ea typeface="Calibri" pitchFamily="34" charset="-122"/>
                 <a:cs typeface="Calibri" pitchFamily="34" charset="-120"/>
               </a:rPr>
-              <a:t>38 (27)</a:t>
+              <a:t>25 (21)</a:t>
             </a:r>
             <a:endParaRPr lang="en-US" sz="1300" dirty="0"/>
           </a:p>
@@ -11290,7 +11170,7 @@
                 <a:ea typeface="Calibri" pitchFamily="34" charset="-122"/>
                 <a:cs typeface="Calibri" pitchFamily="34" charset="-120"/>
               </a:rPr>
-              <a:t>76</a:t>
+              <a:t>77</a:t>
             </a:r>
             <a:endParaRPr lang="en-US" sz="1300" dirty="0"/>
           </a:p>
@@ -11329,7 +11209,7 @@
                 <a:ea typeface="Calibri" pitchFamily="34" charset="-122"/>
                 <a:cs typeface="Calibri" pitchFamily="34" charset="-120"/>
               </a:rPr>
-              <a:t>35/76 · 46,1%</a:t>
+              <a:t>37/77 · 48,1%</a:t>
             </a:r>
             <a:endParaRPr lang="en-US" sz="1300" dirty="0"/>
           </a:p>
@@ -11368,7 +11248,7 @@
                 <a:ea typeface="Calibri" pitchFamily="34" charset="-122"/>
                 <a:cs typeface="Calibri" pitchFamily="34" charset="-120"/>
               </a:rPr>
-              <a:t>8/76 · 10,5%</a:t>
+              <a:t>8/77 · 10,4%</a:t>
             </a:r>
             <a:endParaRPr lang="en-US" sz="1300" dirty="0"/>
           </a:p>
@@ -11407,7 +11287,7 @@
                 <a:ea typeface="Calibri" pitchFamily="34" charset="-122"/>
                 <a:cs typeface="Calibri" pitchFamily="34" charset="-120"/>
               </a:rPr>
-              <a:t>32,6%</a:t>
+              <a:t>33,3%</a:t>
             </a:r>
             <a:endParaRPr lang="en-US" sz="1300" dirty="0"/>
           </a:p>
@@ -11446,7 +11326,7 @@
                 <a:ea typeface="Calibri" pitchFamily="34" charset="-122"/>
                 <a:cs typeface="Calibri" pitchFamily="34" charset="-120"/>
               </a:rPr>
-              <a:t>702 (603)</a:t>
+              <a:t>687 (590)</a:t>
             </a:r>
             <a:endParaRPr lang="en-US" sz="1300" dirty="0"/>
           </a:p>
@@ -11764,7 +11644,7 @@
                 <a:ea typeface="Calibri" pitchFamily="34" charset="-122"/>
                 <a:cs typeface="Calibri" pitchFamily="34" charset="-120"/>
               </a:rPr>
-              <a:t>76,2%</a:t>
+              <a:t>81,2%</a:t>
             </a:r>
             <a:endParaRPr lang="en-US" sz="1300" dirty="0"/>
           </a:p>
@@ -11803,7 +11683,7 @@
                 <a:ea typeface="Calibri" pitchFamily="34" charset="-122"/>
                 <a:cs typeface="Calibri" pitchFamily="34" charset="-120"/>
               </a:rPr>
-              <a:t>84 (41)</a:t>
+              <a:t>66 (33)</a:t>
             </a:r>
             <a:endParaRPr lang="en-US" sz="1300" dirty="0"/>
           </a:p>
@@ -12342,7 +12222,7 @@
                 <a:ea typeface="Calibri" pitchFamily="34" charset="-122"/>
                 <a:cs typeface="Calibri" pitchFamily="34" charset="-120"/>
               </a:rPr>
-              <a:t>Fuente: Estatus_Resumen_General_QAQC.xlsx · Corte 24-08-2026 · Áreas 2000/3000/4000/8000</a:t>
+              <a:t>Fuente: Estatus_Resumen_General_QAQC.xlsx · Corte 07-09-2026 · Áreas 2000/3000/4000/8000</a:t>
             </a:r>
             <a:endParaRPr lang="en-US" sz="850" dirty="0"/>
           </a:p>
@@ -12593,7 +12473,7 @@
                 <a:ea typeface="Calibri" pitchFamily="34" charset="-122"/>
                 <a:cs typeface="Calibri" pitchFamily="34" charset="-120"/>
               </a:rPr>
-              <a:t>Las caminatas al 80% están cerradas en todas las áreas (135/135). El hito 100% avanza a 66,7%, y el área 3000 concentra 41 de los 45 subsistemas pendientes.</a:t>
+              <a:t>Las caminatas al 80% están cerradas en todas las áreas (136/136). El hito 100% avanza a 67,6%, y el área 3000 concentra 40 de los 44 subsistemas pendientes.</a:t>
             </a:r>
             <a:endParaRPr lang="en-US" sz="1350" dirty="0"/>
           </a:p>
@@ -12748,7 +12628,7 @@
                 <a:ea typeface="Calibri" pitchFamily="34" charset="-122"/>
                 <a:cs typeface="Calibri" pitchFamily="34" charset="-120"/>
               </a:rPr>
-              <a:t>135 de 135 subsistemas</a:t>
+              <a:t>136 de 136 subsistemas</a:t>
             </a:r>
             <a:endParaRPr lang="en-US" sz="1200" dirty="0"/>
           </a:p>
@@ -12849,7 +12729,7 @@
                 <a:ea typeface="Cambria" pitchFamily="34" charset="-122"/>
                 <a:cs typeface="Cambria" pitchFamily="34" charset="-120"/>
               </a:rPr>
-              <a:t>66,7%</a:t>
+              <a:t>67,6%</a:t>
             </a:r>
             <a:endParaRPr lang="en-US" sz="4000" dirty="0"/>
           </a:p>
@@ -12888,7 +12768,7 @@
                 <a:ea typeface="Calibri" pitchFamily="34" charset="-122"/>
                 <a:cs typeface="Calibri" pitchFamily="34" charset="-120"/>
               </a:rPr>
-              <a:t>90 realizadas · 45 pendientes</a:t>
+              <a:t>92 realizadas · 44 pendientes</a:t>
             </a:r>
             <a:endParaRPr lang="en-US" sz="1200" dirty="0"/>
           </a:p>
@@ -12947,7 +12827,7 @@
                 <a:ea typeface="Calibri" pitchFamily="34" charset="-122"/>
                 <a:cs typeface="Calibri" pitchFamily="34" charset="-120"/>
               </a:rPr>
-              <a:t>44 próximas a realizar y 1 por programar.</a:t>
+              <a:t>44 próximas a realizar y 0 por programar. Las «por programar» bajaron 1 en el período.</a:t>
             </a:r>
             <a:endParaRPr lang="en-US" sz="1150" dirty="0"/>
           </a:p>
@@ -12986,7 +12866,7 @@
                 <a:ea typeface="Calibri" pitchFamily="34" charset="-122"/>
                 <a:cs typeface="Calibri" pitchFamily="34" charset="-120"/>
               </a:rPr>
-              <a:t>Fuente: Estatus_Resumen_General_QAQC.xlsx · Corte 24-08-2026 · Áreas 2000/3000/4000/8000</a:t>
+              <a:t>Fuente: Estatus_Resumen_General_QAQC.xlsx · Corte 07-09-2026 · Áreas 2000/3000/4000/8000</a:t>
             </a:r>
             <a:endParaRPr lang="en-US" sz="850" dirty="0"/>
           </a:p>
@@ -13237,7 +13117,7 @@
                 <a:ea typeface="Calibri" pitchFamily="34" charset="-122"/>
                 <a:cs typeface="Calibri" pitchFamily="34" charset="-120"/>
               </a:rPr>
-              <a:t>28 carpetas entregadas de 135 (20,7%). Ninguna aprobada aún: el flujo se acumula en revisión y hay 12 rechazos que requieren rearmado.</a:t>
+              <a:t>28 carpetas entregadas de 136 (20,6%). Ninguna aprobada aún: el flujo se acumula en revisión y hay 17 rechazos que requieren rearmado.</a:t>
             </a:r>
             <a:endParaRPr lang="en-US" sz="1350" dirty="0"/>
           </a:p>
@@ -13319,7 +13199,7 @@
                 <a:ea typeface="Calibri" pitchFamily="34" charset="-122"/>
                 <a:cs typeface="Calibri" pitchFamily="34" charset="-120"/>
               </a:rPr>
-              <a:t>EMBUDO DE ENTREGA (135)</a:t>
+              <a:t>EMBUDO DE ENTREGA (136)</a:t>
             </a:r>
             <a:endParaRPr lang="en-US" sz="1100" dirty="0"/>
           </a:p>
@@ -13534,6 +13414,45 @@
         </p:nvSpPr>
         <p:spPr>
           <a:xfrm>
+            <a:off x="9509760" y="3072384"/>
+            <a:ext cx="914400" cy="566928"/>
+          </a:xfrm>
+          <a:prstGeom prst="rect">
+            <a:avLst/>
+          </a:prstGeom>
+          <a:noFill/>
+          <a:ln/>
+        </p:spPr>
+        <p:txBody>
+          <a:bodyPr wrap="square" lIns="0" tIns="0" rIns="0" bIns="0" rtlCol="0" anchor="ctr"/>
+          <a:lstStyle/>
+          <a:p>
+            <a:pPr algn="r" indent="0" marL="0">
+              <a:buNone/>
+            </a:pPr>
+            <a:r>
+              <a:rPr lang="en-US" sz="950" b="1" dirty="0">
+                <a:solidFill>
+                  <a:srgbClr val="C0392B"/>
+                </a:solidFill>
+                <a:latin typeface="Calibri" pitchFamily="34" charset="0"/>
+                <a:ea typeface="Calibri" pitchFamily="34" charset="-122"/>
+                <a:cs typeface="Calibri" pitchFamily="34" charset="-120"/>
+              </a:rPr>
+              <a:t>▼ -5</a:t>
+            </a:r>
+            <a:endParaRPr lang="en-US" sz="950" dirty="0"/>
+          </a:p>
+        </p:txBody>
+      </p:sp>
+      <p:sp>
+        <p:nvSpPr>
+          <p:cNvPr id="17" name="Text 13"/>
+          <p:cNvSpPr/>
+          <p:nvPr/>
+        </p:nvSpPr>
+        <p:spPr>
+          <a:xfrm>
             <a:off x="10469880" y="3072384"/>
             <a:ext cx="868680" cy="566928"/>
           </a:xfrm>
@@ -13559,7 +13478,7 @@
                 <a:ea typeface="Cambria" pitchFamily="34" charset="-122"/>
                 <a:cs typeface="Cambria" pitchFamily="34" charset="-120"/>
               </a:rPr>
-              <a:t>15</a:t>
+              <a:t>10</a:t>
             </a:r>
             <a:endParaRPr lang="en-US" sz="2200" dirty="0"/>
           </a:p>
@@ -13567,7 +13486,7 @@
       </p:sp>
       <p:sp>
         <p:nvSpPr>
-          <p:cNvPr id="17" name="Shape 13"/>
+          <p:cNvPr id="18" name="Shape 14"/>
           <p:cNvSpPr/>
           <p:nvPr/>
         </p:nvSpPr>
@@ -13589,7 +13508,7 @@
       </p:sp>
       <p:sp>
         <p:nvSpPr>
-          <p:cNvPr id="18" name="Shape 14"/>
+          <p:cNvPr id="19" name="Shape 15"/>
           <p:cNvSpPr/>
           <p:nvPr/>
         </p:nvSpPr>
@@ -13609,7 +13528,7 @@
       </p:sp>
       <p:sp>
         <p:nvSpPr>
-          <p:cNvPr id="19" name="Text 15"/>
+          <p:cNvPr id="20" name="Text 16"/>
           <p:cNvSpPr/>
           <p:nvPr/>
         </p:nvSpPr>
@@ -13648,7 +13567,7 @@
       </p:sp>
       <p:sp>
         <p:nvSpPr>
-          <p:cNvPr id="20" name="Text 16"/>
+          <p:cNvPr id="21" name="Text 17"/>
           <p:cNvSpPr/>
           <p:nvPr/>
         </p:nvSpPr>
@@ -13687,7 +13606,7 @@
       </p:sp>
       <p:sp>
         <p:nvSpPr>
-          <p:cNvPr id="21" name="Shape 17"/>
+          <p:cNvPr id="22" name="Shape 18"/>
           <p:cNvSpPr/>
           <p:nvPr/>
         </p:nvSpPr>
@@ -13709,7 +13628,7 @@
       </p:sp>
       <p:sp>
         <p:nvSpPr>
-          <p:cNvPr id="22" name="Shape 18"/>
+          <p:cNvPr id="23" name="Shape 19"/>
           <p:cNvSpPr/>
           <p:nvPr/>
         </p:nvSpPr>
@@ -13729,7 +13648,7 @@
       </p:sp>
       <p:sp>
         <p:nvSpPr>
-          <p:cNvPr id="23" name="Text 19"/>
+          <p:cNvPr id="24" name="Text 20"/>
           <p:cNvSpPr/>
           <p:nvPr/>
         </p:nvSpPr>
@@ -13768,7 +13687,46 @@
       </p:sp>
       <p:sp>
         <p:nvSpPr>
-          <p:cNvPr id="24" name="Text 20"/>
+          <p:cNvPr id="25" name="Text 21"/>
+          <p:cNvSpPr/>
+          <p:nvPr/>
+        </p:nvSpPr>
+        <p:spPr>
+          <a:xfrm>
+            <a:off x="9509760" y="4315968"/>
+            <a:ext cx="914400" cy="566928"/>
+          </a:xfrm>
+          <a:prstGeom prst="rect">
+            <a:avLst/>
+          </a:prstGeom>
+          <a:noFill/>
+          <a:ln/>
+        </p:spPr>
+        <p:txBody>
+          <a:bodyPr wrap="square" lIns="0" tIns="0" rIns="0" bIns="0" rtlCol="0" anchor="ctr"/>
+          <a:lstStyle/>
+          <a:p>
+            <a:pPr algn="r" indent="0" marL="0">
+              <a:buNone/>
+            </a:pPr>
+            <a:r>
+              <a:rPr lang="en-US" sz="950" b="1" dirty="0">
+                <a:solidFill>
+                  <a:srgbClr val="C0392B"/>
+                </a:solidFill>
+                <a:latin typeface="Calibri" pitchFamily="34" charset="0"/>
+                <a:ea typeface="Calibri" pitchFamily="34" charset="-122"/>
+                <a:cs typeface="Calibri" pitchFamily="34" charset="-120"/>
+              </a:rPr>
+              <a:t>▲ +5</a:t>
+            </a:r>
+            <a:endParaRPr lang="en-US" sz="950" dirty="0"/>
+          </a:p>
+        </p:txBody>
+      </p:sp>
+      <p:sp>
+        <p:nvSpPr>
+          <p:cNvPr id="26" name="Text 22"/>
           <p:cNvSpPr/>
           <p:nvPr/>
         </p:nvSpPr>
@@ -13799,7 +13757,7 @@
                 <a:ea typeface="Cambria" pitchFamily="34" charset="-122"/>
                 <a:cs typeface="Cambria" pitchFamily="34" charset="-120"/>
               </a:rPr>
-              <a:t>12</a:t>
+              <a:t>17</a:t>
             </a:r>
             <a:endParaRPr lang="en-US" sz="2200" dirty="0"/>
           </a:p>
@@ -13807,7 +13765,7 @@
       </p:sp>
       <p:sp>
         <p:nvSpPr>
-          <p:cNvPr id="25" name="Shape 21"/>
+          <p:cNvPr id="27" name="Shape 23"/>
           <p:cNvSpPr/>
           <p:nvPr/>
         </p:nvSpPr>
@@ -13829,7 +13787,7 @@
       </p:sp>
       <p:sp>
         <p:nvSpPr>
-          <p:cNvPr id="26" name="Shape 22"/>
+          <p:cNvPr id="28" name="Shape 24"/>
           <p:cNvSpPr/>
           <p:nvPr/>
         </p:nvSpPr>
@@ -13849,7 +13807,7 @@
       </p:sp>
       <p:sp>
         <p:nvSpPr>
-          <p:cNvPr id="27" name="Text 23"/>
+          <p:cNvPr id="29" name="Text 25"/>
           <p:cNvSpPr/>
           <p:nvPr/>
         </p:nvSpPr>
@@ -13888,7 +13846,7 @@
       </p:sp>
       <p:sp>
         <p:nvSpPr>
-          <p:cNvPr id="28" name="Text 24"/>
+          <p:cNvPr id="30" name="Text 26"/>
           <p:cNvSpPr/>
           <p:nvPr/>
         </p:nvSpPr>
@@ -13927,7 +13885,7 @@
       </p:sp>
       <p:sp>
         <p:nvSpPr>
-          <p:cNvPr id="29" name="Text 25"/>
+          <p:cNvPr id="31" name="Text 27"/>
           <p:cNvSpPr/>
           <p:nvPr/>
         </p:nvSpPr>
@@ -13966,7 +13924,7 @@
       </p:sp>
       <p:sp>
         <p:nvSpPr>
-          <p:cNvPr id="30" name="Text 26"/>
+          <p:cNvPr id="32" name="Text 28"/>
           <p:cNvSpPr/>
           <p:nvPr/>
         </p:nvSpPr>
@@ -13997,7 +13955,7 @@
                 <a:ea typeface="Calibri" pitchFamily="34" charset="-122"/>
                 <a:cs typeface="Calibri" pitchFamily="34" charset="-120"/>
               </a:rPr>
-              <a:t>Fuente: Estatus_Resumen_General_QAQC.xlsx · Corte 24-08-2026 · Áreas 2000/3000/4000/8000</a:t>
+              <a:t>Fuente: Estatus_Resumen_General_QAQC.xlsx · Corte 07-09-2026 · Áreas 2000/3000/4000/8000</a:t>
             </a:r>
             <a:endParaRPr lang="en-US" sz="850" dirty="0"/>
           </a:p>
@@ -14005,7 +13963,7 @@
       </p:sp>
       <p:sp>
         <p:nvSpPr>
-          <p:cNvPr id="31" name="Text 27"/>
+          <p:cNvPr id="33" name="Text 29"/>
           <p:cNvSpPr/>
           <p:nvPr/>
         </p:nvSpPr>
@@ -14044,7 +14002,7 @@
       </p:sp>
       <p:sp>
         <p:nvSpPr>
-          <p:cNvPr id="32" name="Text 28"/>
+          <p:cNvPr id="34" name="Text 30"/>
           <p:cNvSpPr/>
           <p:nvPr/>
         </p:nvSpPr>
@@ -14248,7 +14206,7 @@
                 <a:ea typeface="Calibri" pitchFamily="34" charset="-122"/>
                 <a:cs typeface="Calibri" pitchFamily="34" charset="-120"/>
               </a:rPr>
-              <a:t>1.988 P1 levantados; 58,1% cerrados. El pendiente se concentra en Piping, Eléctrica, Instrumentación y Control, y físicamente en el área 3000.</a:t>
+              <a:t>1.988 P1 levantados; 59,8% cerrados. El pendiente se concentra en Piping, Eléctrica, Instrumentación y Control, y físicamente en el área 3000.</a:t>
             </a:r>
             <a:endParaRPr lang="en-US" sz="1350" dirty="0"/>
           </a:p>
@@ -14380,7 +14338,7 @@
                 <a:ea typeface="Cambria" pitchFamily="34" charset="-122"/>
                 <a:cs typeface="Cambria" pitchFamily="34" charset="-120"/>
               </a:rPr>
-              <a:t>58,1%</a:t>
+              <a:t>59,8%</a:t>
             </a:r>
             <a:endParaRPr lang="en-US" sz="1900" dirty="0"/>
           </a:p>
@@ -14495,7 +14453,7 @@
                 <a:ea typeface="Calibri" pitchFamily="34" charset="-122"/>
                 <a:cs typeface="Calibri" pitchFamily="34" charset="-120"/>
               </a:rPr>
-              <a:t>1.156</a:t>
+              <a:t>1.189</a:t>
             </a:r>
             <a:endParaRPr lang="en-US" sz="1100" dirty="0"/>
           </a:p>
@@ -14593,7 +14551,7 @@
                 <a:ea typeface="Calibri" pitchFamily="34" charset="-122"/>
                 <a:cs typeface="Calibri" pitchFamily="34" charset="-120"/>
               </a:rPr>
-              <a:t>825</a:t>
+              <a:t>779</a:t>
             </a:r>
             <a:endParaRPr lang="en-US" sz="1100" dirty="0"/>
           </a:p>
@@ -14691,7 +14649,7 @@
                 <a:ea typeface="Calibri" pitchFamily="34" charset="-122"/>
                 <a:cs typeface="Calibri" pitchFamily="34" charset="-120"/>
               </a:rPr>
-              <a:t>7</a:t>
+              <a:t>20</a:t>
             </a:r>
             <a:endParaRPr lang="en-US" sz="1100" dirty="0"/>
           </a:p>
@@ -14774,7 +14732,7 @@
                 <a:ea typeface="Calibri" pitchFamily="34" charset="-122"/>
                 <a:cs typeface="Calibri" pitchFamily="34" charset="-120"/>
               </a:rPr>
-              <a:t>702 de 825 P1 abiertos (85,1%) están en el área 3000. Áreas 2000 y 8000 sobre 90% de cierre.</a:t>
+              <a:t>687 de 779 P1 abiertos (88,2%) están en el área 3000. Áreas 2000 y 8000 sobre 90% de cierre.</a:t>
             </a:r>
             <a:endParaRPr lang="en-US" sz="1150" dirty="0"/>
           </a:p>
@@ -14813,7 +14771,7 @@
                 <a:ea typeface="Calibri" pitchFamily="34" charset="-122"/>
                 <a:cs typeface="Calibri" pitchFamily="34" charset="-120"/>
               </a:rPr>
-              <a:t>Fuente: Estatus_Resumen_General_QAQC.xlsx · Corte 24-08-2026 · Áreas 2000/3000/4000/8000</a:t>
+              <a:t>Fuente: Estatus_Resumen_General_QAQC.xlsx · Corte 07-09-2026 · Áreas 2000/3000/4000/8000</a:t>
             </a:r>
             <a:endParaRPr lang="en-US" sz="850" dirty="0"/>
           </a:p>
@@ -15187,7 +15145,7 @@
                 <a:ea typeface="Calibri" pitchFamily="34" charset="-122"/>
                 <a:cs typeface="Calibri" pitchFamily="34" charset="-120"/>
               </a:rPr>
-              <a:t>0 aprobadas de 135. Priorizar el cierre de las 15 en revisión y el rearmado de las 12 rechazadas para convertir entregas en aprobaciones.</a:t>
+              <a:t>0 aprobadas de 136. Priorizar el cierre de las 10 en revisión y el rearmado de las 17 rechazadas para convertir entregas en aprobaciones.</a:t>
             </a:r>
             <a:endParaRPr lang="en-US" sz="1150" dirty="0"/>
           </a:p>
@@ -15329,7 +15287,7 @@
                 <a:ea typeface="Calibri" pitchFamily="34" charset="-122"/>
                 <a:cs typeface="Calibri" pitchFamily="34" charset="-120"/>
               </a:rPr>
-              <a:t>702 P1 abiertos (85,1% del total) y 41 caminatas 100% pendientes. Es la ruta crítica: sin esta área no mejora ningún indicador global.</a:t>
+              <a:t>687 P1 abiertos (88,2% del total) y 40 caminatas 100% pendientes. Es la ruta crítica: sin esta área no mejora ningún indicador global.</a:t>
             </a:r>
             <a:endParaRPr lang="en-US" sz="1150" dirty="0"/>
           </a:p>
@@ -15429,7 +15387,7 @@
                 <a:ea typeface="Calibri" pitchFamily="34" charset="-122"/>
                 <a:cs typeface="Calibri" pitchFamily="34" charset="-120"/>
               </a:rPr>
-              <a:t>Recuperar los 672 P1 vencidos</a:t>
+              <a:t>Recuperar los 645 P1 vencidos</a:t>
             </a:r>
             <a:endParaRPr lang="en-US" sz="1500" dirty="0"/>
           </a:p>
@@ -15471,7 +15429,7 @@
                 <a:ea typeface="Calibri" pitchFamily="34" charset="-122"/>
                 <a:cs typeface="Calibri" pitchFamily="34" charset="-120"/>
               </a:rPr>
-              <a:t>81,5% de los P1 abiertos superó su fecha de vencimiento. Foco en Piping (219), Eléctrica (173), Instrumentación y Control (153).</a:t>
+              <a:t>82,8% de los P1 abiertos superó su fecha de vencimiento. Foco en Piping (206), Eléctrica (171), Instrumentación y Control (149).</a:t>
             </a:r>
             <a:endParaRPr lang="en-US" sz="1150" dirty="0"/>
           </a:p>
@@ -15613,7 +15571,7 @@
                 <a:ea typeface="Calibri" pitchFamily="34" charset="-122"/>
                 <a:cs typeface="Calibri" pitchFamily="34" charset="-120"/>
               </a:rPr>
-              <a:t>45 subsistemas pendientes: 44 próximos a realizar y 1 por programar. La programación ya está hecha; falta ejecutarla para habilitar la entrega de carpetas.</a:t>
+              <a:t>44 subsistemas pendientes: 44 próximos a realizar y 0 por programar. La programación ya está hecha; falta ejecutarla para habilitar la entrega de carpetas.</a:t>
             </a:r>
             <a:endParaRPr lang="en-US" sz="1150" dirty="0"/>
           </a:p>
@@ -15652,7 +15610,7 @@
                 <a:ea typeface="Calibri" pitchFamily="34" charset="-122"/>
                 <a:cs typeface="Calibri" pitchFamily="34" charset="-120"/>
               </a:rPr>
-              <a:t>Fuente: Estatus_Resumen_General_QAQC.xlsx · Corte 24-08-2026 · Áreas 2000/3000/4000/8000</a:t>
+              <a:t>Fuente: Estatus_Resumen_General_QAQC.xlsx · Corte 07-09-2026 · Áreas 2000/3000/4000/8000</a:t>
             </a:r>
             <a:endParaRPr lang="en-US" sz="850" dirty="0"/>
           </a:p>
@@ -15957,7 +15915,7 @@
                 <a:ea typeface="Cambria" pitchFamily="34" charset="-122"/>
                 <a:cs typeface="Cambria" pitchFamily="34" charset="-120"/>
               </a:rPr>
-              <a:t>61,3%</a:t>
+              <a:t>65%</a:t>
             </a:r>
             <a:endParaRPr lang="en-US" sz="3800" dirty="0"/>
           </a:p>
@@ -15996,7 +15954,7 @@
                 <a:ea typeface="Calibri" pitchFamily="34" charset="-122"/>
                 <a:cs typeface="Calibri" pitchFamily="34" charset="-120"/>
               </a:rPr>
-              <a:t>49/80</a:t>
+              <a:t>52/80</a:t>
             </a:r>
             <a:endParaRPr lang="en-US" sz="1400" dirty="0"/>
           </a:p>
@@ -16077,7 +16035,7 @@
                 <a:ea typeface="Calibri" pitchFamily="34" charset="-122"/>
                 <a:cs typeface="Calibri" pitchFamily="34" charset="-120"/>
               </a:rPr>
-              <a:t>31 subsistemas por caminar</a:t>
+              <a:t>28 subsistemas por caminar</a:t>
             </a:r>
             <a:endParaRPr lang="en-US" sz="950" dirty="0"/>
           </a:p>
@@ -16383,7 +16341,7 @@
                 <a:ea typeface="Cambria" pitchFamily="34" charset="-122"/>
                 <a:cs typeface="Cambria" pitchFamily="34" charset="-120"/>
               </a:rPr>
-              <a:t>45,3%</a:t>
+              <a:t>49,5%</a:t>
             </a:r>
             <a:endParaRPr lang="en-US" sz="3800" dirty="0"/>
           </a:p>
@@ -16422,7 +16380,7 @@
                 <a:ea typeface="Calibri" pitchFamily="34" charset="-122"/>
                 <a:cs typeface="Calibri" pitchFamily="34" charset="-120"/>
               </a:rPr>
-              <a:t>43/95</a:t>
+              <a:t>47/95</a:t>
             </a:r>
             <a:endParaRPr lang="en-US" sz="1400" dirty="0"/>
           </a:p>
@@ -16503,7 +16461,7 @@
                 <a:ea typeface="Calibri" pitchFamily="34" charset="-122"/>
                 <a:cs typeface="Calibri" pitchFamily="34" charset="-120"/>
               </a:rPr>
-              <a:t>28 aprobadas · 13 en revisión · 2 rechazadas</a:t>
+              <a:t>36 aprobadas · 9 en revisión · 2 rechazadas</a:t>
             </a:r>
             <a:endParaRPr lang="en-US" sz="950" dirty="0"/>
           </a:p>
@@ -16596,7 +16554,7 @@
                 <a:ea typeface="Cambria" pitchFamily="34" charset="-122"/>
                 <a:cs typeface="Cambria" pitchFamily="34" charset="-120"/>
               </a:rPr>
-              <a:t>68,8%</a:t>
+              <a:t>69,3%</a:t>
             </a:r>
             <a:endParaRPr lang="en-US" sz="3800" dirty="0"/>
           </a:p>
@@ -16635,7 +16593,7 @@
                 <a:ea typeface="Calibri" pitchFamily="34" charset="-122"/>
                 <a:cs typeface="Calibri" pitchFamily="34" charset="-120"/>
               </a:rPr>
-              <a:t>714/1.038</a:t>
+              <a:t>794/1.145</a:t>
             </a:r>
             <a:endParaRPr lang="en-US" sz="1400" dirty="0"/>
           </a:p>
@@ -16716,7 +16674,7 @@
                 <a:ea typeface="Calibri" pitchFamily="34" charset="-122"/>
                 <a:cs typeface="Calibri" pitchFamily="34" charset="-120"/>
               </a:rPr>
-              <a:t>324 abiertos · 8 atrasados</a:t>
+              <a:t>351 abiertos · 184 atrasados</a:t>
             </a:r>
             <a:endParaRPr lang="en-US" sz="950" dirty="0"/>
           </a:p>
@@ -16856,7 +16814,7 @@
                 <a:ea typeface="Calibri" pitchFamily="34" charset="-122"/>
                 <a:cs typeface="Calibri" pitchFamily="34" charset="-120"/>
               </a:rPr>
-              <a:t>1.169 de 1.722 ítems cerrados (67,9%); de los 553 abiertos, 14 ya pasaron su fecha requerida de cierre (2,5%).</a:t>
+              <a:t>1.294 de 1.855 ítems cerrados (69,8%); de los 561 abiertos, 318 ya pasaron su fecha requerida de cierre (56,7%).</a:t>
             </a:r>
             <a:endParaRPr lang="en-US" sz="1150" dirty="0"/>
           </a:p>
@@ -16935,7 +16893,7 @@
                 <a:ea typeface="Calibri" pitchFamily="34" charset="-122"/>
                 <a:cs typeface="Calibri" pitchFamily="34" charset="-120"/>
               </a:rPr>
-              <a:t>Operables 49/80 por Caminata 2 (61,3%); Facility 12/15 por Caminata 1 (80%).</a:t>
+              <a:t>Operables 52/80 por Caminata 2 (65%); Facility 12/15 por Caminata 1 (80%).</a:t>
             </a:r>
             <a:endParaRPr lang="en-US" sz="1150" dirty="0"/>
           </a:p>
@@ -16997,7 +16955,7 @@
                 <a:ea typeface="Calibri" pitchFamily="34" charset="-122"/>
                 <a:cs typeface="Calibri" pitchFamily="34" charset="-120"/>
               </a:rPr>
-              <a:t>Las carpetas están a 45,3% de entrega y el cuello está en el armado interno.  </a:t>
+              <a:t>Las carpetas están a 49,5% de entrega y el cuello está en el armado interno.  </a:t>
             </a:r>
             <a:pPr indent="0" marL="0">
               <a:lnSpc>
@@ -17014,7 +16972,7 @@
                 <a:ea typeface="Calibri" pitchFamily="34" charset="-122"/>
                 <a:cs typeface="Calibri" pitchFamily="34" charset="-120"/>
               </a:rPr>
-              <a:t>43 entregadas de 95: 28 aprobadas, 13 en revisión y 2 rechazadas. Quedan 18 en preparación y 34 sin iniciar.</a:t>
+              <a:t>47 entregadas de 95: 36 aprobadas, 9 en revisión y 2 rechazadas. Quedan 17 en preparación y 31 sin iniciar.</a:t>
             </a:r>
             <a:endParaRPr lang="en-US" sz="1150" dirty="0"/>
           </a:p>
@@ -17093,7 +17051,7 @@
                 <a:ea typeface="Calibri" pitchFamily="34" charset="-122"/>
                 <a:cs typeface="Calibri" pitchFamily="34" charset="-120"/>
               </a:rPr>
-              <a:t>166 de los 324 P1 abiertos (51,2%), con 6 atrasados.</a:t>
+              <a:t>171 de los 351 P1 abiertos (48,7%), con 119 atrasados.</a:t>
             </a:r>
             <a:endParaRPr lang="en-US" sz="1150" dirty="0"/>
           </a:p>
@@ -17132,7 +17090,7 @@
                 <a:ea typeface="Calibri" pitchFamily="34" charset="-122"/>
                 <a:cs typeface="Calibri" pitchFamily="34" charset="-120"/>
               </a:rPr>
-              <a:t>Fuente: REPORTE_GERENCIAL + Listado de Puntos Punch Consolidado · Corte 25-08-2026 · Atrasos al 31-08-2026</a:t>
+              <a:t>Fuente: REPORTE_GERENCIAL + Listado de Puntos Punch Consolidado · Corte 01-09-2026 · Atrasos al 07-09-2026</a:t>
             </a:r>
             <a:endParaRPr lang="en-US" sz="850" dirty="0"/>
           </a:p>
@@ -17585,7 +17543,7 @@
                 <a:ea typeface="Calibri" pitchFamily="34" charset="-122"/>
                 <a:cs typeface="Calibri" pitchFamily="34" charset="-120"/>
               </a:rPr>
-              <a:t>29,5%</a:t>
+              <a:t>37,9%</a:t>
             </a:r>
             <a:endParaRPr lang="en-US" sz="1100" dirty="0"/>
           </a:p>
@@ -17624,7 +17582,7 @@
                 <a:ea typeface="Cambria" pitchFamily="34" charset="-122"/>
                 <a:cs typeface="Cambria" pitchFamily="34" charset="-120"/>
               </a:rPr>
-              <a:t>28</a:t>
+              <a:t>36</a:t>
             </a:r>
             <a:endParaRPr lang="en-US" sz="2200" dirty="0"/>
           </a:p>
@@ -17744,7 +17702,7 @@
                 <a:ea typeface="Calibri" pitchFamily="34" charset="-122"/>
                 <a:cs typeface="Calibri" pitchFamily="34" charset="-120"/>
               </a:rPr>
-              <a:t>13,7%</a:t>
+              <a:t>9,5%</a:t>
             </a:r>
             <a:endParaRPr lang="en-US" sz="1100" dirty="0"/>
           </a:p>
@@ -17783,7 +17741,7 @@
                 <a:ea typeface="Cambria" pitchFamily="34" charset="-122"/>
                 <a:cs typeface="Cambria" pitchFamily="34" charset="-120"/>
               </a:rPr>
-              <a:t>13</a:t>
+              <a:t>9</a:t>
             </a:r>
             <a:endParaRPr lang="en-US" sz="2200" dirty="0"/>
           </a:p>
@@ -18062,7 +18020,7 @@
                 <a:ea typeface="Calibri" pitchFamily="34" charset="-122"/>
                 <a:cs typeface="Calibri" pitchFamily="34" charset="-120"/>
               </a:rPr>
-              <a:t>18,9%</a:t>
+              <a:t>17,9%</a:t>
             </a:r>
             <a:endParaRPr lang="en-US" sz="1100" dirty="0"/>
           </a:p>
@@ -18101,7 +18059,7 @@
                 <a:ea typeface="Cambria" pitchFamily="34" charset="-122"/>
                 <a:cs typeface="Cambria" pitchFamily="34" charset="-120"/>
               </a:rPr>
-              <a:t>18</a:t>
+              <a:t>17</a:t>
             </a:r>
             <a:endParaRPr lang="en-US" sz="2200" dirty="0"/>
           </a:p>
@@ -18221,7 +18179,7 @@
                 <a:ea typeface="Calibri" pitchFamily="34" charset="-122"/>
                 <a:cs typeface="Calibri" pitchFamily="34" charset="-120"/>
               </a:rPr>
-              <a:t>35,8%</a:t>
+              <a:t>32,6%</a:t>
             </a:r>
             <a:endParaRPr lang="en-US" sz="1100" dirty="0"/>
           </a:p>
@@ -18260,7 +18218,7 @@
                 <a:ea typeface="Cambria" pitchFamily="34" charset="-122"/>
                 <a:cs typeface="Cambria" pitchFamily="34" charset="-120"/>
               </a:rPr>
-              <a:t>34</a:t>
+              <a:t>31</a:t>
             </a:r>
             <a:endParaRPr lang="en-US" sz="2200" dirty="0"/>
           </a:p>
@@ -18302,7 +18260,7 @@
                 <a:ea typeface="Calibri" pitchFamily="34" charset="-122"/>
                 <a:cs typeface="Calibri" pitchFamily="34" charset="-120"/>
               </a:rPr>
-              <a:t>43 carpetas ya están en manos del cliente (45,3%) y 0 subsistemas tienen tarjeta verde. El grueso del pendiente todavía no sale de Besalco.</a:t>
+              <a:t>47 carpetas ya están en manos del cliente (49,5%) y 0 subsistemas tienen tarjeta verde. El grueso del pendiente todavía no sale de Besalco.</a:t>
             </a:r>
             <a:endParaRPr lang="en-US" sz="1000" dirty="0"/>
           </a:p>
@@ -18341,7 +18299,7 @@
                 <a:ea typeface="Calibri" pitchFamily="34" charset="-122"/>
                 <a:cs typeface="Calibri" pitchFamily="34" charset="-120"/>
               </a:rPr>
-              <a:t>Fuente: REPORTE_GERENCIAL + Listado de Puntos Punch Consolidado · Corte 25-08-2026 · Atrasos al 31-08-2026</a:t>
+              <a:t>Fuente: REPORTE_GERENCIAL + Listado de Puntos Punch Consolidado · Corte 01-09-2026 · Atrasos al 07-09-2026</a:t>
             </a:r>
             <a:endParaRPr lang="en-US" sz="850" dirty="0"/>
           </a:p>
@@ -18592,7 +18550,7 @@
                 <a:ea typeface="Calibri" pitchFamily="34" charset="-122"/>
                 <a:cs typeface="Calibri" pitchFamily="34" charset="-120"/>
               </a:rPr>
-              <a:t>1.038 P1 levantados; 68,8% cerrados. Atrasado = ítem abierto cuya fecha requerida de cierre ya venció al 31-08-2026.</a:t>
+              <a:t>1.145 P1 levantados; 69,3% cerrados. Atrasado = ítem abierto cuya fecha requerida de cierre ya venció al 07-09-2026.</a:t>
             </a:r>
             <a:endParaRPr lang="en-US" sz="1350" dirty="0"/>
           </a:p>
@@ -18724,7 +18682,7 @@
                 <a:ea typeface="Cambria" pitchFamily="34" charset="-122"/>
                 <a:cs typeface="Cambria" pitchFamily="34" charset="-120"/>
               </a:rPr>
-              <a:t>68,8%</a:t>
+              <a:t>69,3%</a:t>
             </a:r>
             <a:endParaRPr lang="en-US" sz="1900" dirty="0"/>
           </a:p>
@@ -18839,7 +18797,7 @@
                 <a:ea typeface="Calibri" pitchFamily="34" charset="-122"/>
                 <a:cs typeface="Calibri" pitchFamily="34" charset="-120"/>
               </a:rPr>
-              <a:t>714</a:t>
+              <a:t>794</a:t>
             </a:r>
             <a:endParaRPr lang="en-US" sz="1100" dirty="0"/>
           </a:p>
@@ -18937,7 +18895,7 @@
                 <a:ea typeface="Calibri" pitchFamily="34" charset="-122"/>
                 <a:cs typeface="Calibri" pitchFamily="34" charset="-120"/>
               </a:rPr>
-              <a:t>8</a:t>
+              <a:t>184</a:t>
             </a:r>
             <a:endParaRPr lang="en-US" sz="1100" dirty="0"/>
           </a:p>
@@ -19035,7 +18993,7 @@
                 <a:ea typeface="Calibri" pitchFamily="34" charset="-122"/>
                 <a:cs typeface="Calibri" pitchFamily="34" charset="-120"/>
               </a:rPr>
-              <a:t>316</a:t>
+              <a:t>167</a:t>
             </a:r>
             <a:endParaRPr lang="en-US" sz="1100" dirty="0"/>
           </a:p>
@@ -19118,7 +19076,7 @@
                 <a:ea typeface="Calibri" pitchFamily="34" charset="-122"/>
                 <a:cs typeface="Calibri" pitchFamily="34" charset="-120"/>
               </a:rPr>
-              <a:t>Mediana de 11 días vencidos; el más antiguo lleva 11. 14 entre 1-30 días.</a:t>
+              <a:t>Mediana de 7 días vencidos; el más antiguo lleva 120. 192 entre 1-30 días, 112 entre 31-90 días, 14 entre 91-180 días.</a:t>
             </a:r>
             <a:endParaRPr lang="en-US" sz="1150" dirty="0"/>
           </a:p>
@@ -19157,7 +19115,7 @@
                 <a:ea typeface="Calibri" pitchFamily="34" charset="-122"/>
                 <a:cs typeface="Calibri" pitchFamily="34" charset="-120"/>
               </a:rPr>
-              <a:t>Fuente: REPORTE_GERENCIAL + Listado de Puntos Punch Consolidado · Corte 25-08-2026 · Atrasos al 31-08-2026</a:t>
+              <a:t>Fuente: REPORTE_GERENCIAL + Listado de Puntos Punch Consolidado · Corte 01-09-2026 · Atrasos al 07-09-2026</a:t>
             </a:r>
             <a:endParaRPr lang="en-US" sz="850" dirty="0"/>
           </a:p>
@@ -19489,7 +19447,7 @@
                 <a:ea typeface="Calibri" pitchFamily="34" charset="-122"/>
                 <a:cs typeface="Calibri" pitchFamily="34" charset="-120"/>
               </a:rPr>
-              <a:t>Recuperar los 14 ítems atrasados</a:t>
+              <a:t>Recuperar los 318 ítems atrasados</a:t>
             </a:r>
             <a:endParaRPr lang="en-US" sz="1400" dirty="0"/>
           </a:p>
@@ -19531,7 +19489,7 @@
                 <a:ea typeface="Calibri" pitchFamily="34" charset="-122"/>
                 <a:cs typeface="Calibri" pitchFamily="34" charset="-120"/>
               </a:rPr>
-              <a:t>2,5% de los 553 abiertos ya venció su fecha requerida. Foco en Eléctrica (6), Piping (2), Obras Civiles (0).</a:t>
+              <a:t>56,7% de los 561 abiertos ya venció su fecha requerida. Foco en Eléctrica (119), Piping (35), Obras Civiles (13).</a:t>
             </a:r>
             <a:endParaRPr lang="en-US" sz="1100" dirty="0"/>
           </a:p>
@@ -19631,7 +19589,7 @@
                 <a:ea typeface="Calibri" pitchFamily="34" charset="-122"/>
                 <a:cs typeface="Calibri" pitchFamily="34" charset="-120"/>
               </a:rPr>
-              <a:t>Ejecutar las 31 caminatas de Operables pendientes</a:t>
+              <a:t>Ejecutar las 28 caminatas de Operables pendientes</a:t>
             </a:r>
             <a:endParaRPr lang="en-US" sz="1400" dirty="0"/>
           </a:p>
@@ -19673,7 +19631,7 @@
                 <a:ea typeface="Calibri" pitchFamily="34" charset="-122"/>
                 <a:cs typeface="Calibri" pitchFamily="34" charset="-120"/>
               </a:rPr>
-              <a:t>La Caminata 2 va en 61,3% (49/80). Sin caminata no se levanta el punch final ni se habilita la entrega de la carpeta.</a:t>
+              <a:t>La Caminata 2 va en 65% (52/80). Sin caminata no se levanta el punch final ni se habilita la entrega de la carpeta.</a:t>
             </a:r>
             <a:endParaRPr lang="en-US" sz="1100" dirty="0"/>
           </a:p>
@@ -19773,7 +19731,7 @@
                 <a:ea typeface="Calibri" pitchFamily="34" charset="-122"/>
                 <a:cs typeface="Calibri" pitchFamily="34" charset="-120"/>
               </a:rPr>
-              <a:t>Sacar del armado interno las 52 carpetas retenidas</a:t>
+              <a:t>Sacar del armado interno las 48 carpetas retenidas</a:t>
             </a:r>
             <a:endParaRPr lang="en-US" sz="1400" dirty="0"/>
           </a:p>
@@ -19815,7 +19773,7 @@
                 <a:ea typeface="Calibri" pitchFamily="34" charset="-122"/>
                 <a:cs typeface="Calibri" pitchFamily="34" charset="-120"/>
               </a:rPr>
-              <a:t>18 están en preparación y 34 sin iniciar. Solo 43 de 95 (45,3%) llegaron al cliente; 2 volvieron rechazadas y hay que rearmarlas.</a:t>
+              <a:t>17 están en preparación y 31 sin iniciar. Solo 47 de 95 (49,5%) llegaron al cliente; 2 volvieron rechazadas y hay que rearmarlas.</a:t>
             </a:r>
             <a:endParaRPr lang="en-US" sz="1100" dirty="0"/>
           </a:p>
@@ -19957,7 +19915,7 @@
                 <a:ea typeface="Calibri" pitchFamily="34" charset="-122"/>
                 <a:cs typeface="Calibri" pitchFamily="34" charset="-120"/>
               </a:rPr>
-              <a:t>Concentra 256 P1 abiertos y 8 atrasados sobre 74 subsistemas. Es la ruta crítica del proyecto.</a:t>
+              <a:t>Concentra 287 P1 abiertos y 138 atrasados sobre 74 subsistemas. Es la ruta crítica del proyecto.</a:t>
             </a:r>
             <a:endParaRPr lang="en-US" sz="1100" dirty="0"/>
           </a:p>
@@ -19996,7 +19954,7 @@
                 <a:ea typeface="Calibri" pitchFamily="34" charset="-122"/>
                 <a:cs typeface="Calibri" pitchFamily="34" charset="-120"/>
               </a:rPr>
-              <a:t>Fuente: REPORTE_GERENCIAL + Listado de Puntos Punch Consolidado · Corte 25-08-2026 · Atrasos al 31-08-2026</a:t>
+              <a:t>Fuente: REPORTE_GERENCIAL + Listado de Puntos Punch Consolidado · Corte 01-09-2026 · Atrasos al 07-09-2026</a:t>
             </a:r>
             <a:endParaRPr lang="en-US" sz="850" dirty="0"/>
           </a:p>
@@ -20349,7 +20307,7 @@
                 <a:ea typeface="Calibri" pitchFamily="34" charset="-122"/>
                 <a:cs typeface="Calibri" pitchFamily="34" charset="-120"/>
               </a:rPr>
-              <a:t>Contrato 4600029355 · 218 subsistemas en 9 áreas · 2.078 detalles de terminación levantados.</a:t>
+              <a:t>Contrato 4600029355 · 218 subsistemas en 9 áreas · 2.101 detalles de terminación levantados.</a:t>
             </a:r>
             <a:endParaRPr lang="en-US" sz="1350" dirty="0"/>
           </a:p>
@@ -20388,7 +20346,7 @@
                 <a:ea typeface="Cambria" pitchFamily="34" charset="-122"/>
                 <a:cs typeface="Cambria" pitchFamily="34" charset="-120"/>
               </a:rPr>
-              <a:t>99,1%</a:t>
+              <a:t>100%</a:t>
             </a:r>
             <a:endParaRPr lang="en-US" sz="3400" dirty="0"/>
           </a:p>
@@ -20466,7 +20424,7 @@
                 <a:ea typeface="Cambria" pitchFamily="34" charset="-122"/>
                 <a:cs typeface="Cambria" pitchFamily="34" charset="-120"/>
               </a:rPr>
-              <a:t>94,3%</a:t>
+              <a:t>100%</a:t>
             </a:r>
             <a:endParaRPr lang="en-US" sz="3400" dirty="0"/>
           </a:p>
@@ -20622,7 +20580,7 @@
                 <a:ea typeface="Cambria" pitchFamily="34" charset="-122"/>
                 <a:cs typeface="Cambria" pitchFamily="34" charset="-120"/>
               </a:rPr>
-              <a:t>92,2%</a:t>
+              <a:t>93,5%</a:t>
             </a:r>
             <a:endParaRPr lang="en-US" sz="3400" dirty="0"/>
           </a:p>
@@ -20700,7 +20658,7 @@
                 <a:ea typeface="Calibri" pitchFamily="34" charset="-122"/>
                 <a:cs typeface="Calibri" pitchFamily="34" charset="-120"/>
               </a:rPr>
-              <a:t>Atrasos calculados al 31-08-2026</a:t>
+              <a:t>Atrasos calculados al 07-09-2026</a:t>
             </a:r>
             <a:endParaRPr lang="en-US" sz="1100" dirty="0"/>
           </a:p>
@@ -20739,7 +20697,7 @@
                 <a:ea typeface="Calibri" pitchFamily="34" charset="-122"/>
                 <a:cs typeface="Calibri" pitchFamily="34" charset="-120"/>
               </a:rPr>
-              <a:t>Fuente: STATUS_SUBSISTEMAS_TALABRE + Detalle_de_Terminaciones · 218 subsistemas · 2.078 DT · Atrasos al 31-08-2026</a:t>
+              <a:t>Fuente: STATUS_SUBSISTEMAS_TALABRE + Detalle_de_Terminaciones · 218 subsistemas · 2.101 DT · Atrasos al 07-09-2026</a:t>
             </a:r>
             <a:endParaRPr lang="en-US" sz="850" dirty="0"/>
           </a:p>
@@ -21005,7 +20963,7 @@
                 <a:ea typeface="Cambria" pitchFamily="34" charset="-122"/>
                 <a:cs typeface="Cambria" pitchFamily="34" charset="-120"/>
               </a:rPr>
-              <a:t>99,1%</a:t>
+              <a:t>100%</a:t>
             </a:r>
             <a:endParaRPr lang="en-US" sz="3800" dirty="0"/>
           </a:p>
@@ -21044,7 +21002,7 @@
                 <a:ea typeface="Calibri" pitchFamily="34" charset="-122"/>
                 <a:cs typeface="Calibri" pitchFamily="34" charset="-120"/>
               </a:rPr>
-              <a:t>215/217 exigibles</a:t>
+              <a:t>215/215 exigibles</a:t>
             </a:r>
             <a:endParaRPr lang="en-US" sz="1300" dirty="0"/>
           </a:p>
@@ -21125,7 +21083,7 @@
                 <a:ea typeface="Calibri" pitchFamily="34" charset="-122"/>
                 <a:cs typeface="Calibri" pitchFamily="34" charset="-120"/>
               </a:rPr>
-              <a:t>98,6% del universo · 1 programadas en plazo · 2 con agenda vencida · 0 sin programar</a:t>
+              <a:t>98,6% del universo · 3 programadas en plazo · 0 sin programar</a:t>
             </a:r>
             <a:endParaRPr lang="en-US" sz="950" dirty="0"/>
           </a:p>
@@ -21218,7 +21176,7 @@
                 <a:ea typeface="Cambria" pitchFamily="34" charset="-122"/>
                 <a:cs typeface="Cambria" pitchFamily="34" charset="-120"/>
               </a:rPr>
-              <a:t>94,3%</a:t>
+              <a:t>100%</a:t>
             </a:r>
             <a:endParaRPr lang="en-US" sz="3800" dirty="0"/>
           </a:p>
@@ -21257,7 +21215,7 @@
                 <a:ea typeface="Calibri" pitchFamily="34" charset="-122"/>
                 <a:cs typeface="Calibri" pitchFamily="34" charset="-120"/>
               </a:rPr>
-              <a:t>198/210 exigibles</a:t>
+              <a:t>205/205 exigibles</a:t>
             </a:r>
             <a:endParaRPr lang="en-US" sz="1300" dirty="0"/>
           </a:p>
@@ -21338,7 +21296,7 @@
                 <a:ea typeface="Calibri" pitchFamily="34" charset="-122"/>
                 <a:cs typeface="Calibri" pitchFamily="34" charset="-120"/>
               </a:rPr>
-              <a:t>90,8% del universo · 8 programadas en plazo · 12 con agenda vencida · 0 sin programar</a:t>
+              <a:t>94% del universo · 13 programadas en plazo · 0 sin programar</a:t>
             </a:r>
             <a:endParaRPr lang="en-US" sz="950" dirty="0"/>
           </a:p>
@@ -21644,7 +21602,7 @@
                 <a:ea typeface="Cambria" pitchFamily="34" charset="-122"/>
                 <a:cs typeface="Cambria" pitchFamily="34" charset="-120"/>
               </a:rPr>
-              <a:t>93,2%</a:t>
+              <a:t>91,7%</a:t>
             </a:r>
             <a:endParaRPr lang="en-US" sz="3800" dirty="0"/>
           </a:p>
@@ -21683,7 +21641,7 @@
                 <a:ea typeface="Calibri" pitchFamily="34" charset="-122"/>
                 <a:cs typeface="Calibri" pitchFamily="34" charset="-120"/>
               </a:rPr>
-              <a:t>354/380</a:t>
+              <a:t>365/398</a:t>
             </a:r>
             <a:endParaRPr lang="en-US" sz="1300" dirty="0"/>
           </a:p>
@@ -21764,7 +21722,7 @@
                 <a:ea typeface="Calibri" pitchFamily="34" charset="-122"/>
                 <a:cs typeface="Calibri" pitchFamily="34" charset="-120"/>
               </a:rPr>
-              <a:t>26 abiertos · 22 atrasados</a:t>
+              <a:t>33 abiertos · 17 atrasados</a:t>
             </a:r>
             <a:endParaRPr lang="en-US" sz="950" dirty="0"/>
           </a:p>
@@ -21904,7 +21862,7 @@
                 <a:ea typeface="Calibri" pitchFamily="34" charset="-122"/>
                 <a:cs typeface="Calibri" pitchFamily="34" charset="-120"/>
               </a:rPr>
-              <a:t>93,2% de cierre en P1 (26 abiertos), pero 326 DT abiertos entre P2, P3 y P4 sobre un total de 352.</a:t>
+              <a:t>91,7% de cierre en P1 (33 abiertos), pero 299 DT abiertos entre P2, P3 y P4 sobre un total de 332.</a:t>
             </a:r>
             <a:endParaRPr lang="en-US" sz="1150" dirty="0"/>
           </a:p>
@@ -21983,7 +21941,7 @@
                 <a:ea typeface="Calibri" pitchFamily="34" charset="-122"/>
                 <a:cs typeface="Calibri" pitchFamily="34" charset="-120"/>
               </a:rPr>
-              <a:t>125 DT con la fecha de compromiso vencida; mediana de 28 días y el más antiguo lleva 165. Los 211 abiertos sin fecha de compromiso no se cuentan como atrasados.</a:t>
+              <a:t>101 DT con la fecha de compromiso vencida; mediana de 33 días y el más antiguo lleva 172. Los 211 abiertos sin fecha de compromiso no se cuentan como atrasados.</a:t>
             </a:r>
             <a:endParaRPr lang="en-US" sz="1150" dirty="0"/>
           </a:p>
@@ -22045,7 +22003,7 @@
                 <a:ea typeface="Calibri" pitchFamily="34" charset="-122"/>
                 <a:cs typeface="Calibri" pitchFamily="34" charset="-120"/>
               </a:rPr>
-              <a:t>Caminatas: 99,1% y 94,3% de lo exigible (C1 y C2).  </a:t>
+              <a:t>Caminatas: 100% y 100% de lo exigible (C1 y C2).  </a:t>
             </a:r>
             <a:pPr indent="0" marL="0">
               <a:lnSpc>
@@ -22062,7 +22020,7 @@
                 <a:ea typeface="Calibri" pitchFamily="34" charset="-122"/>
                 <a:cs typeface="Calibri" pitchFamily="34" charset="-120"/>
               </a:rPr>
-              <a:t>Caminata 1: 215/217 exigibles, 2 con agenda vencida. Caminata 2: 198/210, con 8 agendadas en plazo y 0 sin programar.</a:t>
+              <a:t>Caminata 1: 215/215 exigibles. Caminata 2: 205/205, con 13 agendadas en plazo y 0 sin programar.</a:t>
             </a:r>
             <a:endParaRPr lang="en-US" sz="1150" dirty="0"/>
           </a:p>
@@ -22180,7 +22138,7 @@
                 <a:ea typeface="Calibri" pitchFamily="34" charset="-122"/>
                 <a:cs typeface="Calibri" pitchFamily="34" charset="-120"/>
               </a:rPr>
-              <a:t>Fuente: STATUS_SUBSISTEMAS_TALABRE + Detalle_de_Terminaciones · 218 subsistemas · 2.078 DT · Atrasos al 31-08-2026</a:t>
+              <a:t>Fuente: STATUS_SUBSISTEMAS_TALABRE + Detalle_de_Terminaciones · 218 subsistemas · 2.101 DT · Atrasos al 07-09-2026</a:t>
             </a:r>
             <a:endParaRPr lang="en-US" sz="850" dirty="0"/>
           </a:p>
@@ -22431,7 +22389,7 @@
                 <a:ea typeface="Calibri" pitchFamily="34" charset="-122"/>
                 <a:cs typeface="Calibri" pitchFamily="34" charset="-120"/>
               </a:rPr>
-              <a:t>Caminata 2: 94,3% de lo exigible (198/210) — se descuentan 8 agendadas a fecha futura, que no son incumplimiento al corte. Talabre mide la carpeta como % de avance (PEC), no como estado de aprobación.</a:t>
+              <a:t>Caminata 2: 100% de lo exigible (205/205) — se descuentan 13 agendadas a fecha futura, que no son incumplimiento al corte. Talabre mide la carpeta como % de avance (PEC), no como estado de aprobación.</a:t>
             </a:r>
             <a:endParaRPr lang="en-US" sz="1350" dirty="0"/>
           </a:p>
@@ -22502,7 +22460,7 @@
                 <a:ea typeface="Calibri" pitchFamily="34" charset="-122"/>
                 <a:cs typeface="Calibri" pitchFamily="34" charset="-120"/>
               </a:rPr>
-              <a:t>Fuente: STATUS_SUBSISTEMAS_TALABRE + Detalle_de_Terminaciones · 218 subsistemas · 2.078 DT · Atrasos al 31-08-2026</a:t>
+              <a:t>Fuente: STATUS_SUBSISTEMAS_TALABRE + Detalle_de_Terminaciones · 218 subsistemas · 2.101 DT · Atrasos al 07-09-2026</a:t>
             </a:r>
             <a:endParaRPr lang="en-US" sz="850" dirty="0"/>
           </a:p>
@@ -22753,7 +22711,7 @@
                 <a:ea typeface="Calibri" pitchFamily="34" charset="-122"/>
                 <a:cs typeface="Calibri" pitchFamily="34" charset="-120"/>
               </a:rPr>
-              <a:t>2.078 DT levantados; 83,1% cerrados. Atrasado = DT abierto cuya fecha de compromiso de cierre ya venció al 31-08-2026.</a:t>
+              <a:t>2.101 DT levantados; 84,2% cerrados. Atrasado = DT abierto cuya fecha de compromiso de cierre ya venció al 07-09-2026.</a:t>
             </a:r>
             <a:endParaRPr lang="en-US" sz="1350" dirty="0"/>
           </a:p>
@@ -22908,7 +22866,7 @@
                 <a:ea typeface="Calibri" pitchFamily="34" charset="-122"/>
                 <a:cs typeface="Calibri" pitchFamily="34" charset="-120"/>
               </a:rPr>
-              <a:t>354/380</a:t>
+              <a:t>365/398</a:t>
             </a:r>
             <a:endParaRPr lang="en-US" sz="1050" dirty="0"/>
           </a:p>
@@ -22947,7 +22905,7 @@
                 <a:ea typeface="Calibri" pitchFamily="34" charset="-122"/>
                 <a:cs typeface="Calibri" pitchFamily="34" charset="-120"/>
               </a:rPr>
-              <a:t>93,2%</a:t>
+              <a:t>91,7%</a:t>
             </a:r>
             <a:endParaRPr lang="en-US" sz="1100" dirty="0"/>
           </a:p>
@@ -22982,7 +22940,7 @@
         <p:spPr>
           <a:xfrm>
             <a:off x="7936992" y="2688336"/>
-            <a:ext cx="3323661" cy="118872"/>
+            <a:ext cx="3270169" cy="118872"/>
           </a:xfrm>
           <a:prstGeom prst="rect">
             <a:avLst/>
@@ -23065,7 +23023,7 @@
                 <a:ea typeface="Calibri" pitchFamily="34" charset="-122"/>
                 <a:cs typeface="Calibri" pitchFamily="34" charset="-120"/>
               </a:rPr>
-              <a:t>1.288/1.400</a:t>
+              <a:t>1.320/1.405</a:t>
             </a:r>
             <a:endParaRPr lang="en-US" sz="1050" dirty="0"/>
           </a:p>
@@ -23104,7 +23062,7 @@
                 <a:ea typeface="Calibri" pitchFamily="34" charset="-122"/>
                 <a:cs typeface="Calibri" pitchFamily="34" charset="-120"/>
               </a:rPr>
-              <a:t>92%</a:t>
+              <a:t>94%</a:t>
             </a:r>
             <a:endParaRPr lang="en-US" sz="1100" dirty="0"/>
           </a:p>
@@ -23139,7 +23097,7 @@
         <p:spPr>
           <a:xfrm>
             <a:off x="7936992" y="3200400"/>
-            <a:ext cx="3280867" cy="118872"/>
+            <a:ext cx="3352190" cy="118872"/>
           </a:xfrm>
           <a:prstGeom prst="rect">
             <a:avLst/>
@@ -23678,7 +23636,7 @@
                 <a:ea typeface="Calibri" pitchFamily="34" charset="-122"/>
                 <a:cs typeface="Calibri" pitchFamily="34" charset="-120"/>
               </a:rPr>
-              <a:t>Mediana de 28 días vencidos; el más antiguo lleva 165. 69 entre 1-30 días, 46 entre 31-90 días, 10 entre 91-180 días.</a:t>
+              <a:t>Mediana de 33 días vencidos; el más antiguo lleva 172. 21 entre 1-30 días, 71 entre 31-90 días, 9 entre 91-180 días.</a:t>
             </a:r>
             <a:endParaRPr lang="en-US" sz="1150" dirty="0"/>
           </a:p>
@@ -23717,7 +23675,7 @@
                 <a:ea typeface="Calibri" pitchFamily="34" charset="-122"/>
                 <a:cs typeface="Calibri" pitchFamily="34" charset="-120"/>
               </a:rPr>
-              <a:t>Fuente: STATUS_SUBSISTEMAS_TALABRE + Detalle_de_Terminaciones · 218 subsistemas · 2.078 DT · Atrasos al 31-08-2026</a:t>
+              <a:t>Fuente: STATUS_SUBSISTEMAS_TALABRE + Detalle_de_Terminaciones · 218 subsistemas · 2.101 DT · Atrasos al 07-09-2026</a:t>
             </a:r>
             <a:endParaRPr lang="en-US" sz="850" dirty="0"/>
           </a:p>
